--- a/deliverables/showcase/poster_jiaming_wei.pptx
+++ b/deliverables/showcase/poster_jiaming_wei.pptx
@@ -3271,8 +3271,8 @@
         </p:nvSpPr>
         <p:spPr>
           <a:xfrm>
-            <a:off x="3135215" y="360000"/>
-            <a:ext cx="15526985" cy="1584000"/>
+            <a:off x="3135215" y="288000"/>
+            <a:ext cx="15526985" cy="1656000"/>
           </a:xfrm>
           <a:prstGeom prst="rect">
             <a:avLst/>
@@ -3297,7 +3297,23 @@
                 </a:solidFill>
                 <a:latin typeface="Georgia"/>
               </a:rPr>
-              <a:t>Can a web agent learn when a screenshot is worth the cost?</a:t>
+              <a:t>Look, read, or both?</a:t>
+            </a:r>
+          </a:p>
+          <a:p>
+            <a:pPr>
+              <a:lnSpc>
+                <a:spcPct val="106000"/>
+              </a:lnSpc>
+            </a:pPr>
+            <a:r>
+              <a:rPr sz="4096" b="0" i="0">
+                <a:solidFill>
+                  <a:srgbClr val="FFFFFF"/>
+                </a:solidFill>
+                <a:latin typeface="Georgia"/>
+              </a:rPr>
+              <a:t>Web agents can't yet learn how to see a page</a:t>
             </a:r>
           </a:p>
         </p:txBody>
@@ -3523,7 +3539,7 @@
                 </a:solidFill>
                 <a:latin typeface="Georgia"/>
               </a:rPr>
-              <a:t>Choosing the page representation per task could solve up to 16 more tasks in 100 than the best fixed mode — yet none of 8 learned routers beat always using the cheapest mode on both success and cost.</a:t>
+              <a:t>Seen the right way, a page would let the agent solve up to 16 more tasks in 100 than the best fixed mode — yet none of 8 learned routers beat always using the cheapest mode on both success and cost.</a:t>
             </a:r>
           </a:p>
         </p:txBody>
@@ -3841,7 +3857,7 @@
                 </a:solidFill>
                 <a:latin typeface="Consolas"/>
               </a:rPr>
-              <a:t>HOW A WEB AGENT SEES A PAGE, AND WHAT WE COMPARED</a:t>
+              <a:t>WHERE THE DECISION SITS IN THE AGENT LOOP</a:t>
             </a:r>
             <a:endParaRPr sz="1412" b="1" spc="180" dirty="0">
               <a:solidFill>
@@ -3944,14 +3960,190 @@
       </p:sp>
       <p:sp>
         <p:nvSpPr>
-          <p:cNvPr id="77" name="Rectangle 76"/>
+          <p:cNvPr id="77" name="Right Arrow 76"/>
           <p:cNvSpPr/>
           <p:nvPr/>
         </p:nvSpPr>
         <p:spPr>
           <a:xfrm>
+            <a:off x="3895200" y="7452000"/>
+            <a:ext cx="360000" cy="504000"/>
+          </a:xfrm>
+          <a:prstGeom prst="rightArrow">
+            <a:avLst/>
+          </a:prstGeom>
+          <a:solidFill>
+            <a:srgbClr val="C9CFE0"/>
+          </a:solidFill>
+          <a:ln>
+            <a:noFill/>
+          </a:ln>
+          <a:effectLst/>
+        </p:spPr>
+        <p:style>
+          <a:lnRef idx="1">
+            <a:schemeClr val="accent1"/>
+          </a:lnRef>
+          <a:fillRef idx="3">
+            <a:schemeClr val="accent1"/>
+          </a:fillRef>
+          <a:effectRef idx="2">
+            <a:schemeClr val="accent1"/>
+          </a:effectRef>
+          <a:fontRef idx="minor">
+            <a:schemeClr val="lt1"/>
+          </a:fontRef>
+        </p:style>
+        <p:txBody>
+          <a:bodyPr rtlCol="0" anchor="ctr"/>
+          <a:lstStyle/>
+          <a:p>
+            <a:pPr algn="ctr"/>
+          </a:p>
+        </p:txBody>
+      </p:sp>
+      <p:sp>
+        <p:nvSpPr>
+          <p:cNvPr id="78" name="Right Arrow 77"/>
+          <p:cNvSpPr/>
+          <p:nvPr/>
+        </p:nvSpPr>
+        <p:spPr>
+          <a:xfrm>
+            <a:off x="8719200" y="7452000"/>
+            <a:ext cx="360000" cy="504000"/>
+          </a:xfrm>
+          <a:prstGeom prst="rightArrow">
+            <a:avLst/>
+          </a:prstGeom>
+          <a:solidFill>
+            <a:srgbClr val="C9CFE0"/>
+          </a:solidFill>
+          <a:ln>
+            <a:noFill/>
+          </a:ln>
+          <a:effectLst/>
+        </p:spPr>
+        <p:style>
+          <a:lnRef idx="1">
+            <a:schemeClr val="accent1"/>
+          </a:lnRef>
+          <a:fillRef idx="3">
+            <a:schemeClr val="accent1"/>
+          </a:fillRef>
+          <a:effectRef idx="2">
+            <a:schemeClr val="accent1"/>
+          </a:effectRef>
+          <a:fontRef idx="minor">
+            <a:schemeClr val="lt1"/>
+          </a:fontRef>
+        </p:style>
+        <p:txBody>
+          <a:bodyPr rtlCol="0" anchor="ctr"/>
+          <a:lstStyle/>
+          <a:p>
+            <a:pPr algn="ctr"/>
+          </a:p>
+        </p:txBody>
+      </p:sp>
+      <p:sp>
+        <p:nvSpPr>
+          <p:cNvPr id="79" name="Right Arrow 78"/>
+          <p:cNvSpPr/>
+          <p:nvPr/>
+        </p:nvSpPr>
+        <p:spPr>
+          <a:xfrm>
+            <a:off x="13471200" y="7452000"/>
+            <a:ext cx="360000" cy="504000"/>
+          </a:xfrm>
+          <a:prstGeom prst="rightArrow">
+            <a:avLst/>
+          </a:prstGeom>
+          <a:solidFill>
+            <a:srgbClr val="C9CFE0"/>
+          </a:solidFill>
+          <a:ln>
+            <a:noFill/>
+          </a:ln>
+          <a:effectLst/>
+        </p:spPr>
+        <p:style>
+          <a:lnRef idx="1">
+            <a:schemeClr val="accent1"/>
+          </a:lnRef>
+          <a:fillRef idx="3">
+            <a:schemeClr val="accent1"/>
+          </a:fillRef>
+          <a:effectRef idx="2">
+            <a:schemeClr val="accent1"/>
+          </a:effectRef>
+          <a:fontRef idx="minor">
+            <a:schemeClr val="lt1"/>
+          </a:fontRef>
+        </p:style>
+        <p:txBody>
+          <a:bodyPr rtlCol="0" anchor="ctr"/>
+          <a:lstStyle/>
+          <a:p>
+            <a:pPr algn="ctr"/>
+          </a:p>
+        </p:txBody>
+      </p:sp>
+      <p:sp>
+        <p:nvSpPr>
+          <p:cNvPr id="80" name="Right Arrow 79"/>
+          <p:cNvSpPr/>
+          <p:nvPr/>
+        </p:nvSpPr>
+        <p:spPr>
+          <a:xfrm>
+            <a:off x="17287200" y="7452000"/>
+            <a:ext cx="360000" cy="504000"/>
+          </a:xfrm>
+          <a:prstGeom prst="rightArrow">
+            <a:avLst/>
+          </a:prstGeom>
+          <a:solidFill>
+            <a:srgbClr val="C9CFE0"/>
+          </a:solidFill>
+          <a:ln>
+            <a:noFill/>
+          </a:ln>
+          <a:effectLst/>
+        </p:spPr>
+        <p:style>
+          <a:lnRef idx="1">
+            <a:schemeClr val="accent1"/>
+          </a:lnRef>
+          <a:fillRef idx="3">
+            <a:schemeClr val="accent1"/>
+          </a:fillRef>
+          <a:effectRef idx="2">
+            <a:schemeClr val="accent1"/>
+          </a:effectRef>
+          <a:fontRef idx="minor">
+            <a:schemeClr val="lt1"/>
+          </a:fontRef>
+        </p:style>
+        <p:txBody>
+          <a:bodyPr rtlCol="0" anchor="ctr"/>
+          <a:lstStyle/>
+          <a:p>
+            <a:pPr algn="ctr"/>
+          </a:p>
+        </p:txBody>
+      </p:sp>
+      <p:sp>
+        <p:nvSpPr>
+          <p:cNvPr id="81" name="Rectangle 80"/>
+          <p:cNvSpPr/>
+          <p:nvPr/>
+        </p:nvSpPr>
+        <p:spPr>
+          <a:xfrm>
             <a:off x="727200" y="5580000"/>
-            <a:ext cx="20062800" cy="7686018"/>
+            <a:ext cx="3096000" cy="4248000"/>
           </a:xfrm>
           <a:prstGeom prst="rect">
             <a:avLst/>
@@ -3990,14 +4182,14 @@
       </p:sp>
       <p:sp>
         <p:nvSpPr>
-          <p:cNvPr id="78" name="Rectangle 77"/>
+          <p:cNvPr id="82" name="Rectangle 81"/>
           <p:cNvSpPr/>
           <p:nvPr/>
         </p:nvSpPr>
         <p:spPr>
           <a:xfrm>
             <a:off x="727200" y="5580000"/>
-            <a:ext cx="20062800" cy="50400"/>
+            <a:ext cx="3096000" cy="50400"/>
           </a:xfrm>
           <a:prstGeom prst="rect">
             <a:avLst/>
@@ -4032,40 +4224,100 @@
           </a:p>
         </p:txBody>
       </p:sp>
-      <p:pic>
-        <p:nvPicPr>
-          <p:cNvPr id="79" name="Picture 78" descr="poster_overview.png"/>
-          <p:cNvPicPr>
-            <a:picLocks noChangeAspect="1"/>
-          </p:cNvPicPr>
-          <p:nvPr/>
-        </p:nvPicPr>
-        <p:blipFill>
-          <a:blip r:embed="rId5"/>
-          <a:stretch>
-            <a:fillRect/>
-          </a:stretch>
-        </p:blipFill>
-        <p:spPr>
-          <a:xfrm>
-            <a:off x="835200" y="5738400"/>
-            <a:ext cx="19846800" cy="7419618"/>
-          </a:xfrm>
-          <a:prstGeom prst="rect">
-            <a:avLst/>
-          </a:prstGeom>
-        </p:spPr>
-      </p:pic>
-      <p:sp>
-        <p:nvSpPr>
-          <p:cNvPr id="80" name="TextBox 79"/>
+      <p:sp>
+        <p:nvSpPr>
+          <p:cNvPr id="83" name="TextBox 82"/>
           <p:cNvSpPr txBox="1"/>
           <p:nvPr/>
         </p:nvSpPr>
         <p:spPr>
           <a:xfrm>
-            <a:off x="727200" y="13356018"/>
-            <a:ext cx="20062800" cy="511369"/>
+            <a:off x="907200" y="5724000"/>
+            <a:ext cx="2736000" cy="216000"/>
+          </a:xfrm>
+          <a:prstGeom prst="rect">
+            <a:avLst/>
+          </a:prstGeom>
+          <a:noFill/>
+        </p:spPr>
+        <p:txBody>
+          <a:bodyPr wrap="square" lIns="0" rIns="0" tIns="0" bIns="0">
+            <a:spAutoFit/>
+          </a:bodyPr>
+          <a:lstStyle/>
+          <a:p>
+            <a:pPr algn="l">
+              <a:lnSpc>
+                <a:spcPct val="120000"/>
+              </a:lnSpc>
+              <a:spcAft>
+                <a:spcPts val="0"/>
+              </a:spcAft>
+            </a:pPr>
+            <a:r>
+              <a:rPr sz="1059" b="0" i="0">
+                <a:solidFill>
+                  <a:srgbClr val="5D6787"/>
+                </a:solidFill>
+                <a:latin typeface="Consolas"/>
+              </a:rPr>
+              <a:t>TASK + LIVE PAGE</a:t>
+            </a:r>
+          </a:p>
+        </p:txBody>
+      </p:sp>
+      <p:sp>
+        <p:nvSpPr>
+          <p:cNvPr id="84" name="TextBox 83"/>
+          <p:cNvSpPr txBox="1"/>
+          <p:nvPr/>
+        </p:nvSpPr>
+        <p:spPr>
+          <a:xfrm>
+            <a:off x="907200" y="5958000"/>
+            <a:ext cx="2736000" cy="968345"/>
+          </a:xfrm>
+          <a:prstGeom prst="rect">
+            <a:avLst/>
+          </a:prstGeom>
+          <a:noFill/>
+        </p:spPr>
+        <p:txBody>
+          <a:bodyPr wrap="square" lIns="0" rIns="0" tIns="0" bIns="0">
+            <a:spAutoFit/>
+          </a:bodyPr>
+          <a:lstStyle/>
+          <a:p>
+            <a:pPr algn="l">
+              <a:lnSpc>
+                <a:spcPct val="120000"/>
+              </a:lnSpc>
+              <a:spcAft>
+                <a:spcPts val="992"/>
+              </a:spcAft>
+            </a:pPr>
+            <a:r>
+              <a:rPr sz="1764" b="0" i="0">
+                <a:solidFill>
+                  <a:srgbClr val="12162E"/>
+                </a:solidFill>
+                <a:latin typeface="Arial"/>
+              </a:rPr>
+              <a:t>“Show me the cheapest bike with red handlebars between $900–950.”</a:t>
+            </a:r>
+          </a:p>
+        </p:txBody>
+      </p:sp>
+      <p:sp>
+        <p:nvSpPr>
+          <p:cNvPr id="85" name="TextBox 84"/>
+          <p:cNvSpPr txBox="1"/>
+          <p:nvPr/>
+        </p:nvSpPr>
+        <p:spPr>
+          <a:xfrm>
+            <a:off x="907200" y="7034345"/>
+            <a:ext cx="2736000" cy="767053"/>
           </a:xfrm>
           <a:prstGeom prst="rect">
             <a:avLst/>
@@ -4087,45 +4339,39 @@
               </a:spcAft>
             </a:pPr>
             <a:r>
-              <a:rPr sz="1271" b="1" i="0">
+              <a:rPr sz="1271" b="0" i="0">
                 <a:solidFill>
                   <a:srgbClr val="5D6787"/>
                 </a:solidFill>
                 <a:latin typeface="Arial"/>
               </a:rPr>
-              <a:t>Fig 1.</a:t>
-            </a:r>
-            <a:r>
-              <a:rPr sz="1271" b="0" i="0">
-                <a:solidFill>
-                  <a:srgbClr val="5D6787"/>
-                </a:solidFill>
-                <a:latin typeface="Arial"/>
-              </a:rPr>
-              <a:t> The agent (①) is held fixed — same task, actions, step limit and cost accounting — and only the page encoding it is handed (②) varies: six observation modes, DOM, three text-only variants (P-text, P-prompt, P-SoM), SoM and Vision. Each runs on 8 website–model settings from VisualWebArena and WebArena (8,934 episodes). Three policies (③) are compared: a fixed mode, a hindsight oracle that picks the best mode per task after the fact, and a learned router that must choose before the task runs.</a:t>
-            </a:r>
-          </a:p>
-        </p:txBody>
-      </p:sp>
-      <p:sp>
-        <p:nvSpPr>
-          <p:cNvPr id="14" name="Rectangle 13"/>
+              <a:t>Part of the intent is in the pictures, part in the text — and which part matters changes task by task.</a:t>
+            </a:r>
+          </a:p>
+        </p:txBody>
+      </p:sp>
+      <p:sp>
+        <p:nvSpPr>
+          <p:cNvPr id="86" name="Rectangle 85"/>
           <p:cNvSpPr/>
           <p:nvPr/>
         </p:nvSpPr>
         <p:spPr>
           <a:xfrm>
-            <a:off x="727200" y="14112000"/>
-            <a:ext cx="177988" cy="177988"/>
+            <a:off x="4327200" y="5580000"/>
+            <a:ext cx="4320000" cy="4248000"/>
           </a:xfrm>
           <a:prstGeom prst="rect">
             <a:avLst/>
           </a:prstGeom>
           <a:solidFill>
-            <a:srgbClr val="AB5FCE"/>
+            <a:srgbClr val="F7F9FD"/>
           </a:solidFill>
-          <a:ln>
-            <a:noFill/>
+          <a:ln w="8890">
+            <a:solidFill>
+              <a:srgbClr val="5049F9"/>
+            </a:solidFill>
+            <a:prstDash val="dash"/>
           </a:ln>
           <a:effectLst/>
         </p:spPr>
@@ -4144,315 +4390,23 @@
           </a:fontRef>
         </p:style>
         <p:txBody>
-          <a:bodyPr rtlCol="0" anchor="ctr"/>
+          <a:bodyPr rtlCol="0" anchor="ctr" wrap="square"/>
           <a:lstStyle/>
           <a:p>
             <a:pPr algn="ctr"/>
-            <a:endParaRPr/>
-          </a:p>
-        </p:txBody>
-      </p:sp>
-      <p:sp>
-        <p:nvSpPr>
-          <p:cNvPr id="15" name="TextBox 14"/>
+          </a:p>
+        </p:txBody>
+      </p:sp>
+      <p:sp>
+        <p:nvSpPr>
+          <p:cNvPr id="87" name="TextBox 86"/>
           <p:cNvSpPr txBox="1"/>
           <p:nvPr/>
         </p:nvSpPr>
         <p:spPr>
           <a:xfrm>
-            <a:off x="1032323" y="14068800"/>
-            <a:ext cx="6144827" cy="238912"/>
-          </a:xfrm>
-          <a:prstGeom prst="rect">
-            <a:avLst/>
-          </a:prstGeom>
-          <a:noFill/>
-        </p:spPr>
-        <p:txBody>
-          <a:bodyPr wrap="square" lIns="0" tIns="0" rIns="0" bIns="0" anchor="t">
-            <a:spAutoFit/>
-          </a:bodyPr>
-          <a:lstStyle/>
-          <a:p>
-            <a:pPr algn="l">
-              <a:lnSpc>
-                <a:spcPct val="118000"/>
-              </a:lnSpc>
-            </a:pPr>
-            <a:r>
-              <a:rPr sz="1412" b="1" i="0">
-                <a:solidFill>
-                  <a:srgbClr val="141E41"/>
-                </a:solidFill>
-                <a:latin typeface="Consolas"/>
-              </a:rPr>
-              <a:t>THE PROBLEM</a:t>
-            </a:r>
-            <a:endParaRPr sz="1412" b="1" spc="180" dirty="0">
-              <a:solidFill>
-                <a:srgbClr val="141E41"/>
-              </a:solidFill>
-              <a:latin typeface="Consolas"/>
-            </a:endParaRPr>
-          </a:p>
-        </p:txBody>
-      </p:sp>
-      <p:sp>
-        <p:nvSpPr>
-          <p:cNvPr id="16" name="Rectangle 15"/>
-          <p:cNvSpPr/>
-          <p:nvPr/>
-        </p:nvSpPr>
-        <p:spPr>
-          <a:xfrm>
-            <a:off x="727200" y="14429836"/>
-            <a:ext cx="1169636" cy="35597"/>
-          </a:xfrm>
-          <a:prstGeom prst="rect">
-            <a:avLst/>
-          </a:prstGeom>
-          <a:solidFill>
-            <a:srgbClr val="141E41"/>
-          </a:solidFill>
-          <a:ln>
-            <a:noFill/>
-          </a:ln>
-          <a:effectLst/>
-        </p:spPr>
-        <p:style>
-          <a:lnRef idx="1">
-            <a:schemeClr val="accent1"/>
-          </a:lnRef>
-          <a:fillRef idx="3">
-            <a:schemeClr val="accent1"/>
-          </a:fillRef>
-          <a:effectRef idx="2">
-            <a:schemeClr val="accent1"/>
-          </a:effectRef>
-          <a:fontRef idx="minor">
-            <a:schemeClr val="lt1"/>
-          </a:fontRef>
-        </p:style>
-        <p:txBody>
-          <a:bodyPr rtlCol="0" anchor="ctr"/>
-          <a:lstStyle/>
-          <a:p>
-            <a:pPr algn="ctr"/>
-            <a:endParaRPr/>
-          </a:p>
-        </p:txBody>
-      </p:sp>
-      <p:sp>
-        <p:nvSpPr>
-          <p:cNvPr id="17" name="Rectangle 16"/>
-          <p:cNvSpPr/>
-          <p:nvPr/>
-        </p:nvSpPr>
-        <p:spPr>
-          <a:xfrm>
-            <a:off x="1896836" y="14440007"/>
-            <a:ext cx="5281564" cy="15256"/>
-          </a:xfrm>
-          <a:prstGeom prst="rect">
-            <a:avLst/>
-          </a:prstGeom>
-          <a:solidFill>
-            <a:srgbClr val="DDE3F2"/>
-          </a:solidFill>
-          <a:ln>
-            <a:noFill/>
-          </a:ln>
-          <a:effectLst/>
-        </p:spPr>
-        <p:style>
-          <a:lnRef idx="1">
-            <a:schemeClr val="accent1"/>
-          </a:lnRef>
-          <a:fillRef idx="3">
-            <a:schemeClr val="accent1"/>
-          </a:fillRef>
-          <a:effectRef idx="2">
-            <a:schemeClr val="accent1"/>
-          </a:effectRef>
-          <a:fontRef idx="minor">
-            <a:schemeClr val="lt1"/>
-          </a:fontRef>
-        </p:style>
-        <p:txBody>
-          <a:bodyPr rtlCol="0" anchor="ctr"/>
-          <a:lstStyle/>
-          <a:p>
-            <a:pPr algn="ctr"/>
-            <a:endParaRPr/>
-          </a:p>
-        </p:txBody>
-      </p:sp>
-      <p:sp>
-        <p:nvSpPr>
-          <p:cNvPr id="81" name="TextBox 80"/>
-          <p:cNvSpPr txBox="1"/>
-          <p:nvPr/>
-        </p:nvSpPr>
-        <p:spPr>
-          <a:xfrm>
-            <a:off x="727200" y="14652000"/>
-            <a:ext cx="6451200" cy="1739908"/>
-          </a:xfrm>
-          <a:prstGeom prst="rect">
-            <a:avLst/>
-          </a:prstGeom>
-          <a:noFill/>
-        </p:spPr>
-        <p:txBody>
-          <a:bodyPr wrap="square" lIns="0" rIns="0" tIns="0" bIns="0">
-            <a:spAutoFit/>
-          </a:bodyPr>
-          <a:lstStyle/>
-          <a:p>
-            <a:pPr algn="l">
-              <a:lnSpc>
-                <a:spcPct val="120000"/>
-              </a:lnSpc>
-              <a:spcAft>
-                <a:spcPts val="992"/>
-              </a:spcAft>
-            </a:pPr>
-            <a:r>
-              <a:rPr sz="1764" b="0" i="0">
-                <a:solidFill>
-                  <a:srgbClr val="12162E"/>
-                </a:solidFill>
-                <a:latin typeface="Arial"/>
-              </a:rPr>
-              <a:t>A web agent looks at a page, decides what to click or type, acts, and repeats. Before each step it must be handed some encoding of the page.</a:t>
-            </a:r>
-          </a:p>
-          <a:p>
-            <a:pPr algn="l">
-              <a:lnSpc>
-                <a:spcPct val="120000"/>
-              </a:lnSpc>
-              <a:spcAft>
-                <a:spcPts val="992"/>
-              </a:spcAft>
-            </a:pPr>
-            <a:r>
-              <a:rPr sz="1764" b="0" i="0">
-                <a:solidFill>
-                  <a:srgbClr val="12162E"/>
-                </a:solidFill>
-                <a:latin typeface="Arial"/>
-              </a:rPr>
-              <a:t>That encoding is usually chosen once and paid for at every step: cheap text, an expensive annotated screenshot, or both.</a:t>
-            </a:r>
-          </a:p>
-        </p:txBody>
-      </p:sp>
-      <p:sp>
-        <p:nvSpPr>
-          <p:cNvPr id="82" name="TextBox 81"/>
-          <p:cNvSpPr txBox="1"/>
-          <p:nvPr/>
-        </p:nvSpPr>
-        <p:spPr>
-          <a:xfrm>
-            <a:off x="727200" y="16535908"/>
-            <a:ext cx="6451200" cy="255684"/>
-          </a:xfrm>
-          <a:prstGeom prst="rect">
-            <a:avLst/>
-          </a:prstGeom>
-          <a:noFill/>
-        </p:spPr>
-        <p:txBody>
-          <a:bodyPr wrap="square" lIns="0" rIns="0" tIns="0" bIns="0">
-            <a:spAutoFit/>
-          </a:bodyPr>
-          <a:lstStyle/>
-          <a:p>
-            <a:pPr algn="l">
-              <a:lnSpc>
-                <a:spcPct val="132000"/>
-              </a:lnSpc>
-              <a:spcAft>
-                <a:spcPts val="425"/>
-              </a:spcAft>
-            </a:pPr>
-            <a:r>
-              <a:rPr sz="1271" b="1" i="0">
-                <a:solidFill>
-                  <a:srgbClr val="5D6787"/>
-                </a:solidFill>
-                <a:latin typeface="Arial"/>
-              </a:rPr>
-              <a:t>The same page, sent three ways</a:t>
-            </a:r>
-            <a:r>
-              <a:rPr sz="1271" b="0" i="0">
-                <a:solidFill>
-                  <a:srgbClr val="5D6787"/>
-                </a:solidFill>
-                <a:latin typeface="Arial"/>
-              </a:rPr>
-              <a:t> · B0 · classifieds task 0 · first step</a:t>
-            </a:r>
-          </a:p>
-        </p:txBody>
-      </p:sp>
-      <p:sp>
-        <p:nvSpPr>
-          <p:cNvPr id="83" name="Rectangle 82"/>
-          <p:cNvSpPr/>
-          <p:nvPr/>
-        </p:nvSpPr>
-        <p:spPr>
-          <a:xfrm>
-            <a:off x="727200" y="16827592"/>
-            <a:ext cx="6451200" cy="10800"/>
-          </a:xfrm>
-          <a:prstGeom prst="rect">
-            <a:avLst/>
-          </a:prstGeom>
-          <a:solidFill>
-            <a:srgbClr val="DDE3F2"/>
-          </a:solidFill>
-          <a:ln>
-            <a:noFill/>
-          </a:ln>
-          <a:effectLst/>
-        </p:spPr>
-        <p:style>
-          <a:lnRef idx="1">
-            <a:schemeClr val="accent1"/>
-          </a:lnRef>
-          <a:fillRef idx="3">
-            <a:schemeClr val="accent1"/>
-          </a:fillRef>
-          <a:effectRef idx="2">
-            <a:schemeClr val="accent1"/>
-          </a:effectRef>
-          <a:fontRef idx="minor">
-            <a:schemeClr val="lt1"/>
-          </a:fontRef>
-        </p:style>
-        <p:txBody>
-          <a:bodyPr rtlCol="0" anchor="ctr" wrap="square"/>
-          <a:lstStyle/>
-          <a:p>
-            <a:pPr algn="ctr"/>
-          </a:p>
-        </p:txBody>
-      </p:sp>
-      <p:sp>
-        <p:nvSpPr>
-          <p:cNvPr id="84" name="TextBox 83"/>
-          <p:cNvSpPr txBox="1"/>
-          <p:nvPr/>
-        </p:nvSpPr>
-        <p:spPr>
-          <a:xfrm>
-            <a:off x="727200" y="16881592"/>
-            <a:ext cx="1008000" cy="252000"/>
+            <a:off x="4507200" y="5724000"/>
+            <a:ext cx="3960000" cy="216000"/>
           </a:xfrm>
           <a:prstGeom prst="rect">
             <a:avLst/>
@@ -4474,27 +4428,75 @@
               </a:spcAft>
             </a:pPr>
             <a:r>
-              <a:rPr sz="1764" b="1" i="0">
-                <a:solidFill>
-                  <a:srgbClr val="E8720C"/>
-                </a:solidFill>
-                <a:latin typeface="Arial"/>
-              </a:rPr>
-              <a:t>DOM</a:t>
-            </a:r>
-          </a:p>
-        </p:txBody>
-      </p:sp>
-      <p:sp>
-        <p:nvSpPr>
-          <p:cNvPr id="85" name="TextBox 84"/>
+              <a:rPr sz="1059" b="0" i="0">
+                <a:solidFill>
+                  <a:srgbClr val="5049F9"/>
+                </a:solidFill>
+                <a:latin typeface="Consolas"/>
+              </a:rPr>
+              <a:t>WHO DECIDES HOW TO SEE?</a:t>
+            </a:r>
+          </a:p>
+        </p:txBody>
+      </p:sp>
+      <p:sp>
+        <p:nvSpPr>
+          <p:cNvPr id="88" name="Rounded Rectangle 87"/>
+          <p:cNvSpPr/>
+          <p:nvPr/>
+        </p:nvSpPr>
+        <p:spPr>
+          <a:xfrm>
+            <a:off x="4507200" y="5958000"/>
+            <a:ext cx="3960000" cy="1044000"/>
+          </a:xfrm>
+          <a:prstGeom prst="roundRect">
+            <a:avLst>
+              <a:gd name="adj" fmla="val 12000"/>
+            </a:avLst>
+          </a:prstGeom>
+          <a:solidFill>
+            <a:srgbClr val="FFFFFF"/>
+          </a:solidFill>
+          <a:ln w="8890">
+            <a:solidFill>
+              <a:srgbClr val="DDE3F2"/>
+            </a:solidFill>
+          </a:ln>
+          <a:effectLst/>
+        </p:spPr>
+        <p:style>
+          <a:lnRef idx="1">
+            <a:schemeClr val="accent1"/>
+          </a:lnRef>
+          <a:fillRef idx="3">
+            <a:schemeClr val="accent1"/>
+          </a:fillRef>
+          <a:effectRef idx="2">
+            <a:schemeClr val="accent1"/>
+          </a:effectRef>
+          <a:fontRef idx="minor">
+            <a:schemeClr val="lt1"/>
+          </a:fontRef>
+        </p:style>
+        <p:txBody>
+          <a:bodyPr rtlCol="0" anchor="ctr" wrap="square"/>
+          <a:lstStyle/>
+          <a:p>
+            <a:pPr algn="ctr"/>
+          </a:p>
+        </p:txBody>
+      </p:sp>
+      <p:sp>
+        <p:nvSpPr>
+          <p:cNvPr id="89" name="TextBox 88"/>
           <p:cNvSpPr txBox="1"/>
           <p:nvPr/>
         </p:nvSpPr>
         <p:spPr>
           <a:xfrm>
-            <a:off x="1735200" y="16881592"/>
-            <a:ext cx="1728000" cy="252000"/>
+            <a:off x="4651200" y="6084000"/>
+            <a:ext cx="3672000" cy="288000"/>
           </a:xfrm>
           <a:prstGeom prst="rect">
             <a:avLst/>
@@ -4522,21 +4524,111 @@
                 </a:solidFill>
                 <a:latin typeface="Arial"/>
               </a:rPr>
-              <a:t>3,314 tokens</a:t>
-            </a:r>
-          </a:p>
-        </p:txBody>
-      </p:sp>
-      <p:sp>
-        <p:nvSpPr>
-          <p:cNvPr id="86" name="TextBox 85"/>
+              <a:t>Fixed mode</a:t>
+            </a:r>
+          </a:p>
+        </p:txBody>
+      </p:sp>
+      <p:sp>
+        <p:nvSpPr>
+          <p:cNvPr id="90" name="TextBox 89"/>
           <p:cNvSpPr txBox="1"/>
           <p:nvPr/>
         </p:nvSpPr>
         <p:spPr>
           <a:xfrm>
-            <a:off x="3535200" y="16921192"/>
-            <a:ext cx="3643200" cy="216000"/>
+            <a:off x="4651200" y="6426000"/>
+            <a:ext cx="3672000" cy="468000"/>
+          </a:xfrm>
+          <a:prstGeom prst="rect">
+            <a:avLst/>
+          </a:prstGeom>
+          <a:noFill/>
+        </p:spPr>
+        <p:txBody>
+          <a:bodyPr wrap="square" lIns="0" rIns="0" tIns="0" bIns="0">
+            <a:spAutoFit/>
+          </a:bodyPr>
+          <a:lstStyle/>
+          <a:p>
+            <a:pPr algn="l">
+              <a:lnSpc>
+                <a:spcPct val="132000"/>
+              </a:lnSpc>
+              <a:spcAft>
+                <a:spcPts val="0"/>
+              </a:spcAft>
+            </a:pPr>
+            <a:r>
+              <a:rPr sz="1271" b="0" i="0">
+                <a:solidFill>
+                  <a:srgbClr val="5D6787"/>
+                </a:solidFill>
+                <a:latin typeface="Arial"/>
+              </a:rPr>
+              <a:t>the same choice for every task</a:t>
+            </a:r>
+          </a:p>
+        </p:txBody>
+      </p:sp>
+      <p:sp>
+        <p:nvSpPr>
+          <p:cNvPr id="91" name="Rounded Rectangle 90"/>
+          <p:cNvSpPr/>
+          <p:nvPr/>
+        </p:nvSpPr>
+        <p:spPr>
+          <a:xfrm>
+            <a:off x="4507200" y="7110000"/>
+            <a:ext cx="3960000" cy="1044000"/>
+          </a:xfrm>
+          <a:prstGeom prst="roundRect">
+            <a:avLst>
+              <a:gd name="adj" fmla="val 12000"/>
+            </a:avLst>
+          </a:prstGeom>
+          <a:solidFill>
+            <a:srgbClr val="FFFFFF"/>
+          </a:solidFill>
+          <a:ln w="8890">
+            <a:solidFill>
+              <a:srgbClr val="DDE3F2"/>
+            </a:solidFill>
+          </a:ln>
+          <a:effectLst/>
+        </p:spPr>
+        <p:style>
+          <a:lnRef idx="1">
+            <a:schemeClr val="accent1"/>
+          </a:lnRef>
+          <a:fillRef idx="3">
+            <a:schemeClr val="accent1"/>
+          </a:fillRef>
+          <a:effectRef idx="2">
+            <a:schemeClr val="accent1"/>
+          </a:effectRef>
+          <a:fontRef idx="minor">
+            <a:schemeClr val="lt1"/>
+          </a:fontRef>
+        </p:style>
+        <p:txBody>
+          <a:bodyPr rtlCol="0" anchor="ctr" wrap="square"/>
+          <a:lstStyle/>
+          <a:p>
+            <a:pPr algn="ctr"/>
+          </a:p>
+        </p:txBody>
+      </p:sp>
+      <p:sp>
+        <p:nvSpPr>
+          <p:cNvPr id="92" name="TextBox 91"/>
+          <p:cNvSpPr txBox="1"/>
+          <p:nvPr/>
+        </p:nvSpPr>
+        <p:spPr>
+          <a:xfrm>
+            <a:off x="4651200" y="7236000"/>
+            <a:ext cx="3672000" cy="288000"/>
           </a:xfrm>
           <a:prstGeom prst="rect">
             <a:avLst/>
@@ -4558,36 +4650,82 @@
               </a:spcAft>
             </a:pPr>
             <a:r>
+              <a:rPr sz="1764" b="1" i="0">
+                <a:solidFill>
+                  <a:srgbClr val="141E41"/>
+                </a:solidFill>
+                <a:latin typeface="Arial"/>
+              </a:rPr>
+              <a:t>Hindsight oracle</a:t>
+            </a:r>
+          </a:p>
+        </p:txBody>
+      </p:sp>
+      <p:sp>
+        <p:nvSpPr>
+          <p:cNvPr id="93" name="TextBox 92"/>
+          <p:cNvSpPr txBox="1"/>
+          <p:nvPr/>
+        </p:nvSpPr>
+        <p:spPr>
+          <a:xfrm>
+            <a:off x="4651200" y="7578000"/>
+            <a:ext cx="3672000" cy="468000"/>
+          </a:xfrm>
+          <a:prstGeom prst="rect">
+            <a:avLst/>
+          </a:prstGeom>
+          <a:noFill/>
+        </p:spPr>
+        <p:txBody>
+          <a:bodyPr wrap="square" lIns="0" rIns="0" tIns="0" bIns="0">
+            <a:spAutoFit/>
+          </a:bodyPr>
+          <a:lstStyle/>
+          <a:p>
+            <a:pPr algn="l">
+              <a:lnSpc>
+                <a:spcPct val="132000"/>
+              </a:lnSpc>
+              <a:spcAft>
+                <a:spcPts val="0"/>
+              </a:spcAft>
+            </a:pPr>
+            <a:r>
               <a:rPr sz="1271" b="0" i="0">
                 <a:solidFill>
                   <a:srgbClr val="5D6787"/>
                 </a:solidFill>
                 <a:latin typeface="Arial"/>
               </a:rPr>
-              <a:t>text only, no image</a:t>
-            </a:r>
-          </a:p>
-        </p:txBody>
-      </p:sp>
-      <p:sp>
-        <p:nvSpPr>
-          <p:cNvPr id="87" name="Rectangle 86"/>
+              <a:t>the best choice, known afterwards</a:t>
+            </a:r>
+          </a:p>
+        </p:txBody>
+      </p:sp>
+      <p:sp>
+        <p:nvSpPr>
+          <p:cNvPr id="94" name="Rounded Rectangle 93"/>
           <p:cNvSpPr/>
           <p:nvPr/>
         </p:nvSpPr>
         <p:spPr>
           <a:xfrm>
-            <a:off x="727200" y="17151592"/>
-            <a:ext cx="6451200" cy="10800"/>
-          </a:xfrm>
-          <a:prstGeom prst="rect">
-            <a:avLst/>
+            <a:off x="4507200" y="8262000"/>
+            <a:ext cx="3960000" cy="1044000"/>
+          </a:xfrm>
+          <a:prstGeom prst="roundRect">
+            <a:avLst>
+              <a:gd name="adj" fmla="val 12000"/>
+            </a:avLst>
           </a:prstGeom>
           <a:solidFill>
-            <a:srgbClr val="DDE3F2"/>
+            <a:srgbClr val="FFFFFF"/>
           </a:solidFill>
-          <a:ln>
-            <a:noFill/>
+          <a:ln w="8890">
+            <a:solidFill>
+              <a:srgbClr val="DDE3F2"/>
+            </a:solidFill>
           </a:ln>
           <a:effectLst/>
         </p:spPr>
@@ -4615,14 +4753,14 @@
       </p:sp>
       <p:sp>
         <p:nvSpPr>
-          <p:cNvPr id="88" name="TextBox 87"/>
+          <p:cNvPr id="95" name="TextBox 94"/>
           <p:cNvSpPr txBox="1"/>
           <p:nvPr/>
         </p:nvSpPr>
         <p:spPr>
           <a:xfrm>
-            <a:off x="727200" y="17205592"/>
-            <a:ext cx="1008000" cy="252000"/>
+            <a:off x="4651200" y="8388000"/>
+            <a:ext cx="3672000" cy="288000"/>
           </a:xfrm>
           <a:prstGeom prst="rect">
             <a:avLst/>
@@ -4646,25 +4784,25 @@
             <a:r>
               <a:rPr sz="1764" b="1" i="0">
                 <a:solidFill>
-                  <a:srgbClr val="14855F"/>
+                  <a:srgbClr val="141E41"/>
                 </a:solidFill>
                 <a:latin typeface="Arial"/>
               </a:rPr>
-              <a:t>SoM</a:t>
-            </a:r>
-          </a:p>
-        </p:txBody>
-      </p:sp>
-      <p:sp>
-        <p:nvSpPr>
-          <p:cNvPr id="89" name="TextBox 88"/>
+              <a:t>Learned router</a:t>
+            </a:r>
+          </a:p>
+        </p:txBody>
+      </p:sp>
+      <p:sp>
+        <p:nvSpPr>
+          <p:cNvPr id="96" name="TextBox 95"/>
           <p:cNvSpPr txBox="1"/>
           <p:nvPr/>
         </p:nvSpPr>
         <p:spPr>
           <a:xfrm>
-            <a:off x="1735200" y="17205592"/>
-            <a:ext cx="1728000" cy="252000"/>
+            <a:off x="4651200" y="8730000"/>
+            <a:ext cx="3672000" cy="468000"/>
           </a:xfrm>
           <a:prstGeom prst="rect">
             <a:avLst/>
@@ -4679,1459 +4817,34 @@
           <a:p>
             <a:pPr algn="l">
               <a:lnSpc>
-                <a:spcPct val="120000"/>
+                <a:spcPct val="132000"/>
               </a:lnSpc>
               <a:spcAft>
                 <a:spcPts val="0"/>
               </a:spcAft>
             </a:pPr>
             <a:r>
-              <a:rPr sz="1764" b="1" i="0">
-                <a:solidFill>
-                  <a:srgbClr val="141E41"/>
+              <a:rPr sz="1271" b="0" i="0">
+                <a:solidFill>
+                  <a:srgbClr val="5D6787"/>
                 </a:solidFill>
                 <a:latin typeface="Arial"/>
               </a:rPr>
-              <a:t>4,335 tokens</a:t>
-            </a:r>
-          </a:p>
-        </p:txBody>
-      </p:sp>
-      <p:sp>
-        <p:nvSpPr>
-          <p:cNvPr id="90" name="TextBox 89"/>
-          <p:cNvSpPr txBox="1"/>
-          <p:nvPr/>
-        </p:nvSpPr>
-        <p:spPr>
-          <a:xfrm>
-            <a:off x="3535200" y="17245192"/>
-            <a:ext cx="3643200" cy="216000"/>
-          </a:xfrm>
-          <a:prstGeom prst="rect">
-            <a:avLst/>
-          </a:prstGeom>
-          <a:noFill/>
-        </p:spPr>
-        <p:txBody>
-          <a:bodyPr wrap="square" lIns="0" rIns="0" tIns="0" bIns="0">
-            <a:spAutoFit/>
-          </a:bodyPr>
-          <a:lstStyle/>
-          <a:p>
-            <a:pPr algn="l">
-              <a:lnSpc>
-                <a:spcPct val="120000"/>
-              </a:lnSpc>
-              <a:spcAft>
-                <a:spcPts val="0"/>
-              </a:spcAft>
-            </a:pPr>
-            <a:r>
-              <a:rPr sz="1271" b="0" i="0">
-                <a:solidFill>
-                  <a:srgbClr val="5D6787"/>
-                </a:solidFill>
-                <a:latin typeface="Arial"/>
-              </a:rPr>
-              <a:t>text + 143 KB marked image</a:t>
-            </a:r>
-          </a:p>
-        </p:txBody>
-      </p:sp>
-      <p:sp>
-        <p:nvSpPr>
-          <p:cNvPr id="91" name="Rectangle 90"/>
+              <a:t>a choice made before the task runs</a:t>
+            </a:r>
+          </a:p>
+        </p:txBody>
+      </p:sp>
+      <p:sp>
+        <p:nvSpPr>
+          <p:cNvPr id="97" name="Rectangle 96"/>
           <p:cNvSpPr/>
           <p:nvPr/>
         </p:nvSpPr>
         <p:spPr>
           <a:xfrm>
-            <a:off x="727200" y="17475592"/>
-            <a:ext cx="6451200" cy="10800"/>
-          </a:xfrm>
-          <a:prstGeom prst="rect">
-            <a:avLst/>
-          </a:prstGeom>
-          <a:solidFill>
-            <a:srgbClr val="DDE3F2"/>
-          </a:solidFill>
-          <a:ln>
-            <a:noFill/>
-          </a:ln>
-          <a:effectLst/>
-        </p:spPr>
-        <p:style>
-          <a:lnRef idx="1">
-            <a:schemeClr val="accent1"/>
-          </a:lnRef>
-          <a:fillRef idx="3">
-            <a:schemeClr val="accent1"/>
-          </a:fillRef>
-          <a:effectRef idx="2">
-            <a:schemeClr val="accent1"/>
-          </a:effectRef>
-          <a:fontRef idx="minor">
-            <a:schemeClr val="lt1"/>
-          </a:fontRef>
-        </p:style>
-        <p:txBody>
-          <a:bodyPr rtlCol="0" anchor="ctr" wrap="square"/>
-          <a:lstStyle/>
-          <a:p>
-            <a:pPr algn="ctr"/>
-          </a:p>
-        </p:txBody>
-      </p:sp>
-      <p:sp>
-        <p:nvSpPr>
-          <p:cNvPr id="92" name="TextBox 91"/>
-          <p:cNvSpPr txBox="1"/>
-          <p:nvPr/>
-        </p:nvSpPr>
-        <p:spPr>
-          <a:xfrm>
-            <a:off x="727200" y="17529592"/>
-            <a:ext cx="1008000" cy="252000"/>
-          </a:xfrm>
-          <a:prstGeom prst="rect">
-            <a:avLst/>
-          </a:prstGeom>
-          <a:noFill/>
-        </p:spPr>
-        <p:txBody>
-          <a:bodyPr wrap="square" lIns="0" rIns="0" tIns="0" bIns="0">
-            <a:spAutoFit/>
-          </a:bodyPr>
-          <a:lstStyle/>
-          <a:p>
-            <a:pPr algn="l">
-              <a:lnSpc>
-                <a:spcPct val="120000"/>
-              </a:lnSpc>
-              <a:spcAft>
-                <a:spcPts val="0"/>
-              </a:spcAft>
-            </a:pPr>
-            <a:r>
-              <a:rPr sz="1764" b="1" i="0">
-                <a:solidFill>
-                  <a:srgbClr val="1F5FD6"/>
-                </a:solidFill>
-                <a:latin typeface="Arial"/>
-              </a:rPr>
-              <a:t>Vision</a:t>
-            </a:r>
-          </a:p>
-        </p:txBody>
-      </p:sp>
-      <p:sp>
-        <p:nvSpPr>
-          <p:cNvPr id="93" name="TextBox 92"/>
-          <p:cNvSpPr txBox="1"/>
-          <p:nvPr/>
-        </p:nvSpPr>
-        <p:spPr>
-          <a:xfrm>
-            <a:off x="1735200" y="17529592"/>
-            <a:ext cx="1728000" cy="252000"/>
-          </a:xfrm>
-          <a:prstGeom prst="rect">
-            <a:avLst/>
-          </a:prstGeom>
-          <a:noFill/>
-        </p:spPr>
-        <p:txBody>
-          <a:bodyPr wrap="square" lIns="0" rIns="0" tIns="0" bIns="0">
-            <a:spAutoFit/>
-          </a:bodyPr>
-          <a:lstStyle/>
-          <a:p>
-            <a:pPr algn="l">
-              <a:lnSpc>
-                <a:spcPct val="120000"/>
-              </a:lnSpc>
-              <a:spcAft>
-                <a:spcPts val="0"/>
-              </a:spcAft>
-            </a:pPr>
-            <a:r>
-              <a:rPr sz="1764" b="1" i="0">
-                <a:solidFill>
-                  <a:srgbClr val="141E41"/>
-                </a:solidFill>
-                <a:latin typeface="Arial"/>
-              </a:rPr>
-              <a:t>3,123 tokens</a:t>
-            </a:r>
-          </a:p>
-        </p:txBody>
-      </p:sp>
-      <p:sp>
-        <p:nvSpPr>
-          <p:cNvPr id="94" name="TextBox 93"/>
-          <p:cNvSpPr txBox="1"/>
-          <p:nvPr/>
-        </p:nvSpPr>
-        <p:spPr>
-          <a:xfrm>
-            <a:off x="3535200" y="17569192"/>
-            <a:ext cx="3643200" cy="216000"/>
-          </a:xfrm>
-          <a:prstGeom prst="rect">
-            <a:avLst/>
-          </a:prstGeom>
-          <a:noFill/>
-        </p:spPr>
-        <p:txBody>
-          <a:bodyPr wrap="square" lIns="0" rIns="0" tIns="0" bIns="0">
-            <a:spAutoFit/>
-          </a:bodyPr>
-          <a:lstStyle/>
-          <a:p>
-            <a:pPr algn="l">
-              <a:lnSpc>
-                <a:spcPct val="120000"/>
-              </a:lnSpc>
-              <a:spcAft>
-                <a:spcPts val="0"/>
-              </a:spcAft>
-            </a:pPr>
-            <a:r>
-              <a:rPr sz="1271" b="0" i="0">
-                <a:solidFill>
-                  <a:srgbClr val="5D6787"/>
-                </a:solidFill>
-                <a:latin typeface="Arial"/>
-              </a:rPr>
-              <a:t>110 KB screenshot, no text</a:t>
-            </a:r>
-          </a:p>
-        </p:txBody>
-      </p:sp>
-      <p:sp>
-        <p:nvSpPr>
-          <p:cNvPr id="95" name="Rectangle 94"/>
-          <p:cNvSpPr/>
-          <p:nvPr/>
-        </p:nvSpPr>
-        <p:spPr>
-          <a:xfrm>
-            <a:off x="727200" y="17799592"/>
-            <a:ext cx="6451200" cy="10800"/>
-          </a:xfrm>
-          <a:prstGeom prst="rect">
-            <a:avLst/>
-          </a:prstGeom>
-          <a:solidFill>
-            <a:srgbClr val="DDE3F2"/>
-          </a:solidFill>
-          <a:ln>
-            <a:noFill/>
-          </a:ln>
-          <a:effectLst/>
-        </p:spPr>
-        <p:style>
-          <a:lnRef idx="1">
-            <a:schemeClr val="accent1"/>
-          </a:lnRef>
-          <a:fillRef idx="3">
-            <a:schemeClr val="accent1"/>
-          </a:fillRef>
-          <a:effectRef idx="2">
-            <a:schemeClr val="accent1"/>
-          </a:effectRef>
-          <a:fontRef idx="minor">
-            <a:schemeClr val="lt1"/>
-          </a:fontRef>
-        </p:style>
-        <p:txBody>
-          <a:bodyPr rtlCol="0" anchor="ctr" wrap="square"/>
-          <a:lstStyle/>
-          <a:p>
-            <a:pPr algn="ctr"/>
-          </a:p>
-        </p:txBody>
-      </p:sp>
-      <p:sp>
-        <p:nvSpPr>
-          <p:cNvPr id="96" name="TextBox 95"/>
-          <p:cNvSpPr txBox="1"/>
-          <p:nvPr/>
-        </p:nvSpPr>
-        <p:spPr>
-          <a:xfrm>
-            <a:off x="727200" y="17871592"/>
-            <a:ext cx="6451200" cy="255684"/>
-          </a:xfrm>
-          <a:prstGeom prst="rect">
-            <a:avLst/>
-          </a:prstGeom>
-          <a:noFill/>
-        </p:spPr>
-        <p:txBody>
-          <a:bodyPr wrap="square" lIns="0" rIns="0" tIns="0" bIns="0">
-            <a:spAutoFit/>
-          </a:bodyPr>
-          <a:lstStyle/>
-          <a:p>
-            <a:pPr algn="l">
-              <a:lnSpc>
-                <a:spcPct val="132000"/>
-              </a:lnSpc>
-              <a:spcAft>
-                <a:spcPts val="425"/>
-              </a:spcAft>
-            </a:pPr>
-            <a:r>
-              <a:rPr sz="1271" b="0" i="0">
-                <a:solidFill>
-                  <a:srgbClr val="5D6787"/>
-                </a:solidFill>
-                <a:latin typeface="Arial"/>
-              </a:rPr>
-              <a:t>SoM's text is within 1% of DOM's; nearly all of its extra cost is the image.</a:t>
-            </a:r>
-          </a:p>
-        </p:txBody>
-      </p:sp>
-      <p:sp>
-        <p:nvSpPr>
-          <p:cNvPr id="97" name="TextBox 96"/>
-          <p:cNvSpPr txBox="1"/>
-          <p:nvPr/>
-        </p:nvSpPr>
-        <p:spPr>
-          <a:xfrm>
-            <a:off x="727200" y="18235276"/>
-            <a:ext cx="6451200" cy="968345"/>
-          </a:xfrm>
-          <a:prstGeom prst="rect">
-            <a:avLst/>
-          </a:prstGeom>
-          <a:noFill/>
-        </p:spPr>
-        <p:txBody>
-          <a:bodyPr wrap="square" lIns="0" rIns="0" tIns="0" bIns="0">
-            <a:spAutoFit/>
-          </a:bodyPr>
-          <a:lstStyle/>
-          <a:p>
-            <a:pPr algn="l">
-              <a:lnSpc>
-                <a:spcPct val="120000"/>
-              </a:lnSpc>
-              <a:spcAft>
-                <a:spcPts val="992"/>
-              </a:spcAft>
-            </a:pPr>
-            <a:r>
-              <a:rPr sz="1764" b="1" i="0">
-                <a:solidFill>
-                  <a:srgbClr val="12162E"/>
-                </a:solidFill>
-                <a:latin typeface="Arial"/>
-              </a:rPr>
-              <a:t>Is the screenshot needed at every step — and can the steps that need it be identified cheaply enough to be worth identifying?</a:t>
-            </a:r>
-          </a:p>
-        </p:txBody>
-      </p:sp>
-      <p:sp>
-        <p:nvSpPr>
-          <p:cNvPr id="14" name="Rectangle 13"/>
-          <p:cNvSpPr/>
-          <p:nvPr/>
-        </p:nvSpPr>
-        <p:spPr>
-          <a:xfrm>
-            <a:off x="727200" y="19455621"/>
-            <a:ext cx="177988" cy="177988"/>
-          </a:xfrm>
-          <a:prstGeom prst="rect">
-            <a:avLst/>
-          </a:prstGeom>
-          <a:solidFill>
-            <a:srgbClr val="AB5FCE"/>
-          </a:solidFill>
-          <a:ln>
-            <a:noFill/>
-          </a:ln>
-          <a:effectLst/>
-        </p:spPr>
-        <p:style>
-          <a:lnRef idx="1">
-            <a:schemeClr val="accent1"/>
-          </a:lnRef>
-          <a:fillRef idx="3">
-            <a:schemeClr val="accent1"/>
-          </a:fillRef>
-          <a:effectRef idx="2">
-            <a:schemeClr val="accent1"/>
-          </a:effectRef>
-          <a:fontRef idx="minor">
-            <a:schemeClr val="lt1"/>
-          </a:fontRef>
-        </p:style>
-        <p:txBody>
-          <a:bodyPr rtlCol="0" anchor="ctr"/>
-          <a:lstStyle/>
-          <a:p>
-            <a:pPr algn="ctr"/>
-            <a:endParaRPr/>
-          </a:p>
-        </p:txBody>
-      </p:sp>
-      <p:sp>
-        <p:nvSpPr>
-          <p:cNvPr id="15" name="TextBox 14"/>
-          <p:cNvSpPr txBox="1"/>
-          <p:nvPr/>
-        </p:nvSpPr>
-        <p:spPr>
-          <a:xfrm>
-            <a:off x="1032323" y="19412421"/>
-            <a:ext cx="6144827" cy="238912"/>
-          </a:xfrm>
-          <a:prstGeom prst="rect">
-            <a:avLst/>
-          </a:prstGeom>
-          <a:noFill/>
-        </p:spPr>
-        <p:txBody>
-          <a:bodyPr wrap="square" lIns="0" tIns="0" rIns="0" bIns="0" anchor="t">
-            <a:spAutoFit/>
-          </a:bodyPr>
-          <a:lstStyle/>
-          <a:p>
-            <a:pPr algn="l">
-              <a:lnSpc>
-                <a:spcPct val="118000"/>
-              </a:lnSpc>
-            </a:pPr>
-            <a:r>
-              <a:rPr sz="1412" b="1" i="0">
-                <a:solidFill>
-                  <a:srgbClr val="141E41"/>
-                </a:solidFill>
-                <a:latin typeface="Consolas"/>
-              </a:rPr>
-              <a:t>WHY IT CANNOT BE LEARNED</a:t>
-            </a:r>
-            <a:endParaRPr sz="1412" b="1" spc="180" dirty="0">
-              <a:solidFill>
-                <a:srgbClr val="141E41"/>
-              </a:solidFill>
-              <a:latin typeface="Consolas"/>
-            </a:endParaRPr>
-          </a:p>
-        </p:txBody>
-      </p:sp>
-      <p:sp>
-        <p:nvSpPr>
-          <p:cNvPr id="16" name="Rectangle 15"/>
-          <p:cNvSpPr/>
-          <p:nvPr/>
-        </p:nvSpPr>
-        <p:spPr>
-          <a:xfrm>
-            <a:off x="727200" y="19773457"/>
-            <a:ext cx="1169636" cy="35597"/>
-          </a:xfrm>
-          <a:prstGeom prst="rect">
-            <a:avLst/>
-          </a:prstGeom>
-          <a:solidFill>
-            <a:srgbClr val="141E41"/>
-          </a:solidFill>
-          <a:ln>
-            <a:noFill/>
-          </a:ln>
-          <a:effectLst/>
-        </p:spPr>
-        <p:style>
-          <a:lnRef idx="1">
-            <a:schemeClr val="accent1"/>
-          </a:lnRef>
-          <a:fillRef idx="3">
-            <a:schemeClr val="accent1"/>
-          </a:fillRef>
-          <a:effectRef idx="2">
-            <a:schemeClr val="accent1"/>
-          </a:effectRef>
-          <a:fontRef idx="minor">
-            <a:schemeClr val="lt1"/>
-          </a:fontRef>
-        </p:style>
-        <p:txBody>
-          <a:bodyPr rtlCol="0" anchor="ctr"/>
-          <a:lstStyle/>
-          <a:p>
-            <a:pPr algn="ctr"/>
-            <a:endParaRPr/>
-          </a:p>
-        </p:txBody>
-      </p:sp>
-      <p:sp>
-        <p:nvSpPr>
-          <p:cNvPr id="17" name="Rectangle 16"/>
-          <p:cNvSpPr/>
-          <p:nvPr/>
-        </p:nvSpPr>
-        <p:spPr>
-          <a:xfrm>
-            <a:off x="1896836" y="19783628"/>
-            <a:ext cx="5281564" cy="15256"/>
-          </a:xfrm>
-          <a:prstGeom prst="rect">
-            <a:avLst/>
-          </a:prstGeom>
-          <a:solidFill>
-            <a:srgbClr val="DDE3F2"/>
-          </a:solidFill>
-          <a:ln>
-            <a:noFill/>
-          </a:ln>
-          <a:effectLst/>
-        </p:spPr>
-        <p:style>
-          <a:lnRef idx="1">
-            <a:schemeClr val="accent1"/>
-          </a:lnRef>
-          <a:fillRef idx="3">
-            <a:schemeClr val="accent1"/>
-          </a:fillRef>
-          <a:effectRef idx="2">
-            <a:schemeClr val="accent1"/>
-          </a:effectRef>
-          <a:fontRef idx="minor">
-            <a:schemeClr val="lt1"/>
-          </a:fontRef>
-        </p:style>
-        <p:txBody>
-          <a:bodyPr rtlCol="0" anchor="ctr"/>
-          <a:lstStyle/>
-          <a:p>
-            <a:pPr algn="ctr"/>
-            <a:endParaRPr/>
-          </a:p>
-        </p:txBody>
-      </p:sp>
-      <p:sp>
-        <p:nvSpPr>
-          <p:cNvPr id="98" name="TextBox 97"/>
-          <p:cNvSpPr txBox="1"/>
-          <p:nvPr/>
-        </p:nvSpPr>
-        <p:spPr>
-          <a:xfrm>
-            <a:off x="727200" y="19995621"/>
-            <a:ext cx="6451200" cy="3157035"/>
-          </a:xfrm>
-          <a:prstGeom prst="rect">
-            <a:avLst/>
-          </a:prstGeom>
-          <a:noFill/>
-        </p:spPr>
-        <p:txBody>
-          <a:bodyPr wrap="square" lIns="0" rIns="0" tIns="0" bIns="0">
-            <a:spAutoFit/>
-          </a:bodyPr>
-          <a:lstStyle/>
-          <a:p>
-            <a:pPr algn="l">
-              <a:lnSpc>
-                <a:spcPct val="120000"/>
-              </a:lnSpc>
-              <a:spcAft>
-                <a:spcPts val="992"/>
-              </a:spcAft>
-            </a:pPr>
-            <a:r>
-              <a:rPr sz="1764" b="0" i="0">
-                <a:solidFill>
-                  <a:srgbClr val="12162E"/>
-                </a:solidFill>
-                <a:latin typeface="Arial"/>
-              </a:rPr>
-              <a:t>A routing label exists only when the agent solves a task. Here the best single mode solves just </a:t>
-            </a:r>
-            <a:r>
-              <a:rPr sz="1764" b="1" i="0">
-                <a:solidFill>
-                  <a:srgbClr val="12162E"/>
-                </a:solidFill>
-                <a:latin typeface="Arial"/>
-              </a:rPr>
-              <a:t>2–36%</a:t>
-            </a:r>
-            <a:r>
-              <a:rPr sz="1764" b="0" i="0">
-                <a:solidFill>
-                  <a:srgbClr val="12162E"/>
-                </a:solidFill>
-                <a:latin typeface="Arial"/>
-              </a:rPr>
-              <a:t> of tasks, which leaves typically </a:t>
-            </a:r>
-            <a:r>
-              <a:rPr sz="1764" b="1" i="0">
-                <a:solidFill>
-                  <a:srgbClr val="12162E"/>
-                </a:solidFill>
-                <a:latin typeface="Arial"/>
-              </a:rPr>
-              <a:t>15–97</a:t>
-            </a:r>
-            <a:r>
-              <a:rPr sz="1764" b="0" i="0">
-                <a:solidFill>
-                  <a:srgbClr val="12162E"/>
-                </a:solidFill>
-                <a:latin typeface="Arial"/>
-              </a:rPr>
-              <a:t> usable labels per setting.</a:t>
-            </a:r>
-          </a:p>
-          <a:p>
-            <a:pPr algn="l">
-              <a:lnSpc>
-                <a:spcPct val="120000"/>
-              </a:lnSpc>
-              <a:spcAft>
-                <a:spcPts val="992"/>
-              </a:spcAft>
-            </a:pPr>
-            <a:r>
-              <a:rPr sz="1764" b="1" i="0">
-                <a:solidFill>
-                  <a:srgbClr val="12162E"/>
-                </a:solidFill>
-                <a:latin typeface="Arial"/>
-              </a:rPr>
-              <a:t>The agents that would gain most from routing produce the least supervision to learn it.</a:t>
-            </a:r>
-          </a:p>
-          <a:p>
-            <a:pPr algn="l">
-              <a:lnSpc>
-                <a:spcPct val="120000"/>
-              </a:lnSpc>
-              <a:spcAft>
-                <a:spcPts val="992"/>
-              </a:spcAft>
-            </a:pPr>
-            <a:r>
-              <a:rPr sz="1764" b="0" i="0">
-                <a:solidFill>
-                  <a:srgbClr val="12162E"/>
-                </a:solidFill>
-                <a:latin typeface="Arial"/>
-              </a:rPr>
-              <a:t>Deliberately shrinking the training data confirms scarcity is the mechanism, and prices it: the failing settings would need at least </a:t>
-            </a:r>
-            <a:r>
-              <a:rPr sz="1764" b="1" i="0">
-                <a:solidFill>
-                  <a:srgbClr val="12162E"/>
-                </a:solidFill>
-                <a:latin typeface="Arial"/>
-              </a:rPr>
-              <a:t>2.1–4.2×</a:t>
-            </a:r>
-            <a:r>
-              <a:rPr sz="1764" b="0" i="0">
-                <a:solidFill>
-                  <a:srgbClr val="12162E"/>
-                </a:solidFill>
-                <a:latin typeface="Arial"/>
-              </a:rPr>
-              <a:t> more tasks than the benchmarks contain — a specification, not an impossibility.</a:t>
-            </a:r>
-          </a:p>
-        </p:txBody>
-      </p:sp>
-      <p:sp>
-        <p:nvSpPr>
-          <p:cNvPr id="14" name="Rectangle 13"/>
-          <p:cNvSpPr/>
-          <p:nvPr/>
-        </p:nvSpPr>
-        <p:spPr>
-          <a:xfrm>
-            <a:off x="727200" y="23404656"/>
-            <a:ext cx="177988" cy="177988"/>
-          </a:xfrm>
-          <a:prstGeom prst="rect">
-            <a:avLst/>
-          </a:prstGeom>
-          <a:solidFill>
-            <a:srgbClr val="AB5FCE"/>
-          </a:solidFill>
-          <a:ln>
-            <a:noFill/>
-          </a:ln>
-          <a:effectLst/>
-        </p:spPr>
-        <p:style>
-          <a:lnRef idx="1">
-            <a:schemeClr val="accent1"/>
-          </a:lnRef>
-          <a:fillRef idx="3">
-            <a:schemeClr val="accent1"/>
-          </a:fillRef>
-          <a:effectRef idx="2">
-            <a:schemeClr val="accent1"/>
-          </a:effectRef>
-          <a:fontRef idx="minor">
-            <a:schemeClr val="lt1"/>
-          </a:fontRef>
-        </p:style>
-        <p:txBody>
-          <a:bodyPr rtlCol="0" anchor="ctr"/>
-          <a:lstStyle/>
-          <a:p>
-            <a:pPr algn="ctr"/>
-            <a:endParaRPr/>
-          </a:p>
-        </p:txBody>
-      </p:sp>
-      <p:sp>
-        <p:nvSpPr>
-          <p:cNvPr id="15" name="TextBox 14"/>
-          <p:cNvSpPr txBox="1"/>
-          <p:nvPr/>
-        </p:nvSpPr>
-        <p:spPr>
-          <a:xfrm>
-            <a:off x="1032323" y="23361456"/>
-            <a:ext cx="6144827" cy="238912"/>
-          </a:xfrm>
-          <a:prstGeom prst="rect">
-            <a:avLst/>
-          </a:prstGeom>
-          <a:noFill/>
-        </p:spPr>
-        <p:txBody>
-          <a:bodyPr wrap="square" lIns="0" tIns="0" rIns="0" bIns="0" anchor="t">
-            <a:spAutoFit/>
-          </a:bodyPr>
-          <a:lstStyle/>
-          <a:p>
-            <a:pPr algn="l">
-              <a:lnSpc>
-                <a:spcPct val="118000"/>
-              </a:lnSpc>
-            </a:pPr>
-            <a:r>
-              <a:rPr sz="1412" b="1" i="0">
-                <a:solidFill>
-                  <a:srgbClr val="141E41"/>
-                </a:solidFill>
-                <a:latin typeface="Consolas"/>
-              </a:rPr>
-              <a:t>HOW MUCH OF THIS IS NOISE?</a:t>
-            </a:r>
-            <a:endParaRPr sz="1412" b="1" spc="180" dirty="0">
-              <a:solidFill>
-                <a:srgbClr val="141E41"/>
-              </a:solidFill>
-              <a:latin typeface="Consolas"/>
-            </a:endParaRPr>
-          </a:p>
-        </p:txBody>
-      </p:sp>
-      <p:sp>
-        <p:nvSpPr>
-          <p:cNvPr id="16" name="Rectangle 15"/>
-          <p:cNvSpPr/>
-          <p:nvPr/>
-        </p:nvSpPr>
-        <p:spPr>
-          <a:xfrm>
-            <a:off x="727200" y="23722492"/>
-            <a:ext cx="1169636" cy="35597"/>
-          </a:xfrm>
-          <a:prstGeom prst="rect">
-            <a:avLst/>
-          </a:prstGeom>
-          <a:solidFill>
-            <a:srgbClr val="141E41"/>
-          </a:solidFill>
-          <a:ln>
-            <a:noFill/>
-          </a:ln>
-          <a:effectLst/>
-        </p:spPr>
-        <p:style>
-          <a:lnRef idx="1">
-            <a:schemeClr val="accent1"/>
-          </a:lnRef>
-          <a:fillRef idx="3">
-            <a:schemeClr val="accent1"/>
-          </a:fillRef>
-          <a:effectRef idx="2">
-            <a:schemeClr val="accent1"/>
-          </a:effectRef>
-          <a:fontRef idx="minor">
-            <a:schemeClr val="lt1"/>
-          </a:fontRef>
-        </p:style>
-        <p:txBody>
-          <a:bodyPr rtlCol="0" anchor="ctr"/>
-          <a:lstStyle/>
-          <a:p>
-            <a:pPr algn="ctr"/>
-            <a:endParaRPr/>
-          </a:p>
-        </p:txBody>
-      </p:sp>
-      <p:sp>
-        <p:nvSpPr>
-          <p:cNvPr id="17" name="Rectangle 16"/>
-          <p:cNvSpPr/>
-          <p:nvPr/>
-        </p:nvSpPr>
-        <p:spPr>
-          <a:xfrm>
-            <a:off x="1896836" y="23732663"/>
-            <a:ext cx="5281564" cy="15256"/>
-          </a:xfrm>
-          <a:prstGeom prst="rect">
-            <a:avLst/>
-          </a:prstGeom>
-          <a:solidFill>
-            <a:srgbClr val="DDE3F2"/>
-          </a:solidFill>
-          <a:ln>
-            <a:noFill/>
-          </a:ln>
-          <a:effectLst/>
-        </p:spPr>
-        <p:style>
-          <a:lnRef idx="1">
-            <a:schemeClr val="accent1"/>
-          </a:lnRef>
-          <a:fillRef idx="3">
-            <a:schemeClr val="accent1"/>
-          </a:fillRef>
-          <a:effectRef idx="2">
-            <a:schemeClr val="accent1"/>
-          </a:effectRef>
-          <a:fontRef idx="minor">
-            <a:schemeClr val="lt1"/>
-          </a:fontRef>
-        </p:style>
-        <p:txBody>
-          <a:bodyPr rtlCol="0" anchor="ctr"/>
-          <a:lstStyle/>
-          <a:p>
-            <a:pPr algn="ctr"/>
-            <a:endParaRPr/>
-          </a:p>
-        </p:txBody>
-      </p:sp>
-      <p:sp>
-        <p:nvSpPr>
-          <p:cNvPr id="99" name="TextBox 98"/>
-          <p:cNvSpPr txBox="1"/>
-          <p:nvPr/>
-        </p:nvSpPr>
-        <p:spPr>
-          <a:xfrm>
-            <a:off x="727200" y="23944656"/>
-            <a:ext cx="6451200" cy="1739908"/>
-          </a:xfrm>
-          <a:prstGeom prst="rect">
-            <a:avLst/>
-          </a:prstGeom>
-          <a:noFill/>
-        </p:spPr>
-        <p:txBody>
-          <a:bodyPr wrap="square" lIns="0" rIns="0" tIns="0" bIns="0">
-            <a:spAutoFit/>
-          </a:bodyPr>
-          <a:lstStyle/>
-          <a:p>
-            <a:pPr algn="l">
-              <a:lnSpc>
-                <a:spcPct val="120000"/>
-              </a:lnSpc>
-              <a:spcAft>
-                <a:spcPts val="992"/>
-              </a:spcAft>
-            </a:pPr>
-            <a:r>
-              <a:rPr sz="1764" b="0" i="0">
-                <a:solidFill>
-                  <a:srgbClr val="12162E"/>
-                </a:solidFill>
-                <a:latin typeface="Arial"/>
-              </a:rPr>
-              <a:t>Rerunning </a:t>
-            </a:r>
-            <a:r>
-              <a:rPr sz="1764" b="1" i="0">
-                <a:solidFill>
-                  <a:srgbClr val="12162E"/>
-                </a:solidFill>
-                <a:latin typeface="Arial"/>
-              </a:rPr>
-              <a:t>one unchanged mode</a:t>
-            </a:r>
-            <a:r>
-              <a:rPr sz="1764" b="0" i="0">
-                <a:solidFill>
-                  <a:srgbClr val="12162E"/>
-                </a:solidFill>
-                <a:latin typeface="Arial"/>
-              </a:rPr>
-              <a:t> on the same tasks flips </a:t>
-            </a:r>
-            <a:r>
-              <a:rPr sz="1764" b="1" i="0">
-                <a:solidFill>
-                  <a:srgbClr val="12162E"/>
-                </a:solidFill>
-                <a:latin typeface="Arial"/>
-              </a:rPr>
-              <a:t>10–14%</a:t>
-            </a:r>
-            <a:r>
-              <a:rPr sz="1764" b="0" i="0">
-                <a:solidFill>
-                  <a:srgbClr val="12162E"/>
-                </a:solidFill>
-                <a:latin typeface="Arial"/>
-              </a:rPr>
-              <a:t> of outcomes and by itself buys </a:t>
-            </a:r>
-            <a:r>
-              <a:rPr sz="1764" b="1" i="0">
-                <a:solidFill>
-                  <a:srgbClr val="12162E"/>
-                </a:solidFill>
-                <a:latin typeface="Arial"/>
-              </a:rPr>
-              <a:t>2.0–7.6 pp</a:t>
-            </a:r>
-            <a:r>
-              <a:rPr sz="1764" b="0" i="0">
-                <a:solidFill>
-                  <a:srgbClr val="12162E"/>
-                </a:solidFill>
-                <a:latin typeface="Arial"/>
-              </a:rPr>
-              <a:t> of success (B0 · classifieds, six replicated modes, n=224).</a:t>
-            </a:r>
-          </a:p>
-          <a:p>
-            <a:pPr algn="l">
-              <a:lnSpc>
-                <a:spcPct val="120000"/>
-              </a:lnSpc>
-              <a:spcAft>
-                <a:spcPts val="992"/>
-              </a:spcAft>
-            </a:pPr>
-            <a:r>
-              <a:rPr sz="1764" b="0" i="0">
-                <a:solidFill>
-                  <a:srgbClr val="12162E"/>
-                </a:solidFill>
-                <a:latin typeface="Arial"/>
-              </a:rPr>
-              <a:t>Every gain on this sheet is read against that band, not against zero.</a:t>
-            </a:r>
-          </a:p>
-        </p:txBody>
-      </p:sp>
-      <p:sp>
-        <p:nvSpPr>
-          <p:cNvPr id="14" name="Rectangle 13"/>
-          <p:cNvSpPr/>
-          <p:nvPr/>
-        </p:nvSpPr>
-        <p:spPr>
-          <a:xfrm>
-            <a:off x="7534800" y="14112000"/>
-            <a:ext cx="177988" cy="177988"/>
-          </a:xfrm>
-          <a:prstGeom prst="rect">
-            <a:avLst/>
-          </a:prstGeom>
-          <a:solidFill>
-            <a:srgbClr val="AB5FCE"/>
-          </a:solidFill>
-          <a:ln>
-            <a:noFill/>
-          </a:ln>
-          <a:effectLst/>
-        </p:spPr>
-        <p:style>
-          <a:lnRef idx="1">
-            <a:schemeClr val="accent1"/>
-          </a:lnRef>
-          <a:fillRef idx="3">
-            <a:schemeClr val="accent1"/>
-          </a:fillRef>
-          <a:effectRef idx="2">
-            <a:schemeClr val="accent1"/>
-          </a:effectRef>
-          <a:fontRef idx="minor">
-            <a:schemeClr val="lt1"/>
-          </a:fontRef>
-        </p:style>
-        <p:txBody>
-          <a:bodyPr rtlCol="0" anchor="ctr"/>
-          <a:lstStyle/>
-          <a:p>
-            <a:pPr algn="ctr"/>
-            <a:endParaRPr/>
-          </a:p>
-        </p:txBody>
-      </p:sp>
-      <p:sp>
-        <p:nvSpPr>
-          <p:cNvPr id="15" name="TextBox 14"/>
-          <p:cNvSpPr txBox="1"/>
-          <p:nvPr/>
-        </p:nvSpPr>
-        <p:spPr>
-          <a:xfrm>
-            <a:off x="7839923" y="14068800"/>
-            <a:ext cx="6144827" cy="238912"/>
-          </a:xfrm>
-          <a:prstGeom prst="rect">
-            <a:avLst/>
-          </a:prstGeom>
-          <a:noFill/>
-        </p:spPr>
-        <p:txBody>
-          <a:bodyPr wrap="square" lIns="0" tIns="0" rIns="0" bIns="0" anchor="t">
-            <a:spAutoFit/>
-          </a:bodyPr>
-          <a:lstStyle/>
-          <a:p>
-            <a:pPr algn="l">
-              <a:lnSpc>
-                <a:spcPct val="118000"/>
-              </a:lnSpc>
-            </a:pPr>
-            <a:r>
-              <a:rPr sz="1412" b="1" i="0">
-                <a:solidFill>
-                  <a:srgbClr val="141E41"/>
-                </a:solidFill>
-                <a:latin typeface="Consolas"/>
-              </a:rPr>
-              <a:t>RESULTS</a:t>
-            </a:r>
-            <a:endParaRPr sz="1412" b="1" spc="180" dirty="0">
-              <a:solidFill>
-                <a:srgbClr val="141E41"/>
-              </a:solidFill>
-              <a:latin typeface="Consolas"/>
-            </a:endParaRPr>
-          </a:p>
-        </p:txBody>
-      </p:sp>
-      <p:sp>
-        <p:nvSpPr>
-          <p:cNvPr id="16" name="Rectangle 15"/>
-          <p:cNvSpPr/>
-          <p:nvPr/>
-        </p:nvSpPr>
-        <p:spPr>
-          <a:xfrm>
-            <a:off x="7534800" y="14429836"/>
-            <a:ext cx="1169636" cy="35597"/>
-          </a:xfrm>
-          <a:prstGeom prst="rect">
-            <a:avLst/>
-          </a:prstGeom>
-          <a:solidFill>
-            <a:srgbClr val="141E41"/>
-          </a:solidFill>
-          <a:ln>
-            <a:noFill/>
-          </a:ln>
-          <a:effectLst/>
-        </p:spPr>
-        <p:style>
-          <a:lnRef idx="1">
-            <a:schemeClr val="accent1"/>
-          </a:lnRef>
-          <a:fillRef idx="3">
-            <a:schemeClr val="accent1"/>
-          </a:fillRef>
-          <a:effectRef idx="2">
-            <a:schemeClr val="accent1"/>
-          </a:effectRef>
-          <a:fontRef idx="minor">
-            <a:schemeClr val="lt1"/>
-          </a:fontRef>
-        </p:style>
-        <p:txBody>
-          <a:bodyPr rtlCol="0" anchor="ctr"/>
-          <a:lstStyle/>
-          <a:p>
-            <a:pPr algn="ctr"/>
-            <a:endParaRPr/>
-          </a:p>
-        </p:txBody>
-      </p:sp>
-      <p:sp>
-        <p:nvSpPr>
-          <p:cNvPr id="17" name="Rectangle 16"/>
-          <p:cNvSpPr/>
-          <p:nvPr/>
-        </p:nvSpPr>
-        <p:spPr>
-          <a:xfrm>
-            <a:off x="8704436" y="14440007"/>
-            <a:ext cx="12085564" cy="15256"/>
-          </a:xfrm>
-          <a:prstGeom prst="rect">
-            <a:avLst/>
-          </a:prstGeom>
-          <a:solidFill>
-            <a:srgbClr val="DDE3F2"/>
-          </a:solidFill>
-          <a:ln>
-            <a:noFill/>
-          </a:ln>
-          <a:effectLst/>
-        </p:spPr>
-        <p:style>
-          <a:lnRef idx="1">
-            <a:schemeClr val="accent1"/>
-          </a:lnRef>
-          <a:fillRef idx="3">
-            <a:schemeClr val="accent1"/>
-          </a:fillRef>
-          <a:effectRef idx="2">
-            <a:schemeClr val="accent1"/>
-          </a:effectRef>
-          <a:fontRef idx="minor">
-            <a:schemeClr val="lt1"/>
-          </a:fontRef>
-        </p:style>
-        <p:txBody>
-          <a:bodyPr rtlCol="0" anchor="ctr"/>
-          <a:lstStyle/>
-          <a:p>
-            <a:pPr algn="ctr"/>
-            <a:endParaRPr/>
-          </a:p>
-        </p:txBody>
-      </p:sp>
-      <p:sp>
-        <p:nvSpPr>
-          <p:cNvPr id="100" name="Rectangle 99"/>
-          <p:cNvSpPr/>
-          <p:nvPr/>
-        </p:nvSpPr>
-        <p:spPr>
-          <a:xfrm>
-            <a:off x="7534800" y="14652000"/>
-            <a:ext cx="13255200" cy="1170000"/>
-          </a:xfrm>
-          <a:prstGeom prst="rect">
-            <a:avLst/>
-          </a:prstGeom>
-          <a:solidFill>
-            <a:srgbClr val="ECEFFA"/>
-          </a:solidFill>
-          <a:ln>
-            <a:noFill/>
-          </a:ln>
-          <a:effectLst/>
-        </p:spPr>
-        <p:style>
-          <a:lnRef idx="1">
-            <a:schemeClr val="accent1"/>
-          </a:lnRef>
-          <a:fillRef idx="3">
-            <a:schemeClr val="accent1"/>
-          </a:fillRef>
-          <a:effectRef idx="2">
-            <a:schemeClr val="accent1"/>
-          </a:effectRef>
-          <a:fontRef idx="minor">
-            <a:schemeClr val="lt1"/>
-          </a:fontRef>
-        </p:style>
-        <p:txBody>
-          <a:bodyPr rtlCol="0" anchor="ctr" wrap="square"/>
-          <a:lstStyle/>
-          <a:p>
-            <a:pPr algn="ctr"/>
-          </a:p>
-        </p:txBody>
-      </p:sp>
-      <p:sp>
-        <p:nvSpPr>
-          <p:cNvPr id="101" name="TextBox 100"/>
-          <p:cNvSpPr txBox="1"/>
-          <p:nvPr/>
-        </p:nvSpPr>
-        <p:spPr>
-          <a:xfrm>
-            <a:off x="7786800" y="14832000"/>
-            <a:ext cx="4250400" cy="612000"/>
-          </a:xfrm>
-          <a:prstGeom prst="rect">
-            <a:avLst/>
-          </a:prstGeom>
-          <a:noFill/>
-        </p:spPr>
-        <p:txBody>
-          <a:bodyPr wrap="square" lIns="0" rIns="0" tIns="0" bIns="0">
-            <a:spAutoFit/>
-          </a:bodyPr>
-          <a:lstStyle/>
-          <a:p>
-            <a:pPr algn="l">
-              <a:lnSpc>
-                <a:spcPct val="118000"/>
-              </a:lnSpc>
-              <a:spcAft>
-                <a:spcPts val="0"/>
-              </a:spcAft>
-            </a:pPr>
-            <a:r>
-              <a:rPr sz="3247" b="1" i="0">
-                <a:solidFill>
-                  <a:srgbClr val="141E41"/>
-                </a:solidFill>
-                <a:latin typeface="Consolas"/>
-              </a:rPr>
-              <a:t>+16.35 pp</a:t>
-            </a:r>
-          </a:p>
-        </p:txBody>
-      </p:sp>
-      <p:sp>
-        <p:nvSpPr>
-          <p:cNvPr id="102" name="TextBox 101"/>
-          <p:cNvSpPr txBox="1"/>
-          <p:nvPr/>
-        </p:nvSpPr>
-        <p:spPr>
-          <a:xfrm>
-            <a:off x="7786800" y="15390000"/>
-            <a:ext cx="4250400" cy="324000"/>
-          </a:xfrm>
-          <a:prstGeom prst="rect">
-            <a:avLst/>
-          </a:prstGeom>
-          <a:noFill/>
-        </p:spPr>
-        <p:txBody>
-          <a:bodyPr wrap="square" lIns="0" rIns="0" tIns="0" bIns="0">
-            <a:spAutoFit/>
-          </a:bodyPr>
-          <a:lstStyle/>
-          <a:p>
-            <a:pPr algn="l">
-              <a:lnSpc>
-                <a:spcPct val="118000"/>
-              </a:lnSpc>
-              <a:spcAft>
-                <a:spcPts val="0"/>
-              </a:spcAft>
-            </a:pPr>
-            <a:r>
-              <a:rPr sz="1059" b="0" i="0">
-                <a:solidFill>
-                  <a:srgbClr val="5D6787"/>
-                </a:solidFill>
-                <a:latin typeface="Consolas"/>
-              </a:rPr>
-              <a:t>CEILING, LARGEST OF 8 · VS BEST FIXED MODE</a:t>
-            </a:r>
-          </a:p>
-        </p:txBody>
-      </p:sp>
-      <p:sp>
-        <p:nvSpPr>
-          <p:cNvPr id="103" name="TextBox 102"/>
-          <p:cNvSpPr txBox="1"/>
-          <p:nvPr/>
-        </p:nvSpPr>
-        <p:spPr>
-          <a:xfrm>
-            <a:off x="12037200" y="14832000"/>
-            <a:ext cx="4250400" cy="612000"/>
-          </a:xfrm>
-          <a:prstGeom prst="rect">
-            <a:avLst/>
-          </a:prstGeom>
-          <a:noFill/>
-        </p:spPr>
-        <p:txBody>
-          <a:bodyPr wrap="square" lIns="0" rIns="0" tIns="0" bIns="0">
-            <a:spAutoFit/>
-          </a:bodyPr>
-          <a:lstStyle/>
-          <a:p>
-            <a:pPr algn="l">
-              <a:lnSpc>
-                <a:spcPct val="118000"/>
-              </a:lnSpc>
-              <a:spcAft>
-                <a:spcPts val="0"/>
-              </a:spcAft>
-            </a:pPr>
-            <a:r>
-              <a:rPr sz="3247" b="1" i="0">
-                <a:solidFill>
-                  <a:srgbClr val="141E41"/>
-                </a:solidFill>
-                <a:latin typeface="Consolas"/>
-              </a:rPr>
-              <a:t>0 of 8</a:t>
-            </a:r>
-          </a:p>
-        </p:txBody>
-      </p:sp>
-      <p:sp>
-        <p:nvSpPr>
-          <p:cNvPr id="104" name="TextBox 103"/>
-          <p:cNvSpPr txBox="1"/>
-          <p:nvPr/>
-        </p:nvSpPr>
-        <p:spPr>
-          <a:xfrm>
-            <a:off x="12037200" y="15390000"/>
-            <a:ext cx="4250400" cy="324000"/>
-          </a:xfrm>
-          <a:prstGeom prst="rect">
-            <a:avLst/>
-          </a:prstGeom>
-          <a:noFill/>
-        </p:spPr>
-        <p:txBody>
-          <a:bodyPr wrap="square" lIns="0" rIns="0" tIns="0" bIns="0">
-            <a:spAutoFit/>
-          </a:bodyPr>
-          <a:lstStyle/>
-          <a:p>
-            <a:pPr algn="l">
-              <a:lnSpc>
-                <a:spcPct val="118000"/>
-              </a:lnSpc>
-              <a:spcAft>
-                <a:spcPts val="0"/>
-              </a:spcAft>
-            </a:pPr>
-            <a:r>
-              <a:rPr sz="1059" b="0" i="0">
-                <a:solidFill>
-                  <a:srgbClr val="5D6787"/>
-                </a:solidFill>
-                <a:latin typeface="Consolas"/>
-              </a:rPr>
-              <a:t>LEARNED ROUTERS BEAT ALWAYS-CHEAPEST</a:t>
-            </a:r>
-          </a:p>
-        </p:txBody>
-      </p:sp>
-      <p:sp>
-        <p:nvSpPr>
-          <p:cNvPr id="105" name="TextBox 104"/>
-          <p:cNvSpPr txBox="1"/>
-          <p:nvPr/>
-        </p:nvSpPr>
-        <p:spPr>
-          <a:xfrm>
-            <a:off x="16287600" y="14832000"/>
-            <a:ext cx="4250400" cy="612000"/>
-          </a:xfrm>
-          <a:prstGeom prst="rect">
-            <a:avLst/>
-          </a:prstGeom>
-          <a:noFill/>
-        </p:spPr>
-        <p:txBody>
-          <a:bodyPr wrap="square" lIns="0" rIns="0" tIns="0" bIns="0">
-            <a:spAutoFit/>
-          </a:bodyPr>
-          <a:lstStyle/>
-          <a:p>
-            <a:pPr algn="l">
-              <a:lnSpc>
-                <a:spcPct val="118000"/>
-              </a:lnSpc>
-              <a:spcAft>
-                <a:spcPts val="0"/>
-              </a:spcAft>
-            </a:pPr>
-            <a:r>
-              <a:rPr sz="3247" b="1" i="0">
-                <a:solidFill>
-                  <a:srgbClr val="141E41"/>
-                </a:solidFill>
-                <a:latin typeface="Consolas"/>
-              </a:rPr>
-              <a:t>1 of 8</a:t>
-            </a:r>
-          </a:p>
-        </p:txBody>
-      </p:sp>
-      <p:sp>
-        <p:nvSpPr>
-          <p:cNvPr id="106" name="TextBox 105"/>
-          <p:cNvSpPr txBox="1"/>
-          <p:nvPr/>
-        </p:nvSpPr>
-        <p:spPr>
-          <a:xfrm>
-            <a:off x="16287600" y="15390000"/>
-            <a:ext cx="4250400" cy="324000"/>
-          </a:xfrm>
-          <a:prstGeom prst="rect">
-            <a:avLst/>
-          </a:prstGeom>
-          <a:noFill/>
-        </p:spPr>
-        <p:txBody>
-          <a:bodyPr wrap="square" lIns="0" rIns="0" tIns="0" bIns="0">
-            <a:spAutoFit/>
-          </a:bodyPr>
-          <a:lstStyle/>
-          <a:p>
-            <a:pPr algn="l">
-              <a:lnSpc>
-                <a:spcPct val="118000"/>
-              </a:lnSpc>
-              <a:spcAft>
-                <a:spcPts val="0"/>
-              </a:spcAft>
-            </a:pPr>
-            <a:r>
-              <a:rPr sz="1059" b="0" i="0">
-                <a:solidFill>
-                  <a:srgbClr val="5D6787"/>
-                </a:solidFill>
-                <a:latin typeface="Consolas"/>
-              </a:rPr>
-              <a:t>HINDSIGHT ORACLES BEAT ALWAYS-CHEAPEST</a:t>
-            </a:r>
-          </a:p>
-        </p:txBody>
-      </p:sp>
-      <p:sp>
-        <p:nvSpPr>
-          <p:cNvPr id="107" name="Rectangle 106"/>
-          <p:cNvSpPr/>
-          <p:nvPr/>
-        </p:nvSpPr>
-        <p:spPr>
-          <a:xfrm>
-            <a:off x="7534800" y="15966000"/>
-            <a:ext cx="13255200" cy="7435350"/>
+            <a:off x="9151200" y="5580000"/>
+            <a:ext cx="4248000" cy="1296000"/>
           </a:xfrm>
           <a:prstGeom prst="rect">
             <a:avLst/>
@@ -6170,14 +4883,662 @@
       </p:sp>
       <p:sp>
         <p:nvSpPr>
+          <p:cNvPr id="98" name="Rectangle 97"/>
+          <p:cNvSpPr/>
+          <p:nvPr/>
+        </p:nvSpPr>
+        <p:spPr>
+          <a:xfrm>
+            <a:off x="9151200" y="5580000"/>
+            <a:ext cx="4248000" cy="50400"/>
+          </a:xfrm>
+          <a:prstGeom prst="rect">
+            <a:avLst/>
+          </a:prstGeom>
+          <a:solidFill>
+            <a:srgbClr val="1F5FD6"/>
+          </a:solidFill>
+          <a:ln>
+            <a:noFill/>
+          </a:ln>
+          <a:effectLst/>
+        </p:spPr>
+        <p:style>
+          <a:lnRef idx="1">
+            <a:schemeClr val="accent1"/>
+          </a:lnRef>
+          <a:fillRef idx="3">
+            <a:schemeClr val="accent1"/>
+          </a:fillRef>
+          <a:effectRef idx="2">
+            <a:schemeClr val="accent1"/>
+          </a:effectRef>
+          <a:fontRef idx="minor">
+            <a:schemeClr val="lt1"/>
+          </a:fontRef>
+        </p:style>
+        <p:txBody>
+          <a:bodyPr rtlCol="0" anchor="ctr" wrap="square"/>
+          <a:lstStyle/>
+          <a:p>
+            <a:pPr algn="ctr"/>
+          </a:p>
+        </p:txBody>
+      </p:sp>
+      <p:sp>
+        <p:nvSpPr>
+          <p:cNvPr id="99" name="TextBox 98"/>
+          <p:cNvSpPr txBox="1"/>
+          <p:nvPr/>
+        </p:nvSpPr>
+        <p:spPr>
+          <a:xfrm>
+            <a:off x="9331200" y="5742000"/>
+            <a:ext cx="1440000" cy="288000"/>
+          </a:xfrm>
+          <a:prstGeom prst="rect">
+            <a:avLst/>
+          </a:prstGeom>
+          <a:noFill/>
+        </p:spPr>
+        <p:txBody>
+          <a:bodyPr wrap="square" lIns="0" rIns="0" tIns="0" bIns="0">
+            <a:spAutoFit/>
+          </a:bodyPr>
+          <a:lstStyle/>
+          <a:p>
+            <a:pPr algn="l">
+              <a:lnSpc>
+                <a:spcPct val="120000"/>
+              </a:lnSpc>
+              <a:spcAft>
+                <a:spcPts val="0"/>
+              </a:spcAft>
+            </a:pPr>
+            <a:r>
+              <a:rPr sz="1764" b="1" i="0">
+                <a:solidFill>
+                  <a:srgbClr val="1F5FD6"/>
+                </a:solidFill>
+                <a:latin typeface="Consolas"/>
+              </a:rPr>
+              <a:t>LOOK</a:t>
+            </a:r>
+          </a:p>
+        </p:txBody>
+      </p:sp>
+      <p:sp>
+        <p:nvSpPr>
+          <p:cNvPr id="100" name="TextBox 99"/>
+          <p:cNvSpPr txBox="1"/>
+          <p:nvPr/>
+        </p:nvSpPr>
+        <p:spPr>
+          <a:xfrm>
+            <a:off x="9331200" y="6084000"/>
+            <a:ext cx="3888000" cy="288000"/>
+          </a:xfrm>
+          <a:prstGeom prst="rect">
+            <a:avLst/>
+          </a:prstGeom>
+          <a:noFill/>
+        </p:spPr>
+        <p:txBody>
+          <a:bodyPr wrap="square" lIns="0" rIns="0" tIns="0" bIns="0">
+            <a:spAutoFit/>
+          </a:bodyPr>
+          <a:lstStyle/>
+          <a:p>
+            <a:pPr algn="l">
+              <a:lnSpc>
+                <a:spcPct val="120000"/>
+              </a:lnSpc>
+              <a:spcAft>
+                <a:spcPts val="0"/>
+              </a:spcAft>
+            </a:pPr>
+            <a:r>
+              <a:rPr sz="1764" b="1" i="0">
+                <a:solidFill>
+                  <a:srgbClr val="141E41"/>
+                </a:solidFill>
+                <a:latin typeface="Arial"/>
+              </a:rPr>
+              <a:t>screenshot only</a:t>
+            </a:r>
+          </a:p>
+        </p:txBody>
+      </p:sp>
+      <p:sp>
+        <p:nvSpPr>
+          <p:cNvPr id="101" name="TextBox 100"/>
+          <p:cNvSpPr txBox="1"/>
+          <p:nvPr/>
+        </p:nvSpPr>
+        <p:spPr>
+          <a:xfrm>
+            <a:off x="9331200" y="6408000"/>
+            <a:ext cx="3888000" cy="396000"/>
+          </a:xfrm>
+          <a:prstGeom prst="rect">
+            <a:avLst/>
+          </a:prstGeom>
+          <a:noFill/>
+        </p:spPr>
+        <p:txBody>
+          <a:bodyPr wrap="square" lIns="0" rIns="0" tIns="0" bIns="0">
+            <a:spAutoFit/>
+          </a:bodyPr>
+          <a:lstStyle/>
+          <a:p>
+            <a:pPr algn="l">
+              <a:lnSpc>
+                <a:spcPct val="132000"/>
+              </a:lnSpc>
+              <a:spcAft>
+                <a:spcPts val="0"/>
+              </a:spcAft>
+            </a:pPr>
+            <a:r>
+              <a:rPr sz="1271" b="0" i="0">
+                <a:solidFill>
+                  <a:srgbClr val="5D6787"/>
+                </a:solidFill>
+                <a:latin typeface="Arial"/>
+              </a:rPr>
+              <a:t>3,123 tokens on one real page</a:t>
+            </a:r>
+          </a:p>
+        </p:txBody>
+      </p:sp>
+      <p:sp>
+        <p:nvSpPr>
+          <p:cNvPr id="102" name="Rectangle 101"/>
+          <p:cNvSpPr/>
+          <p:nvPr/>
+        </p:nvSpPr>
+        <p:spPr>
+          <a:xfrm>
+            <a:off x="9151200" y="7056000"/>
+            <a:ext cx="4248000" cy="1296000"/>
+          </a:xfrm>
+          <a:prstGeom prst="rect">
+            <a:avLst/>
+          </a:prstGeom>
+          <a:solidFill>
+            <a:srgbClr val="F7F9FD"/>
+          </a:solidFill>
+          <a:ln w="8890">
+            <a:solidFill>
+              <a:srgbClr val="DDE3F2"/>
+            </a:solidFill>
+          </a:ln>
+          <a:effectLst/>
+        </p:spPr>
+        <p:style>
+          <a:lnRef idx="1">
+            <a:schemeClr val="accent1"/>
+          </a:lnRef>
+          <a:fillRef idx="3">
+            <a:schemeClr val="accent1"/>
+          </a:fillRef>
+          <a:effectRef idx="2">
+            <a:schemeClr val="accent1"/>
+          </a:effectRef>
+          <a:fontRef idx="minor">
+            <a:schemeClr val="lt1"/>
+          </a:fontRef>
+        </p:style>
+        <p:txBody>
+          <a:bodyPr rtlCol="0" anchor="ctr" wrap="square"/>
+          <a:lstStyle/>
+          <a:p>
+            <a:pPr algn="ctr"/>
+          </a:p>
+        </p:txBody>
+      </p:sp>
+      <p:sp>
+        <p:nvSpPr>
+          <p:cNvPr id="103" name="Rectangle 102"/>
+          <p:cNvSpPr/>
+          <p:nvPr/>
+        </p:nvSpPr>
+        <p:spPr>
+          <a:xfrm>
+            <a:off x="9151200" y="7056000"/>
+            <a:ext cx="4248000" cy="50400"/>
+          </a:xfrm>
+          <a:prstGeom prst="rect">
+            <a:avLst/>
+          </a:prstGeom>
+          <a:solidFill>
+            <a:srgbClr val="E8720C"/>
+          </a:solidFill>
+          <a:ln>
+            <a:noFill/>
+          </a:ln>
+          <a:effectLst/>
+        </p:spPr>
+        <p:style>
+          <a:lnRef idx="1">
+            <a:schemeClr val="accent1"/>
+          </a:lnRef>
+          <a:fillRef idx="3">
+            <a:schemeClr val="accent1"/>
+          </a:fillRef>
+          <a:effectRef idx="2">
+            <a:schemeClr val="accent1"/>
+          </a:effectRef>
+          <a:fontRef idx="minor">
+            <a:schemeClr val="lt1"/>
+          </a:fontRef>
+        </p:style>
+        <p:txBody>
+          <a:bodyPr rtlCol="0" anchor="ctr" wrap="square"/>
+          <a:lstStyle/>
+          <a:p>
+            <a:pPr algn="ctr"/>
+          </a:p>
+        </p:txBody>
+      </p:sp>
+      <p:sp>
+        <p:nvSpPr>
+          <p:cNvPr id="104" name="TextBox 103"/>
+          <p:cNvSpPr txBox="1"/>
+          <p:nvPr/>
+        </p:nvSpPr>
+        <p:spPr>
+          <a:xfrm>
+            <a:off x="9331200" y="7218000"/>
+            <a:ext cx="1440000" cy="288000"/>
+          </a:xfrm>
+          <a:prstGeom prst="rect">
+            <a:avLst/>
+          </a:prstGeom>
+          <a:noFill/>
+        </p:spPr>
+        <p:txBody>
+          <a:bodyPr wrap="square" lIns="0" rIns="0" tIns="0" bIns="0">
+            <a:spAutoFit/>
+          </a:bodyPr>
+          <a:lstStyle/>
+          <a:p>
+            <a:pPr algn="l">
+              <a:lnSpc>
+                <a:spcPct val="120000"/>
+              </a:lnSpc>
+              <a:spcAft>
+                <a:spcPts val="0"/>
+              </a:spcAft>
+            </a:pPr>
+            <a:r>
+              <a:rPr sz="1764" b="1" i="0">
+                <a:solidFill>
+                  <a:srgbClr val="E8720C"/>
+                </a:solidFill>
+                <a:latin typeface="Consolas"/>
+              </a:rPr>
+              <a:t>READ</a:t>
+            </a:r>
+          </a:p>
+        </p:txBody>
+      </p:sp>
+      <p:sp>
+        <p:nvSpPr>
+          <p:cNvPr id="105" name="TextBox 104"/>
+          <p:cNvSpPr txBox="1"/>
+          <p:nvPr/>
+        </p:nvSpPr>
+        <p:spPr>
+          <a:xfrm>
+            <a:off x="9331200" y="7560000"/>
+            <a:ext cx="3888000" cy="288000"/>
+          </a:xfrm>
+          <a:prstGeom prst="rect">
+            <a:avLst/>
+          </a:prstGeom>
+          <a:noFill/>
+        </p:spPr>
+        <p:txBody>
+          <a:bodyPr wrap="square" lIns="0" rIns="0" tIns="0" bIns="0">
+            <a:spAutoFit/>
+          </a:bodyPr>
+          <a:lstStyle/>
+          <a:p>
+            <a:pPr algn="l">
+              <a:lnSpc>
+                <a:spcPct val="120000"/>
+              </a:lnSpc>
+              <a:spcAft>
+                <a:spcPts val="0"/>
+              </a:spcAft>
+            </a:pPr>
+            <a:r>
+              <a:rPr sz="1764" b="1" i="0">
+                <a:solidFill>
+                  <a:srgbClr val="141E41"/>
+                </a:solidFill>
+                <a:latin typeface="Arial"/>
+              </a:rPr>
+              <a:t>accessibility-tree text only</a:t>
+            </a:r>
+          </a:p>
+        </p:txBody>
+      </p:sp>
+      <p:sp>
+        <p:nvSpPr>
+          <p:cNvPr id="106" name="TextBox 105"/>
+          <p:cNvSpPr txBox="1"/>
+          <p:nvPr/>
+        </p:nvSpPr>
+        <p:spPr>
+          <a:xfrm>
+            <a:off x="9331200" y="7884000"/>
+            <a:ext cx="3888000" cy="396000"/>
+          </a:xfrm>
+          <a:prstGeom prst="rect">
+            <a:avLst/>
+          </a:prstGeom>
+          <a:noFill/>
+        </p:spPr>
+        <p:txBody>
+          <a:bodyPr wrap="square" lIns="0" rIns="0" tIns="0" bIns="0">
+            <a:spAutoFit/>
+          </a:bodyPr>
+          <a:lstStyle/>
+          <a:p>
+            <a:pPr algn="l">
+              <a:lnSpc>
+                <a:spcPct val="132000"/>
+              </a:lnSpc>
+              <a:spcAft>
+                <a:spcPts val="0"/>
+              </a:spcAft>
+            </a:pPr>
+            <a:r>
+              <a:rPr sz="1271" b="0" i="0">
+                <a:solidFill>
+                  <a:srgbClr val="5D6787"/>
+                </a:solidFill>
+                <a:latin typeface="Arial"/>
+              </a:rPr>
+              <a:t>3,314 tokens · plus three text-only variants</a:t>
+            </a:r>
+          </a:p>
+        </p:txBody>
+      </p:sp>
+      <p:sp>
+        <p:nvSpPr>
+          <p:cNvPr id="107" name="Rectangle 106"/>
+          <p:cNvSpPr/>
+          <p:nvPr/>
+        </p:nvSpPr>
+        <p:spPr>
+          <a:xfrm>
+            <a:off x="9151200" y="8532000"/>
+            <a:ext cx="4248000" cy="1296000"/>
+          </a:xfrm>
+          <a:prstGeom prst="rect">
+            <a:avLst/>
+          </a:prstGeom>
+          <a:solidFill>
+            <a:srgbClr val="F7F9FD"/>
+          </a:solidFill>
+          <a:ln w="8890">
+            <a:solidFill>
+              <a:srgbClr val="DDE3F2"/>
+            </a:solidFill>
+          </a:ln>
+          <a:effectLst/>
+        </p:spPr>
+        <p:style>
+          <a:lnRef idx="1">
+            <a:schemeClr val="accent1"/>
+          </a:lnRef>
+          <a:fillRef idx="3">
+            <a:schemeClr val="accent1"/>
+          </a:fillRef>
+          <a:effectRef idx="2">
+            <a:schemeClr val="accent1"/>
+          </a:effectRef>
+          <a:fontRef idx="minor">
+            <a:schemeClr val="lt1"/>
+          </a:fontRef>
+        </p:style>
+        <p:txBody>
+          <a:bodyPr rtlCol="0" anchor="ctr" wrap="square"/>
+          <a:lstStyle/>
+          <a:p>
+            <a:pPr algn="ctr"/>
+          </a:p>
+        </p:txBody>
+      </p:sp>
+      <p:sp>
+        <p:nvSpPr>
           <p:cNvPr id="108" name="Rectangle 107"/>
           <p:cNvSpPr/>
           <p:nvPr/>
         </p:nvSpPr>
         <p:spPr>
           <a:xfrm>
-            <a:off x="7534800" y="15966000"/>
-            <a:ext cx="13255200" cy="50400"/>
+            <a:off x="9151200" y="8532000"/>
+            <a:ext cx="4248000" cy="50400"/>
+          </a:xfrm>
+          <a:prstGeom prst="rect">
+            <a:avLst/>
+          </a:prstGeom>
+          <a:solidFill>
+            <a:srgbClr val="14855F"/>
+          </a:solidFill>
+          <a:ln>
+            <a:noFill/>
+          </a:ln>
+          <a:effectLst/>
+        </p:spPr>
+        <p:style>
+          <a:lnRef idx="1">
+            <a:schemeClr val="accent1"/>
+          </a:lnRef>
+          <a:fillRef idx="3">
+            <a:schemeClr val="accent1"/>
+          </a:fillRef>
+          <a:effectRef idx="2">
+            <a:schemeClr val="accent1"/>
+          </a:effectRef>
+          <a:fontRef idx="minor">
+            <a:schemeClr val="lt1"/>
+          </a:fontRef>
+        </p:style>
+        <p:txBody>
+          <a:bodyPr rtlCol="0" anchor="ctr" wrap="square"/>
+          <a:lstStyle/>
+          <a:p>
+            <a:pPr algn="ctr"/>
+          </a:p>
+        </p:txBody>
+      </p:sp>
+      <p:sp>
+        <p:nvSpPr>
+          <p:cNvPr id="109" name="TextBox 108"/>
+          <p:cNvSpPr txBox="1"/>
+          <p:nvPr/>
+        </p:nvSpPr>
+        <p:spPr>
+          <a:xfrm>
+            <a:off x="9331200" y="8694000"/>
+            <a:ext cx="1440000" cy="288000"/>
+          </a:xfrm>
+          <a:prstGeom prst="rect">
+            <a:avLst/>
+          </a:prstGeom>
+          <a:noFill/>
+        </p:spPr>
+        <p:txBody>
+          <a:bodyPr wrap="square" lIns="0" rIns="0" tIns="0" bIns="0">
+            <a:spAutoFit/>
+          </a:bodyPr>
+          <a:lstStyle/>
+          <a:p>
+            <a:pPr algn="l">
+              <a:lnSpc>
+                <a:spcPct val="120000"/>
+              </a:lnSpc>
+              <a:spcAft>
+                <a:spcPts val="0"/>
+              </a:spcAft>
+            </a:pPr>
+            <a:r>
+              <a:rPr sz="1764" b="1" i="0">
+                <a:solidFill>
+                  <a:srgbClr val="14855F"/>
+                </a:solidFill>
+                <a:latin typeface="Consolas"/>
+              </a:rPr>
+              <a:t>BOTH</a:t>
+            </a:r>
+          </a:p>
+        </p:txBody>
+      </p:sp>
+      <p:sp>
+        <p:nvSpPr>
+          <p:cNvPr id="110" name="TextBox 109"/>
+          <p:cNvSpPr txBox="1"/>
+          <p:nvPr/>
+        </p:nvSpPr>
+        <p:spPr>
+          <a:xfrm>
+            <a:off x="9331200" y="9036000"/>
+            <a:ext cx="3888000" cy="288000"/>
+          </a:xfrm>
+          <a:prstGeom prst="rect">
+            <a:avLst/>
+          </a:prstGeom>
+          <a:noFill/>
+        </p:spPr>
+        <p:txBody>
+          <a:bodyPr wrap="square" lIns="0" rIns="0" tIns="0" bIns="0">
+            <a:spAutoFit/>
+          </a:bodyPr>
+          <a:lstStyle/>
+          <a:p>
+            <a:pPr algn="l">
+              <a:lnSpc>
+                <a:spcPct val="120000"/>
+              </a:lnSpc>
+              <a:spcAft>
+                <a:spcPts val="0"/>
+              </a:spcAft>
+            </a:pPr>
+            <a:r>
+              <a:rPr sz="1764" b="1" i="0">
+                <a:solidFill>
+                  <a:srgbClr val="141E41"/>
+                </a:solidFill>
+                <a:latin typeface="Arial"/>
+              </a:rPr>
+              <a:t>marked screenshot + text</a:t>
+            </a:r>
+          </a:p>
+        </p:txBody>
+      </p:sp>
+      <p:sp>
+        <p:nvSpPr>
+          <p:cNvPr id="111" name="TextBox 110"/>
+          <p:cNvSpPr txBox="1"/>
+          <p:nvPr/>
+        </p:nvSpPr>
+        <p:spPr>
+          <a:xfrm>
+            <a:off x="9331200" y="9360000"/>
+            <a:ext cx="3888000" cy="396000"/>
+          </a:xfrm>
+          <a:prstGeom prst="rect">
+            <a:avLst/>
+          </a:prstGeom>
+          <a:noFill/>
+        </p:spPr>
+        <p:txBody>
+          <a:bodyPr wrap="square" lIns="0" rIns="0" tIns="0" bIns="0">
+            <a:spAutoFit/>
+          </a:bodyPr>
+          <a:lstStyle/>
+          <a:p>
+            <a:pPr algn="l">
+              <a:lnSpc>
+                <a:spcPct val="132000"/>
+              </a:lnSpc>
+              <a:spcAft>
+                <a:spcPts val="0"/>
+              </a:spcAft>
+            </a:pPr>
+            <a:r>
+              <a:rPr sz="1271" b="0" i="0">
+                <a:solidFill>
+                  <a:srgbClr val="5D6787"/>
+                </a:solidFill>
+                <a:latin typeface="Arial"/>
+              </a:rPr>
+              <a:t>4,335 tokens</a:t>
+            </a:r>
+          </a:p>
+        </p:txBody>
+      </p:sp>
+      <p:sp>
+        <p:nvSpPr>
+          <p:cNvPr id="112" name="Rectangle 111"/>
+          <p:cNvSpPr/>
+          <p:nvPr/>
+        </p:nvSpPr>
+        <p:spPr>
+          <a:xfrm>
+            <a:off x="13903200" y="5580000"/>
+            <a:ext cx="3312000" cy="4248000"/>
+          </a:xfrm>
+          <a:prstGeom prst="rect">
+            <a:avLst/>
+          </a:prstGeom>
+          <a:solidFill>
+            <a:srgbClr val="F7F9FD"/>
+          </a:solidFill>
+          <a:ln w="8890">
+            <a:solidFill>
+              <a:srgbClr val="DDE3F2"/>
+            </a:solidFill>
+          </a:ln>
+          <a:effectLst/>
+        </p:spPr>
+        <p:style>
+          <a:lnRef idx="1">
+            <a:schemeClr val="accent1"/>
+          </a:lnRef>
+          <a:fillRef idx="3">
+            <a:schemeClr val="accent1"/>
+          </a:fillRef>
+          <a:effectRef idx="2">
+            <a:schemeClr val="accent1"/>
+          </a:effectRef>
+          <a:fontRef idx="minor">
+            <a:schemeClr val="lt1"/>
+          </a:fontRef>
+        </p:style>
+        <p:txBody>
+          <a:bodyPr rtlCol="0" anchor="ctr" wrap="square"/>
+          <a:lstStyle/>
+          <a:p>
+            <a:pPr algn="ctr"/>
+          </a:p>
+        </p:txBody>
+      </p:sp>
+      <p:sp>
+        <p:nvSpPr>
+          <p:cNvPr id="113" name="Rectangle 112"/>
+          <p:cNvSpPr/>
+          <p:nvPr/>
+        </p:nvSpPr>
+        <p:spPr>
+          <a:xfrm>
+            <a:off x="13903200" y="5580000"/>
+            <a:ext cx="3312000" cy="50400"/>
           </a:xfrm>
           <a:prstGeom prst="rect">
             <a:avLst/>
@@ -6212,40 +5573,100 @@
           </a:p>
         </p:txBody>
       </p:sp>
-      <p:pic>
-        <p:nvPicPr>
-          <p:cNvPr id="109" name="Picture 108" descr="poster_dominance_plane.png"/>
-          <p:cNvPicPr>
-            <a:picLocks noChangeAspect="1"/>
-          </p:cNvPicPr>
-          <p:nvPr/>
-        </p:nvPicPr>
-        <p:blipFill>
-          <a:blip r:embed="rId6"/>
-          <a:stretch>
-            <a:fillRect/>
-          </a:stretch>
-        </p:blipFill>
-        <p:spPr>
-          <a:xfrm>
-            <a:off x="7642800" y="16124400"/>
-            <a:ext cx="13039200" cy="7168951"/>
-          </a:xfrm>
-          <a:prstGeom prst="rect">
-            <a:avLst/>
-          </a:prstGeom>
-        </p:spPr>
-      </p:pic>
-      <p:sp>
-        <p:nvSpPr>
-          <p:cNvPr id="110" name="TextBox 109"/>
+      <p:sp>
+        <p:nvSpPr>
+          <p:cNvPr id="114" name="TextBox 113"/>
           <p:cNvSpPr txBox="1"/>
           <p:nvPr/>
         </p:nvSpPr>
         <p:spPr>
           <a:xfrm>
-            <a:off x="7534800" y="23491350"/>
-            <a:ext cx="13255200" cy="511369"/>
+            <a:off x="14083200" y="5724000"/>
+            <a:ext cx="2952000" cy="216000"/>
+          </a:xfrm>
+          <a:prstGeom prst="rect">
+            <a:avLst/>
+          </a:prstGeom>
+          <a:noFill/>
+        </p:spPr>
+        <p:txBody>
+          <a:bodyPr wrap="square" lIns="0" rIns="0" tIns="0" bIns="0">
+            <a:spAutoFit/>
+          </a:bodyPr>
+          <a:lstStyle/>
+          <a:p>
+            <a:pPr algn="l">
+              <a:lnSpc>
+                <a:spcPct val="120000"/>
+              </a:lnSpc>
+              <a:spcAft>
+                <a:spcPts val="0"/>
+              </a:spcAft>
+            </a:pPr>
+            <a:r>
+              <a:rPr sz="1059" b="0" i="0">
+                <a:solidFill>
+                  <a:srgbClr val="5D6787"/>
+                </a:solidFill>
+                <a:latin typeface="Consolas"/>
+              </a:rPr>
+              <a:t>AGENT, ONE STEP AT A TIME</a:t>
+            </a:r>
+          </a:p>
+        </p:txBody>
+      </p:sp>
+      <p:sp>
+        <p:nvSpPr>
+          <p:cNvPr id="115" name="TextBox 114"/>
+          <p:cNvSpPr txBox="1"/>
+          <p:nvPr/>
+        </p:nvSpPr>
+        <p:spPr>
+          <a:xfrm>
+            <a:off x="14083200" y="5958000"/>
+            <a:ext cx="2952000" cy="322781"/>
+          </a:xfrm>
+          <a:prstGeom prst="rect">
+            <a:avLst/>
+          </a:prstGeom>
+          <a:noFill/>
+        </p:spPr>
+        <p:txBody>
+          <a:bodyPr wrap="square" lIns="0" rIns="0" tIns="0" bIns="0">
+            <a:spAutoFit/>
+          </a:bodyPr>
+          <a:lstStyle/>
+          <a:p>
+            <a:pPr algn="l">
+              <a:lnSpc>
+                <a:spcPct val="120000"/>
+              </a:lnSpc>
+              <a:spcAft>
+                <a:spcPts val="992"/>
+              </a:spcAft>
+            </a:pPr>
+            <a:r>
+              <a:rPr sz="1764" b="1" i="0">
+                <a:solidFill>
+                  <a:srgbClr val="12162E"/>
+                </a:solidFill>
+                <a:latin typeface="Arial"/>
+              </a:rPr>
+              <a:t>think → act</a:t>
+            </a:r>
+          </a:p>
+        </p:txBody>
+      </p:sp>
+      <p:sp>
+        <p:nvSpPr>
+          <p:cNvPr id="116" name="TextBox 115"/>
+          <p:cNvSpPr txBox="1"/>
+          <p:nvPr/>
+        </p:nvSpPr>
+        <p:spPr>
+          <a:xfrm>
+            <a:off x="14083200" y="6352781"/>
+            <a:ext cx="2952000" cy="565369"/>
           </a:xfrm>
           <a:prstGeom prst="rect">
             <a:avLst/>
@@ -6267,14 +5688,24 @@
               </a:spcAft>
             </a:pPr>
             <a:r>
-              <a:rPr sz="1271" b="1" i="0">
+              <a:rPr sz="1271" b="0" i="0">
                 <a:solidFill>
                   <a:srgbClr val="5D6787"/>
                 </a:solidFill>
                 <a:latin typeface="Arial"/>
               </a:rPr>
-              <a:t>Fig 2.</a:t>
-            </a:r>
+              <a:t>click · type · scroll · go back · finish</a:t>
+            </a:r>
+          </a:p>
+          <a:p>
+            <a:pPr algn="l">
+              <a:lnSpc>
+                <a:spcPct val="132000"/>
+              </a:lnSpc>
+              <a:spcAft>
+                <a:spcPts val="425"/>
+              </a:spcAft>
+            </a:pPr>
             <a:r>
               <a:rPr sz="1271" b="0" i="0">
                 <a:solidFill>
@@ -6282,57 +5713,195 @@
                 </a:solidFill>
                 <a:latin typeface="Arial"/>
               </a:rPr>
-              <a:t> Every policy in every setting against one fixed baseline, </a:t>
-            </a:r>
-            <a:r>
-              <a:rPr sz="1271" b="1" i="0">
+              <a:t>repeats until it finishes or hits 30 steps</a:t>
+            </a:r>
+          </a:p>
+        </p:txBody>
+      </p:sp>
+      <p:sp>
+        <p:nvSpPr>
+          <p:cNvPr id="117" name="TextBox 116"/>
+          <p:cNvSpPr txBox="1"/>
+          <p:nvPr/>
+        </p:nvSpPr>
+        <p:spPr>
+          <a:xfrm>
+            <a:off x="14083200" y="7026150"/>
+            <a:ext cx="2952000" cy="1022738"/>
+          </a:xfrm>
+          <a:prstGeom prst="rect">
+            <a:avLst/>
+          </a:prstGeom>
+          <a:noFill/>
+        </p:spPr>
+        <p:txBody>
+          <a:bodyPr wrap="square" lIns="0" rIns="0" tIns="0" bIns="0">
+            <a:spAutoFit/>
+          </a:bodyPr>
+          <a:lstStyle/>
+          <a:p>
+            <a:pPr algn="l">
+              <a:lnSpc>
+                <a:spcPct val="132000"/>
+              </a:lnSpc>
+              <a:spcAft>
+                <a:spcPts val="425"/>
+              </a:spcAft>
+            </a:pPr>
+            <a:r>
+              <a:rPr sz="1271" b="0" i="0">
+                <a:solidFill>
+                  <a:srgbClr val="12162E"/>
+                </a:solidFill>
+                <a:latin typeface="Arial"/>
+              </a:rPr>
+              <a:t>Same model, same prompt, same step budget and same cost accounting in every mode — only what it is shown changes.</a:t>
+            </a:r>
+          </a:p>
+        </p:txBody>
+      </p:sp>
+      <p:sp>
+        <p:nvSpPr>
+          <p:cNvPr id="118" name="Rectangle 117"/>
+          <p:cNvSpPr/>
+          <p:nvPr/>
+        </p:nvSpPr>
+        <p:spPr>
+          <a:xfrm>
+            <a:off x="17719200" y="5580000"/>
+            <a:ext cx="3070800" cy="4248000"/>
+          </a:xfrm>
+          <a:prstGeom prst="rect">
+            <a:avLst/>
+          </a:prstGeom>
+          <a:solidFill>
+            <a:srgbClr val="F7F9FD"/>
+          </a:solidFill>
+          <a:ln w="8890">
+            <a:solidFill>
+              <a:srgbClr val="DDE3F2"/>
+            </a:solidFill>
+          </a:ln>
+          <a:effectLst/>
+        </p:spPr>
+        <p:style>
+          <a:lnRef idx="1">
+            <a:schemeClr val="accent1"/>
+          </a:lnRef>
+          <a:fillRef idx="3">
+            <a:schemeClr val="accent1"/>
+          </a:fillRef>
+          <a:effectRef idx="2">
+            <a:schemeClr val="accent1"/>
+          </a:effectRef>
+          <a:fontRef idx="minor">
+            <a:schemeClr val="lt1"/>
+          </a:fontRef>
+        </p:style>
+        <p:txBody>
+          <a:bodyPr rtlCol="0" anchor="ctr" wrap="square"/>
+          <a:lstStyle/>
+          <a:p>
+            <a:pPr algn="ctr"/>
+          </a:p>
+        </p:txBody>
+      </p:sp>
+      <p:sp>
+        <p:nvSpPr>
+          <p:cNvPr id="119" name="Rectangle 118"/>
+          <p:cNvSpPr/>
+          <p:nvPr/>
+        </p:nvSpPr>
+        <p:spPr>
+          <a:xfrm>
+            <a:off x="17719200" y="5580000"/>
+            <a:ext cx="3070800" cy="50400"/>
+          </a:xfrm>
+          <a:prstGeom prst="rect">
+            <a:avLst/>
+          </a:prstGeom>
+          <a:solidFill>
+            <a:srgbClr val="5049F9"/>
+          </a:solidFill>
+          <a:ln>
+            <a:noFill/>
+          </a:ln>
+          <a:effectLst/>
+        </p:spPr>
+        <p:style>
+          <a:lnRef idx="1">
+            <a:schemeClr val="accent1"/>
+          </a:lnRef>
+          <a:fillRef idx="3">
+            <a:schemeClr val="accent1"/>
+          </a:fillRef>
+          <a:effectRef idx="2">
+            <a:schemeClr val="accent1"/>
+          </a:effectRef>
+          <a:fontRef idx="minor">
+            <a:schemeClr val="lt1"/>
+          </a:fontRef>
+        </p:style>
+        <p:txBody>
+          <a:bodyPr rtlCol="0" anchor="ctr" wrap="square"/>
+          <a:lstStyle/>
+          <a:p>
+            <a:pPr algn="ctr"/>
+          </a:p>
+        </p:txBody>
+      </p:sp>
+      <p:sp>
+        <p:nvSpPr>
+          <p:cNvPr id="120" name="TextBox 119"/>
+          <p:cNvSpPr txBox="1"/>
+          <p:nvPr/>
+        </p:nvSpPr>
+        <p:spPr>
+          <a:xfrm>
+            <a:off x="17899200" y="5724000"/>
+            <a:ext cx="2710800" cy="216000"/>
+          </a:xfrm>
+          <a:prstGeom prst="rect">
+            <a:avLst/>
+          </a:prstGeom>
+          <a:noFill/>
+        </p:spPr>
+        <p:txBody>
+          <a:bodyPr wrap="square" lIns="0" rIns="0" tIns="0" bIns="0">
+            <a:spAutoFit/>
+          </a:bodyPr>
+          <a:lstStyle/>
+          <a:p>
+            <a:pPr algn="l">
+              <a:lnSpc>
+                <a:spcPct val="120000"/>
+              </a:lnSpc>
+              <a:spcAft>
+                <a:spcPts val="0"/>
+              </a:spcAft>
+            </a:pPr>
+            <a:r>
+              <a:rPr sz="1059" b="0" i="0">
                 <a:solidFill>
                   <a:srgbClr val="5D6787"/>
                 </a:solidFill>
-                <a:latin typeface="Arial"/>
-              </a:rPr>
-              <a:t>always use the cheapest mode</a:t>
-            </a:r>
-            <a:r>
-              <a:rPr sz="1271" b="0" i="0">
-                <a:solidFill>
-                  <a:srgbClr val="5D6787"/>
-                </a:solidFill>
-                <a:latin typeface="Arial"/>
-              </a:rPr>
-              <a:t> (★). A win lands in the shaded region: cheaper </a:t>
-            </a:r>
-            <a:r>
-              <a:rPr sz="1271" b="0" i="1">
-                <a:solidFill>
-                  <a:srgbClr val="5D6787"/>
-                </a:solidFill>
-                <a:latin typeface="Arial"/>
-              </a:rPr>
-              <a:t>and</a:t>
-            </a:r>
-            <a:r>
-              <a:rPr sz="1271" b="0" i="0">
-                <a:solidFill>
-                  <a:srgbClr val="5D6787"/>
-                </a:solidFill>
-                <a:latin typeface="Arial"/>
-              </a:rPr>
-              <a:t> no worse. Always-cheapest is cheapest on average, not per episode, which is why a few points sit left of it. Nested cross-validation; 10,000 bundle permutations.</a:t>
-            </a:r>
-          </a:p>
-        </p:txBody>
-      </p:sp>
-      <p:sp>
-        <p:nvSpPr>
-          <p:cNvPr id="111" name="TextBox 110"/>
+                <a:latin typeface="Consolas"/>
+              </a:rPr>
+              <a:t>MEASURED</a:t>
+            </a:r>
+          </a:p>
+        </p:txBody>
+      </p:sp>
+      <p:sp>
+        <p:nvSpPr>
+          <p:cNvPr id="121" name="TextBox 120"/>
           <p:cNvSpPr txBox="1"/>
           <p:nvPr/>
         </p:nvSpPr>
         <p:spPr>
           <a:xfrm>
-            <a:off x="7534800" y="24110719"/>
-            <a:ext cx="13255200" cy="2188690"/>
+            <a:off x="17899200" y="5958000"/>
+            <a:ext cx="2710800" cy="771563"/>
           </a:xfrm>
           <a:prstGeom prst="rect">
             <a:avLst/>
@@ -6360,34 +5929,7 @@
                 </a:solidFill>
                 <a:latin typeface="Arial"/>
               </a:rPr>
-              <a:t>The ceiling is real.</a:t>
-            </a:r>
-            <a:r>
-              <a:rPr sz="1764" b="0" i="0">
-                <a:solidFill>
-                  <a:srgbClr val="12162E"/>
-                </a:solidFill>
-                <a:latin typeface="Arial"/>
-              </a:rPr>
-              <a:t> In hindsight, choosing the mode per task solves </a:t>
-            </a:r>
-            <a:r>
-              <a:rPr sz="1764" b="1" i="0">
-                <a:solidFill>
-                  <a:srgbClr val="12162E"/>
-                </a:solidFill>
-                <a:latin typeface="Arial"/>
-              </a:rPr>
-              <a:t>+3.45 to +16.35 pp</a:t>
-            </a:r>
-            <a:r>
-              <a:rPr sz="1764" b="0" i="0">
-                <a:solidFill>
-                  <a:srgbClr val="12162E"/>
-                </a:solidFill>
-                <a:latin typeface="Arial"/>
-              </a:rPr>
-              <a:t> more than the best single fixed mode, at 1.6–35.3% lower cost, in 8 of 8 settings.</a:t>
+              <a:t>✓ / ✗ per task</a:t>
             </a:r>
           </a:p>
           <a:p>
@@ -6406,54 +5948,323 @@
                 </a:solidFill>
                 <a:latin typeface="Arial"/>
               </a:rPr>
-              <a:t>Nothing we trained wins.</a:t>
-            </a:r>
-            <a:r>
-              <a:rPr sz="1764" b="0" i="0">
-                <a:solidFill>
-                  <a:srgbClr val="12162E"/>
+              <a:t>$ billed per episode</a:t>
+            </a:r>
+          </a:p>
+        </p:txBody>
+      </p:sp>
+      <p:sp>
+        <p:nvSpPr>
+          <p:cNvPr id="122" name="TextBox 121"/>
+          <p:cNvSpPr txBox="1"/>
+          <p:nvPr/>
+        </p:nvSpPr>
+        <p:spPr>
+          <a:xfrm>
+            <a:off x="17899200" y="6837563"/>
+            <a:ext cx="2710800" cy="767053"/>
+          </a:xfrm>
+          <a:prstGeom prst="rect">
+            <a:avLst/>
+          </a:prstGeom>
+          <a:noFill/>
+        </p:spPr>
+        <p:txBody>
+          <a:bodyPr wrap="square" lIns="0" rIns="0" tIns="0" bIns="0">
+            <a:spAutoFit/>
+          </a:bodyPr>
+          <a:lstStyle/>
+          <a:p>
+            <a:pPr algn="l">
+              <a:lnSpc>
+                <a:spcPct val="132000"/>
+              </a:lnSpc>
+              <a:spcAft>
+                <a:spcPts val="425"/>
+              </a:spcAft>
+            </a:pPr>
+            <a:r>
+              <a:rPr sz="1271" b="0" i="0">
+                <a:solidFill>
+                  <a:srgbClr val="5D6787"/>
                 </a:solidFill>
                 <a:latin typeface="Arial"/>
               </a:rPr>
-              <a:t> </a:t>
-            </a:r>
-            <a:r>
-              <a:rPr sz="1764" b="1" i="0">
-                <a:solidFill>
-                  <a:srgbClr val="12162E"/>
+              <a:t>8 website–model settings · two benchmarks · 6 modes · 8,934 episodes</a:t>
+            </a:r>
+          </a:p>
+        </p:txBody>
+      </p:sp>
+      <p:sp>
+        <p:nvSpPr>
+          <p:cNvPr id="123" name="TextBox 122"/>
+          <p:cNvSpPr txBox="1"/>
+          <p:nvPr/>
+        </p:nvSpPr>
+        <p:spPr>
+          <a:xfrm>
+            <a:off x="727200" y="9936000"/>
+            <a:ext cx="20062800" cy="511369"/>
+          </a:xfrm>
+          <a:prstGeom prst="rect">
+            <a:avLst/>
+          </a:prstGeom>
+          <a:noFill/>
+        </p:spPr>
+        <p:txBody>
+          <a:bodyPr wrap="square" lIns="0" rIns="0" tIns="0" bIns="0">
+            <a:spAutoFit/>
+          </a:bodyPr>
+          <a:lstStyle/>
+          <a:p>
+            <a:pPr algn="l">
+              <a:lnSpc>
+                <a:spcPct val="132000"/>
+              </a:lnSpc>
+              <a:spcAft>
+                <a:spcPts val="425"/>
+              </a:spcAft>
+            </a:pPr>
+            <a:r>
+              <a:rPr sz="1271" b="1" i="0">
+                <a:solidFill>
+                  <a:srgbClr val="5D6787"/>
                 </a:solidFill>
                 <a:latin typeface="Arial"/>
               </a:rPr>
-              <a:t>0 of 8</a:t>
-            </a:r>
-            <a:r>
-              <a:rPr sz="1764" b="0" i="0">
-                <a:solidFill>
-                  <a:srgbClr val="12162E"/>
+              <a:t>Fig 1.</a:t>
+            </a:r>
+            <a:r>
+              <a:rPr sz="1271" b="0" i="0">
+                <a:solidFill>
+                  <a:srgbClr val="5D6787"/>
                 </a:solidFill>
                 <a:latin typeface="Arial"/>
               </a:rPr>
-              <a:t> learned routers beat always-cheapest on both success and cost — and even the hindsight oracle does so in only </a:t>
-            </a:r>
-            <a:r>
-              <a:rPr sz="1764" b="1" i="0">
-                <a:solidFill>
-                  <a:srgbClr val="12162E"/>
+              <a:t> Everything is held fixed except how the page is shown. The dashed box is what this work measures: a fixed choice, the best choice in hindsight, and a choice a router has to learn — each judged on </a:t>
+            </a:r>
+            <a:r>
+              <a:rPr sz="1271" b="1" i="0">
+                <a:solidFill>
+                  <a:srgbClr val="5D6787"/>
                 </a:solidFill>
                 <a:latin typeface="Arial"/>
               </a:rPr>
-              <a:t>1 of 8</a:t>
-            </a:r>
-            <a:r>
-              <a:rPr sz="1764" b="0" i="0">
-                <a:solidFill>
-                  <a:srgbClr val="12162E"/>
+              <a:t>both</a:t>
+            </a:r>
+            <a:r>
+              <a:rPr sz="1271" b="0" i="0">
+                <a:solidFill>
+                  <a:srgbClr val="5D6787"/>
                 </a:solidFill>
                 <a:latin typeface="Arial"/>
               </a:rPr>
-              <a:t>.</a:t>
-            </a:r>
-          </a:p>
+              <a:t> success and cost. The laptop beside this poster replays the three eyes on the three tasks below.</a:t>
+            </a:r>
+          </a:p>
+        </p:txBody>
+      </p:sp>
+      <p:sp>
+        <p:nvSpPr>
+          <p:cNvPr id="14" name="Rectangle 13"/>
+          <p:cNvSpPr/>
+          <p:nvPr/>
+        </p:nvSpPr>
+        <p:spPr>
+          <a:xfrm>
+            <a:off x="727200" y="10800000"/>
+            <a:ext cx="177988" cy="177988"/>
+          </a:xfrm>
+          <a:prstGeom prst="rect">
+            <a:avLst/>
+          </a:prstGeom>
+          <a:solidFill>
+            <a:srgbClr val="AB5FCE"/>
+          </a:solidFill>
+          <a:ln>
+            <a:noFill/>
+          </a:ln>
+          <a:effectLst/>
+        </p:spPr>
+        <p:style>
+          <a:lnRef idx="1">
+            <a:schemeClr val="accent1"/>
+          </a:lnRef>
+          <a:fillRef idx="3">
+            <a:schemeClr val="accent1"/>
+          </a:fillRef>
+          <a:effectRef idx="2">
+            <a:schemeClr val="accent1"/>
+          </a:effectRef>
+          <a:fontRef idx="minor">
+            <a:schemeClr val="lt1"/>
+          </a:fontRef>
+        </p:style>
+        <p:txBody>
+          <a:bodyPr rtlCol="0" anchor="ctr"/>
+          <a:lstStyle/>
+          <a:p>
+            <a:pPr algn="ctr"/>
+            <a:endParaRPr/>
+          </a:p>
+        </p:txBody>
+      </p:sp>
+      <p:sp>
+        <p:nvSpPr>
+          <p:cNvPr id="15" name="TextBox 14"/>
+          <p:cNvSpPr txBox="1"/>
+          <p:nvPr/>
+        </p:nvSpPr>
+        <p:spPr>
+          <a:xfrm>
+            <a:off x="1032323" y="10756800"/>
+            <a:ext cx="6144827" cy="238912"/>
+          </a:xfrm>
+          <a:prstGeom prst="rect">
+            <a:avLst/>
+          </a:prstGeom>
+          <a:noFill/>
+        </p:spPr>
+        <p:txBody>
+          <a:bodyPr wrap="square" lIns="0" tIns="0" rIns="0" bIns="0" anchor="t">
+            <a:spAutoFit/>
+          </a:bodyPr>
+          <a:lstStyle/>
+          <a:p>
+            <a:pPr algn="l">
+              <a:lnSpc>
+                <a:spcPct val="118000"/>
+              </a:lnSpc>
+            </a:pPr>
+            <a:r>
+              <a:rPr sz="1412" b="1" i="0">
+                <a:solidFill>
+                  <a:srgbClr val="141E41"/>
+                </a:solidFill>
+                <a:latin typeface="Consolas"/>
+              </a:rPr>
+              <a:t>ON THE SCREEN BESIDE YOU</a:t>
+            </a:r>
+            <a:endParaRPr sz="1412" b="1" spc="180" dirty="0">
+              <a:solidFill>
+                <a:srgbClr val="141E41"/>
+              </a:solidFill>
+              <a:latin typeface="Consolas"/>
+            </a:endParaRPr>
+          </a:p>
+        </p:txBody>
+      </p:sp>
+      <p:sp>
+        <p:nvSpPr>
+          <p:cNvPr id="16" name="Rectangle 15"/>
+          <p:cNvSpPr/>
+          <p:nvPr/>
+        </p:nvSpPr>
+        <p:spPr>
+          <a:xfrm>
+            <a:off x="727200" y="11117836"/>
+            <a:ext cx="1169636" cy="35597"/>
+          </a:xfrm>
+          <a:prstGeom prst="rect">
+            <a:avLst/>
+          </a:prstGeom>
+          <a:solidFill>
+            <a:srgbClr val="141E41"/>
+          </a:solidFill>
+          <a:ln>
+            <a:noFill/>
+          </a:ln>
+          <a:effectLst/>
+        </p:spPr>
+        <p:style>
+          <a:lnRef idx="1">
+            <a:schemeClr val="accent1"/>
+          </a:lnRef>
+          <a:fillRef idx="3">
+            <a:schemeClr val="accent1"/>
+          </a:fillRef>
+          <a:effectRef idx="2">
+            <a:schemeClr val="accent1"/>
+          </a:effectRef>
+          <a:fontRef idx="minor">
+            <a:schemeClr val="lt1"/>
+          </a:fontRef>
+        </p:style>
+        <p:txBody>
+          <a:bodyPr rtlCol="0" anchor="ctr"/>
+          <a:lstStyle/>
+          <a:p>
+            <a:pPr algn="ctr"/>
+            <a:endParaRPr/>
+          </a:p>
+        </p:txBody>
+      </p:sp>
+      <p:sp>
+        <p:nvSpPr>
+          <p:cNvPr id="17" name="Rectangle 16"/>
+          <p:cNvSpPr/>
+          <p:nvPr/>
+        </p:nvSpPr>
+        <p:spPr>
+          <a:xfrm>
+            <a:off x="1896836" y="11128007"/>
+            <a:ext cx="5281564" cy="15256"/>
+          </a:xfrm>
+          <a:prstGeom prst="rect">
+            <a:avLst/>
+          </a:prstGeom>
+          <a:solidFill>
+            <a:srgbClr val="DDE3F2"/>
+          </a:solidFill>
+          <a:ln>
+            <a:noFill/>
+          </a:ln>
+          <a:effectLst/>
+        </p:spPr>
+        <p:style>
+          <a:lnRef idx="1">
+            <a:schemeClr val="accent1"/>
+          </a:lnRef>
+          <a:fillRef idx="3">
+            <a:schemeClr val="accent1"/>
+          </a:fillRef>
+          <a:effectRef idx="2">
+            <a:schemeClr val="accent1"/>
+          </a:effectRef>
+          <a:fontRef idx="minor">
+            <a:schemeClr val="lt1"/>
+          </a:fontRef>
+        </p:style>
+        <p:txBody>
+          <a:bodyPr rtlCol="0" anchor="ctr"/>
+          <a:lstStyle/>
+          <a:p>
+            <a:pPr algn="ctr"/>
+            <a:endParaRPr/>
+          </a:p>
+        </p:txBody>
+      </p:sp>
+      <p:sp>
+        <p:nvSpPr>
+          <p:cNvPr id="124" name="TextBox 123"/>
+          <p:cNvSpPr txBox="1"/>
+          <p:nvPr/>
+        </p:nvSpPr>
+        <p:spPr>
+          <a:xfrm>
+            <a:off x="727200" y="11340000"/>
+            <a:ext cx="6451200" cy="645563"/>
+          </a:xfrm>
+          <a:prstGeom prst="rect">
+            <a:avLst/>
+          </a:prstGeom>
+          <a:noFill/>
+        </p:spPr>
+        <p:txBody>
+          <a:bodyPr wrap="square" lIns="0" rIns="0" tIns="0" bIns="0">
+            <a:spAutoFit/>
+          </a:bodyPr>
+          <a:lstStyle/>
           <a:p>
             <a:pPr algn="l">
               <a:lnSpc>
@@ -6470,36 +6281,141 @@
                 </a:solidFill>
                 <a:latin typeface="Arial"/>
               </a:rPr>
-              <a:t>What survives is a bound, not a router.</a:t>
-            </a:r>
-            <a:r>
-              <a:rPr sz="1764" b="0" i="0">
-                <a:solidFill>
-                  <a:srgbClr val="12162E"/>
-                </a:solidFill>
-                <a:latin typeface="Arial"/>
-              </a:rPr>
-              <a:t> Sending the tasks nobody solves to the cheapest mode saves 9.5–30.6% at identical success in 8 of 8 — against the best-success fixed mode, and plain always-cheapest usually saves more.</a:t>
-            </a:r>
-          </a:p>
-        </p:txBody>
-      </p:sp>
-      <p:sp>
-        <p:nvSpPr>
-          <p:cNvPr id="14" name="Rectangle 13"/>
+              <a:t>“Navigate to the item on this page whose image is taken during a sunset.”</a:t>
+            </a:r>
+          </a:p>
+        </p:txBody>
+      </p:sp>
+      <p:sp>
+        <p:nvSpPr>
+          <p:cNvPr id="125" name="Rectangle 124"/>
           <p:cNvSpPr/>
           <p:nvPr/>
         </p:nvSpPr>
         <p:spPr>
           <a:xfrm>
-            <a:off x="7534800" y="26479409"/>
-            <a:ext cx="177988" cy="177988"/>
+            <a:off x="727200" y="12075563"/>
+            <a:ext cx="6451200" cy="3024000"/>
+          </a:xfrm>
+          <a:prstGeom prst="rect">
+            <a:avLst/>
+          </a:prstGeom>
+          <a:noFill/>
+          <a:ln w="8890">
+            <a:solidFill>
+              <a:srgbClr val="DDE3F2"/>
+            </a:solidFill>
+          </a:ln>
+          <a:effectLst/>
+        </p:spPr>
+        <p:style>
+          <a:lnRef idx="1">
+            <a:schemeClr val="accent1"/>
+          </a:lnRef>
+          <a:fillRef idx="3">
+            <a:schemeClr val="accent1"/>
+          </a:fillRef>
+          <a:effectRef idx="2">
+            <a:schemeClr val="accent1"/>
+          </a:effectRef>
+          <a:fontRef idx="minor">
+            <a:schemeClr val="lt1"/>
+          </a:fontRef>
+        </p:style>
+        <p:txBody>
+          <a:bodyPr rtlCol="0" anchor="ctr" wrap="square"/>
+          <a:lstStyle/>
+          <a:p>
+            <a:pPr algn="ctr"/>
+          </a:p>
+        </p:txBody>
+      </p:sp>
+      <p:pic>
+        <p:nvPicPr>
+          <p:cNvPr id="126" name="Picture 125" descr="thumb_130.png"/>
+          <p:cNvPicPr>
+            <a:picLocks noChangeAspect="1"/>
+          </p:cNvPicPr>
+          <p:nvPr/>
+        </p:nvPicPr>
+        <p:blipFill>
+          <a:blip r:embed="rId5"/>
+          <a:stretch>
+            <a:fillRect/>
+          </a:stretch>
+        </p:blipFill>
+        <p:spPr>
+          <a:xfrm>
+            <a:off x="727200" y="12075563"/>
+            <a:ext cx="6451200" cy="3024000"/>
+          </a:xfrm>
+          <a:prstGeom prst="rect">
+            <a:avLst/>
+          </a:prstGeom>
+        </p:spPr>
+      </p:pic>
+      <p:sp>
+        <p:nvSpPr>
+          <p:cNvPr id="127" name="Rectangle 126"/>
+          <p:cNvSpPr/>
+          <p:nvPr/>
+        </p:nvSpPr>
+        <p:spPr>
+          <a:xfrm>
+            <a:off x="727200" y="15189563"/>
+            <a:ext cx="2078400" cy="864000"/>
           </a:xfrm>
           <a:prstGeom prst="rect">
             <a:avLst/>
           </a:prstGeom>
           <a:solidFill>
-            <a:srgbClr val="AB5FCE"/>
+            <a:srgbClr val="F7F9FD"/>
+          </a:solidFill>
+          <a:ln w="8890">
+            <a:solidFill>
+              <a:srgbClr val="DDE3F2"/>
+            </a:solidFill>
+          </a:ln>
+          <a:effectLst/>
+        </p:spPr>
+        <p:style>
+          <a:lnRef idx="1">
+            <a:schemeClr val="accent1"/>
+          </a:lnRef>
+          <a:fillRef idx="3">
+            <a:schemeClr val="accent1"/>
+          </a:fillRef>
+          <a:effectRef idx="2">
+            <a:schemeClr val="accent1"/>
+          </a:effectRef>
+          <a:fontRef idx="minor">
+            <a:schemeClr val="lt1"/>
+          </a:fontRef>
+        </p:style>
+        <p:txBody>
+          <a:bodyPr rtlCol="0" anchor="ctr" wrap="square"/>
+          <a:lstStyle/>
+          <a:p>
+            <a:pPr algn="ctr"/>
+          </a:p>
+        </p:txBody>
+      </p:sp>
+      <p:sp>
+        <p:nvSpPr>
+          <p:cNvPr id="128" name="Rectangle 127"/>
+          <p:cNvSpPr/>
+          <p:nvPr/>
+        </p:nvSpPr>
+        <p:spPr>
+          <a:xfrm>
+            <a:off x="727200" y="15189563"/>
+            <a:ext cx="2078400" cy="43200"/>
+          </a:xfrm>
+          <a:prstGeom prst="rect">
+            <a:avLst/>
+          </a:prstGeom>
+          <a:solidFill>
+            <a:srgbClr val="1F5FD6"/>
           </a:solidFill>
           <a:ln>
             <a:noFill/>
@@ -6521,24 +6437,23 @@
           </a:fontRef>
         </p:style>
         <p:txBody>
-          <a:bodyPr rtlCol="0" anchor="ctr"/>
+          <a:bodyPr rtlCol="0" anchor="ctr" wrap="square"/>
           <a:lstStyle/>
           <a:p>
             <a:pPr algn="ctr"/>
-            <a:endParaRPr/>
-          </a:p>
-        </p:txBody>
-      </p:sp>
-      <p:sp>
-        <p:nvSpPr>
-          <p:cNvPr id="15" name="TextBox 14"/>
+          </a:p>
+        </p:txBody>
+      </p:sp>
+      <p:sp>
+        <p:nvSpPr>
+          <p:cNvPr id="129" name="TextBox 128"/>
           <p:cNvSpPr txBox="1"/>
           <p:nvPr/>
         </p:nvSpPr>
         <p:spPr>
           <a:xfrm>
-            <a:off x="7839923" y="26436209"/>
-            <a:ext cx="6144827" cy="238912"/>
+            <a:off x="835200" y="15297563"/>
+            <a:ext cx="1080000" cy="216000"/>
           </a:xfrm>
           <a:prstGeom prst="rect">
             <a:avLst/>
@@ -6546,50 +6461,196 @@
           <a:noFill/>
         </p:spPr>
         <p:txBody>
-          <a:bodyPr wrap="square" lIns="0" tIns="0" rIns="0" bIns="0" anchor="t">
+          <a:bodyPr wrap="square" lIns="0" rIns="0" tIns="0" bIns="0">
             <a:spAutoFit/>
           </a:bodyPr>
           <a:lstStyle/>
           <a:p>
             <a:pPr algn="l">
               <a:lnSpc>
-                <a:spcPct val="118000"/>
+                <a:spcPct val="120000"/>
               </a:lnSpc>
+              <a:spcAft>
+                <a:spcPts val="0"/>
+              </a:spcAft>
             </a:pPr>
             <a:r>
-              <a:rPr sz="1412" b="1" i="0">
-                <a:solidFill>
-                  <a:srgbClr val="141E41"/>
+              <a:rPr sz="1059" b="1" i="0">
+                <a:solidFill>
+                  <a:srgbClr val="1F5FD6"/>
                 </a:solidFill>
                 <a:latin typeface="Consolas"/>
               </a:rPr>
-              <a:t>TAKEAWAY</a:t>
-            </a:r>
-            <a:endParaRPr sz="1412" b="1" spc="180" dirty="0">
-              <a:solidFill>
-                <a:srgbClr val="141E41"/>
-              </a:solidFill>
-              <a:latin typeface="Consolas"/>
-            </a:endParaRPr>
-          </a:p>
-        </p:txBody>
-      </p:sp>
-      <p:sp>
-        <p:nvSpPr>
-          <p:cNvPr id="16" name="Rectangle 15"/>
+              <a:t>LOOK</a:t>
+            </a:r>
+          </a:p>
+        </p:txBody>
+      </p:sp>
+      <p:sp>
+        <p:nvSpPr>
+          <p:cNvPr id="130" name="TextBox 129"/>
+          <p:cNvSpPr txBox="1"/>
+          <p:nvPr/>
+        </p:nvSpPr>
+        <p:spPr>
+          <a:xfrm>
+            <a:off x="835200" y="15459563"/>
+            <a:ext cx="576000" cy="540000"/>
+          </a:xfrm>
+          <a:prstGeom prst="rect">
+            <a:avLst/>
+          </a:prstGeom>
+          <a:noFill/>
+        </p:spPr>
+        <p:txBody>
+          <a:bodyPr wrap="square" lIns="0" rIns="0" tIns="0" bIns="0">
+            <a:spAutoFit/>
+          </a:bodyPr>
+          <a:lstStyle/>
+          <a:p>
+            <a:pPr algn="l">
+              <a:lnSpc>
+                <a:spcPct val="100000"/>
+              </a:lnSpc>
+              <a:spcAft>
+                <a:spcPts val="0"/>
+              </a:spcAft>
+            </a:pPr>
+            <a:r>
+              <a:rPr sz="3247" b="1" i="0">
+                <a:solidFill>
+                  <a:srgbClr val="14855F"/>
+                </a:solidFill>
+                <a:latin typeface="Consolas"/>
+              </a:rPr>
+              <a:t>✓</a:t>
+            </a:r>
+          </a:p>
+        </p:txBody>
+      </p:sp>
+      <p:sp>
+        <p:nvSpPr>
+          <p:cNvPr id="131" name="TextBox 130"/>
+          <p:cNvSpPr txBox="1"/>
+          <p:nvPr/>
+        </p:nvSpPr>
+        <p:spPr>
+          <a:xfrm>
+            <a:off x="1447200" y="15513563"/>
+            <a:ext cx="1286400" cy="504000"/>
+          </a:xfrm>
+          <a:prstGeom prst="rect">
+            <a:avLst/>
+          </a:prstGeom>
+          <a:noFill/>
+        </p:spPr>
+        <p:txBody>
+          <a:bodyPr wrap="square" lIns="0" rIns="0" tIns="0" bIns="0">
+            <a:spAutoFit/>
+          </a:bodyPr>
+          <a:lstStyle/>
+          <a:p>
+            <a:pPr algn="l">
+              <a:lnSpc>
+                <a:spcPct val="132000"/>
+              </a:lnSpc>
+              <a:spcAft>
+                <a:spcPts val="0"/>
+              </a:spcAft>
+            </a:pPr>
+            <a:r>
+              <a:rPr sz="1271" b="0" i="0">
+                <a:solidFill>
+                  <a:srgbClr val="12162E"/>
+                </a:solidFill>
+                <a:latin typeface="Arial"/>
+              </a:rPr>
+              <a:t>2 steps</a:t>
+            </a:r>
+          </a:p>
+          <a:p>
+            <a:pPr algn="l">
+              <a:lnSpc>
+                <a:spcPct val="132000"/>
+              </a:lnSpc>
+              <a:spcAft>
+                <a:spcPts val="0"/>
+              </a:spcAft>
+            </a:pPr>
+            <a:r>
+              <a:rPr sz="1271" b="0" i="0">
+                <a:solidFill>
+                  <a:srgbClr val="12162E"/>
+                </a:solidFill>
+                <a:latin typeface="Arial"/>
+              </a:rPr>
+              <a:t>$0.007</a:t>
+            </a:r>
+          </a:p>
+        </p:txBody>
+      </p:sp>
+      <p:sp>
+        <p:nvSpPr>
+          <p:cNvPr id="132" name="Rectangle 131"/>
           <p:cNvSpPr/>
           <p:nvPr/>
         </p:nvSpPr>
         <p:spPr>
           <a:xfrm>
-            <a:off x="7534800" y="26797245"/>
-            <a:ext cx="1169636" cy="35597"/>
+            <a:off x="2913600" y="15189563"/>
+            <a:ext cx="2078400" cy="864000"/>
           </a:xfrm>
           <a:prstGeom prst="rect">
             <a:avLst/>
           </a:prstGeom>
           <a:solidFill>
-            <a:srgbClr val="141E41"/>
+            <a:srgbClr val="F7F9FD"/>
+          </a:solidFill>
+          <a:ln w="8890">
+            <a:solidFill>
+              <a:srgbClr val="DDE3F2"/>
+            </a:solidFill>
+          </a:ln>
+          <a:effectLst/>
+        </p:spPr>
+        <p:style>
+          <a:lnRef idx="1">
+            <a:schemeClr val="accent1"/>
+          </a:lnRef>
+          <a:fillRef idx="3">
+            <a:schemeClr val="accent1"/>
+          </a:fillRef>
+          <a:effectRef idx="2">
+            <a:schemeClr val="accent1"/>
+          </a:effectRef>
+          <a:fontRef idx="minor">
+            <a:schemeClr val="lt1"/>
+          </a:fontRef>
+        </p:style>
+        <p:txBody>
+          <a:bodyPr rtlCol="0" anchor="ctr" wrap="square"/>
+          <a:lstStyle/>
+          <a:p>
+            <a:pPr algn="ctr"/>
+          </a:p>
+        </p:txBody>
+      </p:sp>
+      <p:sp>
+        <p:nvSpPr>
+          <p:cNvPr id="133" name="Rectangle 132"/>
+          <p:cNvSpPr/>
+          <p:nvPr/>
+        </p:nvSpPr>
+        <p:spPr>
+          <a:xfrm>
+            <a:off x="2913600" y="15189563"/>
+            <a:ext cx="2078400" cy="43200"/>
+          </a:xfrm>
+          <a:prstGeom prst="rect">
+            <a:avLst/>
+          </a:prstGeom>
+          <a:solidFill>
+            <a:srgbClr val="E8720C"/>
           </a:solidFill>
           <a:ln>
             <a:noFill/>
@@ -6611,30 +6672,220 @@
           </a:fontRef>
         </p:style>
         <p:txBody>
-          <a:bodyPr rtlCol="0" anchor="ctr"/>
+          <a:bodyPr rtlCol="0" anchor="ctr" wrap="square"/>
           <a:lstStyle/>
           <a:p>
             <a:pPr algn="ctr"/>
-            <a:endParaRPr/>
-          </a:p>
-        </p:txBody>
-      </p:sp>
-      <p:sp>
-        <p:nvSpPr>
-          <p:cNvPr id="17" name="Rectangle 16"/>
+          </a:p>
+        </p:txBody>
+      </p:sp>
+      <p:sp>
+        <p:nvSpPr>
+          <p:cNvPr id="134" name="TextBox 133"/>
+          <p:cNvSpPr txBox="1"/>
+          <p:nvPr/>
+        </p:nvSpPr>
+        <p:spPr>
+          <a:xfrm>
+            <a:off x="3021600" y="15297563"/>
+            <a:ext cx="1080000" cy="216000"/>
+          </a:xfrm>
+          <a:prstGeom prst="rect">
+            <a:avLst/>
+          </a:prstGeom>
+          <a:noFill/>
+        </p:spPr>
+        <p:txBody>
+          <a:bodyPr wrap="square" lIns="0" rIns="0" tIns="0" bIns="0">
+            <a:spAutoFit/>
+          </a:bodyPr>
+          <a:lstStyle/>
+          <a:p>
+            <a:pPr algn="l">
+              <a:lnSpc>
+                <a:spcPct val="120000"/>
+              </a:lnSpc>
+              <a:spcAft>
+                <a:spcPts val="0"/>
+              </a:spcAft>
+            </a:pPr>
+            <a:r>
+              <a:rPr sz="1059" b="1" i="0">
+                <a:solidFill>
+                  <a:srgbClr val="E8720C"/>
+                </a:solidFill>
+                <a:latin typeface="Consolas"/>
+              </a:rPr>
+              <a:t>READ</a:t>
+            </a:r>
+          </a:p>
+        </p:txBody>
+      </p:sp>
+      <p:sp>
+        <p:nvSpPr>
+          <p:cNvPr id="135" name="TextBox 134"/>
+          <p:cNvSpPr txBox="1"/>
+          <p:nvPr/>
+        </p:nvSpPr>
+        <p:spPr>
+          <a:xfrm>
+            <a:off x="3021600" y="15459563"/>
+            <a:ext cx="576000" cy="540000"/>
+          </a:xfrm>
+          <a:prstGeom prst="rect">
+            <a:avLst/>
+          </a:prstGeom>
+          <a:noFill/>
+        </p:spPr>
+        <p:txBody>
+          <a:bodyPr wrap="square" lIns="0" rIns="0" tIns="0" bIns="0">
+            <a:spAutoFit/>
+          </a:bodyPr>
+          <a:lstStyle/>
+          <a:p>
+            <a:pPr algn="l">
+              <a:lnSpc>
+                <a:spcPct val="100000"/>
+              </a:lnSpc>
+              <a:spcAft>
+                <a:spcPts val="0"/>
+              </a:spcAft>
+            </a:pPr>
+            <a:r>
+              <a:rPr sz="3247" b="1" i="0">
+                <a:solidFill>
+                  <a:srgbClr val="C2352B"/>
+                </a:solidFill>
+                <a:latin typeface="Consolas"/>
+              </a:rPr>
+              <a:t>✗</a:t>
+            </a:r>
+          </a:p>
+        </p:txBody>
+      </p:sp>
+      <p:sp>
+        <p:nvSpPr>
+          <p:cNvPr id="136" name="TextBox 135"/>
+          <p:cNvSpPr txBox="1"/>
+          <p:nvPr/>
+        </p:nvSpPr>
+        <p:spPr>
+          <a:xfrm>
+            <a:off x="3633600" y="15513563"/>
+            <a:ext cx="1286400" cy="504000"/>
+          </a:xfrm>
+          <a:prstGeom prst="rect">
+            <a:avLst/>
+          </a:prstGeom>
+          <a:noFill/>
+        </p:spPr>
+        <p:txBody>
+          <a:bodyPr wrap="square" lIns="0" rIns="0" tIns="0" bIns="0">
+            <a:spAutoFit/>
+          </a:bodyPr>
+          <a:lstStyle/>
+          <a:p>
+            <a:pPr algn="l">
+              <a:lnSpc>
+                <a:spcPct val="132000"/>
+              </a:lnSpc>
+              <a:spcAft>
+                <a:spcPts val="0"/>
+              </a:spcAft>
+            </a:pPr>
+            <a:r>
+              <a:rPr sz="1271" b="0" i="0">
+                <a:solidFill>
+                  <a:srgbClr val="12162E"/>
+                </a:solidFill>
+                <a:latin typeface="Arial"/>
+              </a:rPr>
+              <a:t>21 steps</a:t>
+            </a:r>
+          </a:p>
+          <a:p>
+            <a:pPr algn="l">
+              <a:lnSpc>
+                <a:spcPct val="132000"/>
+              </a:lnSpc>
+              <a:spcAft>
+                <a:spcPts val="0"/>
+              </a:spcAft>
+            </a:pPr>
+            <a:r>
+              <a:rPr sz="1271" b="0" i="0">
+                <a:solidFill>
+                  <a:srgbClr val="12162E"/>
+                </a:solidFill>
+                <a:latin typeface="Arial"/>
+              </a:rPr>
+              <a:t>$0.096</a:t>
+            </a:r>
+          </a:p>
+        </p:txBody>
+      </p:sp>
+      <p:sp>
+        <p:nvSpPr>
+          <p:cNvPr id="137" name="Rectangle 136"/>
           <p:cNvSpPr/>
           <p:nvPr/>
         </p:nvSpPr>
         <p:spPr>
           <a:xfrm>
-            <a:off x="8704436" y="26807416"/>
-            <a:ext cx="12085564" cy="15256"/>
+            <a:off x="5100000" y="15189563"/>
+            <a:ext cx="2078400" cy="864000"/>
           </a:xfrm>
           <a:prstGeom prst="rect">
             <a:avLst/>
           </a:prstGeom>
           <a:solidFill>
-            <a:srgbClr val="DDE3F2"/>
+            <a:srgbClr val="F7F9FD"/>
+          </a:solidFill>
+          <a:ln w="8890">
+            <a:solidFill>
+              <a:srgbClr val="DDE3F2"/>
+            </a:solidFill>
+          </a:ln>
+          <a:effectLst/>
+        </p:spPr>
+        <p:style>
+          <a:lnRef idx="1">
+            <a:schemeClr val="accent1"/>
+          </a:lnRef>
+          <a:fillRef idx="3">
+            <a:schemeClr val="accent1"/>
+          </a:fillRef>
+          <a:effectRef idx="2">
+            <a:schemeClr val="accent1"/>
+          </a:effectRef>
+          <a:fontRef idx="minor">
+            <a:schemeClr val="lt1"/>
+          </a:fontRef>
+        </p:style>
+        <p:txBody>
+          <a:bodyPr rtlCol="0" anchor="ctr" wrap="square"/>
+          <a:lstStyle/>
+          <a:p>
+            <a:pPr algn="ctr"/>
+          </a:p>
+        </p:txBody>
+      </p:sp>
+      <p:sp>
+        <p:nvSpPr>
+          <p:cNvPr id="138" name="Rectangle 137"/>
+          <p:cNvSpPr/>
+          <p:nvPr/>
+        </p:nvSpPr>
+        <p:spPr>
+          <a:xfrm>
+            <a:off x="5100000" y="15189563"/>
+            <a:ext cx="2078400" cy="43200"/>
+          </a:xfrm>
+          <a:prstGeom prst="rect">
+            <a:avLst/>
+          </a:prstGeom>
+          <a:solidFill>
+            <a:srgbClr val="14855F"/>
           </a:solidFill>
           <a:ln>
             <a:noFill/>
@@ -6656,24 +6907,168 @@
           </a:fontRef>
         </p:style>
         <p:txBody>
-          <a:bodyPr rtlCol="0" anchor="ctr"/>
+          <a:bodyPr rtlCol="0" anchor="ctr" wrap="square"/>
           <a:lstStyle/>
           <a:p>
             <a:pPr algn="ctr"/>
-            <a:endParaRPr/>
-          </a:p>
-        </p:txBody>
-      </p:sp>
-      <p:sp>
-        <p:nvSpPr>
-          <p:cNvPr id="112" name="TextBox 111"/>
+          </a:p>
+        </p:txBody>
+      </p:sp>
+      <p:sp>
+        <p:nvSpPr>
+          <p:cNvPr id="139" name="TextBox 138"/>
           <p:cNvSpPr txBox="1"/>
           <p:nvPr/>
         </p:nvSpPr>
         <p:spPr>
           <a:xfrm>
-            <a:off x="7534800" y="27019409"/>
-            <a:ext cx="13255200" cy="645563"/>
+            <a:off x="5208000" y="15297563"/>
+            <a:ext cx="1080000" cy="216000"/>
+          </a:xfrm>
+          <a:prstGeom prst="rect">
+            <a:avLst/>
+          </a:prstGeom>
+          <a:noFill/>
+        </p:spPr>
+        <p:txBody>
+          <a:bodyPr wrap="square" lIns="0" rIns="0" tIns="0" bIns="0">
+            <a:spAutoFit/>
+          </a:bodyPr>
+          <a:lstStyle/>
+          <a:p>
+            <a:pPr algn="l">
+              <a:lnSpc>
+                <a:spcPct val="120000"/>
+              </a:lnSpc>
+              <a:spcAft>
+                <a:spcPts val="0"/>
+              </a:spcAft>
+            </a:pPr>
+            <a:r>
+              <a:rPr sz="1059" b="1" i="0">
+                <a:solidFill>
+                  <a:srgbClr val="14855F"/>
+                </a:solidFill>
+                <a:latin typeface="Consolas"/>
+              </a:rPr>
+              <a:t>BOTH</a:t>
+            </a:r>
+          </a:p>
+        </p:txBody>
+      </p:sp>
+      <p:sp>
+        <p:nvSpPr>
+          <p:cNvPr id="140" name="TextBox 139"/>
+          <p:cNvSpPr txBox="1"/>
+          <p:nvPr/>
+        </p:nvSpPr>
+        <p:spPr>
+          <a:xfrm>
+            <a:off x="5208000" y="15459563"/>
+            <a:ext cx="576000" cy="540000"/>
+          </a:xfrm>
+          <a:prstGeom prst="rect">
+            <a:avLst/>
+          </a:prstGeom>
+          <a:noFill/>
+        </p:spPr>
+        <p:txBody>
+          <a:bodyPr wrap="square" lIns="0" rIns="0" tIns="0" bIns="0">
+            <a:spAutoFit/>
+          </a:bodyPr>
+          <a:lstStyle/>
+          <a:p>
+            <a:pPr algn="l">
+              <a:lnSpc>
+                <a:spcPct val="100000"/>
+              </a:lnSpc>
+              <a:spcAft>
+                <a:spcPts val="0"/>
+              </a:spcAft>
+            </a:pPr>
+            <a:r>
+              <a:rPr sz="3247" b="1" i="0">
+                <a:solidFill>
+                  <a:srgbClr val="14855F"/>
+                </a:solidFill>
+                <a:latin typeface="Consolas"/>
+              </a:rPr>
+              <a:t>✓</a:t>
+            </a:r>
+          </a:p>
+        </p:txBody>
+      </p:sp>
+      <p:sp>
+        <p:nvSpPr>
+          <p:cNvPr id="141" name="TextBox 140"/>
+          <p:cNvSpPr txBox="1"/>
+          <p:nvPr/>
+        </p:nvSpPr>
+        <p:spPr>
+          <a:xfrm>
+            <a:off x="5820000" y="15513563"/>
+            <a:ext cx="1286400" cy="504000"/>
+          </a:xfrm>
+          <a:prstGeom prst="rect">
+            <a:avLst/>
+          </a:prstGeom>
+          <a:noFill/>
+        </p:spPr>
+        <p:txBody>
+          <a:bodyPr wrap="square" lIns="0" rIns="0" tIns="0" bIns="0">
+            <a:spAutoFit/>
+          </a:bodyPr>
+          <a:lstStyle/>
+          <a:p>
+            <a:pPr algn="l">
+              <a:lnSpc>
+                <a:spcPct val="132000"/>
+              </a:lnSpc>
+              <a:spcAft>
+                <a:spcPts val="0"/>
+              </a:spcAft>
+            </a:pPr>
+            <a:r>
+              <a:rPr sz="1271" b="0" i="0">
+                <a:solidFill>
+                  <a:srgbClr val="12162E"/>
+                </a:solidFill>
+                <a:latin typeface="Arial"/>
+              </a:rPr>
+              <a:t>3 steps</a:t>
+            </a:r>
+          </a:p>
+          <a:p>
+            <a:pPr algn="l">
+              <a:lnSpc>
+                <a:spcPct val="132000"/>
+              </a:lnSpc>
+              <a:spcAft>
+                <a:spcPts val="0"/>
+              </a:spcAft>
+            </a:pPr>
+            <a:r>
+              <a:rPr sz="1271" b="0" i="0">
+                <a:solidFill>
+                  <a:srgbClr val="12162E"/>
+                </a:solidFill>
+                <a:latin typeface="Arial"/>
+              </a:rPr>
+              <a:t>$0.014</a:t>
+            </a:r>
+          </a:p>
+        </p:txBody>
+      </p:sp>
+      <p:sp>
+        <p:nvSpPr>
+          <p:cNvPr id="142" name="TextBox 141"/>
+          <p:cNvSpPr txBox="1"/>
+          <p:nvPr/>
+        </p:nvSpPr>
+        <p:spPr>
+          <a:xfrm>
+            <a:off x="727200" y="16341563"/>
+            <a:ext cx="6451200" cy="645563"/>
           </a:xfrm>
           <a:prstGeom prst="rect">
             <a:avLst/>
@@ -6701,30 +7096,1609 @@
                 </a:solidFill>
                 <a:latin typeface="Arial"/>
               </a:rPr>
-              <a:t>Routing is not only a model-selection problem: its learnability depends on the competence of the agent producing the labels.</a:t>
-            </a:r>
-            <a:r>
-              <a:rPr sz="1764" b="0" i="0">
+              <a:t>“Navigate to my listing of the blue bike and change the price to $85.50 (including in the description).”</a:t>
+            </a:r>
+          </a:p>
+        </p:txBody>
+      </p:sp>
+      <p:sp>
+        <p:nvSpPr>
+          <p:cNvPr id="143" name="Rectangle 142"/>
+          <p:cNvSpPr/>
+          <p:nvPr/>
+        </p:nvSpPr>
+        <p:spPr>
+          <a:xfrm>
+            <a:off x="727200" y="17077126"/>
+            <a:ext cx="6451200" cy="3024000"/>
+          </a:xfrm>
+          <a:prstGeom prst="rect">
+            <a:avLst/>
+          </a:prstGeom>
+          <a:noFill/>
+          <a:ln w="8890">
+            <a:solidFill>
+              <a:srgbClr val="DDE3F2"/>
+            </a:solidFill>
+          </a:ln>
+          <a:effectLst/>
+        </p:spPr>
+        <p:style>
+          <a:lnRef idx="1">
+            <a:schemeClr val="accent1"/>
+          </a:lnRef>
+          <a:fillRef idx="3">
+            <a:schemeClr val="accent1"/>
+          </a:fillRef>
+          <a:effectRef idx="2">
+            <a:schemeClr val="accent1"/>
+          </a:effectRef>
+          <a:fontRef idx="minor">
+            <a:schemeClr val="lt1"/>
+          </a:fontRef>
+        </p:style>
+        <p:txBody>
+          <a:bodyPr rtlCol="0" anchor="ctr" wrap="square"/>
+          <a:lstStyle/>
+          <a:p>
+            <a:pPr algn="ctr"/>
+          </a:p>
+        </p:txBody>
+      </p:sp>
+      <p:pic>
+        <p:nvPicPr>
+          <p:cNvPr id="144" name="Picture 143" descr="thumb_76.png"/>
+          <p:cNvPicPr>
+            <a:picLocks noChangeAspect="1"/>
+          </p:cNvPicPr>
+          <p:nvPr/>
+        </p:nvPicPr>
+        <p:blipFill>
+          <a:blip r:embed="rId6"/>
+          <a:stretch>
+            <a:fillRect/>
+          </a:stretch>
+        </p:blipFill>
+        <p:spPr>
+          <a:xfrm>
+            <a:off x="727200" y="17077126"/>
+            <a:ext cx="6451200" cy="3024000"/>
+          </a:xfrm>
+          <a:prstGeom prst="rect">
+            <a:avLst/>
+          </a:prstGeom>
+        </p:spPr>
+      </p:pic>
+      <p:sp>
+        <p:nvSpPr>
+          <p:cNvPr id="145" name="Rectangle 144"/>
+          <p:cNvSpPr/>
+          <p:nvPr/>
+        </p:nvSpPr>
+        <p:spPr>
+          <a:xfrm>
+            <a:off x="727200" y="20191126"/>
+            <a:ext cx="2078400" cy="864000"/>
+          </a:xfrm>
+          <a:prstGeom prst="rect">
+            <a:avLst/>
+          </a:prstGeom>
+          <a:solidFill>
+            <a:srgbClr val="F7F9FD"/>
+          </a:solidFill>
+          <a:ln w="8890">
+            <a:solidFill>
+              <a:srgbClr val="DDE3F2"/>
+            </a:solidFill>
+          </a:ln>
+          <a:effectLst/>
+        </p:spPr>
+        <p:style>
+          <a:lnRef idx="1">
+            <a:schemeClr val="accent1"/>
+          </a:lnRef>
+          <a:fillRef idx="3">
+            <a:schemeClr val="accent1"/>
+          </a:fillRef>
+          <a:effectRef idx="2">
+            <a:schemeClr val="accent1"/>
+          </a:effectRef>
+          <a:fontRef idx="minor">
+            <a:schemeClr val="lt1"/>
+          </a:fontRef>
+        </p:style>
+        <p:txBody>
+          <a:bodyPr rtlCol="0" anchor="ctr" wrap="square"/>
+          <a:lstStyle/>
+          <a:p>
+            <a:pPr algn="ctr"/>
+          </a:p>
+        </p:txBody>
+      </p:sp>
+      <p:sp>
+        <p:nvSpPr>
+          <p:cNvPr id="146" name="Rectangle 145"/>
+          <p:cNvSpPr/>
+          <p:nvPr/>
+        </p:nvSpPr>
+        <p:spPr>
+          <a:xfrm>
+            <a:off x="727200" y="20191126"/>
+            <a:ext cx="2078400" cy="43200"/>
+          </a:xfrm>
+          <a:prstGeom prst="rect">
+            <a:avLst/>
+          </a:prstGeom>
+          <a:solidFill>
+            <a:srgbClr val="1F5FD6"/>
+          </a:solidFill>
+          <a:ln>
+            <a:noFill/>
+          </a:ln>
+          <a:effectLst/>
+        </p:spPr>
+        <p:style>
+          <a:lnRef idx="1">
+            <a:schemeClr val="accent1"/>
+          </a:lnRef>
+          <a:fillRef idx="3">
+            <a:schemeClr val="accent1"/>
+          </a:fillRef>
+          <a:effectRef idx="2">
+            <a:schemeClr val="accent1"/>
+          </a:effectRef>
+          <a:fontRef idx="minor">
+            <a:schemeClr val="lt1"/>
+          </a:fontRef>
+        </p:style>
+        <p:txBody>
+          <a:bodyPr rtlCol="0" anchor="ctr" wrap="square"/>
+          <a:lstStyle/>
+          <a:p>
+            <a:pPr algn="ctr"/>
+          </a:p>
+        </p:txBody>
+      </p:sp>
+      <p:sp>
+        <p:nvSpPr>
+          <p:cNvPr id="147" name="TextBox 146"/>
+          <p:cNvSpPr txBox="1"/>
+          <p:nvPr/>
+        </p:nvSpPr>
+        <p:spPr>
+          <a:xfrm>
+            <a:off x="835200" y="20299126"/>
+            <a:ext cx="1080000" cy="216000"/>
+          </a:xfrm>
+          <a:prstGeom prst="rect">
+            <a:avLst/>
+          </a:prstGeom>
+          <a:noFill/>
+        </p:spPr>
+        <p:txBody>
+          <a:bodyPr wrap="square" lIns="0" rIns="0" tIns="0" bIns="0">
+            <a:spAutoFit/>
+          </a:bodyPr>
+          <a:lstStyle/>
+          <a:p>
+            <a:pPr algn="l">
+              <a:lnSpc>
+                <a:spcPct val="120000"/>
+              </a:lnSpc>
+              <a:spcAft>
+                <a:spcPts val="0"/>
+              </a:spcAft>
+            </a:pPr>
+            <a:r>
+              <a:rPr sz="1059" b="1" i="0">
+                <a:solidFill>
+                  <a:srgbClr val="1F5FD6"/>
+                </a:solidFill>
+                <a:latin typeface="Consolas"/>
+              </a:rPr>
+              <a:t>LOOK</a:t>
+            </a:r>
+          </a:p>
+        </p:txBody>
+      </p:sp>
+      <p:sp>
+        <p:nvSpPr>
+          <p:cNvPr id="148" name="TextBox 147"/>
+          <p:cNvSpPr txBox="1"/>
+          <p:nvPr/>
+        </p:nvSpPr>
+        <p:spPr>
+          <a:xfrm>
+            <a:off x="835200" y="20461126"/>
+            <a:ext cx="576000" cy="540000"/>
+          </a:xfrm>
+          <a:prstGeom prst="rect">
+            <a:avLst/>
+          </a:prstGeom>
+          <a:noFill/>
+        </p:spPr>
+        <p:txBody>
+          <a:bodyPr wrap="square" lIns="0" rIns="0" tIns="0" bIns="0">
+            <a:spAutoFit/>
+          </a:bodyPr>
+          <a:lstStyle/>
+          <a:p>
+            <a:pPr algn="l">
+              <a:lnSpc>
+                <a:spcPct val="100000"/>
+              </a:lnSpc>
+              <a:spcAft>
+                <a:spcPts val="0"/>
+              </a:spcAft>
+            </a:pPr>
+            <a:r>
+              <a:rPr sz="3247" b="1" i="0">
+                <a:solidFill>
+                  <a:srgbClr val="C2352B"/>
+                </a:solidFill>
+                <a:latin typeface="Consolas"/>
+              </a:rPr>
+              <a:t>✗</a:t>
+            </a:r>
+          </a:p>
+        </p:txBody>
+      </p:sp>
+      <p:sp>
+        <p:nvSpPr>
+          <p:cNvPr id="149" name="TextBox 148"/>
+          <p:cNvSpPr txBox="1"/>
+          <p:nvPr/>
+        </p:nvSpPr>
+        <p:spPr>
+          <a:xfrm>
+            <a:off x="1447200" y="20515126"/>
+            <a:ext cx="1286400" cy="504000"/>
+          </a:xfrm>
+          <a:prstGeom prst="rect">
+            <a:avLst/>
+          </a:prstGeom>
+          <a:noFill/>
+        </p:spPr>
+        <p:txBody>
+          <a:bodyPr wrap="square" lIns="0" rIns="0" tIns="0" bIns="0">
+            <a:spAutoFit/>
+          </a:bodyPr>
+          <a:lstStyle/>
+          <a:p>
+            <a:pPr algn="l">
+              <a:lnSpc>
+                <a:spcPct val="132000"/>
+              </a:lnSpc>
+              <a:spcAft>
+                <a:spcPts val="0"/>
+              </a:spcAft>
+            </a:pPr>
+            <a:r>
+              <a:rPr sz="1271" b="0" i="0">
                 <a:solidFill>
                   <a:srgbClr val="12162E"/>
                 </a:solidFill>
                 <a:latin typeface="Arial"/>
               </a:rPr>
-              <a:t> So, in this order: improve the agent, then generate reliable supervision, then learn selective perception.</a:t>
-            </a:r>
-          </a:p>
-        </p:txBody>
-      </p:sp>
-      <p:sp>
-        <p:nvSpPr>
-          <p:cNvPr id="113" name="TextBox 112"/>
+              <a:t>30 steps</a:t>
+            </a:r>
+          </a:p>
+          <a:p>
+            <a:pPr algn="l">
+              <a:lnSpc>
+                <a:spcPct val="132000"/>
+              </a:lnSpc>
+              <a:spcAft>
+                <a:spcPts val="0"/>
+              </a:spcAft>
+            </a:pPr>
+            <a:r>
+              <a:rPr sz="1271" b="0" i="0">
+                <a:solidFill>
+                  <a:srgbClr val="12162E"/>
+                </a:solidFill>
+                <a:latin typeface="Arial"/>
+              </a:rPr>
+              <a:t>$0.116</a:t>
+            </a:r>
+          </a:p>
+        </p:txBody>
+      </p:sp>
+      <p:sp>
+        <p:nvSpPr>
+          <p:cNvPr id="150" name="Rectangle 149"/>
+          <p:cNvSpPr/>
+          <p:nvPr/>
+        </p:nvSpPr>
+        <p:spPr>
+          <a:xfrm>
+            <a:off x="2913600" y="20191126"/>
+            <a:ext cx="2078400" cy="864000"/>
+          </a:xfrm>
+          <a:prstGeom prst="rect">
+            <a:avLst/>
+          </a:prstGeom>
+          <a:solidFill>
+            <a:srgbClr val="F7F9FD"/>
+          </a:solidFill>
+          <a:ln w="8890">
+            <a:solidFill>
+              <a:srgbClr val="DDE3F2"/>
+            </a:solidFill>
+          </a:ln>
+          <a:effectLst/>
+        </p:spPr>
+        <p:style>
+          <a:lnRef idx="1">
+            <a:schemeClr val="accent1"/>
+          </a:lnRef>
+          <a:fillRef idx="3">
+            <a:schemeClr val="accent1"/>
+          </a:fillRef>
+          <a:effectRef idx="2">
+            <a:schemeClr val="accent1"/>
+          </a:effectRef>
+          <a:fontRef idx="minor">
+            <a:schemeClr val="lt1"/>
+          </a:fontRef>
+        </p:style>
+        <p:txBody>
+          <a:bodyPr rtlCol="0" anchor="ctr" wrap="square"/>
+          <a:lstStyle/>
+          <a:p>
+            <a:pPr algn="ctr"/>
+          </a:p>
+        </p:txBody>
+      </p:sp>
+      <p:sp>
+        <p:nvSpPr>
+          <p:cNvPr id="151" name="Rectangle 150"/>
+          <p:cNvSpPr/>
+          <p:nvPr/>
+        </p:nvSpPr>
+        <p:spPr>
+          <a:xfrm>
+            <a:off x="2913600" y="20191126"/>
+            <a:ext cx="2078400" cy="43200"/>
+          </a:xfrm>
+          <a:prstGeom prst="rect">
+            <a:avLst/>
+          </a:prstGeom>
+          <a:solidFill>
+            <a:srgbClr val="E8720C"/>
+          </a:solidFill>
+          <a:ln>
+            <a:noFill/>
+          </a:ln>
+          <a:effectLst/>
+        </p:spPr>
+        <p:style>
+          <a:lnRef idx="1">
+            <a:schemeClr val="accent1"/>
+          </a:lnRef>
+          <a:fillRef idx="3">
+            <a:schemeClr val="accent1"/>
+          </a:fillRef>
+          <a:effectRef idx="2">
+            <a:schemeClr val="accent1"/>
+          </a:effectRef>
+          <a:fontRef idx="minor">
+            <a:schemeClr val="lt1"/>
+          </a:fontRef>
+        </p:style>
+        <p:txBody>
+          <a:bodyPr rtlCol="0" anchor="ctr" wrap="square"/>
+          <a:lstStyle/>
+          <a:p>
+            <a:pPr algn="ctr"/>
+          </a:p>
+        </p:txBody>
+      </p:sp>
+      <p:sp>
+        <p:nvSpPr>
+          <p:cNvPr id="152" name="TextBox 151"/>
           <p:cNvSpPr txBox="1"/>
           <p:nvPr/>
         </p:nvSpPr>
         <p:spPr>
           <a:xfrm>
-            <a:off x="7534800" y="27718972"/>
-            <a:ext cx="13255200" cy="255684"/>
+            <a:off x="3021600" y="20299126"/>
+            <a:ext cx="1080000" cy="216000"/>
+          </a:xfrm>
+          <a:prstGeom prst="rect">
+            <a:avLst/>
+          </a:prstGeom>
+          <a:noFill/>
+        </p:spPr>
+        <p:txBody>
+          <a:bodyPr wrap="square" lIns="0" rIns="0" tIns="0" bIns="0">
+            <a:spAutoFit/>
+          </a:bodyPr>
+          <a:lstStyle/>
+          <a:p>
+            <a:pPr algn="l">
+              <a:lnSpc>
+                <a:spcPct val="120000"/>
+              </a:lnSpc>
+              <a:spcAft>
+                <a:spcPts val="0"/>
+              </a:spcAft>
+            </a:pPr>
+            <a:r>
+              <a:rPr sz="1059" b="1" i="0">
+                <a:solidFill>
+                  <a:srgbClr val="E8720C"/>
+                </a:solidFill>
+                <a:latin typeface="Consolas"/>
+              </a:rPr>
+              <a:t>READ</a:t>
+            </a:r>
+          </a:p>
+        </p:txBody>
+      </p:sp>
+      <p:sp>
+        <p:nvSpPr>
+          <p:cNvPr id="153" name="TextBox 152"/>
+          <p:cNvSpPr txBox="1"/>
+          <p:nvPr/>
+        </p:nvSpPr>
+        <p:spPr>
+          <a:xfrm>
+            <a:off x="3021600" y="20461126"/>
+            <a:ext cx="576000" cy="540000"/>
+          </a:xfrm>
+          <a:prstGeom prst="rect">
+            <a:avLst/>
+          </a:prstGeom>
+          <a:noFill/>
+        </p:spPr>
+        <p:txBody>
+          <a:bodyPr wrap="square" lIns="0" rIns="0" tIns="0" bIns="0">
+            <a:spAutoFit/>
+          </a:bodyPr>
+          <a:lstStyle/>
+          <a:p>
+            <a:pPr algn="l">
+              <a:lnSpc>
+                <a:spcPct val="100000"/>
+              </a:lnSpc>
+              <a:spcAft>
+                <a:spcPts val="0"/>
+              </a:spcAft>
+            </a:pPr>
+            <a:r>
+              <a:rPr sz="3247" b="1" i="0">
+                <a:solidFill>
+                  <a:srgbClr val="14855F"/>
+                </a:solidFill>
+                <a:latin typeface="Consolas"/>
+              </a:rPr>
+              <a:t>✓</a:t>
+            </a:r>
+          </a:p>
+        </p:txBody>
+      </p:sp>
+      <p:sp>
+        <p:nvSpPr>
+          <p:cNvPr id="154" name="TextBox 153"/>
+          <p:cNvSpPr txBox="1"/>
+          <p:nvPr/>
+        </p:nvSpPr>
+        <p:spPr>
+          <a:xfrm>
+            <a:off x="3633600" y="20515126"/>
+            <a:ext cx="1286400" cy="504000"/>
+          </a:xfrm>
+          <a:prstGeom prst="rect">
+            <a:avLst/>
+          </a:prstGeom>
+          <a:noFill/>
+        </p:spPr>
+        <p:txBody>
+          <a:bodyPr wrap="square" lIns="0" rIns="0" tIns="0" bIns="0">
+            <a:spAutoFit/>
+          </a:bodyPr>
+          <a:lstStyle/>
+          <a:p>
+            <a:pPr algn="l">
+              <a:lnSpc>
+                <a:spcPct val="132000"/>
+              </a:lnSpc>
+              <a:spcAft>
+                <a:spcPts val="0"/>
+              </a:spcAft>
+            </a:pPr>
+            <a:r>
+              <a:rPr sz="1271" b="0" i="0">
+                <a:solidFill>
+                  <a:srgbClr val="12162E"/>
+                </a:solidFill>
+                <a:latin typeface="Arial"/>
+              </a:rPr>
+              <a:t>9 steps</a:t>
+            </a:r>
+          </a:p>
+          <a:p>
+            <a:pPr algn="l">
+              <a:lnSpc>
+                <a:spcPct val="132000"/>
+              </a:lnSpc>
+              <a:spcAft>
+                <a:spcPts val="0"/>
+              </a:spcAft>
+            </a:pPr>
+            <a:r>
+              <a:rPr sz="1271" b="0" i="0">
+                <a:solidFill>
+                  <a:srgbClr val="12162E"/>
+                </a:solidFill>
+                <a:latin typeface="Arial"/>
+              </a:rPr>
+              <a:t>$0.079</a:t>
+            </a:r>
+          </a:p>
+        </p:txBody>
+      </p:sp>
+      <p:sp>
+        <p:nvSpPr>
+          <p:cNvPr id="155" name="Rectangle 154"/>
+          <p:cNvSpPr/>
+          <p:nvPr/>
+        </p:nvSpPr>
+        <p:spPr>
+          <a:xfrm>
+            <a:off x="5100000" y="20191126"/>
+            <a:ext cx="2078400" cy="864000"/>
+          </a:xfrm>
+          <a:prstGeom prst="rect">
+            <a:avLst/>
+          </a:prstGeom>
+          <a:solidFill>
+            <a:srgbClr val="F7F9FD"/>
+          </a:solidFill>
+          <a:ln w="8890">
+            <a:solidFill>
+              <a:srgbClr val="DDE3F2"/>
+            </a:solidFill>
+          </a:ln>
+          <a:effectLst/>
+        </p:spPr>
+        <p:style>
+          <a:lnRef idx="1">
+            <a:schemeClr val="accent1"/>
+          </a:lnRef>
+          <a:fillRef idx="3">
+            <a:schemeClr val="accent1"/>
+          </a:fillRef>
+          <a:effectRef idx="2">
+            <a:schemeClr val="accent1"/>
+          </a:effectRef>
+          <a:fontRef idx="minor">
+            <a:schemeClr val="lt1"/>
+          </a:fontRef>
+        </p:style>
+        <p:txBody>
+          <a:bodyPr rtlCol="0" anchor="ctr" wrap="square"/>
+          <a:lstStyle/>
+          <a:p>
+            <a:pPr algn="ctr"/>
+          </a:p>
+        </p:txBody>
+      </p:sp>
+      <p:sp>
+        <p:nvSpPr>
+          <p:cNvPr id="156" name="Rectangle 155"/>
+          <p:cNvSpPr/>
+          <p:nvPr/>
+        </p:nvSpPr>
+        <p:spPr>
+          <a:xfrm>
+            <a:off x="5100000" y="20191126"/>
+            <a:ext cx="2078400" cy="43200"/>
+          </a:xfrm>
+          <a:prstGeom prst="rect">
+            <a:avLst/>
+          </a:prstGeom>
+          <a:solidFill>
+            <a:srgbClr val="14855F"/>
+          </a:solidFill>
+          <a:ln>
+            <a:noFill/>
+          </a:ln>
+          <a:effectLst/>
+        </p:spPr>
+        <p:style>
+          <a:lnRef idx="1">
+            <a:schemeClr val="accent1"/>
+          </a:lnRef>
+          <a:fillRef idx="3">
+            <a:schemeClr val="accent1"/>
+          </a:fillRef>
+          <a:effectRef idx="2">
+            <a:schemeClr val="accent1"/>
+          </a:effectRef>
+          <a:fontRef idx="minor">
+            <a:schemeClr val="lt1"/>
+          </a:fontRef>
+        </p:style>
+        <p:txBody>
+          <a:bodyPr rtlCol="0" anchor="ctr" wrap="square"/>
+          <a:lstStyle/>
+          <a:p>
+            <a:pPr algn="ctr"/>
+          </a:p>
+        </p:txBody>
+      </p:sp>
+      <p:sp>
+        <p:nvSpPr>
+          <p:cNvPr id="157" name="TextBox 156"/>
+          <p:cNvSpPr txBox="1"/>
+          <p:nvPr/>
+        </p:nvSpPr>
+        <p:spPr>
+          <a:xfrm>
+            <a:off x="5208000" y="20299126"/>
+            <a:ext cx="1080000" cy="216000"/>
+          </a:xfrm>
+          <a:prstGeom prst="rect">
+            <a:avLst/>
+          </a:prstGeom>
+          <a:noFill/>
+        </p:spPr>
+        <p:txBody>
+          <a:bodyPr wrap="square" lIns="0" rIns="0" tIns="0" bIns="0">
+            <a:spAutoFit/>
+          </a:bodyPr>
+          <a:lstStyle/>
+          <a:p>
+            <a:pPr algn="l">
+              <a:lnSpc>
+                <a:spcPct val="120000"/>
+              </a:lnSpc>
+              <a:spcAft>
+                <a:spcPts val="0"/>
+              </a:spcAft>
+            </a:pPr>
+            <a:r>
+              <a:rPr sz="1059" b="1" i="0">
+                <a:solidFill>
+                  <a:srgbClr val="14855F"/>
+                </a:solidFill>
+                <a:latin typeface="Consolas"/>
+              </a:rPr>
+              <a:t>BOTH</a:t>
+            </a:r>
+          </a:p>
+        </p:txBody>
+      </p:sp>
+      <p:sp>
+        <p:nvSpPr>
+          <p:cNvPr id="158" name="TextBox 157"/>
+          <p:cNvSpPr txBox="1"/>
+          <p:nvPr/>
+        </p:nvSpPr>
+        <p:spPr>
+          <a:xfrm>
+            <a:off x="5208000" y="20461126"/>
+            <a:ext cx="576000" cy="540000"/>
+          </a:xfrm>
+          <a:prstGeom prst="rect">
+            <a:avLst/>
+          </a:prstGeom>
+          <a:noFill/>
+        </p:spPr>
+        <p:txBody>
+          <a:bodyPr wrap="square" lIns="0" rIns="0" tIns="0" bIns="0">
+            <a:spAutoFit/>
+          </a:bodyPr>
+          <a:lstStyle/>
+          <a:p>
+            <a:pPr algn="l">
+              <a:lnSpc>
+                <a:spcPct val="100000"/>
+              </a:lnSpc>
+              <a:spcAft>
+                <a:spcPts val="0"/>
+              </a:spcAft>
+            </a:pPr>
+            <a:r>
+              <a:rPr sz="3247" b="1" i="0">
+                <a:solidFill>
+                  <a:srgbClr val="C2352B"/>
+                </a:solidFill>
+                <a:latin typeface="Consolas"/>
+              </a:rPr>
+              <a:t>✗</a:t>
+            </a:r>
+          </a:p>
+        </p:txBody>
+      </p:sp>
+      <p:sp>
+        <p:nvSpPr>
+          <p:cNvPr id="159" name="TextBox 158"/>
+          <p:cNvSpPr txBox="1"/>
+          <p:nvPr/>
+        </p:nvSpPr>
+        <p:spPr>
+          <a:xfrm>
+            <a:off x="5820000" y="20515126"/>
+            <a:ext cx="1286400" cy="504000"/>
+          </a:xfrm>
+          <a:prstGeom prst="rect">
+            <a:avLst/>
+          </a:prstGeom>
+          <a:noFill/>
+        </p:spPr>
+        <p:txBody>
+          <a:bodyPr wrap="square" lIns="0" rIns="0" tIns="0" bIns="0">
+            <a:spAutoFit/>
+          </a:bodyPr>
+          <a:lstStyle/>
+          <a:p>
+            <a:pPr algn="l">
+              <a:lnSpc>
+                <a:spcPct val="132000"/>
+              </a:lnSpc>
+              <a:spcAft>
+                <a:spcPts val="0"/>
+              </a:spcAft>
+            </a:pPr>
+            <a:r>
+              <a:rPr sz="1271" b="0" i="0">
+                <a:solidFill>
+                  <a:srgbClr val="12162E"/>
+                </a:solidFill>
+                <a:latin typeface="Arial"/>
+              </a:rPr>
+              <a:t>6 steps</a:t>
+            </a:r>
+          </a:p>
+          <a:p>
+            <a:pPr algn="l">
+              <a:lnSpc>
+                <a:spcPct val="132000"/>
+              </a:lnSpc>
+              <a:spcAft>
+                <a:spcPts val="0"/>
+              </a:spcAft>
+            </a:pPr>
+            <a:r>
+              <a:rPr sz="1271" b="0" i="0">
+                <a:solidFill>
+                  <a:srgbClr val="12162E"/>
+                </a:solidFill>
+                <a:latin typeface="Arial"/>
+              </a:rPr>
+              <a:t>$0.029</a:t>
+            </a:r>
+          </a:p>
+        </p:txBody>
+      </p:sp>
+      <p:sp>
+        <p:nvSpPr>
+          <p:cNvPr id="160" name="TextBox 159"/>
+          <p:cNvSpPr txBox="1"/>
+          <p:nvPr/>
+        </p:nvSpPr>
+        <p:spPr>
+          <a:xfrm>
+            <a:off x="727200" y="21343126"/>
+            <a:ext cx="6451200" cy="645563"/>
+          </a:xfrm>
+          <a:prstGeom prst="rect">
+            <a:avLst/>
+          </a:prstGeom>
+          <a:noFill/>
+        </p:spPr>
+        <p:txBody>
+          <a:bodyPr wrap="square" lIns="0" rIns="0" tIns="0" bIns="0">
+            <a:spAutoFit/>
+          </a:bodyPr>
+          <a:lstStyle/>
+          <a:p>
+            <a:pPr algn="l">
+              <a:lnSpc>
+                <a:spcPct val="120000"/>
+              </a:lnSpc>
+              <a:spcAft>
+                <a:spcPts val="992"/>
+              </a:spcAft>
+            </a:pPr>
+            <a:r>
+              <a:rPr sz="1764" b="1" i="0">
+                <a:solidFill>
+                  <a:srgbClr val="12162E"/>
+                </a:solidFill>
+                <a:latin typeface="Arial"/>
+              </a:rPr>
+              <a:t>“Show me the cheapest bike with red handlebars between $900-950.”</a:t>
+            </a:r>
+          </a:p>
+        </p:txBody>
+      </p:sp>
+      <p:sp>
+        <p:nvSpPr>
+          <p:cNvPr id="161" name="Rectangle 160"/>
+          <p:cNvSpPr/>
+          <p:nvPr/>
+        </p:nvSpPr>
+        <p:spPr>
+          <a:xfrm>
+            <a:off x="727200" y="22078689"/>
+            <a:ext cx="6451200" cy="3024000"/>
+          </a:xfrm>
+          <a:prstGeom prst="rect">
+            <a:avLst/>
+          </a:prstGeom>
+          <a:noFill/>
+          <a:ln w="8890">
+            <a:solidFill>
+              <a:srgbClr val="DDE3F2"/>
+            </a:solidFill>
+          </a:ln>
+          <a:effectLst/>
+        </p:spPr>
+        <p:style>
+          <a:lnRef idx="1">
+            <a:schemeClr val="accent1"/>
+          </a:lnRef>
+          <a:fillRef idx="3">
+            <a:schemeClr val="accent1"/>
+          </a:fillRef>
+          <a:effectRef idx="2">
+            <a:schemeClr val="accent1"/>
+          </a:effectRef>
+          <a:fontRef idx="minor">
+            <a:schemeClr val="lt1"/>
+          </a:fontRef>
+        </p:style>
+        <p:txBody>
+          <a:bodyPr rtlCol="0" anchor="ctr" wrap="square"/>
+          <a:lstStyle/>
+          <a:p>
+            <a:pPr algn="ctr"/>
+          </a:p>
+        </p:txBody>
+      </p:sp>
+      <p:pic>
+        <p:nvPicPr>
+          <p:cNvPr id="162" name="Picture 161" descr="thumb_17.png"/>
+          <p:cNvPicPr>
+            <a:picLocks noChangeAspect="1"/>
+          </p:cNvPicPr>
+          <p:nvPr/>
+        </p:nvPicPr>
+        <p:blipFill>
+          <a:blip r:embed="rId7"/>
+          <a:stretch>
+            <a:fillRect/>
+          </a:stretch>
+        </p:blipFill>
+        <p:spPr>
+          <a:xfrm>
+            <a:off x="727200" y="22078689"/>
+            <a:ext cx="6451200" cy="3024000"/>
+          </a:xfrm>
+          <a:prstGeom prst="rect">
+            <a:avLst/>
+          </a:prstGeom>
+        </p:spPr>
+      </p:pic>
+      <p:sp>
+        <p:nvSpPr>
+          <p:cNvPr id="163" name="Rectangle 162"/>
+          <p:cNvSpPr/>
+          <p:nvPr/>
+        </p:nvSpPr>
+        <p:spPr>
+          <a:xfrm>
+            <a:off x="727200" y="25192689"/>
+            <a:ext cx="2078400" cy="864000"/>
+          </a:xfrm>
+          <a:prstGeom prst="rect">
+            <a:avLst/>
+          </a:prstGeom>
+          <a:solidFill>
+            <a:srgbClr val="F7F9FD"/>
+          </a:solidFill>
+          <a:ln w="8890">
+            <a:solidFill>
+              <a:srgbClr val="DDE3F2"/>
+            </a:solidFill>
+          </a:ln>
+          <a:effectLst/>
+        </p:spPr>
+        <p:style>
+          <a:lnRef idx="1">
+            <a:schemeClr val="accent1"/>
+          </a:lnRef>
+          <a:fillRef idx="3">
+            <a:schemeClr val="accent1"/>
+          </a:fillRef>
+          <a:effectRef idx="2">
+            <a:schemeClr val="accent1"/>
+          </a:effectRef>
+          <a:fontRef idx="minor">
+            <a:schemeClr val="lt1"/>
+          </a:fontRef>
+        </p:style>
+        <p:txBody>
+          <a:bodyPr rtlCol="0" anchor="ctr" wrap="square"/>
+          <a:lstStyle/>
+          <a:p>
+            <a:pPr algn="ctr"/>
+          </a:p>
+        </p:txBody>
+      </p:sp>
+      <p:sp>
+        <p:nvSpPr>
+          <p:cNvPr id="164" name="Rectangle 163"/>
+          <p:cNvSpPr/>
+          <p:nvPr/>
+        </p:nvSpPr>
+        <p:spPr>
+          <a:xfrm>
+            <a:off x="727200" y="25192689"/>
+            <a:ext cx="2078400" cy="43200"/>
+          </a:xfrm>
+          <a:prstGeom prst="rect">
+            <a:avLst/>
+          </a:prstGeom>
+          <a:solidFill>
+            <a:srgbClr val="1F5FD6"/>
+          </a:solidFill>
+          <a:ln>
+            <a:noFill/>
+          </a:ln>
+          <a:effectLst/>
+        </p:spPr>
+        <p:style>
+          <a:lnRef idx="1">
+            <a:schemeClr val="accent1"/>
+          </a:lnRef>
+          <a:fillRef idx="3">
+            <a:schemeClr val="accent1"/>
+          </a:fillRef>
+          <a:effectRef idx="2">
+            <a:schemeClr val="accent1"/>
+          </a:effectRef>
+          <a:fontRef idx="minor">
+            <a:schemeClr val="lt1"/>
+          </a:fontRef>
+        </p:style>
+        <p:txBody>
+          <a:bodyPr rtlCol="0" anchor="ctr" wrap="square"/>
+          <a:lstStyle/>
+          <a:p>
+            <a:pPr algn="ctr"/>
+          </a:p>
+        </p:txBody>
+      </p:sp>
+      <p:sp>
+        <p:nvSpPr>
+          <p:cNvPr id="165" name="TextBox 164"/>
+          <p:cNvSpPr txBox="1"/>
+          <p:nvPr/>
+        </p:nvSpPr>
+        <p:spPr>
+          <a:xfrm>
+            <a:off x="835200" y="25300689"/>
+            <a:ext cx="1080000" cy="216000"/>
+          </a:xfrm>
+          <a:prstGeom prst="rect">
+            <a:avLst/>
+          </a:prstGeom>
+          <a:noFill/>
+        </p:spPr>
+        <p:txBody>
+          <a:bodyPr wrap="square" lIns="0" rIns="0" tIns="0" bIns="0">
+            <a:spAutoFit/>
+          </a:bodyPr>
+          <a:lstStyle/>
+          <a:p>
+            <a:pPr algn="l">
+              <a:lnSpc>
+                <a:spcPct val="120000"/>
+              </a:lnSpc>
+              <a:spcAft>
+                <a:spcPts val="0"/>
+              </a:spcAft>
+            </a:pPr>
+            <a:r>
+              <a:rPr sz="1059" b="1" i="0">
+                <a:solidFill>
+                  <a:srgbClr val="1F5FD6"/>
+                </a:solidFill>
+                <a:latin typeface="Consolas"/>
+              </a:rPr>
+              <a:t>LOOK</a:t>
+            </a:r>
+          </a:p>
+        </p:txBody>
+      </p:sp>
+      <p:sp>
+        <p:nvSpPr>
+          <p:cNvPr id="166" name="TextBox 165"/>
+          <p:cNvSpPr txBox="1"/>
+          <p:nvPr/>
+        </p:nvSpPr>
+        <p:spPr>
+          <a:xfrm>
+            <a:off x="835200" y="25462689"/>
+            <a:ext cx="576000" cy="540000"/>
+          </a:xfrm>
+          <a:prstGeom prst="rect">
+            <a:avLst/>
+          </a:prstGeom>
+          <a:noFill/>
+        </p:spPr>
+        <p:txBody>
+          <a:bodyPr wrap="square" lIns="0" rIns="0" tIns="0" bIns="0">
+            <a:spAutoFit/>
+          </a:bodyPr>
+          <a:lstStyle/>
+          <a:p>
+            <a:pPr algn="l">
+              <a:lnSpc>
+                <a:spcPct val="100000"/>
+              </a:lnSpc>
+              <a:spcAft>
+                <a:spcPts val="0"/>
+              </a:spcAft>
+            </a:pPr>
+            <a:r>
+              <a:rPr sz="3247" b="1" i="0">
+                <a:solidFill>
+                  <a:srgbClr val="C2352B"/>
+                </a:solidFill>
+                <a:latin typeface="Consolas"/>
+              </a:rPr>
+              <a:t>✗</a:t>
+            </a:r>
+          </a:p>
+        </p:txBody>
+      </p:sp>
+      <p:sp>
+        <p:nvSpPr>
+          <p:cNvPr id="167" name="TextBox 166"/>
+          <p:cNvSpPr txBox="1"/>
+          <p:nvPr/>
+        </p:nvSpPr>
+        <p:spPr>
+          <a:xfrm>
+            <a:off x="1447200" y="25516689"/>
+            <a:ext cx="1286400" cy="504000"/>
+          </a:xfrm>
+          <a:prstGeom prst="rect">
+            <a:avLst/>
+          </a:prstGeom>
+          <a:noFill/>
+        </p:spPr>
+        <p:txBody>
+          <a:bodyPr wrap="square" lIns="0" rIns="0" tIns="0" bIns="0">
+            <a:spAutoFit/>
+          </a:bodyPr>
+          <a:lstStyle/>
+          <a:p>
+            <a:pPr algn="l">
+              <a:lnSpc>
+                <a:spcPct val="132000"/>
+              </a:lnSpc>
+              <a:spcAft>
+                <a:spcPts val="0"/>
+              </a:spcAft>
+            </a:pPr>
+            <a:r>
+              <a:rPr sz="1271" b="0" i="0">
+                <a:solidFill>
+                  <a:srgbClr val="12162E"/>
+                </a:solidFill>
+                <a:latin typeface="Arial"/>
+              </a:rPr>
+              <a:t>19 steps</a:t>
+            </a:r>
+          </a:p>
+          <a:p>
+            <a:pPr algn="l">
+              <a:lnSpc>
+                <a:spcPct val="132000"/>
+              </a:lnSpc>
+              <a:spcAft>
+                <a:spcPts val="0"/>
+              </a:spcAft>
+            </a:pPr>
+            <a:r>
+              <a:rPr sz="1271" b="0" i="0">
+                <a:solidFill>
+                  <a:srgbClr val="12162E"/>
+                </a:solidFill>
+                <a:latin typeface="Arial"/>
+              </a:rPr>
+              <a:t>$0.075</a:t>
+            </a:r>
+          </a:p>
+        </p:txBody>
+      </p:sp>
+      <p:sp>
+        <p:nvSpPr>
+          <p:cNvPr id="168" name="Rectangle 167"/>
+          <p:cNvSpPr/>
+          <p:nvPr/>
+        </p:nvSpPr>
+        <p:spPr>
+          <a:xfrm>
+            <a:off x="2913600" y="25192689"/>
+            <a:ext cx="2078400" cy="864000"/>
+          </a:xfrm>
+          <a:prstGeom prst="rect">
+            <a:avLst/>
+          </a:prstGeom>
+          <a:solidFill>
+            <a:srgbClr val="F7F9FD"/>
+          </a:solidFill>
+          <a:ln w="8890">
+            <a:solidFill>
+              <a:srgbClr val="DDE3F2"/>
+            </a:solidFill>
+          </a:ln>
+          <a:effectLst/>
+        </p:spPr>
+        <p:style>
+          <a:lnRef idx="1">
+            <a:schemeClr val="accent1"/>
+          </a:lnRef>
+          <a:fillRef idx="3">
+            <a:schemeClr val="accent1"/>
+          </a:fillRef>
+          <a:effectRef idx="2">
+            <a:schemeClr val="accent1"/>
+          </a:effectRef>
+          <a:fontRef idx="minor">
+            <a:schemeClr val="lt1"/>
+          </a:fontRef>
+        </p:style>
+        <p:txBody>
+          <a:bodyPr rtlCol="0" anchor="ctr" wrap="square"/>
+          <a:lstStyle/>
+          <a:p>
+            <a:pPr algn="ctr"/>
+          </a:p>
+        </p:txBody>
+      </p:sp>
+      <p:sp>
+        <p:nvSpPr>
+          <p:cNvPr id="169" name="Rectangle 168"/>
+          <p:cNvSpPr/>
+          <p:nvPr/>
+        </p:nvSpPr>
+        <p:spPr>
+          <a:xfrm>
+            <a:off x="2913600" y="25192689"/>
+            <a:ext cx="2078400" cy="43200"/>
+          </a:xfrm>
+          <a:prstGeom prst="rect">
+            <a:avLst/>
+          </a:prstGeom>
+          <a:solidFill>
+            <a:srgbClr val="E8720C"/>
+          </a:solidFill>
+          <a:ln>
+            <a:noFill/>
+          </a:ln>
+          <a:effectLst/>
+        </p:spPr>
+        <p:style>
+          <a:lnRef idx="1">
+            <a:schemeClr val="accent1"/>
+          </a:lnRef>
+          <a:fillRef idx="3">
+            <a:schemeClr val="accent1"/>
+          </a:fillRef>
+          <a:effectRef idx="2">
+            <a:schemeClr val="accent1"/>
+          </a:effectRef>
+          <a:fontRef idx="minor">
+            <a:schemeClr val="lt1"/>
+          </a:fontRef>
+        </p:style>
+        <p:txBody>
+          <a:bodyPr rtlCol="0" anchor="ctr" wrap="square"/>
+          <a:lstStyle/>
+          <a:p>
+            <a:pPr algn="ctr"/>
+          </a:p>
+        </p:txBody>
+      </p:sp>
+      <p:sp>
+        <p:nvSpPr>
+          <p:cNvPr id="170" name="TextBox 169"/>
+          <p:cNvSpPr txBox="1"/>
+          <p:nvPr/>
+        </p:nvSpPr>
+        <p:spPr>
+          <a:xfrm>
+            <a:off x="3021600" y="25300689"/>
+            <a:ext cx="1080000" cy="216000"/>
+          </a:xfrm>
+          <a:prstGeom prst="rect">
+            <a:avLst/>
+          </a:prstGeom>
+          <a:noFill/>
+        </p:spPr>
+        <p:txBody>
+          <a:bodyPr wrap="square" lIns="0" rIns="0" tIns="0" bIns="0">
+            <a:spAutoFit/>
+          </a:bodyPr>
+          <a:lstStyle/>
+          <a:p>
+            <a:pPr algn="l">
+              <a:lnSpc>
+                <a:spcPct val="120000"/>
+              </a:lnSpc>
+              <a:spcAft>
+                <a:spcPts val="0"/>
+              </a:spcAft>
+            </a:pPr>
+            <a:r>
+              <a:rPr sz="1059" b="1" i="0">
+                <a:solidFill>
+                  <a:srgbClr val="E8720C"/>
+                </a:solidFill>
+                <a:latin typeface="Consolas"/>
+              </a:rPr>
+              <a:t>READ</a:t>
+            </a:r>
+          </a:p>
+        </p:txBody>
+      </p:sp>
+      <p:sp>
+        <p:nvSpPr>
+          <p:cNvPr id="171" name="TextBox 170"/>
+          <p:cNvSpPr txBox="1"/>
+          <p:nvPr/>
+        </p:nvSpPr>
+        <p:spPr>
+          <a:xfrm>
+            <a:off x="3021600" y="25462689"/>
+            <a:ext cx="576000" cy="540000"/>
+          </a:xfrm>
+          <a:prstGeom prst="rect">
+            <a:avLst/>
+          </a:prstGeom>
+          <a:noFill/>
+        </p:spPr>
+        <p:txBody>
+          <a:bodyPr wrap="square" lIns="0" rIns="0" tIns="0" bIns="0">
+            <a:spAutoFit/>
+          </a:bodyPr>
+          <a:lstStyle/>
+          <a:p>
+            <a:pPr algn="l">
+              <a:lnSpc>
+                <a:spcPct val="100000"/>
+              </a:lnSpc>
+              <a:spcAft>
+                <a:spcPts val="0"/>
+              </a:spcAft>
+            </a:pPr>
+            <a:r>
+              <a:rPr sz="3247" b="1" i="0">
+                <a:solidFill>
+                  <a:srgbClr val="C2352B"/>
+                </a:solidFill>
+                <a:latin typeface="Consolas"/>
+              </a:rPr>
+              <a:t>✗</a:t>
+            </a:r>
+          </a:p>
+        </p:txBody>
+      </p:sp>
+      <p:sp>
+        <p:nvSpPr>
+          <p:cNvPr id="172" name="TextBox 171"/>
+          <p:cNvSpPr txBox="1"/>
+          <p:nvPr/>
+        </p:nvSpPr>
+        <p:spPr>
+          <a:xfrm>
+            <a:off x="3633600" y="25516689"/>
+            <a:ext cx="1286400" cy="504000"/>
+          </a:xfrm>
+          <a:prstGeom prst="rect">
+            <a:avLst/>
+          </a:prstGeom>
+          <a:noFill/>
+        </p:spPr>
+        <p:txBody>
+          <a:bodyPr wrap="square" lIns="0" rIns="0" tIns="0" bIns="0">
+            <a:spAutoFit/>
+          </a:bodyPr>
+          <a:lstStyle/>
+          <a:p>
+            <a:pPr algn="l">
+              <a:lnSpc>
+                <a:spcPct val="132000"/>
+              </a:lnSpc>
+              <a:spcAft>
+                <a:spcPts val="0"/>
+              </a:spcAft>
+            </a:pPr>
+            <a:r>
+              <a:rPr sz="1271" b="0" i="0">
+                <a:solidFill>
+                  <a:srgbClr val="12162E"/>
+                </a:solidFill>
+                <a:latin typeface="Arial"/>
+              </a:rPr>
+              <a:t>6 steps</a:t>
+            </a:r>
+          </a:p>
+          <a:p>
+            <a:pPr algn="l">
+              <a:lnSpc>
+                <a:spcPct val="132000"/>
+              </a:lnSpc>
+              <a:spcAft>
+                <a:spcPts val="0"/>
+              </a:spcAft>
+            </a:pPr>
+            <a:r>
+              <a:rPr sz="1271" b="0" i="0">
+                <a:solidFill>
+                  <a:srgbClr val="12162E"/>
+                </a:solidFill>
+                <a:latin typeface="Arial"/>
+              </a:rPr>
+              <a:t>$0.025</a:t>
+            </a:r>
+          </a:p>
+        </p:txBody>
+      </p:sp>
+      <p:sp>
+        <p:nvSpPr>
+          <p:cNvPr id="173" name="Rectangle 172"/>
+          <p:cNvSpPr/>
+          <p:nvPr/>
+        </p:nvSpPr>
+        <p:spPr>
+          <a:xfrm>
+            <a:off x="5100000" y="25192689"/>
+            <a:ext cx="2078400" cy="864000"/>
+          </a:xfrm>
+          <a:prstGeom prst="rect">
+            <a:avLst/>
+          </a:prstGeom>
+          <a:solidFill>
+            <a:srgbClr val="F7F9FD"/>
+          </a:solidFill>
+          <a:ln w="8890">
+            <a:solidFill>
+              <a:srgbClr val="DDE3F2"/>
+            </a:solidFill>
+          </a:ln>
+          <a:effectLst/>
+        </p:spPr>
+        <p:style>
+          <a:lnRef idx="1">
+            <a:schemeClr val="accent1"/>
+          </a:lnRef>
+          <a:fillRef idx="3">
+            <a:schemeClr val="accent1"/>
+          </a:fillRef>
+          <a:effectRef idx="2">
+            <a:schemeClr val="accent1"/>
+          </a:effectRef>
+          <a:fontRef idx="minor">
+            <a:schemeClr val="lt1"/>
+          </a:fontRef>
+        </p:style>
+        <p:txBody>
+          <a:bodyPr rtlCol="0" anchor="ctr" wrap="square"/>
+          <a:lstStyle/>
+          <a:p>
+            <a:pPr algn="ctr"/>
+          </a:p>
+        </p:txBody>
+      </p:sp>
+      <p:sp>
+        <p:nvSpPr>
+          <p:cNvPr id="174" name="Rectangle 173"/>
+          <p:cNvSpPr/>
+          <p:nvPr/>
+        </p:nvSpPr>
+        <p:spPr>
+          <a:xfrm>
+            <a:off x="5100000" y="25192689"/>
+            <a:ext cx="2078400" cy="43200"/>
+          </a:xfrm>
+          <a:prstGeom prst="rect">
+            <a:avLst/>
+          </a:prstGeom>
+          <a:solidFill>
+            <a:srgbClr val="14855F"/>
+          </a:solidFill>
+          <a:ln>
+            <a:noFill/>
+          </a:ln>
+          <a:effectLst/>
+        </p:spPr>
+        <p:style>
+          <a:lnRef idx="1">
+            <a:schemeClr val="accent1"/>
+          </a:lnRef>
+          <a:fillRef idx="3">
+            <a:schemeClr val="accent1"/>
+          </a:fillRef>
+          <a:effectRef idx="2">
+            <a:schemeClr val="accent1"/>
+          </a:effectRef>
+          <a:fontRef idx="minor">
+            <a:schemeClr val="lt1"/>
+          </a:fontRef>
+        </p:style>
+        <p:txBody>
+          <a:bodyPr rtlCol="0" anchor="ctr" wrap="square"/>
+          <a:lstStyle/>
+          <a:p>
+            <a:pPr algn="ctr"/>
+          </a:p>
+        </p:txBody>
+      </p:sp>
+      <p:sp>
+        <p:nvSpPr>
+          <p:cNvPr id="175" name="TextBox 174"/>
+          <p:cNvSpPr txBox="1"/>
+          <p:nvPr/>
+        </p:nvSpPr>
+        <p:spPr>
+          <a:xfrm>
+            <a:off x="5208000" y="25300689"/>
+            <a:ext cx="1080000" cy="216000"/>
+          </a:xfrm>
+          <a:prstGeom prst="rect">
+            <a:avLst/>
+          </a:prstGeom>
+          <a:noFill/>
+        </p:spPr>
+        <p:txBody>
+          <a:bodyPr wrap="square" lIns="0" rIns="0" tIns="0" bIns="0">
+            <a:spAutoFit/>
+          </a:bodyPr>
+          <a:lstStyle/>
+          <a:p>
+            <a:pPr algn="l">
+              <a:lnSpc>
+                <a:spcPct val="120000"/>
+              </a:lnSpc>
+              <a:spcAft>
+                <a:spcPts val="0"/>
+              </a:spcAft>
+            </a:pPr>
+            <a:r>
+              <a:rPr sz="1059" b="1" i="0">
+                <a:solidFill>
+                  <a:srgbClr val="14855F"/>
+                </a:solidFill>
+                <a:latin typeface="Consolas"/>
+              </a:rPr>
+              <a:t>BOTH</a:t>
+            </a:r>
+          </a:p>
+        </p:txBody>
+      </p:sp>
+      <p:sp>
+        <p:nvSpPr>
+          <p:cNvPr id="176" name="TextBox 175"/>
+          <p:cNvSpPr txBox="1"/>
+          <p:nvPr/>
+        </p:nvSpPr>
+        <p:spPr>
+          <a:xfrm>
+            <a:off x="5208000" y="25462689"/>
+            <a:ext cx="576000" cy="540000"/>
+          </a:xfrm>
+          <a:prstGeom prst="rect">
+            <a:avLst/>
+          </a:prstGeom>
+          <a:noFill/>
+        </p:spPr>
+        <p:txBody>
+          <a:bodyPr wrap="square" lIns="0" rIns="0" tIns="0" bIns="0">
+            <a:spAutoFit/>
+          </a:bodyPr>
+          <a:lstStyle/>
+          <a:p>
+            <a:pPr algn="l">
+              <a:lnSpc>
+                <a:spcPct val="100000"/>
+              </a:lnSpc>
+              <a:spcAft>
+                <a:spcPts val="0"/>
+              </a:spcAft>
+            </a:pPr>
+            <a:r>
+              <a:rPr sz="3247" b="1" i="0">
+                <a:solidFill>
+                  <a:srgbClr val="14855F"/>
+                </a:solidFill>
+                <a:latin typeface="Consolas"/>
+              </a:rPr>
+              <a:t>✓</a:t>
+            </a:r>
+          </a:p>
+        </p:txBody>
+      </p:sp>
+      <p:sp>
+        <p:nvSpPr>
+          <p:cNvPr id="177" name="TextBox 176"/>
+          <p:cNvSpPr txBox="1"/>
+          <p:nvPr/>
+        </p:nvSpPr>
+        <p:spPr>
+          <a:xfrm>
+            <a:off x="5820000" y="25516689"/>
+            <a:ext cx="1286400" cy="504000"/>
+          </a:xfrm>
+          <a:prstGeom prst="rect">
+            <a:avLst/>
+          </a:prstGeom>
+          <a:noFill/>
+        </p:spPr>
+        <p:txBody>
+          <a:bodyPr wrap="square" lIns="0" rIns="0" tIns="0" bIns="0">
+            <a:spAutoFit/>
+          </a:bodyPr>
+          <a:lstStyle/>
+          <a:p>
+            <a:pPr algn="l">
+              <a:lnSpc>
+                <a:spcPct val="132000"/>
+              </a:lnSpc>
+              <a:spcAft>
+                <a:spcPts val="0"/>
+              </a:spcAft>
+            </a:pPr>
+            <a:r>
+              <a:rPr sz="1271" b="0" i="0">
+                <a:solidFill>
+                  <a:srgbClr val="12162E"/>
+                </a:solidFill>
+                <a:latin typeface="Arial"/>
+              </a:rPr>
+              <a:t>7 steps</a:t>
+            </a:r>
+          </a:p>
+          <a:p>
+            <a:pPr algn="l">
+              <a:lnSpc>
+                <a:spcPct val="132000"/>
+              </a:lnSpc>
+              <a:spcAft>
+                <a:spcPts val="0"/>
+              </a:spcAft>
+            </a:pPr>
+            <a:r>
+              <a:rPr sz="1271" b="0" i="0">
+                <a:solidFill>
+                  <a:srgbClr val="12162E"/>
+                </a:solidFill>
+                <a:latin typeface="Arial"/>
+              </a:rPr>
+              <a:t>$0.037</a:t>
+            </a:r>
+          </a:p>
+        </p:txBody>
+      </p:sp>
+      <p:sp>
+        <p:nvSpPr>
+          <p:cNvPr id="178" name="TextBox 177"/>
+          <p:cNvSpPr txBox="1"/>
+          <p:nvPr/>
+        </p:nvSpPr>
+        <p:spPr>
+          <a:xfrm>
+            <a:off x="727200" y="26272689"/>
+            <a:ext cx="6451200" cy="767053"/>
           </a:xfrm>
           <a:prstGeom prst="rect">
             <a:avLst/>
@@ -6752,21 +8726,1499 @@
                 </a:solidFill>
                 <a:latin typeface="Arial"/>
               </a:rPr>
-              <a:t>Measured inside the 2–36% success regime we observed. This conclusion need not hold for stronger agents.</a:t>
-            </a:r>
+              <a:t>One recorded run per mode, B0 · classifieds. Every ✓ / ✗ above came out the same on an independent rerun; steps and cost differ run to run — across all tasks a rerun flips 10–14% of outcomes.</a:t>
+            </a:r>
+          </a:p>
+        </p:txBody>
+      </p:sp>
+      <p:sp>
+        <p:nvSpPr>
+          <p:cNvPr id="14" name="Rectangle 13"/>
+          <p:cNvSpPr/>
+          <p:nvPr/>
+        </p:nvSpPr>
+        <p:spPr>
+          <a:xfrm>
+            <a:off x="7534800" y="10800000"/>
+            <a:ext cx="177988" cy="177988"/>
+          </a:xfrm>
+          <a:prstGeom prst="rect">
+            <a:avLst/>
+          </a:prstGeom>
+          <a:solidFill>
+            <a:srgbClr val="AB5FCE"/>
+          </a:solidFill>
+          <a:ln>
+            <a:noFill/>
+          </a:ln>
+          <a:effectLst/>
+        </p:spPr>
+        <p:style>
+          <a:lnRef idx="1">
+            <a:schemeClr val="accent1"/>
+          </a:lnRef>
+          <a:fillRef idx="3">
+            <a:schemeClr val="accent1"/>
+          </a:fillRef>
+          <a:effectRef idx="2">
+            <a:schemeClr val="accent1"/>
+          </a:effectRef>
+          <a:fontRef idx="minor">
+            <a:schemeClr val="lt1"/>
+          </a:fontRef>
+        </p:style>
+        <p:txBody>
+          <a:bodyPr rtlCol="0" anchor="ctr"/>
+          <a:lstStyle/>
+          <a:p>
+            <a:pPr algn="ctr"/>
+            <a:endParaRPr/>
+          </a:p>
+        </p:txBody>
+      </p:sp>
+      <p:sp>
+        <p:nvSpPr>
+          <p:cNvPr id="15" name="TextBox 14"/>
+          <p:cNvSpPr txBox="1"/>
+          <p:nvPr/>
+        </p:nvSpPr>
+        <p:spPr>
+          <a:xfrm>
+            <a:off x="7839923" y="10756800"/>
+            <a:ext cx="6144827" cy="238912"/>
+          </a:xfrm>
+          <a:prstGeom prst="rect">
+            <a:avLst/>
+          </a:prstGeom>
+          <a:noFill/>
+        </p:spPr>
+        <p:txBody>
+          <a:bodyPr wrap="square" lIns="0" tIns="0" rIns="0" bIns="0" anchor="t">
+            <a:spAutoFit/>
+          </a:bodyPr>
+          <a:lstStyle/>
+          <a:p>
+            <a:pPr algn="l">
+              <a:lnSpc>
+                <a:spcPct val="118000"/>
+              </a:lnSpc>
+            </a:pPr>
+            <a:r>
+              <a:rPr sz="1412" b="1" i="0">
+                <a:solidFill>
+                  <a:srgbClr val="141E41"/>
+                </a:solidFill>
+                <a:latin typeface="Consolas"/>
+              </a:rPr>
+              <a:t>RESULTS ACROSS 8,934 EPISODES</a:t>
+            </a:r>
+            <a:endParaRPr sz="1412" b="1" spc="180" dirty="0">
+              <a:solidFill>
+                <a:srgbClr val="141E41"/>
+              </a:solidFill>
+              <a:latin typeface="Consolas"/>
+            </a:endParaRPr>
+          </a:p>
+        </p:txBody>
+      </p:sp>
+      <p:sp>
+        <p:nvSpPr>
+          <p:cNvPr id="16" name="Rectangle 15"/>
+          <p:cNvSpPr/>
+          <p:nvPr/>
+        </p:nvSpPr>
+        <p:spPr>
+          <a:xfrm>
+            <a:off x="7534800" y="11117836"/>
+            <a:ext cx="1169636" cy="35597"/>
+          </a:xfrm>
+          <a:prstGeom prst="rect">
+            <a:avLst/>
+          </a:prstGeom>
+          <a:solidFill>
+            <a:srgbClr val="141E41"/>
+          </a:solidFill>
+          <a:ln>
+            <a:noFill/>
+          </a:ln>
+          <a:effectLst/>
+        </p:spPr>
+        <p:style>
+          <a:lnRef idx="1">
+            <a:schemeClr val="accent1"/>
+          </a:lnRef>
+          <a:fillRef idx="3">
+            <a:schemeClr val="accent1"/>
+          </a:fillRef>
+          <a:effectRef idx="2">
+            <a:schemeClr val="accent1"/>
+          </a:effectRef>
+          <a:fontRef idx="minor">
+            <a:schemeClr val="lt1"/>
+          </a:fontRef>
+        </p:style>
+        <p:txBody>
+          <a:bodyPr rtlCol="0" anchor="ctr"/>
+          <a:lstStyle/>
+          <a:p>
+            <a:pPr algn="ctr"/>
+            <a:endParaRPr/>
+          </a:p>
+        </p:txBody>
+      </p:sp>
+      <p:sp>
+        <p:nvSpPr>
+          <p:cNvPr id="17" name="Rectangle 16"/>
+          <p:cNvSpPr/>
+          <p:nvPr/>
+        </p:nvSpPr>
+        <p:spPr>
+          <a:xfrm>
+            <a:off x="8704436" y="11128007"/>
+            <a:ext cx="12085564" cy="15256"/>
+          </a:xfrm>
+          <a:prstGeom prst="rect">
+            <a:avLst/>
+          </a:prstGeom>
+          <a:solidFill>
+            <a:srgbClr val="DDE3F2"/>
+          </a:solidFill>
+          <a:ln>
+            <a:noFill/>
+          </a:ln>
+          <a:effectLst/>
+        </p:spPr>
+        <p:style>
+          <a:lnRef idx="1">
+            <a:schemeClr val="accent1"/>
+          </a:lnRef>
+          <a:fillRef idx="3">
+            <a:schemeClr val="accent1"/>
+          </a:fillRef>
+          <a:effectRef idx="2">
+            <a:schemeClr val="accent1"/>
+          </a:effectRef>
+          <a:fontRef idx="minor">
+            <a:schemeClr val="lt1"/>
+          </a:fontRef>
+        </p:style>
+        <p:txBody>
+          <a:bodyPr rtlCol="0" anchor="ctr"/>
+          <a:lstStyle/>
+          <a:p>
+            <a:pPr algn="ctr"/>
+            <a:endParaRPr/>
+          </a:p>
+        </p:txBody>
+      </p:sp>
+      <p:sp>
+        <p:nvSpPr>
+          <p:cNvPr id="179" name="Rectangle 178"/>
+          <p:cNvSpPr/>
+          <p:nvPr/>
+        </p:nvSpPr>
+        <p:spPr>
+          <a:xfrm>
+            <a:off x="7534800" y="11340000"/>
+            <a:ext cx="13255200" cy="1170000"/>
+          </a:xfrm>
+          <a:prstGeom prst="rect">
+            <a:avLst/>
+          </a:prstGeom>
+          <a:solidFill>
+            <a:srgbClr val="ECEFFA"/>
+          </a:solidFill>
+          <a:ln>
+            <a:noFill/>
+          </a:ln>
+          <a:effectLst/>
+        </p:spPr>
+        <p:style>
+          <a:lnRef idx="1">
+            <a:schemeClr val="accent1"/>
+          </a:lnRef>
+          <a:fillRef idx="3">
+            <a:schemeClr val="accent1"/>
+          </a:fillRef>
+          <a:effectRef idx="2">
+            <a:schemeClr val="accent1"/>
+          </a:effectRef>
+          <a:fontRef idx="minor">
+            <a:schemeClr val="lt1"/>
+          </a:fontRef>
+        </p:style>
+        <p:txBody>
+          <a:bodyPr rtlCol="0" anchor="ctr" wrap="square"/>
+          <a:lstStyle/>
+          <a:p>
+            <a:pPr algn="ctr"/>
+          </a:p>
+        </p:txBody>
+      </p:sp>
+      <p:sp>
+        <p:nvSpPr>
+          <p:cNvPr id="180" name="TextBox 179"/>
+          <p:cNvSpPr txBox="1"/>
+          <p:nvPr/>
+        </p:nvSpPr>
+        <p:spPr>
+          <a:xfrm>
+            <a:off x="7786800" y="11520000"/>
+            <a:ext cx="4250400" cy="612000"/>
+          </a:xfrm>
+          <a:prstGeom prst="rect">
+            <a:avLst/>
+          </a:prstGeom>
+          <a:noFill/>
+        </p:spPr>
+        <p:txBody>
+          <a:bodyPr wrap="square" lIns="0" rIns="0" tIns="0" bIns="0">
+            <a:spAutoFit/>
+          </a:bodyPr>
+          <a:lstStyle/>
+          <a:p>
+            <a:pPr algn="l">
+              <a:lnSpc>
+                <a:spcPct val="118000"/>
+              </a:lnSpc>
+              <a:spcAft>
+                <a:spcPts val="0"/>
+              </a:spcAft>
+            </a:pPr>
+            <a:r>
+              <a:rPr sz="3247" b="1" i="0">
+                <a:solidFill>
+                  <a:srgbClr val="141E41"/>
+                </a:solidFill>
+                <a:latin typeface="Consolas"/>
+              </a:rPr>
+              <a:t>+16.35 pp</a:t>
+            </a:r>
+          </a:p>
+        </p:txBody>
+      </p:sp>
+      <p:sp>
+        <p:nvSpPr>
+          <p:cNvPr id="181" name="TextBox 180"/>
+          <p:cNvSpPr txBox="1"/>
+          <p:nvPr/>
+        </p:nvSpPr>
+        <p:spPr>
+          <a:xfrm>
+            <a:off x="7786800" y="12078000"/>
+            <a:ext cx="4250400" cy="324000"/>
+          </a:xfrm>
+          <a:prstGeom prst="rect">
+            <a:avLst/>
+          </a:prstGeom>
+          <a:noFill/>
+        </p:spPr>
+        <p:txBody>
+          <a:bodyPr wrap="square" lIns="0" rIns="0" tIns="0" bIns="0">
+            <a:spAutoFit/>
+          </a:bodyPr>
+          <a:lstStyle/>
+          <a:p>
+            <a:pPr algn="l">
+              <a:lnSpc>
+                <a:spcPct val="118000"/>
+              </a:lnSpc>
+              <a:spcAft>
+                <a:spcPts val="0"/>
+              </a:spcAft>
+            </a:pPr>
+            <a:r>
+              <a:rPr sz="1059" b="0" i="0">
+                <a:solidFill>
+                  <a:srgbClr val="5D6787"/>
+                </a:solidFill>
+                <a:latin typeface="Consolas"/>
+              </a:rPr>
+              <a:t>CEILING, LARGEST OF 8 · VS BEST FIXED MODE</a:t>
+            </a:r>
+          </a:p>
+        </p:txBody>
+      </p:sp>
+      <p:sp>
+        <p:nvSpPr>
+          <p:cNvPr id="182" name="TextBox 181"/>
+          <p:cNvSpPr txBox="1"/>
+          <p:nvPr/>
+        </p:nvSpPr>
+        <p:spPr>
+          <a:xfrm>
+            <a:off x="12037200" y="11520000"/>
+            <a:ext cx="4250400" cy="612000"/>
+          </a:xfrm>
+          <a:prstGeom prst="rect">
+            <a:avLst/>
+          </a:prstGeom>
+          <a:noFill/>
+        </p:spPr>
+        <p:txBody>
+          <a:bodyPr wrap="square" lIns="0" rIns="0" tIns="0" bIns="0">
+            <a:spAutoFit/>
+          </a:bodyPr>
+          <a:lstStyle/>
+          <a:p>
+            <a:pPr algn="l">
+              <a:lnSpc>
+                <a:spcPct val="118000"/>
+              </a:lnSpc>
+              <a:spcAft>
+                <a:spcPts val="0"/>
+              </a:spcAft>
+            </a:pPr>
+            <a:r>
+              <a:rPr sz="3247" b="1" i="0">
+                <a:solidFill>
+                  <a:srgbClr val="141E41"/>
+                </a:solidFill>
+                <a:latin typeface="Consolas"/>
+              </a:rPr>
+              <a:t>0 of 8</a:t>
+            </a:r>
+          </a:p>
+        </p:txBody>
+      </p:sp>
+      <p:sp>
+        <p:nvSpPr>
+          <p:cNvPr id="183" name="TextBox 182"/>
+          <p:cNvSpPr txBox="1"/>
+          <p:nvPr/>
+        </p:nvSpPr>
+        <p:spPr>
+          <a:xfrm>
+            <a:off x="12037200" y="12078000"/>
+            <a:ext cx="4250400" cy="324000"/>
+          </a:xfrm>
+          <a:prstGeom prst="rect">
+            <a:avLst/>
+          </a:prstGeom>
+          <a:noFill/>
+        </p:spPr>
+        <p:txBody>
+          <a:bodyPr wrap="square" lIns="0" rIns="0" tIns="0" bIns="0">
+            <a:spAutoFit/>
+          </a:bodyPr>
+          <a:lstStyle/>
+          <a:p>
+            <a:pPr algn="l">
+              <a:lnSpc>
+                <a:spcPct val="118000"/>
+              </a:lnSpc>
+              <a:spcAft>
+                <a:spcPts val="0"/>
+              </a:spcAft>
+            </a:pPr>
+            <a:r>
+              <a:rPr sz="1059" b="0" i="0">
+                <a:solidFill>
+                  <a:srgbClr val="5D6787"/>
+                </a:solidFill>
+                <a:latin typeface="Consolas"/>
+              </a:rPr>
+              <a:t>LEARNED ROUTERS BEAT ALWAYS-CHEAPEST</a:t>
+            </a:r>
+          </a:p>
+        </p:txBody>
+      </p:sp>
+      <p:sp>
+        <p:nvSpPr>
+          <p:cNvPr id="184" name="TextBox 183"/>
+          <p:cNvSpPr txBox="1"/>
+          <p:nvPr/>
+        </p:nvSpPr>
+        <p:spPr>
+          <a:xfrm>
+            <a:off x="16287600" y="11520000"/>
+            <a:ext cx="4250400" cy="612000"/>
+          </a:xfrm>
+          <a:prstGeom prst="rect">
+            <a:avLst/>
+          </a:prstGeom>
+          <a:noFill/>
+        </p:spPr>
+        <p:txBody>
+          <a:bodyPr wrap="square" lIns="0" rIns="0" tIns="0" bIns="0">
+            <a:spAutoFit/>
+          </a:bodyPr>
+          <a:lstStyle/>
+          <a:p>
+            <a:pPr algn="l">
+              <a:lnSpc>
+                <a:spcPct val="118000"/>
+              </a:lnSpc>
+              <a:spcAft>
+                <a:spcPts val="0"/>
+              </a:spcAft>
+            </a:pPr>
+            <a:r>
+              <a:rPr sz="3247" b="1" i="0">
+                <a:solidFill>
+                  <a:srgbClr val="141E41"/>
+                </a:solidFill>
+                <a:latin typeface="Consolas"/>
+              </a:rPr>
+              <a:t>1 of 8</a:t>
+            </a:r>
+          </a:p>
+        </p:txBody>
+      </p:sp>
+      <p:sp>
+        <p:nvSpPr>
+          <p:cNvPr id="185" name="TextBox 184"/>
+          <p:cNvSpPr txBox="1"/>
+          <p:nvPr/>
+        </p:nvSpPr>
+        <p:spPr>
+          <a:xfrm>
+            <a:off x="16287600" y="12078000"/>
+            <a:ext cx="4250400" cy="324000"/>
+          </a:xfrm>
+          <a:prstGeom prst="rect">
+            <a:avLst/>
+          </a:prstGeom>
+          <a:noFill/>
+        </p:spPr>
+        <p:txBody>
+          <a:bodyPr wrap="square" lIns="0" rIns="0" tIns="0" bIns="0">
+            <a:spAutoFit/>
+          </a:bodyPr>
+          <a:lstStyle/>
+          <a:p>
+            <a:pPr algn="l">
+              <a:lnSpc>
+                <a:spcPct val="118000"/>
+              </a:lnSpc>
+              <a:spcAft>
+                <a:spcPts val="0"/>
+              </a:spcAft>
+            </a:pPr>
+            <a:r>
+              <a:rPr sz="1059" b="0" i="0">
+                <a:solidFill>
+                  <a:srgbClr val="5D6787"/>
+                </a:solidFill>
+                <a:latin typeface="Consolas"/>
+              </a:rPr>
+              <a:t>HINDSIGHT ORACLES BEAT ALWAYS-CHEAPEST</a:t>
+            </a:r>
+          </a:p>
+        </p:txBody>
+      </p:sp>
+      <p:sp>
+        <p:nvSpPr>
+          <p:cNvPr id="186" name="Rectangle 185"/>
+          <p:cNvSpPr/>
+          <p:nvPr/>
+        </p:nvSpPr>
+        <p:spPr>
+          <a:xfrm>
+            <a:off x="7534800" y="12654000"/>
+            <a:ext cx="13255200" cy="7435350"/>
+          </a:xfrm>
+          <a:prstGeom prst="rect">
+            <a:avLst/>
+          </a:prstGeom>
+          <a:solidFill>
+            <a:srgbClr val="F7F9FD"/>
+          </a:solidFill>
+          <a:ln w="8890">
+            <a:solidFill>
+              <a:srgbClr val="DDE3F2"/>
+            </a:solidFill>
+          </a:ln>
+          <a:effectLst/>
+        </p:spPr>
+        <p:style>
+          <a:lnRef idx="1">
+            <a:schemeClr val="accent1"/>
+          </a:lnRef>
+          <a:fillRef idx="3">
+            <a:schemeClr val="accent1"/>
+          </a:fillRef>
+          <a:effectRef idx="2">
+            <a:schemeClr val="accent1"/>
+          </a:effectRef>
+          <a:fontRef idx="minor">
+            <a:schemeClr val="lt1"/>
+          </a:fontRef>
+        </p:style>
+        <p:txBody>
+          <a:bodyPr rtlCol="0" anchor="ctr" wrap="square"/>
+          <a:lstStyle/>
+          <a:p>
+            <a:pPr algn="ctr"/>
+          </a:p>
+        </p:txBody>
+      </p:sp>
+      <p:sp>
+        <p:nvSpPr>
+          <p:cNvPr id="187" name="Rectangle 186"/>
+          <p:cNvSpPr/>
+          <p:nvPr/>
+        </p:nvSpPr>
+        <p:spPr>
+          <a:xfrm>
+            <a:off x="7534800" y="12654000"/>
+            <a:ext cx="13255200" cy="50400"/>
+          </a:xfrm>
+          <a:prstGeom prst="rect">
+            <a:avLst/>
+          </a:prstGeom>
+          <a:solidFill>
+            <a:srgbClr val="5049F9"/>
+          </a:solidFill>
+          <a:ln>
+            <a:noFill/>
+          </a:ln>
+          <a:effectLst/>
+        </p:spPr>
+        <p:style>
+          <a:lnRef idx="1">
+            <a:schemeClr val="accent1"/>
+          </a:lnRef>
+          <a:fillRef idx="3">
+            <a:schemeClr val="accent1"/>
+          </a:fillRef>
+          <a:effectRef idx="2">
+            <a:schemeClr val="accent1"/>
+          </a:effectRef>
+          <a:fontRef idx="minor">
+            <a:schemeClr val="lt1"/>
+          </a:fontRef>
+        </p:style>
+        <p:txBody>
+          <a:bodyPr rtlCol="0" anchor="ctr" wrap="square"/>
+          <a:lstStyle/>
+          <a:p>
+            <a:pPr algn="ctr"/>
           </a:p>
         </p:txBody>
       </p:sp>
       <p:pic>
         <p:nvPicPr>
-          <p:cNvPr id="114" name="Picture 113" descr="qr_repo.png"/>
+          <p:cNvPr id="188" name="Picture 187" descr="poster_dominance_plane.png"/>
           <p:cNvPicPr>
             <a:picLocks noChangeAspect="1"/>
           </p:cNvPicPr>
           <p:nvPr/>
         </p:nvPicPr>
         <p:blipFill>
-          <a:blip r:embed="rId7"/>
+          <a:blip r:embed="rId8"/>
+          <a:stretch>
+            <a:fillRect/>
+          </a:stretch>
+        </p:blipFill>
+        <p:spPr>
+          <a:xfrm>
+            <a:off x="7642800" y="12812400"/>
+            <a:ext cx="13039200" cy="7168951"/>
+          </a:xfrm>
+          <a:prstGeom prst="rect">
+            <a:avLst/>
+          </a:prstGeom>
+        </p:spPr>
+      </p:pic>
+      <p:sp>
+        <p:nvSpPr>
+          <p:cNvPr id="189" name="TextBox 188"/>
+          <p:cNvSpPr txBox="1"/>
+          <p:nvPr/>
+        </p:nvSpPr>
+        <p:spPr>
+          <a:xfrm>
+            <a:off x="7534800" y="20179350"/>
+            <a:ext cx="13255200" cy="511369"/>
+          </a:xfrm>
+          <a:prstGeom prst="rect">
+            <a:avLst/>
+          </a:prstGeom>
+          <a:noFill/>
+        </p:spPr>
+        <p:txBody>
+          <a:bodyPr wrap="square" lIns="0" rIns="0" tIns="0" bIns="0">
+            <a:spAutoFit/>
+          </a:bodyPr>
+          <a:lstStyle/>
+          <a:p>
+            <a:pPr algn="l">
+              <a:lnSpc>
+                <a:spcPct val="132000"/>
+              </a:lnSpc>
+              <a:spcAft>
+                <a:spcPts val="425"/>
+              </a:spcAft>
+            </a:pPr>
+            <a:r>
+              <a:rPr sz="1271" b="1" i="0">
+                <a:solidFill>
+                  <a:srgbClr val="5D6787"/>
+                </a:solidFill>
+                <a:latin typeface="Arial"/>
+              </a:rPr>
+              <a:t>Fig 2.</a:t>
+            </a:r>
+            <a:r>
+              <a:rPr sz="1271" b="0" i="0">
+                <a:solidFill>
+                  <a:srgbClr val="5D6787"/>
+                </a:solidFill>
+                <a:latin typeface="Arial"/>
+              </a:rPr>
+              <a:t> Every policy in every setting against one fixed baseline, </a:t>
+            </a:r>
+            <a:r>
+              <a:rPr sz="1271" b="1" i="0">
+                <a:solidFill>
+                  <a:srgbClr val="5D6787"/>
+                </a:solidFill>
+                <a:latin typeface="Arial"/>
+              </a:rPr>
+              <a:t>always use the cheapest mode</a:t>
+            </a:r>
+            <a:r>
+              <a:rPr sz="1271" b="0" i="0">
+                <a:solidFill>
+                  <a:srgbClr val="5D6787"/>
+                </a:solidFill>
+                <a:latin typeface="Arial"/>
+              </a:rPr>
+              <a:t> (★). A win lands in the shaded region: cheaper </a:t>
+            </a:r>
+            <a:r>
+              <a:rPr sz="1271" b="0" i="1">
+                <a:solidFill>
+                  <a:srgbClr val="5D6787"/>
+                </a:solidFill>
+                <a:latin typeface="Arial"/>
+              </a:rPr>
+              <a:t>and</a:t>
+            </a:r>
+            <a:r>
+              <a:rPr sz="1271" b="0" i="0">
+                <a:solidFill>
+                  <a:srgbClr val="5D6787"/>
+                </a:solidFill>
+                <a:latin typeface="Arial"/>
+              </a:rPr>
+              <a:t> no worse. Always-cheapest is cheapest on average, not per episode, which is why a few points sit left of it. Nested cross-validation; 10,000 bundle permutations.</a:t>
+            </a:r>
+          </a:p>
+        </p:txBody>
+      </p:sp>
+      <p:sp>
+        <p:nvSpPr>
+          <p:cNvPr id="190" name="TextBox 189"/>
+          <p:cNvSpPr txBox="1"/>
+          <p:nvPr/>
+        </p:nvSpPr>
+        <p:spPr>
+          <a:xfrm>
+            <a:off x="7534800" y="20798719"/>
+            <a:ext cx="13255200" cy="2188690"/>
+          </a:xfrm>
+          <a:prstGeom prst="rect">
+            <a:avLst/>
+          </a:prstGeom>
+          <a:noFill/>
+        </p:spPr>
+        <p:txBody>
+          <a:bodyPr wrap="square" lIns="0" rIns="0" tIns="0" bIns="0">
+            <a:spAutoFit/>
+          </a:bodyPr>
+          <a:lstStyle/>
+          <a:p>
+            <a:pPr algn="l">
+              <a:lnSpc>
+                <a:spcPct val="120000"/>
+              </a:lnSpc>
+              <a:spcAft>
+                <a:spcPts val="992"/>
+              </a:spcAft>
+            </a:pPr>
+            <a:r>
+              <a:rPr sz="1764" b="1" i="0">
+                <a:solidFill>
+                  <a:srgbClr val="12162E"/>
+                </a:solidFill>
+                <a:latin typeface="Arial"/>
+              </a:rPr>
+              <a:t>The ceiling is real.</a:t>
+            </a:r>
+            <a:r>
+              <a:rPr sz="1764" b="0" i="0">
+                <a:solidFill>
+                  <a:srgbClr val="12162E"/>
+                </a:solidFill>
+                <a:latin typeface="Arial"/>
+              </a:rPr>
+              <a:t> In hindsight, choosing the eyes per task solves </a:t>
+            </a:r>
+            <a:r>
+              <a:rPr sz="1764" b="1" i="0">
+                <a:solidFill>
+                  <a:srgbClr val="12162E"/>
+                </a:solidFill>
+                <a:latin typeface="Arial"/>
+              </a:rPr>
+              <a:t>+3.45 to +16.35 pp</a:t>
+            </a:r>
+            <a:r>
+              <a:rPr sz="1764" b="0" i="0">
+                <a:solidFill>
+                  <a:srgbClr val="12162E"/>
+                </a:solidFill>
+                <a:latin typeface="Arial"/>
+              </a:rPr>
+              <a:t> more than the best single fixed mode, at 1.6–35.3% lower cost, in 8 of 8 settings.</a:t>
+            </a:r>
+          </a:p>
+          <a:p>
+            <a:pPr algn="l">
+              <a:lnSpc>
+                <a:spcPct val="120000"/>
+              </a:lnSpc>
+              <a:spcAft>
+                <a:spcPts val="992"/>
+              </a:spcAft>
+            </a:pPr>
+            <a:r>
+              <a:rPr sz="1764" b="1" i="0">
+                <a:solidFill>
+                  <a:srgbClr val="12162E"/>
+                </a:solidFill>
+                <a:latin typeface="Arial"/>
+              </a:rPr>
+              <a:t>Nothing we trained wins.</a:t>
+            </a:r>
+            <a:r>
+              <a:rPr sz="1764" b="0" i="0">
+                <a:solidFill>
+                  <a:srgbClr val="12162E"/>
+                </a:solidFill>
+                <a:latin typeface="Arial"/>
+              </a:rPr>
+              <a:t> </a:t>
+            </a:r>
+            <a:r>
+              <a:rPr sz="1764" b="1" i="0">
+                <a:solidFill>
+                  <a:srgbClr val="12162E"/>
+                </a:solidFill>
+                <a:latin typeface="Arial"/>
+              </a:rPr>
+              <a:t>0 of 8</a:t>
+            </a:r>
+            <a:r>
+              <a:rPr sz="1764" b="0" i="0">
+                <a:solidFill>
+                  <a:srgbClr val="12162E"/>
+                </a:solidFill>
+                <a:latin typeface="Arial"/>
+              </a:rPr>
+              <a:t> learned routers beat always-cheapest on both success and cost — and even the hindsight oracle does so in only </a:t>
+            </a:r>
+            <a:r>
+              <a:rPr sz="1764" b="1" i="0">
+                <a:solidFill>
+                  <a:srgbClr val="12162E"/>
+                </a:solidFill>
+                <a:latin typeface="Arial"/>
+              </a:rPr>
+              <a:t>1 of 8</a:t>
+            </a:r>
+            <a:r>
+              <a:rPr sz="1764" b="0" i="0">
+                <a:solidFill>
+                  <a:srgbClr val="12162E"/>
+                </a:solidFill>
+                <a:latin typeface="Arial"/>
+              </a:rPr>
+              <a:t>.</a:t>
+            </a:r>
+          </a:p>
+          <a:p>
+            <a:pPr algn="l">
+              <a:lnSpc>
+                <a:spcPct val="120000"/>
+              </a:lnSpc>
+              <a:spcAft>
+                <a:spcPts val="992"/>
+              </a:spcAft>
+            </a:pPr>
+            <a:r>
+              <a:rPr sz="1764" b="1" i="0">
+                <a:solidFill>
+                  <a:srgbClr val="12162E"/>
+                </a:solidFill>
+                <a:latin typeface="Arial"/>
+              </a:rPr>
+              <a:t>What survives is a bound, not a router.</a:t>
+            </a:r>
+            <a:r>
+              <a:rPr sz="1764" b="0" i="0">
+                <a:solidFill>
+                  <a:srgbClr val="12162E"/>
+                </a:solidFill>
+                <a:latin typeface="Arial"/>
+              </a:rPr>
+              <a:t> Sending the tasks nobody solves to the cheapest mode saves 9.5–30.6% at identical success in 8 of 8 — against the best-success fixed mode, and plain always-cheapest usually saves more.</a:t>
+            </a:r>
+          </a:p>
+        </p:txBody>
+      </p:sp>
+      <p:sp>
+        <p:nvSpPr>
+          <p:cNvPr id="14" name="Rectangle 13"/>
+          <p:cNvSpPr/>
+          <p:nvPr/>
+        </p:nvSpPr>
+        <p:spPr>
+          <a:xfrm>
+            <a:off x="7534800" y="23203409"/>
+            <a:ext cx="177988" cy="177988"/>
+          </a:xfrm>
+          <a:prstGeom prst="rect">
+            <a:avLst/>
+          </a:prstGeom>
+          <a:solidFill>
+            <a:srgbClr val="AB5FCE"/>
+          </a:solidFill>
+          <a:ln>
+            <a:noFill/>
+          </a:ln>
+          <a:effectLst/>
+        </p:spPr>
+        <p:style>
+          <a:lnRef idx="1">
+            <a:schemeClr val="accent1"/>
+          </a:lnRef>
+          <a:fillRef idx="3">
+            <a:schemeClr val="accent1"/>
+          </a:fillRef>
+          <a:effectRef idx="2">
+            <a:schemeClr val="accent1"/>
+          </a:effectRef>
+          <a:fontRef idx="minor">
+            <a:schemeClr val="lt1"/>
+          </a:fontRef>
+        </p:style>
+        <p:txBody>
+          <a:bodyPr rtlCol="0" anchor="ctr"/>
+          <a:lstStyle/>
+          <a:p>
+            <a:pPr algn="ctr"/>
+            <a:endParaRPr/>
+          </a:p>
+        </p:txBody>
+      </p:sp>
+      <p:sp>
+        <p:nvSpPr>
+          <p:cNvPr id="15" name="TextBox 14"/>
+          <p:cNvSpPr txBox="1"/>
+          <p:nvPr/>
+        </p:nvSpPr>
+        <p:spPr>
+          <a:xfrm>
+            <a:off x="7839923" y="23160209"/>
+            <a:ext cx="6144827" cy="238912"/>
+          </a:xfrm>
+          <a:prstGeom prst="rect">
+            <a:avLst/>
+          </a:prstGeom>
+          <a:noFill/>
+        </p:spPr>
+        <p:txBody>
+          <a:bodyPr wrap="square" lIns="0" tIns="0" rIns="0" bIns="0" anchor="t">
+            <a:spAutoFit/>
+          </a:bodyPr>
+          <a:lstStyle/>
+          <a:p>
+            <a:pPr algn="l">
+              <a:lnSpc>
+                <a:spcPct val="118000"/>
+              </a:lnSpc>
+            </a:pPr>
+            <a:r>
+              <a:rPr sz="1412" b="1" i="0">
+                <a:solidFill>
+                  <a:srgbClr val="141E41"/>
+                </a:solidFill>
+                <a:latin typeface="Consolas"/>
+              </a:rPr>
+              <a:t>WHY IT CANNOT BE LEARNED</a:t>
+            </a:r>
+            <a:endParaRPr sz="1412" b="1" spc="180" dirty="0">
+              <a:solidFill>
+                <a:srgbClr val="141E41"/>
+              </a:solidFill>
+              <a:latin typeface="Consolas"/>
+            </a:endParaRPr>
+          </a:p>
+        </p:txBody>
+      </p:sp>
+      <p:sp>
+        <p:nvSpPr>
+          <p:cNvPr id="16" name="Rectangle 15"/>
+          <p:cNvSpPr/>
+          <p:nvPr/>
+        </p:nvSpPr>
+        <p:spPr>
+          <a:xfrm>
+            <a:off x="7534800" y="23521245"/>
+            <a:ext cx="1169636" cy="35597"/>
+          </a:xfrm>
+          <a:prstGeom prst="rect">
+            <a:avLst/>
+          </a:prstGeom>
+          <a:solidFill>
+            <a:srgbClr val="141E41"/>
+          </a:solidFill>
+          <a:ln>
+            <a:noFill/>
+          </a:ln>
+          <a:effectLst/>
+        </p:spPr>
+        <p:style>
+          <a:lnRef idx="1">
+            <a:schemeClr val="accent1"/>
+          </a:lnRef>
+          <a:fillRef idx="3">
+            <a:schemeClr val="accent1"/>
+          </a:fillRef>
+          <a:effectRef idx="2">
+            <a:schemeClr val="accent1"/>
+          </a:effectRef>
+          <a:fontRef idx="minor">
+            <a:schemeClr val="lt1"/>
+          </a:fontRef>
+        </p:style>
+        <p:txBody>
+          <a:bodyPr rtlCol="0" anchor="ctr"/>
+          <a:lstStyle/>
+          <a:p>
+            <a:pPr algn="ctr"/>
+            <a:endParaRPr/>
+          </a:p>
+        </p:txBody>
+      </p:sp>
+      <p:sp>
+        <p:nvSpPr>
+          <p:cNvPr id="17" name="Rectangle 16"/>
+          <p:cNvSpPr/>
+          <p:nvPr/>
+        </p:nvSpPr>
+        <p:spPr>
+          <a:xfrm>
+            <a:off x="8704436" y="23531416"/>
+            <a:ext cx="12085564" cy="15256"/>
+          </a:xfrm>
+          <a:prstGeom prst="rect">
+            <a:avLst/>
+          </a:prstGeom>
+          <a:solidFill>
+            <a:srgbClr val="DDE3F2"/>
+          </a:solidFill>
+          <a:ln>
+            <a:noFill/>
+          </a:ln>
+          <a:effectLst/>
+        </p:spPr>
+        <p:style>
+          <a:lnRef idx="1">
+            <a:schemeClr val="accent1"/>
+          </a:lnRef>
+          <a:fillRef idx="3">
+            <a:schemeClr val="accent1"/>
+          </a:fillRef>
+          <a:effectRef idx="2">
+            <a:schemeClr val="accent1"/>
+          </a:effectRef>
+          <a:fontRef idx="minor">
+            <a:schemeClr val="lt1"/>
+          </a:fontRef>
+        </p:style>
+        <p:txBody>
+          <a:bodyPr rtlCol="0" anchor="ctr"/>
+          <a:lstStyle/>
+          <a:p>
+            <a:pPr algn="ctr"/>
+            <a:endParaRPr/>
+          </a:p>
+        </p:txBody>
+      </p:sp>
+      <p:sp>
+        <p:nvSpPr>
+          <p:cNvPr id="191" name="TextBox 190"/>
+          <p:cNvSpPr txBox="1"/>
+          <p:nvPr/>
+        </p:nvSpPr>
+        <p:spPr>
+          <a:xfrm>
+            <a:off x="7534800" y="23743409"/>
+            <a:ext cx="13255200" cy="2062690"/>
+          </a:xfrm>
+          <a:prstGeom prst="rect">
+            <a:avLst/>
+          </a:prstGeom>
+          <a:noFill/>
+        </p:spPr>
+        <p:txBody>
+          <a:bodyPr wrap="square" lIns="0" rIns="0" tIns="0" bIns="0">
+            <a:spAutoFit/>
+          </a:bodyPr>
+          <a:lstStyle/>
+          <a:p>
+            <a:pPr algn="l">
+              <a:lnSpc>
+                <a:spcPct val="120000"/>
+              </a:lnSpc>
+              <a:spcAft>
+                <a:spcPts val="992"/>
+              </a:spcAft>
+            </a:pPr>
+            <a:r>
+              <a:rPr sz="1764" b="0" i="0">
+                <a:solidFill>
+                  <a:srgbClr val="12162E"/>
+                </a:solidFill>
+                <a:latin typeface="Arial"/>
+              </a:rPr>
+              <a:t>A routing label exists only when the agent solves a task. Here the best single mode solves just </a:t>
+            </a:r>
+            <a:r>
+              <a:rPr sz="1764" b="1" i="0">
+                <a:solidFill>
+                  <a:srgbClr val="12162E"/>
+                </a:solidFill>
+                <a:latin typeface="Arial"/>
+              </a:rPr>
+              <a:t>2–36%</a:t>
+            </a:r>
+            <a:r>
+              <a:rPr sz="1764" b="0" i="0">
+                <a:solidFill>
+                  <a:srgbClr val="12162E"/>
+                </a:solidFill>
+                <a:latin typeface="Arial"/>
+              </a:rPr>
+              <a:t> of tasks, leaving typically </a:t>
+            </a:r>
+            <a:r>
+              <a:rPr sz="1764" b="1" i="0">
+                <a:solidFill>
+                  <a:srgbClr val="12162E"/>
+                </a:solidFill>
+                <a:latin typeface="Arial"/>
+              </a:rPr>
+              <a:t>15–97</a:t>
+            </a:r>
+            <a:r>
+              <a:rPr sz="1764" b="0" i="0">
+                <a:solidFill>
+                  <a:srgbClr val="12162E"/>
+                </a:solidFill>
+                <a:latin typeface="Arial"/>
+              </a:rPr>
+              <a:t> usable labels per setting — </a:t>
+            </a:r>
+            <a:r>
+              <a:rPr sz="1764" b="1" i="0">
+                <a:solidFill>
+                  <a:srgbClr val="12162E"/>
+                </a:solidFill>
+                <a:latin typeface="Arial"/>
+              </a:rPr>
+              <a:t>the agents that would gain most from routing produce the least supervision to learn it.</a:t>
+            </a:r>
+            <a:r>
+              <a:rPr sz="1764" b="0" i="0">
+                <a:solidFill>
+                  <a:srgbClr val="12162E"/>
+                </a:solidFill>
+                <a:latin typeface="Arial"/>
+              </a:rPr>
+              <a:t> Deliberately shrinking the training data confirms scarcity is the mechanism and prices it: the failing settings would need at least </a:t>
+            </a:r>
+            <a:r>
+              <a:rPr sz="1764" b="1" i="0">
+                <a:solidFill>
+                  <a:srgbClr val="12162E"/>
+                </a:solidFill>
+                <a:latin typeface="Arial"/>
+              </a:rPr>
+              <a:t>2.1–4.2×</a:t>
+            </a:r>
+            <a:r>
+              <a:rPr sz="1764" b="0" i="0">
+                <a:solidFill>
+                  <a:srgbClr val="12162E"/>
+                </a:solidFill>
+                <a:latin typeface="Arial"/>
+              </a:rPr>
+              <a:t> more tasks than the benchmarks contain.</a:t>
+            </a:r>
+          </a:p>
+          <a:p>
+            <a:pPr algn="l">
+              <a:lnSpc>
+                <a:spcPct val="120000"/>
+              </a:lnSpc>
+              <a:spcAft>
+                <a:spcPts val="992"/>
+              </a:spcAft>
+            </a:pPr>
+            <a:r>
+              <a:rPr sz="1764" b="0" i="0">
+                <a:solidFill>
+                  <a:srgbClr val="12162E"/>
+                </a:solidFill>
+                <a:latin typeface="Arial"/>
+              </a:rPr>
+              <a:t>Rerunning </a:t>
+            </a:r>
+            <a:r>
+              <a:rPr sz="1764" b="1" i="0">
+                <a:solidFill>
+                  <a:srgbClr val="12162E"/>
+                </a:solidFill>
+                <a:latin typeface="Arial"/>
+              </a:rPr>
+              <a:t>one unchanged mode</a:t>
+            </a:r>
+            <a:r>
+              <a:rPr sz="1764" b="0" i="0">
+                <a:solidFill>
+                  <a:srgbClr val="12162E"/>
+                </a:solidFill>
+                <a:latin typeface="Arial"/>
+              </a:rPr>
+              <a:t> flips </a:t>
+            </a:r>
+            <a:r>
+              <a:rPr sz="1764" b="1" i="0">
+                <a:solidFill>
+                  <a:srgbClr val="12162E"/>
+                </a:solidFill>
+                <a:latin typeface="Arial"/>
+              </a:rPr>
+              <a:t>10–14%</a:t>
+            </a:r>
+            <a:r>
+              <a:rPr sz="1764" b="0" i="0">
+                <a:solidFill>
+                  <a:srgbClr val="12162E"/>
+                </a:solidFill>
+                <a:latin typeface="Arial"/>
+              </a:rPr>
+              <a:t> of outcomes and by itself buys </a:t>
+            </a:r>
+            <a:r>
+              <a:rPr sz="1764" b="1" i="0">
+                <a:solidFill>
+                  <a:srgbClr val="12162E"/>
+                </a:solidFill>
+                <a:latin typeface="Arial"/>
+              </a:rPr>
+              <a:t>2.0–7.6 pp</a:t>
+            </a:r>
+            <a:r>
+              <a:rPr sz="1764" b="0" i="0">
+                <a:solidFill>
+                  <a:srgbClr val="12162E"/>
+                </a:solidFill>
+                <a:latin typeface="Arial"/>
+              </a:rPr>
+              <a:t> (B0 · classifieds, six replicated modes, n=224); every gain on this sheet is read against that band, not against zero.</a:t>
+            </a:r>
+          </a:p>
+        </p:txBody>
+      </p:sp>
+      <p:sp>
+        <p:nvSpPr>
+          <p:cNvPr id="14" name="Rectangle 13"/>
+          <p:cNvSpPr/>
+          <p:nvPr/>
+        </p:nvSpPr>
+        <p:spPr>
+          <a:xfrm>
+            <a:off x="7534800" y="26022099"/>
+            <a:ext cx="177988" cy="177988"/>
+          </a:xfrm>
+          <a:prstGeom prst="rect">
+            <a:avLst/>
+          </a:prstGeom>
+          <a:solidFill>
+            <a:srgbClr val="AB5FCE"/>
+          </a:solidFill>
+          <a:ln>
+            <a:noFill/>
+          </a:ln>
+          <a:effectLst/>
+        </p:spPr>
+        <p:style>
+          <a:lnRef idx="1">
+            <a:schemeClr val="accent1"/>
+          </a:lnRef>
+          <a:fillRef idx="3">
+            <a:schemeClr val="accent1"/>
+          </a:fillRef>
+          <a:effectRef idx="2">
+            <a:schemeClr val="accent1"/>
+          </a:effectRef>
+          <a:fontRef idx="minor">
+            <a:schemeClr val="lt1"/>
+          </a:fontRef>
+        </p:style>
+        <p:txBody>
+          <a:bodyPr rtlCol="0" anchor="ctr"/>
+          <a:lstStyle/>
+          <a:p>
+            <a:pPr algn="ctr"/>
+            <a:endParaRPr/>
+          </a:p>
+        </p:txBody>
+      </p:sp>
+      <p:sp>
+        <p:nvSpPr>
+          <p:cNvPr id="15" name="TextBox 14"/>
+          <p:cNvSpPr txBox="1"/>
+          <p:nvPr/>
+        </p:nvSpPr>
+        <p:spPr>
+          <a:xfrm>
+            <a:off x="7839923" y="25978899"/>
+            <a:ext cx="6144827" cy="238912"/>
+          </a:xfrm>
+          <a:prstGeom prst="rect">
+            <a:avLst/>
+          </a:prstGeom>
+          <a:noFill/>
+        </p:spPr>
+        <p:txBody>
+          <a:bodyPr wrap="square" lIns="0" tIns="0" rIns="0" bIns="0" anchor="t">
+            <a:spAutoFit/>
+          </a:bodyPr>
+          <a:lstStyle/>
+          <a:p>
+            <a:pPr algn="l">
+              <a:lnSpc>
+                <a:spcPct val="118000"/>
+              </a:lnSpc>
+            </a:pPr>
+            <a:r>
+              <a:rPr sz="1412" b="1" i="0">
+                <a:solidFill>
+                  <a:srgbClr val="141E41"/>
+                </a:solidFill>
+                <a:latin typeface="Consolas"/>
+              </a:rPr>
+              <a:t>TAKEAWAY</a:t>
+            </a:r>
+            <a:endParaRPr sz="1412" b="1" spc="180" dirty="0">
+              <a:solidFill>
+                <a:srgbClr val="141E41"/>
+              </a:solidFill>
+              <a:latin typeface="Consolas"/>
+            </a:endParaRPr>
+          </a:p>
+        </p:txBody>
+      </p:sp>
+      <p:sp>
+        <p:nvSpPr>
+          <p:cNvPr id="16" name="Rectangle 15"/>
+          <p:cNvSpPr/>
+          <p:nvPr/>
+        </p:nvSpPr>
+        <p:spPr>
+          <a:xfrm>
+            <a:off x="7534800" y="26339935"/>
+            <a:ext cx="1169636" cy="35597"/>
+          </a:xfrm>
+          <a:prstGeom prst="rect">
+            <a:avLst/>
+          </a:prstGeom>
+          <a:solidFill>
+            <a:srgbClr val="141E41"/>
+          </a:solidFill>
+          <a:ln>
+            <a:noFill/>
+          </a:ln>
+          <a:effectLst/>
+        </p:spPr>
+        <p:style>
+          <a:lnRef idx="1">
+            <a:schemeClr val="accent1"/>
+          </a:lnRef>
+          <a:fillRef idx="3">
+            <a:schemeClr val="accent1"/>
+          </a:fillRef>
+          <a:effectRef idx="2">
+            <a:schemeClr val="accent1"/>
+          </a:effectRef>
+          <a:fontRef idx="minor">
+            <a:schemeClr val="lt1"/>
+          </a:fontRef>
+        </p:style>
+        <p:txBody>
+          <a:bodyPr rtlCol="0" anchor="ctr"/>
+          <a:lstStyle/>
+          <a:p>
+            <a:pPr algn="ctr"/>
+            <a:endParaRPr/>
+          </a:p>
+        </p:txBody>
+      </p:sp>
+      <p:sp>
+        <p:nvSpPr>
+          <p:cNvPr id="17" name="Rectangle 16"/>
+          <p:cNvSpPr/>
+          <p:nvPr/>
+        </p:nvSpPr>
+        <p:spPr>
+          <a:xfrm>
+            <a:off x="8704436" y="26350106"/>
+            <a:ext cx="12085564" cy="15256"/>
+          </a:xfrm>
+          <a:prstGeom prst="rect">
+            <a:avLst/>
+          </a:prstGeom>
+          <a:solidFill>
+            <a:srgbClr val="DDE3F2"/>
+          </a:solidFill>
+          <a:ln>
+            <a:noFill/>
+          </a:ln>
+          <a:effectLst/>
+        </p:spPr>
+        <p:style>
+          <a:lnRef idx="1">
+            <a:schemeClr val="accent1"/>
+          </a:lnRef>
+          <a:fillRef idx="3">
+            <a:schemeClr val="accent1"/>
+          </a:fillRef>
+          <a:effectRef idx="2">
+            <a:schemeClr val="accent1"/>
+          </a:effectRef>
+          <a:fontRef idx="minor">
+            <a:schemeClr val="lt1"/>
+          </a:fontRef>
+        </p:style>
+        <p:txBody>
+          <a:bodyPr rtlCol="0" anchor="ctr"/>
+          <a:lstStyle/>
+          <a:p>
+            <a:pPr algn="ctr"/>
+            <a:endParaRPr/>
+          </a:p>
+        </p:txBody>
+      </p:sp>
+      <p:sp>
+        <p:nvSpPr>
+          <p:cNvPr id="192" name="TextBox 191"/>
+          <p:cNvSpPr txBox="1"/>
+          <p:nvPr/>
+        </p:nvSpPr>
+        <p:spPr>
+          <a:xfrm>
+            <a:off x="7534800" y="26562099"/>
+            <a:ext cx="13255200" cy="645563"/>
+          </a:xfrm>
+          <a:prstGeom prst="rect">
+            <a:avLst/>
+          </a:prstGeom>
+          <a:noFill/>
+        </p:spPr>
+        <p:txBody>
+          <a:bodyPr wrap="square" lIns="0" rIns="0" tIns="0" bIns="0">
+            <a:spAutoFit/>
+          </a:bodyPr>
+          <a:lstStyle/>
+          <a:p>
+            <a:pPr algn="l">
+              <a:lnSpc>
+                <a:spcPct val="120000"/>
+              </a:lnSpc>
+              <a:spcAft>
+                <a:spcPts val="992"/>
+              </a:spcAft>
+            </a:pPr>
+            <a:r>
+              <a:rPr sz="1764" b="1" i="0">
+                <a:solidFill>
+                  <a:srgbClr val="12162E"/>
+                </a:solidFill>
+                <a:latin typeface="Arial"/>
+              </a:rPr>
+              <a:t>Routing is not only a model-selection problem: its learnability depends on the competence of the agent producing the labels.</a:t>
+            </a:r>
+            <a:r>
+              <a:rPr sz="1764" b="0" i="0">
+                <a:solidFill>
+                  <a:srgbClr val="12162E"/>
+                </a:solidFill>
+                <a:latin typeface="Arial"/>
+              </a:rPr>
+              <a:t> So, in this order: improve the agent, then generate reliable supervision, then learn selective perception.</a:t>
+            </a:r>
+          </a:p>
+        </p:txBody>
+      </p:sp>
+      <p:sp>
+        <p:nvSpPr>
+          <p:cNvPr id="193" name="TextBox 192"/>
+          <p:cNvSpPr txBox="1"/>
+          <p:nvPr/>
+        </p:nvSpPr>
+        <p:spPr>
+          <a:xfrm>
+            <a:off x="7534800" y="27261662"/>
+            <a:ext cx="13255200" cy="255684"/>
+          </a:xfrm>
+          <a:prstGeom prst="rect">
+            <a:avLst/>
+          </a:prstGeom>
+          <a:noFill/>
+        </p:spPr>
+        <p:txBody>
+          <a:bodyPr wrap="square" lIns="0" rIns="0" tIns="0" bIns="0">
+            <a:spAutoFit/>
+          </a:bodyPr>
+          <a:lstStyle/>
+          <a:p>
+            <a:pPr algn="l">
+              <a:lnSpc>
+                <a:spcPct val="132000"/>
+              </a:lnSpc>
+              <a:spcAft>
+                <a:spcPts val="425"/>
+              </a:spcAft>
+            </a:pPr>
+            <a:r>
+              <a:rPr sz="1271" b="0" i="0">
+                <a:solidFill>
+                  <a:srgbClr val="5D6787"/>
+                </a:solidFill>
+                <a:latin typeface="Arial"/>
+              </a:rPr>
+              <a:t>Measured inside the 2–36% success regime we observed. This conclusion need not hold for stronger agents.</a:t>
+            </a:r>
+          </a:p>
+        </p:txBody>
+      </p:sp>
+      <p:pic>
+        <p:nvPicPr>
+          <p:cNvPr id="194" name="Picture 193" descr="qr_repo.png"/>
+          <p:cNvPicPr>
+            <a:picLocks noChangeAspect="1"/>
+          </p:cNvPicPr>
+          <p:nvPr/>
+        </p:nvPicPr>
+        <p:blipFill>
+          <a:blip r:embed="rId9"/>
           <a:stretch>
             <a:fillRect/>
           </a:stretch>

--- a/deliverables/showcase/poster_jiaming_wei.pptx
+++ b/deliverables/showcase/poster_jiaming_wei.pptx
@@ -3539,7 +3539,7 @@
                 </a:solidFill>
                 <a:latin typeface="Georgia"/>
               </a:rPr>
-              <a:t>Seen the right way, a page would let the agent solve up to 16 more tasks in 100 than the best fixed mode — yet none of 8 learned routers beat always using the cheapest mode on both success and cost.</a:t>
+              <a:t>Seen the right way, a page would let the agent solve up to 16 more tasks in 100 than the best fixed choice — yet nothing we trained beat always using the cheapest way on both success and cost.</a:t>
             </a:r>
           </a:p>
         </p:txBody>
@@ -3857,7 +3857,7 @@
                 </a:solidFill>
                 <a:latin typeface="Consolas"/>
               </a:rPr>
-              <a:t>WHERE THE DECISION SITS IN THE AGENT LOOP</a:t>
+              <a:t>THE AGENT LOOP, AND WHERE THE DECISION SITS</a:t>
             </a:r>
             <a:endParaRPr sz="1412" b="1" spc="180" dirty="0">
               <a:solidFill>
@@ -3966,7 +3966,7 @@
         </p:nvSpPr>
         <p:spPr>
           <a:xfrm>
-            <a:off x="3895200" y="7452000"/>
+            <a:off x="3823200" y="7992000"/>
             <a:ext cx="360000" cy="504000"/>
           </a:xfrm>
           <a:prstGeom prst="rightArrow">
@@ -4010,7 +4010,7 @@
         </p:nvSpPr>
         <p:spPr>
           <a:xfrm>
-            <a:off x="8719200" y="7452000"/>
+            <a:off x="8215200" y="7992000"/>
             <a:ext cx="360000" cy="504000"/>
           </a:xfrm>
           <a:prstGeom prst="rightArrow">
@@ -4054,7 +4054,7 @@
         </p:nvSpPr>
         <p:spPr>
           <a:xfrm>
-            <a:off x="13471200" y="7452000"/>
+            <a:off x="14119200" y="7992000"/>
             <a:ext cx="360000" cy="504000"/>
           </a:xfrm>
           <a:prstGeom prst="rightArrow">
@@ -4098,7 +4098,7 @@
         </p:nvSpPr>
         <p:spPr>
           <a:xfrm>
-            <a:off x="17287200" y="7452000"/>
+            <a:off x="17791200" y="7992000"/>
             <a:ext cx="360000" cy="504000"/>
           </a:xfrm>
           <a:prstGeom prst="rightArrow">
@@ -4143,7 +4143,7 @@
         <p:spPr>
           <a:xfrm>
             <a:off x="727200" y="5580000"/>
-            <a:ext cx="3096000" cy="4248000"/>
+            <a:ext cx="3024000" cy="5328000"/>
           </a:xfrm>
           <a:prstGeom prst="rect">
             <a:avLst/>
@@ -4189,7 +4189,7 @@
         <p:spPr>
           <a:xfrm>
             <a:off x="727200" y="5580000"/>
-            <a:ext cx="3096000" cy="50400"/>
+            <a:ext cx="3024000" cy="50400"/>
           </a:xfrm>
           <a:prstGeom prst="rect">
             <a:avLst/>
@@ -4233,7 +4233,7 @@
         <p:spPr>
           <a:xfrm>
             <a:off x="907200" y="5724000"/>
-            <a:ext cx="2736000" cy="216000"/>
+            <a:ext cx="2664000" cy="216000"/>
           </a:xfrm>
           <a:prstGeom prst="rect">
             <a:avLst/>
@@ -4261,7 +4261,7 @@
                 </a:solidFill>
                 <a:latin typeface="Consolas"/>
               </a:rPr>
-              <a:t>TASK + LIVE PAGE</a:t>
+              <a:t>THE TASK + THE LIVE PAGE</a:t>
             </a:r>
           </a:p>
         </p:txBody>
@@ -4275,7 +4275,7 @@
         <p:spPr>
           <a:xfrm>
             <a:off x="907200" y="5958000"/>
-            <a:ext cx="2736000" cy="968345"/>
+            <a:ext cx="2664000" cy="968345"/>
           </a:xfrm>
           <a:prstGeom prst="rect">
             <a:avLst/>
@@ -4316,8 +4316,8 @@
         </p:nvSpPr>
         <p:spPr>
           <a:xfrm>
-            <a:off x="907200" y="7034345"/>
-            <a:ext cx="2736000" cy="767053"/>
+            <a:off x="907200" y="7016345"/>
+            <a:ext cx="2664000" cy="511369"/>
           </a:xfrm>
           <a:prstGeom prst="rect">
             <a:avLst/>
@@ -4345,7 +4345,7 @@
                 </a:solidFill>
                 <a:latin typeface="Arial"/>
               </a:rPr>
-              <a:t>Part of the intent is in the pictures, part in the text — and which part matters changes task by task.</a:t>
+              <a:t>Part of the intent is in the pictures, part in the text.</a:t>
             </a:r>
           </a:p>
         </p:txBody>
@@ -4358,8 +4358,76 @@
         </p:nvSpPr>
         <p:spPr>
           <a:xfrm>
-            <a:off x="4327200" y="5580000"/>
-            <a:ext cx="4320000" cy="4248000"/>
+            <a:off x="892800" y="7621314"/>
+            <a:ext cx="2692800" cy="1518975"/>
+          </a:xfrm>
+          <a:prstGeom prst="rect">
+            <a:avLst/>
+          </a:prstGeom>
+          <a:noFill/>
+          <a:ln w="8890">
+            <a:solidFill>
+              <a:srgbClr val="C9CFE0"/>
+            </a:solidFill>
+          </a:ln>
+          <a:effectLst/>
+        </p:spPr>
+        <p:style>
+          <a:lnRef idx="1">
+            <a:schemeClr val="accent1"/>
+          </a:lnRef>
+          <a:fillRef idx="3">
+            <a:schemeClr val="accent1"/>
+          </a:fillRef>
+          <a:effectRef idx="2">
+            <a:schemeClr val="accent1"/>
+          </a:effectRef>
+          <a:fontRef idx="minor">
+            <a:schemeClr val="lt1"/>
+          </a:fontRef>
+        </p:style>
+        <p:txBody>
+          <a:bodyPr rtlCol="0" anchor="ctr" wrap="square"/>
+          <a:lstStyle/>
+          <a:p>
+            <a:pPr algn="ctr"/>
+          </a:p>
+        </p:txBody>
+      </p:sp>
+      <p:pic>
+        <p:nvPicPr>
+          <p:cNvPr id="87" name="Picture 86" descr="eye_look.png"/>
+          <p:cNvPicPr>
+            <a:picLocks noChangeAspect="1"/>
+          </p:cNvPicPr>
+          <p:nvPr/>
+        </p:nvPicPr>
+        <p:blipFill>
+          <a:blip r:embed="rId5"/>
+          <a:stretch>
+            <a:fillRect/>
+          </a:stretch>
+        </p:blipFill>
+        <p:spPr>
+          <a:xfrm>
+            <a:off x="907200" y="7635714"/>
+            <a:ext cx="2664000" cy="1490175"/>
+          </a:xfrm>
+          <a:prstGeom prst="rect">
+            <a:avLst/>
+          </a:prstGeom>
+        </p:spPr>
+      </p:pic>
+      <p:sp>
+        <p:nvSpPr>
+          <p:cNvPr id="88" name="Rectangle 87"/>
+          <p:cNvSpPr/>
+          <p:nvPr/>
+        </p:nvSpPr>
+        <p:spPr>
+          <a:xfrm>
+            <a:off x="4255200" y="5580000"/>
+            <a:ext cx="3888000" cy="5328000"/>
           </a:xfrm>
           <a:prstGeom prst="rect">
             <a:avLst/>
@@ -4399,14 +4467,14 @@
       </p:sp>
       <p:sp>
         <p:nvSpPr>
-          <p:cNvPr id="87" name="TextBox 86"/>
+          <p:cNvPr id="89" name="TextBox 88"/>
           <p:cNvSpPr txBox="1"/>
           <p:nvPr/>
         </p:nvSpPr>
         <p:spPr>
           <a:xfrm>
-            <a:off x="4507200" y="5724000"/>
-            <a:ext cx="3960000" cy="216000"/>
+            <a:off x="4435200" y="5724000"/>
+            <a:ext cx="3528000" cy="216000"/>
           </a:xfrm>
           <a:prstGeom prst="rect">
             <a:avLst/>
@@ -4434,21 +4502,21 @@
                 </a:solidFill>
                 <a:latin typeface="Consolas"/>
               </a:rPr>
-              <a:t>WHO DECIDES HOW TO SEE?</a:t>
-            </a:r>
-          </a:p>
-        </p:txBody>
-      </p:sp>
-      <p:sp>
-        <p:nvSpPr>
-          <p:cNvPr id="88" name="Rounded Rectangle 87"/>
+              <a:t>WHO DECIDES HOW TO SEE IT?</a:t>
+            </a:r>
+          </a:p>
+        </p:txBody>
+      </p:sp>
+      <p:sp>
+        <p:nvSpPr>
+          <p:cNvPr id="90" name="Rounded Rectangle 89"/>
           <p:cNvSpPr/>
           <p:nvPr/>
         </p:nvSpPr>
         <p:spPr>
           <a:xfrm>
-            <a:off x="4507200" y="5958000"/>
-            <a:ext cx="3960000" cy="1044000"/>
+            <a:off x="4435200" y="5958000"/>
+            <a:ext cx="3528000" cy="1224000"/>
           </a:xfrm>
           <a:prstGeom prst="roundRect">
             <a:avLst>
@@ -4489,14 +4557,14 @@
       </p:sp>
       <p:sp>
         <p:nvSpPr>
-          <p:cNvPr id="89" name="TextBox 88"/>
+          <p:cNvPr id="91" name="TextBox 90"/>
           <p:cNvSpPr txBox="1"/>
           <p:nvPr/>
         </p:nvSpPr>
         <p:spPr>
           <a:xfrm>
-            <a:off x="4651200" y="6084000"/>
-            <a:ext cx="3672000" cy="288000"/>
+            <a:off x="4579200" y="6084000"/>
+            <a:ext cx="3240000" cy="288000"/>
           </a:xfrm>
           <a:prstGeom prst="rect">
             <a:avLst/>
@@ -4524,21 +4592,21 @@
                 </a:solidFill>
                 <a:latin typeface="Arial"/>
               </a:rPr>
-              <a:t>Fixed mode</a:t>
-            </a:r>
-          </a:p>
-        </p:txBody>
-      </p:sp>
-      <p:sp>
-        <p:nvSpPr>
-          <p:cNvPr id="90" name="TextBox 89"/>
+              <a:t>One fixed choice</a:t>
+            </a:r>
+          </a:p>
+        </p:txBody>
+      </p:sp>
+      <p:sp>
+        <p:nvSpPr>
+          <p:cNvPr id="92" name="TextBox 91"/>
           <p:cNvSpPr txBox="1"/>
           <p:nvPr/>
         </p:nvSpPr>
         <p:spPr>
           <a:xfrm>
-            <a:off x="4651200" y="6426000"/>
-            <a:ext cx="3672000" cy="468000"/>
+            <a:off x="4579200" y="6426000"/>
+            <a:ext cx="3240000" cy="576000"/>
           </a:xfrm>
           <a:prstGeom prst="rect">
             <a:avLst/>
@@ -4566,21 +4634,21 @@
                 </a:solidFill>
                 <a:latin typeface="Arial"/>
               </a:rPr>
-              <a:t>the same choice for every task</a:t>
-            </a:r>
-          </a:p>
-        </p:txBody>
-      </p:sp>
-      <p:sp>
-        <p:nvSpPr>
-          <p:cNvPr id="91" name="Rounded Rectangle 90"/>
+              <a:t>the same way of seeing for every task</a:t>
+            </a:r>
+          </a:p>
+        </p:txBody>
+      </p:sp>
+      <p:sp>
+        <p:nvSpPr>
+          <p:cNvPr id="93" name="Rounded Rectangle 92"/>
           <p:cNvSpPr/>
           <p:nvPr/>
         </p:nvSpPr>
         <p:spPr>
           <a:xfrm>
-            <a:off x="4507200" y="7110000"/>
-            <a:ext cx="3960000" cy="1044000"/>
+            <a:off x="4435200" y="7290000"/>
+            <a:ext cx="3528000" cy="1224000"/>
           </a:xfrm>
           <a:prstGeom prst="roundRect">
             <a:avLst>
@@ -4621,14 +4689,14 @@
       </p:sp>
       <p:sp>
         <p:nvSpPr>
-          <p:cNvPr id="92" name="TextBox 91"/>
+          <p:cNvPr id="94" name="TextBox 93"/>
           <p:cNvSpPr txBox="1"/>
           <p:nvPr/>
         </p:nvSpPr>
         <p:spPr>
           <a:xfrm>
-            <a:off x="4651200" y="7236000"/>
-            <a:ext cx="3672000" cy="288000"/>
+            <a:off x="4579200" y="7416000"/>
+            <a:ext cx="3240000" cy="288000"/>
           </a:xfrm>
           <a:prstGeom prst="rect">
             <a:avLst/>
@@ -4656,21 +4724,21 @@
                 </a:solidFill>
                 <a:latin typeface="Arial"/>
               </a:rPr>
-              <a:t>Hindsight oracle</a:t>
-            </a:r>
-          </a:p>
-        </p:txBody>
-      </p:sp>
-      <p:sp>
-        <p:nvSpPr>
-          <p:cNvPr id="93" name="TextBox 92"/>
+              <a:t>Best choice in hindsight</a:t>
+            </a:r>
+          </a:p>
+        </p:txBody>
+      </p:sp>
+      <p:sp>
+        <p:nvSpPr>
+          <p:cNvPr id="95" name="TextBox 94"/>
           <p:cNvSpPr txBox="1"/>
           <p:nvPr/>
         </p:nvSpPr>
         <p:spPr>
           <a:xfrm>
-            <a:off x="4651200" y="7578000"/>
-            <a:ext cx="3672000" cy="468000"/>
+            <a:off x="4579200" y="7758000"/>
+            <a:ext cx="3240000" cy="576000"/>
           </a:xfrm>
           <a:prstGeom prst="rect">
             <a:avLst/>
@@ -4698,21 +4766,21 @@
                 </a:solidFill>
                 <a:latin typeface="Arial"/>
               </a:rPr>
-              <a:t>the best choice, known afterwards</a:t>
-            </a:r>
-          </a:p>
-        </p:txBody>
-      </p:sp>
-      <p:sp>
-        <p:nvSpPr>
-          <p:cNvPr id="94" name="Rounded Rectangle 93"/>
+              <a:t>knowing afterwards which way solved it</a:t>
+            </a:r>
+          </a:p>
+        </p:txBody>
+      </p:sp>
+      <p:sp>
+        <p:nvSpPr>
+          <p:cNvPr id="96" name="Rounded Rectangle 95"/>
           <p:cNvSpPr/>
           <p:nvPr/>
         </p:nvSpPr>
         <p:spPr>
           <a:xfrm>
-            <a:off x="4507200" y="8262000"/>
-            <a:ext cx="3960000" cy="1044000"/>
+            <a:off x="4435200" y="8622000"/>
+            <a:ext cx="3528000" cy="1224000"/>
           </a:xfrm>
           <a:prstGeom prst="roundRect">
             <a:avLst>
@@ -4753,14 +4821,14 @@
       </p:sp>
       <p:sp>
         <p:nvSpPr>
-          <p:cNvPr id="95" name="TextBox 94"/>
+          <p:cNvPr id="97" name="TextBox 96"/>
           <p:cNvSpPr txBox="1"/>
           <p:nvPr/>
         </p:nvSpPr>
         <p:spPr>
           <a:xfrm>
-            <a:off x="4651200" y="8388000"/>
-            <a:ext cx="3672000" cy="288000"/>
+            <a:off x="4579200" y="8748000"/>
+            <a:ext cx="3240000" cy="288000"/>
           </a:xfrm>
           <a:prstGeom prst="rect">
             <a:avLst/>
@@ -4788,21 +4856,21 @@
                 </a:solidFill>
                 <a:latin typeface="Arial"/>
               </a:rPr>
-              <a:t>Learned router</a:t>
-            </a:r>
-          </a:p>
-        </p:txBody>
-      </p:sp>
-      <p:sp>
-        <p:nvSpPr>
-          <p:cNvPr id="96" name="TextBox 95"/>
+              <a:t>A learned choice</a:t>
+            </a:r>
+          </a:p>
+        </p:txBody>
+      </p:sp>
+      <p:sp>
+        <p:nvSpPr>
+          <p:cNvPr id="98" name="TextBox 97"/>
           <p:cNvSpPr txBox="1"/>
           <p:nvPr/>
         </p:nvSpPr>
         <p:spPr>
           <a:xfrm>
-            <a:off x="4651200" y="8730000"/>
-            <a:ext cx="3672000" cy="468000"/>
+            <a:off x="4579200" y="9090000"/>
+            <a:ext cx="3240000" cy="576000"/>
           </a:xfrm>
           <a:prstGeom prst="rect">
             <a:avLst/>
@@ -4830,21 +4898,63 @@
                 </a:solidFill>
                 <a:latin typeface="Arial"/>
               </a:rPr>
-              <a:t>a choice made before the task runs</a:t>
-            </a:r>
-          </a:p>
-        </p:txBody>
-      </p:sp>
-      <p:sp>
-        <p:nvSpPr>
-          <p:cNvPr id="97" name="Rectangle 96"/>
+              <a:t>made before the task runs, from what the page looks like</a:t>
+            </a:r>
+          </a:p>
+        </p:txBody>
+      </p:sp>
+      <p:sp>
+        <p:nvSpPr>
+          <p:cNvPr id="99" name="TextBox 98"/>
+          <p:cNvSpPr txBox="1"/>
+          <p:nvPr/>
+        </p:nvSpPr>
+        <p:spPr>
+          <a:xfrm>
+            <a:off x="4435200" y="10548000"/>
+            <a:ext cx="3528000" cy="216000"/>
+          </a:xfrm>
+          <a:prstGeom prst="rect">
+            <a:avLst/>
+          </a:prstGeom>
+          <a:noFill/>
+        </p:spPr>
+        <p:txBody>
+          <a:bodyPr wrap="square" lIns="0" rIns="0" tIns="0" bIns="0">
+            <a:spAutoFit/>
+          </a:bodyPr>
+          <a:lstStyle/>
+          <a:p>
+            <a:pPr algn="l">
+              <a:lnSpc>
+                <a:spcPct val="120000"/>
+              </a:lnSpc>
+              <a:spcAft>
+                <a:spcPts val="0"/>
+              </a:spcAft>
+            </a:pPr>
+            <a:r>
+              <a:rPr sz="1059" b="0" i="0">
+                <a:solidFill>
+                  <a:srgbClr val="5049F9"/>
+                </a:solidFill>
+                <a:latin typeface="Consolas"/>
+              </a:rPr>
+              <a:t>this box is what we measure</a:t>
+            </a:r>
+          </a:p>
+        </p:txBody>
+      </p:sp>
+      <p:sp>
+        <p:nvSpPr>
+          <p:cNvPr id="100" name="Rectangle 99"/>
           <p:cNvSpPr/>
           <p:nvPr/>
         </p:nvSpPr>
         <p:spPr>
           <a:xfrm>
-            <a:off x="9151200" y="5580000"/>
-            <a:ext cx="4248000" cy="1296000"/>
+            <a:off x="8647200" y="5580000"/>
+            <a:ext cx="5400000" cy="1656000"/>
           </a:xfrm>
           <a:prstGeom prst="rect">
             <a:avLst/>
@@ -4883,14 +4993,14 @@
       </p:sp>
       <p:sp>
         <p:nvSpPr>
-          <p:cNvPr id="98" name="Rectangle 97"/>
+          <p:cNvPr id="101" name="Rectangle 100"/>
           <p:cNvSpPr/>
           <p:nvPr/>
         </p:nvSpPr>
         <p:spPr>
           <a:xfrm>
-            <a:off x="9151200" y="5580000"/>
-            <a:ext cx="4248000" cy="50400"/>
+            <a:off x="8647200" y="5580000"/>
+            <a:ext cx="5400000" cy="50400"/>
           </a:xfrm>
           <a:prstGeom prst="rect">
             <a:avLst/>
@@ -4927,13 +5037,13 @@
       </p:sp>
       <p:sp>
         <p:nvSpPr>
-          <p:cNvPr id="99" name="TextBox 98"/>
+          <p:cNvPr id="102" name="TextBox 101"/>
           <p:cNvSpPr txBox="1"/>
           <p:nvPr/>
         </p:nvSpPr>
         <p:spPr>
           <a:xfrm>
-            <a:off x="9331200" y="5742000"/>
+            <a:off x="8827200" y="5742000"/>
             <a:ext cx="1440000" cy="288000"/>
           </a:xfrm>
           <a:prstGeom prst="rect">
@@ -4969,56 +5079,14 @@
       </p:sp>
       <p:sp>
         <p:nvSpPr>
-          <p:cNvPr id="100" name="TextBox 99"/>
+          <p:cNvPr id="103" name="TextBox 102"/>
           <p:cNvSpPr txBox="1"/>
           <p:nvPr/>
         </p:nvSpPr>
         <p:spPr>
           <a:xfrm>
-            <a:off x="9331200" y="6084000"/>
-            <a:ext cx="3888000" cy="288000"/>
-          </a:xfrm>
-          <a:prstGeom prst="rect">
-            <a:avLst/>
-          </a:prstGeom>
-          <a:noFill/>
-        </p:spPr>
-        <p:txBody>
-          <a:bodyPr wrap="square" lIns="0" rIns="0" tIns="0" bIns="0">
-            <a:spAutoFit/>
-          </a:bodyPr>
-          <a:lstStyle/>
-          <a:p>
-            <a:pPr algn="l">
-              <a:lnSpc>
-                <a:spcPct val="120000"/>
-              </a:lnSpc>
-              <a:spcAft>
-                <a:spcPts val="0"/>
-              </a:spcAft>
-            </a:pPr>
-            <a:r>
-              <a:rPr sz="1764" b="1" i="0">
-                <a:solidFill>
-                  <a:srgbClr val="141E41"/>
-                </a:solidFill>
-                <a:latin typeface="Arial"/>
-              </a:rPr>
-              <a:t>screenshot only</a:t>
-            </a:r>
-          </a:p>
-        </p:txBody>
-      </p:sp>
-      <p:sp>
-        <p:nvSpPr>
-          <p:cNvPr id="101" name="TextBox 100"/>
-          <p:cNvSpPr txBox="1"/>
-          <p:nvPr/>
-        </p:nvSpPr>
-        <p:spPr>
-          <a:xfrm>
-            <a:off x="9331200" y="6408000"/>
-            <a:ext cx="3888000" cy="396000"/>
+            <a:off x="8827200" y="6084000"/>
+            <a:ext cx="2520000" cy="504000"/>
           </a:xfrm>
           <a:prstGeom prst="rect">
             <a:avLst/>
@@ -5040,27 +5108,137 @@
               </a:spcAft>
             </a:pPr>
             <a:r>
+              <a:rPr sz="1271" b="1" i="0">
+                <a:solidFill>
+                  <a:srgbClr val="141E41"/>
+                </a:solidFill>
+                <a:latin typeface="Arial"/>
+              </a:rPr>
+              <a:t>the screenshot only</a:t>
+            </a:r>
+          </a:p>
+        </p:txBody>
+      </p:sp>
+      <p:sp>
+        <p:nvSpPr>
+          <p:cNvPr id="104" name="TextBox 103"/>
+          <p:cNvSpPr txBox="1"/>
+          <p:nvPr/>
+        </p:nvSpPr>
+        <p:spPr>
+          <a:xfrm>
+            <a:off x="8827200" y="6624000"/>
+            <a:ext cx="2520000" cy="432000"/>
+          </a:xfrm>
+          <a:prstGeom prst="rect">
+            <a:avLst/>
+          </a:prstGeom>
+          <a:noFill/>
+        </p:spPr>
+        <p:txBody>
+          <a:bodyPr wrap="square" lIns="0" rIns="0" tIns="0" bIns="0">
+            <a:spAutoFit/>
+          </a:bodyPr>
+          <a:lstStyle/>
+          <a:p>
+            <a:pPr algn="l">
+              <a:lnSpc>
+                <a:spcPct val="132000"/>
+              </a:lnSpc>
+              <a:spcAft>
+                <a:spcPts val="0"/>
+              </a:spcAft>
+            </a:pPr>
+            <a:r>
               <a:rPr sz="1271" b="0" i="0">
                 <a:solidFill>
                   <a:srgbClr val="5D6787"/>
                 </a:solidFill>
                 <a:latin typeface="Arial"/>
               </a:rPr>
-              <a:t>3,123 tokens on one real page</a:t>
-            </a:r>
-          </a:p>
-        </p:txBody>
-      </p:sp>
-      <p:sp>
-        <p:nvSpPr>
-          <p:cNvPr id="102" name="Rectangle 101"/>
+              <a:t>3,123 tokens on this page</a:t>
+            </a:r>
+          </a:p>
+        </p:txBody>
+      </p:sp>
+      <p:sp>
+        <p:nvSpPr>
+          <p:cNvPr id="105" name="Rectangle 104"/>
           <p:cNvSpPr/>
           <p:nvPr/>
         </p:nvSpPr>
         <p:spPr>
           <a:xfrm>
-            <a:off x="9151200" y="7056000"/>
-            <a:ext cx="4248000" cy="1296000"/>
+            <a:off x="11476800" y="5709600"/>
+            <a:ext cx="2404800" cy="1357875"/>
+          </a:xfrm>
+          <a:prstGeom prst="rect">
+            <a:avLst/>
+          </a:prstGeom>
+          <a:noFill/>
+          <a:ln w="8890">
+            <a:solidFill>
+              <a:srgbClr val="C9CFE0"/>
+            </a:solidFill>
+          </a:ln>
+          <a:effectLst/>
+        </p:spPr>
+        <p:style>
+          <a:lnRef idx="1">
+            <a:schemeClr val="accent1"/>
+          </a:lnRef>
+          <a:fillRef idx="3">
+            <a:schemeClr val="accent1"/>
+          </a:fillRef>
+          <a:effectRef idx="2">
+            <a:schemeClr val="accent1"/>
+          </a:effectRef>
+          <a:fontRef idx="minor">
+            <a:schemeClr val="lt1"/>
+          </a:fontRef>
+        </p:style>
+        <p:txBody>
+          <a:bodyPr rtlCol="0" anchor="ctr" wrap="square"/>
+          <a:lstStyle/>
+          <a:p>
+            <a:pPr algn="ctr"/>
+          </a:p>
+        </p:txBody>
+      </p:sp>
+      <p:pic>
+        <p:nvPicPr>
+          <p:cNvPr id="106" name="Picture 105" descr="eye_look.png"/>
+          <p:cNvPicPr>
+            <a:picLocks noChangeAspect="1"/>
+          </p:cNvPicPr>
+          <p:nvPr/>
+        </p:nvPicPr>
+        <p:blipFill>
+          <a:blip r:embed="rId5"/>
+          <a:stretch>
+            <a:fillRect/>
+          </a:stretch>
+        </p:blipFill>
+        <p:spPr>
+          <a:xfrm>
+            <a:off x="11491200" y="5724000"/>
+            <a:ext cx="2376000" cy="1329075"/>
+          </a:xfrm>
+          <a:prstGeom prst="rect">
+            <a:avLst/>
+          </a:prstGeom>
+        </p:spPr>
+      </p:pic>
+      <p:sp>
+        <p:nvSpPr>
+          <p:cNvPr id="107" name="Rectangle 106"/>
+          <p:cNvSpPr/>
+          <p:nvPr/>
+        </p:nvSpPr>
+        <p:spPr>
+          <a:xfrm>
+            <a:off x="8647200" y="7380000"/>
+            <a:ext cx="5400000" cy="1656000"/>
           </a:xfrm>
           <a:prstGeom prst="rect">
             <a:avLst/>
@@ -5099,14 +5277,14 @@
       </p:sp>
       <p:sp>
         <p:nvSpPr>
-          <p:cNvPr id="103" name="Rectangle 102"/>
+          <p:cNvPr id="108" name="Rectangle 107"/>
           <p:cNvSpPr/>
           <p:nvPr/>
         </p:nvSpPr>
         <p:spPr>
           <a:xfrm>
-            <a:off x="9151200" y="7056000"/>
-            <a:ext cx="4248000" cy="50400"/>
+            <a:off x="8647200" y="7380000"/>
+            <a:ext cx="5400000" cy="50400"/>
           </a:xfrm>
           <a:prstGeom prst="rect">
             <a:avLst/>
@@ -5143,13 +5321,13 @@
       </p:sp>
       <p:sp>
         <p:nvSpPr>
-          <p:cNvPr id="104" name="TextBox 103"/>
+          <p:cNvPr id="109" name="TextBox 108"/>
           <p:cNvSpPr txBox="1"/>
           <p:nvPr/>
         </p:nvSpPr>
         <p:spPr>
           <a:xfrm>
-            <a:off x="9331200" y="7218000"/>
+            <a:off x="8827200" y="7542000"/>
             <a:ext cx="1440000" cy="288000"/>
           </a:xfrm>
           <a:prstGeom prst="rect">
@@ -5185,56 +5363,14 @@
       </p:sp>
       <p:sp>
         <p:nvSpPr>
-          <p:cNvPr id="105" name="TextBox 104"/>
+          <p:cNvPr id="110" name="TextBox 109"/>
           <p:cNvSpPr txBox="1"/>
           <p:nvPr/>
         </p:nvSpPr>
         <p:spPr>
           <a:xfrm>
-            <a:off x="9331200" y="7560000"/>
-            <a:ext cx="3888000" cy="288000"/>
-          </a:xfrm>
-          <a:prstGeom prst="rect">
-            <a:avLst/>
-          </a:prstGeom>
-          <a:noFill/>
-        </p:spPr>
-        <p:txBody>
-          <a:bodyPr wrap="square" lIns="0" rIns="0" tIns="0" bIns="0">
-            <a:spAutoFit/>
-          </a:bodyPr>
-          <a:lstStyle/>
-          <a:p>
-            <a:pPr algn="l">
-              <a:lnSpc>
-                <a:spcPct val="120000"/>
-              </a:lnSpc>
-              <a:spcAft>
-                <a:spcPts val="0"/>
-              </a:spcAft>
-            </a:pPr>
-            <a:r>
-              <a:rPr sz="1764" b="1" i="0">
-                <a:solidFill>
-                  <a:srgbClr val="141E41"/>
-                </a:solidFill>
-                <a:latin typeface="Arial"/>
-              </a:rPr>
-              <a:t>accessibility-tree text only</a:t>
-            </a:r>
-          </a:p>
-        </p:txBody>
-      </p:sp>
-      <p:sp>
-        <p:nvSpPr>
-          <p:cNvPr id="106" name="TextBox 105"/>
-          <p:cNvSpPr txBox="1"/>
-          <p:nvPr/>
-        </p:nvSpPr>
-        <p:spPr>
-          <a:xfrm>
-            <a:off x="9331200" y="7884000"/>
-            <a:ext cx="3888000" cy="396000"/>
+            <a:off x="8827200" y="7884000"/>
+            <a:ext cx="2520000" cy="504000"/>
           </a:xfrm>
           <a:prstGeom prst="rect">
             <a:avLst/>
@@ -5256,27 +5392,252 @@
               </a:spcAft>
             </a:pPr>
             <a:r>
+              <a:rPr sz="1271" b="1" i="0">
+                <a:solidFill>
+                  <a:srgbClr val="141E41"/>
+                </a:solidFill>
+                <a:latin typeface="Arial"/>
+              </a:rPr>
+              <a:t>the page as text: its elements and labels</a:t>
+            </a:r>
+          </a:p>
+        </p:txBody>
+      </p:sp>
+      <p:sp>
+        <p:nvSpPr>
+          <p:cNvPr id="111" name="TextBox 110"/>
+          <p:cNvSpPr txBox="1"/>
+          <p:nvPr/>
+        </p:nvSpPr>
+        <p:spPr>
+          <a:xfrm>
+            <a:off x="8827200" y="8424000"/>
+            <a:ext cx="2520000" cy="432000"/>
+          </a:xfrm>
+          <a:prstGeom prst="rect">
+            <a:avLst/>
+          </a:prstGeom>
+          <a:noFill/>
+        </p:spPr>
+        <p:txBody>
+          <a:bodyPr wrap="square" lIns="0" rIns="0" tIns="0" bIns="0">
+            <a:spAutoFit/>
+          </a:bodyPr>
+          <a:lstStyle/>
+          <a:p>
+            <a:pPr algn="l">
+              <a:lnSpc>
+                <a:spcPct val="132000"/>
+              </a:lnSpc>
+              <a:spcAft>
+                <a:spcPts val="0"/>
+              </a:spcAft>
+            </a:pPr>
+            <a:r>
               <a:rPr sz="1271" b="0" i="0">
                 <a:solidFill>
                   <a:srgbClr val="5D6787"/>
                 </a:solidFill>
                 <a:latin typeface="Arial"/>
               </a:rPr>
-              <a:t>3,314 tokens · plus three text-only variants</a:t>
-            </a:r>
-          </a:p>
-        </p:txBody>
-      </p:sp>
-      <p:sp>
-        <p:nvSpPr>
-          <p:cNvPr id="107" name="Rectangle 106"/>
+              <a:t>3,314 tokens · three text-only variants share this</a:t>
+            </a:r>
+          </a:p>
+        </p:txBody>
+      </p:sp>
+      <p:sp>
+        <p:nvSpPr>
+          <p:cNvPr id="112" name="Rectangle 111"/>
           <p:cNvSpPr/>
           <p:nvPr/>
         </p:nvSpPr>
         <p:spPr>
           <a:xfrm>
-            <a:off x="9151200" y="8532000"/>
-            <a:ext cx="4248000" cy="1296000"/>
+            <a:off x="11491200" y="7524000"/>
+            <a:ext cx="2376000" cy="1328400"/>
+          </a:xfrm>
+          <a:prstGeom prst="rect">
+            <a:avLst/>
+          </a:prstGeom>
+          <a:solidFill>
+            <a:srgbClr val="FFFFFF"/>
+          </a:solidFill>
+          <a:ln w="8890">
+            <a:solidFill>
+              <a:srgbClr val="C9CFE0"/>
+            </a:solidFill>
+          </a:ln>
+          <a:effectLst/>
+        </p:spPr>
+        <p:style>
+          <a:lnRef idx="1">
+            <a:schemeClr val="accent1"/>
+          </a:lnRef>
+          <a:fillRef idx="3">
+            <a:schemeClr val="accent1"/>
+          </a:fillRef>
+          <a:effectRef idx="2">
+            <a:schemeClr val="accent1"/>
+          </a:effectRef>
+          <a:fontRef idx="minor">
+            <a:schemeClr val="lt1"/>
+          </a:fontRef>
+        </p:style>
+        <p:txBody>
+          <a:bodyPr rtlCol="0" anchor="ctr" wrap="square"/>
+          <a:lstStyle/>
+          <a:p>
+            <a:pPr algn="ctr"/>
+          </a:p>
+        </p:txBody>
+      </p:sp>
+      <p:sp>
+        <p:nvSpPr>
+          <p:cNvPr id="113" name="TextBox 112"/>
+          <p:cNvSpPr txBox="1"/>
+          <p:nvPr/>
+        </p:nvSpPr>
+        <p:spPr>
+          <a:xfrm>
+            <a:off x="11563200" y="7596000"/>
+            <a:ext cx="2232000" cy="1116000"/>
+          </a:xfrm>
+          <a:prstGeom prst="rect">
+            <a:avLst/>
+          </a:prstGeom>
+          <a:noFill/>
+        </p:spPr>
+        <p:txBody>
+          <a:bodyPr wrap="square" lIns="0" rIns="0" tIns="0" bIns="0">
+            <a:spAutoFit/>
+          </a:bodyPr>
+          <a:lstStyle/>
+          <a:p>
+            <a:pPr algn="l">
+              <a:lnSpc>
+                <a:spcPct val="115000"/>
+              </a:lnSpc>
+              <a:spcAft>
+                <a:spcPts val="0"/>
+              </a:spcAft>
+            </a:pPr>
+            <a:r>
+              <a:rPr sz="750" b="0" i="0">
+                <a:solidFill>
+                  <a:srgbClr val="12162E"/>
+                </a:solidFill>
+                <a:latin typeface="Consolas"/>
+              </a:rPr>
+              <a:t>[2] RootWebArea 'Classifieds'</a:t>
+            </a:r>
+          </a:p>
+          <a:p>
+            <a:pPr algn="l">
+              <a:lnSpc>
+                <a:spcPct val="115000"/>
+              </a:lnSpc>
+              <a:spcAft>
+                <a:spcPts val="0"/>
+              </a:spcAft>
+            </a:pPr>
+            <a:r>
+              <a:rPr sz="750" b="0" i="0">
+                <a:solidFill>
+                  <a:srgbClr val="12162E"/>
+                </a:solidFill>
+                <a:latin typeface="Consolas"/>
+              </a:rPr>
+              <a:t>[89] link 'Classifieds'</a:t>
+            </a:r>
+          </a:p>
+          <a:p>
+            <a:pPr algn="l">
+              <a:lnSpc>
+                <a:spcPct val="115000"/>
+              </a:lnSpc>
+              <a:spcAft>
+                <a:spcPts val="0"/>
+              </a:spcAft>
+            </a:pPr>
+            <a:r>
+              <a:rPr sz="750" b="0" i="0">
+                <a:solidFill>
+                  <a:srgbClr val="12162E"/>
+                </a:solidFill>
+                <a:latin typeface="Consolas"/>
+              </a:rPr>
+              <a:t>[90] image 'Classifieds'</a:t>
+            </a:r>
+          </a:p>
+          <a:p>
+            <a:pPr algn="l">
+              <a:lnSpc>
+                <a:spcPct val="115000"/>
+              </a:lnSpc>
+              <a:spcAft>
+                <a:spcPts val="0"/>
+              </a:spcAft>
+            </a:pPr>
+            <a:r>
+              <a:rPr sz="750" b="0" i="0">
+                <a:solidFill>
+                  <a:srgbClr val="12162E"/>
+                </a:solidFill>
+                <a:latin typeface="Consolas"/>
+              </a:rPr>
+              <a:t>[115] link 'My account'</a:t>
+            </a:r>
+          </a:p>
+          <a:p>
+            <a:pPr algn="l">
+              <a:lnSpc>
+                <a:spcPct val="115000"/>
+              </a:lnSpc>
+              <a:spcAft>
+                <a:spcPts val="0"/>
+              </a:spcAft>
+            </a:pPr>
+            <a:r>
+              <a:rPr sz="750" b="0" i="0">
+                <a:solidFill>
+                  <a:srgbClr val="12162E"/>
+                </a:solidFill>
+                <a:latin typeface="Consolas"/>
+              </a:rPr>
+              <a:t>[5] link 'Logout'</a:t>
+            </a:r>
+          </a:p>
+          <a:p>
+            <a:pPr algn="l">
+              <a:lnSpc>
+                <a:spcPct val="115000"/>
+              </a:lnSpc>
+              <a:spcAft>
+                <a:spcPts val="0"/>
+              </a:spcAft>
+            </a:pPr>
+            <a:r>
+              <a:rPr sz="750" b="0" i="0">
+                <a:solidFill>
+                  <a:srgbClr val="12162E"/>
+                </a:solidFill>
+                <a:latin typeface="Consolas"/>
+              </a:rPr>
+              <a:t>[118] link 'Publish Ad'</a:t>
+            </a:r>
+          </a:p>
+        </p:txBody>
+      </p:sp>
+      <p:sp>
+        <p:nvSpPr>
+          <p:cNvPr id="114" name="Rectangle 113"/>
+          <p:cNvSpPr/>
+          <p:nvPr/>
+        </p:nvSpPr>
+        <p:spPr>
+          <a:xfrm>
+            <a:off x="8647200" y="9180000"/>
+            <a:ext cx="5400000" cy="1656000"/>
           </a:xfrm>
           <a:prstGeom prst="rect">
             <a:avLst/>
@@ -5315,14 +5676,14 @@
       </p:sp>
       <p:sp>
         <p:nvSpPr>
-          <p:cNvPr id="108" name="Rectangle 107"/>
+          <p:cNvPr id="115" name="Rectangle 114"/>
           <p:cNvSpPr/>
           <p:nvPr/>
         </p:nvSpPr>
         <p:spPr>
           <a:xfrm>
-            <a:off x="9151200" y="8532000"/>
-            <a:ext cx="4248000" cy="50400"/>
+            <a:off x="8647200" y="9180000"/>
+            <a:ext cx="5400000" cy="50400"/>
           </a:xfrm>
           <a:prstGeom prst="rect">
             <a:avLst/>
@@ -5359,13 +5720,13 @@
       </p:sp>
       <p:sp>
         <p:nvSpPr>
-          <p:cNvPr id="109" name="TextBox 108"/>
+          <p:cNvPr id="116" name="TextBox 115"/>
           <p:cNvSpPr txBox="1"/>
           <p:nvPr/>
         </p:nvSpPr>
         <p:spPr>
           <a:xfrm>
-            <a:off x="9331200" y="8694000"/>
+            <a:off x="8827200" y="9342000"/>
             <a:ext cx="1440000" cy="288000"/>
           </a:xfrm>
           <a:prstGeom prst="rect">
@@ -5401,56 +5762,14 @@
       </p:sp>
       <p:sp>
         <p:nvSpPr>
-          <p:cNvPr id="110" name="TextBox 109"/>
+          <p:cNvPr id="117" name="TextBox 116"/>
           <p:cNvSpPr txBox="1"/>
           <p:nvPr/>
         </p:nvSpPr>
         <p:spPr>
           <a:xfrm>
-            <a:off x="9331200" y="9036000"/>
-            <a:ext cx="3888000" cy="288000"/>
-          </a:xfrm>
-          <a:prstGeom prst="rect">
-            <a:avLst/>
-          </a:prstGeom>
-          <a:noFill/>
-        </p:spPr>
-        <p:txBody>
-          <a:bodyPr wrap="square" lIns="0" rIns="0" tIns="0" bIns="0">
-            <a:spAutoFit/>
-          </a:bodyPr>
-          <a:lstStyle/>
-          <a:p>
-            <a:pPr algn="l">
-              <a:lnSpc>
-                <a:spcPct val="120000"/>
-              </a:lnSpc>
-              <a:spcAft>
-                <a:spcPts val="0"/>
-              </a:spcAft>
-            </a:pPr>
-            <a:r>
-              <a:rPr sz="1764" b="1" i="0">
-                <a:solidFill>
-                  <a:srgbClr val="141E41"/>
-                </a:solidFill>
-                <a:latin typeface="Arial"/>
-              </a:rPr>
-              <a:t>marked screenshot + text</a:t>
-            </a:r>
-          </a:p>
-        </p:txBody>
-      </p:sp>
-      <p:sp>
-        <p:nvSpPr>
-          <p:cNvPr id="111" name="TextBox 110"/>
-          <p:cNvSpPr txBox="1"/>
-          <p:nvPr/>
-        </p:nvSpPr>
-        <p:spPr>
-          <a:xfrm>
-            <a:off x="9331200" y="9360000"/>
-            <a:ext cx="3888000" cy="396000"/>
+            <a:off x="8827200" y="9684000"/>
+            <a:ext cx="2520000" cy="504000"/>
           </a:xfrm>
           <a:prstGeom prst="rect">
             <a:avLst/>
@@ -5472,6 +5791,48 @@
               </a:spcAft>
             </a:pPr>
             <a:r>
+              <a:rPr sz="1271" b="1" i="0">
+                <a:solidFill>
+                  <a:srgbClr val="141E41"/>
+                </a:solidFill>
+                <a:latin typeface="Arial"/>
+              </a:rPr>
+              <a:t>the screenshot with numbered boxes, plus the text</a:t>
+            </a:r>
+          </a:p>
+        </p:txBody>
+      </p:sp>
+      <p:sp>
+        <p:nvSpPr>
+          <p:cNvPr id="118" name="TextBox 117"/>
+          <p:cNvSpPr txBox="1"/>
+          <p:nvPr/>
+        </p:nvSpPr>
+        <p:spPr>
+          <a:xfrm>
+            <a:off x="8827200" y="10224000"/>
+            <a:ext cx="2520000" cy="432000"/>
+          </a:xfrm>
+          <a:prstGeom prst="rect">
+            <a:avLst/>
+          </a:prstGeom>
+          <a:noFill/>
+        </p:spPr>
+        <p:txBody>
+          <a:bodyPr wrap="square" lIns="0" rIns="0" tIns="0" bIns="0">
+            <a:spAutoFit/>
+          </a:bodyPr>
+          <a:lstStyle/>
+          <a:p>
+            <a:pPr algn="l">
+              <a:lnSpc>
+                <a:spcPct val="132000"/>
+              </a:lnSpc>
+              <a:spcAft>
+                <a:spcPts val="0"/>
+              </a:spcAft>
+            </a:pPr>
+            <a:r>
               <a:rPr sz="1271" b="0" i="0">
                 <a:solidFill>
                   <a:srgbClr val="5D6787"/>
@@ -5485,14 +5846,82 @@
       </p:sp>
       <p:sp>
         <p:nvSpPr>
-          <p:cNvPr id="112" name="Rectangle 111"/>
+          <p:cNvPr id="119" name="Rectangle 118"/>
           <p:cNvSpPr/>
           <p:nvPr/>
         </p:nvSpPr>
         <p:spPr>
           <a:xfrm>
-            <a:off x="13903200" y="5580000"/>
-            <a:ext cx="3312000" cy="4248000"/>
+            <a:off x="11476800" y="9309600"/>
+            <a:ext cx="2404800" cy="1357875"/>
+          </a:xfrm>
+          <a:prstGeom prst="rect">
+            <a:avLst/>
+          </a:prstGeom>
+          <a:noFill/>
+          <a:ln w="8890">
+            <a:solidFill>
+              <a:srgbClr val="C9CFE0"/>
+            </a:solidFill>
+          </a:ln>
+          <a:effectLst/>
+        </p:spPr>
+        <p:style>
+          <a:lnRef idx="1">
+            <a:schemeClr val="accent1"/>
+          </a:lnRef>
+          <a:fillRef idx="3">
+            <a:schemeClr val="accent1"/>
+          </a:fillRef>
+          <a:effectRef idx="2">
+            <a:schemeClr val="accent1"/>
+          </a:effectRef>
+          <a:fontRef idx="minor">
+            <a:schemeClr val="lt1"/>
+          </a:fontRef>
+        </p:style>
+        <p:txBody>
+          <a:bodyPr rtlCol="0" anchor="ctr" wrap="square"/>
+          <a:lstStyle/>
+          <a:p>
+            <a:pPr algn="ctr"/>
+          </a:p>
+        </p:txBody>
+      </p:sp>
+      <p:pic>
+        <p:nvPicPr>
+          <p:cNvPr id="120" name="Picture 119" descr="eye_both.png"/>
+          <p:cNvPicPr>
+            <a:picLocks noChangeAspect="1"/>
+          </p:cNvPicPr>
+          <p:nvPr/>
+        </p:nvPicPr>
+        <p:blipFill>
+          <a:blip r:embed="rId6"/>
+          <a:stretch>
+            <a:fillRect/>
+          </a:stretch>
+        </p:blipFill>
+        <p:spPr>
+          <a:xfrm>
+            <a:off x="11491200" y="9324000"/>
+            <a:ext cx="2376000" cy="1329075"/>
+          </a:xfrm>
+          <a:prstGeom prst="rect">
+            <a:avLst/>
+          </a:prstGeom>
+        </p:spPr>
+      </p:pic>
+      <p:sp>
+        <p:nvSpPr>
+          <p:cNvPr id="121" name="Rectangle 120"/>
+          <p:cNvSpPr/>
+          <p:nvPr/>
+        </p:nvSpPr>
+        <p:spPr>
+          <a:xfrm>
+            <a:off x="14551200" y="5580000"/>
+            <a:ext cx="3168000" cy="5328000"/>
           </a:xfrm>
           <a:prstGeom prst="rect">
             <a:avLst/>
@@ -5531,14 +5960,14 @@
       </p:sp>
       <p:sp>
         <p:nvSpPr>
-          <p:cNvPr id="113" name="Rectangle 112"/>
+          <p:cNvPr id="122" name="Rectangle 121"/>
           <p:cNvSpPr/>
           <p:nvPr/>
         </p:nvSpPr>
         <p:spPr>
           <a:xfrm>
-            <a:off x="13903200" y="5580000"/>
-            <a:ext cx="3312000" cy="50400"/>
+            <a:off x="14551200" y="5580000"/>
+            <a:ext cx="3168000" cy="50400"/>
           </a:xfrm>
           <a:prstGeom prst="rect">
             <a:avLst/>
@@ -5575,14 +6004,14 @@
       </p:sp>
       <p:sp>
         <p:nvSpPr>
-          <p:cNvPr id="114" name="TextBox 113"/>
+          <p:cNvPr id="123" name="TextBox 122"/>
           <p:cNvSpPr txBox="1"/>
           <p:nvPr/>
         </p:nvSpPr>
         <p:spPr>
           <a:xfrm>
-            <a:off x="14083200" y="5724000"/>
-            <a:ext cx="2952000" cy="216000"/>
+            <a:off x="14731200" y="5724000"/>
+            <a:ext cx="2808000" cy="216000"/>
           </a:xfrm>
           <a:prstGeom prst="rect">
             <a:avLst/>
@@ -5610,21 +6039,21 @@
                 </a:solidFill>
                 <a:latin typeface="Consolas"/>
               </a:rPr>
-              <a:t>AGENT, ONE STEP AT A TIME</a:t>
-            </a:r>
-          </a:p>
-        </p:txBody>
-      </p:sp>
-      <p:sp>
-        <p:nvSpPr>
-          <p:cNvPr id="115" name="TextBox 114"/>
+              <a:t>THE AGENT, ONE STEP AT A TIME</a:t>
+            </a:r>
+          </a:p>
+        </p:txBody>
+      </p:sp>
+      <p:sp>
+        <p:nvSpPr>
+          <p:cNvPr id="124" name="TextBox 123"/>
           <p:cNvSpPr txBox="1"/>
           <p:nvPr/>
         </p:nvSpPr>
         <p:spPr>
           <a:xfrm>
-            <a:off x="14083200" y="5958000"/>
-            <a:ext cx="2952000" cy="322781"/>
+            <a:off x="14731200" y="5958000"/>
+            <a:ext cx="2808000" cy="322781"/>
           </a:xfrm>
           <a:prstGeom prst="rect">
             <a:avLst/>
@@ -5659,14 +6088,14 @@
       </p:sp>
       <p:sp>
         <p:nvSpPr>
-          <p:cNvPr id="116" name="TextBox 115"/>
+          <p:cNvPr id="125" name="TextBox 124"/>
           <p:cNvSpPr txBox="1"/>
           <p:nvPr/>
         </p:nvSpPr>
         <p:spPr>
           <a:xfrm>
-            <a:off x="14083200" y="6352781"/>
-            <a:ext cx="2952000" cy="565369"/>
+            <a:off x="14731200" y="6352781"/>
+            <a:ext cx="2808000" cy="255684"/>
           </a:xfrm>
           <a:prstGeom prst="rect">
             <a:avLst/>
@@ -5697,6 +6126,29 @@
               <a:t>click · type · scroll · go back · finish</a:t>
             </a:r>
           </a:p>
+        </p:txBody>
+      </p:sp>
+      <p:sp>
+        <p:nvSpPr>
+          <p:cNvPr id="126" name="TextBox 125"/>
+          <p:cNvSpPr txBox="1"/>
+          <p:nvPr/>
+        </p:nvSpPr>
+        <p:spPr>
+          <a:xfrm>
+            <a:off x="14731200" y="6752465"/>
+            <a:ext cx="2808000" cy="1022738"/>
+          </a:xfrm>
+          <a:prstGeom prst="rect">
+            <a:avLst/>
+          </a:prstGeom>
+          <a:noFill/>
+        </p:spPr>
+        <p:txBody>
+          <a:bodyPr wrap="square" lIns="0" rIns="0" tIns="0" bIns="0">
+            <a:spAutoFit/>
+          </a:bodyPr>
+          <a:lstStyle/>
           <a:p>
             <a:pPr algn="l">
               <a:lnSpc>
@@ -5709,67 +6161,25 @@
             <a:r>
               <a:rPr sz="1271" b="0" i="0">
                 <a:solidFill>
-                  <a:srgbClr val="5D6787"/>
+                  <a:srgbClr val="12162E"/>
                 </a:solidFill>
                 <a:latin typeface="Arial"/>
               </a:rPr>
-              <a:t>repeats until it finishes or hits 30 steps</a:t>
-            </a:r>
-          </a:p>
-        </p:txBody>
-      </p:sp>
-      <p:sp>
-        <p:nvSpPr>
-          <p:cNvPr id="117" name="TextBox 116"/>
-          <p:cNvSpPr txBox="1"/>
-          <p:nvPr/>
-        </p:nvSpPr>
-        <p:spPr>
-          <a:xfrm>
-            <a:off x="14083200" y="7026150"/>
-            <a:ext cx="2952000" cy="1022738"/>
-          </a:xfrm>
-          <a:prstGeom prst="rect">
-            <a:avLst/>
-          </a:prstGeom>
-          <a:noFill/>
-        </p:spPr>
-        <p:txBody>
-          <a:bodyPr wrap="square" lIns="0" rIns="0" tIns="0" bIns="0">
-            <a:spAutoFit/>
-          </a:bodyPr>
-          <a:lstStyle/>
-          <a:p>
-            <a:pPr algn="l">
-              <a:lnSpc>
-                <a:spcPct val="132000"/>
-              </a:lnSpc>
-              <a:spcAft>
-                <a:spcPts val="425"/>
-              </a:spcAft>
-            </a:pPr>
-            <a:r>
-              <a:rPr sz="1271" b="0" i="0">
-                <a:solidFill>
-                  <a:srgbClr val="12162E"/>
-                </a:solidFill>
-                <a:latin typeface="Arial"/>
-              </a:rPr>
-              <a:t>Same model, same prompt, same step budget and same cost accounting in every mode — only what it is shown changes.</a:t>
-            </a:r>
-          </a:p>
-        </p:txBody>
-      </p:sp>
-      <p:sp>
-        <p:nvSpPr>
-          <p:cNvPr id="118" name="Rectangle 117"/>
+              <a:t>Same model, same prompt, same step budget and same cost accounting whichever way it sees — only what it is shown changes.</a:t>
+            </a:r>
+          </a:p>
+        </p:txBody>
+      </p:sp>
+      <p:sp>
+        <p:nvSpPr>
+          <p:cNvPr id="127" name="Rectangle 126"/>
           <p:cNvSpPr/>
           <p:nvPr/>
         </p:nvSpPr>
         <p:spPr>
           <a:xfrm>
-            <a:off x="17719200" y="5580000"/>
-            <a:ext cx="3070800" cy="4248000"/>
+            <a:off x="18223200" y="5580000"/>
+            <a:ext cx="2566800" cy="5328000"/>
           </a:xfrm>
           <a:prstGeom prst="rect">
             <a:avLst/>
@@ -5808,14 +6218,14 @@
       </p:sp>
       <p:sp>
         <p:nvSpPr>
-          <p:cNvPr id="119" name="Rectangle 118"/>
+          <p:cNvPr id="128" name="Rectangle 127"/>
           <p:cNvSpPr/>
           <p:nvPr/>
         </p:nvSpPr>
         <p:spPr>
           <a:xfrm>
-            <a:off x="17719200" y="5580000"/>
-            <a:ext cx="3070800" cy="50400"/>
+            <a:off x="18223200" y="5580000"/>
+            <a:ext cx="2566800" cy="50400"/>
           </a:xfrm>
           <a:prstGeom prst="rect">
             <a:avLst/>
@@ -5852,14 +6262,14 @@
       </p:sp>
       <p:sp>
         <p:nvSpPr>
-          <p:cNvPr id="120" name="TextBox 119"/>
+          <p:cNvPr id="129" name="TextBox 128"/>
           <p:cNvSpPr txBox="1"/>
           <p:nvPr/>
         </p:nvSpPr>
         <p:spPr>
           <a:xfrm>
-            <a:off x="17899200" y="5724000"/>
-            <a:ext cx="2710800" cy="216000"/>
+            <a:off x="18403200" y="5724000"/>
+            <a:ext cx="2206800" cy="216000"/>
           </a:xfrm>
           <a:prstGeom prst="rect">
             <a:avLst/>
@@ -5887,21 +6297,21 @@
                 </a:solidFill>
                 <a:latin typeface="Consolas"/>
               </a:rPr>
-              <a:t>MEASURED</a:t>
-            </a:r>
-          </a:p>
-        </p:txBody>
-      </p:sp>
-      <p:sp>
-        <p:nvSpPr>
-          <p:cNvPr id="121" name="TextBox 120"/>
+              <a:t>WHEN IT STOPS</a:t>
+            </a:r>
+          </a:p>
+        </p:txBody>
+      </p:sp>
+      <p:sp>
+        <p:nvSpPr>
+          <p:cNvPr id="130" name="TextBox 129"/>
           <p:cNvSpPr txBox="1"/>
           <p:nvPr/>
         </p:nvSpPr>
         <p:spPr>
           <a:xfrm>
-            <a:off x="17899200" y="5958000"/>
-            <a:ext cx="2710800" cy="771563"/>
+            <a:off x="18403200" y="5958000"/>
+            <a:ext cx="2206800" cy="1094345"/>
           </a:xfrm>
           <a:prstGeom prst="rect">
             <a:avLst/>
@@ -5929,7 +6339,7 @@
                 </a:solidFill>
                 <a:latin typeface="Arial"/>
               </a:rPr>
-              <a:t>✓ / ✗ per task</a:t>
+              <a:t>✓ solved / ✗ not</a:t>
             </a:r>
           </a:p>
           <a:p>
@@ -5948,21 +6358,21 @@
                 </a:solidFill>
                 <a:latin typeface="Arial"/>
               </a:rPr>
-              <a:t>$ billed per episode</a:t>
-            </a:r>
-          </a:p>
-        </p:txBody>
-      </p:sp>
-      <p:sp>
-        <p:nvSpPr>
-          <p:cNvPr id="122" name="TextBox 121"/>
+              <a:t>$ for the whole attempt</a:t>
+            </a:r>
+          </a:p>
+        </p:txBody>
+      </p:sp>
+      <p:sp>
+        <p:nvSpPr>
+          <p:cNvPr id="131" name="TextBox 130"/>
           <p:cNvSpPr txBox="1"/>
           <p:nvPr/>
         </p:nvSpPr>
         <p:spPr>
           <a:xfrm>
-            <a:off x="17899200" y="6837563"/>
-            <a:ext cx="2710800" cy="767053"/>
+            <a:off x="18403200" y="7160345"/>
+            <a:ext cx="2206800" cy="1022738"/>
           </a:xfrm>
           <a:prstGeom prst="rect">
             <a:avLst/>
@@ -5990,20 +6400,238 @@
                 </a:solidFill>
                 <a:latin typeface="Arial"/>
               </a:rPr>
-              <a:t>8 website–model settings · two benchmarks · 6 modes · 8,934 episodes</a:t>
-            </a:r>
-          </a:p>
-        </p:txBody>
-      </p:sp>
-      <p:sp>
-        <p:nvSpPr>
-          <p:cNvPr id="123" name="TextBox 122"/>
+              <a:t>8 website × model combinations · two public benchmarks · 6 ways of seeing · 8,934 task attempts</a:t>
+            </a:r>
+          </a:p>
+        </p:txBody>
+      </p:sp>
+      <p:sp>
+        <p:nvSpPr>
+          <p:cNvPr id="132" name="Rectangle 131"/>
+          <p:cNvSpPr/>
+          <p:nvPr/>
+        </p:nvSpPr>
+        <p:spPr>
+          <a:xfrm>
+            <a:off x="16113600" y="10908000"/>
+            <a:ext cx="43200" cy="432000"/>
+          </a:xfrm>
+          <a:prstGeom prst="rect">
+            <a:avLst/>
+          </a:prstGeom>
+          <a:solidFill>
+            <a:srgbClr val="C9CFE0"/>
+          </a:solidFill>
+          <a:ln>
+            <a:noFill/>
+          </a:ln>
+          <a:effectLst/>
+        </p:spPr>
+        <p:style>
+          <a:lnRef idx="1">
+            <a:schemeClr val="accent1"/>
+          </a:lnRef>
+          <a:fillRef idx="3">
+            <a:schemeClr val="accent1"/>
+          </a:fillRef>
+          <a:effectRef idx="2">
+            <a:schemeClr val="accent1"/>
+          </a:effectRef>
+          <a:fontRef idx="minor">
+            <a:schemeClr val="lt1"/>
+          </a:fontRef>
+        </p:style>
+        <p:txBody>
+          <a:bodyPr rtlCol="0" anchor="ctr" wrap="square"/>
+          <a:lstStyle/>
+          <a:p>
+            <a:pPr algn="ctr"/>
+          </a:p>
+        </p:txBody>
+      </p:sp>
+      <p:sp>
+        <p:nvSpPr>
+          <p:cNvPr id="133" name="Rectangle 132"/>
+          <p:cNvSpPr/>
+          <p:nvPr/>
+        </p:nvSpPr>
+        <p:spPr>
+          <a:xfrm>
+            <a:off x="2239200" y="11318400"/>
+            <a:ext cx="13896000" cy="43200"/>
+          </a:xfrm>
+          <a:prstGeom prst="rect">
+            <a:avLst/>
+          </a:prstGeom>
+          <a:solidFill>
+            <a:srgbClr val="C9CFE0"/>
+          </a:solidFill>
+          <a:ln>
+            <a:noFill/>
+          </a:ln>
+          <a:effectLst/>
+        </p:spPr>
+        <p:style>
+          <a:lnRef idx="1">
+            <a:schemeClr val="accent1"/>
+          </a:lnRef>
+          <a:fillRef idx="3">
+            <a:schemeClr val="accent1"/>
+          </a:fillRef>
+          <a:effectRef idx="2">
+            <a:schemeClr val="accent1"/>
+          </a:effectRef>
+          <a:fontRef idx="minor">
+            <a:schemeClr val="lt1"/>
+          </a:fontRef>
+        </p:style>
+        <p:txBody>
+          <a:bodyPr rtlCol="0" anchor="ctr" wrap="square"/>
+          <a:lstStyle/>
+          <a:p>
+            <a:pPr algn="ctr"/>
+          </a:p>
+        </p:txBody>
+      </p:sp>
+      <p:sp>
+        <p:nvSpPr>
+          <p:cNvPr id="134" name="Rectangle 133"/>
+          <p:cNvSpPr/>
+          <p:nvPr/>
+        </p:nvSpPr>
+        <p:spPr>
+          <a:xfrm>
+            <a:off x="2217600" y="11052000"/>
+            <a:ext cx="43200" cy="288000"/>
+          </a:xfrm>
+          <a:prstGeom prst="rect">
+            <a:avLst/>
+          </a:prstGeom>
+          <a:solidFill>
+            <a:srgbClr val="C9CFE0"/>
+          </a:solidFill>
+          <a:ln>
+            <a:noFill/>
+          </a:ln>
+          <a:effectLst/>
+        </p:spPr>
+        <p:style>
+          <a:lnRef idx="1">
+            <a:schemeClr val="accent1"/>
+          </a:lnRef>
+          <a:fillRef idx="3">
+            <a:schemeClr val="accent1"/>
+          </a:fillRef>
+          <a:effectRef idx="2">
+            <a:schemeClr val="accent1"/>
+          </a:effectRef>
+          <a:fontRef idx="minor">
+            <a:schemeClr val="lt1"/>
+          </a:fontRef>
+        </p:style>
+        <p:txBody>
+          <a:bodyPr rtlCol="0" anchor="ctr" wrap="square"/>
+          <a:lstStyle/>
+          <a:p>
+            <a:pPr algn="ctr"/>
+          </a:p>
+        </p:txBody>
+      </p:sp>
+      <p:sp>
+        <p:nvSpPr>
+          <p:cNvPr id="135" name="Isosceles Triangle 134"/>
+          <p:cNvSpPr/>
+          <p:nvPr/>
+        </p:nvSpPr>
+        <p:spPr>
+          <a:xfrm>
+            <a:off x="2131200" y="10908000"/>
+            <a:ext cx="216000" cy="162000"/>
+          </a:xfrm>
+          <a:prstGeom prst="triangle">
+            <a:avLst/>
+          </a:prstGeom>
+          <a:solidFill>
+            <a:srgbClr val="C9CFE0"/>
+          </a:solidFill>
+          <a:ln>
+            <a:noFill/>
+          </a:ln>
+          <a:effectLst/>
+        </p:spPr>
+        <p:style>
+          <a:lnRef idx="1">
+            <a:schemeClr val="accent1"/>
+          </a:lnRef>
+          <a:fillRef idx="3">
+            <a:schemeClr val="accent1"/>
+          </a:fillRef>
+          <a:effectRef idx="2">
+            <a:schemeClr val="accent1"/>
+          </a:effectRef>
+          <a:fontRef idx="minor">
+            <a:schemeClr val="lt1"/>
+          </a:fontRef>
+        </p:style>
+        <p:txBody>
+          <a:bodyPr rtlCol="0" anchor="ctr"/>
+          <a:lstStyle/>
+          <a:p>
+            <a:pPr algn="ctr"/>
+          </a:p>
+        </p:txBody>
+      </p:sp>
+      <p:sp>
+        <p:nvSpPr>
+          <p:cNvPr id="136" name="TextBox 135"/>
           <p:cNvSpPr txBox="1"/>
           <p:nvPr/>
         </p:nvSpPr>
         <p:spPr>
           <a:xfrm>
-            <a:off x="727200" y="9936000"/>
+            <a:off x="2599200" y="11412000"/>
+            <a:ext cx="13176000" cy="252000"/>
+          </a:xfrm>
+          <a:prstGeom prst="rect">
+            <a:avLst/>
+          </a:prstGeom>
+          <a:noFill/>
+        </p:spPr>
+        <p:txBody>
+          <a:bodyPr wrap="square" lIns="0" rIns="0" tIns="0" bIns="0">
+            <a:spAutoFit/>
+          </a:bodyPr>
+          <a:lstStyle/>
+          <a:p>
+            <a:pPr algn="ctr">
+              <a:lnSpc>
+                <a:spcPct val="120000"/>
+              </a:lnSpc>
+              <a:spcAft>
+                <a:spcPts val="0"/>
+              </a:spcAft>
+            </a:pPr>
+            <a:r>
+              <a:rPr sz="1271" b="0" i="0">
+                <a:solidFill>
+                  <a:srgbClr val="5D6787"/>
+                </a:solidFill>
+                <a:latin typeface="Arial"/>
+              </a:rPr>
+              <a:t>the action changes the page → next step · up to 30 steps per task · the bill grows with every step</a:t>
+            </a:r>
+          </a:p>
+        </p:txBody>
+      </p:sp>
+      <p:sp>
+        <p:nvSpPr>
+          <p:cNvPr id="137" name="TextBox 136"/>
+          <p:cNvSpPr txBox="1"/>
+          <p:nvPr/>
+        </p:nvSpPr>
+        <p:spPr>
+          <a:xfrm>
+            <a:off x="727200" y="11736000"/>
             <a:ext cx="20062800" cy="511369"/>
           </a:xfrm>
           <a:prstGeom prst="rect">
@@ -6041,7 +6669,7 @@
                 </a:solidFill>
                 <a:latin typeface="Arial"/>
               </a:rPr>
-              <a:t> Everything is held fixed except how the page is shown. The dashed box is what this work measures: a fixed choice, the best choice in hindsight, and a choice a router has to learn — each judged on </a:t>
+              <a:t> Everything is held fixed except how the page is shown to the agent. The dashed box is what this work measures — one fixed way of seeing, the best way in hindsight, or a way a model had to learn to choose — each judged on </a:t>
             </a:r>
             <a:r>
               <a:rPr sz="1271" b="1" i="0">
@@ -6059,7 +6687,7 @@
                 </a:solidFill>
                 <a:latin typeface="Arial"/>
               </a:rPr>
-              <a:t> success and cost. The laptop beside this poster replays the three eyes on the three tasks below.</a:t>
+              <a:t> success and cost. The laptop beside this poster replays the loop on the three tasks below.</a:t>
             </a:r>
           </a:p>
         </p:txBody>
@@ -6072,7 +6700,7 @@
         </p:nvSpPr>
         <p:spPr>
           <a:xfrm>
-            <a:off x="727200" y="10800000"/>
+            <a:off x="727200" y="12672000"/>
             <a:ext cx="177988" cy="177988"/>
           </a:xfrm>
           <a:prstGeom prst="rect">
@@ -6117,7 +6745,7 @@
         </p:nvSpPr>
         <p:spPr>
           <a:xfrm>
-            <a:off x="1032323" y="10756800"/>
+            <a:off x="1032323" y="12628800"/>
             <a:ext cx="6144827" cy="238912"/>
           </a:xfrm>
           <a:prstGeom prst="rect">
@@ -6143,7 +6771,7 @@
                 </a:solidFill>
                 <a:latin typeface="Consolas"/>
               </a:rPr>
-              <a:t>ON THE SCREEN BESIDE YOU</a:t>
+              <a:t>WHAT THE SCREEN BESIDE YOU SHOWS</a:t>
             </a:r>
             <a:endParaRPr sz="1412" b="1" spc="180" dirty="0">
               <a:solidFill>
@@ -6162,7 +6790,7 @@
         </p:nvSpPr>
         <p:spPr>
           <a:xfrm>
-            <a:off x="727200" y="11117836"/>
+            <a:off x="727200" y="12989836"/>
             <a:ext cx="1169636" cy="35597"/>
           </a:xfrm>
           <a:prstGeom prst="rect">
@@ -6207,7 +6835,7 @@
         </p:nvSpPr>
         <p:spPr>
           <a:xfrm>
-            <a:off x="1896836" y="11128007"/>
+            <a:off x="1896836" y="13000007"/>
             <a:ext cx="5281564" cy="15256"/>
           </a:xfrm>
           <a:prstGeom prst="rect">
@@ -6246,14 +6874,1444 @@
       </p:sp>
       <p:sp>
         <p:nvSpPr>
-          <p:cNvPr id="124" name="TextBox 123"/>
+          <p:cNvPr id="138" name="TextBox 137"/>
           <p:cNvSpPr txBox="1"/>
           <p:nvPr/>
         </p:nvSpPr>
         <p:spPr>
           <a:xfrm>
-            <a:off x="727200" y="11340000"/>
-            <a:ext cx="6451200" cy="645563"/>
+            <a:off x="2923200" y="13212000"/>
+            <a:ext cx="1418400" cy="216000"/>
+          </a:xfrm>
+          <a:prstGeom prst="rect">
+            <a:avLst/>
+          </a:prstGeom>
+          <a:noFill/>
+        </p:spPr>
+        <p:txBody>
+          <a:bodyPr wrap="square" lIns="0" rIns="0" tIns="0" bIns="0">
+            <a:spAutoFit/>
+          </a:bodyPr>
+          <a:lstStyle/>
+          <a:p>
+            <a:pPr algn="l">
+              <a:lnSpc>
+                <a:spcPct val="120000"/>
+              </a:lnSpc>
+              <a:spcAft>
+                <a:spcPts val="0"/>
+              </a:spcAft>
+            </a:pPr>
+            <a:r>
+              <a:rPr sz="1059" b="1" i="0">
+                <a:solidFill>
+                  <a:srgbClr val="1F5FD6"/>
+                </a:solidFill>
+                <a:latin typeface="Consolas"/>
+              </a:rPr>
+              <a:t>LOOK</a:t>
+            </a:r>
+          </a:p>
+        </p:txBody>
+      </p:sp>
+      <p:sp>
+        <p:nvSpPr>
+          <p:cNvPr id="139" name="TextBox 138"/>
+          <p:cNvSpPr txBox="1"/>
+          <p:nvPr/>
+        </p:nvSpPr>
+        <p:spPr>
+          <a:xfrm>
+            <a:off x="4341600" y="13212000"/>
+            <a:ext cx="1418400" cy="216000"/>
+          </a:xfrm>
+          <a:prstGeom prst="rect">
+            <a:avLst/>
+          </a:prstGeom>
+          <a:noFill/>
+        </p:spPr>
+        <p:txBody>
+          <a:bodyPr wrap="square" lIns="0" rIns="0" tIns="0" bIns="0">
+            <a:spAutoFit/>
+          </a:bodyPr>
+          <a:lstStyle/>
+          <a:p>
+            <a:pPr algn="l">
+              <a:lnSpc>
+                <a:spcPct val="120000"/>
+              </a:lnSpc>
+              <a:spcAft>
+                <a:spcPts val="0"/>
+              </a:spcAft>
+            </a:pPr>
+            <a:r>
+              <a:rPr sz="1059" b="1" i="0">
+                <a:solidFill>
+                  <a:srgbClr val="E8720C"/>
+                </a:solidFill>
+                <a:latin typeface="Consolas"/>
+              </a:rPr>
+              <a:t>READ</a:t>
+            </a:r>
+          </a:p>
+        </p:txBody>
+      </p:sp>
+      <p:sp>
+        <p:nvSpPr>
+          <p:cNvPr id="140" name="TextBox 139"/>
+          <p:cNvSpPr txBox="1"/>
+          <p:nvPr/>
+        </p:nvSpPr>
+        <p:spPr>
+          <a:xfrm>
+            <a:off x="5760000" y="13212000"/>
+            <a:ext cx="1418400" cy="216000"/>
+          </a:xfrm>
+          <a:prstGeom prst="rect">
+            <a:avLst/>
+          </a:prstGeom>
+          <a:noFill/>
+        </p:spPr>
+        <p:txBody>
+          <a:bodyPr wrap="square" lIns="0" rIns="0" tIns="0" bIns="0">
+            <a:spAutoFit/>
+          </a:bodyPr>
+          <a:lstStyle/>
+          <a:p>
+            <a:pPr algn="l">
+              <a:lnSpc>
+                <a:spcPct val="120000"/>
+              </a:lnSpc>
+              <a:spcAft>
+                <a:spcPts val="0"/>
+              </a:spcAft>
+            </a:pPr>
+            <a:r>
+              <a:rPr sz="1059" b="1" i="0">
+                <a:solidFill>
+                  <a:srgbClr val="14855F"/>
+                </a:solidFill>
+                <a:latin typeface="Consolas"/>
+              </a:rPr>
+              <a:t>BOTH</a:t>
+            </a:r>
+          </a:p>
+        </p:txBody>
+      </p:sp>
+      <p:sp>
+        <p:nvSpPr>
+          <p:cNvPr id="141" name="Rectangle 140"/>
+          <p:cNvSpPr/>
+          <p:nvPr/>
+        </p:nvSpPr>
+        <p:spPr>
+          <a:xfrm>
+            <a:off x="727200" y="13464000"/>
+            <a:ext cx="6451200" cy="10800"/>
+          </a:xfrm>
+          <a:prstGeom prst="rect">
+            <a:avLst/>
+          </a:prstGeom>
+          <a:solidFill>
+            <a:srgbClr val="DDE3F2"/>
+          </a:solidFill>
+          <a:ln>
+            <a:noFill/>
+          </a:ln>
+          <a:effectLst/>
+        </p:spPr>
+        <p:style>
+          <a:lnRef idx="1">
+            <a:schemeClr val="accent1"/>
+          </a:lnRef>
+          <a:fillRef idx="3">
+            <a:schemeClr val="accent1"/>
+          </a:fillRef>
+          <a:effectRef idx="2">
+            <a:schemeClr val="accent1"/>
+          </a:effectRef>
+          <a:fontRef idx="minor">
+            <a:schemeClr val="lt1"/>
+          </a:fontRef>
+        </p:style>
+        <p:txBody>
+          <a:bodyPr rtlCol="0" anchor="ctr" wrap="square"/>
+          <a:lstStyle/>
+          <a:p>
+            <a:pPr algn="ctr"/>
+          </a:p>
+        </p:txBody>
+      </p:sp>
+      <p:sp>
+        <p:nvSpPr>
+          <p:cNvPr id="142" name="Rectangle 141"/>
+          <p:cNvSpPr/>
+          <p:nvPr/>
+        </p:nvSpPr>
+        <p:spPr>
+          <a:xfrm>
+            <a:off x="712800" y="13557600"/>
+            <a:ext cx="2044800" cy="973800"/>
+          </a:xfrm>
+          <a:prstGeom prst="rect">
+            <a:avLst/>
+          </a:prstGeom>
+          <a:noFill/>
+          <a:ln w="8890">
+            <a:solidFill>
+              <a:srgbClr val="C9CFE0"/>
+            </a:solidFill>
+          </a:ln>
+          <a:effectLst/>
+        </p:spPr>
+        <p:style>
+          <a:lnRef idx="1">
+            <a:schemeClr val="accent1"/>
+          </a:lnRef>
+          <a:fillRef idx="3">
+            <a:schemeClr val="accent1"/>
+          </a:fillRef>
+          <a:effectRef idx="2">
+            <a:schemeClr val="accent1"/>
+          </a:effectRef>
+          <a:fontRef idx="minor">
+            <a:schemeClr val="lt1"/>
+          </a:fontRef>
+        </p:style>
+        <p:txBody>
+          <a:bodyPr rtlCol="0" anchor="ctr" wrap="square"/>
+          <a:lstStyle/>
+          <a:p>
+            <a:pPr algn="ctr"/>
+          </a:p>
+        </p:txBody>
+      </p:sp>
+      <p:pic>
+        <p:nvPicPr>
+          <p:cNvPr id="143" name="Picture 142" descr="thumb_130.png"/>
+          <p:cNvPicPr>
+            <a:picLocks noChangeAspect="1"/>
+          </p:cNvPicPr>
+          <p:nvPr/>
+        </p:nvPicPr>
+        <p:blipFill>
+          <a:blip r:embed="rId7"/>
+          <a:stretch>
+            <a:fillRect/>
+          </a:stretch>
+        </p:blipFill>
+        <p:spPr>
+          <a:xfrm>
+            <a:off x="727200" y="13572000"/>
+            <a:ext cx="2016000" cy="945000"/>
+          </a:xfrm>
+          <a:prstGeom prst="rect">
+            <a:avLst/>
+          </a:prstGeom>
+        </p:spPr>
+      </p:pic>
+      <p:sp>
+        <p:nvSpPr>
+          <p:cNvPr id="144" name="TextBox 143"/>
+          <p:cNvSpPr txBox="1"/>
+          <p:nvPr/>
+        </p:nvSpPr>
+        <p:spPr>
+          <a:xfrm>
+            <a:off x="2923200" y="13572000"/>
+            <a:ext cx="4255200" cy="511369"/>
+          </a:xfrm>
+          <a:prstGeom prst="rect">
+            <a:avLst/>
+          </a:prstGeom>
+          <a:noFill/>
+        </p:spPr>
+        <p:txBody>
+          <a:bodyPr wrap="square" lIns="0" rIns="0" tIns="0" bIns="0">
+            <a:spAutoFit/>
+          </a:bodyPr>
+          <a:lstStyle/>
+          <a:p>
+            <a:pPr algn="l">
+              <a:lnSpc>
+                <a:spcPct val="132000"/>
+              </a:lnSpc>
+              <a:spcAft>
+                <a:spcPts val="0"/>
+              </a:spcAft>
+            </a:pPr>
+            <a:r>
+              <a:rPr sz="1271" b="1" i="0">
+                <a:solidFill>
+                  <a:srgbClr val="12162E"/>
+                </a:solidFill>
+                <a:latin typeface="Arial"/>
+              </a:rPr>
+              <a:t>“Navigate to the item on this page whose image is taken during a sunset.”</a:t>
+            </a:r>
+          </a:p>
+        </p:txBody>
+      </p:sp>
+      <p:sp>
+        <p:nvSpPr>
+          <p:cNvPr id="145" name="TextBox 144"/>
+          <p:cNvSpPr txBox="1"/>
+          <p:nvPr/>
+        </p:nvSpPr>
+        <p:spPr>
+          <a:xfrm>
+            <a:off x="2923200" y="14155369"/>
+            <a:ext cx="1418400" cy="504000"/>
+          </a:xfrm>
+          <a:prstGeom prst="rect">
+            <a:avLst/>
+          </a:prstGeom>
+          <a:noFill/>
+        </p:spPr>
+        <p:txBody>
+          <a:bodyPr wrap="square" lIns="0" rIns="0" tIns="0" bIns="0">
+            <a:spAutoFit/>
+          </a:bodyPr>
+          <a:lstStyle/>
+          <a:p>
+            <a:pPr>
+              <a:lnSpc>
+                <a:spcPct val="115000"/>
+              </a:lnSpc>
+            </a:pPr>
+            <a:r>
+              <a:rPr sz="1500" b="1" i="0">
+                <a:solidFill>
+                  <a:srgbClr val="14855F"/>
+                </a:solidFill>
+                <a:latin typeface="Consolas"/>
+              </a:rPr>
+              <a:t>✓ </a:t>
+            </a:r>
+            <a:r>
+              <a:rPr sz="1271" b="0" i="0">
+                <a:solidFill>
+                  <a:srgbClr val="12162E"/>
+                </a:solidFill>
+                <a:latin typeface="Arial"/>
+              </a:rPr>
+              <a:t>2 steps</a:t>
+            </a:r>
+          </a:p>
+          <a:p>
+            <a:pPr>
+              <a:lnSpc>
+                <a:spcPct val="115000"/>
+              </a:lnSpc>
+            </a:pPr>
+            <a:r>
+              <a:rPr sz="1271" b="1" i="0">
+                <a:solidFill>
+                  <a:srgbClr val="12162E"/>
+                </a:solidFill>
+                <a:latin typeface="Arial"/>
+              </a:rPr>
+              <a:t>$0.007</a:t>
+            </a:r>
+          </a:p>
+        </p:txBody>
+      </p:sp>
+      <p:sp>
+        <p:nvSpPr>
+          <p:cNvPr id="146" name="TextBox 145"/>
+          <p:cNvSpPr txBox="1"/>
+          <p:nvPr/>
+        </p:nvSpPr>
+        <p:spPr>
+          <a:xfrm>
+            <a:off x="4341600" y="14155369"/>
+            <a:ext cx="1418400" cy="504000"/>
+          </a:xfrm>
+          <a:prstGeom prst="rect">
+            <a:avLst/>
+          </a:prstGeom>
+          <a:noFill/>
+        </p:spPr>
+        <p:txBody>
+          <a:bodyPr wrap="square" lIns="0" rIns="0" tIns="0" bIns="0">
+            <a:spAutoFit/>
+          </a:bodyPr>
+          <a:lstStyle/>
+          <a:p>
+            <a:pPr>
+              <a:lnSpc>
+                <a:spcPct val="115000"/>
+              </a:lnSpc>
+            </a:pPr>
+            <a:r>
+              <a:rPr sz="1500" b="1" i="0">
+                <a:solidFill>
+                  <a:srgbClr val="C2352B"/>
+                </a:solidFill>
+                <a:latin typeface="Consolas"/>
+              </a:rPr>
+              <a:t>✗ </a:t>
+            </a:r>
+            <a:r>
+              <a:rPr sz="1271" b="0" i="0">
+                <a:solidFill>
+                  <a:srgbClr val="12162E"/>
+                </a:solidFill>
+                <a:latin typeface="Arial"/>
+              </a:rPr>
+              <a:t>21 steps</a:t>
+            </a:r>
+          </a:p>
+          <a:p>
+            <a:pPr>
+              <a:lnSpc>
+                <a:spcPct val="115000"/>
+              </a:lnSpc>
+            </a:pPr>
+            <a:r>
+              <a:rPr sz="1271" b="1" i="0">
+                <a:solidFill>
+                  <a:srgbClr val="12162E"/>
+                </a:solidFill>
+                <a:latin typeface="Arial"/>
+              </a:rPr>
+              <a:t>$0.096</a:t>
+            </a:r>
+          </a:p>
+        </p:txBody>
+      </p:sp>
+      <p:sp>
+        <p:nvSpPr>
+          <p:cNvPr id="147" name="TextBox 146"/>
+          <p:cNvSpPr txBox="1"/>
+          <p:nvPr/>
+        </p:nvSpPr>
+        <p:spPr>
+          <a:xfrm>
+            <a:off x="5760000" y="14155369"/>
+            <a:ext cx="1418400" cy="504000"/>
+          </a:xfrm>
+          <a:prstGeom prst="rect">
+            <a:avLst/>
+          </a:prstGeom>
+          <a:noFill/>
+        </p:spPr>
+        <p:txBody>
+          <a:bodyPr wrap="square" lIns="0" rIns="0" tIns="0" bIns="0">
+            <a:spAutoFit/>
+          </a:bodyPr>
+          <a:lstStyle/>
+          <a:p>
+            <a:pPr>
+              <a:lnSpc>
+                <a:spcPct val="115000"/>
+              </a:lnSpc>
+            </a:pPr>
+            <a:r>
+              <a:rPr sz="1500" b="1" i="0">
+                <a:solidFill>
+                  <a:srgbClr val="14855F"/>
+                </a:solidFill>
+                <a:latin typeface="Consolas"/>
+              </a:rPr>
+              <a:t>✓ </a:t>
+            </a:r>
+            <a:r>
+              <a:rPr sz="1271" b="0" i="0">
+                <a:solidFill>
+                  <a:srgbClr val="12162E"/>
+                </a:solidFill>
+                <a:latin typeface="Arial"/>
+              </a:rPr>
+              <a:t>3 steps</a:t>
+            </a:r>
+          </a:p>
+          <a:p>
+            <a:pPr>
+              <a:lnSpc>
+                <a:spcPct val="115000"/>
+              </a:lnSpc>
+            </a:pPr>
+            <a:r>
+              <a:rPr sz="1271" b="1" i="0">
+                <a:solidFill>
+                  <a:srgbClr val="12162E"/>
+                </a:solidFill>
+                <a:latin typeface="Arial"/>
+              </a:rPr>
+              <a:t>$0.014</a:t>
+            </a:r>
+          </a:p>
+        </p:txBody>
+      </p:sp>
+      <p:sp>
+        <p:nvSpPr>
+          <p:cNvPr id="148" name="Rectangle 147"/>
+          <p:cNvSpPr/>
+          <p:nvPr/>
+        </p:nvSpPr>
+        <p:spPr>
+          <a:xfrm>
+            <a:off x="727200" y="14731369"/>
+            <a:ext cx="6451200" cy="10800"/>
+          </a:xfrm>
+          <a:prstGeom prst="rect">
+            <a:avLst/>
+          </a:prstGeom>
+          <a:solidFill>
+            <a:srgbClr val="DDE3F2"/>
+          </a:solidFill>
+          <a:ln>
+            <a:noFill/>
+          </a:ln>
+          <a:effectLst/>
+        </p:spPr>
+        <p:style>
+          <a:lnRef idx="1">
+            <a:schemeClr val="accent1"/>
+          </a:lnRef>
+          <a:fillRef idx="3">
+            <a:schemeClr val="accent1"/>
+          </a:fillRef>
+          <a:effectRef idx="2">
+            <a:schemeClr val="accent1"/>
+          </a:effectRef>
+          <a:fontRef idx="minor">
+            <a:schemeClr val="lt1"/>
+          </a:fontRef>
+        </p:style>
+        <p:txBody>
+          <a:bodyPr rtlCol="0" anchor="ctr" wrap="square"/>
+          <a:lstStyle/>
+          <a:p>
+            <a:pPr algn="ctr"/>
+          </a:p>
+        </p:txBody>
+      </p:sp>
+      <p:sp>
+        <p:nvSpPr>
+          <p:cNvPr id="149" name="Rectangle 148"/>
+          <p:cNvSpPr/>
+          <p:nvPr/>
+        </p:nvSpPr>
+        <p:spPr>
+          <a:xfrm>
+            <a:off x="712800" y="14788969"/>
+            <a:ext cx="2044800" cy="973800"/>
+          </a:xfrm>
+          <a:prstGeom prst="rect">
+            <a:avLst/>
+          </a:prstGeom>
+          <a:noFill/>
+          <a:ln w="8890">
+            <a:solidFill>
+              <a:srgbClr val="C9CFE0"/>
+            </a:solidFill>
+          </a:ln>
+          <a:effectLst/>
+        </p:spPr>
+        <p:style>
+          <a:lnRef idx="1">
+            <a:schemeClr val="accent1"/>
+          </a:lnRef>
+          <a:fillRef idx="3">
+            <a:schemeClr val="accent1"/>
+          </a:fillRef>
+          <a:effectRef idx="2">
+            <a:schemeClr val="accent1"/>
+          </a:effectRef>
+          <a:fontRef idx="minor">
+            <a:schemeClr val="lt1"/>
+          </a:fontRef>
+        </p:style>
+        <p:txBody>
+          <a:bodyPr rtlCol="0" anchor="ctr" wrap="square"/>
+          <a:lstStyle/>
+          <a:p>
+            <a:pPr algn="ctr"/>
+          </a:p>
+        </p:txBody>
+      </p:sp>
+      <p:pic>
+        <p:nvPicPr>
+          <p:cNvPr id="150" name="Picture 149" descr="thumb_76.png"/>
+          <p:cNvPicPr>
+            <a:picLocks noChangeAspect="1"/>
+          </p:cNvPicPr>
+          <p:nvPr/>
+        </p:nvPicPr>
+        <p:blipFill>
+          <a:blip r:embed="rId8"/>
+          <a:stretch>
+            <a:fillRect/>
+          </a:stretch>
+        </p:blipFill>
+        <p:spPr>
+          <a:xfrm>
+            <a:off x="727200" y="14803369"/>
+            <a:ext cx="2016000" cy="945000"/>
+          </a:xfrm>
+          <a:prstGeom prst="rect">
+            <a:avLst/>
+          </a:prstGeom>
+        </p:spPr>
+      </p:pic>
+      <p:sp>
+        <p:nvSpPr>
+          <p:cNvPr id="151" name="TextBox 150"/>
+          <p:cNvSpPr txBox="1"/>
+          <p:nvPr/>
+        </p:nvSpPr>
+        <p:spPr>
+          <a:xfrm>
+            <a:off x="2923200" y="14803369"/>
+            <a:ext cx="4255200" cy="511369"/>
+          </a:xfrm>
+          <a:prstGeom prst="rect">
+            <a:avLst/>
+          </a:prstGeom>
+          <a:noFill/>
+        </p:spPr>
+        <p:txBody>
+          <a:bodyPr wrap="square" lIns="0" rIns="0" tIns="0" bIns="0">
+            <a:spAutoFit/>
+          </a:bodyPr>
+          <a:lstStyle/>
+          <a:p>
+            <a:pPr algn="l">
+              <a:lnSpc>
+                <a:spcPct val="132000"/>
+              </a:lnSpc>
+              <a:spcAft>
+                <a:spcPts val="0"/>
+              </a:spcAft>
+            </a:pPr>
+            <a:r>
+              <a:rPr sz="1271" b="1" i="0">
+                <a:solidFill>
+                  <a:srgbClr val="12162E"/>
+                </a:solidFill>
+                <a:latin typeface="Arial"/>
+              </a:rPr>
+              <a:t>“Navigate to my listing of the blue bike and change the price to $85.50 (including in the description).”</a:t>
+            </a:r>
+          </a:p>
+        </p:txBody>
+      </p:sp>
+      <p:sp>
+        <p:nvSpPr>
+          <p:cNvPr id="152" name="TextBox 151"/>
+          <p:cNvSpPr txBox="1"/>
+          <p:nvPr/>
+        </p:nvSpPr>
+        <p:spPr>
+          <a:xfrm>
+            <a:off x="2923200" y="15386738"/>
+            <a:ext cx="1418400" cy="504000"/>
+          </a:xfrm>
+          <a:prstGeom prst="rect">
+            <a:avLst/>
+          </a:prstGeom>
+          <a:noFill/>
+        </p:spPr>
+        <p:txBody>
+          <a:bodyPr wrap="square" lIns="0" rIns="0" tIns="0" bIns="0">
+            <a:spAutoFit/>
+          </a:bodyPr>
+          <a:lstStyle/>
+          <a:p>
+            <a:pPr>
+              <a:lnSpc>
+                <a:spcPct val="115000"/>
+              </a:lnSpc>
+            </a:pPr>
+            <a:r>
+              <a:rPr sz="1500" b="1" i="0">
+                <a:solidFill>
+                  <a:srgbClr val="C2352B"/>
+                </a:solidFill>
+                <a:latin typeface="Consolas"/>
+              </a:rPr>
+              <a:t>✗ </a:t>
+            </a:r>
+            <a:r>
+              <a:rPr sz="1271" b="0" i="0">
+                <a:solidFill>
+                  <a:srgbClr val="12162E"/>
+                </a:solidFill>
+                <a:latin typeface="Arial"/>
+              </a:rPr>
+              <a:t>30 steps</a:t>
+            </a:r>
+          </a:p>
+          <a:p>
+            <a:pPr>
+              <a:lnSpc>
+                <a:spcPct val="115000"/>
+              </a:lnSpc>
+            </a:pPr>
+            <a:r>
+              <a:rPr sz="1271" b="1" i="0">
+                <a:solidFill>
+                  <a:srgbClr val="12162E"/>
+                </a:solidFill>
+                <a:latin typeface="Arial"/>
+              </a:rPr>
+              <a:t>$0.116</a:t>
+            </a:r>
+          </a:p>
+        </p:txBody>
+      </p:sp>
+      <p:sp>
+        <p:nvSpPr>
+          <p:cNvPr id="153" name="TextBox 152"/>
+          <p:cNvSpPr txBox="1"/>
+          <p:nvPr/>
+        </p:nvSpPr>
+        <p:spPr>
+          <a:xfrm>
+            <a:off x="4341600" y="15386738"/>
+            <a:ext cx="1418400" cy="504000"/>
+          </a:xfrm>
+          <a:prstGeom prst="rect">
+            <a:avLst/>
+          </a:prstGeom>
+          <a:noFill/>
+        </p:spPr>
+        <p:txBody>
+          <a:bodyPr wrap="square" lIns="0" rIns="0" tIns="0" bIns="0">
+            <a:spAutoFit/>
+          </a:bodyPr>
+          <a:lstStyle/>
+          <a:p>
+            <a:pPr>
+              <a:lnSpc>
+                <a:spcPct val="115000"/>
+              </a:lnSpc>
+            </a:pPr>
+            <a:r>
+              <a:rPr sz="1500" b="1" i="0">
+                <a:solidFill>
+                  <a:srgbClr val="14855F"/>
+                </a:solidFill>
+                <a:latin typeface="Consolas"/>
+              </a:rPr>
+              <a:t>✓ </a:t>
+            </a:r>
+            <a:r>
+              <a:rPr sz="1271" b="0" i="0">
+                <a:solidFill>
+                  <a:srgbClr val="12162E"/>
+                </a:solidFill>
+                <a:latin typeface="Arial"/>
+              </a:rPr>
+              <a:t>9 steps</a:t>
+            </a:r>
+          </a:p>
+          <a:p>
+            <a:pPr>
+              <a:lnSpc>
+                <a:spcPct val="115000"/>
+              </a:lnSpc>
+            </a:pPr>
+            <a:r>
+              <a:rPr sz="1271" b="1" i="0">
+                <a:solidFill>
+                  <a:srgbClr val="12162E"/>
+                </a:solidFill>
+                <a:latin typeface="Arial"/>
+              </a:rPr>
+              <a:t>$0.079</a:t>
+            </a:r>
+          </a:p>
+        </p:txBody>
+      </p:sp>
+      <p:sp>
+        <p:nvSpPr>
+          <p:cNvPr id="154" name="TextBox 153"/>
+          <p:cNvSpPr txBox="1"/>
+          <p:nvPr/>
+        </p:nvSpPr>
+        <p:spPr>
+          <a:xfrm>
+            <a:off x="5760000" y="15386738"/>
+            <a:ext cx="1418400" cy="504000"/>
+          </a:xfrm>
+          <a:prstGeom prst="rect">
+            <a:avLst/>
+          </a:prstGeom>
+          <a:noFill/>
+        </p:spPr>
+        <p:txBody>
+          <a:bodyPr wrap="square" lIns="0" rIns="0" tIns="0" bIns="0">
+            <a:spAutoFit/>
+          </a:bodyPr>
+          <a:lstStyle/>
+          <a:p>
+            <a:pPr>
+              <a:lnSpc>
+                <a:spcPct val="115000"/>
+              </a:lnSpc>
+            </a:pPr>
+            <a:r>
+              <a:rPr sz="1500" b="1" i="0">
+                <a:solidFill>
+                  <a:srgbClr val="C2352B"/>
+                </a:solidFill>
+                <a:latin typeface="Consolas"/>
+              </a:rPr>
+              <a:t>✗ </a:t>
+            </a:r>
+            <a:r>
+              <a:rPr sz="1271" b="0" i="0">
+                <a:solidFill>
+                  <a:srgbClr val="12162E"/>
+                </a:solidFill>
+                <a:latin typeface="Arial"/>
+              </a:rPr>
+              <a:t>6 steps</a:t>
+            </a:r>
+          </a:p>
+          <a:p>
+            <a:pPr>
+              <a:lnSpc>
+                <a:spcPct val="115000"/>
+              </a:lnSpc>
+            </a:pPr>
+            <a:r>
+              <a:rPr sz="1271" b="1" i="0">
+                <a:solidFill>
+                  <a:srgbClr val="12162E"/>
+                </a:solidFill>
+                <a:latin typeface="Arial"/>
+              </a:rPr>
+              <a:t>$0.029</a:t>
+            </a:r>
+          </a:p>
+        </p:txBody>
+      </p:sp>
+      <p:sp>
+        <p:nvSpPr>
+          <p:cNvPr id="155" name="Rectangle 154"/>
+          <p:cNvSpPr/>
+          <p:nvPr/>
+        </p:nvSpPr>
+        <p:spPr>
+          <a:xfrm>
+            <a:off x="727200" y="15962738"/>
+            <a:ext cx="6451200" cy="10800"/>
+          </a:xfrm>
+          <a:prstGeom prst="rect">
+            <a:avLst/>
+          </a:prstGeom>
+          <a:solidFill>
+            <a:srgbClr val="DDE3F2"/>
+          </a:solidFill>
+          <a:ln>
+            <a:noFill/>
+          </a:ln>
+          <a:effectLst/>
+        </p:spPr>
+        <p:style>
+          <a:lnRef idx="1">
+            <a:schemeClr val="accent1"/>
+          </a:lnRef>
+          <a:fillRef idx="3">
+            <a:schemeClr val="accent1"/>
+          </a:fillRef>
+          <a:effectRef idx="2">
+            <a:schemeClr val="accent1"/>
+          </a:effectRef>
+          <a:fontRef idx="minor">
+            <a:schemeClr val="lt1"/>
+          </a:fontRef>
+        </p:style>
+        <p:txBody>
+          <a:bodyPr rtlCol="0" anchor="ctr" wrap="square"/>
+          <a:lstStyle/>
+          <a:p>
+            <a:pPr algn="ctr"/>
+          </a:p>
+        </p:txBody>
+      </p:sp>
+      <p:sp>
+        <p:nvSpPr>
+          <p:cNvPr id="156" name="Rectangle 155"/>
+          <p:cNvSpPr/>
+          <p:nvPr/>
+        </p:nvSpPr>
+        <p:spPr>
+          <a:xfrm>
+            <a:off x="712800" y="16020338"/>
+            <a:ext cx="2044800" cy="973800"/>
+          </a:xfrm>
+          <a:prstGeom prst="rect">
+            <a:avLst/>
+          </a:prstGeom>
+          <a:noFill/>
+          <a:ln w="8890">
+            <a:solidFill>
+              <a:srgbClr val="C9CFE0"/>
+            </a:solidFill>
+          </a:ln>
+          <a:effectLst/>
+        </p:spPr>
+        <p:style>
+          <a:lnRef idx="1">
+            <a:schemeClr val="accent1"/>
+          </a:lnRef>
+          <a:fillRef idx="3">
+            <a:schemeClr val="accent1"/>
+          </a:fillRef>
+          <a:effectRef idx="2">
+            <a:schemeClr val="accent1"/>
+          </a:effectRef>
+          <a:fontRef idx="minor">
+            <a:schemeClr val="lt1"/>
+          </a:fontRef>
+        </p:style>
+        <p:txBody>
+          <a:bodyPr rtlCol="0" anchor="ctr" wrap="square"/>
+          <a:lstStyle/>
+          <a:p>
+            <a:pPr algn="ctr"/>
+          </a:p>
+        </p:txBody>
+      </p:sp>
+      <p:pic>
+        <p:nvPicPr>
+          <p:cNvPr id="157" name="Picture 156" descr="thumb_17.png"/>
+          <p:cNvPicPr>
+            <a:picLocks noChangeAspect="1"/>
+          </p:cNvPicPr>
+          <p:nvPr/>
+        </p:nvPicPr>
+        <p:blipFill>
+          <a:blip r:embed="rId9"/>
+          <a:stretch>
+            <a:fillRect/>
+          </a:stretch>
+        </p:blipFill>
+        <p:spPr>
+          <a:xfrm>
+            <a:off x="727200" y="16034738"/>
+            <a:ext cx="2016000" cy="945000"/>
+          </a:xfrm>
+          <a:prstGeom prst="rect">
+            <a:avLst/>
+          </a:prstGeom>
+        </p:spPr>
+      </p:pic>
+      <p:sp>
+        <p:nvSpPr>
+          <p:cNvPr id="158" name="TextBox 157"/>
+          <p:cNvSpPr txBox="1"/>
+          <p:nvPr/>
+        </p:nvSpPr>
+        <p:spPr>
+          <a:xfrm>
+            <a:off x="2923200" y="16034738"/>
+            <a:ext cx="4255200" cy="511369"/>
+          </a:xfrm>
+          <a:prstGeom prst="rect">
+            <a:avLst/>
+          </a:prstGeom>
+          <a:noFill/>
+        </p:spPr>
+        <p:txBody>
+          <a:bodyPr wrap="square" lIns="0" rIns="0" tIns="0" bIns="0">
+            <a:spAutoFit/>
+          </a:bodyPr>
+          <a:lstStyle/>
+          <a:p>
+            <a:pPr algn="l">
+              <a:lnSpc>
+                <a:spcPct val="132000"/>
+              </a:lnSpc>
+              <a:spcAft>
+                <a:spcPts val="0"/>
+              </a:spcAft>
+            </a:pPr>
+            <a:r>
+              <a:rPr sz="1271" b="1" i="0">
+                <a:solidFill>
+                  <a:srgbClr val="12162E"/>
+                </a:solidFill>
+                <a:latin typeface="Arial"/>
+              </a:rPr>
+              <a:t>“Show me the cheapest bike with red handlebars between $900-950.”</a:t>
+            </a:r>
+          </a:p>
+        </p:txBody>
+      </p:sp>
+      <p:sp>
+        <p:nvSpPr>
+          <p:cNvPr id="159" name="TextBox 158"/>
+          <p:cNvSpPr txBox="1"/>
+          <p:nvPr/>
+        </p:nvSpPr>
+        <p:spPr>
+          <a:xfrm>
+            <a:off x="2923200" y="16618107"/>
+            <a:ext cx="1418400" cy="504000"/>
+          </a:xfrm>
+          <a:prstGeom prst="rect">
+            <a:avLst/>
+          </a:prstGeom>
+          <a:noFill/>
+        </p:spPr>
+        <p:txBody>
+          <a:bodyPr wrap="square" lIns="0" rIns="0" tIns="0" bIns="0">
+            <a:spAutoFit/>
+          </a:bodyPr>
+          <a:lstStyle/>
+          <a:p>
+            <a:pPr>
+              <a:lnSpc>
+                <a:spcPct val="115000"/>
+              </a:lnSpc>
+            </a:pPr>
+            <a:r>
+              <a:rPr sz="1500" b="1" i="0">
+                <a:solidFill>
+                  <a:srgbClr val="C2352B"/>
+                </a:solidFill>
+                <a:latin typeface="Consolas"/>
+              </a:rPr>
+              <a:t>✗ </a:t>
+            </a:r>
+            <a:r>
+              <a:rPr sz="1271" b="0" i="0">
+                <a:solidFill>
+                  <a:srgbClr val="12162E"/>
+                </a:solidFill>
+                <a:latin typeface="Arial"/>
+              </a:rPr>
+              <a:t>19 steps</a:t>
+            </a:r>
+          </a:p>
+          <a:p>
+            <a:pPr>
+              <a:lnSpc>
+                <a:spcPct val="115000"/>
+              </a:lnSpc>
+            </a:pPr>
+            <a:r>
+              <a:rPr sz="1271" b="1" i="0">
+                <a:solidFill>
+                  <a:srgbClr val="12162E"/>
+                </a:solidFill>
+                <a:latin typeface="Arial"/>
+              </a:rPr>
+              <a:t>$0.075</a:t>
+            </a:r>
+          </a:p>
+        </p:txBody>
+      </p:sp>
+      <p:sp>
+        <p:nvSpPr>
+          <p:cNvPr id="160" name="TextBox 159"/>
+          <p:cNvSpPr txBox="1"/>
+          <p:nvPr/>
+        </p:nvSpPr>
+        <p:spPr>
+          <a:xfrm>
+            <a:off x="4341600" y="16618107"/>
+            <a:ext cx="1418400" cy="504000"/>
+          </a:xfrm>
+          <a:prstGeom prst="rect">
+            <a:avLst/>
+          </a:prstGeom>
+          <a:noFill/>
+        </p:spPr>
+        <p:txBody>
+          <a:bodyPr wrap="square" lIns="0" rIns="0" tIns="0" bIns="0">
+            <a:spAutoFit/>
+          </a:bodyPr>
+          <a:lstStyle/>
+          <a:p>
+            <a:pPr>
+              <a:lnSpc>
+                <a:spcPct val="115000"/>
+              </a:lnSpc>
+            </a:pPr>
+            <a:r>
+              <a:rPr sz="1500" b="1" i="0">
+                <a:solidFill>
+                  <a:srgbClr val="C2352B"/>
+                </a:solidFill>
+                <a:latin typeface="Consolas"/>
+              </a:rPr>
+              <a:t>✗ </a:t>
+            </a:r>
+            <a:r>
+              <a:rPr sz="1271" b="0" i="0">
+                <a:solidFill>
+                  <a:srgbClr val="12162E"/>
+                </a:solidFill>
+                <a:latin typeface="Arial"/>
+              </a:rPr>
+              <a:t>6 steps</a:t>
+            </a:r>
+          </a:p>
+          <a:p>
+            <a:pPr>
+              <a:lnSpc>
+                <a:spcPct val="115000"/>
+              </a:lnSpc>
+            </a:pPr>
+            <a:r>
+              <a:rPr sz="1271" b="1" i="0">
+                <a:solidFill>
+                  <a:srgbClr val="12162E"/>
+                </a:solidFill>
+                <a:latin typeface="Arial"/>
+              </a:rPr>
+              <a:t>$0.025</a:t>
+            </a:r>
+          </a:p>
+        </p:txBody>
+      </p:sp>
+      <p:sp>
+        <p:nvSpPr>
+          <p:cNvPr id="161" name="TextBox 160"/>
+          <p:cNvSpPr txBox="1"/>
+          <p:nvPr/>
+        </p:nvSpPr>
+        <p:spPr>
+          <a:xfrm>
+            <a:off x="5760000" y="16618107"/>
+            <a:ext cx="1418400" cy="504000"/>
+          </a:xfrm>
+          <a:prstGeom prst="rect">
+            <a:avLst/>
+          </a:prstGeom>
+          <a:noFill/>
+        </p:spPr>
+        <p:txBody>
+          <a:bodyPr wrap="square" lIns="0" rIns="0" tIns="0" bIns="0">
+            <a:spAutoFit/>
+          </a:bodyPr>
+          <a:lstStyle/>
+          <a:p>
+            <a:pPr>
+              <a:lnSpc>
+                <a:spcPct val="115000"/>
+              </a:lnSpc>
+            </a:pPr>
+            <a:r>
+              <a:rPr sz="1500" b="1" i="0">
+                <a:solidFill>
+                  <a:srgbClr val="14855F"/>
+                </a:solidFill>
+                <a:latin typeface="Consolas"/>
+              </a:rPr>
+              <a:t>✓ </a:t>
+            </a:r>
+            <a:r>
+              <a:rPr sz="1271" b="0" i="0">
+                <a:solidFill>
+                  <a:srgbClr val="12162E"/>
+                </a:solidFill>
+                <a:latin typeface="Arial"/>
+              </a:rPr>
+              <a:t>7 steps</a:t>
+            </a:r>
+          </a:p>
+          <a:p>
+            <a:pPr>
+              <a:lnSpc>
+                <a:spcPct val="115000"/>
+              </a:lnSpc>
+            </a:pPr>
+            <a:r>
+              <a:rPr sz="1271" b="1" i="0">
+                <a:solidFill>
+                  <a:srgbClr val="12162E"/>
+                </a:solidFill>
+                <a:latin typeface="Arial"/>
+              </a:rPr>
+              <a:t>$0.037</a:t>
+            </a:r>
+          </a:p>
+        </p:txBody>
+      </p:sp>
+      <p:sp>
+        <p:nvSpPr>
+          <p:cNvPr id="162" name="Rectangle 161"/>
+          <p:cNvSpPr/>
+          <p:nvPr/>
+        </p:nvSpPr>
+        <p:spPr>
+          <a:xfrm>
+            <a:off x="727200" y="17194107"/>
+            <a:ext cx="6451200" cy="10800"/>
+          </a:xfrm>
+          <a:prstGeom prst="rect">
+            <a:avLst/>
+          </a:prstGeom>
+          <a:solidFill>
+            <a:srgbClr val="DDE3F2"/>
+          </a:solidFill>
+          <a:ln>
+            <a:noFill/>
+          </a:ln>
+          <a:effectLst/>
+        </p:spPr>
+        <p:style>
+          <a:lnRef idx="1">
+            <a:schemeClr val="accent1"/>
+          </a:lnRef>
+          <a:fillRef idx="3">
+            <a:schemeClr val="accent1"/>
+          </a:fillRef>
+          <a:effectRef idx="2">
+            <a:schemeClr val="accent1"/>
+          </a:effectRef>
+          <a:fontRef idx="minor">
+            <a:schemeClr val="lt1"/>
+          </a:fontRef>
+        </p:style>
+        <p:txBody>
+          <a:bodyPr rtlCol="0" anchor="ctr" wrap="square"/>
+          <a:lstStyle/>
+          <a:p>
+            <a:pPr algn="ctr"/>
+          </a:p>
+        </p:txBody>
+      </p:sp>
+      <p:sp>
+        <p:nvSpPr>
+          <p:cNvPr id="163" name="TextBox 162"/>
+          <p:cNvSpPr txBox="1"/>
+          <p:nvPr/>
+        </p:nvSpPr>
+        <p:spPr>
+          <a:xfrm>
+            <a:off x="727200" y="17302107"/>
+            <a:ext cx="6451200" cy="767053"/>
+          </a:xfrm>
+          <a:prstGeom prst="rect">
+            <a:avLst/>
+          </a:prstGeom>
+          <a:noFill/>
+        </p:spPr>
+        <p:txBody>
+          <a:bodyPr wrap="square" lIns="0" rIns="0" tIns="0" bIns="0">
+            <a:spAutoFit/>
+          </a:bodyPr>
+          <a:lstStyle/>
+          <a:p>
+            <a:pPr algn="l">
+              <a:lnSpc>
+                <a:spcPct val="132000"/>
+              </a:lnSpc>
+              <a:spcAft>
+                <a:spcPts val="425"/>
+              </a:spcAft>
+            </a:pPr>
+            <a:r>
+              <a:rPr sz="1271" b="0" i="0">
+                <a:solidFill>
+                  <a:srgbClr val="5D6787"/>
+                </a:solidFill>
+                <a:latin typeface="Arial"/>
+              </a:rPr>
+              <a:t>One recorded attempt per way of seeing, B0 · classifieds. Every ✓ / ✗ came out the same on an independent rerun; steps and bill differ run to run — across all tasks a rerun flips 10–14% of outcomes.</a:t>
+            </a:r>
+          </a:p>
+        </p:txBody>
+      </p:sp>
+      <p:sp>
+        <p:nvSpPr>
+          <p:cNvPr id="14" name="Rectangle 13"/>
+          <p:cNvSpPr/>
+          <p:nvPr/>
+        </p:nvSpPr>
+        <p:spPr>
+          <a:xfrm>
+            <a:off x="727200" y="18357160"/>
+            <a:ext cx="177988" cy="177988"/>
+          </a:xfrm>
+          <a:prstGeom prst="rect">
+            <a:avLst/>
+          </a:prstGeom>
+          <a:solidFill>
+            <a:srgbClr val="AB5FCE"/>
+          </a:solidFill>
+          <a:ln>
+            <a:noFill/>
+          </a:ln>
+          <a:effectLst/>
+        </p:spPr>
+        <p:style>
+          <a:lnRef idx="1">
+            <a:schemeClr val="accent1"/>
+          </a:lnRef>
+          <a:fillRef idx="3">
+            <a:schemeClr val="accent1"/>
+          </a:fillRef>
+          <a:effectRef idx="2">
+            <a:schemeClr val="accent1"/>
+          </a:effectRef>
+          <a:fontRef idx="minor">
+            <a:schemeClr val="lt1"/>
+          </a:fontRef>
+        </p:style>
+        <p:txBody>
+          <a:bodyPr rtlCol="0" anchor="ctr"/>
+          <a:lstStyle/>
+          <a:p>
+            <a:pPr algn="ctr"/>
+            <a:endParaRPr/>
+          </a:p>
+        </p:txBody>
+      </p:sp>
+      <p:sp>
+        <p:nvSpPr>
+          <p:cNvPr id="15" name="TextBox 14"/>
+          <p:cNvSpPr txBox="1"/>
+          <p:nvPr/>
+        </p:nvSpPr>
+        <p:spPr>
+          <a:xfrm>
+            <a:off x="1032323" y="18313960"/>
+            <a:ext cx="6144827" cy="238912"/>
+          </a:xfrm>
+          <a:prstGeom prst="rect">
+            <a:avLst/>
+          </a:prstGeom>
+          <a:noFill/>
+        </p:spPr>
+        <p:txBody>
+          <a:bodyPr wrap="square" lIns="0" tIns="0" rIns="0" bIns="0" anchor="t">
+            <a:spAutoFit/>
+          </a:bodyPr>
+          <a:lstStyle/>
+          <a:p>
+            <a:pPr algn="l">
+              <a:lnSpc>
+                <a:spcPct val="118000"/>
+              </a:lnSpc>
+            </a:pPr>
+            <a:r>
+              <a:rPr sz="1412" b="1" i="0">
+                <a:solidFill>
+                  <a:srgbClr val="141E41"/>
+                </a:solidFill>
+                <a:latin typeface="Consolas"/>
+              </a:rPr>
+              <a:t>WHY IT CANNOT BE LEARNED</a:t>
+            </a:r>
+            <a:endParaRPr sz="1412" b="1" spc="180" dirty="0">
+              <a:solidFill>
+                <a:srgbClr val="141E41"/>
+              </a:solidFill>
+              <a:latin typeface="Consolas"/>
+            </a:endParaRPr>
+          </a:p>
+        </p:txBody>
+      </p:sp>
+      <p:sp>
+        <p:nvSpPr>
+          <p:cNvPr id="16" name="Rectangle 15"/>
+          <p:cNvSpPr/>
+          <p:nvPr/>
+        </p:nvSpPr>
+        <p:spPr>
+          <a:xfrm>
+            <a:off x="727200" y="18674996"/>
+            <a:ext cx="1169636" cy="35597"/>
+          </a:xfrm>
+          <a:prstGeom prst="rect">
+            <a:avLst/>
+          </a:prstGeom>
+          <a:solidFill>
+            <a:srgbClr val="141E41"/>
+          </a:solidFill>
+          <a:ln>
+            <a:noFill/>
+          </a:ln>
+          <a:effectLst/>
+        </p:spPr>
+        <p:style>
+          <a:lnRef idx="1">
+            <a:schemeClr val="accent1"/>
+          </a:lnRef>
+          <a:fillRef idx="3">
+            <a:schemeClr val="accent1"/>
+          </a:fillRef>
+          <a:effectRef idx="2">
+            <a:schemeClr val="accent1"/>
+          </a:effectRef>
+          <a:fontRef idx="minor">
+            <a:schemeClr val="lt1"/>
+          </a:fontRef>
+        </p:style>
+        <p:txBody>
+          <a:bodyPr rtlCol="0" anchor="ctr"/>
+          <a:lstStyle/>
+          <a:p>
+            <a:pPr algn="ctr"/>
+            <a:endParaRPr/>
+          </a:p>
+        </p:txBody>
+      </p:sp>
+      <p:sp>
+        <p:nvSpPr>
+          <p:cNvPr id="17" name="Rectangle 16"/>
+          <p:cNvSpPr/>
+          <p:nvPr/>
+        </p:nvSpPr>
+        <p:spPr>
+          <a:xfrm>
+            <a:off x="1896836" y="18685167"/>
+            <a:ext cx="5281564" cy="15256"/>
+          </a:xfrm>
+          <a:prstGeom prst="rect">
+            <a:avLst/>
+          </a:prstGeom>
+          <a:solidFill>
+            <a:srgbClr val="DDE3F2"/>
+          </a:solidFill>
+          <a:ln>
+            <a:noFill/>
+          </a:ln>
+          <a:effectLst/>
+        </p:spPr>
+        <p:style>
+          <a:lnRef idx="1">
+            <a:schemeClr val="accent1"/>
+          </a:lnRef>
+          <a:fillRef idx="3">
+            <a:schemeClr val="accent1"/>
+          </a:fillRef>
+          <a:effectRef idx="2">
+            <a:schemeClr val="accent1"/>
+          </a:effectRef>
+          <a:fontRef idx="minor">
+            <a:schemeClr val="lt1"/>
+          </a:fontRef>
+        </p:style>
+        <p:txBody>
+          <a:bodyPr rtlCol="0" anchor="ctr"/>
+          <a:lstStyle/>
+          <a:p>
+            <a:pPr algn="ctr"/>
+            <a:endParaRPr/>
+          </a:p>
+        </p:txBody>
+      </p:sp>
+      <p:sp>
+        <p:nvSpPr>
+          <p:cNvPr id="164" name="TextBox 163"/>
+          <p:cNvSpPr txBox="1"/>
+          <p:nvPr/>
+        </p:nvSpPr>
+        <p:spPr>
+          <a:xfrm>
+            <a:off x="727200" y="18897160"/>
+            <a:ext cx="6451200" cy="4125381"/>
           </a:xfrm>
           <a:prstGeom prst="rect">
             <a:avLst/>
@@ -6275,36 +8333,191 @@
               </a:spcAft>
             </a:pPr>
             <a:r>
+              <a:rPr sz="1764" b="0" i="0">
+                <a:solidFill>
+                  <a:srgbClr val="12162E"/>
+                </a:solidFill>
+                <a:latin typeface="Arial"/>
+              </a:rPr>
+              <a:t>A training example for “which way of seeing” exists only when the agent solves a task. Here the best single way solves just </a:t>
+            </a:r>
+            <a:r>
               <a:rPr sz="1764" b="1" i="0">
                 <a:solidFill>
                   <a:srgbClr val="12162E"/>
                 </a:solidFill>
                 <a:latin typeface="Arial"/>
               </a:rPr>
-              <a:t>“Navigate to the item on this page whose image is taken during a sunset.”</a:t>
-            </a:r>
-          </a:p>
-        </p:txBody>
-      </p:sp>
-      <p:sp>
-        <p:nvSpPr>
-          <p:cNvPr id="125" name="Rectangle 124"/>
+              <a:t>2–36%</a:t>
+            </a:r>
+            <a:r>
+              <a:rPr sz="1764" b="0" i="0">
+                <a:solidFill>
+                  <a:srgbClr val="12162E"/>
+                </a:solidFill>
+                <a:latin typeface="Arial"/>
+              </a:rPr>
+              <a:t> of tasks, leaving typically </a:t>
+            </a:r>
+            <a:r>
+              <a:rPr sz="1764" b="1" i="0">
+                <a:solidFill>
+                  <a:srgbClr val="12162E"/>
+                </a:solidFill>
+                <a:latin typeface="Arial"/>
+              </a:rPr>
+              <a:t>15–97</a:t>
+            </a:r>
+            <a:r>
+              <a:rPr sz="1764" b="0" i="0">
+                <a:solidFill>
+                  <a:srgbClr val="12162E"/>
+                </a:solidFill>
+                <a:latin typeface="Arial"/>
+              </a:rPr>
+              <a:t> usable examples per setting — </a:t>
+            </a:r>
+            <a:r>
+              <a:rPr sz="1764" b="1" i="0">
+                <a:solidFill>
+                  <a:srgbClr val="12162E"/>
+                </a:solidFill>
+                <a:latin typeface="Arial"/>
+              </a:rPr>
+              <a:t>the agents that would gain most from choosing produce the fewest examples to learn from.</a:t>
+            </a:r>
+          </a:p>
+          <a:p>
+            <a:pPr algn="l">
+              <a:lnSpc>
+                <a:spcPct val="120000"/>
+              </a:lnSpc>
+              <a:spcAft>
+                <a:spcPts val="992"/>
+              </a:spcAft>
+            </a:pPr>
+            <a:r>
+              <a:rPr sz="1764" b="0" i="0">
+                <a:solidFill>
+                  <a:srgbClr val="12162E"/>
+                </a:solidFill>
+                <a:latin typeface="Arial"/>
+              </a:rPr>
+              <a:t>Shrinking the training data on purpose confirms scarcity is the mechanism, and prices it: the failing settings would need at least </a:t>
+            </a:r>
+            <a:r>
+              <a:rPr sz="1764" b="1" i="0">
+                <a:solidFill>
+                  <a:srgbClr val="12162E"/>
+                </a:solidFill>
+                <a:latin typeface="Arial"/>
+              </a:rPr>
+              <a:t>2.1–4.2×</a:t>
+            </a:r>
+            <a:r>
+              <a:rPr sz="1764" b="0" i="0">
+                <a:solidFill>
+                  <a:srgbClr val="12162E"/>
+                </a:solidFill>
+                <a:latin typeface="Arial"/>
+              </a:rPr>
+              <a:t> more tasks than the benchmarks contain.</a:t>
+            </a:r>
+          </a:p>
+          <a:p>
+            <a:pPr algn="l">
+              <a:lnSpc>
+                <a:spcPct val="120000"/>
+              </a:lnSpc>
+              <a:spcAft>
+                <a:spcPts val="992"/>
+              </a:spcAft>
+            </a:pPr>
+            <a:r>
+              <a:rPr sz="1764" b="0" i="0">
+                <a:solidFill>
+                  <a:srgbClr val="12162E"/>
+                </a:solidFill>
+                <a:latin typeface="Arial"/>
+              </a:rPr>
+              <a:t>Rerunning </a:t>
+            </a:r>
+            <a:r>
+              <a:rPr sz="1764" b="1" i="0">
+                <a:solidFill>
+                  <a:srgbClr val="12162E"/>
+                </a:solidFill>
+                <a:latin typeface="Arial"/>
+              </a:rPr>
+              <a:t>one unchanged way of seeing</a:t>
+            </a:r>
+            <a:r>
+              <a:rPr sz="1764" b="0" i="0">
+                <a:solidFill>
+                  <a:srgbClr val="12162E"/>
+                </a:solidFill>
+                <a:latin typeface="Arial"/>
+              </a:rPr>
+              <a:t> flips </a:t>
+            </a:r>
+            <a:r>
+              <a:rPr sz="1764" b="1" i="0">
+                <a:solidFill>
+                  <a:srgbClr val="12162E"/>
+                </a:solidFill>
+                <a:latin typeface="Arial"/>
+              </a:rPr>
+              <a:t>10–14%</a:t>
+            </a:r>
+            <a:r>
+              <a:rPr sz="1764" b="0" i="0">
+                <a:solidFill>
+                  <a:srgbClr val="12162E"/>
+                </a:solidFill>
+                <a:latin typeface="Arial"/>
+              </a:rPr>
+              <a:t> of outcomes and by itself buys </a:t>
+            </a:r>
+            <a:r>
+              <a:rPr sz="1764" b="1" i="0">
+                <a:solidFill>
+                  <a:srgbClr val="12162E"/>
+                </a:solidFill>
+                <a:latin typeface="Arial"/>
+              </a:rPr>
+              <a:t>2.0–7.6</a:t>
+            </a:r>
+            <a:r>
+              <a:rPr sz="1764" b="0" i="0">
+                <a:solidFill>
+                  <a:srgbClr val="12162E"/>
+                </a:solidFill>
+                <a:latin typeface="Arial"/>
+              </a:rPr>
+              <a:t> more solved tasks in 100 (B0 · classifieds, six repeated ways, n=224); every gain on this sheet is read against that band, not against zero.</a:t>
+            </a:r>
+          </a:p>
+        </p:txBody>
+      </p:sp>
+      <p:sp>
+        <p:nvSpPr>
+          <p:cNvPr id="14" name="Rectangle 13"/>
           <p:cNvSpPr/>
           <p:nvPr/>
         </p:nvSpPr>
         <p:spPr>
           <a:xfrm>
-            <a:off x="727200" y="12075563"/>
-            <a:ext cx="6451200" cy="3024000"/>
-          </a:xfrm>
-          <a:prstGeom prst="rect">
-            <a:avLst/>
-          </a:prstGeom>
-          <a:noFill/>
-          <a:ln w="8890">
-            <a:solidFill>
-              <a:srgbClr val="DDE3F2"/>
-            </a:solidFill>
+            <a:off x="727200" y="23274541"/>
+            <a:ext cx="177988" cy="177988"/>
+          </a:xfrm>
+          <a:prstGeom prst="rect">
+            <a:avLst/>
+          </a:prstGeom>
+          <a:solidFill>
+            <a:srgbClr val="AB5FCE"/>
+          </a:solidFill>
+          <a:ln>
+            <a:noFill/>
           </a:ln>
           <a:effectLst/>
         </p:spPr>
@@ -6323,6 +8536,459 @@
           </a:fontRef>
         </p:style>
         <p:txBody>
+          <a:bodyPr rtlCol="0" anchor="ctr"/>
+          <a:lstStyle/>
+          <a:p>
+            <a:pPr algn="ctr"/>
+            <a:endParaRPr/>
+          </a:p>
+        </p:txBody>
+      </p:sp>
+      <p:sp>
+        <p:nvSpPr>
+          <p:cNvPr id="15" name="TextBox 14"/>
+          <p:cNvSpPr txBox="1"/>
+          <p:nvPr/>
+        </p:nvSpPr>
+        <p:spPr>
+          <a:xfrm>
+            <a:off x="1032323" y="23231341"/>
+            <a:ext cx="6144827" cy="238912"/>
+          </a:xfrm>
+          <a:prstGeom prst="rect">
+            <a:avLst/>
+          </a:prstGeom>
+          <a:noFill/>
+        </p:spPr>
+        <p:txBody>
+          <a:bodyPr wrap="square" lIns="0" tIns="0" rIns="0" bIns="0" anchor="t">
+            <a:spAutoFit/>
+          </a:bodyPr>
+          <a:lstStyle/>
+          <a:p>
+            <a:pPr algn="l">
+              <a:lnSpc>
+                <a:spcPct val="118000"/>
+              </a:lnSpc>
+            </a:pPr>
+            <a:r>
+              <a:rPr sz="1412" b="1" i="0">
+                <a:solidFill>
+                  <a:srgbClr val="141E41"/>
+                </a:solidFill>
+                <a:latin typeface="Consolas"/>
+              </a:rPr>
+              <a:t>TAKEAWAY</a:t>
+            </a:r>
+            <a:endParaRPr sz="1412" b="1" spc="180" dirty="0">
+              <a:solidFill>
+                <a:srgbClr val="141E41"/>
+              </a:solidFill>
+              <a:latin typeface="Consolas"/>
+            </a:endParaRPr>
+          </a:p>
+        </p:txBody>
+      </p:sp>
+      <p:sp>
+        <p:nvSpPr>
+          <p:cNvPr id="16" name="Rectangle 15"/>
+          <p:cNvSpPr/>
+          <p:nvPr/>
+        </p:nvSpPr>
+        <p:spPr>
+          <a:xfrm>
+            <a:off x="727200" y="23592377"/>
+            <a:ext cx="1169636" cy="35597"/>
+          </a:xfrm>
+          <a:prstGeom prst="rect">
+            <a:avLst/>
+          </a:prstGeom>
+          <a:solidFill>
+            <a:srgbClr val="141E41"/>
+          </a:solidFill>
+          <a:ln>
+            <a:noFill/>
+          </a:ln>
+          <a:effectLst/>
+        </p:spPr>
+        <p:style>
+          <a:lnRef idx="1">
+            <a:schemeClr val="accent1"/>
+          </a:lnRef>
+          <a:fillRef idx="3">
+            <a:schemeClr val="accent1"/>
+          </a:fillRef>
+          <a:effectRef idx="2">
+            <a:schemeClr val="accent1"/>
+          </a:effectRef>
+          <a:fontRef idx="minor">
+            <a:schemeClr val="lt1"/>
+          </a:fontRef>
+        </p:style>
+        <p:txBody>
+          <a:bodyPr rtlCol="0" anchor="ctr"/>
+          <a:lstStyle/>
+          <a:p>
+            <a:pPr algn="ctr"/>
+            <a:endParaRPr/>
+          </a:p>
+        </p:txBody>
+      </p:sp>
+      <p:sp>
+        <p:nvSpPr>
+          <p:cNvPr id="17" name="Rectangle 16"/>
+          <p:cNvSpPr/>
+          <p:nvPr/>
+        </p:nvSpPr>
+        <p:spPr>
+          <a:xfrm>
+            <a:off x="1896836" y="23602548"/>
+            <a:ext cx="5281564" cy="15256"/>
+          </a:xfrm>
+          <a:prstGeom prst="rect">
+            <a:avLst/>
+          </a:prstGeom>
+          <a:solidFill>
+            <a:srgbClr val="DDE3F2"/>
+          </a:solidFill>
+          <a:ln>
+            <a:noFill/>
+          </a:ln>
+          <a:effectLst/>
+        </p:spPr>
+        <p:style>
+          <a:lnRef idx="1">
+            <a:schemeClr val="accent1"/>
+          </a:lnRef>
+          <a:fillRef idx="3">
+            <a:schemeClr val="accent1"/>
+          </a:fillRef>
+          <a:effectRef idx="2">
+            <a:schemeClr val="accent1"/>
+          </a:effectRef>
+          <a:fontRef idx="minor">
+            <a:schemeClr val="lt1"/>
+          </a:fontRef>
+        </p:style>
+        <p:txBody>
+          <a:bodyPr rtlCol="0" anchor="ctr"/>
+          <a:lstStyle/>
+          <a:p>
+            <a:pPr algn="ctr"/>
+            <a:endParaRPr/>
+          </a:p>
+        </p:txBody>
+      </p:sp>
+      <p:sp>
+        <p:nvSpPr>
+          <p:cNvPr id="165" name="TextBox 164"/>
+          <p:cNvSpPr txBox="1"/>
+          <p:nvPr/>
+        </p:nvSpPr>
+        <p:spPr>
+          <a:xfrm>
+            <a:off x="727200" y="23814541"/>
+            <a:ext cx="6451200" cy="1613908"/>
+          </a:xfrm>
+          <a:prstGeom prst="rect">
+            <a:avLst/>
+          </a:prstGeom>
+          <a:noFill/>
+        </p:spPr>
+        <p:txBody>
+          <a:bodyPr wrap="square" lIns="0" rIns="0" tIns="0" bIns="0">
+            <a:spAutoFit/>
+          </a:bodyPr>
+          <a:lstStyle/>
+          <a:p>
+            <a:pPr algn="l">
+              <a:lnSpc>
+                <a:spcPct val="120000"/>
+              </a:lnSpc>
+              <a:spcAft>
+                <a:spcPts val="992"/>
+              </a:spcAft>
+            </a:pPr>
+            <a:r>
+              <a:rPr sz="1764" b="1" i="0">
+                <a:solidFill>
+                  <a:srgbClr val="12162E"/>
+                </a:solidFill>
+                <a:latin typeface="Arial"/>
+              </a:rPr>
+              <a:t>Learning how to see is not only a modelling problem: whether it can be learned depends on how good the agent producing the examples already is.</a:t>
+            </a:r>
+            <a:r>
+              <a:rPr sz="1764" b="0" i="0">
+                <a:solidFill>
+                  <a:srgbClr val="12162E"/>
+                </a:solidFill>
+                <a:latin typeface="Arial"/>
+              </a:rPr>
+              <a:t> So, in this order: improve the agent, then collect reliable examples, then learn when to look.</a:t>
+            </a:r>
+          </a:p>
+        </p:txBody>
+      </p:sp>
+      <p:sp>
+        <p:nvSpPr>
+          <p:cNvPr id="166" name="TextBox 165"/>
+          <p:cNvSpPr txBox="1"/>
+          <p:nvPr/>
+        </p:nvSpPr>
+        <p:spPr>
+          <a:xfrm>
+            <a:off x="727200" y="25482449"/>
+            <a:ext cx="6451200" cy="511369"/>
+          </a:xfrm>
+          <a:prstGeom prst="rect">
+            <a:avLst/>
+          </a:prstGeom>
+          <a:noFill/>
+        </p:spPr>
+        <p:txBody>
+          <a:bodyPr wrap="square" lIns="0" rIns="0" tIns="0" bIns="0">
+            <a:spAutoFit/>
+          </a:bodyPr>
+          <a:lstStyle/>
+          <a:p>
+            <a:pPr algn="l">
+              <a:lnSpc>
+                <a:spcPct val="132000"/>
+              </a:lnSpc>
+              <a:spcAft>
+                <a:spcPts val="425"/>
+              </a:spcAft>
+            </a:pPr>
+            <a:r>
+              <a:rPr sz="1271" b="0" i="0">
+                <a:solidFill>
+                  <a:srgbClr val="5D6787"/>
+                </a:solidFill>
+                <a:latin typeface="Arial"/>
+              </a:rPr>
+              <a:t>Measured in the 2–36% success regime we observed. This need not hold for stronger agents.</a:t>
+            </a:r>
+          </a:p>
+        </p:txBody>
+      </p:sp>
+      <p:sp>
+        <p:nvSpPr>
+          <p:cNvPr id="14" name="Rectangle 13"/>
+          <p:cNvSpPr/>
+          <p:nvPr/>
+        </p:nvSpPr>
+        <p:spPr>
+          <a:xfrm>
+            <a:off x="7534800" y="12672000"/>
+            <a:ext cx="177988" cy="177988"/>
+          </a:xfrm>
+          <a:prstGeom prst="rect">
+            <a:avLst/>
+          </a:prstGeom>
+          <a:solidFill>
+            <a:srgbClr val="AB5FCE"/>
+          </a:solidFill>
+          <a:ln>
+            <a:noFill/>
+          </a:ln>
+          <a:effectLst/>
+        </p:spPr>
+        <p:style>
+          <a:lnRef idx="1">
+            <a:schemeClr val="accent1"/>
+          </a:lnRef>
+          <a:fillRef idx="3">
+            <a:schemeClr val="accent1"/>
+          </a:fillRef>
+          <a:effectRef idx="2">
+            <a:schemeClr val="accent1"/>
+          </a:effectRef>
+          <a:fontRef idx="minor">
+            <a:schemeClr val="lt1"/>
+          </a:fontRef>
+        </p:style>
+        <p:txBody>
+          <a:bodyPr rtlCol="0" anchor="ctr"/>
+          <a:lstStyle/>
+          <a:p>
+            <a:pPr algn="ctr"/>
+            <a:endParaRPr/>
+          </a:p>
+        </p:txBody>
+      </p:sp>
+      <p:sp>
+        <p:nvSpPr>
+          <p:cNvPr id="15" name="TextBox 14"/>
+          <p:cNvSpPr txBox="1"/>
+          <p:nvPr/>
+        </p:nvSpPr>
+        <p:spPr>
+          <a:xfrm>
+            <a:off x="7839923" y="12628800"/>
+            <a:ext cx="6144827" cy="238912"/>
+          </a:xfrm>
+          <a:prstGeom prst="rect">
+            <a:avLst/>
+          </a:prstGeom>
+          <a:noFill/>
+        </p:spPr>
+        <p:txBody>
+          <a:bodyPr wrap="square" lIns="0" tIns="0" rIns="0" bIns="0" anchor="t">
+            <a:spAutoFit/>
+          </a:bodyPr>
+          <a:lstStyle/>
+          <a:p>
+            <a:pPr algn="l">
+              <a:lnSpc>
+                <a:spcPct val="118000"/>
+              </a:lnSpc>
+            </a:pPr>
+            <a:r>
+              <a:rPr sz="1412" b="1" i="0">
+                <a:solidFill>
+                  <a:srgbClr val="141E41"/>
+                </a:solidFill>
+                <a:latin typeface="Consolas"/>
+              </a:rPr>
+              <a:t>RESULTS ACROSS 8,934 TASK ATTEMPTS</a:t>
+            </a:r>
+            <a:endParaRPr sz="1412" b="1" spc="180" dirty="0">
+              <a:solidFill>
+                <a:srgbClr val="141E41"/>
+              </a:solidFill>
+              <a:latin typeface="Consolas"/>
+            </a:endParaRPr>
+          </a:p>
+        </p:txBody>
+      </p:sp>
+      <p:sp>
+        <p:nvSpPr>
+          <p:cNvPr id="16" name="Rectangle 15"/>
+          <p:cNvSpPr/>
+          <p:nvPr/>
+        </p:nvSpPr>
+        <p:spPr>
+          <a:xfrm>
+            <a:off x="7534800" y="12989836"/>
+            <a:ext cx="1169636" cy="35597"/>
+          </a:xfrm>
+          <a:prstGeom prst="rect">
+            <a:avLst/>
+          </a:prstGeom>
+          <a:solidFill>
+            <a:srgbClr val="141E41"/>
+          </a:solidFill>
+          <a:ln>
+            <a:noFill/>
+          </a:ln>
+          <a:effectLst/>
+        </p:spPr>
+        <p:style>
+          <a:lnRef idx="1">
+            <a:schemeClr val="accent1"/>
+          </a:lnRef>
+          <a:fillRef idx="3">
+            <a:schemeClr val="accent1"/>
+          </a:fillRef>
+          <a:effectRef idx="2">
+            <a:schemeClr val="accent1"/>
+          </a:effectRef>
+          <a:fontRef idx="minor">
+            <a:schemeClr val="lt1"/>
+          </a:fontRef>
+        </p:style>
+        <p:txBody>
+          <a:bodyPr rtlCol="0" anchor="ctr"/>
+          <a:lstStyle/>
+          <a:p>
+            <a:pPr algn="ctr"/>
+            <a:endParaRPr/>
+          </a:p>
+        </p:txBody>
+      </p:sp>
+      <p:sp>
+        <p:nvSpPr>
+          <p:cNvPr id="17" name="Rectangle 16"/>
+          <p:cNvSpPr/>
+          <p:nvPr/>
+        </p:nvSpPr>
+        <p:spPr>
+          <a:xfrm>
+            <a:off x="8704436" y="13000007"/>
+            <a:ext cx="12085564" cy="15256"/>
+          </a:xfrm>
+          <a:prstGeom prst="rect">
+            <a:avLst/>
+          </a:prstGeom>
+          <a:solidFill>
+            <a:srgbClr val="DDE3F2"/>
+          </a:solidFill>
+          <a:ln>
+            <a:noFill/>
+          </a:ln>
+          <a:effectLst/>
+        </p:spPr>
+        <p:style>
+          <a:lnRef idx="1">
+            <a:schemeClr val="accent1"/>
+          </a:lnRef>
+          <a:fillRef idx="3">
+            <a:schemeClr val="accent1"/>
+          </a:fillRef>
+          <a:effectRef idx="2">
+            <a:schemeClr val="accent1"/>
+          </a:effectRef>
+          <a:fontRef idx="minor">
+            <a:schemeClr val="lt1"/>
+          </a:fontRef>
+        </p:style>
+        <p:txBody>
+          <a:bodyPr rtlCol="0" anchor="ctr"/>
+          <a:lstStyle/>
+          <a:p>
+            <a:pPr algn="ctr"/>
+            <a:endParaRPr/>
+          </a:p>
+        </p:txBody>
+      </p:sp>
+      <p:sp>
+        <p:nvSpPr>
+          <p:cNvPr id="167" name="Rectangle 166"/>
+          <p:cNvSpPr/>
+          <p:nvPr/>
+        </p:nvSpPr>
+        <p:spPr>
+          <a:xfrm>
+            <a:off x="7534800" y="13212000"/>
+            <a:ext cx="13255200" cy="1170000"/>
+          </a:xfrm>
+          <a:prstGeom prst="rect">
+            <a:avLst/>
+          </a:prstGeom>
+          <a:solidFill>
+            <a:srgbClr val="ECEFFA"/>
+          </a:solidFill>
+          <a:ln>
+            <a:noFill/>
+          </a:ln>
+          <a:effectLst/>
+        </p:spPr>
+        <p:style>
+          <a:lnRef idx="1">
+            <a:schemeClr val="accent1"/>
+          </a:lnRef>
+          <a:fillRef idx="3">
+            <a:schemeClr val="accent1"/>
+          </a:fillRef>
+          <a:effectRef idx="2">
+            <a:schemeClr val="accent1"/>
+          </a:effectRef>
+          <a:fontRef idx="minor">
+            <a:schemeClr val="lt1"/>
+          </a:fontRef>
+        </p:style>
+        <p:txBody>
           <a:bodyPr rtlCol="0" anchor="ctr" wrap="square"/>
           <a:lstStyle/>
           <a:p>
@@ -6330,40 +8996,268 @@
           </a:p>
         </p:txBody>
       </p:sp>
-      <p:pic>
-        <p:nvPicPr>
-          <p:cNvPr id="126" name="Picture 125" descr="thumb_130.png"/>
-          <p:cNvPicPr>
-            <a:picLocks noChangeAspect="1"/>
-          </p:cNvPicPr>
-          <p:nvPr/>
-        </p:nvPicPr>
-        <p:blipFill>
-          <a:blip r:embed="rId5"/>
-          <a:stretch>
-            <a:fillRect/>
-          </a:stretch>
-        </p:blipFill>
-        <p:spPr>
-          <a:xfrm>
-            <a:off x="727200" y="12075563"/>
-            <a:ext cx="6451200" cy="3024000"/>
-          </a:xfrm>
-          <a:prstGeom prst="rect">
-            <a:avLst/>
-          </a:prstGeom>
-        </p:spPr>
-      </p:pic>
-      <p:sp>
-        <p:nvSpPr>
-          <p:cNvPr id="127" name="Rectangle 126"/>
+      <p:sp>
+        <p:nvSpPr>
+          <p:cNvPr id="168" name="TextBox 167"/>
+          <p:cNvSpPr txBox="1"/>
+          <p:nvPr/>
+        </p:nvSpPr>
+        <p:spPr>
+          <a:xfrm>
+            <a:off x="7786800" y="13392000"/>
+            <a:ext cx="4250400" cy="612000"/>
+          </a:xfrm>
+          <a:prstGeom prst="rect">
+            <a:avLst/>
+          </a:prstGeom>
+          <a:noFill/>
+        </p:spPr>
+        <p:txBody>
+          <a:bodyPr wrap="square" lIns="0" rIns="0" tIns="0" bIns="0">
+            <a:spAutoFit/>
+          </a:bodyPr>
+          <a:lstStyle/>
+          <a:p>
+            <a:pPr algn="l">
+              <a:lnSpc>
+                <a:spcPct val="118000"/>
+              </a:lnSpc>
+              <a:spcAft>
+                <a:spcPts val="0"/>
+              </a:spcAft>
+            </a:pPr>
+            <a:r>
+              <a:rPr sz="3247" b="1" i="0">
+                <a:solidFill>
+                  <a:srgbClr val="141E41"/>
+                </a:solidFill>
+                <a:latin typeface="Consolas"/>
+              </a:rPr>
+              <a:t>+16.35 in 100</a:t>
+            </a:r>
+          </a:p>
+        </p:txBody>
+      </p:sp>
+      <p:sp>
+        <p:nvSpPr>
+          <p:cNvPr id="169" name="TextBox 168"/>
+          <p:cNvSpPr txBox="1"/>
+          <p:nvPr/>
+        </p:nvSpPr>
+        <p:spPr>
+          <a:xfrm>
+            <a:off x="7786800" y="13950000"/>
+            <a:ext cx="4250400" cy="324000"/>
+          </a:xfrm>
+          <a:prstGeom prst="rect">
+            <a:avLst/>
+          </a:prstGeom>
+          <a:noFill/>
+        </p:spPr>
+        <p:txBody>
+          <a:bodyPr wrap="square" lIns="0" rIns="0" tIns="0" bIns="0">
+            <a:spAutoFit/>
+          </a:bodyPr>
+          <a:lstStyle/>
+          <a:p>
+            <a:pPr algn="l">
+              <a:lnSpc>
+                <a:spcPct val="118000"/>
+              </a:lnSpc>
+              <a:spcAft>
+                <a:spcPts val="0"/>
+              </a:spcAft>
+            </a:pPr>
+            <a:r>
+              <a:rPr sz="1059" b="0" i="0">
+                <a:solidFill>
+                  <a:srgbClr val="5D6787"/>
+                </a:solidFill>
+                <a:latin typeface="Consolas"/>
+              </a:rPr>
+              <a:t>IN HINDSIGHT, BEST OF 8 · VS ONE FIXED CHOICE</a:t>
+            </a:r>
+          </a:p>
+        </p:txBody>
+      </p:sp>
+      <p:sp>
+        <p:nvSpPr>
+          <p:cNvPr id="170" name="TextBox 169"/>
+          <p:cNvSpPr txBox="1"/>
+          <p:nvPr/>
+        </p:nvSpPr>
+        <p:spPr>
+          <a:xfrm>
+            <a:off x="12037200" y="13392000"/>
+            <a:ext cx="4250400" cy="612000"/>
+          </a:xfrm>
+          <a:prstGeom prst="rect">
+            <a:avLst/>
+          </a:prstGeom>
+          <a:noFill/>
+        </p:spPr>
+        <p:txBody>
+          <a:bodyPr wrap="square" lIns="0" rIns="0" tIns="0" bIns="0">
+            <a:spAutoFit/>
+          </a:bodyPr>
+          <a:lstStyle/>
+          <a:p>
+            <a:pPr algn="l">
+              <a:lnSpc>
+                <a:spcPct val="118000"/>
+              </a:lnSpc>
+              <a:spcAft>
+                <a:spcPts val="0"/>
+              </a:spcAft>
+            </a:pPr>
+            <a:r>
+              <a:rPr sz="3247" b="1" i="0">
+                <a:solidFill>
+                  <a:srgbClr val="141E41"/>
+                </a:solidFill>
+                <a:latin typeface="Consolas"/>
+              </a:rPr>
+              <a:t>0 of 8</a:t>
+            </a:r>
+          </a:p>
+        </p:txBody>
+      </p:sp>
+      <p:sp>
+        <p:nvSpPr>
+          <p:cNvPr id="171" name="TextBox 170"/>
+          <p:cNvSpPr txBox="1"/>
+          <p:nvPr/>
+        </p:nvSpPr>
+        <p:spPr>
+          <a:xfrm>
+            <a:off x="12037200" y="13950000"/>
+            <a:ext cx="4250400" cy="324000"/>
+          </a:xfrm>
+          <a:prstGeom prst="rect">
+            <a:avLst/>
+          </a:prstGeom>
+          <a:noFill/>
+        </p:spPr>
+        <p:txBody>
+          <a:bodyPr wrap="square" lIns="0" rIns="0" tIns="0" bIns="0">
+            <a:spAutoFit/>
+          </a:bodyPr>
+          <a:lstStyle/>
+          <a:p>
+            <a:pPr algn="l">
+              <a:lnSpc>
+                <a:spcPct val="118000"/>
+              </a:lnSpc>
+              <a:spcAft>
+                <a:spcPts val="0"/>
+              </a:spcAft>
+            </a:pPr>
+            <a:r>
+              <a:rPr sz="1059" b="0" i="0">
+                <a:solidFill>
+                  <a:srgbClr val="5D6787"/>
+                </a:solidFill>
+                <a:latin typeface="Consolas"/>
+              </a:rPr>
+              <a:t>LEARNED CHOICES THAT BEAT ALWAYS-CHEAPEST</a:t>
+            </a:r>
+          </a:p>
+        </p:txBody>
+      </p:sp>
+      <p:sp>
+        <p:nvSpPr>
+          <p:cNvPr id="172" name="TextBox 171"/>
+          <p:cNvSpPr txBox="1"/>
+          <p:nvPr/>
+        </p:nvSpPr>
+        <p:spPr>
+          <a:xfrm>
+            <a:off x="16287600" y="13392000"/>
+            <a:ext cx="4250400" cy="612000"/>
+          </a:xfrm>
+          <a:prstGeom prst="rect">
+            <a:avLst/>
+          </a:prstGeom>
+          <a:noFill/>
+        </p:spPr>
+        <p:txBody>
+          <a:bodyPr wrap="square" lIns="0" rIns="0" tIns="0" bIns="0">
+            <a:spAutoFit/>
+          </a:bodyPr>
+          <a:lstStyle/>
+          <a:p>
+            <a:pPr algn="l">
+              <a:lnSpc>
+                <a:spcPct val="118000"/>
+              </a:lnSpc>
+              <a:spcAft>
+                <a:spcPts val="0"/>
+              </a:spcAft>
+            </a:pPr>
+            <a:r>
+              <a:rPr sz="3247" b="1" i="0">
+                <a:solidFill>
+                  <a:srgbClr val="141E41"/>
+                </a:solidFill>
+                <a:latin typeface="Consolas"/>
+              </a:rPr>
+              <a:t>1 of 8</a:t>
+            </a:r>
+          </a:p>
+        </p:txBody>
+      </p:sp>
+      <p:sp>
+        <p:nvSpPr>
+          <p:cNvPr id="173" name="TextBox 172"/>
+          <p:cNvSpPr txBox="1"/>
+          <p:nvPr/>
+        </p:nvSpPr>
+        <p:spPr>
+          <a:xfrm>
+            <a:off x="16287600" y="13950000"/>
+            <a:ext cx="4250400" cy="324000"/>
+          </a:xfrm>
+          <a:prstGeom prst="rect">
+            <a:avLst/>
+          </a:prstGeom>
+          <a:noFill/>
+        </p:spPr>
+        <p:txBody>
+          <a:bodyPr wrap="square" lIns="0" rIns="0" tIns="0" bIns="0">
+            <a:spAutoFit/>
+          </a:bodyPr>
+          <a:lstStyle/>
+          <a:p>
+            <a:pPr algn="l">
+              <a:lnSpc>
+                <a:spcPct val="118000"/>
+              </a:lnSpc>
+              <a:spcAft>
+                <a:spcPts val="0"/>
+              </a:spcAft>
+            </a:pPr>
+            <a:r>
+              <a:rPr sz="1059" b="0" i="0">
+                <a:solidFill>
+                  <a:srgbClr val="5D6787"/>
+                </a:solidFill>
+                <a:latin typeface="Consolas"/>
+              </a:rPr>
+              <a:t>HINDSIGHT CHOICES THAT BEAT ALWAYS-CHEAPEST</a:t>
+            </a:r>
+          </a:p>
+        </p:txBody>
+      </p:sp>
+      <p:sp>
+        <p:nvSpPr>
+          <p:cNvPr id="174" name="Rectangle 173"/>
           <p:cNvSpPr/>
           <p:nvPr/>
         </p:nvSpPr>
         <p:spPr>
           <a:xfrm>
-            <a:off x="727200" y="15189563"/>
-            <a:ext cx="2078400" cy="864000"/>
+            <a:off x="7534800" y="14526000"/>
+            <a:ext cx="13255200" cy="8769057"/>
           </a:xfrm>
           <a:prstGeom prst="rect">
             <a:avLst/>
@@ -6402,20 +9296,20 @@
       </p:sp>
       <p:sp>
         <p:nvSpPr>
-          <p:cNvPr id="128" name="Rectangle 127"/>
+          <p:cNvPr id="175" name="Rectangle 174"/>
           <p:cNvSpPr/>
           <p:nvPr/>
         </p:nvSpPr>
         <p:spPr>
           <a:xfrm>
-            <a:off x="727200" y="15189563"/>
-            <a:ext cx="2078400" cy="43200"/>
+            <a:off x="7534800" y="14526000"/>
+            <a:ext cx="13255200" cy="50400"/>
           </a:xfrm>
           <a:prstGeom prst="rect">
             <a:avLst/>
           </a:prstGeom>
           <a:solidFill>
-            <a:srgbClr val="1F5FD6"/>
+            <a:srgbClr val="5049F9"/>
           </a:solidFill>
           <a:ln>
             <a:noFill/>
@@ -6444,100 +9338,40 @@
           </a:p>
         </p:txBody>
       </p:sp>
-      <p:sp>
-        <p:nvSpPr>
-          <p:cNvPr id="129" name="TextBox 128"/>
+      <p:pic>
+        <p:nvPicPr>
+          <p:cNvPr id="176" name="Picture 175" descr="poster_dominance_plane.png"/>
+          <p:cNvPicPr>
+            <a:picLocks noChangeAspect="1"/>
+          </p:cNvPicPr>
+          <p:nvPr/>
+        </p:nvPicPr>
+        <p:blipFill>
+          <a:blip r:embed="rId10"/>
+          <a:stretch>
+            <a:fillRect/>
+          </a:stretch>
+        </p:blipFill>
+        <p:spPr>
+          <a:xfrm>
+            <a:off x="7642800" y="14684400"/>
+            <a:ext cx="13039200" cy="8502657"/>
+          </a:xfrm>
+          <a:prstGeom prst="rect">
+            <a:avLst/>
+          </a:prstGeom>
+        </p:spPr>
+      </p:pic>
+      <p:sp>
+        <p:nvSpPr>
+          <p:cNvPr id="177" name="TextBox 176"/>
           <p:cNvSpPr txBox="1"/>
           <p:nvPr/>
         </p:nvSpPr>
         <p:spPr>
           <a:xfrm>
-            <a:off x="835200" y="15297563"/>
-            <a:ext cx="1080000" cy="216000"/>
-          </a:xfrm>
-          <a:prstGeom prst="rect">
-            <a:avLst/>
-          </a:prstGeom>
-          <a:noFill/>
-        </p:spPr>
-        <p:txBody>
-          <a:bodyPr wrap="square" lIns="0" rIns="0" tIns="0" bIns="0">
-            <a:spAutoFit/>
-          </a:bodyPr>
-          <a:lstStyle/>
-          <a:p>
-            <a:pPr algn="l">
-              <a:lnSpc>
-                <a:spcPct val="120000"/>
-              </a:lnSpc>
-              <a:spcAft>
-                <a:spcPts val="0"/>
-              </a:spcAft>
-            </a:pPr>
-            <a:r>
-              <a:rPr sz="1059" b="1" i="0">
-                <a:solidFill>
-                  <a:srgbClr val="1F5FD6"/>
-                </a:solidFill>
-                <a:latin typeface="Consolas"/>
-              </a:rPr>
-              <a:t>LOOK</a:t>
-            </a:r>
-          </a:p>
-        </p:txBody>
-      </p:sp>
-      <p:sp>
-        <p:nvSpPr>
-          <p:cNvPr id="130" name="TextBox 129"/>
-          <p:cNvSpPr txBox="1"/>
-          <p:nvPr/>
-        </p:nvSpPr>
-        <p:spPr>
-          <a:xfrm>
-            <a:off x="835200" y="15459563"/>
-            <a:ext cx="576000" cy="540000"/>
-          </a:xfrm>
-          <a:prstGeom prst="rect">
-            <a:avLst/>
-          </a:prstGeom>
-          <a:noFill/>
-        </p:spPr>
-        <p:txBody>
-          <a:bodyPr wrap="square" lIns="0" rIns="0" tIns="0" bIns="0">
-            <a:spAutoFit/>
-          </a:bodyPr>
-          <a:lstStyle/>
-          <a:p>
-            <a:pPr algn="l">
-              <a:lnSpc>
-                <a:spcPct val="100000"/>
-              </a:lnSpc>
-              <a:spcAft>
-                <a:spcPts val="0"/>
-              </a:spcAft>
-            </a:pPr>
-            <a:r>
-              <a:rPr sz="3247" b="1" i="0">
-                <a:solidFill>
-                  <a:srgbClr val="14855F"/>
-                </a:solidFill>
-                <a:latin typeface="Consolas"/>
-              </a:rPr>
-              <a:t>✓</a:t>
-            </a:r>
-          </a:p>
-        </p:txBody>
-      </p:sp>
-      <p:sp>
-        <p:nvSpPr>
-          <p:cNvPr id="131" name="TextBox 130"/>
-          <p:cNvSpPr txBox="1"/>
-          <p:nvPr/>
-        </p:nvSpPr>
-        <p:spPr>
-          <a:xfrm>
-            <a:off x="1447200" y="15513563"/>
-            <a:ext cx="1286400" cy="504000"/>
+            <a:off x="7534800" y="23385057"/>
+            <a:ext cx="13255200" cy="511369"/>
           </a:xfrm>
           <a:prstGeom prst="rect">
             <a:avLst/>
@@ -6555,520 +9389,76 @@
                 <a:spcPct val="132000"/>
               </a:lnSpc>
               <a:spcAft>
-                <a:spcPts val="0"/>
+                <a:spcPts val="425"/>
               </a:spcAft>
             </a:pPr>
             <a:r>
+              <a:rPr sz="1271" b="1" i="0">
+                <a:solidFill>
+                  <a:srgbClr val="5D6787"/>
+                </a:solidFill>
+                <a:latin typeface="Arial"/>
+              </a:rPr>
+              <a:t>Fig 2.</a:t>
+            </a:r>
+            <a:r>
               <a:rPr sz="1271" b="0" i="0">
                 <a:solidFill>
-                  <a:srgbClr val="12162E"/>
+                  <a:srgbClr val="5D6787"/>
                 </a:solidFill>
                 <a:latin typeface="Arial"/>
               </a:rPr>
-              <a:t>2 steps</a:t>
-            </a:r>
-          </a:p>
-          <a:p>
-            <a:pPr algn="l">
-              <a:lnSpc>
-                <a:spcPct val="132000"/>
-              </a:lnSpc>
-              <a:spcAft>
-                <a:spcPts val="0"/>
-              </a:spcAft>
-            </a:pPr>
+              <a:t> Every way of choosing, in every setting, compared with one fixed rule: </a:t>
+            </a:r>
+            <a:r>
+              <a:rPr sz="1271" b="1" i="0">
+                <a:solidFill>
+                  <a:srgbClr val="5D6787"/>
+                </a:solidFill>
+                <a:latin typeface="Arial"/>
+              </a:rPr>
+              <a:t>always use the cheapest way of seeing</a:t>
+            </a:r>
             <a:r>
               <a:rPr sz="1271" b="0" i="0">
                 <a:solidFill>
-                  <a:srgbClr val="12162E"/>
+                  <a:srgbClr val="5D6787"/>
                 </a:solidFill>
                 <a:latin typeface="Arial"/>
               </a:rPr>
-              <a:t>$0.007</a:t>
-            </a:r>
-          </a:p>
-        </p:txBody>
-      </p:sp>
-      <p:sp>
-        <p:nvSpPr>
-          <p:cNvPr id="132" name="Rectangle 131"/>
-          <p:cNvSpPr/>
-          <p:nvPr/>
-        </p:nvSpPr>
-        <p:spPr>
-          <a:xfrm>
-            <a:off x="2913600" y="15189563"/>
-            <a:ext cx="2078400" cy="864000"/>
-          </a:xfrm>
-          <a:prstGeom prst="rect">
-            <a:avLst/>
-          </a:prstGeom>
-          <a:solidFill>
-            <a:srgbClr val="F7F9FD"/>
-          </a:solidFill>
-          <a:ln w="8890">
-            <a:solidFill>
-              <a:srgbClr val="DDE3F2"/>
-            </a:solidFill>
-          </a:ln>
-          <a:effectLst/>
-        </p:spPr>
-        <p:style>
-          <a:lnRef idx="1">
-            <a:schemeClr val="accent1"/>
-          </a:lnRef>
-          <a:fillRef idx="3">
-            <a:schemeClr val="accent1"/>
-          </a:fillRef>
-          <a:effectRef idx="2">
-            <a:schemeClr val="accent1"/>
-          </a:effectRef>
-          <a:fontRef idx="minor">
-            <a:schemeClr val="lt1"/>
-          </a:fontRef>
-        </p:style>
-        <p:txBody>
-          <a:bodyPr rtlCol="0" anchor="ctr" wrap="square"/>
-          <a:lstStyle/>
-          <a:p>
-            <a:pPr algn="ctr"/>
-          </a:p>
-        </p:txBody>
-      </p:sp>
-      <p:sp>
-        <p:nvSpPr>
-          <p:cNvPr id="133" name="Rectangle 132"/>
-          <p:cNvSpPr/>
-          <p:nvPr/>
-        </p:nvSpPr>
-        <p:spPr>
-          <a:xfrm>
-            <a:off x="2913600" y="15189563"/>
-            <a:ext cx="2078400" cy="43200"/>
-          </a:xfrm>
-          <a:prstGeom prst="rect">
-            <a:avLst/>
-          </a:prstGeom>
-          <a:solidFill>
-            <a:srgbClr val="E8720C"/>
-          </a:solidFill>
-          <a:ln>
-            <a:noFill/>
-          </a:ln>
-          <a:effectLst/>
-        </p:spPr>
-        <p:style>
-          <a:lnRef idx="1">
-            <a:schemeClr val="accent1"/>
-          </a:lnRef>
-          <a:fillRef idx="3">
-            <a:schemeClr val="accent1"/>
-          </a:fillRef>
-          <a:effectRef idx="2">
-            <a:schemeClr val="accent1"/>
-          </a:effectRef>
-          <a:fontRef idx="minor">
-            <a:schemeClr val="lt1"/>
-          </a:fontRef>
-        </p:style>
-        <p:txBody>
-          <a:bodyPr rtlCol="0" anchor="ctr" wrap="square"/>
-          <a:lstStyle/>
-          <a:p>
-            <a:pPr algn="ctr"/>
-          </a:p>
-        </p:txBody>
-      </p:sp>
-      <p:sp>
-        <p:nvSpPr>
-          <p:cNvPr id="134" name="TextBox 133"/>
+              <a:t> (★). A win lands in the shaded region — cheaper </a:t>
+            </a:r>
+            <a:r>
+              <a:rPr sz="1271" b="0" i="1">
+                <a:solidFill>
+                  <a:srgbClr val="5D6787"/>
+                </a:solidFill>
+                <a:latin typeface="Arial"/>
+              </a:rPr>
+              <a:t>and</a:t>
+            </a:r>
+            <a:r>
+              <a:rPr sz="1271" b="0" i="0">
+                <a:solidFill>
+                  <a:srgbClr val="5D6787"/>
+                </a:solidFill>
+                <a:latin typeface="Arial"/>
+              </a:rPr>
+              <a:t> no worse. Always-cheapest is cheapest on average, not on every task, which is why a few points sit left of it. Learned choices are scored only on tasks they never saw.</a:t>
+            </a:r>
+          </a:p>
+        </p:txBody>
+      </p:sp>
+      <p:sp>
+        <p:nvSpPr>
+          <p:cNvPr id="178" name="TextBox 177"/>
           <p:cNvSpPr txBox="1"/>
           <p:nvPr/>
         </p:nvSpPr>
         <p:spPr>
           <a:xfrm>
-            <a:off x="3021600" y="15297563"/>
-            <a:ext cx="1080000" cy="216000"/>
-          </a:xfrm>
-          <a:prstGeom prst="rect">
-            <a:avLst/>
-          </a:prstGeom>
-          <a:noFill/>
-        </p:spPr>
-        <p:txBody>
-          <a:bodyPr wrap="square" lIns="0" rIns="0" tIns="0" bIns="0">
-            <a:spAutoFit/>
-          </a:bodyPr>
-          <a:lstStyle/>
-          <a:p>
-            <a:pPr algn="l">
-              <a:lnSpc>
-                <a:spcPct val="120000"/>
-              </a:lnSpc>
-              <a:spcAft>
-                <a:spcPts val="0"/>
-              </a:spcAft>
-            </a:pPr>
-            <a:r>
-              <a:rPr sz="1059" b="1" i="0">
-                <a:solidFill>
-                  <a:srgbClr val="E8720C"/>
-                </a:solidFill>
-                <a:latin typeface="Consolas"/>
-              </a:rPr>
-              <a:t>READ</a:t>
-            </a:r>
-          </a:p>
-        </p:txBody>
-      </p:sp>
-      <p:sp>
-        <p:nvSpPr>
-          <p:cNvPr id="135" name="TextBox 134"/>
-          <p:cNvSpPr txBox="1"/>
-          <p:nvPr/>
-        </p:nvSpPr>
-        <p:spPr>
-          <a:xfrm>
-            <a:off x="3021600" y="15459563"/>
-            <a:ext cx="576000" cy="540000"/>
-          </a:xfrm>
-          <a:prstGeom prst="rect">
-            <a:avLst/>
-          </a:prstGeom>
-          <a:noFill/>
-        </p:spPr>
-        <p:txBody>
-          <a:bodyPr wrap="square" lIns="0" rIns="0" tIns="0" bIns="0">
-            <a:spAutoFit/>
-          </a:bodyPr>
-          <a:lstStyle/>
-          <a:p>
-            <a:pPr algn="l">
-              <a:lnSpc>
-                <a:spcPct val="100000"/>
-              </a:lnSpc>
-              <a:spcAft>
-                <a:spcPts val="0"/>
-              </a:spcAft>
-            </a:pPr>
-            <a:r>
-              <a:rPr sz="3247" b="1" i="0">
-                <a:solidFill>
-                  <a:srgbClr val="C2352B"/>
-                </a:solidFill>
-                <a:latin typeface="Consolas"/>
-              </a:rPr>
-              <a:t>✗</a:t>
-            </a:r>
-          </a:p>
-        </p:txBody>
-      </p:sp>
-      <p:sp>
-        <p:nvSpPr>
-          <p:cNvPr id="136" name="TextBox 135"/>
-          <p:cNvSpPr txBox="1"/>
-          <p:nvPr/>
-        </p:nvSpPr>
-        <p:spPr>
-          <a:xfrm>
-            <a:off x="3633600" y="15513563"/>
-            <a:ext cx="1286400" cy="504000"/>
-          </a:xfrm>
-          <a:prstGeom prst="rect">
-            <a:avLst/>
-          </a:prstGeom>
-          <a:noFill/>
-        </p:spPr>
-        <p:txBody>
-          <a:bodyPr wrap="square" lIns="0" rIns="0" tIns="0" bIns="0">
-            <a:spAutoFit/>
-          </a:bodyPr>
-          <a:lstStyle/>
-          <a:p>
-            <a:pPr algn="l">
-              <a:lnSpc>
-                <a:spcPct val="132000"/>
-              </a:lnSpc>
-              <a:spcAft>
-                <a:spcPts val="0"/>
-              </a:spcAft>
-            </a:pPr>
-            <a:r>
-              <a:rPr sz="1271" b="0" i="0">
-                <a:solidFill>
-                  <a:srgbClr val="12162E"/>
-                </a:solidFill>
-                <a:latin typeface="Arial"/>
-              </a:rPr>
-              <a:t>21 steps</a:t>
-            </a:r>
-          </a:p>
-          <a:p>
-            <a:pPr algn="l">
-              <a:lnSpc>
-                <a:spcPct val="132000"/>
-              </a:lnSpc>
-              <a:spcAft>
-                <a:spcPts val="0"/>
-              </a:spcAft>
-            </a:pPr>
-            <a:r>
-              <a:rPr sz="1271" b="0" i="0">
-                <a:solidFill>
-                  <a:srgbClr val="12162E"/>
-                </a:solidFill>
-                <a:latin typeface="Arial"/>
-              </a:rPr>
-              <a:t>$0.096</a:t>
-            </a:r>
-          </a:p>
-        </p:txBody>
-      </p:sp>
-      <p:sp>
-        <p:nvSpPr>
-          <p:cNvPr id="137" name="Rectangle 136"/>
-          <p:cNvSpPr/>
-          <p:nvPr/>
-        </p:nvSpPr>
-        <p:spPr>
-          <a:xfrm>
-            <a:off x="5100000" y="15189563"/>
-            <a:ext cx="2078400" cy="864000"/>
-          </a:xfrm>
-          <a:prstGeom prst="rect">
-            <a:avLst/>
-          </a:prstGeom>
-          <a:solidFill>
-            <a:srgbClr val="F7F9FD"/>
-          </a:solidFill>
-          <a:ln w="8890">
-            <a:solidFill>
-              <a:srgbClr val="DDE3F2"/>
-            </a:solidFill>
-          </a:ln>
-          <a:effectLst/>
-        </p:spPr>
-        <p:style>
-          <a:lnRef idx="1">
-            <a:schemeClr val="accent1"/>
-          </a:lnRef>
-          <a:fillRef idx="3">
-            <a:schemeClr val="accent1"/>
-          </a:fillRef>
-          <a:effectRef idx="2">
-            <a:schemeClr val="accent1"/>
-          </a:effectRef>
-          <a:fontRef idx="minor">
-            <a:schemeClr val="lt1"/>
-          </a:fontRef>
-        </p:style>
-        <p:txBody>
-          <a:bodyPr rtlCol="0" anchor="ctr" wrap="square"/>
-          <a:lstStyle/>
-          <a:p>
-            <a:pPr algn="ctr"/>
-          </a:p>
-        </p:txBody>
-      </p:sp>
-      <p:sp>
-        <p:nvSpPr>
-          <p:cNvPr id="138" name="Rectangle 137"/>
-          <p:cNvSpPr/>
-          <p:nvPr/>
-        </p:nvSpPr>
-        <p:spPr>
-          <a:xfrm>
-            <a:off x="5100000" y="15189563"/>
-            <a:ext cx="2078400" cy="43200"/>
-          </a:xfrm>
-          <a:prstGeom prst="rect">
-            <a:avLst/>
-          </a:prstGeom>
-          <a:solidFill>
-            <a:srgbClr val="14855F"/>
-          </a:solidFill>
-          <a:ln>
-            <a:noFill/>
-          </a:ln>
-          <a:effectLst/>
-        </p:spPr>
-        <p:style>
-          <a:lnRef idx="1">
-            <a:schemeClr val="accent1"/>
-          </a:lnRef>
-          <a:fillRef idx="3">
-            <a:schemeClr val="accent1"/>
-          </a:fillRef>
-          <a:effectRef idx="2">
-            <a:schemeClr val="accent1"/>
-          </a:effectRef>
-          <a:fontRef idx="minor">
-            <a:schemeClr val="lt1"/>
-          </a:fontRef>
-        </p:style>
-        <p:txBody>
-          <a:bodyPr rtlCol="0" anchor="ctr" wrap="square"/>
-          <a:lstStyle/>
-          <a:p>
-            <a:pPr algn="ctr"/>
-          </a:p>
-        </p:txBody>
-      </p:sp>
-      <p:sp>
-        <p:nvSpPr>
-          <p:cNvPr id="139" name="TextBox 138"/>
-          <p:cNvSpPr txBox="1"/>
-          <p:nvPr/>
-        </p:nvSpPr>
-        <p:spPr>
-          <a:xfrm>
-            <a:off x="5208000" y="15297563"/>
-            <a:ext cx="1080000" cy="216000"/>
-          </a:xfrm>
-          <a:prstGeom prst="rect">
-            <a:avLst/>
-          </a:prstGeom>
-          <a:noFill/>
-        </p:spPr>
-        <p:txBody>
-          <a:bodyPr wrap="square" lIns="0" rIns="0" tIns="0" bIns="0">
-            <a:spAutoFit/>
-          </a:bodyPr>
-          <a:lstStyle/>
-          <a:p>
-            <a:pPr algn="l">
-              <a:lnSpc>
-                <a:spcPct val="120000"/>
-              </a:lnSpc>
-              <a:spcAft>
-                <a:spcPts val="0"/>
-              </a:spcAft>
-            </a:pPr>
-            <a:r>
-              <a:rPr sz="1059" b="1" i="0">
-                <a:solidFill>
-                  <a:srgbClr val="14855F"/>
-                </a:solidFill>
-                <a:latin typeface="Consolas"/>
-              </a:rPr>
-              <a:t>BOTH</a:t>
-            </a:r>
-          </a:p>
-        </p:txBody>
-      </p:sp>
-      <p:sp>
-        <p:nvSpPr>
-          <p:cNvPr id="140" name="TextBox 139"/>
-          <p:cNvSpPr txBox="1"/>
-          <p:nvPr/>
-        </p:nvSpPr>
-        <p:spPr>
-          <a:xfrm>
-            <a:off x="5208000" y="15459563"/>
-            <a:ext cx="576000" cy="540000"/>
-          </a:xfrm>
-          <a:prstGeom prst="rect">
-            <a:avLst/>
-          </a:prstGeom>
-          <a:noFill/>
-        </p:spPr>
-        <p:txBody>
-          <a:bodyPr wrap="square" lIns="0" rIns="0" tIns="0" bIns="0">
-            <a:spAutoFit/>
-          </a:bodyPr>
-          <a:lstStyle/>
-          <a:p>
-            <a:pPr algn="l">
-              <a:lnSpc>
-                <a:spcPct val="100000"/>
-              </a:lnSpc>
-              <a:spcAft>
-                <a:spcPts val="0"/>
-              </a:spcAft>
-            </a:pPr>
-            <a:r>
-              <a:rPr sz="3247" b="1" i="0">
-                <a:solidFill>
-                  <a:srgbClr val="14855F"/>
-                </a:solidFill>
-                <a:latin typeface="Consolas"/>
-              </a:rPr>
-              <a:t>✓</a:t>
-            </a:r>
-          </a:p>
-        </p:txBody>
-      </p:sp>
-      <p:sp>
-        <p:nvSpPr>
-          <p:cNvPr id="141" name="TextBox 140"/>
-          <p:cNvSpPr txBox="1"/>
-          <p:nvPr/>
-        </p:nvSpPr>
-        <p:spPr>
-          <a:xfrm>
-            <a:off x="5820000" y="15513563"/>
-            <a:ext cx="1286400" cy="504000"/>
-          </a:xfrm>
-          <a:prstGeom prst="rect">
-            <a:avLst/>
-          </a:prstGeom>
-          <a:noFill/>
-        </p:spPr>
-        <p:txBody>
-          <a:bodyPr wrap="square" lIns="0" rIns="0" tIns="0" bIns="0">
-            <a:spAutoFit/>
-          </a:bodyPr>
-          <a:lstStyle/>
-          <a:p>
-            <a:pPr algn="l">
-              <a:lnSpc>
-                <a:spcPct val="132000"/>
-              </a:lnSpc>
-              <a:spcAft>
-                <a:spcPts val="0"/>
-              </a:spcAft>
-            </a:pPr>
-            <a:r>
-              <a:rPr sz="1271" b="0" i="0">
-                <a:solidFill>
-                  <a:srgbClr val="12162E"/>
-                </a:solidFill>
-                <a:latin typeface="Arial"/>
-              </a:rPr>
-              <a:t>3 steps</a:t>
-            </a:r>
-          </a:p>
-          <a:p>
-            <a:pPr algn="l">
-              <a:lnSpc>
-                <a:spcPct val="132000"/>
-              </a:lnSpc>
-              <a:spcAft>
-                <a:spcPts val="0"/>
-              </a:spcAft>
-            </a:pPr>
-            <a:r>
-              <a:rPr sz="1271" b="0" i="0">
-                <a:solidFill>
-                  <a:srgbClr val="12162E"/>
-                </a:solidFill>
-                <a:latin typeface="Arial"/>
-              </a:rPr>
-              <a:t>$0.014</a:t>
-            </a:r>
-          </a:p>
-        </p:txBody>
-      </p:sp>
-      <p:sp>
-        <p:nvSpPr>
-          <p:cNvPr id="142" name="TextBox 141"/>
-          <p:cNvSpPr txBox="1"/>
-          <p:nvPr/>
-        </p:nvSpPr>
-        <p:spPr>
-          <a:xfrm>
-            <a:off x="727200" y="16341563"/>
-            <a:ext cx="6451200" cy="645563"/>
+            <a:off x="7534800" y="24004426"/>
+            <a:ext cx="13255200" cy="2188690"/>
           </a:xfrm>
           <a:prstGeom prst="rect">
             <a:avLst/>
@@ -7096,805 +9486,36 @@
                 </a:solidFill>
                 <a:latin typeface="Arial"/>
               </a:rPr>
-              <a:t>“Navigate to my listing of the blue bike and change the price to $85.50 (including in the description).”</a:t>
-            </a:r>
-          </a:p>
-        </p:txBody>
-      </p:sp>
-      <p:sp>
-        <p:nvSpPr>
-          <p:cNvPr id="143" name="Rectangle 142"/>
-          <p:cNvSpPr/>
-          <p:nvPr/>
-        </p:nvSpPr>
-        <p:spPr>
-          <a:xfrm>
-            <a:off x="727200" y="17077126"/>
-            <a:ext cx="6451200" cy="3024000"/>
-          </a:xfrm>
-          <a:prstGeom prst="rect">
-            <a:avLst/>
-          </a:prstGeom>
-          <a:noFill/>
-          <a:ln w="8890">
-            <a:solidFill>
-              <a:srgbClr val="DDE3F2"/>
-            </a:solidFill>
-          </a:ln>
-          <a:effectLst/>
-        </p:spPr>
-        <p:style>
-          <a:lnRef idx="1">
-            <a:schemeClr val="accent1"/>
-          </a:lnRef>
-          <a:fillRef idx="3">
-            <a:schemeClr val="accent1"/>
-          </a:fillRef>
-          <a:effectRef idx="2">
-            <a:schemeClr val="accent1"/>
-          </a:effectRef>
-          <a:fontRef idx="minor">
-            <a:schemeClr val="lt1"/>
-          </a:fontRef>
-        </p:style>
-        <p:txBody>
-          <a:bodyPr rtlCol="0" anchor="ctr" wrap="square"/>
-          <a:lstStyle/>
-          <a:p>
-            <a:pPr algn="ctr"/>
-          </a:p>
-        </p:txBody>
-      </p:sp>
-      <p:pic>
-        <p:nvPicPr>
-          <p:cNvPr id="144" name="Picture 143" descr="thumb_76.png"/>
-          <p:cNvPicPr>
-            <a:picLocks noChangeAspect="1"/>
-          </p:cNvPicPr>
-          <p:nvPr/>
-        </p:nvPicPr>
-        <p:blipFill>
-          <a:blip r:embed="rId6"/>
-          <a:stretch>
-            <a:fillRect/>
-          </a:stretch>
-        </p:blipFill>
-        <p:spPr>
-          <a:xfrm>
-            <a:off x="727200" y="17077126"/>
-            <a:ext cx="6451200" cy="3024000"/>
-          </a:xfrm>
-          <a:prstGeom prst="rect">
-            <a:avLst/>
-          </a:prstGeom>
-        </p:spPr>
-      </p:pic>
-      <p:sp>
-        <p:nvSpPr>
-          <p:cNvPr id="145" name="Rectangle 144"/>
-          <p:cNvSpPr/>
-          <p:nvPr/>
-        </p:nvSpPr>
-        <p:spPr>
-          <a:xfrm>
-            <a:off x="727200" y="20191126"/>
-            <a:ext cx="2078400" cy="864000"/>
-          </a:xfrm>
-          <a:prstGeom prst="rect">
-            <a:avLst/>
-          </a:prstGeom>
-          <a:solidFill>
-            <a:srgbClr val="F7F9FD"/>
-          </a:solidFill>
-          <a:ln w="8890">
-            <a:solidFill>
-              <a:srgbClr val="DDE3F2"/>
-            </a:solidFill>
-          </a:ln>
-          <a:effectLst/>
-        </p:spPr>
-        <p:style>
-          <a:lnRef idx="1">
-            <a:schemeClr val="accent1"/>
-          </a:lnRef>
-          <a:fillRef idx="3">
-            <a:schemeClr val="accent1"/>
-          </a:fillRef>
-          <a:effectRef idx="2">
-            <a:schemeClr val="accent1"/>
-          </a:effectRef>
-          <a:fontRef idx="minor">
-            <a:schemeClr val="lt1"/>
-          </a:fontRef>
-        </p:style>
-        <p:txBody>
-          <a:bodyPr rtlCol="0" anchor="ctr" wrap="square"/>
-          <a:lstStyle/>
-          <a:p>
-            <a:pPr algn="ctr"/>
-          </a:p>
-        </p:txBody>
-      </p:sp>
-      <p:sp>
-        <p:nvSpPr>
-          <p:cNvPr id="146" name="Rectangle 145"/>
-          <p:cNvSpPr/>
-          <p:nvPr/>
-        </p:nvSpPr>
-        <p:spPr>
-          <a:xfrm>
-            <a:off x="727200" y="20191126"/>
-            <a:ext cx="2078400" cy="43200"/>
-          </a:xfrm>
-          <a:prstGeom prst="rect">
-            <a:avLst/>
-          </a:prstGeom>
-          <a:solidFill>
-            <a:srgbClr val="1F5FD6"/>
-          </a:solidFill>
-          <a:ln>
-            <a:noFill/>
-          </a:ln>
-          <a:effectLst/>
-        </p:spPr>
-        <p:style>
-          <a:lnRef idx="1">
-            <a:schemeClr val="accent1"/>
-          </a:lnRef>
-          <a:fillRef idx="3">
-            <a:schemeClr val="accent1"/>
-          </a:fillRef>
-          <a:effectRef idx="2">
-            <a:schemeClr val="accent1"/>
-          </a:effectRef>
-          <a:fontRef idx="minor">
-            <a:schemeClr val="lt1"/>
-          </a:fontRef>
-        </p:style>
-        <p:txBody>
-          <a:bodyPr rtlCol="0" anchor="ctr" wrap="square"/>
-          <a:lstStyle/>
-          <a:p>
-            <a:pPr algn="ctr"/>
-          </a:p>
-        </p:txBody>
-      </p:sp>
-      <p:sp>
-        <p:nvSpPr>
-          <p:cNvPr id="147" name="TextBox 146"/>
-          <p:cNvSpPr txBox="1"/>
-          <p:nvPr/>
-        </p:nvSpPr>
-        <p:spPr>
-          <a:xfrm>
-            <a:off x="835200" y="20299126"/>
-            <a:ext cx="1080000" cy="216000"/>
-          </a:xfrm>
-          <a:prstGeom prst="rect">
-            <a:avLst/>
-          </a:prstGeom>
-          <a:noFill/>
-        </p:spPr>
-        <p:txBody>
-          <a:bodyPr wrap="square" lIns="0" rIns="0" tIns="0" bIns="0">
-            <a:spAutoFit/>
-          </a:bodyPr>
-          <a:lstStyle/>
-          <a:p>
-            <a:pPr algn="l">
-              <a:lnSpc>
-                <a:spcPct val="120000"/>
-              </a:lnSpc>
-              <a:spcAft>
-                <a:spcPts val="0"/>
-              </a:spcAft>
-            </a:pPr>
-            <a:r>
-              <a:rPr sz="1059" b="1" i="0">
-                <a:solidFill>
-                  <a:srgbClr val="1F5FD6"/>
-                </a:solidFill>
-                <a:latin typeface="Consolas"/>
-              </a:rPr>
-              <a:t>LOOK</a:t>
-            </a:r>
-          </a:p>
-        </p:txBody>
-      </p:sp>
-      <p:sp>
-        <p:nvSpPr>
-          <p:cNvPr id="148" name="TextBox 147"/>
-          <p:cNvSpPr txBox="1"/>
-          <p:nvPr/>
-        </p:nvSpPr>
-        <p:spPr>
-          <a:xfrm>
-            <a:off x="835200" y="20461126"/>
-            <a:ext cx="576000" cy="540000"/>
-          </a:xfrm>
-          <a:prstGeom prst="rect">
-            <a:avLst/>
-          </a:prstGeom>
-          <a:noFill/>
-        </p:spPr>
-        <p:txBody>
-          <a:bodyPr wrap="square" lIns="0" rIns="0" tIns="0" bIns="0">
-            <a:spAutoFit/>
-          </a:bodyPr>
-          <a:lstStyle/>
-          <a:p>
-            <a:pPr algn="l">
-              <a:lnSpc>
-                <a:spcPct val="100000"/>
-              </a:lnSpc>
-              <a:spcAft>
-                <a:spcPts val="0"/>
-              </a:spcAft>
-            </a:pPr>
-            <a:r>
-              <a:rPr sz="3247" b="1" i="0">
-                <a:solidFill>
-                  <a:srgbClr val="C2352B"/>
-                </a:solidFill>
-                <a:latin typeface="Consolas"/>
-              </a:rPr>
-              <a:t>✗</a:t>
-            </a:r>
-          </a:p>
-        </p:txBody>
-      </p:sp>
-      <p:sp>
-        <p:nvSpPr>
-          <p:cNvPr id="149" name="TextBox 148"/>
-          <p:cNvSpPr txBox="1"/>
-          <p:nvPr/>
-        </p:nvSpPr>
-        <p:spPr>
-          <a:xfrm>
-            <a:off x="1447200" y="20515126"/>
-            <a:ext cx="1286400" cy="504000"/>
-          </a:xfrm>
-          <a:prstGeom prst="rect">
-            <a:avLst/>
-          </a:prstGeom>
-          <a:noFill/>
-        </p:spPr>
-        <p:txBody>
-          <a:bodyPr wrap="square" lIns="0" rIns="0" tIns="0" bIns="0">
-            <a:spAutoFit/>
-          </a:bodyPr>
-          <a:lstStyle/>
-          <a:p>
-            <a:pPr algn="l">
-              <a:lnSpc>
-                <a:spcPct val="132000"/>
-              </a:lnSpc>
-              <a:spcAft>
-                <a:spcPts val="0"/>
-              </a:spcAft>
-            </a:pPr>
-            <a:r>
-              <a:rPr sz="1271" b="0" i="0">
+              <a:t>Choosing well would pay.</a:t>
+            </a:r>
+            <a:r>
+              <a:rPr sz="1764" b="0" i="0">
                 <a:solidFill>
                   <a:srgbClr val="12162E"/>
                 </a:solidFill>
                 <a:latin typeface="Arial"/>
               </a:rPr>
-              <a:t>30 steps</a:t>
-            </a:r>
-          </a:p>
-          <a:p>
-            <a:pPr algn="l">
-              <a:lnSpc>
-                <a:spcPct val="132000"/>
-              </a:lnSpc>
-              <a:spcAft>
-                <a:spcPts val="0"/>
-              </a:spcAft>
-            </a:pPr>
-            <a:r>
-              <a:rPr sz="1271" b="0" i="0">
+              <a:t> Picking the right way of seeing for each task after the fact would solve </a:t>
+            </a:r>
+            <a:r>
+              <a:rPr sz="1764" b="1" i="0">
                 <a:solidFill>
                   <a:srgbClr val="12162E"/>
                 </a:solidFill>
                 <a:latin typeface="Arial"/>
               </a:rPr>
-              <a:t>$0.116</a:t>
-            </a:r>
-          </a:p>
-        </p:txBody>
-      </p:sp>
-      <p:sp>
-        <p:nvSpPr>
-          <p:cNvPr id="150" name="Rectangle 149"/>
-          <p:cNvSpPr/>
-          <p:nvPr/>
-        </p:nvSpPr>
-        <p:spPr>
-          <a:xfrm>
-            <a:off x="2913600" y="20191126"/>
-            <a:ext cx="2078400" cy="864000"/>
-          </a:xfrm>
-          <a:prstGeom prst="rect">
-            <a:avLst/>
-          </a:prstGeom>
-          <a:solidFill>
-            <a:srgbClr val="F7F9FD"/>
-          </a:solidFill>
-          <a:ln w="8890">
-            <a:solidFill>
-              <a:srgbClr val="DDE3F2"/>
-            </a:solidFill>
-          </a:ln>
-          <a:effectLst/>
-        </p:spPr>
-        <p:style>
-          <a:lnRef idx="1">
-            <a:schemeClr val="accent1"/>
-          </a:lnRef>
-          <a:fillRef idx="3">
-            <a:schemeClr val="accent1"/>
-          </a:fillRef>
-          <a:effectRef idx="2">
-            <a:schemeClr val="accent1"/>
-          </a:effectRef>
-          <a:fontRef idx="minor">
-            <a:schemeClr val="lt1"/>
-          </a:fontRef>
-        </p:style>
-        <p:txBody>
-          <a:bodyPr rtlCol="0" anchor="ctr" wrap="square"/>
-          <a:lstStyle/>
-          <a:p>
-            <a:pPr algn="ctr"/>
-          </a:p>
-        </p:txBody>
-      </p:sp>
-      <p:sp>
-        <p:nvSpPr>
-          <p:cNvPr id="151" name="Rectangle 150"/>
-          <p:cNvSpPr/>
-          <p:nvPr/>
-        </p:nvSpPr>
-        <p:spPr>
-          <a:xfrm>
-            <a:off x="2913600" y="20191126"/>
-            <a:ext cx="2078400" cy="43200"/>
-          </a:xfrm>
-          <a:prstGeom prst="rect">
-            <a:avLst/>
-          </a:prstGeom>
-          <a:solidFill>
-            <a:srgbClr val="E8720C"/>
-          </a:solidFill>
-          <a:ln>
-            <a:noFill/>
-          </a:ln>
-          <a:effectLst/>
-        </p:spPr>
-        <p:style>
-          <a:lnRef idx="1">
-            <a:schemeClr val="accent1"/>
-          </a:lnRef>
-          <a:fillRef idx="3">
-            <a:schemeClr val="accent1"/>
-          </a:fillRef>
-          <a:effectRef idx="2">
-            <a:schemeClr val="accent1"/>
-          </a:effectRef>
-          <a:fontRef idx="minor">
-            <a:schemeClr val="lt1"/>
-          </a:fontRef>
-        </p:style>
-        <p:txBody>
-          <a:bodyPr rtlCol="0" anchor="ctr" wrap="square"/>
-          <a:lstStyle/>
-          <a:p>
-            <a:pPr algn="ctr"/>
-          </a:p>
-        </p:txBody>
-      </p:sp>
-      <p:sp>
-        <p:nvSpPr>
-          <p:cNvPr id="152" name="TextBox 151"/>
-          <p:cNvSpPr txBox="1"/>
-          <p:nvPr/>
-        </p:nvSpPr>
-        <p:spPr>
-          <a:xfrm>
-            <a:off x="3021600" y="20299126"/>
-            <a:ext cx="1080000" cy="216000"/>
-          </a:xfrm>
-          <a:prstGeom prst="rect">
-            <a:avLst/>
-          </a:prstGeom>
-          <a:noFill/>
-        </p:spPr>
-        <p:txBody>
-          <a:bodyPr wrap="square" lIns="0" rIns="0" tIns="0" bIns="0">
-            <a:spAutoFit/>
-          </a:bodyPr>
-          <a:lstStyle/>
-          <a:p>
-            <a:pPr algn="l">
-              <a:lnSpc>
-                <a:spcPct val="120000"/>
-              </a:lnSpc>
-              <a:spcAft>
-                <a:spcPts val="0"/>
-              </a:spcAft>
-            </a:pPr>
-            <a:r>
-              <a:rPr sz="1059" b="1" i="0">
-                <a:solidFill>
-                  <a:srgbClr val="E8720C"/>
-                </a:solidFill>
-                <a:latin typeface="Consolas"/>
-              </a:rPr>
-              <a:t>READ</a:t>
-            </a:r>
-          </a:p>
-        </p:txBody>
-      </p:sp>
-      <p:sp>
-        <p:nvSpPr>
-          <p:cNvPr id="153" name="TextBox 152"/>
-          <p:cNvSpPr txBox="1"/>
-          <p:nvPr/>
-        </p:nvSpPr>
-        <p:spPr>
-          <a:xfrm>
-            <a:off x="3021600" y="20461126"/>
-            <a:ext cx="576000" cy="540000"/>
-          </a:xfrm>
-          <a:prstGeom prst="rect">
-            <a:avLst/>
-          </a:prstGeom>
-          <a:noFill/>
-        </p:spPr>
-        <p:txBody>
-          <a:bodyPr wrap="square" lIns="0" rIns="0" tIns="0" bIns="0">
-            <a:spAutoFit/>
-          </a:bodyPr>
-          <a:lstStyle/>
-          <a:p>
-            <a:pPr algn="l">
-              <a:lnSpc>
-                <a:spcPct val="100000"/>
-              </a:lnSpc>
-              <a:spcAft>
-                <a:spcPts val="0"/>
-              </a:spcAft>
-            </a:pPr>
-            <a:r>
-              <a:rPr sz="3247" b="1" i="0">
-                <a:solidFill>
-                  <a:srgbClr val="14855F"/>
-                </a:solidFill>
-                <a:latin typeface="Consolas"/>
-              </a:rPr>
-              <a:t>✓</a:t>
-            </a:r>
-          </a:p>
-        </p:txBody>
-      </p:sp>
-      <p:sp>
-        <p:nvSpPr>
-          <p:cNvPr id="154" name="TextBox 153"/>
-          <p:cNvSpPr txBox="1"/>
-          <p:nvPr/>
-        </p:nvSpPr>
-        <p:spPr>
-          <a:xfrm>
-            <a:off x="3633600" y="20515126"/>
-            <a:ext cx="1286400" cy="504000"/>
-          </a:xfrm>
-          <a:prstGeom prst="rect">
-            <a:avLst/>
-          </a:prstGeom>
-          <a:noFill/>
-        </p:spPr>
-        <p:txBody>
-          <a:bodyPr wrap="square" lIns="0" rIns="0" tIns="0" bIns="0">
-            <a:spAutoFit/>
-          </a:bodyPr>
-          <a:lstStyle/>
-          <a:p>
-            <a:pPr algn="l">
-              <a:lnSpc>
-                <a:spcPct val="132000"/>
-              </a:lnSpc>
-              <a:spcAft>
-                <a:spcPts val="0"/>
-              </a:spcAft>
-            </a:pPr>
-            <a:r>
-              <a:rPr sz="1271" b="0" i="0">
+              <a:t>3.45 to 16.35 more tasks in every 100</a:t>
+            </a:r>
+            <a:r>
+              <a:rPr sz="1764" b="0" i="0">
                 <a:solidFill>
                   <a:srgbClr val="12162E"/>
                 </a:solidFill>
                 <a:latin typeface="Arial"/>
               </a:rPr>
-              <a:t>9 steps</a:t>
-            </a:r>
-          </a:p>
-          <a:p>
-            <a:pPr algn="l">
-              <a:lnSpc>
-                <a:spcPct val="132000"/>
-              </a:lnSpc>
-              <a:spcAft>
-                <a:spcPts val="0"/>
-              </a:spcAft>
-            </a:pPr>
-            <a:r>
-              <a:rPr sz="1271" b="0" i="0">
-                <a:solidFill>
-                  <a:srgbClr val="12162E"/>
-                </a:solidFill>
-                <a:latin typeface="Arial"/>
-              </a:rPr>
-              <a:t>$0.079</a:t>
-            </a:r>
-          </a:p>
-        </p:txBody>
-      </p:sp>
-      <p:sp>
-        <p:nvSpPr>
-          <p:cNvPr id="155" name="Rectangle 154"/>
-          <p:cNvSpPr/>
-          <p:nvPr/>
-        </p:nvSpPr>
-        <p:spPr>
-          <a:xfrm>
-            <a:off x="5100000" y="20191126"/>
-            <a:ext cx="2078400" cy="864000"/>
-          </a:xfrm>
-          <a:prstGeom prst="rect">
-            <a:avLst/>
-          </a:prstGeom>
-          <a:solidFill>
-            <a:srgbClr val="F7F9FD"/>
-          </a:solidFill>
-          <a:ln w="8890">
-            <a:solidFill>
-              <a:srgbClr val="DDE3F2"/>
-            </a:solidFill>
-          </a:ln>
-          <a:effectLst/>
-        </p:spPr>
-        <p:style>
-          <a:lnRef idx="1">
-            <a:schemeClr val="accent1"/>
-          </a:lnRef>
-          <a:fillRef idx="3">
-            <a:schemeClr val="accent1"/>
-          </a:fillRef>
-          <a:effectRef idx="2">
-            <a:schemeClr val="accent1"/>
-          </a:effectRef>
-          <a:fontRef idx="minor">
-            <a:schemeClr val="lt1"/>
-          </a:fontRef>
-        </p:style>
-        <p:txBody>
-          <a:bodyPr rtlCol="0" anchor="ctr" wrap="square"/>
-          <a:lstStyle/>
-          <a:p>
-            <a:pPr algn="ctr"/>
-          </a:p>
-        </p:txBody>
-      </p:sp>
-      <p:sp>
-        <p:nvSpPr>
-          <p:cNvPr id="156" name="Rectangle 155"/>
-          <p:cNvSpPr/>
-          <p:nvPr/>
-        </p:nvSpPr>
-        <p:spPr>
-          <a:xfrm>
-            <a:off x="5100000" y="20191126"/>
-            <a:ext cx="2078400" cy="43200"/>
-          </a:xfrm>
-          <a:prstGeom prst="rect">
-            <a:avLst/>
-          </a:prstGeom>
-          <a:solidFill>
-            <a:srgbClr val="14855F"/>
-          </a:solidFill>
-          <a:ln>
-            <a:noFill/>
-          </a:ln>
-          <a:effectLst/>
-        </p:spPr>
-        <p:style>
-          <a:lnRef idx="1">
-            <a:schemeClr val="accent1"/>
-          </a:lnRef>
-          <a:fillRef idx="3">
-            <a:schemeClr val="accent1"/>
-          </a:fillRef>
-          <a:effectRef idx="2">
-            <a:schemeClr val="accent1"/>
-          </a:effectRef>
-          <a:fontRef idx="minor">
-            <a:schemeClr val="lt1"/>
-          </a:fontRef>
-        </p:style>
-        <p:txBody>
-          <a:bodyPr rtlCol="0" anchor="ctr" wrap="square"/>
-          <a:lstStyle/>
-          <a:p>
-            <a:pPr algn="ctr"/>
-          </a:p>
-        </p:txBody>
-      </p:sp>
-      <p:sp>
-        <p:nvSpPr>
-          <p:cNvPr id="157" name="TextBox 156"/>
-          <p:cNvSpPr txBox="1"/>
-          <p:nvPr/>
-        </p:nvSpPr>
-        <p:spPr>
-          <a:xfrm>
-            <a:off x="5208000" y="20299126"/>
-            <a:ext cx="1080000" cy="216000"/>
-          </a:xfrm>
-          <a:prstGeom prst="rect">
-            <a:avLst/>
-          </a:prstGeom>
-          <a:noFill/>
-        </p:spPr>
-        <p:txBody>
-          <a:bodyPr wrap="square" lIns="0" rIns="0" tIns="0" bIns="0">
-            <a:spAutoFit/>
-          </a:bodyPr>
-          <a:lstStyle/>
-          <a:p>
-            <a:pPr algn="l">
-              <a:lnSpc>
-                <a:spcPct val="120000"/>
-              </a:lnSpc>
-              <a:spcAft>
-                <a:spcPts val="0"/>
-              </a:spcAft>
-            </a:pPr>
-            <a:r>
-              <a:rPr sz="1059" b="1" i="0">
-                <a:solidFill>
-                  <a:srgbClr val="14855F"/>
-                </a:solidFill>
-                <a:latin typeface="Consolas"/>
-              </a:rPr>
-              <a:t>BOTH</a:t>
-            </a:r>
-          </a:p>
-        </p:txBody>
-      </p:sp>
-      <p:sp>
-        <p:nvSpPr>
-          <p:cNvPr id="158" name="TextBox 157"/>
-          <p:cNvSpPr txBox="1"/>
-          <p:nvPr/>
-        </p:nvSpPr>
-        <p:spPr>
-          <a:xfrm>
-            <a:off x="5208000" y="20461126"/>
-            <a:ext cx="576000" cy="540000"/>
-          </a:xfrm>
-          <a:prstGeom prst="rect">
-            <a:avLst/>
-          </a:prstGeom>
-          <a:noFill/>
-        </p:spPr>
-        <p:txBody>
-          <a:bodyPr wrap="square" lIns="0" rIns="0" tIns="0" bIns="0">
-            <a:spAutoFit/>
-          </a:bodyPr>
-          <a:lstStyle/>
-          <a:p>
-            <a:pPr algn="l">
-              <a:lnSpc>
-                <a:spcPct val="100000"/>
-              </a:lnSpc>
-              <a:spcAft>
-                <a:spcPts val="0"/>
-              </a:spcAft>
-            </a:pPr>
-            <a:r>
-              <a:rPr sz="3247" b="1" i="0">
-                <a:solidFill>
-                  <a:srgbClr val="C2352B"/>
-                </a:solidFill>
-                <a:latin typeface="Consolas"/>
-              </a:rPr>
-              <a:t>✗</a:t>
-            </a:r>
-          </a:p>
-        </p:txBody>
-      </p:sp>
-      <p:sp>
-        <p:nvSpPr>
-          <p:cNvPr id="159" name="TextBox 158"/>
-          <p:cNvSpPr txBox="1"/>
-          <p:nvPr/>
-        </p:nvSpPr>
-        <p:spPr>
-          <a:xfrm>
-            <a:off x="5820000" y="20515126"/>
-            <a:ext cx="1286400" cy="504000"/>
-          </a:xfrm>
-          <a:prstGeom prst="rect">
-            <a:avLst/>
-          </a:prstGeom>
-          <a:noFill/>
-        </p:spPr>
-        <p:txBody>
-          <a:bodyPr wrap="square" lIns="0" rIns="0" tIns="0" bIns="0">
-            <a:spAutoFit/>
-          </a:bodyPr>
-          <a:lstStyle/>
-          <a:p>
-            <a:pPr algn="l">
-              <a:lnSpc>
-                <a:spcPct val="132000"/>
-              </a:lnSpc>
-              <a:spcAft>
-                <a:spcPts val="0"/>
-              </a:spcAft>
-            </a:pPr>
-            <a:r>
-              <a:rPr sz="1271" b="0" i="0">
-                <a:solidFill>
-                  <a:srgbClr val="12162E"/>
-                </a:solidFill>
-                <a:latin typeface="Arial"/>
-              </a:rPr>
-              <a:t>6 steps</a:t>
-            </a:r>
-          </a:p>
-          <a:p>
-            <a:pPr algn="l">
-              <a:lnSpc>
-                <a:spcPct val="132000"/>
-              </a:lnSpc>
-              <a:spcAft>
-                <a:spcPts val="0"/>
-              </a:spcAft>
-            </a:pPr>
-            <a:r>
-              <a:rPr sz="1271" b="0" i="0">
-                <a:solidFill>
-                  <a:srgbClr val="12162E"/>
-                </a:solidFill>
-                <a:latin typeface="Arial"/>
-              </a:rPr>
-              <a:t>$0.029</a:t>
-            </a:r>
-          </a:p>
-        </p:txBody>
-      </p:sp>
-      <p:sp>
-        <p:nvSpPr>
-          <p:cNvPr id="160" name="TextBox 159"/>
-          <p:cNvSpPr txBox="1"/>
-          <p:nvPr/>
-        </p:nvSpPr>
-        <p:spPr>
-          <a:xfrm>
-            <a:off x="727200" y="21343126"/>
-            <a:ext cx="6451200" cy="645563"/>
-          </a:xfrm>
-          <a:prstGeom prst="rect">
-            <a:avLst/>
-          </a:prstGeom>
-          <a:noFill/>
-        </p:spPr>
-        <p:txBody>
-          <a:bodyPr wrap="square" lIns="0" rIns="0" tIns="0" bIns="0">
-            <a:spAutoFit/>
-          </a:bodyPr>
-          <a:lstStyle/>
+              <a:t> than the best single fixed choice, and spend 1.6–35.3% less — in all 8 settings.</a:t>
+            </a:r>
+          </a:p>
           <a:p>
             <a:pPr algn="l">
               <a:lnSpc>
@@ -7911,1524 +9532,54 @@
                 </a:solidFill>
                 <a:latin typeface="Arial"/>
               </a:rPr>
-              <a:t>“Show me the cheapest bike with red handlebars between $900-950.”</a:t>
-            </a:r>
-          </a:p>
-        </p:txBody>
-      </p:sp>
-      <p:sp>
-        <p:nvSpPr>
-          <p:cNvPr id="161" name="Rectangle 160"/>
-          <p:cNvSpPr/>
-          <p:nvPr/>
-        </p:nvSpPr>
-        <p:spPr>
-          <a:xfrm>
-            <a:off x="727200" y="22078689"/>
-            <a:ext cx="6451200" cy="3024000"/>
-          </a:xfrm>
-          <a:prstGeom prst="rect">
-            <a:avLst/>
-          </a:prstGeom>
-          <a:noFill/>
-          <a:ln w="8890">
-            <a:solidFill>
-              <a:srgbClr val="DDE3F2"/>
-            </a:solidFill>
-          </a:ln>
-          <a:effectLst/>
-        </p:spPr>
-        <p:style>
-          <a:lnRef idx="1">
-            <a:schemeClr val="accent1"/>
-          </a:lnRef>
-          <a:fillRef idx="3">
-            <a:schemeClr val="accent1"/>
-          </a:fillRef>
-          <a:effectRef idx="2">
-            <a:schemeClr val="accent1"/>
-          </a:effectRef>
-          <a:fontRef idx="minor">
-            <a:schemeClr val="lt1"/>
-          </a:fontRef>
-        </p:style>
-        <p:txBody>
-          <a:bodyPr rtlCol="0" anchor="ctr" wrap="square"/>
-          <a:lstStyle/>
-          <a:p>
-            <a:pPr algn="ctr"/>
-          </a:p>
-        </p:txBody>
-      </p:sp>
-      <p:pic>
-        <p:nvPicPr>
-          <p:cNvPr id="162" name="Picture 161" descr="thumb_17.png"/>
-          <p:cNvPicPr>
-            <a:picLocks noChangeAspect="1"/>
-          </p:cNvPicPr>
-          <p:nvPr/>
-        </p:nvPicPr>
-        <p:blipFill>
-          <a:blip r:embed="rId7"/>
-          <a:stretch>
-            <a:fillRect/>
-          </a:stretch>
-        </p:blipFill>
-        <p:spPr>
-          <a:xfrm>
-            <a:off x="727200" y="22078689"/>
-            <a:ext cx="6451200" cy="3024000"/>
-          </a:xfrm>
-          <a:prstGeom prst="rect">
-            <a:avLst/>
-          </a:prstGeom>
-        </p:spPr>
-      </p:pic>
-      <p:sp>
-        <p:nvSpPr>
-          <p:cNvPr id="163" name="Rectangle 162"/>
-          <p:cNvSpPr/>
-          <p:nvPr/>
-        </p:nvSpPr>
-        <p:spPr>
-          <a:xfrm>
-            <a:off x="727200" y="25192689"/>
-            <a:ext cx="2078400" cy="864000"/>
-          </a:xfrm>
-          <a:prstGeom prst="rect">
-            <a:avLst/>
-          </a:prstGeom>
-          <a:solidFill>
-            <a:srgbClr val="F7F9FD"/>
-          </a:solidFill>
-          <a:ln w="8890">
-            <a:solidFill>
-              <a:srgbClr val="DDE3F2"/>
-            </a:solidFill>
-          </a:ln>
-          <a:effectLst/>
-        </p:spPr>
-        <p:style>
-          <a:lnRef idx="1">
-            <a:schemeClr val="accent1"/>
-          </a:lnRef>
-          <a:fillRef idx="3">
-            <a:schemeClr val="accent1"/>
-          </a:fillRef>
-          <a:effectRef idx="2">
-            <a:schemeClr val="accent1"/>
-          </a:effectRef>
-          <a:fontRef idx="minor">
-            <a:schemeClr val="lt1"/>
-          </a:fontRef>
-        </p:style>
-        <p:txBody>
-          <a:bodyPr rtlCol="0" anchor="ctr" wrap="square"/>
-          <a:lstStyle/>
-          <a:p>
-            <a:pPr algn="ctr"/>
-          </a:p>
-        </p:txBody>
-      </p:sp>
-      <p:sp>
-        <p:nvSpPr>
-          <p:cNvPr id="164" name="Rectangle 163"/>
-          <p:cNvSpPr/>
-          <p:nvPr/>
-        </p:nvSpPr>
-        <p:spPr>
-          <a:xfrm>
-            <a:off x="727200" y="25192689"/>
-            <a:ext cx="2078400" cy="43200"/>
-          </a:xfrm>
-          <a:prstGeom prst="rect">
-            <a:avLst/>
-          </a:prstGeom>
-          <a:solidFill>
-            <a:srgbClr val="1F5FD6"/>
-          </a:solidFill>
-          <a:ln>
-            <a:noFill/>
-          </a:ln>
-          <a:effectLst/>
-        </p:spPr>
-        <p:style>
-          <a:lnRef idx="1">
-            <a:schemeClr val="accent1"/>
-          </a:lnRef>
-          <a:fillRef idx="3">
-            <a:schemeClr val="accent1"/>
-          </a:fillRef>
-          <a:effectRef idx="2">
-            <a:schemeClr val="accent1"/>
-          </a:effectRef>
-          <a:fontRef idx="minor">
-            <a:schemeClr val="lt1"/>
-          </a:fontRef>
-        </p:style>
-        <p:txBody>
-          <a:bodyPr rtlCol="0" anchor="ctr" wrap="square"/>
-          <a:lstStyle/>
-          <a:p>
-            <a:pPr algn="ctr"/>
-          </a:p>
-        </p:txBody>
-      </p:sp>
-      <p:sp>
-        <p:nvSpPr>
-          <p:cNvPr id="165" name="TextBox 164"/>
-          <p:cNvSpPr txBox="1"/>
-          <p:nvPr/>
-        </p:nvSpPr>
-        <p:spPr>
-          <a:xfrm>
-            <a:off x="835200" y="25300689"/>
-            <a:ext cx="1080000" cy="216000"/>
-          </a:xfrm>
-          <a:prstGeom prst="rect">
-            <a:avLst/>
-          </a:prstGeom>
-          <a:noFill/>
-        </p:spPr>
-        <p:txBody>
-          <a:bodyPr wrap="square" lIns="0" rIns="0" tIns="0" bIns="0">
-            <a:spAutoFit/>
-          </a:bodyPr>
-          <a:lstStyle/>
-          <a:p>
-            <a:pPr algn="l">
-              <a:lnSpc>
-                <a:spcPct val="120000"/>
-              </a:lnSpc>
-              <a:spcAft>
-                <a:spcPts val="0"/>
-              </a:spcAft>
-            </a:pPr>
-            <a:r>
-              <a:rPr sz="1059" b="1" i="0">
-                <a:solidFill>
-                  <a:srgbClr val="1F5FD6"/>
-                </a:solidFill>
-                <a:latin typeface="Consolas"/>
-              </a:rPr>
-              <a:t>LOOK</a:t>
-            </a:r>
-          </a:p>
-        </p:txBody>
-      </p:sp>
-      <p:sp>
-        <p:nvSpPr>
-          <p:cNvPr id="166" name="TextBox 165"/>
-          <p:cNvSpPr txBox="1"/>
-          <p:nvPr/>
-        </p:nvSpPr>
-        <p:spPr>
-          <a:xfrm>
-            <a:off x="835200" y="25462689"/>
-            <a:ext cx="576000" cy="540000"/>
-          </a:xfrm>
-          <a:prstGeom prst="rect">
-            <a:avLst/>
-          </a:prstGeom>
-          <a:noFill/>
-        </p:spPr>
-        <p:txBody>
-          <a:bodyPr wrap="square" lIns="0" rIns="0" tIns="0" bIns="0">
-            <a:spAutoFit/>
-          </a:bodyPr>
-          <a:lstStyle/>
-          <a:p>
-            <a:pPr algn="l">
-              <a:lnSpc>
-                <a:spcPct val="100000"/>
-              </a:lnSpc>
-              <a:spcAft>
-                <a:spcPts val="0"/>
-              </a:spcAft>
-            </a:pPr>
-            <a:r>
-              <a:rPr sz="3247" b="1" i="0">
-                <a:solidFill>
-                  <a:srgbClr val="C2352B"/>
-                </a:solidFill>
-                <a:latin typeface="Consolas"/>
-              </a:rPr>
-              <a:t>✗</a:t>
-            </a:r>
-          </a:p>
-        </p:txBody>
-      </p:sp>
-      <p:sp>
-        <p:nvSpPr>
-          <p:cNvPr id="167" name="TextBox 166"/>
-          <p:cNvSpPr txBox="1"/>
-          <p:nvPr/>
-        </p:nvSpPr>
-        <p:spPr>
-          <a:xfrm>
-            <a:off x="1447200" y="25516689"/>
-            <a:ext cx="1286400" cy="504000"/>
-          </a:xfrm>
-          <a:prstGeom prst="rect">
-            <a:avLst/>
-          </a:prstGeom>
-          <a:noFill/>
-        </p:spPr>
-        <p:txBody>
-          <a:bodyPr wrap="square" lIns="0" rIns="0" tIns="0" bIns="0">
-            <a:spAutoFit/>
-          </a:bodyPr>
-          <a:lstStyle/>
-          <a:p>
-            <a:pPr algn="l">
-              <a:lnSpc>
-                <a:spcPct val="132000"/>
-              </a:lnSpc>
-              <a:spcAft>
-                <a:spcPts val="0"/>
-              </a:spcAft>
-            </a:pPr>
-            <a:r>
-              <a:rPr sz="1271" b="0" i="0">
+              <a:t>Nothing we trained could do it.</a:t>
+            </a:r>
+            <a:r>
+              <a:rPr sz="1764" b="0" i="0">
                 <a:solidFill>
                   <a:srgbClr val="12162E"/>
                 </a:solidFill>
                 <a:latin typeface="Arial"/>
               </a:rPr>
-              <a:t>19 steps</a:t>
-            </a:r>
-          </a:p>
-          <a:p>
-            <a:pPr algn="l">
-              <a:lnSpc>
-                <a:spcPct val="132000"/>
-              </a:lnSpc>
-              <a:spcAft>
-                <a:spcPts val="0"/>
-              </a:spcAft>
-            </a:pPr>
-            <a:r>
-              <a:rPr sz="1271" b="0" i="0">
+              <a:t> In </a:t>
+            </a:r>
+            <a:r>
+              <a:rPr sz="1764" b="1" i="0">
                 <a:solidFill>
                   <a:srgbClr val="12162E"/>
                 </a:solidFill>
                 <a:latin typeface="Arial"/>
               </a:rPr>
-              <a:t>$0.075</a:t>
-            </a:r>
-          </a:p>
-        </p:txBody>
-      </p:sp>
-      <p:sp>
-        <p:nvSpPr>
-          <p:cNvPr id="168" name="Rectangle 167"/>
-          <p:cNvSpPr/>
-          <p:nvPr/>
-        </p:nvSpPr>
-        <p:spPr>
-          <a:xfrm>
-            <a:off x="2913600" y="25192689"/>
-            <a:ext cx="2078400" cy="864000"/>
-          </a:xfrm>
-          <a:prstGeom prst="rect">
-            <a:avLst/>
-          </a:prstGeom>
-          <a:solidFill>
-            <a:srgbClr val="F7F9FD"/>
-          </a:solidFill>
-          <a:ln w="8890">
-            <a:solidFill>
-              <a:srgbClr val="DDE3F2"/>
-            </a:solidFill>
-          </a:ln>
-          <a:effectLst/>
-        </p:spPr>
-        <p:style>
-          <a:lnRef idx="1">
-            <a:schemeClr val="accent1"/>
-          </a:lnRef>
-          <a:fillRef idx="3">
-            <a:schemeClr val="accent1"/>
-          </a:fillRef>
-          <a:effectRef idx="2">
-            <a:schemeClr val="accent1"/>
-          </a:effectRef>
-          <a:fontRef idx="minor">
-            <a:schemeClr val="lt1"/>
-          </a:fontRef>
-        </p:style>
-        <p:txBody>
-          <a:bodyPr rtlCol="0" anchor="ctr" wrap="square"/>
-          <a:lstStyle/>
-          <a:p>
-            <a:pPr algn="ctr"/>
-          </a:p>
-        </p:txBody>
-      </p:sp>
-      <p:sp>
-        <p:nvSpPr>
-          <p:cNvPr id="169" name="Rectangle 168"/>
-          <p:cNvSpPr/>
-          <p:nvPr/>
-        </p:nvSpPr>
-        <p:spPr>
-          <a:xfrm>
-            <a:off x="2913600" y="25192689"/>
-            <a:ext cx="2078400" cy="43200"/>
-          </a:xfrm>
-          <a:prstGeom prst="rect">
-            <a:avLst/>
-          </a:prstGeom>
-          <a:solidFill>
-            <a:srgbClr val="E8720C"/>
-          </a:solidFill>
-          <a:ln>
-            <a:noFill/>
-          </a:ln>
-          <a:effectLst/>
-        </p:spPr>
-        <p:style>
-          <a:lnRef idx="1">
-            <a:schemeClr val="accent1"/>
-          </a:lnRef>
-          <a:fillRef idx="3">
-            <a:schemeClr val="accent1"/>
-          </a:fillRef>
-          <a:effectRef idx="2">
-            <a:schemeClr val="accent1"/>
-          </a:effectRef>
-          <a:fontRef idx="minor">
-            <a:schemeClr val="lt1"/>
-          </a:fontRef>
-        </p:style>
-        <p:txBody>
-          <a:bodyPr rtlCol="0" anchor="ctr" wrap="square"/>
-          <a:lstStyle/>
-          <a:p>
-            <a:pPr algn="ctr"/>
-          </a:p>
-        </p:txBody>
-      </p:sp>
-      <p:sp>
-        <p:nvSpPr>
-          <p:cNvPr id="170" name="TextBox 169"/>
-          <p:cNvSpPr txBox="1"/>
-          <p:nvPr/>
-        </p:nvSpPr>
-        <p:spPr>
-          <a:xfrm>
-            <a:off x="3021600" y="25300689"/>
-            <a:ext cx="1080000" cy="216000"/>
-          </a:xfrm>
-          <a:prstGeom prst="rect">
-            <a:avLst/>
-          </a:prstGeom>
-          <a:noFill/>
-        </p:spPr>
-        <p:txBody>
-          <a:bodyPr wrap="square" lIns="0" rIns="0" tIns="0" bIns="0">
-            <a:spAutoFit/>
-          </a:bodyPr>
-          <a:lstStyle/>
-          <a:p>
-            <a:pPr algn="l">
-              <a:lnSpc>
-                <a:spcPct val="120000"/>
-              </a:lnSpc>
-              <a:spcAft>
-                <a:spcPts val="0"/>
-              </a:spcAft>
-            </a:pPr>
-            <a:r>
-              <a:rPr sz="1059" b="1" i="0">
-                <a:solidFill>
-                  <a:srgbClr val="E8720C"/>
-                </a:solidFill>
-                <a:latin typeface="Consolas"/>
-              </a:rPr>
-              <a:t>READ</a:t>
-            </a:r>
-          </a:p>
-        </p:txBody>
-      </p:sp>
-      <p:sp>
-        <p:nvSpPr>
-          <p:cNvPr id="171" name="TextBox 170"/>
-          <p:cNvSpPr txBox="1"/>
-          <p:nvPr/>
-        </p:nvSpPr>
-        <p:spPr>
-          <a:xfrm>
-            <a:off x="3021600" y="25462689"/>
-            <a:ext cx="576000" cy="540000"/>
-          </a:xfrm>
-          <a:prstGeom prst="rect">
-            <a:avLst/>
-          </a:prstGeom>
-          <a:noFill/>
-        </p:spPr>
-        <p:txBody>
-          <a:bodyPr wrap="square" lIns="0" rIns="0" tIns="0" bIns="0">
-            <a:spAutoFit/>
-          </a:bodyPr>
-          <a:lstStyle/>
-          <a:p>
-            <a:pPr algn="l">
-              <a:lnSpc>
-                <a:spcPct val="100000"/>
-              </a:lnSpc>
-              <a:spcAft>
-                <a:spcPts val="0"/>
-              </a:spcAft>
-            </a:pPr>
-            <a:r>
-              <a:rPr sz="3247" b="1" i="0">
-                <a:solidFill>
-                  <a:srgbClr val="C2352B"/>
-                </a:solidFill>
-                <a:latin typeface="Consolas"/>
-              </a:rPr>
-              <a:t>✗</a:t>
-            </a:r>
-          </a:p>
-        </p:txBody>
-      </p:sp>
-      <p:sp>
-        <p:nvSpPr>
-          <p:cNvPr id="172" name="TextBox 171"/>
-          <p:cNvSpPr txBox="1"/>
-          <p:nvPr/>
-        </p:nvSpPr>
-        <p:spPr>
-          <a:xfrm>
-            <a:off x="3633600" y="25516689"/>
-            <a:ext cx="1286400" cy="504000"/>
-          </a:xfrm>
-          <a:prstGeom prst="rect">
-            <a:avLst/>
-          </a:prstGeom>
-          <a:noFill/>
-        </p:spPr>
-        <p:txBody>
-          <a:bodyPr wrap="square" lIns="0" rIns="0" tIns="0" bIns="0">
-            <a:spAutoFit/>
-          </a:bodyPr>
-          <a:lstStyle/>
-          <a:p>
-            <a:pPr algn="l">
-              <a:lnSpc>
-                <a:spcPct val="132000"/>
-              </a:lnSpc>
-              <a:spcAft>
-                <a:spcPts val="0"/>
-              </a:spcAft>
-            </a:pPr>
-            <a:r>
-              <a:rPr sz="1271" b="0" i="0">
+              <a:t>0 of 8</a:t>
+            </a:r>
+            <a:r>
+              <a:rPr sz="1764" b="0" i="0">
                 <a:solidFill>
                   <a:srgbClr val="12162E"/>
                 </a:solidFill>
                 <a:latin typeface="Arial"/>
               </a:rPr>
-              <a:t>6 steps</a:t>
-            </a:r>
-          </a:p>
-          <a:p>
-            <a:pPr algn="l">
-              <a:lnSpc>
-                <a:spcPct val="132000"/>
-              </a:lnSpc>
-              <a:spcAft>
-                <a:spcPts val="0"/>
-              </a:spcAft>
-            </a:pPr>
-            <a:r>
-              <a:rPr sz="1271" b="0" i="0">
+              <a:t> settings did a learned choice beat simply always using the cheapest way on both success and cost — and even choosing with hindsight manages that in only </a:t>
+            </a:r>
+            <a:r>
+              <a:rPr sz="1764" b="1" i="0">
                 <a:solidFill>
                   <a:srgbClr val="12162E"/>
                 </a:solidFill>
                 <a:latin typeface="Arial"/>
               </a:rPr>
-              <a:t>$0.025</a:t>
-            </a:r>
-          </a:p>
-        </p:txBody>
-      </p:sp>
-      <p:sp>
-        <p:nvSpPr>
-          <p:cNvPr id="173" name="Rectangle 172"/>
-          <p:cNvSpPr/>
-          <p:nvPr/>
-        </p:nvSpPr>
-        <p:spPr>
-          <a:xfrm>
-            <a:off x="5100000" y="25192689"/>
-            <a:ext cx="2078400" cy="864000"/>
-          </a:xfrm>
-          <a:prstGeom prst="rect">
-            <a:avLst/>
-          </a:prstGeom>
-          <a:solidFill>
-            <a:srgbClr val="F7F9FD"/>
-          </a:solidFill>
-          <a:ln w="8890">
-            <a:solidFill>
-              <a:srgbClr val="DDE3F2"/>
-            </a:solidFill>
-          </a:ln>
-          <a:effectLst/>
-        </p:spPr>
-        <p:style>
-          <a:lnRef idx="1">
-            <a:schemeClr val="accent1"/>
-          </a:lnRef>
-          <a:fillRef idx="3">
-            <a:schemeClr val="accent1"/>
-          </a:fillRef>
-          <a:effectRef idx="2">
-            <a:schemeClr val="accent1"/>
-          </a:effectRef>
-          <a:fontRef idx="minor">
-            <a:schemeClr val="lt1"/>
-          </a:fontRef>
-        </p:style>
-        <p:txBody>
-          <a:bodyPr rtlCol="0" anchor="ctr" wrap="square"/>
-          <a:lstStyle/>
-          <a:p>
-            <a:pPr algn="ctr"/>
-          </a:p>
-        </p:txBody>
-      </p:sp>
-      <p:sp>
-        <p:nvSpPr>
-          <p:cNvPr id="174" name="Rectangle 173"/>
-          <p:cNvSpPr/>
-          <p:nvPr/>
-        </p:nvSpPr>
-        <p:spPr>
-          <a:xfrm>
-            <a:off x="5100000" y="25192689"/>
-            <a:ext cx="2078400" cy="43200"/>
-          </a:xfrm>
-          <a:prstGeom prst="rect">
-            <a:avLst/>
-          </a:prstGeom>
-          <a:solidFill>
-            <a:srgbClr val="14855F"/>
-          </a:solidFill>
-          <a:ln>
-            <a:noFill/>
-          </a:ln>
-          <a:effectLst/>
-        </p:spPr>
-        <p:style>
-          <a:lnRef idx="1">
-            <a:schemeClr val="accent1"/>
-          </a:lnRef>
-          <a:fillRef idx="3">
-            <a:schemeClr val="accent1"/>
-          </a:fillRef>
-          <a:effectRef idx="2">
-            <a:schemeClr val="accent1"/>
-          </a:effectRef>
-          <a:fontRef idx="minor">
-            <a:schemeClr val="lt1"/>
-          </a:fontRef>
-        </p:style>
-        <p:txBody>
-          <a:bodyPr rtlCol="0" anchor="ctr" wrap="square"/>
-          <a:lstStyle/>
-          <a:p>
-            <a:pPr algn="ctr"/>
-          </a:p>
-        </p:txBody>
-      </p:sp>
-      <p:sp>
-        <p:nvSpPr>
-          <p:cNvPr id="175" name="TextBox 174"/>
-          <p:cNvSpPr txBox="1"/>
-          <p:nvPr/>
-        </p:nvSpPr>
-        <p:spPr>
-          <a:xfrm>
-            <a:off x="5208000" y="25300689"/>
-            <a:ext cx="1080000" cy="216000"/>
-          </a:xfrm>
-          <a:prstGeom prst="rect">
-            <a:avLst/>
-          </a:prstGeom>
-          <a:noFill/>
-        </p:spPr>
-        <p:txBody>
-          <a:bodyPr wrap="square" lIns="0" rIns="0" tIns="0" bIns="0">
-            <a:spAutoFit/>
-          </a:bodyPr>
-          <a:lstStyle/>
-          <a:p>
-            <a:pPr algn="l">
-              <a:lnSpc>
-                <a:spcPct val="120000"/>
-              </a:lnSpc>
-              <a:spcAft>
-                <a:spcPts val="0"/>
-              </a:spcAft>
-            </a:pPr>
-            <a:r>
-              <a:rPr sz="1059" b="1" i="0">
-                <a:solidFill>
-                  <a:srgbClr val="14855F"/>
-                </a:solidFill>
-                <a:latin typeface="Consolas"/>
-              </a:rPr>
-              <a:t>BOTH</a:t>
-            </a:r>
-          </a:p>
-        </p:txBody>
-      </p:sp>
-      <p:sp>
-        <p:nvSpPr>
-          <p:cNvPr id="176" name="TextBox 175"/>
-          <p:cNvSpPr txBox="1"/>
-          <p:nvPr/>
-        </p:nvSpPr>
-        <p:spPr>
-          <a:xfrm>
-            <a:off x="5208000" y="25462689"/>
-            <a:ext cx="576000" cy="540000"/>
-          </a:xfrm>
-          <a:prstGeom prst="rect">
-            <a:avLst/>
-          </a:prstGeom>
-          <a:noFill/>
-        </p:spPr>
-        <p:txBody>
-          <a:bodyPr wrap="square" lIns="0" rIns="0" tIns="0" bIns="0">
-            <a:spAutoFit/>
-          </a:bodyPr>
-          <a:lstStyle/>
-          <a:p>
-            <a:pPr algn="l">
-              <a:lnSpc>
-                <a:spcPct val="100000"/>
-              </a:lnSpc>
-              <a:spcAft>
-                <a:spcPts val="0"/>
-              </a:spcAft>
-            </a:pPr>
-            <a:r>
-              <a:rPr sz="3247" b="1" i="0">
-                <a:solidFill>
-                  <a:srgbClr val="14855F"/>
-                </a:solidFill>
-                <a:latin typeface="Consolas"/>
-              </a:rPr>
-              <a:t>✓</a:t>
-            </a:r>
-          </a:p>
-        </p:txBody>
-      </p:sp>
-      <p:sp>
-        <p:nvSpPr>
-          <p:cNvPr id="177" name="TextBox 176"/>
-          <p:cNvSpPr txBox="1"/>
-          <p:nvPr/>
-        </p:nvSpPr>
-        <p:spPr>
-          <a:xfrm>
-            <a:off x="5820000" y="25516689"/>
-            <a:ext cx="1286400" cy="504000"/>
-          </a:xfrm>
-          <a:prstGeom prst="rect">
-            <a:avLst/>
-          </a:prstGeom>
-          <a:noFill/>
-        </p:spPr>
-        <p:txBody>
-          <a:bodyPr wrap="square" lIns="0" rIns="0" tIns="0" bIns="0">
-            <a:spAutoFit/>
-          </a:bodyPr>
-          <a:lstStyle/>
-          <a:p>
-            <a:pPr algn="l">
-              <a:lnSpc>
-                <a:spcPct val="132000"/>
-              </a:lnSpc>
-              <a:spcAft>
-                <a:spcPts val="0"/>
-              </a:spcAft>
-            </a:pPr>
-            <a:r>
-              <a:rPr sz="1271" b="0" i="0">
+              <a:t>1 of 8</a:t>
+            </a:r>
+            <a:r>
+              <a:rPr sz="1764" b="0" i="0">
                 <a:solidFill>
                   <a:srgbClr val="12162E"/>
                 </a:solidFill>
                 <a:latin typeface="Arial"/>
               </a:rPr>
-              <a:t>7 steps</a:t>
-            </a:r>
-          </a:p>
-          <a:p>
-            <a:pPr algn="l">
-              <a:lnSpc>
-                <a:spcPct val="132000"/>
-              </a:lnSpc>
-              <a:spcAft>
-                <a:spcPts val="0"/>
-              </a:spcAft>
-            </a:pPr>
-            <a:r>
-              <a:rPr sz="1271" b="0" i="0">
-                <a:solidFill>
-                  <a:srgbClr val="12162E"/>
-                </a:solidFill>
-                <a:latin typeface="Arial"/>
-              </a:rPr>
-              <a:t>$0.037</a:t>
-            </a:r>
-          </a:p>
-        </p:txBody>
-      </p:sp>
-      <p:sp>
-        <p:nvSpPr>
-          <p:cNvPr id="178" name="TextBox 177"/>
-          <p:cNvSpPr txBox="1"/>
-          <p:nvPr/>
-        </p:nvSpPr>
-        <p:spPr>
-          <a:xfrm>
-            <a:off x="727200" y="26272689"/>
-            <a:ext cx="6451200" cy="767053"/>
-          </a:xfrm>
-          <a:prstGeom prst="rect">
-            <a:avLst/>
-          </a:prstGeom>
-          <a:noFill/>
-        </p:spPr>
-        <p:txBody>
-          <a:bodyPr wrap="square" lIns="0" rIns="0" tIns="0" bIns="0">
-            <a:spAutoFit/>
-          </a:bodyPr>
-          <a:lstStyle/>
-          <a:p>
-            <a:pPr algn="l">
-              <a:lnSpc>
-                <a:spcPct val="132000"/>
-              </a:lnSpc>
-              <a:spcAft>
-                <a:spcPts val="425"/>
-              </a:spcAft>
-            </a:pPr>
-            <a:r>
-              <a:rPr sz="1271" b="0" i="0">
-                <a:solidFill>
-                  <a:srgbClr val="5D6787"/>
-                </a:solidFill>
-                <a:latin typeface="Arial"/>
-              </a:rPr>
-              <a:t>One recorded run per mode, B0 · classifieds. Every ✓ / ✗ above came out the same on an independent rerun; steps and cost differ run to run — across all tasks a rerun flips 10–14% of outcomes.</a:t>
-            </a:r>
-          </a:p>
-        </p:txBody>
-      </p:sp>
-      <p:sp>
-        <p:nvSpPr>
-          <p:cNvPr id="14" name="Rectangle 13"/>
-          <p:cNvSpPr/>
-          <p:nvPr/>
-        </p:nvSpPr>
-        <p:spPr>
-          <a:xfrm>
-            <a:off x="7534800" y="10800000"/>
-            <a:ext cx="177988" cy="177988"/>
-          </a:xfrm>
-          <a:prstGeom prst="rect">
-            <a:avLst/>
-          </a:prstGeom>
-          <a:solidFill>
-            <a:srgbClr val="AB5FCE"/>
-          </a:solidFill>
-          <a:ln>
-            <a:noFill/>
-          </a:ln>
-          <a:effectLst/>
-        </p:spPr>
-        <p:style>
-          <a:lnRef idx="1">
-            <a:schemeClr val="accent1"/>
-          </a:lnRef>
-          <a:fillRef idx="3">
-            <a:schemeClr val="accent1"/>
-          </a:fillRef>
-          <a:effectRef idx="2">
-            <a:schemeClr val="accent1"/>
-          </a:effectRef>
-          <a:fontRef idx="minor">
-            <a:schemeClr val="lt1"/>
-          </a:fontRef>
-        </p:style>
-        <p:txBody>
-          <a:bodyPr rtlCol="0" anchor="ctr"/>
-          <a:lstStyle/>
-          <a:p>
-            <a:pPr algn="ctr"/>
-            <a:endParaRPr/>
-          </a:p>
-        </p:txBody>
-      </p:sp>
-      <p:sp>
-        <p:nvSpPr>
-          <p:cNvPr id="15" name="TextBox 14"/>
-          <p:cNvSpPr txBox="1"/>
-          <p:nvPr/>
-        </p:nvSpPr>
-        <p:spPr>
-          <a:xfrm>
-            <a:off x="7839923" y="10756800"/>
-            <a:ext cx="6144827" cy="238912"/>
-          </a:xfrm>
-          <a:prstGeom prst="rect">
-            <a:avLst/>
-          </a:prstGeom>
-          <a:noFill/>
-        </p:spPr>
-        <p:txBody>
-          <a:bodyPr wrap="square" lIns="0" tIns="0" rIns="0" bIns="0" anchor="t">
-            <a:spAutoFit/>
-          </a:bodyPr>
-          <a:lstStyle/>
-          <a:p>
-            <a:pPr algn="l">
-              <a:lnSpc>
-                <a:spcPct val="118000"/>
-              </a:lnSpc>
-            </a:pPr>
-            <a:r>
-              <a:rPr sz="1412" b="1" i="0">
-                <a:solidFill>
-                  <a:srgbClr val="141E41"/>
-                </a:solidFill>
-                <a:latin typeface="Consolas"/>
-              </a:rPr>
-              <a:t>RESULTS ACROSS 8,934 EPISODES</a:t>
-            </a:r>
-            <a:endParaRPr sz="1412" b="1" spc="180" dirty="0">
-              <a:solidFill>
-                <a:srgbClr val="141E41"/>
-              </a:solidFill>
-              <a:latin typeface="Consolas"/>
-            </a:endParaRPr>
-          </a:p>
-        </p:txBody>
-      </p:sp>
-      <p:sp>
-        <p:nvSpPr>
-          <p:cNvPr id="16" name="Rectangle 15"/>
-          <p:cNvSpPr/>
-          <p:nvPr/>
-        </p:nvSpPr>
-        <p:spPr>
-          <a:xfrm>
-            <a:off x="7534800" y="11117836"/>
-            <a:ext cx="1169636" cy="35597"/>
-          </a:xfrm>
-          <a:prstGeom prst="rect">
-            <a:avLst/>
-          </a:prstGeom>
-          <a:solidFill>
-            <a:srgbClr val="141E41"/>
-          </a:solidFill>
-          <a:ln>
-            <a:noFill/>
-          </a:ln>
-          <a:effectLst/>
-        </p:spPr>
-        <p:style>
-          <a:lnRef idx="1">
-            <a:schemeClr val="accent1"/>
-          </a:lnRef>
-          <a:fillRef idx="3">
-            <a:schemeClr val="accent1"/>
-          </a:fillRef>
-          <a:effectRef idx="2">
-            <a:schemeClr val="accent1"/>
-          </a:effectRef>
-          <a:fontRef idx="minor">
-            <a:schemeClr val="lt1"/>
-          </a:fontRef>
-        </p:style>
-        <p:txBody>
-          <a:bodyPr rtlCol="0" anchor="ctr"/>
-          <a:lstStyle/>
-          <a:p>
-            <a:pPr algn="ctr"/>
-            <a:endParaRPr/>
-          </a:p>
-        </p:txBody>
-      </p:sp>
-      <p:sp>
-        <p:nvSpPr>
-          <p:cNvPr id="17" name="Rectangle 16"/>
-          <p:cNvSpPr/>
-          <p:nvPr/>
-        </p:nvSpPr>
-        <p:spPr>
-          <a:xfrm>
-            <a:off x="8704436" y="11128007"/>
-            <a:ext cx="12085564" cy="15256"/>
-          </a:xfrm>
-          <a:prstGeom prst="rect">
-            <a:avLst/>
-          </a:prstGeom>
-          <a:solidFill>
-            <a:srgbClr val="DDE3F2"/>
-          </a:solidFill>
-          <a:ln>
-            <a:noFill/>
-          </a:ln>
-          <a:effectLst/>
-        </p:spPr>
-        <p:style>
-          <a:lnRef idx="1">
-            <a:schemeClr val="accent1"/>
-          </a:lnRef>
-          <a:fillRef idx="3">
-            <a:schemeClr val="accent1"/>
-          </a:fillRef>
-          <a:effectRef idx="2">
-            <a:schemeClr val="accent1"/>
-          </a:effectRef>
-          <a:fontRef idx="minor">
-            <a:schemeClr val="lt1"/>
-          </a:fontRef>
-        </p:style>
-        <p:txBody>
-          <a:bodyPr rtlCol="0" anchor="ctr"/>
-          <a:lstStyle/>
-          <a:p>
-            <a:pPr algn="ctr"/>
-            <a:endParaRPr/>
-          </a:p>
-        </p:txBody>
-      </p:sp>
-      <p:sp>
-        <p:nvSpPr>
-          <p:cNvPr id="179" name="Rectangle 178"/>
-          <p:cNvSpPr/>
-          <p:nvPr/>
-        </p:nvSpPr>
-        <p:spPr>
-          <a:xfrm>
-            <a:off x="7534800" y="11340000"/>
-            <a:ext cx="13255200" cy="1170000"/>
-          </a:xfrm>
-          <a:prstGeom prst="rect">
-            <a:avLst/>
-          </a:prstGeom>
-          <a:solidFill>
-            <a:srgbClr val="ECEFFA"/>
-          </a:solidFill>
-          <a:ln>
-            <a:noFill/>
-          </a:ln>
-          <a:effectLst/>
-        </p:spPr>
-        <p:style>
-          <a:lnRef idx="1">
-            <a:schemeClr val="accent1"/>
-          </a:lnRef>
-          <a:fillRef idx="3">
-            <a:schemeClr val="accent1"/>
-          </a:fillRef>
-          <a:effectRef idx="2">
-            <a:schemeClr val="accent1"/>
-          </a:effectRef>
-          <a:fontRef idx="minor">
-            <a:schemeClr val="lt1"/>
-          </a:fontRef>
-        </p:style>
-        <p:txBody>
-          <a:bodyPr rtlCol="0" anchor="ctr" wrap="square"/>
-          <a:lstStyle/>
-          <a:p>
-            <a:pPr algn="ctr"/>
-          </a:p>
-        </p:txBody>
-      </p:sp>
-      <p:sp>
-        <p:nvSpPr>
-          <p:cNvPr id="180" name="TextBox 179"/>
-          <p:cNvSpPr txBox="1"/>
-          <p:nvPr/>
-        </p:nvSpPr>
-        <p:spPr>
-          <a:xfrm>
-            <a:off x="7786800" y="11520000"/>
-            <a:ext cx="4250400" cy="612000"/>
-          </a:xfrm>
-          <a:prstGeom prst="rect">
-            <a:avLst/>
-          </a:prstGeom>
-          <a:noFill/>
-        </p:spPr>
-        <p:txBody>
-          <a:bodyPr wrap="square" lIns="0" rIns="0" tIns="0" bIns="0">
-            <a:spAutoFit/>
-          </a:bodyPr>
-          <a:lstStyle/>
-          <a:p>
-            <a:pPr algn="l">
-              <a:lnSpc>
-                <a:spcPct val="118000"/>
-              </a:lnSpc>
-              <a:spcAft>
-                <a:spcPts val="0"/>
-              </a:spcAft>
-            </a:pPr>
-            <a:r>
-              <a:rPr sz="3247" b="1" i="0">
-                <a:solidFill>
-                  <a:srgbClr val="141E41"/>
-                </a:solidFill>
-                <a:latin typeface="Consolas"/>
-              </a:rPr>
-              <a:t>+16.35 pp</a:t>
-            </a:r>
-          </a:p>
-        </p:txBody>
-      </p:sp>
-      <p:sp>
-        <p:nvSpPr>
-          <p:cNvPr id="181" name="TextBox 180"/>
-          <p:cNvSpPr txBox="1"/>
-          <p:nvPr/>
-        </p:nvSpPr>
-        <p:spPr>
-          <a:xfrm>
-            <a:off x="7786800" y="12078000"/>
-            <a:ext cx="4250400" cy="324000"/>
-          </a:xfrm>
-          <a:prstGeom prst="rect">
-            <a:avLst/>
-          </a:prstGeom>
-          <a:noFill/>
-        </p:spPr>
-        <p:txBody>
-          <a:bodyPr wrap="square" lIns="0" rIns="0" tIns="0" bIns="0">
-            <a:spAutoFit/>
-          </a:bodyPr>
-          <a:lstStyle/>
-          <a:p>
-            <a:pPr algn="l">
-              <a:lnSpc>
-                <a:spcPct val="118000"/>
-              </a:lnSpc>
-              <a:spcAft>
-                <a:spcPts val="0"/>
-              </a:spcAft>
-            </a:pPr>
-            <a:r>
-              <a:rPr sz="1059" b="0" i="0">
-                <a:solidFill>
-                  <a:srgbClr val="5D6787"/>
-                </a:solidFill>
-                <a:latin typeface="Consolas"/>
-              </a:rPr>
-              <a:t>CEILING, LARGEST OF 8 · VS BEST FIXED MODE</a:t>
-            </a:r>
-          </a:p>
-        </p:txBody>
-      </p:sp>
-      <p:sp>
-        <p:nvSpPr>
-          <p:cNvPr id="182" name="TextBox 181"/>
-          <p:cNvSpPr txBox="1"/>
-          <p:nvPr/>
-        </p:nvSpPr>
-        <p:spPr>
-          <a:xfrm>
-            <a:off x="12037200" y="11520000"/>
-            <a:ext cx="4250400" cy="612000"/>
-          </a:xfrm>
-          <a:prstGeom prst="rect">
-            <a:avLst/>
-          </a:prstGeom>
-          <a:noFill/>
-        </p:spPr>
-        <p:txBody>
-          <a:bodyPr wrap="square" lIns="0" rIns="0" tIns="0" bIns="0">
-            <a:spAutoFit/>
-          </a:bodyPr>
-          <a:lstStyle/>
-          <a:p>
-            <a:pPr algn="l">
-              <a:lnSpc>
-                <a:spcPct val="118000"/>
-              </a:lnSpc>
-              <a:spcAft>
-                <a:spcPts val="0"/>
-              </a:spcAft>
-            </a:pPr>
-            <a:r>
-              <a:rPr sz="3247" b="1" i="0">
-                <a:solidFill>
-                  <a:srgbClr val="141E41"/>
-                </a:solidFill>
-                <a:latin typeface="Consolas"/>
-              </a:rPr>
-              <a:t>0 of 8</a:t>
-            </a:r>
-          </a:p>
-        </p:txBody>
-      </p:sp>
-      <p:sp>
-        <p:nvSpPr>
-          <p:cNvPr id="183" name="TextBox 182"/>
-          <p:cNvSpPr txBox="1"/>
-          <p:nvPr/>
-        </p:nvSpPr>
-        <p:spPr>
-          <a:xfrm>
-            <a:off x="12037200" y="12078000"/>
-            <a:ext cx="4250400" cy="324000"/>
-          </a:xfrm>
-          <a:prstGeom prst="rect">
-            <a:avLst/>
-          </a:prstGeom>
-          <a:noFill/>
-        </p:spPr>
-        <p:txBody>
-          <a:bodyPr wrap="square" lIns="0" rIns="0" tIns="0" bIns="0">
-            <a:spAutoFit/>
-          </a:bodyPr>
-          <a:lstStyle/>
-          <a:p>
-            <a:pPr algn="l">
-              <a:lnSpc>
-                <a:spcPct val="118000"/>
-              </a:lnSpc>
-              <a:spcAft>
-                <a:spcPts val="0"/>
-              </a:spcAft>
-            </a:pPr>
-            <a:r>
-              <a:rPr sz="1059" b="0" i="0">
-                <a:solidFill>
-                  <a:srgbClr val="5D6787"/>
-                </a:solidFill>
-                <a:latin typeface="Consolas"/>
-              </a:rPr>
-              <a:t>LEARNED ROUTERS BEAT ALWAYS-CHEAPEST</a:t>
-            </a:r>
-          </a:p>
-        </p:txBody>
-      </p:sp>
-      <p:sp>
-        <p:nvSpPr>
-          <p:cNvPr id="184" name="TextBox 183"/>
-          <p:cNvSpPr txBox="1"/>
-          <p:nvPr/>
-        </p:nvSpPr>
-        <p:spPr>
-          <a:xfrm>
-            <a:off x="16287600" y="11520000"/>
-            <a:ext cx="4250400" cy="612000"/>
-          </a:xfrm>
-          <a:prstGeom prst="rect">
-            <a:avLst/>
-          </a:prstGeom>
-          <a:noFill/>
-        </p:spPr>
-        <p:txBody>
-          <a:bodyPr wrap="square" lIns="0" rIns="0" tIns="0" bIns="0">
-            <a:spAutoFit/>
-          </a:bodyPr>
-          <a:lstStyle/>
-          <a:p>
-            <a:pPr algn="l">
-              <a:lnSpc>
-                <a:spcPct val="118000"/>
-              </a:lnSpc>
-              <a:spcAft>
-                <a:spcPts val="0"/>
-              </a:spcAft>
-            </a:pPr>
-            <a:r>
-              <a:rPr sz="3247" b="1" i="0">
-                <a:solidFill>
-                  <a:srgbClr val="141E41"/>
-                </a:solidFill>
-                <a:latin typeface="Consolas"/>
-              </a:rPr>
-              <a:t>1 of 8</a:t>
-            </a:r>
-          </a:p>
-        </p:txBody>
-      </p:sp>
-      <p:sp>
-        <p:nvSpPr>
-          <p:cNvPr id="185" name="TextBox 184"/>
-          <p:cNvSpPr txBox="1"/>
-          <p:nvPr/>
-        </p:nvSpPr>
-        <p:spPr>
-          <a:xfrm>
-            <a:off x="16287600" y="12078000"/>
-            <a:ext cx="4250400" cy="324000"/>
-          </a:xfrm>
-          <a:prstGeom prst="rect">
-            <a:avLst/>
-          </a:prstGeom>
-          <a:noFill/>
-        </p:spPr>
-        <p:txBody>
-          <a:bodyPr wrap="square" lIns="0" rIns="0" tIns="0" bIns="0">
-            <a:spAutoFit/>
-          </a:bodyPr>
-          <a:lstStyle/>
-          <a:p>
-            <a:pPr algn="l">
-              <a:lnSpc>
-                <a:spcPct val="118000"/>
-              </a:lnSpc>
-              <a:spcAft>
-                <a:spcPts val="0"/>
-              </a:spcAft>
-            </a:pPr>
-            <a:r>
-              <a:rPr sz="1059" b="0" i="0">
-                <a:solidFill>
-                  <a:srgbClr val="5D6787"/>
-                </a:solidFill>
-                <a:latin typeface="Consolas"/>
-              </a:rPr>
-              <a:t>HINDSIGHT ORACLES BEAT ALWAYS-CHEAPEST</a:t>
-            </a:r>
-          </a:p>
-        </p:txBody>
-      </p:sp>
-      <p:sp>
-        <p:nvSpPr>
-          <p:cNvPr id="186" name="Rectangle 185"/>
-          <p:cNvSpPr/>
-          <p:nvPr/>
-        </p:nvSpPr>
-        <p:spPr>
-          <a:xfrm>
-            <a:off x="7534800" y="12654000"/>
-            <a:ext cx="13255200" cy="7435350"/>
-          </a:xfrm>
-          <a:prstGeom prst="rect">
-            <a:avLst/>
-          </a:prstGeom>
-          <a:solidFill>
-            <a:srgbClr val="F7F9FD"/>
-          </a:solidFill>
-          <a:ln w="8890">
-            <a:solidFill>
-              <a:srgbClr val="DDE3F2"/>
-            </a:solidFill>
-          </a:ln>
-          <a:effectLst/>
-        </p:spPr>
-        <p:style>
-          <a:lnRef idx="1">
-            <a:schemeClr val="accent1"/>
-          </a:lnRef>
-          <a:fillRef idx="3">
-            <a:schemeClr val="accent1"/>
-          </a:fillRef>
-          <a:effectRef idx="2">
-            <a:schemeClr val="accent1"/>
-          </a:effectRef>
-          <a:fontRef idx="minor">
-            <a:schemeClr val="lt1"/>
-          </a:fontRef>
-        </p:style>
-        <p:txBody>
-          <a:bodyPr rtlCol="0" anchor="ctr" wrap="square"/>
-          <a:lstStyle/>
-          <a:p>
-            <a:pPr algn="ctr"/>
-          </a:p>
-        </p:txBody>
-      </p:sp>
-      <p:sp>
-        <p:nvSpPr>
-          <p:cNvPr id="187" name="Rectangle 186"/>
-          <p:cNvSpPr/>
-          <p:nvPr/>
-        </p:nvSpPr>
-        <p:spPr>
-          <a:xfrm>
-            <a:off x="7534800" y="12654000"/>
-            <a:ext cx="13255200" cy="50400"/>
-          </a:xfrm>
-          <a:prstGeom prst="rect">
-            <a:avLst/>
-          </a:prstGeom>
-          <a:solidFill>
-            <a:srgbClr val="5049F9"/>
-          </a:solidFill>
-          <a:ln>
-            <a:noFill/>
-          </a:ln>
-          <a:effectLst/>
-        </p:spPr>
-        <p:style>
-          <a:lnRef idx="1">
-            <a:schemeClr val="accent1"/>
-          </a:lnRef>
-          <a:fillRef idx="3">
-            <a:schemeClr val="accent1"/>
-          </a:fillRef>
-          <a:effectRef idx="2">
-            <a:schemeClr val="accent1"/>
-          </a:effectRef>
-          <a:fontRef idx="minor">
-            <a:schemeClr val="lt1"/>
-          </a:fontRef>
-        </p:style>
-        <p:txBody>
-          <a:bodyPr rtlCol="0" anchor="ctr" wrap="square"/>
-          <a:lstStyle/>
-          <a:p>
-            <a:pPr algn="ctr"/>
-          </a:p>
-        </p:txBody>
-      </p:sp>
-      <p:pic>
-        <p:nvPicPr>
-          <p:cNvPr id="188" name="Picture 187" descr="poster_dominance_plane.png"/>
-          <p:cNvPicPr>
-            <a:picLocks noChangeAspect="1"/>
-          </p:cNvPicPr>
-          <p:nvPr/>
-        </p:nvPicPr>
-        <p:blipFill>
-          <a:blip r:embed="rId8"/>
-          <a:stretch>
-            <a:fillRect/>
-          </a:stretch>
-        </p:blipFill>
-        <p:spPr>
-          <a:xfrm>
-            <a:off x="7642800" y="12812400"/>
-            <a:ext cx="13039200" cy="7168951"/>
-          </a:xfrm>
-          <a:prstGeom prst="rect">
-            <a:avLst/>
-          </a:prstGeom>
-        </p:spPr>
-      </p:pic>
-      <p:sp>
-        <p:nvSpPr>
-          <p:cNvPr id="189" name="TextBox 188"/>
-          <p:cNvSpPr txBox="1"/>
-          <p:nvPr/>
-        </p:nvSpPr>
-        <p:spPr>
-          <a:xfrm>
-            <a:off x="7534800" y="20179350"/>
-            <a:ext cx="13255200" cy="511369"/>
-          </a:xfrm>
-          <a:prstGeom prst="rect">
-            <a:avLst/>
-          </a:prstGeom>
-          <a:noFill/>
-        </p:spPr>
-        <p:txBody>
-          <a:bodyPr wrap="square" lIns="0" rIns="0" tIns="0" bIns="0">
-            <a:spAutoFit/>
-          </a:bodyPr>
-          <a:lstStyle/>
-          <a:p>
-            <a:pPr algn="l">
-              <a:lnSpc>
-                <a:spcPct val="132000"/>
-              </a:lnSpc>
-              <a:spcAft>
-                <a:spcPts val="425"/>
-              </a:spcAft>
-            </a:pPr>
-            <a:r>
-              <a:rPr sz="1271" b="1" i="0">
-                <a:solidFill>
-                  <a:srgbClr val="5D6787"/>
-                </a:solidFill>
-                <a:latin typeface="Arial"/>
-              </a:rPr>
-              <a:t>Fig 2.</a:t>
-            </a:r>
-            <a:r>
-              <a:rPr sz="1271" b="0" i="0">
-                <a:solidFill>
-                  <a:srgbClr val="5D6787"/>
-                </a:solidFill>
-                <a:latin typeface="Arial"/>
-              </a:rPr>
-              <a:t> Every policy in every setting against one fixed baseline, </a:t>
-            </a:r>
-            <a:r>
-              <a:rPr sz="1271" b="1" i="0">
-                <a:solidFill>
-                  <a:srgbClr val="5D6787"/>
-                </a:solidFill>
-                <a:latin typeface="Arial"/>
-              </a:rPr>
-              <a:t>always use the cheapest mode</a:t>
-            </a:r>
-            <a:r>
-              <a:rPr sz="1271" b="0" i="0">
-                <a:solidFill>
-                  <a:srgbClr val="5D6787"/>
-                </a:solidFill>
-                <a:latin typeface="Arial"/>
-              </a:rPr>
-              <a:t> (★). A win lands in the shaded region: cheaper </a:t>
-            </a:r>
-            <a:r>
-              <a:rPr sz="1271" b="0" i="1">
-                <a:solidFill>
-                  <a:srgbClr val="5D6787"/>
-                </a:solidFill>
-                <a:latin typeface="Arial"/>
-              </a:rPr>
-              <a:t>and</a:t>
-            </a:r>
-            <a:r>
-              <a:rPr sz="1271" b="0" i="0">
-                <a:solidFill>
-                  <a:srgbClr val="5D6787"/>
-                </a:solidFill>
-                <a:latin typeface="Arial"/>
-              </a:rPr>
-              <a:t> no worse. Always-cheapest is cheapest on average, not per episode, which is why a few points sit left of it. Nested cross-validation; 10,000 bundle permutations.</a:t>
-            </a:r>
-          </a:p>
-        </p:txBody>
-      </p:sp>
-      <p:sp>
-        <p:nvSpPr>
-          <p:cNvPr id="190" name="TextBox 189"/>
-          <p:cNvSpPr txBox="1"/>
-          <p:nvPr/>
-        </p:nvSpPr>
-        <p:spPr>
-          <a:xfrm>
-            <a:off x="7534800" y="20798719"/>
-            <a:ext cx="13255200" cy="2188690"/>
-          </a:xfrm>
-          <a:prstGeom prst="rect">
-            <a:avLst/>
-          </a:prstGeom>
-          <a:noFill/>
-        </p:spPr>
-        <p:txBody>
-          <a:bodyPr wrap="square" lIns="0" rIns="0" tIns="0" bIns="0">
-            <a:spAutoFit/>
-          </a:bodyPr>
-          <a:lstStyle/>
+              <a:t>.</a:t>
+            </a:r>
+          </a:p>
           <a:p>
             <a:pPr algn="l">
               <a:lnSpc>
@@ -9445,7 +9596,7 @@
                 </a:solidFill>
                 <a:latin typeface="Arial"/>
               </a:rPr>
-              <a:t>The ceiling is real.</a:t>
+              <a:t>What survives is a bound, not a method.</a:t>
             </a:r>
             <a:r>
               <a:rPr sz="1764" b="0" i="0">
@@ -9454,771 +9605,21 @@
                 </a:solidFill>
                 <a:latin typeface="Arial"/>
               </a:rPr>
-              <a:t> In hindsight, choosing the eyes per task solves </a:t>
-            </a:r>
-            <a:r>
-              <a:rPr sz="1764" b="1" i="0">
-                <a:solidFill>
-                  <a:srgbClr val="12162E"/>
-                </a:solidFill>
-                <a:latin typeface="Arial"/>
-              </a:rPr>
-              <a:t>+3.45 to +16.35 pp</a:t>
-            </a:r>
-            <a:r>
-              <a:rPr sz="1764" b="0" i="0">
-                <a:solidFill>
-                  <a:srgbClr val="12162E"/>
-                </a:solidFill>
-                <a:latin typeface="Arial"/>
-              </a:rPr>
-              <a:t> more than the best single fixed mode, at 1.6–35.3% lower cost, in 8 of 8 settings.</a:t>
-            </a:r>
-          </a:p>
-          <a:p>
-            <a:pPr algn="l">
-              <a:lnSpc>
-                <a:spcPct val="120000"/>
-              </a:lnSpc>
-              <a:spcAft>
-                <a:spcPts val="992"/>
-              </a:spcAft>
-            </a:pPr>
-            <a:r>
-              <a:rPr sz="1764" b="1" i="0">
-                <a:solidFill>
-                  <a:srgbClr val="12162E"/>
-                </a:solidFill>
-                <a:latin typeface="Arial"/>
-              </a:rPr>
-              <a:t>Nothing we trained wins.</a:t>
-            </a:r>
-            <a:r>
-              <a:rPr sz="1764" b="0" i="0">
-                <a:solidFill>
-                  <a:srgbClr val="12162E"/>
-                </a:solidFill>
-                <a:latin typeface="Arial"/>
-              </a:rPr>
-              <a:t> </a:t>
-            </a:r>
-            <a:r>
-              <a:rPr sz="1764" b="1" i="0">
-                <a:solidFill>
-                  <a:srgbClr val="12162E"/>
-                </a:solidFill>
-                <a:latin typeface="Arial"/>
-              </a:rPr>
-              <a:t>0 of 8</a:t>
-            </a:r>
-            <a:r>
-              <a:rPr sz="1764" b="0" i="0">
-                <a:solidFill>
-                  <a:srgbClr val="12162E"/>
-                </a:solidFill>
-                <a:latin typeface="Arial"/>
-              </a:rPr>
-              <a:t> learned routers beat always-cheapest on both success and cost — and even the hindsight oracle does so in only </a:t>
-            </a:r>
-            <a:r>
-              <a:rPr sz="1764" b="1" i="0">
-                <a:solidFill>
-                  <a:srgbClr val="12162E"/>
-                </a:solidFill>
-                <a:latin typeface="Arial"/>
-              </a:rPr>
-              <a:t>1 of 8</a:t>
-            </a:r>
-            <a:r>
-              <a:rPr sz="1764" b="0" i="0">
-                <a:solidFill>
-                  <a:srgbClr val="12162E"/>
-                </a:solidFill>
-                <a:latin typeface="Arial"/>
-              </a:rPr>
-              <a:t>.</a:t>
-            </a:r>
-          </a:p>
-          <a:p>
-            <a:pPr algn="l">
-              <a:lnSpc>
-                <a:spcPct val="120000"/>
-              </a:lnSpc>
-              <a:spcAft>
-                <a:spcPts val="992"/>
-              </a:spcAft>
-            </a:pPr>
-            <a:r>
-              <a:rPr sz="1764" b="1" i="0">
-                <a:solidFill>
-                  <a:srgbClr val="12162E"/>
-                </a:solidFill>
-                <a:latin typeface="Arial"/>
-              </a:rPr>
-              <a:t>What survives is a bound, not a router.</a:t>
-            </a:r>
-            <a:r>
-              <a:rPr sz="1764" b="0" i="0">
-                <a:solidFill>
-                  <a:srgbClr val="12162E"/>
-                </a:solidFill>
-                <a:latin typeface="Arial"/>
-              </a:rPr>
-              <a:t> Sending the tasks nobody solves to the cheapest mode saves 9.5–30.6% at identical success in 8 of 8 — against the best-success fixed mode, and plain always-cheapest usually saves more.</a:t>
-            </a:r>
-          </a:p>
-        </p:txBody>
-      </p:sp>
-      <p:sp>
-        <p:nvSpPr>
-          <p:cNvPr id="14" name="Rectangle 13"/>
-          <p:cNvSpPr/>
-          <p:nvPr/>
-        </p:nvSpPr>
-        <p:spPr>
-          <a:xfrm>
-            <a:off x="7534800" y="23203409"/>
-            <a:ext cx="177988" cy="177988"/>
-          </a:xfrm>
-          <a:prstGeom prst="rect">
-            <a:avLst/>
-          </a:prstGeom>
-          <a:solidFill>
-            <a:srgbClr val="AB5FCE"/>
-          </a:solidFill>
-          <a:ln>
-            <a:noFill/>
-          </a:ln>
-          <a:effectLst/>
-        </p:spPr>
-        <p:style>
-          <a:lnRef idx="1">
-            <a:schemeClr val="accent1"/>
-          </a:lnRef>
-          <a:fillRef idx="3">
-            <a:schemeClr val="accent1"/>
-          </a:fillRef>
-          <a:effectRef idx="2">
-            <a:schemeClr val="accent1"/>
-          </a:effectRef>
-          <a:fontRef idx="minor">
-            <a:schemeClr val="lt1"/>
-          </a:fontRef>
-        </p:style>
-        <p:txBody>
-          <a:bodyPr rtlCol="0" anchor="ctr"/>
-          <a:lstStyle/>
-          <a:p>
-            <a:pPr algn="ctr"/>
-            <a:endParaRPr/>
-          </a:p>
-        </p:txBody>
-      </p:sp>
-      <p:sp>
-        <p:nvSpPr>
-          <p:cNvPr id="15" name="TextBox 14"/>
-          <p:cNvSpPr txBox="1"/>
-          <p:nvPr/>
-        </p:nvSpPr>
-        <p:spPr>
-          <a:xfrm>
-            <a:off x="7839923" y="23160209"/>
-            <a:ext cx="6144827" cy="238912"/>
-          </a:xfrm>
-          <a:prstGeom prst="rect">
-            <a:avLst/>
-          </a:prstGeom>
-          <a:noFill/>
-        </p:spPr>
-        <p:txBody>
-          <a:bodyPr wrap="square" lIns="0" tIns="0" rIns="0" bIns="0" anchor="t">
-            <a:spAutoFit/>
-          </a:bodyPr>
-          <a:lstStyle/>
-          <a:p>
-            <a:pPr algn="l">
-              <a:lnSpc>
-                <a:spcPct val="118000"/>
-              </a:lnSpc>
-            </a:pPr>
-            <a:r>
-              <a:rPr sz="1412" b="1" i="0">
-                <a:solidFill>
-                  <a:srgbClr val="141E41"/>
-                </a:solidFill>
-                <a:latin typeface="Consolas"/>
-              </a:rPr>
-              <a:t>WHY IT CANNOT BE LEARNED</a:t>
-            </a:r>
-            <a:endParaRPr sz="1412" b="1" spc="180" dirty="0">
-              <a:solidFill>
-                <a:srgbClr val="141E41"/>
-              </a:solidFill>
-              <a:latin typeface="Consolas"/>
-            </a:endParaRPr>
-          </a:p>
-        </p:txBody>
-      </p:sp>
-      <p:sp>
-        <p:nvSpPr>
-          <p:cNvPr id="16" name="Rectangle 15"/>
-          <p:cNvSpPr/>
-          <p:nvPr/>
-        </p:nvSpPr>
-        <p:spPr>
-          <a:xfrm>
-            <a:off x="7534800" y="23521245"/>
-            <a:ext cx="1169636" cy="35597"/>
-          </a:xfrm>
-          <a:prstGeom prst="rect">
-            <a:avLst/>
-          </a:prstGeom>
-          <a:solidFill>
-            <a:srgbClr val="141E41"/>
-          </a:solidFill>
-          <a:ln>
-            <a:noFill/>
-          </a:ln>
-          <a:effectLst/>
-        </p:spPr>
-        <p:style>
-          <a:lnRef idx="1">
-            <a:schemeClr val="accent1"/>
-          </a:lnRef>
-          <a:fillRef idx="3">
-            <a:schemeClr val="accent1"/>
-          </a:fillRef>
-          <a:effectRef idx="2">
-            <a:schemeClr val="accent1"/>
-          </a:effectRef>
-          <a:fontRef idx="minor">
-            <a:schemeClr val="lt1"/>
-          </a:fontRef>
-        </p:style>
-        <p:txBody>
-          <a:bodyPr rtlCol="0" anchor="ctr"/>
-          <a:lstStyle/>
-          <a:p>
-            <a:pPr algn="ctr"/>
-            <a:endParaRPr/>
-          </a:p>
-        </p:txBody>
-      </p:sp>
-      <p:sp>
-        <p:nvSpPr>
-          <p:cNvPr id="17" name="Rectangle 16"/>
-          <p:cNvSpPr/>
-          <p:nvPr/>
-        </p:nvSpPr>
-        <p:spPr>
-          <a:xfrm>
-            <a:off x="8704436" y="23531416"/>
-            <a:ext cx="12085564" cy="15256"/>
-          </a:xfrm>
-          <a:prstGeom prst="rect">
-            <a:avLst/>
-          </a:prstGeom>
-          <a:solidFill>
-            <a:srgbClr val="DDE3F2"/>
-          </a:solidFill>
-          <a:ln>
-            <a:noFill/>
-          </a:ln>
-          <a:effectLst/>
-        </p:spPr>
-        <p:style>
-          <a:lnRef idx="1">
-            <a:schemeClr val="accent1"/>
-          </a:lnRef>
-          <a:fillRef idx="3">
-            <a:schemeClr val="accent1"/>
-          </a:fillRef>
-          <a:effectRef idx="2">
-            <a:schemeClr val="accent1"/>
-          </a:effectRef>
-          <a:fontRef idx="minor">
-            <a:schemeClr val="lt1"/>
-          </a:fontRef>
-        </p:style>
-        <p:txBody>
-          <a:bodyPr rtlCol="0" anchor="ctr"/>
-          <a:lstStyle/>
-          <a:p>
-            <a:pPr algn="ctr"/>
-            <a:endParaRPr/>
-          </a:p>
-        </p:txBody>
-      </p:sp>
-      <p:sp>
-        <p:nvSpPr>
-          <p:cNvPr id="191" name="TextBox 190"/>
-          <p:cNvSpPr txBox="1"/>
-          <p:nvPr/>
-        </p:nvSpPr>
-        <p:spPr>
-          <a:xfrm>
-            <a:off x="7534800" y="23743409"/>
-            <a:ext cx="13255200" cy="2062690"/>
-          </a:xfrm>
-          <a:prstGeom prst="rect">
-            <a:avLst/>
-          </a:prstGeom>
-          <a:noFill/>
-        </p:spPr>
-        <p:txBody>
-          <a:bodyPr wrap="square" lIns="0" rIns="0" tIns="0" bIns="0">
-            <a:spAutoFit/>
-          </a:bodyPr>
-          <a:lstStyle/>
-          <a:p>
-            <a:pPr algn="l">
-              <a:lnSpc>
-                <a:spcPct val="120000"/>
-              </a:lnSpc>
-              <a:spcAft>
-                <a:spcPts val="992"/>
-              </a:spcAft>
-            </a:pPr>
-            <a:r>
-              <a:rPr sz="1764" b="0" i="0">
-                <a:solidFill>
-                  <a:srgbClr val="12162E"/>
-                </a:solidFill>
-                <a:latin typeface="Arial"/>
-              </a:rPr>
-              <a:t>A routing label exists only when the agent solves a task. Here the best single mode solves just </a:t>
-            </a:r>
-            <a:r>
-              <a:rPr sz="1764" b="1" i="0">
-                <a:solidFill>
-                  <a:srgbClr val="12162E"/>
-                </a:solidFill>
-                <a:latin typeface="Arial"/>
-              </a:rPr>
-              <a:t>2–36%</a:t>
-            </a:r>
-            <a:r>
-              <a:rPr sz="1764" b="0" i="0">
-                <a:solidFill>
-                  <a:srgbClr val="12162E"/>
-                </a:solidFill>
-                <a:latin typeface="Arial"/>
-              </a:rPr>
-              <a:t> of tasks, leaving typically </a:t>
-            </a:r>
-            <a:r>
-              <a:rPr sz="1764" b="1" i="0">
-                <a:solidFill>
-                  <a:srgbClr val="12162E"/>
-                </a:solidFill>
-                <a:latin typeface="Arial"/>
-              </a:rPr>
-              <a:t>15–97</a:t>
-            </a:r>
-            <a:r>
-              <a:rPr sz="1764" b="0" i="0">
-                <a:solidFill>
-                  <a:srgbClr val="12162E"/>
-                </a:solidFill>
-                <a:latin typeface="Arial"/>
-              </a:rPr>
-              <a:t> usable labels per setting — </a:t>
-            </a:r>
-            <a:r>
-              <a:rPr sz="1764" b="1" i="0">
-                <a:solidFill>
-                  <a:srgbClr val="12162E"/>
-                </a:solidFill>
-                <a:latin typeface="Arial"/>
-              </a:rPr>
-              <a:t>the agents that would gain most from routing produce the least supervision to learn it.</a:t>
-            </a:r>
-            <a:r>
-              <a:rPr sz="1764" b="0" i="0">
-                <a:solidFill>
-                  <a:srgbClr val="12162E"/>
-                </a:solidFill>
-                <a:latin typeface="Arial"/>
-              </a:rPr>
-              <a:t> Deliberately shrinking the training data confirms scarcity is the mechanism and prices it: the failing settings would need at least </a:t>
-            </a:r>
-            <a:r>
-              <a:rPr sz="1764" b="1" i="0">
-                <a:solidFill>
-                  <a:srgbClr val="12162E"/>
-                </a:solidFill>
-                <a:latin typeface="Arial"/>
-              </a:rPr>
-              <a:t>2.1–4.2×</a:t>
-            </a:r>
-            <a:r>
-              <a:rPr sz="1764" b="0" i="0">
-                <a:solidFill>
-                  <a:srgbClr val="12162E"/>
-                </a:solidFill>
-                <a:latin typeface="Arial"/>
-              </a:rPr>
-              <a:t> more tasks than the benchmarks contain.</a:t>
-            </a:r>
-          </a:p>
-          <a:p>
-            <a:pPr algn="l">
-              <a:lnSpc>
-                <a:spcPct val="120000"/>
-              </a:lnSpc>
-              <a:spcAft>
-                <a:spcPts val="992"/>
-              </a:spcAft>
-            </a:pPr>
-            <a:r>
-              <a:rPr sz="1764" b="0" i="0">
-                <a:solidFill>
-                  <a:srgbClr val="12162E"/>
-                </a:solidFill>
-                <a:latin typeface="Arial"/>
-              </a:rPr>
-              <a:t>Rerunning </a:t>
-            </a:r>
-            <a:r>
-              <a:rPr sz="1764" b="1" i="0">
-                <a:solidFill>
-                  <a:srgbClr val="12162E"/>
-                </a:solidFill>
-                <a:latin typeface="Arial"/>
-              </a:rPr>
-              <a:t>one unchanged mode</a:t>
-            </a:r>
-            <a:r>
-              <a:rPr sz="1764" b="0" i="0">
-                <a:solidFill>
-                  <a:srgbClr val="12162E"/>
-                </a:solidFill>
-                <a:latin typeface="Arial"/>
-              </a:rPr>
-              <a:t> flips </a:t>
-            </a:r>
-            <a:r>
-              <a:rPr sz="1764" b="1" i="0">
-                <a:solidFill>
-                  <a:srgbClr val="12162E"/>
-                </a:solidFill>
-                <a:latin typeface="Arial"/>
-              </a:rPr>
-              <a:t>10–14%</a:t>
-            </a:r>
-            <a:r>
-              <a:rPr sz="1764" b="0" i="0">
-                <a:solidFill>
-                  <a:srgbClr val="12162E"/>
-                </a:solidFill>
-                <a:latin typeface="Arial"/>
-              </a:rPr>
-              <a:t> of outcomes and by itself buys </a:t>
-            </a:r>
-            <a:r>
-              <a:rPr sz="1764" b="1" i="0">
-                <a:solidFill>
-                  <a:srgbClr val="12162E"/>
-                </a:solidFill>
-                <a:latin typeface="Arial"/>
-              </a:rPr>
-              <a:t>2.0–7.6 pp</a:t>
-            </a:r>
-            <a:r>
-              <a:rPr sz="1764" b="0" i="0">
-                <a:solidFill>
-                  <a:srgbClr val="12162E"/>
-                </a:solidFill>
-                <a:latin typeface="Arial"/>
-              </a:rPr>
-              <a:t> (B0 · classifieds, six replicated modes, n=224); every gain on this sheet is read against that band, not against zero.</a:t>
-            </a:r>
-          </a:p>
-        </p:txBody>
-      </p:sp>
-      <p:sp>
-        <p:nvSpPr>
-          <p:cNvPr id="14" name="Rectangle 13"/>
-          <p:cNvSpPr/>
-          <p:nvPr/>
-        </p:nvSpPr>
-        <p:spPr>
-          <a:xfrm>
-            <a:off x="7534800" y="26022099"/>
-            <a:ext cx="177988" cy="177988"/>
-          </a:xfrm>
-          <a:prstGeom prst="rect">
-            <a:avLst/>
-          </a:prstGeom>
-          <a:solidFill>
-            <a:srgbClr val="AB5FCE"/>
-          </a:solidFill>
-          <a:ln>
-            <a:noFill/>
-          </a:ln>
-          <a:effectLst/>
-        </p:spPr>
-        <p:style>
-          <a:lnRef idx="1">
-            <a:schemeClr val="accent1"/>
-          </a:lnRef>
-          <a:fillRef idx="3">
-            <a:schemeClr val="accent1"/>
-          </a:fillRef>
-          <a:effectRef idx="2">
-            <a:schemeClr val="accent1"/>
-          </a:effectRef>
-          <a:fontRef idx="minor">
-            <a:schemeClr val="lt1"/>
-          </a:fontRef>
-        </p:style>
-        <p:txBody>
-          <a:bodyPr rtlCol="0" anchor="ctr"/>
-          <a:lstStyle/>
-          <a:p>
-            <a:pPr algn="ctr"/>
-            <a:endParaRPr/>
-          </a:p>
-        </p:txBody>
-      </p:sp>
-      <p:sp>
-        <p:nvSpPr>
-          <p:cNvPr id="15" name="TextBox 14"/>
-          <p:cNvSpPr txBox="1"/>
-          <p:nvPr/>
-        </p:nvSpPr>
-        <p:spPr>
-          <a:xfrm>
-            <a:off x="7839923" y="25978899"/>
-            <a:ext cx="6144827" cy="238912"/>
-          </a:xfrm>
-          <a:prstGeom prst="rect">
-            <a:avLst/>
-          </a:prstGeom>
-          <a:noFill/>
-        </p:spPr>
-        <p:txBody>
-          <a:bodyPr wrap="square" lIns="0" tIns="0" rIns="0" bIns="0" anchor="t">
-            <a:spAutoFit/>
-          </a:bodyPr>
-          <a:lstStyle/>
-          <a:p>
-            <a:pPr algn="l">
-              <a:lnSpc>
-                <a:spcPct val="118000"/>
-              </a:lnSpc>
-            </a:pPr>
-            <a:r>
-              <a:rPr sz="1412" b="1" i="0">
-                <a:solidFill>
-                  <a:srgbClr val="141E41"/>
-                </a:solidFill>
-                <a:latin typeface="Consolas"/>
-              </a:rPr>
-              <a:t>TAKEAWAY</a:t>
-            </a:r>
-            <a:endParaRPr sz="1412" b="1" spc="180" dirty="0">
-              <a:solidFill>
-                <a:srgbClr val="141E41"/>
-              </a:solidFill>
-              <a:latin typeface="Consolas"/>
-            </a:endParaRPr>
-          </a:p>
-        </p:txBody>
-      </p:sp>
-      <p:sp>
-        <p:nvSpPr>
-          <p:cNvPr id="16" name="Rectangle 15"/>
-          <p:cNvSpPr/>
-          <p:nvPr/>
-        </p:nvSpPr>
-        <p:spPr>
-          <a:xfrm>
-            <a:off x="7534800" y="26339935"/>
-            <a:ext cx="1169636" cy="35597"/>
-          </a:xfrm>
-          <a:prstGeom prst="rect">
-            <a:avLst/>
-          </a:prstGeom>
-          <a:solidFill>
-            <a:srgbClr val="141E41"/>
-          </a:solidFill>
-          <a:ln>
-            <a:noFill/>
-          </a:ln>
-          <a:effectLst/>
-        </p:spPr>
-        <p:style>
-          <a:lnRef idx="1">
-            <a:schemeClr val="accent1"/>
-          </a:lnRef>
-          <a:fillRef idx="3">
-            <a:schemeClr val="accent1"/>
-          </a:fillRef>
-          <a:effectRef idx="2">
-            <a:schemeClr val="accent1"/>
-          </a:effectRef>
-          <a:fontRef idx="minor">
-            <a:schemeClr val="lt1"/>
-          </a:fontRef>
-        </p:style>
-        <p:txBody>
-          <a:bodyPr rtlCol="0" anchor="ctr"/>
-          <a:lstStyle/>
-          <a:p>
-            <a:pPr algn="ctr"/>
-            <a:endParaRPr/>
-          </a:p>
-        </p:txBody>
-      </p:sp>
-      <p:sp>
-        <p:nvSpPr>
-          <p:cNvPr id="17" name="Rectangle 16"/>
-          <p:cNvSpPr/>
-          <p:nvPr/>
-        </p:nvSpPr>
-        <p:spPr>
-          <a:xfrm>
-            <a:off x="8704436" y="26350106"/>
-            <a:ext cx="12085564" cy="15256"/>
-          </a:xfrm>
-          <a:prstGeom prst="rect">
-            <a:avLst/>
-          </a:prstGeom>
-          <a:solidFill>
-            <a:srgbClr val="DDE3F2"/>
-          </a:solidFill>
-          <a:ln>
-            <a:noFill/>
-          </a:ln>
-          <a:effectLst/>
-        </p:spPr>
-        <p:style>
-          <a:lnRef idx="1">
-            <a:schemeClr val="accent1"/>
-          </a:lnRef>
-          <a:fillRef idx="3">
-            <a:schemeClr val="accent1"/>
-          </a:fillRef>
-          <a:effectRef idx="2">
-            <a:schemeClr val="accent1"/>
-          </a:effectRef>
-          <a:fontRef idx="minor">
-            <a:schemeClr val="lt1"/>
-          </a:fontRef>
-        </p:style>
-        <p:txBody>
-          <a:bodyPr rtlCol="0" anchor="ctr"/>
-          <a:lstStyle/>
-          <a:p>
-            <a:pPr algn="ctr"/>
-            <a:endParaRPr/>
-          </a:p>
-        </p:txBody>
-      </p:sp>
-      <p:sp>
-        <p:nvSpPr>
-          <p:cNvPr id="192" name="TextBox 191"/>
-          <p:cNvSpPr txBox="1"/>
-          <p:nvPr/>
-        </p:nvSpPr>
-        <p:spPr>
-          <a:xfrm>
-            <a:off x="7534800" y="26562099"/>
-            <a:ext cx="13255200" cy="645563"/>
-          </a:xfrm>
-          <a:prstGeom prst="rect">
-            <a:avLst/>
-          </a:prstGeom>
-          <a:noFill/>
-        </p:spPr>
-        <p:txBody>
-          <a:bodyPr wrap="square" lIns="0" rIns="0" tIns="0" bIns="0">
-            <a:spAutoFit/>
-          </a:bodyPr>
-          <a:lstStyle/>
-          <a:p>
-            <a:pPr algn="l">
-              <a:lnSpc>
-                <a:spcPct val="120000"/>
-              </a:lnSpc>
-              <a:spcAft>
-                <a:spcPts val="992"/>
-              </a:spcAft>
-            </a:pPr>
-            <a:r>
-              <a:rPr sz="1764" b="1" i="0">
-                <a:solidFill>
-                  <a:srgbClr val="12162E"/>
-                </a:solidFill>
-                <a:latin typeface="Arial"/>
-              </a:rPr>
-              <a:t>Routing is not only a model-selection problem: its learnability depends on the competence of the agent producing the labels.</a:t>
-            </a:r>
-            <a:r>
-              <a:rPr sz="1764" b="0" i="0">
-                <a:solidFill>
-                  <a:srgbClr val="12162E"/>
-                </a:solidFill>
-                <a:latin typeface="Arial"/>
-              </a:rPr>
-              <a:t> So, in this order: improve the agent, then generate reliable supervision, then learn selective perception.</a:t>
-            </a:r>
-          </a:p>
-        </p:txBody>
-      </p:sp>
-      <p:sp>
-        <p:nvSpPr>
-          <p:cNvPr id="193" name="TextBox 192"/>
-          <p:cNvSpPr txBox="1"/>
-          <p:nvPr/>
-        </p:nvSpPr>
-        <p:spPr>
-          <a:xfrm>
-            <a:off x="7534800" y="27261662"/>
-            <a:ext cx="13255200" cy="255684"/>
-          </a:xfrm>
-          <a:prstGeom prst="rect">
-            <a:avLst/>
-          </a:prstGeom>
-          <a:noFill/>
-        </p:spPr>
-        <p:txBody>
-          <a:bodyPr wrap="square" lIns="0" rIns="0" tIns="0" bIns="0">
-            <a:spAutoFit/>
-          </a:bodyPr>
-          <a:lstStyle/>
-          <a:p>
-            <a:pPr algn="l">
-              <a:lnSpc>
-                <a:spcPct val="132000"/>
-              </a:lnSpc>
-              <a:spcAft>
-                <a:spcPts val="425"/>
-              </a:spcAft>
-            </a:pPr>
-            <a:r>
-              <a:rPr sz="1271" b="0" i="0">
-                <a:solidFill>
-                  <a:srgbClr val="5D6787"/>
-                </a:solidFill>
-                <a:latin typeface="Arial"/>
-              </a:rPr>
-              <a:t>Measured inside the 2–36% success regime we observed. This conclusion need not hold for stronger agents.</a:t>
+              <a:t> Sending the tasks nobody solves to the cheapest way saves 9.5–30.6% at the same success in 8 of 8 — but that too needs hindsight, and plain always-cheapest usually saves more.</a:t>
             </a:r>
           </a:p>
         </p:txBody>
       </p:sp>
       <p:pic>
         <p:nvPicPr>
-          <p:cNvPr id="194" name="Picture 193" descr="qr_repo.png"/>
+          <p:cNvPr id="179" name="Picture 178" descr="qr_repo.png"/>
           <p:cNvPicPr>
             <a:picLocks noChangeAspect="1"/>
           </p:cNvPicPr>
           <p:nvPr/>
         </p:nvPicPr>
         <p:blipFill>
-          <a:blip r:embed="rId9"/>
+          <a:blip r:embed="rId11"/>
           <a:stretch>
             <a:fillRect/>
           </a:stretch>

--- a/deliverables/showcase/poster_jiaming_wei.pptx
+++ b/deliverables/showcase/poster_jiaming_wei.pptx
@@ -3313,7 +3313,7 @@
                 </a:solidFill>
                 <a:latin typeface="Georgia"/>
               </a:rPr>
-              <a:t>Web agents can't yet learn how to see a page</a:t>
+              <a:t>Today's web agents can't yet learn how to see a page</a:t>
             </a:r>
           </a:p>
         </p:txBody>
@@ -3539,7 +3539,7 @@
                 </a:solidFill>
                 <a:latin typeface="Georgia"/>
               </a:rPr>
-              <a:t>Seen the right way, a page would let the agent solve up to 16 more tasks in 100 than the best fixed choice — yet nothing we trained beat always using the cheapest way on both success and cost.</a:t>
+              <a:t>Perfect hindsight would solve up to 16 more tasks in 100 than the best single view. None of 8 learned choices beat always using the cheapest view on both success and cost.</a:t>
             </a:r>
           </a:p>
         </p:txBody>
@@ -3857,7 +3857,7 @@
                 </a:solidFill>
                 <a:latin typeface="Consolas"/>
               </a:rPr>
-              <a:t>THE AGENT LOOP, AND WHERE THE DECISION SITS</a:t>
+              <a:t>RESULTS ACROSS 8,934 TASK ATTEMPTS</a:t>
             </a:r>
             <a:endParaRPr sz="1412" b="1" spc="180" dirty="0">
               <a:solidFill>
@@ -3960,20 +3960,20 @@
       </p:sp>
       <p:sp>
         <p:nvSpPr>
-          <p:cNvPr id="77" name="Right Arrow 76"/>
+          <p:cNvPr id="77" name="Rectangle 76"/>
           <p:cNvSpPr/>
           <p:nvPr/>
         </p:nvSpPr>
         <p:spPr>
           <a:xfrm>
-            <a:off x="3823200" y="7992000"/>
-            <a:ext cx="360000" cy="504000"/>
-          </a:xfrm>
-          <a:prstGeom prst="rightArrow">
+            <a:off x="727200" y="5580000"/>
+            <a:ext cx="20062800" cy="1170000"/>
+          </a:xfrm>
+          <a:prstGeom prst="rect">
             <a:avLst/>
           </a:prstGeom>
           <a:solidFill>
-            <a:srgbClr val="C9CFE0"/>
+            <a:srgbClr val="ECEFFA"/>
           </a:solidFill>
           <a:ln>
             <a:noFill/>
@@ -3995,7 +3995,7 @@
           </a:fontRef>
         </p:style>
         <p:txBody>
-          <a:bodyPr rtlCol="0" anchor="ctr"/>
+          <a:bodyPr rtlCol="0" anchor="ctr" wrap="square"/>
           <a:lstStyle/>
           <a:p>
             <a:pPr algn="ctr"/>
@@ -4004,20 +4004,425 @@
       </p:sp>
       <p:sp>
         <p:nvSpPr>
-          <p:cNvPr id="78" name="Right Arrow 77"/>
+          <p:cNvPr id="78" name="TextBox 77"/>
+          <p:cNvSpPr txBox="1"/>
+          <p:nvPr/>
+        </p:nvSpPr>
+        <p:spPr>
+          <a:xfrm>
+            <a:off x="979200" y="5760000"/>
+            <a:ext cx="6519600" cy="612000"/>
+          </a:xfrm>
+          <a:prstGeom prst="rect">
+            <a:avLst/>
+          </a:prstGeom>
+          <a:noFill/>
+        </p:spPr>
+        <p:txBody>
+          <a:bodyPr wrap="square" lIns="0" rIns="0" tIns="0" bIns="0">
+            <a:spAutoFit/>
+          </a:bodyPr>
+          <a:lstStyle/>
+          <a:p>
+            <a:pPr algn="l">
+              <a:lnSpc>
+                <a:spcPct val="118000"/>
+              </a:lnSpc>
+              <a:spcAft>
+                <a:spcPts val="0"/>
+              </a:spcAft>
+            </a:pPr>
+            <a:r>
+              <a:rPr sz="3247" b="1" i="0">
+                <a:solidFill>
+                  <a:srgbClr val="141E41"/>
+                </a:solidFill>
+                <a:latin typeface="Consolas"/>
+              </a:rPr>
+              <a:t>+16.35 in 100</a:t>
+            </a:r>
+          </a:p>
+        </p:txBody>
+      </p:sp>
+      <p:sp>
+        <p:nvSpPr>
+          <p:cNvPr id="79" name="TextBox 78"/>
+          <p:cNvSpPr txBox="1"/>
+          <p:nvPr/>
+        </p:nvSpPr>
+        <p:spPr>
+          <a:xfrm>
+            <a:off x="979200" y="6318000"/>
+            <a:ext cx="6519600" cy="324000"/>
+          </a:xfrm>
+          <a:prstGeom prst="rect">
+            <a:avLst/>
+          </a:prstGeom>
+          <a:noFill/>
+        </p:spPr>
+        <p:txBody>
+          <a:bodyPr wrap="square" lIns="0" rIns="0" tIns="0" bIns="0">
+            <a:spAutoFit/>
+          </a:bodyPr>
+          <a:lstStyle/>
+          <a:p>
+            <a:pPr algn="l">
+              <a:lnSpc>
+                <a:spcPct val="118000"/>
+              </a:lnSpc>
+              <a:spcAft>
+                <a:spcPts val="0"/>
+              </a:spcAft>
+            </a:pPr>
+            <a:r>
+              <a:rPr sz="1059" b="0" i="0">
+                <a:solidFill>
+                  <a:srgbClr val="5D6787"/>
+                </a:solidFill>
+                <a:latin typeface="Consolas"/>
+              </a:rPr>
+              <a:t>PERFECT HINDSIGHT, BEST OF 8 · VS ONE FIXED VIEW</a:t>
+            </a:r>
+          </a:p>
+        </p:txBody>
+      </p:sp>
+      <p:sp>
+        <p:nvSpPr>
+          <p:cNvPr id="80" name="TextBox 79"/>
+          <p:cNvSpPr txBox="1"/>
+          <p:nvPr/>
+        </p:nvSpPr>
+        <p:spPr>
+          <a:xfrm>
+            <a:off x="7498800" y="5760000"/>
+            <a:ext cx="6519600" cy="612000"/>
+          </a:xfrm>
+          <a:prstGeom prst="rect">
+            <a:avLst/>
+          </a:prstGeom>
+          <a:noFill/>
+        </p:spPr>
+        <p:txBody>
+          <a:bodyPr wrap="square" lIns="0" rIns="0" tIns="0" bIns="0">
+            <a:spAutoFit/>
+          </a:bodyPr>
+          <a:lstStyle/>
+          <a:p>
+            <a:pPr algn="l">
+              <a:lnSpc>
+                <a:spcPct val="118000"/>
+              </a:lnSpc>
+              <a:spcAft>
+                <a:spcPts val="0"/>
+              </a:spcAft>
+            </a:pPr>
+            <a:r>
+              <a:rPr sz="3247" b="1" i="0">
+                <a:solidFill>
+                  <a:srgbClr val="141E41"/>
+                </a:solidFill>
+                <a:latin typeface="Consolas"/>
+              </a:rPr>
+              <a:t>0 of 8</a:t>
+            </a:r>
+          </a:p>
+        </p:txBody>
+      </p:sp>
+      <p:sp>
+        <p:nvSpPr>
+          <p:cNvPr id="81" name="TextBox 80"/>
+          <p:cNvSpPr txBox="1"/>
+          <p:nvPr/>
+        </p:nvSpPr>
+        <p:spPr>
+          <a:xfrm>
+            <a:off x="7498800" y="6318000"/>
+            <a:ext cx="6519600" cy="324000"/>
+          </a:xfrm>
+          <a:prstGeom prst="rect">
+            <a:avLst/>
+          </a:prstGeom>
+          <a:noFill/>
+        </p:spPr>
+        <p:txBody>
+          <a:bodyPr wrap="square" lIns="0" rIns="0" tIns="0" bIns="0">
+            <a:spAutoFit/>
+          </a:bodyPr>
+          <a:lstStyle/>
+          <a:p>
+            <a:pPr algn="l">
+              <a:lnSpc>
+                <a:spcPct val="118000"/>
+              </a:lnSpc>
+              <a:spcAft>
+                <a:spcPts val="0"/>
+              </a:spcAft>
+            </a:pPr>
+            <a:r>
+              <a:rPr sz="1059" b="0" i="0">
+                <a:solidFill>
+                  <a:srgbClr val="5D6787"/>
+                </a:solidFill>
+                <a:latin typeface="Consolas"/>
+              </a:rPr>
+              <a:t>LEARNED CHOICES THAT BEAT ALWAYS-CHEAPEST</a:t>
+            </a:r>
+          </a:p>
+        </p:txBody>
+      </p:sp>
+      <p:sp>
+        <p:nvSpPr>
+          <p:cNvPr id="82" name="TextBox 81"/>
+          <p:cNvSpPr txBox="1"/>
+          <p:nvPr/>
+        </p:nvSpPr>
+        <p:spPr>
+          <a:xfrm>
+            <a:off x="14018400" y="5760000"/>
+            <a:ext cx="6519600" cy="612000"/>
+          </a:xfrm>
+          <a:prstGeom prst="rect">
+            <a:avLst/>
+          </a:prstGeom>
+          <a:noFill/>
+        </p:spPr>
+        <p:txBody>
+          <a:bodyPr wrap="square" lIns="0" rIns="0" tIns="0" bIns="0">
+            <a:spAutoFit/>
+          </a:bodyPr>
+          <a:lstStyle/>
+          <a:p>
+            <a:pPr algn="l">
+              <a:lnSpc>
+                <a:spcPct val="118000"/>
+              </a:lnSpc>
+              <a:spcAft>
+                <a:spcPts val="0"/>
+              </a:spcAft>
+            </a:pPr>
+            <a:r>
+              <a:rPr sz="3247" b="1" i="0">
+                <a:solidFill>
+                  <a:srgbClr val="141E41"/>
+                </a:solidFill>
+                <a:latin typeface="Consolas"/>
+              </a:rPr>
+              <a:t>1 of 8</a:t>
+            </a:r>
+          </a:p>
+        </p:txBody>
+      </p:sp>
+      <p:sp>
+        <p:nvSpPr>
+          <p:cNvPr id="83" name="TextBox 82"/>
+          <p:cNvSpPr txBox="1"/>
+          <p:nvPr/>
+        </p:nvSpPr>
+        <p:spPr>
+          <a:xfrm>
+            <a:off x="14018400" y="6318000"/>
+            <a:ext cx="6519600" cy="324000"/>
+          </a:xfrm>
+          <a:prstGeom prst="rect">
+            <a:avLst/>
+          </a:prstGeom>
+          <a:noFill/>
+        </p:spPr>
+        <p:txBody>
+          <a:bodyPr wrap="square" lIns="0" rIns="0" tIns="0" bIns="0">
+            <a:spAutoFit/>
+          </a:bodyPr>
+          <a:lstStyle/>
+          <a:p>
+            <a:pPr algn="l">
+              <a:lnSpc>
+                <a:spcPct val="118000"/>
+              </a:lnSpc>
+              <a:spcAft>
+                <a:spcPts val="0"/>
+              </a:spcAft>
+            </a:pPr>
+            <a:r>
+              <a:rPr sz="1059" b="0" i="0">
+                <a:solidFill>
+                  <a:srgbClr val="5D6787"/>
+                </a:solidFill>
+                <a:latin typeface="Consolas"/>
+              </a:rPr>
+              <a:t>HINDSIGHT CHOICES THAT BEAT ALWAYS-CHEAPEST</a:t>
+            </a:r>
+          </a:p>
+        </p:txBody>
+      </p:sp>
+      <p:sp>
+        <p:nvSpPr>
+          <p:cNvPr id="84" name="TextBox 83"/>
+          <p:cNvSpPr txBox="1"/>
+          <p:nvPr/>
+        </p:nvSpPr>
+        <p:spPr>
+          <a:xfrm>
+            <a:off x="727200" y="6894000"/>
+            <a:ext cx="6543600" cy="511369"/>
+          </a:xfrm>
+          <a:prstGeom prst="rect">
+            <a:avLst/>
+          </a:prstGeom>
+          <a:noFill/>
+        </p:spPr>
+        <p:txBody>
+          <a:bodyPr wrap="square" lIns="0" rIns="0" tIns="0" bIns="0">
+            <a:spAutoFit/>
+          </a:bodyPr>
+          <a:lstStyle/>
+          <a:p>
+            <a:pPr algn="l">
+              <a:lnSpc>
+                <a:spcPct val="132000"/>
+              </a:lnSpc>
+              <a:spcAft>
+                <a:spcPts val="425"/>
+              </a:spcAft>
+            </a:pPr>
+            <a:r>
+              <a:rPr sz="1271" b="1" i="0">
+                <a:solidFill>
+                  <a:srgbClr val="12162E"/>
+                </a:solidFill>
+                <a:latin typeface="Arial"/>
+              </a:rPr>
+              <a:t>ONE FIXED VIEW</a:t>
+            </a:r>
+            <a:r>
+              <a:rPr sz="1271" b="0" i="0">
+                <a:solidFill>
+                  <a:srgbClr val="12162E"/>
+                </a:solidFill>
+                <a:latin typeface="Arial"/>
+              </a:rPr>
+              <a:t> — the single view that solves most tasks in a setting, used for every task.</a:t>
+            </a:r>
+          </a:p>
+        </p:txBody>
+      </p:sp>
+      <p:sp>
+        <p:nvSpPr>
+          <p:cNvPr id="85" name="TextBox 84"/>
+          <p:cNvSpPr txBox="1"/>
+          <p:nvPr/>
+        </p:nvSpPr>
+        <p:spPr>
+          <a:xfrm>
+            <a:off x="7486800" y="6894000"/>
+            <a:ext cx="6543600" cy="511369"/>
+          </a:xfrm>
+          <a:prstGeom prst="rect">
+            <a:avLst/>
+          </a:prstGeom>
+          <a:noFill/>
+        </p:spPr>
+        <p:txBody>
+          <a:bodyPr wrap="square" lIns="0" rIns="0" tIns="0" bIns="0">
+            <a:spAutoFit/>
+          </a:bodyPr>
+          <a:lstStyle/>
+          <a:p>
+            <a:pPr algn="l">
+              <a:lnSpc>
+                <a:spcPct val="132000"/>
+              </a:lnSpc>
+              <a:spcAft>
+                <a:spcPts val="425"/>
+              </a:spcAft>
+            </a:pPr>
+            <a:r>
+              <a:rPr sz="1271" b="1" i="0">
+                <a:solidFill>
+                  <a:srgbClr val="12162E"/>
+                </a:solidFill>
+                <a:latin typeface="Arial"/>
+              </a:rPr>
+              <a:t>ALWAYS-CHEAPEST</a:t>
+            </a:r>
+            <a:r>
+              <a:rPr sz="1271" b="0" i="0">
+                <a:solidFill>
+                  <a:srgbClr val="12162E"/>
+                </a:solidFill>
+                <a:latin typeface="Arial"/>
+              </a:rPr>
+              <a:t> — the single view that costs least on average in a setting, used for every task.</a:t>
+            </a:r>
+          </a:p>
+        </p:txBody>
+      </p:sp>
+      <p:sp>
+        <p:nvSpPr>
+          <p:cNvPr id="86" name="TextBox 85"/>
+          <p:cNvSpPr txBox="1"/>
+          <p:nvPr/>
+        </p:nvSpPr>
+        <p:spPr>
+          <a:xfrm>
+            <a:off x="14246400" y="6894000"/>
+            <a:ext cx="6543600" cy="767053"/>
+          </a:xfrm>
+          <a:prstGeom prst="rect">
+            <a:avLst/>
+          </a:prstGeom>
+          <a:noFill/>
+        </p:spPr>
+        <p:txBody>
+          <a:bodyPr wrap="square" lIns="0" rIns="0" tIns="0" bIns="0">
+            <a:spAutoFit/>
+          </a:bodyPr>
+          <a:lstStyle/>
+          <a:p>
+            <a:pPr algn="l">
+              <a:lnSpc>
+                <a:spcPct val="132000"/>
+              </a:lnSpc>
+              <a:spcAft>
+                <a:spcPts val="425"/>
+              </a:spcAft>
+            </a:pPr>
+            <a:r>
+              <a:rPr sz="1271" b="1" i="0">
+                <a:solidFill>
+                  <a:srgbClr val="12162E"/>
+                </a:solidFill>
+                <a:latin typeface="Arial"/>
+              </a:rPr>
+              <a:t>PERFECT HINDSIGHT</a:t>
+            </a:r>
+            <a:r>
+              <a:rPr sz="1271" b="0" i="0">
+                <a:solidFill>
+                  <a:srgbClr val="12162E"/>
+                </a:solidFill>
+                <a:latin typeface="Arial"/>
+              </a:rPr>
+              <a:t> — for each task, the view that solved it, picked after the fact. An optimistic bound: rerunning one unchanged view flips 10–14% of outcomes and by itself gains 2.0–7.6 tasks in 100.</a:t>
+            </a:r>
+          </a:p>
+        </p:txBody>
+      </p:sp>
+      <p:sp>
+        <p:nvSpPr>
+          <p:cNvPr id="87" name="Rectangle 86"/>
           <p:cNvSpPr/>
           <p:nvPr/>
         </p:nvSpPr>
         <p:spPr>
           <a:xfrm>
-            <a:off x="8215200" y="7992000"/>
-            <a:ext cx="360000" cy="504000"/>
-          </a:xfrm>
-          <a:prstGeom prst="rightArrow">
+            <a:off x="727200" y="7985053"/>
+            <a:ext cx="6451200" cy="1634345"/>
+          </a:xfrm>
+          <a:prstGeom prst="rect">
             <a:avLst/>
           </a:prstGeom>
           <a:solidFill>
-            <a:srgbClr val="C9CFE0"/>
+            <a:srgbClr val="ECEFFA"/>
           </a:solidFill>
           <a:ln>
             <a:noFill/>
@@ -4039,7 +4444,7 @@
           </a:fontRef>
         </p:style>
         <p:txBody>
-          <a:bodyPr rtlCol="0" anchor="ctr"/>
+          <a:bodyPr rtlCol="0" anchor="ctr" wrap="square"/>
           <a:lstStyle/>
           <a:p>
             <a:pPr algn="ctr"/>
@@ -4048,20 +4453,20 @@
       </p:sp>
       <p:sp>
         <p:nvSpPr>
-          <p:cNvPr id="79" name="Right Arrow 78"/>
+          <p:cNvPr id="88" name="Rectangle 87"/>
           <p:cNvSpPr/>
           <p:nvPr/>
         </p:nvSpPr>
         <p:spPr>
           <a:xfrm>
-            <a:off x="14119200" y="7992000"/>
-            <a:ext cx="360000" cy="504000"/>
-          </a:xfrm>
-          <a:prstGeom prst="rightArrow">
+            <a:off x="727200" y="7985053"/>
+            <a:ext cx="86400" cy="1634345"/>
+          </a:xfrm>
+          <a:prstGeom prst="rect">
             <a:avLst/>
           </a:prstGeom>
           <a:solidFill>
-            <a:srgbClr val="C9CFE0"/>
+            <a:srgbClr val="5049F9"/>
           </a:solidFill>
           <a:ln>
             <a:noFill/>
@@ -4083,7 +4488,7 @@
           </a:fontRef>
         </p:style>
         <p:txBody>
-          <a:bodyPr rtlCol="0" anchor="ctr"/>
+          <a:bodyPr rtlCol="0" anchor="ctr" wrap="square"/>
           <a:lstStyle/>
           <a:p>
             <a:pPr algn="ctr"/>
@@ -4092,20 +4497,104 @@
       </p:sp>
       <p:sp>
         <p:nvSpPr>
-          <p:cNvPr id="80" name="Right Arrow 79"/>
+          <p:cNvPr id="89" name="TextBox 88"/>
+          <p:cNvSpPr txBox="1"/>
+          <p:nvPr/>
+        </p:nvSpPr>
+        <p:spPr>
+          <a:xfrm>
+            <a:off x="943200" y="8165053"/>
+            <a:ext cx="6019200" cy="216000"/>
+          </a:xfrm>
+          <a:prstGeom prst="rect">
+            <a:avLst/>
+          </a:prstGeom>
+          <a:noFill/>
+        </p:spPr>
+        <p:txBody>
+          <a:bodyPr wrap="square" lIns="0" rIns="0" tIns="0" bIns="0">
+            <a:spAutoFit/>
+          </a:bodyPr>
+          <a:lstStyle/>
+          <a:p>
+            <a:pPr algn="l">
+              <a:lnSpc>
+                <a:spcPct val="120000"/>
+              </a:lnSpc>
+              <a:spcAft>
+                <a:spcPts val="0"/>
+              </a:spcAft>
+            </a:pPr>
+            <a:r>
+              <a:rPr sz="1059" b="0" i="0">
+                <a:solidFill>
+                  <a:srgbClr val="5049F9"/>
+                </a:solidFill>
+                <a:latin typeface="Consolas"/>
+              </a:rPr>
+              <a:t>THE CATCH</a:t>
+            </a:r>
+          </a:p>
+        </p:txBody>
+      </p:sp>
+      <p:sp>
+        <p:nvSpPr>
+          <p:cNvPr id="90" name="TextBox 89"/>
+          <p:cNvSpPr txBox="1"/>
+          <p:nvPr/>
+        </p:nvSpPr>
+        <p:spPr>
+          <a:xfrm>
+            <a:off x="943200" y="8399053"/>
+            <a:ext cx="6019200" cy="968345"/>
+          </a:xfrm>
+          <a:prstGeom prst="rect">
+            <a:avLst/>
+          </a:prstGeom>
+          <a:noFill/>
+        </p:spPr>
+        <p:txBody>
+          <a:bodyPr wrap="square" lIns="0" rIns="0" tIns="0" bIns="0">
+            <a:spAutoFit/>
+          </a:bodyPr>
+          <a:lstStyle/>
+          <a:p>
+            <a:pPr algn="l">
+              <a:lnSpc>
+                <a:spcPct val="120000"/>
+              </a:lnSpc>
+              <a:spcAft>
+                <a:spcPts val="992"/>
+              </a:spcAft>
+            </a:pPr>
+            <a:r>
+              <a:rPr sz="1764" b="1" i="0">
+                <a:solidFill>
+                  <a:srgbClr val="12162E"/>
+                </a:solidFill>
+                <a:latin typeface="Arial"/>
+              </a:rPr>
+              <a:t>The agents that would gain most from choosing a view solve the fewest tasks — so they produce the fewest examples to learn the choice from.</a:t>
+            </a:r>
+          </a:p>
+        </p:txBody>
+      </p:sp>
+      <p:sp>
+        <p:nvSpPr>
+          <p:cNvPr id="14" name="Rectangle 13"/>
           <p:cNvSpPr/>
           <p:nvPr/>
         </p:nvSpPr>
         <p:spPr>
           <a:xfrm>
-            <a:off x="17791200" y="7992000"/>
-            <a:ext cx="360000" cy="504000"/>
-          </a:xfrm>
-          <a:prstGeom prst="rightArrow">
+            <a:off x="727200" y="9907398"/>
+            <a:ext cx="177988" cy="177988"/>
+          </a:xfrm>
+          <a:prstGeom prst="rect">
             <a:avLst/>
           </a:prstGeom>
           <a:solidFill>
-            <a:srgbClr val="C9CFE0"/>
+            <a:srgbClr val="AB5FCE"/>
           </a:solidFill>
           <a:ln>
             <a:noFill/>
@@ -4131,19 +4620,233 @@
           <a:lstStyle/>
           <a:p>
             <a:pPr algn="ctr"/>
-          </a:p>
-        </p:txBody>
-      </p:sp>
-      <p:sp>
-        <p:nvSpPr>
-          <p:cNvPr id="81" name="Rectangle 80"/>
+            <a:endParaRPr/>
+          </a:p>
+        </p:txBody>
+      </p:sp>
+      <p:sp>
+        <p:nvSpPr>
+          <p:cNvPr id="15" name="TextBox 14"/>
+          <p:cNvSpPr txBox="1"/>
+          <p:nvPr/>
+        </p:nvSpPr>
+        <p:spPr>
+          <a:xfrm>
+            <a:off x="1032323" y="9864198"/>
+            <a:ext cx="6144827" cy="238912"/>
+          </a:xfrm>
+          <a:prstGeom prst="rect">
+            <a:avLst/>
+          </a:prstGeom>
+          <a:noFill/>
+        </p:spPr>
+        <p:txBody>
+          <a:bodyPr wrap="square" lIns="0" tIns="0" rIns="0" bIns="0" anchor="t">
+            <a:spAutoFit/>
+          </a:bodyPr>
+          <a:lstStyle/>
+          <a:p>
+            <a:pPr algn="l">
+              <a:lnSpc>
+                <a:spcPct val="118000"/>
+              </a:lnSpc>
+            </a:pPr>
+            <a:r>
+              <a:rPr sz="1412" b="1" i="0">
+                <a:solidFill>
+                  <a:srgbClr val="141E41"/>
+                </a:solidFill>
+                <a:latin typeface="Consolas"/>
+              </a:rPr>
+              <a:t>WHY LEARNING THE CHOICE FAILS HERE</a:t>
+            </a:r>
+            <a:endParaRPr sz="1412" b="1" spc="180" dirty="0">
+              <a:solidFill>
+                <a:srgbClr val="141E41"/>
+              </a:solidFill>
+              <a:latin typeface="Consolas"/>
+            </a:endParaRPr>
+          </a:p>
+        </p:txBody>
+      </p:sp>
+      <p:sp>
+        <p:nvSpPr>
+          <p:cNvPr id="16" name="Rectangle 15"/>
           <p:cNvSpPr/>
           <p:nvPr/>
         </p:nvSpPr>
         <p:spPr>
           <a:xfrm>
-            <a:off x="727200" y="5580000"/>
-            <a:ext cx="3024000" cy="5328000"/>
+            <a:off x="727200" y="10225234"/>
+            <a:ext cx="1169636" cy="35597"/>
+          </a:xfrm>
+          <a:prstGeom prst="rect">
+            <a:avLst/>
+          </a:prstGeom>
+          <a:solidFill>
+            <a:srgbClr val="141E41"/>
+          </a:solidFill>
+          <a:ln>
+            <a:noFill/>
+          </a:ln>
+          <a:effectLst/>
+        </p:spPr>
+        <p:style>
+          <a:lnRef idx="1">
+            <a:schemeClr val="accent1"/>
+          </a:lnRef>
+          <a:fillRef idx="3">
+            <a:schemeClr val="accent1"/>
+          </a:fillRef>
+          <a:effectRef idx="2">
+            <a:schemeClr val="accent1"/>
+          </a:effectRef>
+          <a:fontRef idx="minor">
+            <a:schemeClr val="lt1"/>
+          </a:fontRef>
+        </p:style>
+        <p:txBody>
+          <a:bodyPr rtlCol="0" anchor="ctr"/>
+          <a:lstStyle/>
+          <a:p>
+            <a:pPr algn="ctr"/>
+            <a:endParaRPr/>
+          </a:p>
+        </p:txBody>
+      </p:sp>
+      <p:sp>
+        <p:nvSpPr>
+          <p:cNvPr id="17" name="Rectangle 16"/>
+          <p:cNvSpPr/>
+          <p:nvPr/>
+        </p:nvSpPr>
+        <p:spPr>
+          <a:xfrm>
+            <a:off x="1896836" y="10235405"/>
+            <a:ext cx="5281564" cy="15256"/>
+          </a:xfrm>
+          <a:prstGeom prst="rect">
+            <a:avLst/>
+          </a:prstGeom>
+          <a:solidFill>
+            <a:srgbClr val="DDE3F2"/>
+          </a:solidFill>
+          <a:ln>
+            <a:noFill/>
+          </a:ln>
+          <a:effectLst/>
+        </p:spPr>
+        <p:style>
+          <a:lnRef idx="1">
+            <a:schemeClr val="accent1"/>
+          </a:lnRef>
+          <a:fillRef idx="3">
+            <a:schemeClr val="accent1"/>
+          </a:fillRef>
+          <a:effectRef idx="2">
+            <a:schemeClr val="accent1"/>
+          </a:effectRef>
+          <a:fontRef idx="minor">
+            <a:schemeClr val="lt1"/>
+          </a:fontRef>
+        </p:style>
+        <p:txBody>
+          <a:bodyPr rtlCol="0" anchor="ctr"/>
+          <a:lstStyle/>
+          <a:p>
+            <a:pPr algn="ctr"/>
+            <a:endParaRPr/>
+          </a:p>
+        </p:txBody>
+      </p:sp>
+      <p:sp>
+        <p:nvSpPr>
+          <p:cNvPr id="91" name="TextBox 90"/>
+          <p:cNvSpPr txBox="1"/>
+          <p:nvPr/>
+        </p:nvSpPr>
+        <p:spPr>
+          <a:xfrm>
+            <a:off x="727200" y="10447398"/>
+            <a:ext cx="6451200" cy="1613908"/>
+          </a:xfrm>
+          <a:prstGeom prst="rect">
+            <a:avLst/>
+          </a:prstGeom>
+          <a:noFill/>
+        </p:spPr>
+        <p:txBody>
+          <a:bodyPr wrap="square" lIns="0" rIns="0" tIns="0" bIns="0">
+            <a:spAutoFit/>
+          </a:bodyPr>
+          <a:lstStyle/>
+          <a:p>
+            <a:pPr algn="l">
+              <a:lnSpc>
+                <a:spcPct val="120000"/>
+              </a:lnSpc>
+              <a:spcAft>
+                <a:spcPts val="992"/>
+              </a:spcAft>
+            </a:pPr>
+            <a:r>
+              <a:rPr sz="1764" b="0" i="0">
+                <a:solidFill>
+                  <a:srgbClr val="12162E"/>
+                </a:solidFill>
+                <a:latin typeface="Arial"/>
+              </a:rPr>
+              <a:t>A training example for “which view” exists only when the agent solves a task. Here the best single view solves just </a:t>
+            </a:r>
+            <a:r>
+              <a:rPr sz="1764" b="1" i="0">
+                <a:solidFill>
+                  <a:srgbClr val="12162E"/>
+                </a:solidFill>
+                <a:latin typeface="Arial"/>
+              </a:rPr>
+              <a:t>2–36%</a:t>
+            </a:r>
+            <a:r>
+              <a:rPr sz="1764" b="0" i="0">
+                <a:solidFill>
+                  <a:srgbClr val="12162E"/>
+                </a:solidFill>
+                <a:latin typeface="Arial"/>
+              </a:rPr>
+              <a:t> of tasks, leaving typically </a:t>
+            </a:r>
+            <a:r>
+              <a:rPr sz="1764" b="1" i="0">
+                <a:solidFill>
+                  <a:srgbClr val="12162E"/>
+                </a:solidFill>
+                <a:latin typeface="Arial"/>
+              </a:rPr>
+              <a:t>15–97</a:t>
+            </a:r>
+            <a:r>
+              <a:rPr sz="1764" b="0" i="0">
+                <a:solidFill>
+                  <a:srgbClr val="12162E"/>
+                </a:solidFill>
+                <a:latin typeface="Arial"/>
+              </a:rPr>
+              <a:t> usable examples per setting — enough to train a classifier in only 2 of the 6 VisualWebArena settings.</a:t>
+            </a:r>
+          </a:p>
+        </p:txBody>
+      </p:sp>
+      <p:sp>
+        <p:nvSpPr>
+          <p:cNvPr id="92" name="Rectangle 91"/>
+          <p:cNvSpPr/>
+          <p:nvPr/>
+        </p:nvSpPr>
+        <p:spPr>
+          <a:xfrm>
+            <a:off x="727200" y="12205306"/>
+            <a:ext cx="6451200" cy="4262546"/>
           </a:xfrm>
           <a:prstGeom prst="rect">
             <a:avLst/>
@@ -4182,14 +4885,14 @@
       </p:sp>
       <p:sp>
         <p:nvSpPr>
-          <p:cNvPr id="82" name="Rectangle 81"/>
+          <p:cNvPr id="93" name="Rectangle 92"/>
           <p:cNvSpPr/>
           <p:nvPr/>
         </p:nvSpPr>
         <p:spPr>
           <a:xfrm>
-            <a:off x="727200" y="5580000"/>
-            <a:ext cx="3024000" cy="50400"/>
+            <a:off x="727200" y="12205306"/>
+            <a:ext cx="6451200" cy="50400"/>
           </a:xfrm>
           <a:prstGeom prst="rect">
             <a:avLst/>
@@ -4224,16 +4927,1026 @@
           </a:p>
         </p:txBody>
       </p:sp>
-      <p:sp>
-        <p:nvSpPr>
-          <p:cNvPr id="83" name="TextBox 82"/>
+      <p:pic>
+        <p:nvPicPr>
+          <p:cNvPr id="94" name="Picture 93" descr="poster_label_supply.png"/>
+          <p:cNvPicPr>
+            <a:picLocks noChangeAspect="1"/>
+          </p:cNvPicPr>
+          <p:nvPr/>
+        </p:nvPicPr>
+        <p:blipFill>
+          <a:blip r:embed="rId5"/>
+          <a:stretch>
+            <a:fillRect/>
+          </a:stretch>
+        </p:blipFill>
+        <p:spPr>
+          <a:xfrm>
+            <a:off x="835200" y="12363706"/>
+            <a:ext cx="6235200" cy="3996147"/>
+          </a:xfrm>
+          <a:prstGeom prst="rect">
+            <a:avLst/>
+          </a:prstGeom>
+        </p:spPr>
+      </p:pic>
+      <p:sp>
+        <p:nvSpPr>
+          <p:cNvPr id="95" name="TextBox 94"/>
           <p:cNvSpPr txBox="1"/>
           <p:nvPr/>
         </p:nvSpPr>
         <p:spPr>
           <a:xfrm>
-            <a:off x="907200" y="5724000"/>
-            <a:ext cx="2664000" cy="216000"/>
+            <a:off x="727200" y="16557852"/>
+            <a:ext cx="6451200" cy="511369"/>
+          </a:xfrm>
+          <a:prstGeom prst="rect">
+            <a:avLst/>
+          </a:prstGeom>
+          <a:noFill/>
+        </p:spPr>
+        <p:txBody>
+          <a:bodyPr wrap="square" lIns="0" rIns="0" tIns="0" bIns="0">
+            <a:spAutoFit/>
+          </a:bodyPr>
+          <a:lstStyle/>
+          <a:p>
+            <a:pPr algn="l">
+              <a:lnSpc>
+                <a:spcPct val="132000"/>
+              </a:lnSpc>
+              <a:spcAft>
+                <a:spcPts val="425"/>
+              </a:spcAft>
+            </a:pPr>
+            <a:r>
+              <a:rPr sz="1271" b="1" i="0">
+                <a:solidFill>
+                  <a:srgbClr val="5D6787"/>
+                </a:solidFill>
+                <a:latin typeface="Arial"/>
+              </a:rPr>
+              <a:t>Fig 3.</a:t>
+            </a:r>
+            <a:r>
+              <a:rPr sz="1271" b="0" i="0">
+                <a:solidFill>
+                  <a:srgbClr val="5D6787"/>
+                </a:solidFill>
+                <a:latin typeface="Arial"/>
+              </a:rPr>
+              <a:t> Usable “which view” examples against the best single view's success rate, one point per VisualWebArena setting. Examples exist only where tasks get solved.</a:t>
+            </a:r>
+          </a:p>
+        </p:txBody>
+      </p:sp>
+      <p:sp>
+        <p:nvSpPr>
+          <p:cNvPr id="96" name="TextBox 95"/>
+          <p:cNvSpPr txBox="1"/>
+          <p:nvPr/>
+        </p:nvSpPr>
+        <p:spPr>
+          <a:xfrm>
+            <a:off x="727200" y="17177221"/>
+            <a:ext cx="6451200" cy="968345"/>
+          </a:xfrm>
+          <a:prstGeom prst="rect">
+            <a:avLst/>
+          </a:prstGeom>
+          <a:noFill/>
+        </p:spPr>
+        <p:txBody>
+          <a:bodyPr wrap="square" lIns="0" rIns="0" tIns="0" bIns="0">
+            <a:spAutoFit/>
+          </a:bodyPr>
+          <a:lstStyle/>
+          <a:p>
+            <a:pPr algn="l">
+              <a:lnSpc>
+                <a:spcPct val="120000"/>
+              </a:lnSpc>
+              <a:spcAft>
+                <a:spcPts val="992"/>
+              </a:spcAft>
+            </a:pPr>
+            <a:r>
+              <a:rPr sz="1764" b="0" i="0">
+                <a:solidFill>
+                  <a:srgbClr val="12162E"/>
+                </a:solidFill>
+                <a:latin typeface="Arial"/>
+              </a:rPr>
+              <a:t>Shrinking the training data on purpose points to scarcity as the main bottleneck, and prices it: the failing settings would need at least </a:t>
+            </a:r>
+            <a:r>
+              <a:rPr sz="1764" b="1" i="0">
+                <a:solidFill>
+                  <a:srgbClr val="12162E"/>
+                </a:solidFill>
+                <a:latin typeface="Arial"/>
+              </a:rPr>
+              <a:t>2.1–4.2×</a:t>
+            </a:r>
+            <a:r>
+              <a:rPr sz="1764" b="0" i="0">
+                <a:solidFill>
+                  <a:srgbClr val="12162E"/>
+                </a:solidFill>
+                <a:latin typeface="Arial"/>
+              </a:rPr>
+              <a:t> more tasks than the benchmarks contain.</a:t>
+            </a:r>
+          </a:p>
+        </p:txBody>
+      </p:sp>
+      <p:sp>
+        <p:nvSpPr>
+          <p:cNvPr id="14" name="Rectangle 13"/>
+          <p:cNvSpPr/>
+          <p:nvPr/>
+        </p:nvSpPr>
+        <p:spPr>
+          <a:xfrm>
+            <a:off x="727200" y="18397566"/>
+            <a:ext cx="177988" cy="177988"/>
+          </a:xfrm>
+          <a:prstGeom prst="rect">
+            <a:avLst/>
+          </a:prstGeom>
+          <a:solidFill>
+            <a:srgbClr val="AB5FCE"/>
+          </a:solidFill>
+          <a:ln>
+            <a:noFill/>
+          </a:ln>
+          <a:effectLst/>
+        </p:spPr>
+        <p:style>
+          <a:lnRef idx="1">
+            <a:schemeClr val="accent1"/>
+          </a:lnRef>
+          <a:fillRef idx="3">
+            <a:schemeClr val="accent1"/>
+          </a:fillRef>
+          <a:effectRef idx="2">
+            <a:schemeClr val="accent1"/>
+          </a:effectRef>
+          <a:fontRef idx="minor">
+            <a:schemeClr val="lt1"/>
+          </a:fontRef>
+        </p:style>
+        <p:txBody>
+          <a:bodyPr rtlCol="0" anchor="ctr"/>
+          <a:lstStyle/>
+          <a:p>
+            <a:pPr algn="ctr"/>
+            <a:endParaRPr/>
+          </a:p>
+        </p:txBody>
+      </p:sp>
+      <p:sp>
+        <p:nvSpPr>
+          <p:cNvPr id="15" name="TextBox 14"/>
+          <p:cNvSpPr txBox="1"/>
+          <p:nvPr/>
+        </p:nvSpPr>
+        <p:spPr>
+          <a:xfrm>
+            <a:off x="1032323" y="18354366"/>
+            <a:ext cx="6144827" cy="238912"/>
+          </a:xfrm>
+          <a:prstGeom prst="rect">
+            <a:avLst/>
+          </a:prstGeom>
+          <a:noFill/>
+        </p:spPr>
+        <p:txBody>
+          <a:bodyPr wrap="square" lIns="0" tIns="0" rIns="0" bIns="0" anchor="t">
+            <a:spAutoFit/>
+          </a:bodyPr>
+          <a:lstStyle/>
+          <a:p>
+            <a:pPr algn="l">
+              <a:lnSpc>
+                <a:spcPct val="118000"/>
+              </a:lnSpc>
+            </a:pPr>
+            <a:r>
+              <a:rPr sz="1412" b="1" i="0">
+                <a:solidFill>
+                  <a:srgbClr val="141E41"/>
+                </a:solidFill>
+                <a:latin typeface="Consolas"/>
+              </a:rPr>
+              <a:t>TAKEAWAY</a:t>
+            </a:r>
+            <a:endParaRPr sz="1412" b="1" spc="180" dirty="0">
+              <a:solidFill>
+                <a:srgbClr val="141E41"/>
+              </a:solidFill>
+              <a:latin typeface="Consolas"/>
+            </a:endParaRPr>
+          </a:p>
+        </p:txBody>
+      </p:sp>
+      <p:sp>
+        <p:nvSpPr>
+          <p:cNvPr id="16" name="Rectangle 15"/>
+          <p:cNvSpPr/>
+          <p:nvPr/>
+        </p:nvSpPr>
+        <p:spPr>
+          <a:xfrm>
+            <a:off x="727200" y="18715402"/>
+            <a:ext cx="1169636" cy="35597"/>
+          </a:xfrm>
+          <a:prstGeom prst="rect">
+            <a:avLst/>
+          </a:prstGeom>
+          <a:solidFill>
+            <a:srgbClr val="141E41"/>
+          </a:solidFill>
+          <a:ln>
+            <a:noFill/>
+          </a:ln>
+          <a:effectLst/>
+        </p:spPr>
+        <p:style>
+          <a:lnRef idx="1">
+            <a:schemeClr val="accent1"/>
+          </a:lnRef>
+          <a:fillRef idx="3">
+            <a:schemeClr val="accent1"/>
+          </a:fillRef>
+          <a:effectRef idx="2">
+            <a:schemeClr val="accent1"/>
+          </a:effectRef>
+          <a:fontRef idx="minor">
+            <a:schemeClr val="lt1"/>
+          </a:fontRef>
+        </p:style>
+        <p:txBody>
+          <a:bodyPr rtlCol="0" anchor="ctr"/>
+          <a:lstStyle/>
+          <a:p>
+            <a:pPr algn="ctr"/>
+            <a:endParaRPr/>
+          </a:p>
+        </p:txBody>
+      </p:sp>
+      <p:sp>
+        <p:nvSpPr>
+          <p:cNvPr id="17" name="Rectangle 16"/>
+          <p:cNvSpPr/>
+          <p:nvPr/>
+        </p:nvSpPr>
+        <p:spPr>
+          <a:xfrm>
+            <a:off x="1896836" y="18725573"/>
+            <a:ext cx="5281564" cy="15256"/>
+          </a:xfrm>
+          <a:prstGeom prst="rect">
+            <a:avLst/>
+          </a:prstGeom>
+          <a:solidFill>
+            <a:srgbClr val="DDE3F2"/>
+          </a:solidFill>
+          <a:ln>
+            <a:noFill/>
+          </a:ln>
+          <a:effectLst/>
+        </p:spPr>
+        <p:style>
+          <a:lnRef idx="1">
+            <a:schemeClr val="accent1"/>
+          </a:lnRef>
+          <a:fillRef idx="3">
+            <a:schemeClr val="accent1"/>
+          </a:fillRef>
+          <a:effectRef idx="2">
+            <a:schemeClr val="accent1"/>
+          </a:effectRef>
+          <a:fontRef idx="minor">
+            <a:schemeClr val="lt1"/>
+          </a:fontRef>
+        </p:style>
+        <p:txBody>
+          <a:bodyPr rtlCol="0" anchor="ctr"/>
+          <a:lstStyle/>
+          <a:p>
+            <a:pPr algn="ctr"/>
+            <a:endParaRPr/>
+          </a:p>
+        </p:txBody>
+      </p:sp>
+      <p:sp>
+        <p:nvSpPr>
+          <p:cNvPr id="97" name="TextBox 96"/>
+          <p:cNvSpPr txBox="1"/>
+          <p:nvPr/>
+        </p:nvSpPr>
+        <p:spPr>
+          <a:xfrm>
+            <a:off x="727200" y="18937566"/>
+            <a:ext cx="6451200" cy="1613908"/>
+          </a:xfrm>
+          <a:prstGeom prst="rect">
+            <a:avLst/>
+          </a:prstGeom>
+          <a:noFill/>
+        </p:spPr>
+        <p:txBody>
+          <a:bodyPr wrap="square" lIns="0" rIns="0" tIns="0" bIns="0">
+            <a:spAutoFit/>
+          </a:bodyPr>
+          <a:lstStyle/>
+          <a:p>
+            <a:pPr algn="l">
+              <a:lnSpc>
+                <a:spcPct val="120000"/>
+              </a:lnSpc>
+              <a:spcAft>
+                <a:spcPts val="992"/>
+              </a:spcAft>
+            </a:pPr>
+            <a:r>
+              <a:rPr sz="1764" b="1" i="0">
+                <a:solidFill>
+                  <a:srgbClr val="12162E"/>
+                </a:solidFill>
+                <a:latin typeface="Arial"/>
+              </a:rPr>
+              <a:t>Learning how to see is not only a modelling problem: whether it can be learned depends on how good the agent producing the examples already is.</a:t>
+            </a:r>
+            <a:r>
+              <a:rPr sz="1764" b="0" i="0">
+                <a:solidFill>
+                  <a:srgbClr val="12162E"/>
+                </a:solidFill>
+                <a:latin typeface="Arial"/>
+              </a:rPr>
+              <a:t> So, in this order: improve the agent, then collect reliable examples, then learn when to look.</a:t>
+            </a:r>
+          </a:p>
+        </p:txBody>
+      </p:sp>
+      <p:sp>
+        <p:nvSpPr>
+          <p:cNvPr id="98" name="TextBox 97"/>
+          <p:cNvSpPr txBox="1"/>
+          <p:nvPr/>
+        </p:nvSpPr>
+        <p:spPr>
+          <a:xfrm>
+            <a:off x="727200" y="20605474"/>
+            <a:ext cx="6451200" cy="511369"/>
+          </a:xfrm>
+          <a:prstGeom prst="rect">
+            <a:avLst/>
+          </a:prstGeom>
+          <a:noFill/>
+        </p:spPr>
+        <p:txBody>
+          <a:bodyPr wrap="square" lIns="0" rIns="0" tIns="0" bIns="0">
+            <a:spAutoFit/>
+          </a:bodyPr>
+          <a:lstStyle/>
+          <a:p>
+            <a:pPr algn="l">
+              <a:lnSpc>
+                <a:spcPct val="132000"/>
+              </a:lnSpc>
+              <a:spcAft>
+                <a:spcPts val="425"/>
+              </a:spcAft>
+            </a:pPr>
+            <a:r>
+              <a:rPr sz="1271" b="0" i="0">
+                <a:solidFill>
+                  <a:srgbClr val="5D6787"/>
+                </a:solidFill>
+                <a:latin typeface="Arial"/>
+              </a:rPr>
+              <a:t>Measured in the 2–36% success regime we observed. This need not hold for stronger agents.</a:t>
+            </a:r>
+          </a:p>
+        </p:txBody>
+      </p:sp>
+      <p:sp>
+        <p:nvSpPr>
+          <p:cNvPr id="99" name="Rectangle 98"/>
+          <p:cNvSpPr/>
+          <p:nvPr/>
+        </p:nvSpPr>
+        <p:spPr>
+          <a:xfrm>
+            <a:off x="7534800" y="7985053"/>
+            <a:ext cx="13255200" cy="7643134"/>
+          </a:xfrm>
+          <a:prstGeom prst="rect">
+            <a:avLst/>
+          </a:prstGeom>
+          <a:solidFill>
+            <a:srgbClr val="F7F9FD"/>
+          </a:solidFill>
+          <a:ln w="8890">
+            <a:solidFill>
+              <a:srgbClr val="DDE3F2"/>
+            </a:solidFill>
+          </a:ln>
+          <a:effectLst/>
+        </p:spPr>
+        <p:style>
+          <a:lnRef idx="1">
+            <a:schemeClr val="accent1"/>
+          </a:lnRef>
+          <a:fillRef idx="3">
+            <a:schemeClr val="accent1"/>
+          </a:fillRef>
+          <a:effectRef idx="2">
+            <a:schemeClr val="accent1"/>
+          </a:effectRef>
+          <a:fontRef idx="minor">
+            <a:schemeClr val="lt1"/>
+          </a:fontRef>
+        </p:style>
+        <p:txBody>
+          <a:bodyPr rtlCol="0" anchor="ctr" wrap="square"/>
+          <a:lstStyle/>
+          <a:p>
+            <a:pPr algn="ctr"/>
+          </a:p>
+        </p:txBody>
+      </p:sp>
+      <p:sp>
+        <p:nvSpPr>
+          <p:cNvPr id="100" name="Rectangle 99"/>
+          <p:cNvSpPr/>
+          <p:nvPr/>
+        </p:nvSpPr>
+        <p:spPr>
+          <a:xfrm>
+            <a:off x="7534800" y="7985053"/>
+            <a:ext cx="13255200" cy="50400"/>
+          </a:xfrm>
+          <a:prstGeom prst="rect">
+            <a:avLst/>
+          </a:prstGeom>
+          <a:solidFill>
+            <a:srgbClr val="5049F9"/>
+          </a:solidFill>
+          <a:ln>
+            <a:noFill/>
+          </a:ln>
+          <a:effectLst/>
+        </p:spPr>
+        <p:style>
+          <a:lnRef idx="1">
+            <a:schemeClr val="accent1"/>
+          </a:lnRef>
+          <a:fillRef idx="3">
+            <a:schemeClr val="accent1"/>
+          </a:fillRef>
+          <a:effectRef idx="2">
+            <a:schemeClr val="accent1"/>
+          </a:effectRef>
+          <a:fontRef idx="minor">
+            <a:schemeClr val="lt1"/>
+          </a:fontRef>
+        </p:style>
+        <p:txBody>
+          <a:bodyPr rtlCol="0" anchor="ctr" wrap="square"/>
+          <a:lstStyle/>
+          <a:p>
+            <a:pPr algn="ctr"/>
+          </a:p>
+        </p:txBody>
+      </p:sp>
+      <p:pic>
+        <p:nvPicPr>
+          <p:cNvPr id="101" name="Picture 100" descr="poster_dominance_plane.png"/>
+          <p:cNvPicPr>
+            <a:picLocks noChangeAspect="1"/>
+          </p:cNvPicPr>
+          <p:nvPr/>
+        </p:nvPicPr>
+        <p:blipFill>
+          <a:blip r:embed="rId6"/>
+          <a:stretch>
+            <a:fillRect/>
+          </a:stretch>
+        </p:blipFill>
+        <p:spPr>
+          <a:xfrm>
+            <a:off x="7642800" y="8143453"/>
+            <a:ext cx="13039200" cy="7376735"/>
+          </a:xfrm>
+          <a:prstGeom prst="rect">
+            <a:avLst/>
+          </a:prstGeom>
+        </p:spPr>
+      </p:pic>
+      <p:sp>
+        <p:nvSpPr>
+          <p:cNvPr id="102" name="TextBox 101"/>
+          <p:cNvSpPr txBox="1"/>
+          <p:nvPr/>
+        </p:nvSpPr>
+        <p:spPr>
+          <a:xfrm>
+            <a:off x="7534800" y="15718187"/>
+            <a:ext cx="13255200" cy="511369"/>
+          </a:xfrm>
+          <a:prstGeom prst="rect">
+            <a:avLst/>
+          </a:prstGeom>
+          <a:noFill/>
+        </p:spPr>
+        <p:txBody>
+          <a:bodyPr wrap="square" lIns="0" rIns="0" tIns="0" bIns="0">
+            <a:spAutoFit/>
+          </a:bodyPr>
+          <a:lstStyle/>
+          <a:p>
+            <a:pPr algn="l">
+              <a:lnSpc>
+                <a:spcPct val="132000"/>
+              </a:lnSpc>
+              <a:spcAft>
+                <a:spcPts val="425"/>
+              </a:spcAft>
+            </a:pPr>
+            <a:r>
+              <a:rPr sz="1271" b="1" i="0">
+                <a:solidFill>
+                  <a:srgbClr val="5D6787"/>
+                </a:solidFill>
+                <a:latin typeface="Arial"/>
+              </a:rPr>
+              <a:t>Fig 2.</a:t>
+            </a:r>
+            <a:r>
+              <a:rPr sz="1271" b="0" i="0">
+                <a:solidFill>
+                  <a:srgbClr val="5D6787"/>
+                </a:solidFill>
+                <a:latin typeface="Arial"/>
+              </a:rPr>
+              <a:t> Every way of choosing a view, in every setting, compared with one fixed rule: </a:t>
+            </a:r>
+            <a:r>
+              <a:rPr sz="1271" b="1" i="0">
+                <a:solidFill>
+                  <a:srgbClr val="5D6787"/>
+                </a:solidFill>
+                <a:latin typeface="Arial"/>
+              </a:rPr>
+              <a:t>always use the cheapest view</a:t>
+            </a:r>
+            <a:r>
+              <a:rPr sz="1271" b="0" i="0">
+                <a:solidFill>
+                  <a:srgbClr val="5D6787"/>
+                </a:solidFill>
+                <a:latin typeface="Arial"/>
+              </a:rPr>
+              <a:t> (★). A win lands in the shaded region — cheaper </a:t>
+            </a:r>
+            <a:r>
+              <a:rPr sz="1271" b="0" i="1">
+                <a:solidFill>
+                  <a:srgbClr val="5D6787"/>
+                </a:solidFill>
+                <a:latin typeface="Arial"/>
+              </a:rPr>
+              <a:t>and</a:t>
+            </a:r>
+            <a:r>
+              <a:rPr sz="1271" b="0" i="0">
+                <a:solidFill>
+                  <a:srgbClr val="5D6787"/>
+                </a:solidFill>
+                <a:latin typeface="Arial"/>
+              </a:rPr>
+              <a:t> no worse. Always-cheapest is cheapest on average, not on every task, which is why a few points sit left of it. Learned choices are scored only on tasks they never saw.</a:t>
+            </a:r>
+          </a:p>
+        </p:txBody>
+      </p:sp>
+      <p:sp>
+        <p:nvSpPr>
+          <p:cNvPr id="103" name="TextBox 102"/>
+          <p:cNvSpPr txBox="1"/>
+          <p:nvPr/>
+        </p:nvSpPr>
+        <p:spPr>
+          <a:xfrm>
+            <a:off x="7534800" y="16337556"/>
+            <a:ext cx="13255200" cy="2188690"/>
+          </a:xfrm>
+          <a:prstGeom prst="rect">
+            <a:avLst/>
+          </a:prstGeom>
+          <a:noFill/>
+        </p:spPr>
+        <p:txBody>
+          <a:bodyPr wrap="square" lIns="0" rIns="0" tIns="0" bIns="0">
+            <a:spAutoFit/>
+          </a:bodyPr>
+          <a:lstStyle/>
+          <a:p>
+            <a:pPr algn="l">
+              <a:lnSpc>
+                <a:spcPct val="120000"/>
+              </a:lnSpc>
+              <a:spcAft>
+                <a:spcPts val="992"/>
+              </a:spcAft>
+            </a:pPr>
+            <a:r>
+              <a:rPr sz="1764" b="1" i="0">
+                <a:solidFill>
+                  <a:srgbClr val="12162E"/>
+                </a:solidFill>
+                <a:latin typeface="Arial"/>
+              </a:rPr>
+              <a:t>Perfect hindsight would pay.</a:t>
+            </a:r>
+            <a:r>
+              <a:rPr sz="1764" b="0" i="0">
+                <a:solidFill>
+                  <a:srgbClr val="12162E"/>
+                </a:solidFill>
+                <a:latin typeface="Arial"/>
+              </a:rPr>
+              <a:t> Picking the winning view for each task after the fact would solve </a:t>
+            </a:r>
+            <a:r>
+              <a:rPr sz="1764" b="1" i="0">
+                <a:solidFill>
+                  <a:srgbClr val="12162E"/>
+                </a:solidFill>
+                <a:latin typeface="Arial"/>
+              </a:rPr>
+              <a:t>3.45 to 16.35 more tasks in every 100</a:t>
+            </a:r>
+            <a:r>
+              <a:rPr sz="1764" b="0" i="0">
+                <a:solidFill>
+                  <a:srgbClr val="12162E"/>
+                </a:solidFill>
+                <a:latin typeface="Arial"/>
+              </a:rPr>
+              <a:t> than the best single view, and spend 1.6–35.3% less — in all 8 settings.</a:t>
+            </a:r>
+          </a:p>
+          <a:p>
+            <a:pPr algn="l">
+              <a:lnSpc>
+                <a:spcPct val="120000"/>
+              </a:lnSpc>
+              <a:spcAft>
+                <a:spcPts val="992"/>
+              </a:spcAft>
+            </a:pPr>
+            <a:r>
+              <a:rPr sz="1764" b="1" i="0">
+                <a:solidFill>
+                  <a:srgbClr val="12162E"/>
+                </a:solidFill>
+                <a:latin typeface="Arial"/>
+              </a:rPr>
+              <a:t>Nothing we trained could do it.</a:t>
+            </a:r>
+            <a:r>
+              <a:rPr sz="1764" b="0" i="0">
+                <a:solidFill>
+                  <a:srgbClr val="12162E"/>
+                </a:solidFill>
+                <a:latin typeface="Arial"/>
+              </a:rPr>
+              <a:t> In </a:t>
+            </a:r>
+            <a:r>
+              <a:rPr sz="1764" b="1" i="0">
+                <a:solidFill>
+                  <a:srgbClr val="12162E"/>
+                </a:solidFill>
+                <a:latin typeface="Arial"/>
+              </a:rPr>
+              <a:t>0 of 8</a:t>
+            </a:r>
+            <a:r>
+              <a:rPr sz="1764" b="0" i="0">
+                <a:solidFill>
+                  <a:srgbClr val="12162E"/>
+                </a:solidFill>
+                <a:latin typeface="Arial"/>
+              </a:rPr>
+              <a:t> settings did a learned choice beat always using the cheapest view on both success and cost — and even perfect hindsight manages that in only </a:t>
+            </a:r>
+            <a:r>
+              <a:rPr sz="1764" b="1" i="0">
+                <a:solidFill>
+                  <a:srgbClr val="12162E"/>
+                </a:solidFill>
+                <a:latin typeface="Arial"/>
+              </a:rPr>
+              <a:t>1 of 8</a:t>
+            </a:r>
+            <a:r>
+              <a:rPr sz="1764" b="0" i="0">
+                <a:solidFill>
+                  <a:srgbClr val="12162E"/>
+                </a:solidFill>
+                <a:latin typeface="Arial"/>
+              </a:rPr>
+              <a:t>.</a:t>
+            </a:r>
+          </a:p>
+          <a:p>
+            <a:pPr algn="l">
+              <a:lnSpc>
+                <a:spcPct val="120000"/>
+              </a:lnSpc>
+              <a:spcAft>
+                <a:spcPts val="992"/>
+              </a:spcAft>
+            </a:pPr>
+            <a:r>
+              <a:rPr sz="1764" b="1" i="0">
+                <a:solidFill>
+                  <a:srgbClr val="12162E"/>
+                </a:solidFill>
+                <a:latin typeface="Arial"/>
+              </a:rPr>
+              <a:t>What survives is a bound, not a method.</a:t>
+            </a:r>
+            <a:r>
+              <a:rPr sz="1764" b="0" i="0">
+                <a:solidFill>
+                  <a:srgbClr val="12162E"/>
+                </a:solidFill>
+                <a:latin typeface="Arial"/>
+              </a:rPr>
+              <a:t> Sending the tasks nobody solves to the cheapest view saves 9.5–30.6% at the same success in 8 of 8 — but that too needs hindsight, and plain always-cheapest usually saves more.</a:t>
+            </a:r>
+          </a:p>
+        </p:txBody>
+      </p:sp>
+      <p:sp>
+        <p:nvSpPr>
+          <p:cNvPr id="14" name="Rectangle 13"/>
+          <p:cNvSpPr/>
+          <p:nvPr/>
+        </p:nvSpPr>
+        <p:spPr>
+          <a:xfrm>
+            <a:off x="7534800" y="18778246"/>
+            <a:ext cx="177988" cy="177988"/>
+          </a:xfrm>
+          <a:prstGeom prst="rect">
+            <a:avLst/>
+          </a:prstGeom>
+          <a:solidFill>
+            <a:srgbClr val="AB5FCE"/>
+          </a:solidFill>
+          <a:ln>
+            <a:noFill/>
+          </a:ln>
+          <a:effectLst/>
+        </p:spPr>
+        <p:style>
+          <a:lnRef idx="1">
+            <a:schemeClr val="accent1"/>
+          </a:lnRef>
+          <a:fillRef idx="3">
+            <a:schemeClr val="accent1"/>
+          </a:fillRef>
+          <a:effectRef idx="2">
+            <a:schemeClr val="accent1"/>
+          </a:effectRef>
+          <a:fontRef idx="minor">
+            <a:schemeClr val="lt1"/>
+          </a:fontRef>
+        </p:style>
+        <p:txBody>
+          <a:bodyPr rtlCol="0" anchor="ctr"/>
+          <a:lstStyle/>
+          <a:p>
+            <a:pPr algn="ctr"/>
+            <a:endParaRPr/>
+          </a:p>
+        </p:txBody>
+      </p:sp>
+      <p:sp>
+        <p:nvSpPr>
+          <p:cNvPr id="15" name="TextBox 14"/>
+          <p:cNvSpPr txBox="1"/>
+          <p:nvPr/>
+        </p:nvSpPr>
+        <p:spPr>
+          <a:xfrm>
+            <a:off x="7839923" y="18735046"/>
+            <a:ext cx="6144827" cy="238912"/>
+          </a:xfrm>
+          <a:prstGeom prst="rect">
+            <a:avLst/>
+          </a:prstGeom>
+          <a:noFill/>
+        </p:spPr>
+        <p:txBody>
+          <a:bodyPr wrap="square" lIns="0" tIns="0" rIns="0" bIns="0" anchor="t">
+            <a:spAutoFit/>
+          </a:bodyPr>
+          <a:lstStyle/>
+          <a:p>
+            <a:pPr algn="l">
+              <a:lnSpc>
+                <a:spcPct val="118000"/>
+              </a:lnSpc>
+            </a:pPr>
+            <a:r>
+              <a:rPr sz="1412" b="1" i="0">
+                <a:solidFill>
+                  <a:srgbClr val="141E41"/>
+                </a:solidFill>
+                <a:latin typeface="Consolas"/>
+              </a:rPr>
+              <a:t>WATCH THE LAPTOP BESIDE THIS POSTER</a:t>
+            </a:r>
+            <a:endParaRPr sz="1412" b="1" spc="180" dirty="0">
+              <a:solidFill>
+                <a:srgbClr val="141E41"/>
+              </a:solidFill>
+              <a:latin typeface="Consolas"/>
+            </a:endParaRPr>
+          </a:p>
+        </p:txBody>
+      </p:sp>
+      <p:sp>
+        <p:nvSpPr>
+          <p:cNvPr id="16" name="Rectangle 15"/>
+          <p:cNvSpPr/>
+          <p:nvPr/>
+        </p:nvSpPr>
+        <p:spPr>
+          <a:xfrm>
+            <a:off x="7534800" y="19096082"/>
+            <a:ext cx="1169636" cy="35597"/>
+          </a:xfrm>
+          <a:prstGeom prst="rect">
+            <a:avLst/>
+          </a:prstGeom>
+          <a:solidFill>
+            <a:srgbClr val="141E41"/>
+          </a:solidFill>
+          <a:ln>
+            <a:noFill/>
+          </a:ln>
+          <a:effectLst/>
+        </p:spPr>
+        <p:style>
+          <a:lnRef idx="1">
+            <a:schemeClr val="accent1"/>
+          </a:lnRef>
+          <a:fillRef idx="3">
+            <a:schemeClr val="accent1"/>
+          </a:fillRef>
+          <a:effectRef idx="2">
+            <a:schemeClr val="accent1"/>
+          </a:effectRef>
+          <a:fontRef idx="minor">
+            <a:schemeClr val="lt1"/>
+          </a:fontRef>
+        </p:style>
+        <p:txBody>
+          <a:bodyPr rtlCol="0" anchor="ctr"/>
+          <a:lstStyle/>
+          <a:p>
+            <a:pPr algn="ctr"/>
+            <a:endParaRPr/>
+          </a:p>
+        </p:txBody>
+      </p:sp>
+      <p:sp>
+        <p:nvSpPr>
+          <p:cNvPr id="17" name="Rectangle 16"/>
+          <p:cNvSpPr/>
+          <p:nvPr/>
+        </p:nvSpPr>
+        <p:spPr>
+          <a:xfrm>
+            <a:off x="8704436" y="19106253"/>
+            <a:ext cx="12085564" cy="15256"/>
+          </a:xfrm>
+          <a:prstGeom prst="rect">
+            <a:avLst/>
+          </a:prstGeom>
+          <a:solidFill>
+            <a:srgbClr val="DDE3F2"/>
+          </a:solidFill>
+          <a:ln>
+            <a:noFill/>
+          </a:ln>
+          <a:effectLst/>
+        </p:spPr>
+        <p:style>
+          <a:lnRef idx="1">
+            <a:schemeClr val="accent1"/>
+          </a:lnRef>
+          <a:fillRef idx="3">
+            <a:schemeClr val="accent1"/>
+          </a:fillRef>
+          <a:effectRef idx="2">
+            <a:schemeClr val="accent1"/>
+          </a:effectRef>
+          <a:fontRef idx="minor">
+            <a:schemeClr val="lt1"/>
+          </a:fontRef>
+        </p:style>
+        <p:txBody>
+          <a:bodyPr rtlCol="0" anchor="ctr"/>
+          <a:lstStyle/>
+          <a:p>
+            <a:pPr algn="ctr"/>
+            <a:endParaRPr/>
+          </a:p>
+        </p:txBody>
+      </p:sp>
+      <p:sp>
+        <p:nvSpPr>
+          <p:cNvPr id="104" name="TextBox 103"/>
+          <p:cNvSpPr txBox="1"/>
+          <p:nvPr/>
+        </p:nvSpPr>
+        <p:spPr>
+          <a:xfrm>
+            <a:off x="7534800" y="19318246"/>
+            <a:ext cx="13255200" cy="645563"/>
+          </a:xfrm>
+          <a:prstGeom prst="rect">
+            <a:avLst/>
+          </a:prstGeom>
+          <a:noFill/>
+        </p:spPr>
+        <p:txBody>
+          <a:bodyPr wrap="square" lIns="0" rIns="0" tIns="0" bIns="0">
+            <a:spAutoFit/>
+          </a:bodyPr>
+          <a:lstStyle/>
+          <a:p>
+            <a:pPr algn="l">
+              <a:lnSpc>
+                <a:spcPct val="120000"/>
+              </a:lnSpc>
+              <a:spcAft>
+                <a:spcPts val="992"/>
+              </a:spcAft>
+            </a:pPr>
+            <a:r>
+              <a:rPr sz="1764" b="0" i="0">
+                <a:solidFill>
+                  <a:srgbClr val="12162E"/>
+                </a:solidFill>
+                <a:latin typeface="Arial"/>
+              </a:rPr>
+              <a:t>Same task, three views, different behaviour and different bills — step by step. Three illustrative tasks, chosen so each view wins once; </a:t>
+            </a:r>
+            <a:r>
+              <a:rPr sz="1764" b="1" i="0">
+                <a:solidFill>
+                  <a:srgbClr val="12162E"/>
+                </a:solidFill>
+                <a:latin typeface="Arial"/>
+              </a:rPr>
+              <a:t>not</a:t>
+            </a:r>
+            <a:r>
+              <a:rPr sz="1764" b="0" i="0">
+                <a:solidFill>
+                  <a:srgbClr val="12162E"/>
+                </a:solidFill>
+                <a:latin typeface="Arial"/>
+              </a:rPr>
+              <a:t> how often each wins.</a:t>
+            </a:r>
+          </a:p>
+        </p:txBody>
+      </p:sp>
+      <p:sp>
+        <p:nvSpPr>
+          <p:cNvPr id="105" name="TextBox 104"/>
+          <p:cNvSpPr txBox="1"/>
+          <p:nvPr/>
+        </p:nvSpPr>
+        <p:spPr>
+          <a:xfrm>
+            <a:off x="14734800" y="20071809"/>
+            <a:ext cx="2018400" cy="216000"/>
           </a:xfrm>
           <a:prstGeom prst="rect">
             <a:avLst/>
@@ -4255,6 +5968,1390 @@
               </a:spcAft>
             </a:pPr>
             <a:r>
+              <a:rPr sz="1059" b="1" i="0">
+                <a:solidFill>
+                  <a:srgbClr val="1F5FD6"/>
+                </a:solidFill>
+                <a:latin typeface="Consolas"/>
+              </a:rPr>
+              <a:t>LOOK</a:t>
+            </a:r>
+          </a:p>
+        </p:txBody>
+      </p:sp>
+      <p:sp>
+        <p:nvSpPr>
+          <p:cNvPr id="106" name="TextBox 105"/>
+          <p:cNvSpPr txBox="1"/>
+          <p:nvPr/>
+        </p:nvSpPr>
+        <p:spPr>
+          <a:xfrm>
+            <a:off x="16753200" y="20071809"/>
+            <a:ext cx="2018400" cy="216000"/>
+          </a:xfrm>
+          <a:prstGeom prst="rect">
+            <a:avLst/>
+          </a:prstGeom>
+          <a:noFill/>
+        </p:spPr>
+        <p:txBody>
+          <a:bodyPr wrap="square" lIns="0" rIns="0" tIns="0" bIns="0">
+            <a:spAutoFit/>
+          </a:bodyPr>
+          <a:lstStyle/>
+          <a:p>
+            <a:pPr algn="l">
+              <a:lnSpc>
+                <a:spcPct val="120000"/>
+              </a:lnSpc>
+              <a:spcAft>
+                <a:spcPts val="0"/>
+              </a:spcAft>
+            </a:pPr>
+            <a:r>
+              <a:rPr sz="1059" b="1" i="0">
+                <a:solidFill>
+                  <a:srgbClr val="E8720C"/>
+                </a:solidFill>
+                <a:latin typeface="Consolas"/>
+              </a:rPr>
+              <a:t>READ</a:t>
+            </a:r>
+          </a:p>
+        </p:txBody>
+      </p:sp>
+      <p:sp>
+        <p:nvSpPr>
+          <p:cNvPr id="107" name="TextBox 106"/>
+          <p:cNvSpPr txBox="1"/>
+          <p:nvPr/>
+        </p:nvSpPr>
+        <p:spPr>
+          <a:xfrm>
+            <a:off x="18771600" y="20071809"/>
+            <a:ext cx="2018400" cy="216000"/>
+          </a:xfrm>
+          <a:prstGeom prst="rect">
+            <a:avLst/>
+          </a:prstGeom>
+          <a:noFill/>
+        </p:spPr>
+        <p:txBody>
+          <a:bodyPr wrap="square" lIns="0" rIns="0" tIns="0" bIns="0">
+            <a:spAutoFit/>
+          </a:bodyPr>
+          <a:lstStyle/>
+          <a:p>
+            <a:pPr algn="l">
+              <a:lnSpc>
+                <a:spcPct val="120000"/>
+              </a:lnSpc>
+              <a:spcAft>
+                <a:spcPts val="0"/>
+              </a:spcAft>
+            </a:pPr>
+            <a:r>
+              <a:rPr sz="1059" b="1" i="0">
+                <a:solidFill>
+                  <a:srgbClr val="14855F"/>
+                </a:solidFill>
+                <a:latin typeface="Consolas"/>
+              </a:rPr>
+              <a:t>BOTH</a:t>
+            </a:r>
+          </a:p>
+        </p:txBody>
+      </p:sp>
+      <p:sp>
+        <p:nvSpPr>
+          <p:cNvPr id="108" name="Rectangle 107"/>
+          <p:cNvSpPr/>
+          <p:nvPr/>
+        </p:nvSpPr>
+        <p:spPr>
+          <a:xfrm>
+            <a:off x="7534800" y="20323809"/>
+            <a:ext cx="13255200" cy="10800"/>
+          </a:xfrm>
+          <a:prstGeom prst="rect">
+            <a:avLst/>
+          </a:prstGeom>
+          <a:solidFill>
+            <a:srgbClr val="DDE3F2"/>
+          </a:solidFill>
+          <a:ln>
+            <a:noFill/>
+          </a:ln>
+          <a:effectLst/>
+        </p:spPr>
+        <p:style>
+          <a:lnRef idx="1">
+            <a:schemeClr val="accent1"/>
+          </a:lnRef>
+          <a:fillRef idx="3">
+            <a:schemeClr val="accent1"/>
+          </a:fillRef>
+          <a:effectRef idx="2">
+            <a:schemeClr val="accent1"/>
+          </a:effectRef>
+          <a:fontRef idx="minor">
+            <a:schemeClr val="lt1"/>
+          </a:fontRef>
+        </p:style>
+        <p:txBody>
+          <a:bodyPr rtlCol="0" anchor="ctr" wrap="square"/>
+          <a:lstStyle/>
+          <a:p>
+            <a:pPr algn="ctr"/>
+          </a:p>
+        </p:txBody>
+      </p:sp>
+      <p:sp>
+        <p:nvSpPr>
+          <p:cNvPr id="109" name="TextBox 108"/>
+          <p:cNvSpPr txBox="1"/>
+          <p:nvPr/>
+        </p:nvSpPr>
+        <p:spPr>
+          <a:xfrm>
+            <a:off x="7534800" y="20413809"/>
+            <a:ext cx="6984000" cy="255684"/>
+          </a:xfrm>
+          <a:prstGeom prst="rect">
+            <a:avLst/>
+          </a:prstGeom>
+          <a:noFill/>
+        </p:spPr>
+        <p:txBody>
+          <a:bodyPr wrap="square" lIns="0" rIns="0" tIns="0" bIns="0">
+            <a:spAutoFit/>
+          </a:bodyPr>
+          <a:lstStyle/>
+          <a:p>
+            <a:pPr algn="l">
+              <a:lnSpc>
+                <a:spcPct val="132000"/>
+              </a:lnSpc>
+              <a:spcAft>
+                <a:spcPts val="0"/>
+              </a:spcAft>
+            </a:pPr>
+            <a:r>
+              <a:rPr sz="1271" b="0" i="0">
+                <a:solidFill>
+                  <a:srgbClr val="12162E"/>
+                </a:solidFill>
+                <a:latin typeface="Arial"/>
+              </a:rPr>
+              <a:t>“Navigate to the item on this page whose image is taken during a sunset.”</a:t>
+            </a:r>
+          </a:p>
+        </p:txBody>
+      </p:sp>
+      <p:sp>
+        <p:nvSpPr>
+          <p:cNvPr id="110" name="TextBox 109"/>
+          <p:cNvSpPr txBox="1"/>
+          <p:nvPr/>
+        </p:nvSpPr>
+        <p:spPr>
+          <a:xfrm>
+            <a:off x="14734800" y="20413809"/>
+            <a:ext cx="2018400" cy="288000"/>
+          </a:xfrm>
+          <a:prstGeom prst="rect">
+            <a:avLst/>
+          </a:prstGeom>
+          <a:noFill/>
+        </p:spPr>
+        <p:txBody>
+          <a:bodyPr wrap="square" lIns="0" rIns="0" tIns="0" bIns="0">
+            <a:spAutoFit/>
+          </a:bodyPr>
+          <a:lstStyle/>
+          <a:p>
+            <a:r>
+              <a:rPr sz="1500" b="1" i="0">
+                <a:solidFill>
+                  <a:srgbClr val="14855F"/>
+                </a:solidFill>
+                <a:latin typeface="Consolas"/>
+              </a:rPr>
+              <a:t>✓ </a:t>
+            </a:r>
+            <a:r>
+              <a:rPr sz="1271" b="0" i="0">
+                <a:solidFill>
+                  <a:srgbClr val="12162E"/>
+                </a:solidFill>
+                <a:latin typeface="Arial"/>
+              </a:rPr>
+              <a:t>2 steps · </a:t>
+            </a:r>
+            <a:r>
+              <a:rPr sz="1271" b="1" i="0">
+                <a:solidFill>
+                  <a:srgbClr val="12162E"/>
+                </a:solidFill>
+                <a:latin typeface="Arial"/>
+              </a:rPr>
+              <a:t>$0.007</a:t>
+            </a:r>
+          </a:p>
+        </p:txBody>
+      </p:sp>
+      <p:sp>
+        <p:nvSpPr>
+          <p:cNvPr id="111" name="TextBox 110"/>
+          <p:cNvSpPr txBox="1"/>
+          <p:nvPr/>
+        </p:nvSpPr>
+        <p:spPr>
+          <a:xfrm>
+            <a:off x="16753200" y="20413809"/>
+            <a:ext cx="2018400" cy="288000"/>
+          </a:xfrm>
+          <a:prstGeom prst="rect">
+            <a:avLst/>
+          </a:prstGeom>
+          <a:noFill/>
+        </p:spPr>
+        <p:txBody>
+          <a:bodyPr wrap="square" lIns="0" rIns="0" tIns="0" bIns="0">
+            <a:spAutoFit/>
+          </a:bodyPr>
+          <a:lstStyle/>
+          <a:p>
+            <a:r>
+              <a:rPr sz="1500" b="1" i="0">
+                <a:solidFill>
+                  <a:srgbClr val="C2352B"/>
+                </a:solidFill>
+                <a:latin typeface="Consolas"/>
+              </a:rPr>
+              <a:t>✗ </a:t>
+            </a:r>
+            <a:r>
+              <a:rPr sz="1271" b="0" i="0">
+                <a:solidFill>
+                  <a:srgbClr val="12162E"/>
+                </a:solidFill>
+                <a:latin typeface="Arial"/>
+              </a:rPr>
+              <a:t>21 steps · </a:t>
+            </a:r>
+            <a:r>
+              <a:rPr sz="1271" b="1" i="0">
+                <a:solidFill>
+                  <a:srgbClr val="12162E"/>
+                </a:solidFill>
+                <a:latin typeface="Arial"/>
+              </a:rPr>
+              <a:t>$0.096</a:t>
+            </a:r>
+          </a:p>
+        </p:txBody>
+      </p:sp>
+      <p:sp>
+        <p:nvSpPr>
+          <p:cNvPr id="112" name="TextBox 111"/>
+          <p:cNvSpPr txBox="1"/>
+          <p:nvPr/>
+        </p:nvSpPr>
+        <p:spPr>
+          <a:xfrm>
+            <a:off x="18771600" y="20413809"/>
+            <a:ext cx="2018400" cy="288000"/>
+          </a:xfrm>
+          <a:prstGeom prst="rect">
+            <a:avLst/>
+          </a:prstGeom>
+          <a:noFill/>
+        </p:spPr>
+        <p:txBody>
+          <a:bodyPr wrap="square" lIns="0" rIns="0" tIns="0" bIns="0">
+            <a:spAutoFit/>
+          </a:bodyPr>
+          <a:lstStyle/>
+          <a:p>
+            <a:r>
+              <a:rPr sz="1500" b="1" i="0">
+                <a:solidFill>
+                  <a:srgbClr val="14855F"/>
+                </a:solidFill>
+                <a:latin typeface="Consolas"/>
+              </a:rPr>
+              <a:t>✓ </a:t>
+            </a:r>
+            <a:r>
+              <a:rPr sz="1271" b="0" i="0">
+                <a:solidFill>
+                  <a:srgbClr val="12162E"/>
+                </a:solidFill>
+                <a:latin typeface="Arial"/>
+              </a:rPr>
+              <a:t>3 steps · </a:t>
+            </a:r>
+            <a:r>
+              <a:rPr sz="1271" b="1" i="0">
+                <a:solidFill>
+                  <a:srgbClr val="12162E"/>
+                </a:solidFill>
+                <a:latin typeface="Arial"/>
+              </a:rPr>
+              <a:t>$0.014</a:t>
+            </a:r>
+          </a:p>
+        </p:txBody>
+      </p:sp>
+      <p:sp>
+        <p:nvSpPr>
+          <p:cNvPr id="113" name="Rectangle 112"/>
+          <p:cNvSpPr/>
+          <p:nvPr/>
+        </p:nvSpPr>
+        <p:spPr>
+          <a:xfrm>
+            <a:off x="7534800" y="20773809"/>
+            <a:ext cx="13255200" cy="10800"/>
+          </a:xfrm>
+          <a:prstGeom prst="rect">
+            <a:avLst/>
+          </a:prstGeom>
+          <a:solidFill>
+            <a:srgbClr val="DDE3F2"/>
+          </a:solidFill>
+          <a:ln>
+            <a:noFill/>
+          </a:ln>
+          <a:effectLst/>
+        </p:spPr>
+        <p:style>
+          <a:lnRef idx="1">
+            <a:schemeClr val="accent1"/>
+          </a:lnRef>
+          <a:fillRef idx="3">
+            <a:schemeClr val="accent1"/>
+          </a:fillRef>
+          <a:effectRef idx="2">
+            <a:schemeClr val="accent1"/>
+          </a:effectRef>
+          <a:fontRef idx="minor">
+            <a:schemeClr val="lt1"/>
+          </a:fontRef>
+        </p:style>
+        <p:txBody>
+          <a:bodyPr rtlCol="0" anchor="ctr" wrap="square"/>
+          <a:lstStyle/>
+          <a:p>
+            <a:pPr algn="ctr"/>
+          </a:p>
+        </p:txBody>
+      </p:sp>
+      <p:sp>
+        <p:nvSpPr>
+          <p:cNvPr id="114" name="TextBox 113"/>
+          <p:cNvSpPr txBox="1"/>
+          <p:nvPr/>
+        </p:nvSpPr>
+        <p:spPr>
+          <a:xfrm>
+            <a:off x="7534800" y="20809809"/>
+            <a:ext cx="6984000" cy="511369"/>
+          </a:xfrm>
+          <a:prstGeom prst="rect">
+            <a:avLst/>
+          </a:prstGeom>
+          <a:noFill/>
+        </p:spPr>
+        <p:txBody>
+          <a:bodyPr wrap="square" lIns="0" rIns="0" tIns="0" bIns="0">
+            <a:spAutoFit/>
+          </a:bodyPr>
+          <a:lstStyle/>
+          <a:p>
+            <a:pPr algn="l">
+              <a:lnSpc>
+                <a:spcPct val="132000"/>
+              </a:lnSpc>
+              <a:spcAft>
+                <a:spcPts val="0"/>
+              </a:spcAft>
+            </a:pPr>
+            <a:r>
+              <a:rPr sz="1271" b="0" i="0">
+                <a:solidFill>
+                  <a:srgbClr val="12162E"/>
+                </a:solidFill>
+                <a:latin typeface="Arial"/>
+              </a:rPr>
+              <a:t>“Navigate to my listing of the blue bike and change the price to $85.50 (including in the description).”</a:t>
+            </a:r>
+          </a:p>
+        </p:txBody>
+      </p:sp>
+      <p:sp>
+        <p:nvSpPr>
+          <p:cNvPr id="115" name="TextBox 114"/>
+          <p:cNvSpPr txBox="1"/>
+          <p:nvPr/>
+        </p:nvSpPr>
+        <p:spPr>
+          <a:xfrm>
+            <a:off x="14734800" y="20809809"/>
+            <a:ext cx="2018400" cy="288000"/>
+          </a:xfrm>
+          <a:prstGeom prst="rect">
+            <a:avLst/>
+          </a:prstGeom>
+          <a:noFill/>
+        </p:spPr>
+        <p:txBody>
+          <a:bodyPr wrap="square" lIns="0" rIns="0" tIns="0" bIns="0">
+            <a:spAutoFit/>
+          </a:bodyPr>
+          <a:lstStyle/>
+          <a:p>
+            <a:r>
+              <a:rPr sz="1500" b="1" i="0">
+                <a:solidFill>
+                  <a:srgbClr val="C2352B"/>
+                </a:solidFill>
+                <a:latin typeface="Consolas"/>
+              </a:rPr>
+              <a:t>✗ </a:t>
+            </a:r>
+            <a:r>
+              <a:rPr sz="1271" b="0" i="0">
+                <a:solidFill>
+                  <a:srgbClr val="12162E"/>
+                </a:solidFill>
+                <a:latin typeface="Arial"/>
+              </a:rPr>
+              <a:t>30 steps · </a:t>
+            </a:r>
+            <a:r>
+              <a:rPr sz="1271" b="1" i="0">
+                <a:solidFill>
+                  <a:srgbClr val="12162E"/>
+                </a:solidFill>
+                <a:latin typeface="Arial"/>
+              </a:rPr>
+              <a:t>$0.116</a:t>
+            </a:r>
+          </a:p>
+        </p:txBody>
+      </p:sp>
+      <p:sp>
+        <p:nvSpPr>
+          <p:cNvPr id="116" name="TextBox 115"/>
+          <p:cNvSpPr txBox="1"/>
+          <p:nvPr/>
+        </p:nvSpPr>
+        <p:spPr>
+          <a:xfrm>
+            <a:off x="16753200" y="20809809"/>
+            <a:ext cx="2018400" cy="288000"/>
+          </a:xfrm>
+          <a:prstGeom prst="rect">
+            <a:avLst/>
+          </a:prstGeom>
+          <a:noFill/>
+        </p:spPr>
+        <p:txBody>
+          <a:bodyPr wrap="square" lIns="0" rIns="0" tIns="0" bIns="0">
+            <a:spAutoFit/>
+          </a:bodyPr>
+          <a:lstStyle/>
+          <a:p>
+            <a:r>
+              <a:rPr sz="1500" b="1" i="0">
+                <a:solidFill>
+                  <a:srgbClr val="14855F"/>
+                </a:solidFill>
+                <a:latin typeface="Consolas"/>
+              </a:rPr>
+              <a:t>✓ </a:t>
+            </a:r>
+            <a:r>
+              <a:rPr sz="1271" b="0" i="0">
+                <a:solidFill>
+                  <a:srgbClr val="12162E"/>
+                </a:solidFill>
+                <a:latin typeface="Arial"/>
+              </a:rPr>
+              <a:t>9 steps · </a:t>
+            </a:r>
+            <a:r>
+              <a:rPr sz="1271" b="1" i="0">
+                <a:solidFill>
+                  <a:srgbClr val="12162E"/>
+                </a:solidFill>
+                <a:latin typeface="Arial"/>
+              </a:rPr>
+              <a:t>$0.079</a:t>
+            </a:r>
+          </a:p>
+        </p:txBody>
+      </p:sp>
+      <p:sp>
+        <p:nvSpPr>
+          <p:cNvPr id="117" name="TextBox 116"/>
+          <p:cNvSpPr txBox="1"/>
+          <p:nvPr/>
+        </p:nvSpPr>
+        <p:spPr>
+          <a:xfrm>
+            <a:off x="18771600" y="20809809"/>
+            <a:ext cx="2018400" cy="288000"/>
+          </a:xfrm>
+          <a:prstGeom prst="rect">
+            <a:avLst/>
+          </a:prstGeom>
+          <a:noFill/>
+        </p:spPr>
+        <p:txBody>
+          <a:bodyPr wrap="square" lIns="0" rIns="0" tIns="0" bIns="0">
+            <a:spAutoFit/>
+          </a:bodyPr>
+          <a:lstStyle/>
+          <a:p>
+            <a:r>
+              <a:rPr sz="1500" b="1" i="0">
+                <a:solidFill>
+                  <a:srgbClr val="C2352B"/>
+                </a:solidFill>
+                <a:latin typeface="Consolas"/>
+              </a:rPr>
+              <a:t>✗ </a:t>
+            </a:r>
+            <a:r>
+              <a:rPr sz="1271" b="0" i="0">
+                <a:solidFill>
+                  <a:srgbClr val="12162E"/>
+                </a:solidFill>
+                <a:latin typeface="Arial"/>
+              </a:rPr>
+              <a:t>6 steps · </a:t>
+            </a:r>
+            <a:r>
+              <a:rPr sz="1271" b="1" i="0">
+                <a:solidFill>
+                  <a:srgbClr val="12162E"/>
+                </a:solidFill>
+                <a:latin typeface="Arial"/>
+              </a:rPr>
+              <a:t>$0.029</a:t>
+            </a:r>
+          </a:p>
+        </p:txBody>
+      </p:sp>
+      <p:sp>
+        <p:nvSpPr>
+          <p:cNvPr id="118" name="Rectangle 117"/>
+          <p:cNvSpPr/>
+          <p:nvPr/>
+        </p:nvSpPr>
+        <p:spPr>
+          <a:xfrm>
+            <a:off x="7534800" y="21393178"/>
+            <a:ext cx="13255200" cy="10800"/>
+          </a:xfrm>
+          <a:prstGeom prst="rect">
+            <a:avLst/>
+          </a:prstGeom>
+          <a:solidFill>
+            <a:srgbClr val="DDE3F2"/>
+          </a:solidFill>
+          <a:ln>
+            <a:noFill/>
+          </a:ln>
+          <a:effectLst/>
+        </p:spPr>
+        <p:style>
+          <a:lnRef idx="1">
+            <a:schemeClr val="accent1"/>
+          </a:lnRef>
+          <a:fillRef idx="3">
+            <a:schemeClr val="accent1"/>
+          </a:fillRef>
+          <a:effectRef idx="2">
+            <a:schemeClr val="accent1"/>
+          </a:effectRef>
+          <a:fontRef idx="minor">
+            <a:schemeClr val="lt1"/>
+          </a:fontRef>
+        </p:style>
+        <p:txBody>
+          <a:bodyPr rtlCol="0" anchor="ctr" wrap="square"/>
+          <a:lstStyle/>
+          <a:p>
+            <a:pPr algn="ctr"/>
+          </a:p>
+        </p:txBody>
+      </p:sp>
+      <p:sp>
+        <p:nvSpPr>
+          <p:cNvPr id="119" name="TextBox 118"/>
+          <p:cNvSpPr txBox="1"/>
+          <p:nvPr/>
+        </p:nvSpPr>
+        <p:spPr>
+          <a:xfrm>
+            <a:off x="7534800" y="21429178"/>
+            <a:ext cx="6984000" cy="255684"/>
+          </a:xfrm>
+          <a:prstGeom prst="rect">
+            <a:avLst/>
+          </a:prstGeom>
+          <a:noFill/>
+        </p:spPr>
+        <p:txBody>
+          <a:bodyPr wrap="square" lIns="0" rIns="0" tIns="0" bIns="0">
+            <a:spAutoFit/>
+          </a:bodyPr>
+          <a:lstStyle/>
+          <a:p>
+            <a:pPr algn="l">
+              <a:lnSpc>
+                <a:spcPct val="132000"/>
+              </a:lnSpc>
+              <a:spcAft>
+                <a:spcPts val="0"/>
+              </a:spcAft>
+            </a:pPr>
+            <a:r>
+              <a:rPr sz="1271" b="0" i="0">
+                <a:solidFill>
+                  <a:srgbClr val="12162E"/>
+                </a:solidFill>
+                <a:latin typeface="Arial"/>
+              </a:rPr>
+              <a:t>“Show me the cheapest bike with red handlebars between $900-950.”</a:t>
+            </a:r>
+          </a:p>
+        </p:txBody>
+      </p:sp>
+      <p:sp>
+        <p:nvSpPr>
+          <p:cNvPr id="120" name="TextBox 119"/>
+          <p:cNvSpPr txBox="1"/>
+          <p:nvPr/>
+        </p:nvSpPr>
+        <p:spPr>
+          <a:xfrm>
+            <a:off x="14734800" y="21429178"/>
+            <a:ext cx="2018400" cy="288000"/>
+          </a:xfrm>
+          <a:prstGeom prst="rect">
+            <a:avLst/>
+          </a:prstGeom>
+          <a:noFill/>
+        </p:spPr>
+        <p:txBody>
+          <a:bodyPr wrap="square" lIns="0" rIns="0" tIns="0" bIns="0">
+            <a:spAutoFit/>
+          </a:bodyPr>
+          <a:lstStyle/>
+          <a:p>
+            <a:r>
+              <a:rPr sz="1500" b="1" i="0">
+                <a:solidFill>
+                  <a:srgbClr val="C2352B"/>
+                </a:solidFill>
+                <a:latin typeface="Consolas"/>
+              </a:rPr>
+              <a:t>✗ </a:t>
+            </a:r>
+            <a:r>
+              <a:rPr sz="1271" b="0" i="0">
+                <a:solidFill>
+                  <a:srgbClr val="12162E"/>
+                </a:solidFill>
+                <a:latin typeface="Arial"/>
+              </a:rPr>
+              <a:t>19 steps · </a:t>
+            </a:r>
+            <a:r>
+              <a:rPr sz="1271" b="1" i="0">
+                <a:solidFill>
+                  <a:srgbClr val="12162E"/>
+                </a:solidFill>
+                <a:latin typeface="Arial"/>
+              </a:rPr>
+              <a:t>$0.075</a:t>
+            </a:r>
+          </a:p>
+        </p:txBody>
+      </p:sp>
+      <p:sp>
+        <p:nvSpPr>
+          <p:cNvPr id="121" name="TextBox 120"/>
+          <p:cNvSpPr txBox="1"/>
+          <p:nvPr/>
+        </p:nvSpPr>
+        <p:spPr>
+          <a:xfrm>
+            <a:off x="16753200" y="21429178"/>
+            <a:ext cx="2018400" cy="288000"/>
+          </a:xfrm>
+          <a:prstGeom prst="rect">
+            <a:avLst/>
+          </a:prstGeom>
+          <a:noFill/>
+        </p:spPr>
+        <p:txBody>
+          <a:bodyPr wrap="square" lIns="0" rIns="0" tIns="0" bIns="0">
+            <a:spAutoFit/>
+          </a:bodyPr>
+          <a:lstStyle/>
+          <a:p>
+            <a:r>
+              <a:rPr sz="1500" b="1" i="0">
+                <a:solidFill>
+                  <a:srgbClr val="C2352B"/>
+                </a:solidFill>
+                <a:latin typeface="Consolas"/>
+              </a:rPr>
+              <a:t>✗ </a:t>
+            </a:r>
+            <a:r>
+              <a:rPr sz="1271" b="0" i="0">
+                <a:solidFill>
+                  <a:srgbClr val="12162E"/>
+                </a:solidFill>
+                <a:latin typeface="Arial"/>
+              </a:rPr>
+              <a:t>6 steps · </a:t>
+            </a:r>
+            <a:r>
+              <a:rPr sz="1271" b="1" i="0">
+                <a:solidFill>
+                  <a:srgbClr val="12162E"/>
+                </a:solidFill>
+                <a:latin typeface="Arial"/>
+              </a:rPr>
+              <a:t>$0.025</a:t>
+            </a:r>
+          </a:p>
+        </p:txBody>
+      </p:sp>
+      <p:sp>
+        <p:nvSpPr>
+          <p:cNvPr id="122" name="TextBox 121"/>
+          <p:cNvSpPr txBox="1"/>
+          <p:nvPr/>
+        </p:nvSpPr>
+        <p:spPr>
+          <a:xfrm>
+            <a:off x="18771600" y="21429178"/>
+            <a:ext cx="2018400" cy="288000"/>
+          </a:xfrm>
+          <a:prstGeom prst="rect">
+            <a:avLst/>
+          </a:prstGeom>
+          <a:noFill/>
+        </p:spPr>
+        <p:txBody>
+          <a:bodyPr wrap="square" lIns="0" rIns="0" tIns="0" bIns="0">
+            <a:spAutoFit/>
+          </a:bodyPr>
+          <a:lstStyle/>
+          <a:p>
+            <a:r>
+              <a:rPr sz="1500" b="1" i="0">
+                <a:solidFill>
+                  <a:srgbClr val="14855F"/>
+                </a:solidFill>
+                <a:latin typeface="Consolas"/>
+              </a:rPr>
+              <a:t>✓ </a:t>
+            </a:r>
+            <a:r>
+              <a:rPr sz="1271" b="0" i="0">
+                <a:solidFill>
+                  <a:srgbClr val="12162E"/>
+                </a:solidFill>
+                <a:latin typeface="Arial"/>
+              </a:rPr>
+              <a:t>7 steps · </a:t>
+            </a:r>
+            <a:r>
+              <a:rPr sz="1271" b="1" i="0">
+                <a:solidFill>
+                  <a:srgbClr val="12162E"/>
+                </a:solidFill>
+                <a:latin typeface="Arial"/>
+              </a:rPr>
+              <a:t>$0.037</a:t>
+            </a:r>
+          </a:p>
+        </p:txBody>
+      </p:sp>
+      <p:sp>
+        <p:nvSpPr>
+          <p:cNvPr id="123" name="Rectangle 122"/>
+          <p:cNvSpPr/>
+          <p:nvPr/>
+        </p:nvSpPr>
+        <p:spPr>
+          <a:xfrm>
+            <a:off x="7534800" y="21789178"/>
+            <a:ext cx="13255200" cy="10800"/>
+          </a:xfrm>
+          <a:prstGeom prst="rect">
+            <a:avLst/>
+          </a:prstGeom>
+          <a:solidFill>
+            <a:srgbClr val="DDE3F2"/>
+          </a:solidFill>
+          <a:ln>
+            <a:noFill/>
+          </a:ln>
+          <a:effectLst/>
+        </p:spPr>
+        <p:style>
+          <a:lnRef idx="1">
+            <a:schemeClr val="accent1"/>
+          </a:lnRef>
+          <a:fillRef idx="3">
+            <a:schemeClr val="accent1"/>
+          </a:fillRef>
+          <a:effectRef idx="2">
+            <a:schemeClr val="accent1"/>
+          </a:effectRef>
+          <a:fontRef idx="minor">
+            <a:schemeClr val="lt1"/>
+          </a:fontRef>
+        </p:style>
+        <p:txBody>
+          <a:bodyPr rtlCol="0" anchor="ctr" wrap="square"/>
+          <a:lstStyle/>
+          <a:p>
+            <a:pPr algn="ctr"/>
+          </a:p>
+        </p:txBody>
+      </p:sp>
+      <p:sp>
+        <p:nvSpPr>
+          <p:cNvPr id="124" name="TextBox 123"/>
+          <p:cNvSpPr txBox="1"/>
+          <p:nvPr/>
+        </p:nvSpPr>
+        <p:spPr>
+          <a:xfrm>
+            <a:off x="7534800" y="21861178"/>
+            <a:ext cx="13255200" cy="255684"/>
+          </a:xfrm>
+          <a:prstGeom prst="rect">
+            <a:avLst/>
+          </a:prstGeom>
+          <a:noFill/>
+        </p:spPr>
+        <p:txBody>
+          <a:bodyPr wrap="square" lIns="0" rIns="0" tIns="0" bIns="0">
+            <a:spAutoFit/>
+          </a:bodyPr>
+          <a:lstStyle/>
+          <a:p>
+            <a:pPr algn="l">
+              <a:lnSpc>
+                <a:spcPct val="132000"/>
+              </a:lnSpc>
+              <a:spcAft>
+                <a:spcPts val="425"/>
+              </a:spcAft>
+            </a:pPr>
+            <a:r>
+              <a:rPr sz="1271" b="0" i="0">
+                <a:solidFill>
+                  <a:srgbClr val="5D6787"/>
+                </a:solidFill>
+                <a:latin typeface="Arial"/>
+              </a:rPr>
+              <a:t>One recorded attempt per view, B0 · classifieds. Every ✓ / ✗ came out the same on an independent rerun; steps and bill differ run to run.</a:t>
+            </a:r>
+          </a:p>
+        </p:txBody>
+      </p:sp>
+      <p:sp>
+        <p:nvSpPr>
+          <p:cNvPr id="14" name="Rectangle 13"/>
+          <p:cNvSpPr/>
+          <p:nvPr/>
+        </p:nvSpPr>
+        <p:spPr>
+          <a:xfrm>
+            <a:off x="727200" y="23040000"/>
+            <a:ext cx="177988" cy="177988"/>
+          </a:xfrm>
+          <a:prstGeom prst="rect">
+            <a:avLst/>
+          </a:prstGeom>
+          <a:solidFill>
+            <a:srgbClr val="AB5FCE"/>
+          </a:solidFill>
+          <a:ln>
+            <a:noFill/>
+          </a:ln>
+          <a:effectLst/>
+        </p:spPr>
+        <p:style>
+          <a:lnRef idx="1">
+            <a:schemeClr val="accent1"/>
+          </a:lnRef>
+          <a:fillRef idx="3">
+            <a:schemeClr val="accent1"/>
+          </a:fillRef>
+          <a:effectRef idx="2">
+            <a:schemeClr val="accent1"/>
+          </a:effectRef>
+          <a:fontRef idx="minor">
+            <a:schemeClr val="lt1"/>
+          </a:fontRef>
+        </p:style>
+        <p:txBody>
+          <a:bodyPr rtlCol="0" anchor="ctr"/>
+          <a:lstStyle/>
+          <a:p>
+            <a:pPr algn="ctr"/>
+            <a:endParaRPr/>
+          </a:p>
+        </p:txBody>
+      </p:sp>
+      <p:sp>
+        <p:nvSpPr>
+          <p:cNvPr id="15" name="TextBox 14"/>
+          <p:cNvSpPr txBox="1"/>
+          <p:nvPr/>
+        </p:nvSpPr>
+        <p:spPr>
+          <a:xfrm>
+            <a:off x="1032323" y="22996800"/>
+            <a:ext cx="6144827" cy="238912"/>
+          </a:xfrm>
+          <a:prstGeom prst="rect">
+            <a:avLst/>
+          </a:prstGeom>
+          <a:noFill/>
+        </p:spPr>
+        <p:txBody>
+          <a:bodyPr wrap="square" lIns="0" tIns="0" rIns="0" bIns="0" anchor="t">
+            <a:spAutoFit/>
+          </a:bodyPr>
+          <a:lstStyle/>
+          <a:p>
+            <a:pPr algn="l">
+              <a:lnSpc>
+                <a:spcPct val="118000"/>
+              </a:lnSpc>
+            </a:pPr>
+            <a:r>
+              <a:rPr sz="1412" b="1" i="0">
+                <a:solidFill>
+                  <a:srgbClr val="141E41"/>
+                </a:solidFill>
+                <a:latin typeface="Consolas"/>
+              </a:rPr>
+              <a:t>HOW WE MEASURED IT — THE AGENT LOOP</a:t>
+            </a:r>
+            <a:endParaRPr sz="1412" b="1" spc="180" dirty="0">
+              <a:solidFill>
+                <a:srgbClr val="141E41"/>
+              </a:solidFill>
+              <a:latin typeface="Consolas"/>
+            </a:endParaRPr>
+          </a:p>
+        </p:txBody>
+      </p:sp>
+      <p:sp>
+        <p:nvSpPr>
+          <p:cNvPr id="16" name="Rectangle 15"/>
+          <p:cNvSpPr/>
+          <p:nvPr/>
+        </p:nvSpPr>
+        <p:spPr>
+          <a:xfrm>
+            <a:off x="727200" y="23357836"/>
+            <a:ext cx="1169636" cy="35597"/>
+          </a:xfrm>
+          <a:prstGeom prst="rect">
+            <a:avLst/>
+          </a:prstGeom>
+          <a:solidFill>
+            <a:srgbClr val="141E41"/>
+          </a:solidFill>
+          <a:ln>
+            <a:noFill/>
+          </a:ln>
+          <a:effectLst/>
+        </p:spPr>
+        <p:style>
+          <a:lnRef idx="1">
+            <a:schemeClr val="accent1"/>
+          </a:lnRef>
+          <a:fillRef idx="3">
+            <a:schemeClr val="accent1"/>
+          </a:fillRef>
+          <a:effectRef idx="2">
+            <a:schemeClr val="accent1"/>
+          </a:effectRef>
+          <a:fontRef idx="minor">
+            <a:schemeClr val="lt1"/>
+          </a:fontRef>
+        </p:style>
+        <p:txBody>
+          <a:bodyPr rtlCol="0" anchor="ctr"/>
+          <a:lstStyle/>
+          <a:p>
+            <a:pPr algn="ctr"/>
+            <a:endParaRPr/>
+          </a:p>
+        </p:txBody>
+      </p:sp>
+      <p:sp>
+        <p:nvSpPr>
+          <p:cNvPr id="17" name="Rectangle 16"/>
+          <p:cNvSpPr/>
+          <p:nvPr/>
+        </p:nvSpPr>
+        <p:spPr>
+          <a:xfrm>
+            <a:off x="1896836" y="23368007"/>
+            <a:ext cx="18893164" cy="15256"/>
+          </a:xfrm>
+          <a:prstGeom prst="rect">
+            <a:avLst/>
+          </a:prstGeom>
+          <a:solidFill>
+            <a:srgbClr val="DDE3F2"/>
+          </a:solidFill>
+          <a:ln>
+            <a:noFill/>
+          </a:ln>
+          <a:effectLst/>
+        </p:spPr>
+        <p:style>
+          <a:lnRef idx="1">
+            <a:schemeClr val="accent1"/>
+          </a:lnRef>
+          <a:fillRef idx="3">
+            <a:schemeClr val="accent1"/>
+          </a:fillRef>
+          <a:effectRef idx="2">
+            <a:schemeClr val="accent1"/>
+          </a:effectRef>
+          <a:fontRef idx="minor">
+            <a:schemeClr val="lt1"/>
+          </a:fontRef>
+        </p:style>
+        <p:txBody>
+          <a:bodyPr rtlCol="0" anchor="ctr"/>
+          <a:lstStyle/>
+          <a:p>
+            <a:pPr algn="ctr"/>
+            <a:endParaRPr/>
+          </a:p>
+        </p:txBody>
+      </p:sp>
+      <p:sp>
+        <p:nvSpPr>
+          <p:cNvPr id="125" name="Right Arrow 124"/>
+          <p:cNvSpPr/>
+          <p:nvPr/>
+        </p:nvSpPr>
+        <p:spPr>
+          <a:xfrm>
+            <a:off x="3823200" y="25056000"/>
+            <a:ext cx="360000" cy="504000"/>
+          </a:xfrm>
+          <a:prstGeom prst="rightArrow">
+            <a:avLst/>
+          </a:prstGeom>
+          <a:solidFill>
+            <a:srgbClr val="C9CFE0"/>
+          </a:solidFill>
+          <a:ln>
+            <a:noFill/>
+          </a:ln>
+          <a:effectLst/>
+        </p:spPr>
+        <p:style>
+          <a:lnRef idx="1">
+            <a:schemeClr val="accent1"/>
+          </a:lnRef>
+          <a:fillRef idx="3">
+            <a:schemeClr val="accent1"/>
+          </a:fillRef>
+          <a:effectRef idx="2">
+            <a:schemeClr val="accent1"/>
+          </a:effectRef>
+          <a:fontRef idx="minor">
+            <a:schemeClr val="lt1"/>
+          </a:fontRef>
+        </p:style>
+        <p:txBody>
+          <a:bodyPr rtlCol="0" anchor="ctr"/>
+          <a:lstStyle/>
+          <a:p>
+            <a:pPr algn="ctr"/>
+          </a:p>
+        </p:txBody>
+      </p:sp>
+      <p:sp>
+        <p:nvSpPr>
+          <p:cNvPr id="126" name="Right Arrow 125"/>
+          <p:cNvSpPr/>
+          <p:nvPr/>
+        </p:nvSpPr>
+        <p:spPr>
+          <a:xfrm>
+            <a:off x="8215200" y="25056000"/>
+            <a:ext cx="360000" cy="504000"/>
+          </a:xfrm>
+          <a:prstGeom prst="rightArrow">
+            <a:avLst/>
+          </a:prstGeom>
+          <a:solidFill>
+            <a:srgbClr val="C9CFE0"/>
+          </a:solidFill>
+          <a:ln>
+            <a:noFill/>
+          </a:ln>
+          <a:effectLst/>
+        </p:spPr>
+        <p:style>
+          <a:lnRef idx="1">
+            <a:schemeClr val="accent1"/>
+          </a:lnRef>
+          <a:fillRef idx="3">
+            <a:schemeClr val="accent1"/>
+          </a:fillRef>
+          <a:effectRef idx="2">
+            <a:schemeClr val="accent1"/>
+          </a:effectRef>
+          <a:fontRef idx="minor">
+            <a:schemeClr val="lt1"/>
+          </a:fontRef>
+        </p:style>
+        <p:txBody>
+          <a:bodyPr rtlCol="0" anchor="ctr"/>
+          <a:lstStyle/>
+          <a:p>
+            <a:pPr algn="ctr"/>
+          </a:p>
+        </p:txBody>
+      </p:sp>
+      <p:sp>
+        <p:nvSpPr>
+          <p:cNvPr id="127" name="Right Arrow 126"/>
+          <p:cNvSpPr/>
+          <p:nvPr/>
+        </p:nvSpPr>
+        <p:spPr>
+          <a:xfrm>
+            <a:off x="14119200" y="25056000"/>
+            <a:ext cx="360000" cy="504000"/>
+          </a:xfrm>
+          <a:prstGeom prst="rightArrow">
+            <a:avLst/>
+          </a:prstGeom>
+          <a:solidFill>
+            <a:srgbClr val="C9CFE0"/>
+          </a:solidFill>
+          <a:ln>
+            <a:noFill/>
+          </a:ln>
+          <a:effectLst/>
+        </p:spPr>
+        <p:style>
+          <a:lnRef idx="1">
+            <a:schemeClr val="accent1"/>
+          </a:lnRef>
+          <a:fillRef idx="3">
+            <a:schemeClr val="accent1"/>
+          </a:fillRef>
+          <a:effectRef idx="2">
+            <a:schemeClr val="accent1"/>
+          </a:effectRef>
+          <a:fontRef idx="minor">
+            <a:schemeClr val="lt1"/>
+          </a:fontRef>
+        </p:style>
+        <p:txBody>
+          <a:bodyPr rtlCol="0" anchor="ctr"/>
+          <a:lstStyle/>
+          <a:p>
+            <a:pPr algn="ctr"/>
+          </a:p>
+        </p:txBody>
+      </p:sp>
+      <p:sp>
+        <p:nvSpPr>
+          <p:cNvPr id="128" name="Right Arrow 127"/>
+          <p:cNvSpPr/>
+          <p:nvPr/>
+        </p:nvSpPr>
+        <p:spPr>
+          <a:xfrm>
+            <a:off x="17791200" y="25056000"/>
+            <a:ext cx="360000" cy="504000"/>
+          </a:xfrm>
+          <a:prstGeom prst="rightArrow">
+            <a:avLst/>
+          </a:prstGeom>
+          <a:solidFill>
+            <a:srgbClr val="C9CFE0"/>
+          </a:solidFill>
+          <a:ln>
+            <a:noFill/>
+          </a:ln>
+          <a:effectLst/>
+        </p:spPr>
+        <p:style>
+          <a:lnRef idx="1">
+            <a:schemeClr val="accent1"/>
+          </a:lnRef>
+          <a:fillRef idx="3">
+            <a:schemeClr val="accent1"/>
+          </a:fillRef>
+          <a:effectRef idx="2">
+            <a:schemeClr val="accent1"/>
+          </a:effectRef>
+          <a:fontRef idx="minor">
+            <a:schemeClr val="lt1"/>
+          </a:fontRef>
+        </p:style>
+        <p:txBody>
+          <a:bodyPr rtlCol="0" anchor="ctr"/>
+          <a:lstStyle/>
+          <a:p>
+            <a:pPr algn="ctr"/>
+          </a:p>
+        </p:txBody>
+      </p:sp>
+      <p:sp>
+        <p:nvSpPr>
+          <p:cNvPr id="129" name="Rectangle 128"/>
+          <p:cNvSpPr/>
+          <p:nvPr/>
+        </p:nvSpPr>
+        <p:spPr>
+          <a:xfrm>
+            <a:off x="727200" y="23580000"/>
+            <a:ext cx="3024000" cy="3456000"/>
+          </a:xfrm>
+          <a:prstGeom prst="rect">
+            <a:avLst/>
+          </a:prstGeom>
+          <a:solidFill>
+            <a:srgbClr val="F7F9FD"/>
+          </a:solidFill>
+          <a:ln w="8890">
+            <a:solidFill>
+              <a:srgbClr val="DDE3F2"/>
+            </a:solidFill>
+          </a:ln>
+          <a:effectLst/>
+        </p:spPr>
+        <p:style>
+          <a:lnRef idx="1">
+            <a:schemeClr val="accent1"/>
+          </a:lnRef>
+          <a:fillRef idx="3">
+            <a:schemeClr val="accent1"/>
+          </a:fillRef>
+          <a:effectRef idx="2">
+            <a:schemeClr val="accent1"/>
+          </a:effectRef>
+          <a:fontRef idx="minor">
+            <a:schemeClr val="lt1"/>
+          </a:fontRef>
+        </p:style>
+        <p:txBody>
+          <a:bodyPr rtlCol="0" anchor="ctr" wrap="square"/>
+          <a:lstStyle/>
+          <a:p>
+            <a:pPr algn="ctr"/>
+          </a:p>
+        </p:txBody>
+      </p:sp>
+      <p:sp>
+        <p:nvSpPr>
+          <p:cNvPr id="130" name="Rectangle 129"/>
+          <p:cNvSpPr/>
+          <p:nvPr/>
+        </p:nvSpPr>
+        <p:spPr>
+          <a:xfrm>
+            <a:off x="727200" y="23580000"/>
+            <a:ext cx="3024000" cy="50400"/>
+          </a:xfrm>
+          <a:prstGeom prst="rect">
+            <a:avLst/>
+          </a:prstGeom>
+          <a:solidFill>
+            <a:srgbClr val="5049F9"/>
+          </a:solidFill>
+          <a:ln>
+            <a:noFill/>
+          </a:ln>
+          <a:effectLst/>
+        </p:spPr>
+        <p:style>
+          <a:lnRef idx="1">
+            <a:schemeClr val="accent1"/>
+          </a:lnRef>
+          <a:fillRef idx="3">
+            <a:schemeClr val="accent1"/>
+          </a:fillRef>
+          <a:effectRef idx="2">
+            <a:schemeClr val="accent1"/>
+          </a:effectRef>
+          <a:fontRef idx="minor">
+            <a:schemeClr val="lt1"/>
+          </a:fontRef>
+        </p:style>
+        <p:txBody>
+          <a:bodyPr rtlCol="0" anchor="ctr" wrap="square"/>
+          <a:lstStyle/>
+          <a:p>
+            <a:pPr algn="ctr"/>
+          </a:p>
+        </p:txBody>
+      </p:sp>
+      <p:sp>
+        <p:nvSpPr>
+          <p:cNvPr id="131" name="TextBox 130"/>
+          <p:cNvSpPr txBox="1"/>
+          <p:nvPr/>
+        </p:nvSpPr>
+        <p:spPr>
+          <a:xfrm>
+            <a:off x="889200" y="23706000"/>
+            <a:ext cx="2700000" cy="216000"/>
+          </a:xfrm>
+          <a:prstGeom prst="rect">
+            <a:avLst/>
+          </a:prstGeom>
+          <a:noFill/>
+        </p:spPr>
+        <p:txBody>
+          <a:bodyPr wrap="square" lIns="0" rIns="0" tIns="0" bIns="0">
+            <a:spAutoFit/>
+          </a:bodyPr>
+          <a:lstStyle/>
+          <a:p>
+            <a:pPr algn="l">
+              <a:lnSpc>
+                <a:spcPct val="120000"/>
+              </a:lnSpc>
+              <a:spcAft>
+                <a:spcPts val="0"/>
+              </a:spcAft>
+            </a:pPr>
+            <a:r>
               <a:rPr sz="1059" b="0" i="0">
                 <a:solidFill>
                   <a:srgbClr val="5D6787"/>
@@ -4268,14 +7365,14 @@
       </p:sp>
       <p:sp>
         <p:nvSpPr>
-          <p:cNvPr id="84" name="TextBox 83"/>
+          <p:cNvPr id="132" name="TextBox 131"/>
           <p:cNvSpPr txBox="1"/>
           <p:nvPr/>
         </p:nvSpPr>
         <p:spPr>
           <a:xfrm>
-            <a:off x="907200" y="5958000"/>
-            <a:ext cx="2664000" cy="968345"/>
+            <a:off x="889200" y="23940000"/>
+            <a:ext cx="2700000" cy="968345"/>
           </a:xfrm>
           <a:prstGeom prst="rect">
             <a:avLst/>
@@ -4310,14 +7407,14 @@
       </p:sp>
       <p:sp>
         <p:nvSpPr>
-          <p:cNvPr id="85" name="TextBox 84"/>
+          <p:cNvPr id="133" name="TextBox 132"/>
           <p:cNvSpPr txBox="1"/>
           <p:nvPr/>
         </p:nvSpPr>
         <p:spPr>
           <a:xfrm>
-            <a:off x="907200" y="7016345"/>
-            <a:ext cx="2664000" cy="511369"/>
+            <a:off x="889200" y="24980345"/>
+            <a:ext cx="2700000" cy="511369"/>
           </a:xfrm>
           <a:prstGeom prst="rect">
             <a:avLst/>
@@ -4352,82 +7449,14 @@
       </p:sp>
       <p:sp>
         <p:nvSpPr>
-          <p:cNvPr id="86" name="Rectangle 85"/>
+          <p:cNvPr id="134" name="Rectangle 133"/>
           <p:cNvSpPr/>
           <p:nvPr/>
         </p:nvSpPr>
         <p:spPr>
           <a:xfrm>
-            <a:off x="892800" y="7621314"/>
-            <a:ext cx="2692800" cy="1518975"/>
-          </a:xfrm>
-          <a:prstGeom prst="rect">
-            <a:avLst/>
-          </a:prstGeom>
-          <a:noFill/>
-          <a:ln w="8890">
-            <a:solidFill>
-              <a:srgbClr val="C9CFE0"/>
-            </a:solidFill>
-          </a:ln>
-          <a:effectLst/>
-        </p:spPr>
-        <p:style>
-          <a:lnRef idx="1">
-            <a:schemeClr val="accent1"/>
-          </a:lnRef>
-          <a:fillRef idx="3">
-            <a:schemeClr val="accent1"/>
-          </a:fillRef>
-          <a:effectRef idx="2">
-            <a:schemeClr val="accent1"/>
-          </a:effectRef>
-          <a:fontRef idx="minor">
-            <a:schemeClr val="lt1"/>
-          </a:fontRef>
-        </p:style>
-        <p:txBody>
-          <a:bodyPr rtlCol="0" anchor="ctr" wrap="square"/>
-          <a:lstStyle/>
-          <a:p>
-            <a:pPr algn="ctr"/>
-          </a:p>
-        </p:txBody>
-      </p:sp>
-      <p:pic>
-        <p:nvPicPr>
-          <p:cNvPr id="87" name="Picture 86" descr="eye_look.png"/>
-          <p:cNvPicPr>
-            <a:picLocks noChangeAspect="1"/>
-          </p:cNvPicPr>
-          <p:nvPr/>
-        </p:nvPicPr>
-        <p:blipFill>
-          <a:blip r:embed="rId5"/>
-          <a:stretch>
-            <a:fillRect/>
-          </a:stretch>
-        </p:blipFill>
-        <p:spPr>
-          <a:xfrm>
-            <a:off x="907200" y="7635714"/>
-            <a:ext cx="2664000" cy="1490175"/>
-          </a:xfrm>
-          <a:prstGeom prst="rect">
-            <a:avLst/>
-          </a:prstGeom>
-        </p:spPr>
-      </p:pic>
-      <p:sp>
-        <p:nvSpPr>
-          <p:cNvPr id="88" name="Rectangle 87"/>
-          <p:cNvSpPr/>
-          <p:nvPr/>
-        </p:nvSpPr>
-        <p:spPr>
-          <a:xfrm>
-            <a:off x="4255200" y="5580000"/>
-            <a:ext cx="3888000" cy="5328000"/>
+            <a:off x="4255200" y="23580000"/>
+            <a:ext cx="3888000" cy="3456000"/>
           </a:xfrm>
           <a:prstGeom prst="rect">
             <a:avLst/>
@@ -4467,14 +7496,14 @@
       </p:sp>
       <p:sp>
         <p:nvSpPr>
-          <p:cNvPr id="89" name="TextBox 88"/>
+          <p:cNvPr id="135" name="TextBox 134"/>
           <p:cNvSpPr txBox="1"/>
           <p:nvPr/>
         </p:nvSpPr>
         <p:spPr>
           <a:xfrm>
-            <a:off x="4435200" y="5724000"/>
-            <a:ext cx="3528000" cy="216000"/>
+            <a:off x="4417200" y="23706000"/>
+            <a:ext cx="3564000" cy="216000"/>
           </a:xfrm>
           <a:prstGeom prst="rect">
             <a:avLst/>
@@ -4509,14 +7538,14 @@
       </p:sp>
       <p:sp>
         <p:nvSpPr>
-          <p:cNvPr id="90" name="Rounded Rectangle 89"/>
+          <p:cNvPr id="136" name="Rounded Rectangle 135"/>
           <p:cNvSpPr/>
           <p:nvPr/>
         </p:nvSpPr>
         <p:spPr>
           <a:xfrm>
-            <a:off x="4435200" y="5958000"/>
-            <a:ext cx="3528000" cy="1224000"/>
+            <a:off x="4417200" y="23940000"/>
+            <a:ext cx="3564000" cy="828000"/>
           </a:xfrm>
           <a:prstGeom prst="roundRect">
             <a:avLst>
@@ -4557,14 +7586,14 @@
       </p:sp>
       <p:sp>
         <p:nvSpPr>
-          <p:cNvPr id="91" name="TextBox 90"/>
+          <p:cNvPr id="137" name="TextBox 136"/>
           <p:cNvSpPr txBox="1"/>
           <p:nvPr/>
         </p:nvSpPr>
         <p:spPr>
           <a:xfrm>
-            <a:off x="4579200" y="6084000"/>
-            <a:ext cx="3240000" cy="288000"/>
+            <a:off x="4543200" y="24030000"/>
+            <a:ext cx="3312000" cy="288000"/>
           </a:xfrm>
           <a:prstGeom prst="rect">
             <a:avLst/>
@@ -4592,21 +7621,21 @@
                 </a:solidFill>
                 <a:latin typeface="Arial"/>
               </a:rPr>
-              <a:t>One fixed choice</a:t>
-            </a:r>
-          </a:p>
-        </p:txBody>
-      </p:sp>
-      <p:sp>
-        <p:nvSpPr>
-          <p:cNvPr id="92" name="TextBox 91"/>
+              <a:t>One fixed view</a:t>
+            </a:r>
+          </a:p>
+        </p:txBody>
+      </p:sp>
+      <p:sp>
+        <p:nvSpPr>
+          <p:cNvPr id="138" name="TextBox 137"/>
           <p:cNvSpPr txBox="1"/>
           <p:nvPr/>
         </p:nvSpPr>
         <p:spPr>
           <a:xfrm>
-            <a:off x="4579200" y="6426000"/>
-            <a:ext cx="3240000" cy="576000"/>
+            <a:off x="4543200" y="24372000"/>
+            <a:ext cx="3312000" cy="288000"/>
           </a:xfrm>
           <a:prstGeom prst="rect">
             <a:avLst/>
@@ -4634,21 +7663,21 @@
                 </a:solidFill>
                 <a:latin typeface="Arial"/>
               </a:rPr>
-              <a:t>the same way of seeing for every task</a:t>
-            </a:r>
-          </a:p>
-        </p:txBody>
-      </p:sp>
-      <p:sp>
-        <p:nvSpPr>
-          <p:cNvPr id="93" name="Rounded Rectangle 92"/>
+              <a:t>the same view for every task</a:t>
+            </a:r>
+          </a:p>
+        </p:txBody>
+      </p:sp>
+      <p:sp>
+        <p:nvSpPr>
+          <p:cNvPr id="139" name="Rounded Rectangle 138"/>
           <p:cNvSpPr/>
           <p:nvPr/>
         </p:nvSpPr>
         <p:spPr>
           <a:xfrm>
-            <a:off x="4435200" y="7290000"/>
-            <a:ext cx="3528000" cy="1224000"/>
+            <a:off x="4417200" y="24858000"/>
+            <a:ext cx="3564000" cy="828000"/>
           </a:xfrm>
           <a:prstGeom prst="roundRect">
             <a:avLst>
@@ -4689,14 +7718,14 @@
       </p:sp>
       <p:sp>
         <p:nvSpPr>
-          <p:cNvPr id="94" name="TextBox 93"/>
+          <p:cNvPr id="140" name="TextBox 139"/>
           <p:cNvSpPr txBox="1"/>
           <p:nvPr/>
         </p:nvSpPr>
         <p:spPr>
           <a:xfrm>
-            <a:off x="4579200" y="7416000"/>
-            <a:ext cx="3240000" cy="288000"/>
+            <a:off x="4543200" y="24948000"/>
+            <a:ext cx="3312000" cy="288000"/>
           </a:xfrm>
           <a:prstGeom prst="rect">
             <a:avLst/>
@@ -4724,21 +7753,21 @@
                 </a:solidFill>
                 <a:latin typeface="Arial"/>
               </a:rPr>
-              <a:t>Best choice in hindsight</a:t>
-            </a:r>
-          </a:p>
-        </p:txBody>
-      </p:sp>
-      <p:sp>
-        <p:nvSpPr>
-          <p:cNvPr id="95" name="TextBox 94"/>
+              <a:t>Perfect hindsight</a:t>
+            </a:r>
+          </a:p>
+        </p:txBody>
+      </p:sp>
+      <p:sp>
+        <p:nvSpPr>
+          <p:cNvPr id="141" name="TextBox 140"/>
           <p:cNvSpPr txBox="1"/>
           <p:nvPr/>
         </p:nvSpPr>
         <p:spPr>
           <a:xfrm>
-            <a:off x="4579200" y="7758000"/>
-            <a:ext cx="3240000" cy="576000"/>
+            <a:off x="4543200" y="25290000"/>
+            <a:ext cx="3312000" cy="288000"/>
           </a:xfrm>
           <a:prstGeom prst="rect">
             <a:avLst/>
@@ -4766,21 +7795,21 @@
                 </a:solidFill>
                 <a:latin typeface="Arial"/>
               </a:rPr>
-              <a:t>knowing afterwards which way solved it</a:t>
-            </a:r>
-          </a:p>
-        </p:txBody>
-      </p:sp>
-      <p:sp>
-        <p:nvSpPr>
-          <p:cNvPr id="96" name="Rounded Rectangle 95"/>
+              <a:t>knowing afterwards which view solved it</a:t>
+            </a:r>
+          </a:p>
+        </p:txBody>
+      </p:sp>
+      <p:sp>
+        <p:nvSpPr>
+          <p:cNvPr id="142" name="Rounded Rectangle 141"/>
           <p:cNvSpPr/>
           <p:nvPr/>
         </p:nvSpPr>
         <p:spPr>
           <a:xfrm>
-            <a:off x="4435200" y="8622000"/>
-            <a:ext cx="3528000" cy="1224000"/>
+            <a:off x="4417200" y="25776000"/>
+            <a:ext cx="3564000" cy="828000"/>
           </a:xfrm>
           <a:prstGeom prst="roundRect">
             <a:avLst>
@@ -4821,14 +7850,14 @@
       </p:sp>
       <p:sp>
         <p:nvSpPr>
-          <p:cNvPr id="97" name="TextBox 96"/>
+          <p:cNvPr id="143" name="TextBox 142"/>
           <p:cNvSpPr txBox="1"/>
           <p:nvPr/>
         </p:nvSpPr>
         <p:spPr>
           <a:xfrm>
-            <a:off x="4579200" y="8748000"/>
-            <a:ext cx="3240000" cy="288000"/>
+            <a:off x="4543200" y="25866000"/>
+            <a:ext cx="3312000" cy="288000"/>
           </a:xfrm>
           <a:prstGeom prst="rect">
             <a:avLst/>
@@ -4863,14 +7892,14 @@
       </p:sp>
       <p:sp>
         <p:nvSpPr>
-          <p:cNvPr id="98" name="TextBox 97"/>
+          <p:cNvPr id="144" name="TextBox 143"/>
           <p:cNvSpPr txBox="1"/>
           <p:nvPr/>
         </p:nvSpPr>
         <p:spPr>
           <a:xfrm>
-            <a:off x="4579200" y="9090000"/>
-            <a:ext cx="3240000" cy="576000"/>
+            <a:off x="4543200" y="26208000"/>
+            <a:ext cx="3312000" cy="288000"/>
           </a:xfrm>
           <a:prstGeom prst="rect">
             <a:avLst/>
@@ -4898,21 +7927,21 @@
                 </a:solidFill>
                 <a:latin typeface="Arial"/>
               </a:rPr>
-              <a:t>made before the task runs, from what the page looks like</a:t>
-            </a:r>
-          </a:p>
-        </p:txBody>
-      </p:sp>
-      <p:sp>
-        <p:nvSpPr>
-          <p:cNvPr id="99" name="TextBox 98"/>
+              <a:t>made before the task runs, from the page</a:t>
+            </a:r>
+          </a:p>
+        </p:txBody>
+      </p:sp>
+      <p:sp>
+        <p:nvSpPr>
+          <p:cNvPr id="145" name="TextBox 144"/>
           <p:cNvSpPr txBox="1"/>
           <p:nvPr/>
         </p:nvSpPr>
         <p:spPr>
           <a:xfrm>
-            <a:off x="4435200" y="10548000"/>
-            <a:ext cx="3528000" cy="216000"/>
+            <a:off x="4417200" y="26730000"/>
+            <a:ext cx="3564000" cy="216000"/>
           </a:xfrm>
           <a:prstGeom prst="rect">
             <a:avLst/>
@@ -4947,14 +7976,14 @@
       </p:sp>
       <p:sp>
         <p:nvSpPr>
-          <p:cNvPr id="100" name="Rectangle 99"/>
+          <p:cNvPr id="146" name="Rectangle 145"/>
           <p:cNvSpPr/>
           <p:nvPr/>
         </p:nvSpPr>
         <p:spPr>
           <a:xfrm>
-            <a:off x="8647200" y="5580000"/>
-            <a:ext cx="5400000" cy="1656000"/>
+            <a:off x="8647200" y="23580000"/>
+            <a:ext cx="5400000" cy="1044000"/>
           </a:xfrm>
           <a:prstGeom prst="rect">
             <a:avLst/>
@@ -4993,13 +8022,13 @@
       </p:sp>
       <p:sp>
         <p:nvSpPr>
-          <p:cNvPr id="101" name="Rectangle 100"/>
+          <p:cNvPr id="147" name="Rectangle 146"/>
           <p:cNvSpPr/>
           <p:nvPr/>
         </p:nvSpPr>
         <p:spPr>
           <a:xfrm>
-            <a:off x="8647200" y="5580000"/>
+            <a:off x="8647200" y="23580000"/>
             <a:ext cx="5400000" cy="50400"/>
           </a:xfrm>
           <a:prstGeom prst="rect">
@@ -5037,14 +8066,14 @@
       </p:sp>
       <p:sp>
         <p:nvSpPr>
-          <p:cNvPr id="102" name="TextBox 101"/>
+          <p:cNvPr id="148" name="TextBox 147"/>
           <p:cNvSpPr txBox="1"/>
           <p:nvPr/>
         </p:nvSpPr>
         <p:spPr>
           <a:xfrm>
-            <a:off x="8827200" y="5742000"/>
-            <a:ext cx="1440000" cy="288000"/>
+            <a:off x="8809200" y="23673600"/>
+            <a:ext cx="1080000" cy="252000"/>
           </a:xfrm>
           <a:prstGeom prst="rect">
             <a:avLst/>
@@ -5079,14 +8108,14 @@
       </p:sp>
       <p:sp>
         <p:nvSpPr>
-          <p:cNvPr id="103" name="TextBox 102"/>
+          <p:cNvPr id="149" name="TextBox 148"/>
           <p:cNvSpPr txBox="1"/>
           <p:nvPr/>
         </p:nvSpPr>
         <p:spPr>
           <a:xfrm>
-            <a:off x="8827200" y="6084000"/>
-            <a:ext cx="2520000" cy="504000"/>
+            <a:off x="9673200" y="23695200"/>
+            <a:ext cx="2448000" cy="432000"/>
           </a:xfrm>
           <a:prstGeom prst="rect">
             <a:avLst/>
@@ -5121,14 +8150,14 @@
       </p:sp>
       <p:sp>
         <p:nvSpPr>
-          <p:cNvPr id="104" name="TextBox 103"/>
+          <p:cNvPr id="150" name="TextBox 149"/>
           <p:cNvSpPr txBox="1"/>
           <p:nvPr/>
         </p:nvSpPr>
         <p:spPr>
           <a:xfrm>
-            <a:off x="8827200" y="6624000"/>
-            <a:ext cx="2520000" cy="432000"/>
+            <a:off x="8809200" y="24282000"/>
+            <a:ext cx="3312000" cy="288000"/>
           </a:xfrm>
           <a:prstGeom prst="rect">
             <a:avLst/>
@@ -5163,14 +8192,14 @@
       </p:sp>
       <p:sp>
         <p:nvSpPr>
-          <p:cNvPr id="105" name="Rectangle 104"/>
+          <p:cNvPr id="151" name="Rectangle 150"/>
           <p:cNvSpPr/>
           <p:nvPr/>
         </p:nvSpPr>
         <p:spPr>
           <a:xfrm>
-            <a:off x="11476800" y="5709600"/>
-            <a:ext cx="2404800" cy="1357875"/>
+            <a:off x="12214800" y="23634000"/>
+            <a:ext cx="1684800" cy="955125"/>
           </a:xfrm>
           <a:prstGeom prst="rect">
             <a:avLst/>
@@ -5207,22 +8236,22 @@
       </p:sp>
       <p:pic>
         <p:nvPicPr>
-          <p:cNvPr id="106" name="Picture 105" descr="eye_look.png"/>
+          <p:cNvPr id="152" name="Picture 151" descr="eye_look.png"/>
           <p:cNvPicPr>
             <a:picLocks noChangeAspect="1"/>
           </p:cNvPicPr>
           <p:nvPr/>
         </p:nvPicPr>
         <p:blipFill>
-          <a:blip r:embed="rId5"/>
+          <a:blip r:embed="rId7"/>
           <a:stretch>
             <a:fillRect/>
           </a:stretch>
         </p:blipFill>
         <p:spPr>
           <a:xfrm>
-            <a:off x="11491200" y="5724000"/>
-            <a:ext cx="2376000" cy="1329075"/>
+            <a:off x="12229200" y="23648400"/>
+            <a:ext cx="1656000" cy="926325"/>
           </a:xfrm>
           <a:prstGeom prst="rect">
             <a:avLst/>
@@ -5231,14 +8260,14 @@
       </p:pic>
       <p:sp>
         <p:nvSpPr>
-          <p:cNvPr id="107" name="Rectangle 106"/>
+          <p:cNvPr id="153" name="Rectangle 152"/>
           <p:cNvSpPr/>
           <p:nvPr/>
         </p:nvSpPr>
         <p:spPr>
           <a:xfrm>
-            <a:off x="8647200" y="7380000"/>
-            <a:ext cx="5400000" cy="1656000"/>
+            <a:off x="8647200" y="24786000"/>
+            <a:ext cx="5400000" cy="1044000"/>
           </a:xfrm>
           <a:prstGeom prst="rect">
             <a:avLst/>
@@ -5277,13 +8306,13 @@
       </p:sp>
       <p:sp>
         <p:nvSpPr>
-          <p:cNvPr id="108" name="Rectangle 107"/>
+          <p:cNvPr id="154" name="Rectangle 153"/>
           <p:cNvSpPr/>
           <p:nvPr/>
         </p:nvSpPr>
         <p:spPr>
           <a:xfrm>
-            <a:off x="8647200" y="7380000"/>
+            <a:off x="8647200" y="24786000"/>
             <a:ext cx="5400000" cy="50400"/>
           </a:xfrm>
           <a:prstGeom prst="rect">
@@ -5321,14 +8350,14 @@
       </p:sp>
       <p:sp>
         <p:nvSpPr>
-          <p:cNvPr id="109" name="TextBox 108"/>
+          <p:cNvPr id="155" name="TextBox 154"/>
           <p:cNvSpPr txBox="1"/>
           <p:nvPr/>
         </p:nvSpPr>
         <p:spPr>
           <a:xfrm>
-            <a:off x="8827200" y="7542000"/>
-            <a:ext cx="1440000" cy="288000"/>
+            <a:off x="8809200" y="24879600"/>
+            <a:ext cx="1080000" cy="252000"/>
           </a:xfrm>
           <a:prstGeom prst="rect">
             <a:avLst/>
@@ -5363,14 +8392,14 @@
       </p:sp>
       <p:sp>
         <p:nvSpPr>
-          <p:cNvPr id="110" name="TextBox 109"/>
+          <p:cNvPr id="156" name="TextBox 155"/>
           <p:cNvSpPr txBox="1"/>
           <p:nvPr/>
         </p:nvSpPr>
         <p:spPr>
           <a:xfrm>
-            <a:off x="8827200" y="7884000"/>
-            <a:ext cx="2520000" cy="504000"/>
+            <a:off x="9673200" y="24901200"/>
+            <a:ext cx="2448000" cy="432000"/>
           </a:xfrm>
           <a:prstGeom prst="rect">
             <a:avLst/>
@@ -5405,14 +8434,14 @@
       </p:sp>
       <p:sp>
         <p:nvSpPr>
-          <p:cNvPr id="111" name="TextBox 110"/>
+          <p:cNvPr id="157" name="TextBox 156"/>
           <p:cNvSpPr txBox="1"/>
           <p:nvPr/>
         </p:nvSpPr>
         <p:spPr>
           <a:xfrm>
-            <a:off x="8827200" y="8424000"/>
-            <a:ext cx="2520000" cy="432000"/>
+            <a:off x="8809200" y="25488000"/>
+            <a:ext cx="3312000" cy="288000"/>
           </a:xfrm>
           <a:prstGeom prst="rect">
             <a:avLst/>
@@ -5440,21 +8469,21 @@
                 </a:solidFill>
                 <a:latin typeface="Arial"/>
               </a:rPr>
-              <a:t>3,314 tokens · three text-only variants share this</a:t>
-            </a:r>
-          </a:p>
-        </p:txBody>
-      </p:sp>
-      <p:sp>
-        <p:nvSpPr>
-          <p:cNvPr id="112" name="Rectangle 111"/>
+              <a:t>3,314 tokens · +3 text-only variants</a:t>
+            </a:r>
+          </a:p>
+        </p:txBody>
+      </p:sp>
+      <p:sp>
+        <p:nvSpPr>
+          <p:cNvPr id="158" name="Rectangle 157"/>
           <p:cNvSpPr/>
           <p:nvPr/>
         </p:nvSpPr>
         <p:spPr>
           <a:xfrm>
-            <a:off x="11491200" y="7524000"/>
-            <a:ext cx="2376000" cy="1328400"/>
+            <a:off x="12229200" y="24854400"/>
+            <a:ext cx="1656000" cy="925200"/>
           </a:xfrm>
           <a:prstGeom prst="rect">
             <a:avLst/>
@@ -5493,14 +8522,14 @@
       </p:sp>
       <p:sp>
         <p:nvSpPr>
-          <p:cNvPr id="113" name="TextBox 112"/>
+          <p:cNvPr id="159" name="TextBox 158"/>
           <p:cNvSpPr txBox="1"/>
           <p:nvPr/>
         </p:nvSpPr>
         <p:spPr>
           <a:xfrm>
-            <a:off x="11563200" y="7596000"/>
-            <a:ext cx="2232000" cy="1116000"/>
+            <a:off x="12283200" y="24908400"/>
+            <a:ext cx="1548000" cy="828000"/>
           </a:xfrm>
           <a:prstGeom prst="rect">
             <a:avLst/>
@@ -5515,14 +8544,14 @@
           <a:p>
             <a:pPr algn="l">
               <a:lnSpc>
-                <a:spcPct val="115000"/>
+                <a:spcPct val="112000"/>
               </a:lnSpc>
               <a:spcAft>
                 <a:spcPts val="0"/>
               </a:spcAft>
             </a:pPr>
             <a:r>
-              <a:rPr sz="750" b="0" i="0">
+              <a:rPr sz="650" b="0" i="0">
                 <a:solidFill>
                   <a:srgbClr val="12162E"/>
                 </a:solidFill>
@@ -5534,14 +8563,14 @@
           <a:p>
             <a:pPr algn="l">
               <a:lnSpc>
-                <a:spcPct val="115000"/>
+                <a:spcPct val="112000"/>
               </a:lnSpc>
               <a:spcAft>
                 <a:spcPts val="0"/>
               </a:spcAft>
             </a:pPr>
             <a:r>
-              <a:rPr sz="750" b="0" i="0">
+              <a:rPr sz="650" b="0" i="0">
                 <a:solidFill>
                   <a:srgbClr val="12162E"/>
                 </a:solidFill>
@@ -5553,14 +8582,14 @@
           <a:p>
             <a:pPr algn="l">
               <a:lnSpc>
-                <a:spcPct val="115000"/>
+                <a:spcPct val="112000"/>
               </a:lnSpc>
               <a:spcAft>
                 <a:spcPts val="0"/>
               </a:spcAft>
             </a:pPr>
             <a:r>
-              <a:rPr sz="750" b="0" i="0">
+              <a:rPr sz="650" b="0" i="0">
                 <a:solidFill>
                   <a:srgbClr val="12162E"/>
                 </a:solidFill>
@@ -5572,14 +8601,14 @@
           <a:p>
             <a:pPr algn="l">
               <a:lnSpc>
-                <a:spcPct val="115000"/>
+                <a:spcPct val="112000"/>
               </a:lnSpc>
               <a:spcAft>
                 <a:spcPts val="0"/>
               </a:spcAft>
             </a:pPr>
             <a:r>
-              <a:rPr sz="750" b="0" i="0">
+              <a:rPr sz="650" b="0" i="0">
                 <a:solidFill>
                   <a:srgbClr val="12162E"/>
                 </a:solidFill>
@@ -5591,14 +8620,14 @@
           <a:p>
             <a:pPr algn="l">
               <a:lnSpc>
-                <a:spcPct val="115000"/>
+                <a:spcPct val="112000"/>
               </a:lnSpc>
               <a:spcAft>
                 <a:spcPts val="0"/>
               </a:spcAft>
             </a:pPr>
             <a:r>
-              <a:rPr sz="750" b="0" i="0">
+              <a:rPr sz="650" b="0" i="0">
                 <a:solidFill>
                   <a:srgbClr val="12162E"/>
                 </a:solidFill>
@@ -5610,14 +8639,14 @@
           <a:p>
             <a:pPr algn="l">
               <a:lnSpc>
-                <a:spcPct val="115000"/>
+                <a:spcPct val="112000"/>
               </a:lnSpc>
               <a:spcAft>
                 <a:spcPts val="0"/>
               </a:spcAft>
             </a:pPr>
             <a:r>
-              <a:rPr sz="750" b="0" i="0">
+              <a:rPr sz="650" b="0" i="0">
                 <a:solidFill>
                   <a:srgbClr val="12162E"/>
                 </a:solidFill>
@@ -5630,14 +8659,14 @@
       </p:sp>
       <p:sp>
         <p:nvSpPr>
-          <p:cNvPr id="114" name="Rectangle 113"/>
+          <p:cNvPr id="160" name="Rectangle 159"/>
           <p:cNvSpPr/>
           <p:nvPr/>
         </p:nvSpPr>
         <p:spPr>
           <a:xfrm>
-            <a:off x="8647200" y="9180000"/>
-            <a:ext cx="5400000" cy="1656000"/>
+            <a:off x="8647200" y="25992000"/>
+            <a:ext cx="5400000" cy="1044000"/>
           </a:xfrm>
           <a:prstGeom prst="rect">
             <a:avLst/>
@@ -5676,13 +8705,13 @@
       </p:sp>
       <p:sp>
         <p:nvSpPr>
-          <p:cNvPr id="115" name="Rectangle 114"/>
+          <p:cNvPr id="161" name="Rectangle 160"/>
           <p:cNvSpPr/>
           <p:nvPr/>
         </p:nvSpPr>
         <p:spPr>
           <a:xfrm>
-            <a:off x="8647200" y="9180000"/>
+            <a:off x="8647200" y="25992000"/>
             <a:ext cx="5400000" cy="50400"/>
           </a:xfrm>
           <a:prstGeom prst="rect">
@@ -5720,14 +8749,14 @@
       </p:sp>
       <p:sp>
         <p:nvSpPr>
-          <p:cNvPr id="116" name="TextBox 115"/>
+          <p:cNvPr id="162" name="TextBox 161"/>
           <p:cNvSpPr txBox="1"/>
           <p:nvPr/>
         </p:nvSpPr>
         <p:spPr>
           <a:xfrm>
-            <a:off x="8827200" y="9342000"/>
-            <a:ext cx="1440000" cy="288000"/>
+            <a:off x="8809200" y="26085600"/>
+            <a:ext cx="1080000" cy="252000"/>
           </a:xfrm>
           <a:prstGeom prst="rect">
             <a:avLst/>
@@ -5762,14 +8791,14 @@
       </p:sp>
       <p:sp>
         <p:nvSpPr>
-          <p:cNvPr id="117" name="TextBox 116"/>
+          <p:cNvPr id="163" name="TextBox 162"/>
           <p:cNvSpPr txBox="1"/>
           <p:nvPr/>
         </p:nvSpPr>
         <p:spPr>
           <a:xfrm>
-            <a:off x="8827200" y="9684000"/>
-            <a:ext cx="2520000" cy="504000"/>
+            <a:off x="9673200" y="26107200"/>
+            <a:ext cx="2448000" cy="432000"/>
           </a:xfrm>
           <a:prstGeom prst="rect">
             <a:avLst/>
@@ -5804,14 +8833,14 @@
       </p:sp>
       <p:sp>
         <p:nvSpPr>
-          <p:cNvPr id="118" name="TextBox 117"/>
+          <p:cNvPr id="164" name="TextBox 163"/>
           <p:cNvSpPr txBox="1"/>
           <p:nvPr/>
         </p:nvSpPr>
         <p:spPr>
           <a:xfrm>
-            <a:off x="8827200" y="10224000"/>
-            <a:ext cx="2520000" cy="432000"/>
+            <a:off x="8809200" y="26694000"/>
+            <a:ext cx="3312000" cy="288000"/>
           </a:xfrm>
           <a:prstGeom prst="rect">
             <a:avLst/>
@@ -5846,14 +8875,14 @@
       </p:sp>
       <p:sp>
         <p:nvSpPr>
-          <p:cNvPr id="119" name="Rectangle 118"/>
+          <p:cNvPr id="165" name="Rectangle 164"/>
           <p:cNvSpPr/>
           <p:nvPr/>
         </p:nvSpPr>
         <p:spPr>
           <a:xfrm>
-            <a:off x="11476800" y="9309600"/>
-            <a:ext cx="2404800" cy="1357875"/>
+            <a:off x="12214800" y="26046000"/>
+            <a:ext cx="1684800" cy="955125"/>
           </a:xfrm>
           <a:prstGeom prst="rect">
             <a:avLst/>
@@ -5890,22 +8919,22 @@
       </p:sp>
       <p:pic>
         <p:nvPicPr>
-          <p:cNvPr id="120" name="Picture 119" descr="eye_both.png"/>
+          <p:cNvPr id="166" name="Picture 165" descr="eye_both.png"/>
           <p:cNvPicPr>
             <a:picLocks noChangeAspect="1"/>
           </p:cNvPicPr>
           <p:nvPr/>
         </p:nvPicPr>
         <p:blipFill>
-          <a:blip r:embed="rId6"/>
+          <a:blip r:embed="rId8"/>
           <a:stretch>
             <a:fillRect/>
           </a:stretch>
         </p:blipFill>
         <p:spPr>
           <a:xfrm>
-            <a:off x="11491200" y="9324000"/>
-            <a:ext cx="2376000" cy="1329075"/>
+            <a:off x="12229200" y="26060400"/>
+            <a:ext cx="1656000" cy="926325"/>
           </a:xfrm>
           <a:prstGeom prst="rect">
             <a:avLst/>
@@ -5914,14 +8943,14 @@
       </p:pic>
       <p:sp>
         <p:nvSpPr>
-          <p:cNvPr id="121" name="Rectangle 120"/>
+          <p:cNvPr id="167" name="Rectangle 166"/>
           <p:cNvSpPr/>
           <p:nvPr/>
         </p:nvSpPr>
         <p:spPr>
           <a:xfrm>
-            <a:off x="14551200" y="5580000"/>
-            <a:ext cx="3168000" cy="5328000"/>
+            <a:off x="14551200" y="23580000"/>
+            <a:ext cx="3168000" cy="3456000"/>
           </a:xfrm>
           <a:prstGeom prst="rect">
             <a:avLst/>
@@ -5960,13 +8989,13 @@
       </p:sp>
       <p:sp>
         <p:nvSpPr>
-          <p:cNvPr id="122" name="Rectangle 121"/>
+          <p:cNvPr id="168" name="Rectangle 167"/>
           <p:cNvSpPr/>
           <p:nvPr/>
         </p:nvSpPr>
         <p:spPr>
           <a:xfrm>
-            <a:off x="14551200" y="5580000"/>
+            <a:off x="14551200" y="23580000"/>
             <a:ext cx="3168000" cy="50400"/>
           </a:xfrm>
           <a:prstGeom prst="rect">
@@ -6004,14 +9033,14 @@
       </p:sp>
       <p:sp>
         <p:nvSpPr>
-          <p:cNvPr id="123" name="TextBox 122"/>
+          <p:cNvPr id="169" name="TextBox 168"/>
           <p:cNvSpPr txBox="1"/>
           <p:nvPr/>
         </p:nvSpPr>
         <p:spPr>
           <a:xfrm>
-            <a:off x="14731200" y="5724000"/>
-            <a:ext cx="2808000" cy="216000"/>
+            <a:off x="14713200" y="23706000"/>
+            <a:ext cx="2844000" cy="216000"/>
           </a:xfrm>
           <a:prstGeom prst="rect">
             <a:avLst/>
@@ -6046,14 +9075,14 @@
       </p:sp>
       <p:sp>
         <p:nvSpPr>
-          <p:cNvPr id="124" name="TextBox 123"/>
+          <p:cNvPr id="170" name="TextBox 169"/>
           <p:cNvSpPr txBox="1"/>
           <p:nvPr/>
         </p:nvSpPr>
         <p:spPr>
           <a:xfrm>
-            <a:off x="14731200" y="5958000"/>
-            <a:ext cx="2808000" cy="322781"/>
+            <a:off x="14713200" y="23940000"/>
+            <a:ext cx="2844000" cy="322781"/>
           </a:xfrm>
           <a:prstGeom prst="rect">
             <a:avLst/>
@@ -6088,14 +9117,14 @@
       </p:sp>
       <p:sp>
         <p:nvSpPr>
-          <p:cNvPr id="125" name="TextBox 124"/>
+          <p:cNvPr id="171" name="TextBox 170"/>
           <p:cNvSpPr txBox="1"/>
           <p:nvPr/>
         </p:nvSpPr>
         <p:spPr>
           <a:xfrm>
-            <a:off x="14731200" y="6352781"/>
-            <a:ext cx="2808000" cy="255684"/>
+            <a:off x="14713200" y="24316781"/>
+            <a:ext cx="2844000" cy="255684"/>
           </a:xfrm>
           <a:prstGeom prst="rect">
             <a:avLst/>
@@ -6130,14 +9159,14 @@
       </p:sp>
       <p:sp>
         <p:nvSpPr>
-          <p:cNvPr id="126" name="TextBox 125"/>
+          <p:cNvPr id="172" name="TextBox 171"/>
           <p:cNvSpPr txBox="1"/>
           <p:nvPr/>
         </p:nvSpPr>
         <p:spPr>
           <a:xfrm>
-            <a:off x="14731200" y="6752465"/>
-            <a:ext cx="2808000" cy="1022738"/>
+            <a:off x="14713200" y="24680465"/>
+            <a:ext cx="2844000" cy="767053"/>
           </a:xfrm>
           <a:prstGeom prst="rect">
             <a:avLst/>
@@ -6165,21 +9194,21 @@
                 </a:solidFill>
                 <a:latin typeface="Arial"/>
               </a:rPr>
-              <a:t>Same model, same prompt, same step budget and same cost accounting whichever way it sees — only what it is shown changes.</a:t>
-            </a:r>
-          </a:p>
-        </p:txBody>
-      </p:sp>
-      <p:sp>
-        <p:nvSpPr>
-          <p:cNvPr id="127" name="Rectangle 126"/>
+              <a:t>Only the page view changes; model, prompt, step budget and cost accounting stay fixed.</a:t>
+            </a:r>
+          </a:p>
+        </p:txBody>
+      </p:sp>
+      <p:sp>
+        <p:nvSpPr>
+          <p:cNvPr id="173" name="Rectangle 172"/>
           <p:cNvSpPr/>
           <p:nvPr/>
         </p:nvSpPr>
         <p:spPr>
           <a:xfrm>
-            <a:off x="18223200" y="5580000"/>
-            <a:ext cx="2566800" cy="5328000"/>
+            <a:off x="18223200" y="23580000"/>
+            <a:ext cx="2566800" cy="3456000"/>
           </a:xfrm>
           <a:prstGeom prst="rect">
             <a:avLst/>
@@ -6218,13 +9247,13 @@
       </p:sp>
       <p:sp>
         <p:nvSpPr>
-          <p:cNvPr id="128" name="Rectangle 127"/>
+          <p:cNvPr id="174" name="Rectangle 173"/>
           <p:cNvSpPr/>
           <p:nvPr/>
         </p:nvSpPr>
         <p:spPr>
           <a:xfrm>
-            <a:off x="18223200" y="5580000"/>
+            <a:off x="18223200" y="23580000"/>
             <a:ext cx="2566800" cy="50400"/>
           </a:xfrm>
           <a:prstGeom prst="rect">
@@ -6262,14 +9291,14 @@
       </p:sp>
       <p:sp>
         <p:nvSpPr>
-          <p:cNvPr id="129" name="TextBox 128"/>
+          <p:cNvPr id="175" name="TextBox 174"/>
           <p:cNvSpPr txBox="1"/>
           <p:nvPr/>
         </p:nvSpPr>
         <p:spPr>
           <a:xfrm>
-            <a:off x="18403200" y="5724000"/>
-            <a:ext cx="2206800" cy="216000"/>
+            <a:off x="18385200" y="23706000"/>
+            <a:ext cx="2242800" cy="216000"/>
           </a:xfrm>
           <a:prstGeom prst="rect">
             <a:avLst/>
@@ -6304,14 +9333,14 @@
       </p:sp>
       <p:sp>
         <p:nvSpPr>
-          <p:cNvPr id="130" name="TextBox 129"/>
+          <p:cNvPr id="176" name="TextBox 175"/>
           <p:cNvSpPr txBox="1"/>
           <p:nvPr/>
         </p:nvSpPr>
         <p:spPr>
           <a:xfrm>
-            <a:off x="18403200" y="5958000"/>
-            <a:ext cx="2206800" cy="1094345"/>
+            <a:off x="18385200" y="23940000"/>
+            <a:ext cx="2242800" cy="771563"/>
           </a:xfrm>
           <a:prstGeom prst="rect">
             <a:avLst/>
@@ -6358,21 +9387,21 @@
                 </a:solidFill>
                 <a:latin typeface="Arial"/>
               </a:rPr>
-              <a:t>$ for the whole attempt</a:t>
-            </a:r>
-          </a:p>
-        </p:txBody>
-      </p:sp>
-      <p:sp>
-        <p:nvSpPr>
-          <p:cNvPr id="131" name="TextBox 130"/>
+              <a:t>$ for the attempt</a:t>
+            </a:r>
+          </a:p>
+        </p:txBody>
+      </p:sp>
+      <p:sp>
+        <p:nvSpPr>
+          <p:cNvPr id="177" name="TextBox 176"/>
           <p:cNvSpPr txBox="1"/>
           <p:nvPr/>
         </p:nvSpPr>
         <p:spPr>
           <a:xfrm>
-            <a:off x="18403200" y="7160345"/>
-            <a:ext cx="2206800" cy="1022738"/>
+            <a:off x="18385200" y="24783563"/>
+            <a:ext cx="2242800" cy="1022738"/>
           </a:xfrm>
           <a:prstGeom prst="rect">
             <a:avLst/>
@@ -6400,21 +9429,21 @@
                 </a:solidFill>
                 <a:latin typeface="Arial"/>
               </a:rPr>
-              <a:t>8 website × model combinations · two public benchmarks · 6 ways of seeing · 8,934 task attempts</a:t>
-            </a:r>
-          </a:p>
-        </p:txBody>
-      </p:sp>
-      <p:sp>
-        <p:nvSpPr>
-          <p:cNvPr id="132" name="Rectangle 131"/>
+              <a:t>8 website × model combinations · two public benchmarks · 6 views · 8,934 attempts</a:t>
+            </a:r>
+          </a:p>
+        </p:txBody>
+      </p:sp>
+      <p:sp>
+        <p:nvSpPr>
+          <p:cNvPr id="178" name="Rectangle 177"/>
           <p:cNvSpPr/>
           <p:nvPr/>
         </p:nvSpPr>
         <p:spPr>
           <a:xfrm>
-            <a:off x="16113600" y="10908000"/>
-            <a:ext cx="43200" cy="432000"/>
+            <a:off x="16113600" y="27036000"/>
+            <a:ext cx="43200" cy="324000"/>
           </a:xfrm>
           <a:prstGeom prst="rect">
             <a:avLst/>
@@ -6451,13 +9480,13 @@
       </p:sp>
       <p:sp>
         <p:nvSpPr>
-          <p:cNvPr id="133" name="Rectangle 132"/>
+          <p:cNvPr id="179" name="Rectangle 178"/>
           <p:cNvSpPr/>
           <p:nvPr/>
         </p:nvSpPr>
         <p:spPr>
           <a:xfrm>
-            <a:off x="2239200" y="11318400"/>
+            <a:off x="2239200" y="27338400"/>
             <a:ext cx="13896000" cy="43200"/>
           </a:xfrm>
           <a:prstGeom prst="rect">
@@ -6495,14 +9524,14 @@
       </p:sp>
       <p:sp>
         <p:nvSpPr>
-          <p:cNvPr id="134" name="Rectangle 133"/>
+          <p:cNvPr id="180" name="Rectangle 179"/>
           <p:cNvSpPr/>
           <p:nvPr/>
         </p:nvSpPr>
         <p:spPr>
           <a:xfrm>
-            <a:off x="2217600" y="11052000"/>
-            <a:ext cx="43200" cy="288000"/>
+            <a:off x="2217600" y="27180000"/>
+            <a:ext cx="43200" cy="180000"/>
           </a:xfrm>
           <a:prstGeom prst="rect">
             <a:avLst/>
@@ -6539,13 +9568,13 @@
       </p:sp>
       <p:sp>
         <p:nvSpPr>
-          <p:cNvPr id="135" name="Isosceles Triangle 134"/>
+          <p:cNvPr id="181" name="Isosceles Triangle 180"/>
           <p:cNvSpPr/>
           <p:nvPr/>
         </p:nvSpPr>
         <p:spPr>
           <a:xfrm>
-            <a:off x="2131200" y="10908000"/>
+            <a:off x="2131200" y="27036000"/>
             <a:ext cx="216000" cy="162000"/>
           </a:xfrm>
           <a:prstGeom prst="triangle">
@@ -6583,13 +9612,13 @@
       </p:sp>
       <p:sp>
         <p:nvSpPr>
-          <p:cNvPr id="136" name="TextBox 135"/>
+          <p:cNvPr id="182" name="TextBox 181"/>
           <p:cNvSpPr txBox="1"/>
           <p:nvPr/>
         </p:nvSpPr>
         <p:spPr>
           <a:xfrm>
-            <a:off x="2599200" y="11412000"/>
+            <a:off x="2599200" y="27414000"/>
             <a:ext cx="13176000" cy="252000"/>
           </a:xfrm>
           <a:prstGeom prst="rect">
@@ -6625,14 +9654,14 @@
       </p:sp>
       <p:sp>
         <p:nvSpPr>
-          <p:cNvPr id="137" name="TextBox 136"/>
+          <p:cNvPr id="183" name="TextBox 182"/>
           <p:cNvSpPr txBox="1"/>
           <p:nvPr/>
         </p:nvSpPr>
         <p:spPr>
           <a:xfrm>
-            <a:off x="727200" y="11736000"/>
-            <a:ext cx="20062800" cy="511369"/>
+            <a:off x="727200" y="27684000"/>
+            <a:ext cx="20062800" cy="255684"/>
           </a:xfrm>
           <a:prstGeom prst="rect">
             <a:avLst/>
@@ -6669,7 +9698,7 @@
                 </a:solidFill>
                 <a:latin typeface="Arial"/>
               </a:rPr>
-              <a:t> Everything is held fixed except how the page is shown to the agent. The dashed box is what this work measures — one fixed way of seeing, the best way in hindsight, or a way a model had to learn to choose — each judged on </a:t>
+              <a:t> Everything is held fixed except how the page is shown. The dashed box is what this work measures — one fixed view, perfect hindsight, or a choice a model had to learn — each judged on </a:t>
             </a:r>
             <a:r>
               <a:rPr sz="1271" b="1" i="0">
@@ -6687,2939 +9716,21 @@
                 </a:solidFill>
                 <a:latin typeface="Arial"/>
               </a:rPr>
-              <a:t> success and cost. The laptop beside this poster replays the loop on the three tasks below.</a:t>
-            </a:r>
-          </a:p>
-        </p:txBody>
-      </p:sp>
-      <p:sp>
-        <p:nvSpPr>
-          <p:cNvPr id="14" name="Rectangle 13"/>
-          <p:cNvSpPr/>
-          <p:nvPr/>
-        </p:nvSpPr>
-        <p:spPr>
-          <a:xfrm>
-            <a:off x="727200" y="12672000"/>
-            <a:ext cx="177988" cy="177988"/>
-          </a:xfrm>
-          <a:prstGeom prst="rect">
-            <a:avLst/>
-          </a:prstGeom>
-          <a:solidFill>
-            <a:srgbClr val="AB5FCE"/>
-          </a:solidFill>
-          <a:ln>
-            <a:noFill/>
-          </a:ln>
-          <a:effectLst/>
-        </p:spPr>
-        <p:style>
-          <a:lnRef idx="1">
-            <a:schemeClr val="accent1"/>
-          </a:lnRef>
-          <a:fillRef idx="3">
-            <a:schemeClr val="accent1"/>
-          </a:fillRef>
-          <a:effectRef idx="2">
-            <a:schemeClr val="accent1"/>
-          </a:effectRef>
-          <a:fontRef idx="minor">
-            <a:schemeClr val="lt1"/>
-          </a:fontRef>
-        </p:style>
-        <p:txBody>
-          <a:bodyPr rtlCol="0" anchor="ctr"/>
-          <a:lstStyle/>
-          <a:p>
-            <a:pPr algn="ctr"/>
-            <a:endParaRPr/>
-          </a:p>
-        </p:txBody>
-      </p:sp>
-      <p:sp>
-        <p:nvSpPr>
-          <p:cNvPr id="15" name="TextBox 14"/>
-          <p:cNvSpPr txBox="1"/>
-          <p:nvPr/>
-        </p:nvSpPr>
-        <p:spPr>
-          <a:xfrm>
-            <a:off x="1032323" y="12628800"/>
-            <a:ext cx="6144827" cy="238912"/>
-          </a:xfrm>
-          <a:prstGeom prst="rect">
-            <a:avLst/>
-          </a:prstGeom>
-          <a:noFill/>
-        </p:spPr>
-        <p:txBody>
-          <a:bodyPr wrap="square" lIns="0" tIns="0" rIns="0" bIns="0" anchor="t">
-            <a:spAutoFit/>
-          </a:bodyPr>
-          <a:lstStyle/>
-          <a:p>
-            <a:pPr algn="l">
-              <a:lnSpc>
-                <a:spcPct val="118000"/>
-              </a:lnSpc>
-            </a:pPr>
-            <a:r>
-              <a:rPr sz="1412" b="1" i="0">
-                <a:solidFill>
-                  <a:srgbClr val="141E41"/>
-                </a:solidFill>
-                <a:latin typeface="Consolas"/>
-              </a:rPr>
-              <a:t>WHAT THE SCREEN BESIDE YOU SHOWS</a:t>
-            </a:r>
-            <a:endParaRPr sz="1412" b="1" spc="180" dirty="0">
-              <a:solidFill>
-                <a:srgbClr val="141E41"/>
-              </a:solidFill>
-              <a:latin typeface="Consolas"/>
-            </a:endParaRPr>
-          </a:p>
-        </p:txBody>
-      </p:sp>
-      <p:sp>
-        <p:nvSpPr>
-          <p:cNvPr id="16" name="Rectangle 15"/>
-          <p:cNvSpPr/>
-          <p:nvPr/>
-        </p:nvSpPr>
-        <p:spPr>
-          <a:xfrm>
-            <a:off x="727200" y="12989836"/>
-            <a:ext cx="1169636" cy="35597"/>
-          </a:xfrm>
-          <a:prstGeom prst="rect">
-            <a:avLst/>
-          </a:prstGeom>
-          <a:solidFill>
-            <a:srgbClr val="141E41"/>
-          </a:solidFill>
-          <a:ln>
-            <a:noFill/>
-          </a:ln>
-          <a:effectLst/>
-        </p:spPr>
-        <p:style>
-          <a:lnRef idx="1">
-            <a:schemeClr val="accent1"/>
-          </a:lnRef>
-          <a:fillRef idx="3">
-            <a:schemeClr val="accent1"/>
-          </a:fillRef>
-          <a:effectRef idx="2">
-            <a:schemeClr val="accent1"/>
-          </a:effectRef>
-          <a:fontRef idx="minor">
-            <a:schemeClr val="lt1"/>
-          </a:fontRef>
-        </p:style>
-        <p:txBody>
-          <a:bodyPr rtlCol="0" anchor="ctr"/>
-          <a:lstStyle/>
-          <a:p>
-            <a:pPr algn="ctr"/>
-            <a:endParaRPr/>
-          </a:p>
-        </p:txBody>
-      </p:sp>
-      <p:sp>
-        <p:nvSpPr>
-          <p:cNvPr id="17" name="Rectangle 16"/>
-          <p:cNvSpPr/>
-          <p:nvPr/>
-        </p:nvSpPr>
-        <p:spPr>
-          <a:xfrm>
-            <a:off x="1896836" y="13000007"/>
-            <a:ext cx="5281564" cy="15256"/>
-          </a:xfrm>
-          <a:prstGeom prst="rect">
-            <a:avLst/>
-          </a:prstGeom>
-          <a:solidFill>
-            <a:srgbClr val="DDE3F2"/>
-          </a:solidFill>
-          <a:ln>
-            <a:noFill/>
-          </a:ln>
-          <a:effectLst/>
-        </p:spPr>
-        <p:style>
-          <a:lnRef idx="1">
-            <a:schemeClr val="accent1"/>
-          </a:lnRef>
-          <a:fillRef idx="3">
-            <a:schemeClr val="accent1"/>
-          </a:fillRef>
-          <a:effectRef idx="2">
-            <a:schemeClr val="accent1"/>
-          </a:effectRef>
-          <a:fontRef idx="minor">
-            <a:schemeClr val="lt1"/>
-          </a:fontRef>
-        </p:style>
-        <p:txBody>
-          <a:bodyPr rtlCol="0" anchor="ctr"/>
-          <a:lstStyle/>
-          <a:p>
-            <a:pPr algn="ctr"/>
-            <a:endParaRPr/>
-          </a:p>
-        </p:txBody>
-      </p:sp>
-      <p:sp>
-        <p:nvSpPr>
-          <p:cNvPr id="138" name="TextBox 137"/>
-          <p:cNvSpPr txBox="1"/>
-          <p:nvPr/>
-        </p:nvSpPr>
-        <p:spPr>
-          <a:xfrm>
-            <a:off x="2923200" y="13212000"/>
-            <a:ext cx="1418400" cy="216000"/>
-          </a:xfrm>
-          <a:prstGeom prst="rect">
-            <a:avLst/>
-          </a:prstGeom>
-          <a:noFill/>
-        </p:spPr>
-        <p:txBody>
-          <a:bodyPr wrap="square" lIns="0" rIns="0" tIns="0" bIns="0">
-            <a:spAutoFit/>
-          </a:bodyPr>
-          <a:lstStyle/>
-          <a:p>
-            <a:pPr algn="l">
-              <a:lnSpc>
-                <a:spcPct val="120000"/>
-              </a:lnSpc>
-              <a:spcAft>
-                <a:spcPts val="0"/>
-              </a:spcAft>
-            </a:pPr>
-            <a:r>
-              <a:rPr sz="1059" b="1" i="0">
-                <a:solidFill>
-                  <a:srgbClr val="1F5FD6"/>
-                </a:solidFill>
-                <a:latin typeface="Consolas"/>
-              </a:rPr>
-              <a:t>LOOK</a:t>
-            </a:r>
-          </a:p>
-        </p:txBody>
-      </p:sp>
-      <p:sp>
-        <p:nvSpPr>
-          <p:cNvPr id="139" name="TextBox 138"/>
-          <p:cNvSpPr txBox="1"/>
-          <p:nvPr/>
-        </p:nvSpPr>
-        <p:spPr>
-          <a:xfrm>
-            <a:off x="4341600" y="13212000"/>
-            <a:ext cx="1418400" cy="216000"/>
-          </a:xfrm>
-          <a:prstGeom prst="rect">
-            <a:avLst/>
-          </a:prstGeom>
-          <a:noFill/>
-        </p:spPr>
-        <p:txBody>
-          <a:bodyPr wrap="square" lIns="0" rIns="0" tIns="0" bIns="0">
-            <a:spAutoFit/>
-          </a:bodyPr>
-          <a:lstStyle/>
-          <a:p>
-            <a:pPr algn="l">
-              <a:lnSpc>
-                <a:spcPct val="120000"/>
-              </a:lnSpc>
-              <a:spcAft>
-                <a:spcPts val="0"/>
-              </a:spcAft>
-            </a:pPr>
-            <a:r>
-              <a:rPr sz="1059" b="1" i="0">
-                <a:solidFill>
-                  <a:srgbClr val="E8720C"/>
-                </a:solidFill>
-                <a:latin typeface="Consolas"/>
-              </a:rPr>
-              <a:t>READ</a:t>
-            </a:r>
-          </a:p>
-        </p:txBody>
-      </p:sp>
-      <p:sp>
-        <p:nvSpPr>
-          <p:cNvPr id="140" name="TextBox 139"/>
-          <p:cNvSpPr txBox="1"/>
-          <p:nvPr/>
-        </p:nvSpPr>
-        <p:spPr>
-          <a:xfrm>
-            <a:off x="5760000" y="13212000"/>
-            <a:ext cx="1418400" cy="216000"/>
-          </a:xfrm>
-          <a:prstGeom prst="rect">
-            <a:avLst/>
-          </a:prstGeom>
-          <a:noFill/>
-        </p:spPr>
-        <p:txBody>
-          <a:bodyPr wrap="square" lIns="0" rIns="0" tIns="0" bIns="0">
-            <a:spAutoFit/>
-          </a:bodyPr>
-          <a:lstStyle/>
-          <a:p>
-            <a:pPr algn="l">
-              <a:lnSpc>
-                <a:spcPct val="120000"/>
-              </a:lnSpc>
-              <a:spcAft>
-                <a:spcPts val="0"/>
-              </a:spcAft>
-            </a:pPr>
-            <a:r>
-              <a:rPr sz="1059" b="1" i="0">
-                <a:solidFill>
-                  <a:srgbClr val="14855F"/>
-                </a:solidFill>
-                <a:latin typeface="Consolas"/>
-              </a:rPr>
-              <a:t>BOTH</a:t>
-            </a:r>
-          </a:p>
-        </p:txBody>
-      </p:sp>
-      <p:sp>
-        <p:nvSpPr>
-          <p:cNvPr id="141" name="Rectangle 140"/>
-          <p:cNvSpPr/>
-          <p:nvPr/>
-        </p:nvSpPr>
-        <p:spPr>
-          <a:xfrm>
-            <a:off x="727200" y="13464000"/>
-            <a:ext cx="6451200" cy="10800"/>
-          </a:xfrm>
-          <a:prstGeom prst="rect">
-            <a:avLst/>
-          </a:prstGeom>
-          <a:solidFill>
-            <a:srgbClr val="DDE3F2"/>
-          </a:solidFill>
-          <a:ln>
-            <a:noFill/>
-          </a:ln>
-          <a:effectLst/>
-        </p:spPr>
-        <p:style>
-          <a:lnRef idx="1">
-            <a:schemeClr val="accent1"/>
-          </a:lnRef>
-          <a:fillRef idx="3">
-            <a:schemeClr val="accent1"/>
-          </a:fillRef>
-          <a:effectRef idx="2">
-            <a:schemeClr val="accent1"/>
-          </a:effectRef>
-          <a:fontRef idx="minor">
-            <a:schemeClr val="lt1"/>
-          </a:fontRef>
-        </p:style>
-        <p:txBody>
-          <a:bodyPr rtlCol="0" anchor="ctr" wrap="square"/>
-          <a:lstStyle/>
-          <a:p>
-            <a:pPr algn="ctr"/>
-          </a:p>
-        </p:txBody>
-      </p:sp>
-      <p:sp>
-        <p:nvSpPr>
-          <p:cNvPr id="142" name="Rectangle 141"/>
-          <p:cNvSpPr/>
-          <p:nvPr/>
-        </p:nvSpPr>
-        <p:spPr>
-          <a:xfrm>
-            <a:off x="712800" y="13557600"/>
-            <a:ext cx="2044800" cy="973800"/>
-          </a:xfrm>
-          <a:prstGeom prst="rect">
-            <a:avLst/>
-          </a:prstGeom>
-          <a:noFill/>
-          <a:ln w="8890">
-            <a:solidFill>
-              <a:srgbClr val="C9CFE0"/>
-            </a:solidFill>
-          </a:ln>
-          <a:effectLst/>
-        </p:spPr>
-        <p:style>
-          <a:lnRef idx="1">
-            <a:schemeClr val="accent1"/>
-          </a:lnRef>
-          <a:fillRef idx="3">
-            <a:schemeClr val="accent1"/>
-          </a:fillRef>
-          <a:effectRef idx="2">
-            <a:schemeClr val="accent1"/>
-          </a:effectRef>
-          <a:fontRef idx="minor">
-            <a:schemeClr val="lt1"/>
-          </a:fontRef>
-        </p:style>
-        <p:txBody>
-          <a:bodyPr rtlCol="0" anchor="ctr" wrap="square"/>
-          <a:lstStyle/>
-          <a:p>
-            <a:pPr algn="ctr"/>
+              <a:t> success and cost.</a:t>
+            </a:r>
           </a:p>
         </p:txBody>
       </p:sp>
       <p:pic>
         <p:nvPicPr>
-          <p:cNvPr id="143" name="Picture 142" descr="thumb_130.png"/>
+          <p:cNvPr id="184" name="Picture 183" descr="qr_repo.png"/>
           <p:cNvPicPr>
             <a:picLocks noChangeAspect="1"/>
           </p:cNvPicPr>
           <p:nvPr/>
         </p:nvPicPr>
         <p:blipFill>
-          <a:blip r:embed="rId7"/>
-          <a:stretch>
-            <a:fillRect/>
-          </a:stretch>
-        </p:blipFill>
-        <p:spPr>
-          <a:xfrm>
-            <a:off x="727200" y="13572000"/>
-            <a:ext cx="2016000" cy="945000"/>
-          </a:xfrm>
-          <a:prstGeom prst="rect">
-            <a:avLst/>
-          </a:prstGeom>
-        </p:spPr>
-      </p:pic>
-      <p:sp>
-        <p:nvSpPr>
-          <p:cNvPr id="144" name="TextBox 143"/>
-          <p:cNvSpPr txBox="1"/>
-          <p:nvPr/>
-        </p:nvSpPr>
-        <p:spPr>
-          <a:xfrm>
-            <a:off x="2923200" y="13572000"/>
-            <a:ext cx="4255200" cy="511369"/>
-          </a:xfrm>
-          <a:prstGeom prst="rect">
-            <a:avLst/>
-          </a:prstGeom>
-          <a:noFill/>
-        </p:spPr>
-        <p:txBody>
-          <a:bodyPr wrap="square" lIns="0" rIns="0" tIns="0" bIns="0">
-            <a:spAutoFit/>
-          </a:bodyPr>
-          <a:lstStyle/>
-          <a:p>
-            <a:pPr algn="l">
-              <a:lnSpc>
-                <a:spcPct val="132000"/>
-              </a:lnSpc>
-              <a:spcAft>
-                <a:spcPts val="0"/>
-              </a:spcAft>
-            </a:pPr>
-            <a:r>
-              <a:rPr sz="1271" b="1" i="0">
-                <a:solidFill>
-                  <a:srgbClr val="12162E"/>
-                </a:solidFill>
-                <a:latin typeface="Arial"/>
-              </a:rPr>
-              <a:t>“Navigate to the item on this page whose image is taken during a sunset.”</a:t>
-            </a:r>
-          </a:p>
-        </p:txBody>
-      </p:sp>
-      <p:sp>
-        <p:nvSpPr>
-          <p:cNvPr id="145" name="TextBox 144"/>
-          <p:cNvSpPr txBox="1"/>
-          <p:nvPr/>
-        </p:nvSpPr>
-        <p:spPr>
-          <a:xfrm>
-            <a:off x="2923200" y="14155369"/>
-            <a:ext cx="1418400" cy="504000"/>
-          </a:xfrm>
-          <a:prstGeom prst="rect">
-            <a:avLst/>
-          </a:prstGeom>
-          <a:noFill/>
-        </p:spPr>
-        <p:txBody>
-          <a:bodyPr wrap="square" lIns="0" rIns="0" tIns="0" bIns="0">
-            <a:spAutoFit/>
-          </a:bodyPr>
-          <a:lstStyle/>
-          <a:p>
-            <a:pPr>
-              <a:lnSpc>
-                <a:spcPct val="115000"/>
-              </a:lnSpc>
-            </a:pPr>
-            <a:r>
-              <a:rPr sz="1500" b="1" i="0">
-                <a:solidFill>
-                  <a:srgbClr val="14855F"/>
-                </a:solidFill>
-                <a:latin typeface="Consolas"/>
-              </a:rPr>
-              <a:t>✓ </a:t>
-            </a:r>
-            <a:r>
-              <a:rPr sz="1271" b="0" i="0">
-                <a:solidFill>
-                  <a:srgbClr val="12162E"/>
-                </a:solidFill>
-                <a:latin typeface="Arial"/>
-              </a:rPr>
-              <a:t>2 steps</a:t>
-            </a:r>
-          </a:p>
-          <a:p>
-            <a:pPr>
-              <a:lnSpc>
-                <a:spcPct val="115000"/>
-              </a:lnSpc>
-            </a:pPr>
-            <a:r>
-              <a:rPr sz="1271" b="1" i="0">
-                <a:solidFill>
-                  <a:srgbClr val="12162E"/>
-                </a:solidFill>
-                <a:latin typeface="Arial"/>
-              </a:rPr>
-              <a:t>$0.007</a:t>
-            </a:r>
-          </a:p>
-        </p:txBody>
-      </p:sp>
-      <p:sp>
-        <p:nvSpPr>
-          <p:cNvPr id="146" name="TextBox 145"/>
-          <p:cNvSpPr txBox="1"/>
-          <p:nvPr/>
-        </p:nvSpPr>
-        <p:spPr>
-          <a:xfrm>
-            <a:off x="4341600" y="14155369"/>
-            <a:ext cx="1418400" cy="504000"/>
-          </a:xfrm>
-          <a:prstGeom prst="rect">
-            <a:avLst/>
-          </a:prstGeom>
-          <a:noFill/>
-        </p:spPr>
-        <p:txBody>
-          <a:bodyPr wrap="square" lIns="0" rIns="0" tIns="0" bIns="0">
-            <a:spAutoFit/>
-          </a:bodyPr>
-          <a:lstStyle/>
-          <a:p>
-            <a:pPr>
-              <a:lnSpc>
-                <a:spcPct val="115000"/>
-              </a:lnSpc>
-            </a:pPr>
-            <a:r>
-              <a:rPr sz="1500" b="1" i="0">
-                <a:solidFill>
-                  <a:srgbClr val="C2352B"/>
-                </a:solidFill>
-                <a:latin typeface="Consolas"/>
-              </a:rPr>
-              <a:t>✗ </a:t>
-            </a:r>
-            <a:r>
-              <a:rPr sz="1271" b="0" i="0">
-                <a:solidFill>
-                  <a:srgbClr val="12162E"/>
-                </a:solidFill>
-                <a:latin typeface="Arial"/>
-              </a:rPr>
-              <a:t>21 steps</a:t>
-            </a:r>
-          </a:p>
-          <a:p>
-            <a:pPr>
-              <a:lnSpc>
-                <a:spcPct val="115000"/>
-              </a:lnSpc>
-            </a:pPr>
-            <a:r>
-              <a:rPr sz="1271" b="1" i="0">
-                <a:solidFill>
-                  <a:srgbClr val="12162E"/>
-                </a:solidFill>
-                <a:latin typeface="Arial"/>
-              </a:rPr>
-              <a:t>$0.096</a:t>
-            </a:r>
-          </a:p>
-        </p:txBody>
-      </p:sp>
-      <p:sp>
-        <p:nvSpPr>
-          <p:cNvPr id="147" name="TextBox 146"/>
-          <p:cNvSpPr txBox="1"/>
-          <p:nvPr/>
-        </p:nvSpPr>
-        <p:spPr>
-          <a:xfrm>
-            <a:off x="5760000" y="14155369"/>
-            <a:ext cx="1418400" cy="504000"/>
-          </a:xfrm>
-          <a:prstGeom prst="rect">
-            <a:avLst/>
-          </a:prstGeom>
-          <a:noFill/>
-        </p:spPr>
-        <p:txBody>
-          <a:bodyPr wrap="square" lIns="0" rIns="0" tIns="0" bIns="0">
-            <a:spAutoFit/>
-          </a:bodyPr>
-          <a:lstStyle/>
-          <a:p>
-            <a:pPr>
-              <a:lnSpc>
-                <a:spcPct val="115000"/>
-              </a:lnSpc>
-            </a:pPr>
-            <a:r>
-              <a:rPr sz="1500" b="1" i="0">
-                <a:solidFill>
-                  <a:srgbClr val="14855F"/>
-                </a:solidFill>
-                <a:latin typeface="Consolas"/>
-              </a:rPr>
-              <a:t>✓ </a:t>
-            </a:r>
-            <a:r>
-              <a:rPr sz="1271" b="0" i="0">
-                <a:solidFill>
-                  <a:srgbClr val="12162E"/>
-                </a:solidFill>
-                <a:latin typeface="Arial"/>
-              </a:rPr>
-              <a:t>3 steps</a:t>
-            </a:r>
-          </a:p>
-          <a:p>
-            <a:pPr>
-              <a:lnSpc>
-                <a:spcPct val="115000"/>
-              </a:lnSpc>
-            </a:pPr>
-            <a:r>
-              <a:rPr sz="1271" b="1" i="0">
-                <a:solidFill>
-                  <a:srgbClr val="12162E"/>
-                </a:solidFill>
-                <a:latin typeface="Arial"/>
-              </a:rPr>
-              <a:t>$0.014</a:t>
-            </a:r>
-          </a:p>
-        </p:txBody>
-      </p:sp>
-      <p:sp>
-        <p:nvSpPr>
-          <p:cNvPr id="148" name="Rectangle 147"/>
-          <p:cNvSpPr/>
-          <p:nvPr/>
-        </p:nvSpPr>
-        <p:spPr>
-          <a:xfrm>
-            <a:off x="727200" y="14731369"/>
-            <a:ext cx="6451200" cy="10800"/>
-          </a:xfrm>
-          <a:prstGeom prst="rect">
-            <a:avLst/>
-          </a:prstGeom>
-          <a:solidFill>
-            <a:srgbClr val="DDE3F2"/>
-          </a:solidFill>
-          <a:ln>
-            <a:noFill/>
-          </a:ln>
-          <a:effectLst/>
-        </p:spPr>
-        <p:style>
-          <a:lnRef idx="1">
-            <a:schemeClr val="accent1"/>
-          </a:lnRef>
-          <a:fillRef idx="3">
-            <a:schemeClr val="accent1"/>
-          </a:fillRef>
-          <a:effectRef idx="2">
-            <a:schemeClr val="accent1"/>
-          </a:effectRef>
-          <a:fontRef idx="minor">
-            <a:schemeClr val="lt1"/>
-          </a:fontRef>
-        </p:style>
-        <p:txBody>
-          <a:bodyPr rtlCol="0" anchor="ctr" wrap="square"/>
-          <a:lstStyle/>
-          <a:p>
-            <a:pPr algn="ctr"/>
-          </a:p>
-        </p:txBody>
-      </p:sp>
-      <p:sp>
-        <p:nvSpPr>
-          <p:cNvPr id="149" name="Rectangle 148"/>
-          <p:cNvSpPr/>
-          <p:nvPr/>
-        </p:nvSpPr>
-        <p:spPr>
-          <a:xfrm>
-            <a:off x="712800" y="14788969"/>
-            <a:ext cx="2044800" cy="973800"/>
-          </a:xfrm>
-          <a:prstGeom prst="rect">
-            <a:avLst/>
-          </a:prstGeom>
-          <a:noFill/>
-          <a:ln w="8890">
-            <a:solidFill>
-              <a:srgbClr val="C9CFE0"/>
-            </a:solidFill>
-          </a:ln>
-          <a:effectLst/>
-        </p:spPr>
-        <p:style>
-          <a:lnRef idx="1">
-            <a:schemeClr val="accent1"/>
-          </a:lnRef>
-          <a:fillRef idx="3">
-            <a:schemeClr val="accent1"/>
-          </a:fillRef>
-          <a:effectRef idx="2">
-            <a:schemeClr val="accent1"/>
-          </a:effectRef>
-          <a:fontRef idx="minor">
-            <a:schemeClr val="lt1"/>
-          </a:fontRef>
-        </p:style>
-        <p:txBody>
-          <a:bodyPr rtlCol="0" anchor="ctr" wrap="square"/>
-          <a:lstStyle/>
-          <a:p>
-            <a:pPr algn="ctr"/>
-          </a:p>
-        </p:txBody>
-      </p:sp>
-      <p:pic>
-        <p:nvPicPr>
-          <p:cNvPr id="150" name="Picture 149" descr="thumb_76.png"/>
-          <p:cNvPicPr>
-            <a:picLocks noChangeAspect="1"/>
-          </p:cNvPicPr>
-          <p:nvPr/>
-        </p:nvPicPr>
-        <p:blipFill>
-          <a:blip r:embed="rId8"/>
-          <a:stretch>
-            <a:fillRect/>
-          </a:stretch>
-        </p:blipFill>
-        <p:spPr>
-          <a:xfrm>
-            <a:off x="727200" y="14803369"/>
-            <a:ext cx="2016000" cy="945000"/>
-          </a:xfrm>
-          <a:prstGeom prst="rect">
-            <a:avLst/>
-          </a:prstGeom>
-        </p:spPr>
-      </p:pic>
-      <p:sp>
-        <p:nvSpPr>
-          <p:cNvPr id="151" name="TextBox 150"/>
-          <p:cNvSpPr txBox="1"/>
-          <p:nvPr/>
-        </p:nvSpPr>
-        <p:spPr>
-          <a:xfrm>
-            <a:off x="2923200" y="14803369"/>
-            <a:ext cx="4255200" cy="511369"/>
-          </a:xfrm>
-          <a:prstGeom prst="rect">
-            <a:avLst/>
-          </a:prstGeom>
-          <a:noFill/>
-        </p:spPr>
-        <p:txBody>
-          <a:bodyPr wrap="square" lIns="0" rIns="0" tIns="0" bIns="0">
-            <a:spAutoFit/>
-          </a:bodyPr>
-          <a:lstStyle/>
-          <a:p>
-            <a:pPr algn="l">
-              <a:lnSpc>
-                <a:spcPct val="132000"/>
-              </a:lnSpc>
-              <a:spcAft>
-                <a:spcPts val="0"/>
-              </a:spcAft>
-            </a:pPr>
-            <a:r>
-              <a:rPr sz="1271" b="1" i="0">
-                <a:solidFill>
-                  <a:srgbClr val="12162E"/>
-                </a:solidFill>
-                <a:latin typeface="Arial"/>
-              </a:rPr>
-              <a:t>“Navigate to my listing of the blue bike and change the price to $85.50 (including in the description).”</a:t>
-            </a:r>
-          </a:p>
-        </p:txBody>
-      </p:sp>
-      <p:sp>
-        <p:nvSpPr>
-          <p:cNvPr id="152" name="TextBox 151"/>
-          <p:cNvSpPr txBox="1"/>
-          <p:nvPr/>
-        </p:nvSpPr>
-        <p:spPr>
-          <a:xfrm>
-            <a:off x="2923200" y="15386738"/>
-            <a:ext cx="1418400" cy="504000"/>
-          </a:xfrm>
-          <a:prstGeom prst="rect">
-            <a:avLst/>
-          </a:prstGeom>
-          <a:noFill/>
-        </p:spPr>
-        <p:txBody>
-          <a:bodyPr wrap="square" lIns="0" rIns="0" tIns="0" bIns="0">
-            <a:spAutoFit/>
-          </a:bodyPr>
-          <a:lstStyle/>
-          <a:p>
-            <a:pPr>
-              <a:lnSpc>
-                <a:spcPct val="115000"/>
-              </a:lnSpc>
-            </a:pPr>
-            <a:r>
-              <a:rPr sz="1500" b="1" i="0">
-                <a:solidFill>
-                  <a:srgbClr val="C2352B"/>
-                </a:solidFill>
-                <a:latin typeface="Consolas"/>
-              </a:rPr>
-              <a:t>✗ </a:t>
-            </a:r>
-            <a:r>
-              <a:rPr sz="1271" b="0" i="0">
-                <a:solidFill>
-                  <a:srgbClr val="12162E"/>
-                </a:solidFill>
-                <a:latin typeface="Arial"/>
-              </a:rPr>
-              <a:t>30 steps</a:t>
-            </a:r>
-          </a:p>
-          <a:p>
-            <a:pPr>
-              <a:lnSpc>
-                <a:spcPct val="115000"/>
-              </a:lnSpc>
-            </a:pPr>
-            <a:r>
-              <a:rPr sz="1271" b="1" i="0">
-                <a:solidFill>
-                  <a:srgbClr val="12162E"/>
-                </a:solidFill>
-                <a:latin typeface="Arial"/>
-              </a:rPr>
-              <a:t>$0.116</a:t>
-            </a:r>
-          </a:p>
-        </p:txBody>
-      </p:sp>
-      <p:sp>
-        <p:nvSpPr>
-          <p:cNvPr id="153" name="TextBox 152"/>
-          <p:cNvSpPr txBox="1"/>
-          <p:nvPr/>
-        </p:nvSpPr>
-        <p:spPr>
-          <a:xfrm>
-            <a:off x="4341600" y="15386738"/>
-            <a:ext cx="1418400" cy="504000"/>
-          </a:xfrm>
-          <a:prstGeom prst="rect">
-            <a:avLst/>
-          </a:prstGeom>
-          <a:noFill/>
-        </p:spPr>
-        <p:txBody>
-          <a:bodyPr wrap="square" lIns="0" rIns="0" tIns="0" bIns="0">
-            <a:spAutoFit/>
-          </a:bodyPr>
-          <a:lstStyle/>
-          <a:p>
-            <a:pPr>
-              <a:lnSpc>
-                <a:spcPct val="115000"/>
-              </a:lnSpc>
-            </a:pPr>
-            <a:r>
-              <a:rPr sz="1500" b="1" i="0">
-                <a:solidFill>
-                  <a:srgbClr val="14855F"/>
-                </a:solidFill>
-                <a:latin typeface="Consolas"/>
-              </a:rPr>
-              <a:t>✓ </a:t>
-            </a:r>
-            <a:r>
-              <a:rPr sz="1271" b="0" i="0">
-                <a:solidFill>
-                  <a:srgbClr val="12162E"/>
-                </a:solidFill>
-                <a:latin typeface="Arial"/>
-              </a:rPr>
-              <a:t>9 steps</a:t>
-            </a:r>
-          </a:p>
-          <a:p>
-            <a:pPr>
-              <a:lnSpc>
-                <a:spcPct val="115000"/>
-              </a:lnSpc>
-            </a:pPr>
-            <a:r>
-              <a:rPr sz="1271" b="1" i="0">
-                <a:solidFill>
-                  <a:srgbClr val="12162E"/>
-                </a:solidFill>
-                <a:latin typeface="Arial"/>
-              </a:rPr>
-              <a:t>$0.079</a:t>
-            </a:r>
-          </a:p>
-        </p:txBody>
-      </p:sp>
-      <p:sp>
-        <p:nvSpPr>
-          <p:cNvPr id="154" name="TextBox 153"/>
-          <p:cNvSpPr txBox="1"/>
-          <p:nvPr/>
-        </p:nvSpPr>
-        <p:spPr>
-          <a:xfrm>
-            <a:off x="5760000" y="15386738"/>
-            <a:ext cx="1418400" cy="504000"/>
-          </a:xfrm>
-          <a:prstGeom prst="rect">
-            <a:avLst/>
-          </a:prstGeom>
-          <a:noFill/>
-        </p:spPr>
-        <p:txBody>
-          <a:bodyPr wrap="square" lIns="0" rIns="0" tIns="0" bIns="0">
-            <a:spAutoFit/>
-          </a:bodyPr>
-          <a:lstStyle/>
-          <a:p>
-            <a:pPr>
-              <a:lnSpc>
-                <a:spcPct val="115000"/>
-              </a:lnSpc>
-            </a:pPr>
-            <a:r>
-              <a:rPr sz="1500" b="1" i="0">
-                <a:solidFill>
-                  <a:srgbClr val="C2352B"/>
-                </a:solidFill>
-                <a:latin typeface="Consolas"/>
-              </a:rPr>
-              <a:t>✗ </a:t>
-            </a:r>
-            <a:r>
-              <a:rPr sz="1271" b="0" i="0">
-                <a:solidFill>
-                  <a:srgbClr val="12162E"/>
-                </a:solidFill>
-                <a:latin typeface="Arial"/>
-              </a:rPr>
-              <a:t>6 steps</a:t>
-            </a:r>
-          </a:p>
-          <a:p>
-            <a:pPr>
-              <a:lnSpc>
-                <a:spcPct val="115000"/>
-              </a:lnSpc>
-            </a:pPr>
-            <a:r>
-              <a:rPr sz="1271" b="1" i="0">
-                <a:solidFill>
-                  <a:srgbClr val="12162E"/>
-                </a:solidFill>
-                <a:latin typeface="Arial"/>
-              </a:rPr>
-              <a:t>$0.029</a:t>
-            </a:r>
-          </a:p>
-        </p:txBody>
-      </p:sp>
-      <p:sp>
-        <p:nvSpPr>
-          <p:cNvPr id="155" name="Rectangle 154"/>
-          <p:cNvSpPr/>
-          <p:nvPr/>
-        </p:nvSpPr>
-        <p:spPr>
-          <a:xfrm>
-            <a:off x="727200" y="15962738"/>
-            <a:ext cx="6451200" cy="10800"/>
-          </a:xfrm>
-          <a:prstGeom prst="rect">
-            <a:avLst/>
-          </a:prstGeom>
-          <a:solidFill>
-            <a:srgbClr val="DDE3F2"/>
-          </a:solidFill>
-          <a:ln>
-            <a:noFill/>
-          </a:ln>
-          <a:effectLst/>
-        </p:spPr>
-        <p:style>
-          <a:lnRef idx="1">
-            <a:schemeClr val="accent1"/>
-          </a:lnRef>
-          <a:fillRef idx="3">
-            <a:schemeClr val="accent1"/>
-          </a:fillRef>
-          <a:effectRef idx="2">
-            <a:schemeClr val="accent1"/>
-          </a:effectRef>
-          <a:fontRef idx="minor">
-            <a:schemeClr val="lt1"/>
-          </a:fontRef>
-        </p:style>
-        <p:txBody>
-          <a:bodyPr rtlCol="0" anchor="ctr" wrap="square"/>
-          <a:lstStyle/>
-          <a:p>
-            <a:pPr algn="ctr"/>
-          </a:p>
-        </p:txBody>
-      </p:sp>
-      <p:sp>
-        <p:nvSpPr>
-          <p:cNvPr id="156" name="Rectangle 155"/>
-          <p:cNvSpPr/>
-          <p:nvPr/>
-        </p:nvSpPr>
-        <p:spPr>
-          <a:xfrm>
-            <a:off x="712800" y="16020338"/>
-            <a:ext cx="2044800" cy="973800"/>
-          </a:xfrm>
-          <a:prstGeom prst="rect">
-            <a:avLst/>
-          </a:prstGeom>
-          <a:noFill/>
-          <a:ln w="8890">
-            <a:solidFill>
-              <a:srgbClr val="C9CFE0"/>
-            </a:solidFill>
-          </a:ln>
-          <a:effectLst/>
-        </p:spPr>
-        <p:style>
-          <a:lnRef idx="1">
-            <a:schemeClr val="accent1"/>
-          </a:lnRef>
-          <a:fillRef idx="3">
-            <a:schemeClr val="accent1"/>
-          </a:fillRef>
-          <a:effectRef idx="2">
-            <a:schemeClr val="accent1"/>
-          </a:effectRef>
-          <a:fontRef idx="minor">
-            <a:schemeClr val="lt1"/>
-          </a:fontRef>
-        </p:style>
-        <p:txBody>
-          <a:bodyPr rtlCol="0" anchor="ctr" wrap="square"/>
-          <a:lstStyle/>
-          <a:p>
-            <a:pPr algn="ctr"/>
-          </a:p>
-        </p:txBody>
-      </p:sp>
-      <p:pic>
-        <p:nvPicPr>
-          <p:cNvPr id="157" name="Picture 156" descr="thumb_17.png"/>
-          <p:cNvPicPr>
-            <a:picLocks noChangeAspect="1"/>
-          </p:cNvPicPr>
-          <p:nvPr/>
-        </p:nvPicPr>
-        <p:blipFill>
           <a:blip r:embed="rId9"/>
-          <a:stretch>
-            <a:fillRect/>
-          </a:stretch>
-        </p:blipFill>
-        <p:spPr>
-          <a:xfrm>
-            <a:off x="727200" y="16034738"/>
-            <a:ext cx="2016000" cy="945000"/>
-          </a:xfrm>
-          <a:prstGeom prst="rect">
-            <a:avLst/>
-          </a:prstGeom>
-        </p:spPr>
-      </p:pic>
-      <p:sp>
-        <p:nvSpPr>
-          <p:cNvPr id="158" name="TextBox 157"/>
-          <p:cNvSpPr txBox="1"/>
-          <p:nvPr/>
-        </p:nvSpPr>
-        <p:spPr>
-          <a:xfrm>
-            <a:off x="2923200" y="16034738"/>
-            <a:ext cx="4255200" cy="511369"/>
-          </a:xfrm>
-          <a:prstGeom prst="rect">
-            <a:avLst/>
-          </a:prstGeom>
-          <a:noFill/>
-        </p:spPr>
-        <p:txBody>
-          <a:bodyPr wrap="square" lIns="0" rIns="0" tIns="0" bIns="0">
-            <a:spAutoFit/>
-          </a:bodyPr>
-          <a:lstStyle/>
-          <a:p>
-            <a:pPr algn="l">
-              <a:lnSpc>
-                <a:spcPct val="132000"/>
-              </a:lnSpc>
-              <a:spcAft>
-                <a:spcPts val="0"/>
-              </a:spcAft>
-            </a:pPr>
-            <a:r>
-              <a:rPr sz="1271" b="1" i="0">
-                <a:solidFill>
-                  <a:srgbClr val="12162E"/>
-                </a:solidFill>
-                <a:latin typeface="Arial"/>
-              </a:rPr>
-              <a:t>“Show me the cheapest bike with red handlebars between $900-950.”</a:t>
-            </a:r>
-          </a:p>
-        </p:txBody>
-      </p:sp>
-      <p:sp>
-        <p:nvSpPr>
-          <p:cNvPr id="159" name="TextBox 158"/>
-          <p:cNvSpPr txBox="1"/>
-          <p:nvPr/>
-        </p:nvSpPr>
-        <p:spPr>
-          <a:xfrm>
-            <a:off x="2923200" y="16618107"/>
-            <a:ext cx="1418400" cy="504000"/>
-          </a:xfrm>
-          <a:prstGeom prst="rect">
-            <a:avLst/>
-          </a:prstGeom>
-          <a:noFill/>
-        </p:spPr>
-        <p:txBody>
-          <a:bodyPr wrap="square" lIns="0" rIns="0" tIns="0" bIns="0">
-            <a:spAutoFit/>
-          </a:bodyPr>
-          <a:lstStyle/>
-          <a:p>
-            <a:pPr>
-              <a:lnSpc>
-                <a:spcPct val="115000"/>
-              </a:lnSpc>
-            </a:pPr>
-            <a:r>
-              <a:rPr sz="1500" b="1" i="0">
-                <a:solidFill>
-                  <a:srgbClr val="C2352B"/>
-                </a:solidFill>
-                <a:latin typeface="Consolas"/>
-              </a:rPr>
-              <a:t>✗ </a:t>
-            </a:r>
-            <a:r>
-              <a:rPr sz="1271" b="0" i="0">
-                <a:solidFill>
-                  <a:srgbClr val="12162E"/>
-                </a:solidFill>
-                <a:latin typeface="Arial"/>
-              </a:rPr>
-              <a:t>19 steps</a:t>
-            </a:r>
-          </a:p>
-          <a:p>
-            <a:pPr>
-              <a:lnSpc>
-                <a:spcPct val="115000"/>
-              </a:lnSpc>
-            </a:pPr>
-            <a:r>
-              <a:rPr sz="1271" b="1" i="0">
-                <a:solidFill>
-                  <a:srgbClr val="12162E"/>
-                </a:solidFill>
-                <a:latin typeface="Arial"/>
-              </a:rPr>
-              <a:t>$0.075</a:t>
-            </a:r>
-          </a:p>
-        </p:txBody>
-      </p:sp>
-      <p:sp>
-        <p:nvSpPr>
-          <p:cNvPr id="160" name="TextBox 159"/>
-          <p:cNvSpPr txBox="1"/>
-          <p:nvPr/>
-        </p:nvSpPr>
-        <p:spPr>
-          <a:xfrm>
-            <a:off x="4341600" y="16618107"/>
-            <a:ext cx="1418400" cy="504000"/>
-          </a:xfrm>
-          <a:prstGeom prst="rect">
-            <a:avLst/>
-          </a:prstGeom>
-          <a:noFill/>
-        </p:spPr>
-        <p:txBody>
-          <a:bodyPr wrap="square" lIns="0" rIns="0" tIns="0" bIns="0">
-            <a:spAutoFit/>
-          </a:bodyPr>
-          <a:lstStyle/>
-          <a:p>
-            <a:pPr>
-              <a:lnSpc>
-                <a:spcPct val="115000"/>
-              </a:lnSpc>
-            </a:pPr>
-            <a:r>
-              <a:rPr sz="1500" b="1" i="0">
-                <a:solidFill>
-                  <a:srgbClr val="C2352B"/>
-                </a:solidFill>
-                <a:latin typeface="Consolas"/>
-              </a:rPr>
-              <a:t>✗ </a:t>
-            </a:r>
-            <a:r>
-              <a:rPr sz="1271" b="0" i="0">
-                <a:solidFill>
-                  <a:srgbClr val="12162E"/>
-                </a:solidFill>
-                <a:latin typeface="Arial"/>
-              </a:rPr>
-              <a:t>6 steps</a:t>
-            </a:r>
-          </a:p>
-          <a:p>
-            <a:pPr>
-              <a:lnSpc>
-                <a:spcPct val="115000"/>
-              </a:lnSpc>
-            </a:pPr>
-            <a:r>
-              <a:rPr sz="1271" b="1" i="0">
-                <a:solidFill>
-                  <a:srgbClr val="12162E"/>
-                </a:solidFill>
-                <a:latin typeface="Arial"/>
-              </a:rPr>
-              <a:t>$0.025</a:t>
-            </a:r>
-          </a:p>
-        </p:txBody>
-      </p:sp>
-      <p:sp>
-        <p:nvSpPr>
-          <p:cNvPr id="161" name="TextBox 160"/>
-          <p:cNvSpPr txBox="1"/>
-          <p:nvPr/>
-        </p:nvSpPr>
-        <p:spPr>
-          <a:xfrm>
-            <a:off x="5760000" y="16618107"/>
-            <a:ext cx="1418400" cy="504000"/>
-          </a:xfrm>
-          <a:prstGeom prst="rect">
-            <a:avLst/>
-          </a:prstGeom>
-          <a:noFill/>
-        </p:spPr>
-        <p:txBody>
-          <a:bodyPr wrap="square" lIns="0" rIns="0" tIns="0" bIns="0">
-            <a:spAutoFit/>
-          </a:bodyPr>
-          <a:lstStyle/>
-          <a:p>
-            <a:pPr>
-              <a:lnSpc>
-                <a:spcPct val="115000"/>
-              </a:lnSpc>
-            </a:pPr>
-            <a:r>
-              <a:rPr sz="1500" b="1" i="0">
-                <a:solidFill>
-                  <a:srgbClr val="14855F"/>
-                </a:solidFill>
-                <a:latin typeface="Consolas"/>
-              </a:rPr>
-              <a:t>✓ </a:t>
-            </a:r>
-            <a:r>
-              <a:rPr sz="1271" b="0" i="0">
-                <a:solidFill>
-                  <a:srgbClr val="12162E"/>
-                </a:solidFill>
-                <a:latin typeface="Arial"/>
-              </a:rPr>
-              <a:t>7 steps</a:t>
-            </a:r>
-          </a:p>
-          <a:p>
-            <a:pPr>
-              <a:lnSpc>
-                <a:spcPct val="115000"/>
-              </a:lnSpc>
-            </a:pPr>
-            <a:r>
-              <a:rPr sz="1271" b="1" i="0">
-                <a:solidFill>
-                  <a:srgbClr val="12162E"/>
-                </a:solidFill>
-                <a:latin typeface="Arial"/>
-              </a:rPr>
-              <a:t>$0.037</a:t>
-            </a:r>
-          </a:p>
-        </p:txBody>
-      </p:sp>
-      <p:sp>
-        <p:nvSpPr>
-          <p:cNvPr id="162" name="Rectangle 161"/>
-          <p:cNvSpPr/>
-          <p:nvPr/>
-        </p:nvSpPr>
-        <p:spPr>
-          <a:xfrm>
-            <a:off x="727200" y="17194107"/>
-            <a:ext cx="6451200" cy="10800"/>
-          </a:xfrm>
-          <a:prstGeom prst="rect">
-            <a:avLst/>
-          </a:prstGeom>
-          <a:solidFill>
-            <a:srgbClr val="DDE3F2"/>
-          </a:solidFill>
-          <a:ln>
-            <a:noFill/>
-          </a:ln>
-          <a:effectLst/>
-        </p:spPr>
-        <p:style>
-          <a:lnRef idx="1">
-            <a:schemeClr val="accent1"/>
-          </a:lnRef>
-          <a:fillRef idx="3">
-            <a:schemeClr val="accent1"/>
-          </a:fillRef>
-          <a:effectRef idx="2">
-            <a:schemeClr val="accent1"/>
-          </a:effectRef>
-          <a:fontRef idx="minor">
-            <a:schemeClr val="lt1"/>
-          </a:fontRef>
-        </p:style>
-        <p:txBody>
-          <a:bodyPr rtlCol="0" anchor="ctr" wrap="square"/>
-          <a:lstStyle/>
-          <a:p>
-            <a:pPr algn="ctr"/>
-          </a:p>
-        </p:txBody>
-      </p:sp>
-      <p:sp>
-        <p:nvSpPr>
-          <p:cNvPr id="163" name="TextBox 162"/>
-          <p:cNvSpPr txBox="1"/>
-          <p:nvPr/>
-        </p:nvSpPr>
-        <p:spPr>
-          <a:xfrm>
-            <a:off x="727200" y="17302107"/>
-            <a:ext cx="6451200" cy="767053"/>
-          </a:xfrm>
-          <a:prstGeom prst="rect">
-            <a:avLst/>
-          </a:prstGeom>
-          <a:noFill/>
-        </p:spPr>
-        <p:txBody>
-          <a:bodyPr wrap="square" lIns="0" rIns="0" tIns="0" bIns="0">
-            <a:spAutoFit/>
-          </a:bodyPr>
-          <a:lstStyle/>
-          <a:p>
-            <a:pPr algn="l">
-              <a:lnSpc>
-                <a:spcPct val="132000"/>
-              </a:lnSpc>
-              <a:spcAft>
-                <a:spcPts val="425"/>
-              </a:spcAft>
-            </a:pPr>
-            <a:r>
-              <a:rPr sz="1271" b="0" i="0">
-                <a:solidFill>
-                  <a:srgbClr val="5D6787"/>
-                </a:solidFill>
-                <a:latin typeface="Arial"/>
-              </a:rPr>
-              <a:t>One recorded attempt per way of seeing, B0 · classifieds. Every ✓ / ✗ came out the same on an independent rerun; steps and bill differ run to run — across all tasks a rerun flips 10–14% of outcomes.</a:t>
-            </a:r>
-          </a:p>
-        </p:txBody>
-      </p:sp>
-      <p:sp>
-        <p:nvSpPr>
-          <p:cNvPr id="14" name="Rectangle 13"/>
-          <p:cNvSpPr/>
-          <p:nvPr/>
-        </p:nvSpPr>
-        <p:spPr>
-          <a:xfrm>
-            <a:off x="727200" y="18357160"/>
-            <a:ext cx="177988" cy="177988"/>
-          </a:xfrm>
-          <a:prstGeom prst="rect">
-            <a:avLst/>
-          </a:prstGeom>
-          <a:solidFill>
-            <a:srgbClr val="AB5FCE"/>
-          </a:solidFill>
-          <a:ln>
-            <a:noFill/>
-          </a:ln>
-          <a:effectLst/>
-        </p:spPr>
-        <p:style>
-          <a:lnRef idx="1">
-            <a:schemeClr val="accent1"/>
-          </a:lnRef>
-          <a:fillRef idx="3">
-            <a:schemeClr val="accent1"/>
-          </a:fillRef>
-          <a:effectRef idx="2">
-            <a:schemeClr val="accent1"/>
-          </a:effectRef>
-          <a:fontRef idx="minor">
-            <a:schemeClr val="lt1"/>
-          </a:fontRef>
-        </p:style>
-        <p:txBody>
-          <a:bodyPr rtlCol="0" anchor="ctr"/>
-          <a:lstStyle/>
-          <a:p>
-            <a:pPr algn="ctr"/>
-            <a:endParaRPr/>
-          </a:p>
-        </p:txBody>
-      </p:sp>
-      <p:sp>
-        <p:nvSpPr>
-          <p:cNvPr id="15" name="TextBox 14"/>
-          <p:cNvSpPr txBox="1"/>
-          <p:nvPr/>
-        </p:nvSpPr>
-        <p:spPr>
-          <a:xfrm>
-            <a:off x="1032323" y="18313960"/>
-            <a:ext cx="6144827" cy="238912"/>
-          </a:xfrm>
-          <a:prstGeom prst="rect">
-            <a:avLst/>
-          </a:prstGeom>
-          <a:noFill/>
-        </p:spPr>
-        <p:txBody>
-          <a:bodyPr wrap="square" lIns="0" tIns="0" rIns="0" bIns="0" anchor="t">
-            <a:spAutoFit/>
-          </a:bodyPr>
-          <a:lstStyle/>
-          <a:p>
-            <a:pPr algn="l">
-              <a:lnSpc>
-                <a:spcPct val="118000"/>
-              </a:lnSpc>
-            </a:pPr>
-            <a:r>
-              <a:rPr sz="1412" b="1" i="0">
-                <a:solidFill>
-                  <a:srgbClr val="141E41"/>
-                </a:solidFill>
-                <a:latin typeface="Consolas"/>
-              </a:rPr>
-              <a:t>WHY IT CANNOT BE LEARNED</a:t>
-            </a:r>
-            <a:endParaRPr sz="1412" b="1" spc="180" dirty="0">
-              <a:solidFill>
-                <a:srgbClr val="141E41"/>
-              </a:solidFill>
-              <a:latin typeface="Consolas"/>
-            </a:endParaRPr>
-          </a:p>
-        </p:txBody>
-      </p:sp>
-      <p:sp>
-        <p:nvSpPr>
-          <p:cNvPr id="16" name="Rectangle 15"/>
-          <p:cNvSpPr/>
-          <p:nvPr/>
-        </p:nvSpPr>
-        <p:spPr>
-          <a:xfrm>
-            <a:off x="727200" y="18674996"/>
-            <a:ext cx="1169636" cy="35597"/>
-          </a:xfrm>
-          <a:prstGeom prst="rect">
-            <a:avLst/>
-          </a:prstGeom>
-          <a:solidFill>
-            <a:srgbClr val="141E41"/>
-          </a:solidFill>
-          <a:ln>
-            <a:noFill/>
-          </a:ln>
-          <a:effectLst/>
-        </p:spPr>
-        <p:style>
-          <a:lnRef idx="1">
-            <a:schemeClr val="accent1"/>
-          </a:lnRef>
-          <a:fillRef idx="3">
-            <a:schemeClr val="accent1"/>
-          </a:fillRef>
-          <a:effectRef idx="2">
-            <a:schemeClr val="accent1"/>
-          </a:effectRef>
-          <a:fontRef idx="minor">
-            <a:schemeClr val="lt1"/>
-          </a:fontRef>
-        </p:style>
-        <p:txBody>
-          <a:bodyPr rtlCol="0" anchor="ctr"/>
-          <a:lstStyle/>
-          <a:p>
-            <a:pPr algn="ctr"/>
-            <a:endParaRPr/>
-          </a:p>
-        </p:txBody>
-      </p:sp>
-      <p:sp>
-        <p:nvSpPr>
-          <p:cNvPr id="17" name="Rectangle 16"/>
-          <p:cNvSpPr/>
-          <p:nvPr/>
-        </p:nvSpPr>
-        <p:spPr>
-          <a:xfrm>
-            <a:off x="1896836" y="18685167"/>
-            <a:ext cx="5281564" cy="15256"/>
-          </a:xfrm>
-          <a:prstGeom prst="rect">
-            <a:avLst/>
-          </a:prstGeom>
-          <a:solidFill>
-            <a:srgbClr val="DDE3F2"/>
-          </a:solidFill>
-          <a:ln>
-            <a:noFill/>
-          </a:ln>
-          <a:effectLst/>
-        </p:spPr>
-        <p:style>
-          <a:lnRef idx="1">
-            <a:schemeClr val="accent1"/>
-          </a:lnRef>
-          <a:fillRef idx="3">
-            <a:schemeClr val="accent1"/>
-          </a:fillRef>
-          <a:effectRef idx="2">
-            <a:schemeClr val="accent1"/>
-          </a:effectRef>
-          <a:fontRef idx="minor">
-            <a:schemeClr val="lt1"/>
-          </a:fontRef>
-        </p:style>
-        <p:txBody>
-          <a:bodyPr rtlCol="0" anchor="ctr"/>
-          <a:lstStyle/>
-          <a:p>
-            <a:pPr algn="ctr"/>
-            <a:endParaRPr/>
-          </a:p>
-        </p:txBody>
-      </p:sp>
-      <p:sp>
-        <p:nvSpPr>
-          <p:cNvPr id="164" name="TextBox 163"/>
-          <p:cNvSpPr txBox="1"/>
-          <p:nvPr/>
-        </p:nvSpPr>
-        <p:spPr>
-          <a:xfrm>
-            <a:off x="727200" y="18897160"/>
-            <a:ext cx="6451200" cy="4125381"/>
-          </a:xfrm>
-          <a:prstGeom prst="rect">
-            <a:avLst/>
-          </a:prstGeom>
-          <a:noFill/>
-        </p:spPr>
-        <p:txBody>
-          <a:bodyPr wrap="square" lIns="0" rIns="0" tIns="0" bIns="0">
-            <a:spAutoFit/>
-          </a:bodyPr>
-          <a:lstStyle/>
-          <a:p>
-            <a:pPr algn="l">
-              <a:lnSpc>
-                <a:spcPct val="120000"/>
-              </a:lnSpc>
-              <a:spcAft>
-                <a:spcPts val="992"/>
-              </a:spcAft>
-            </a:pPr>
-            <a:r>
-              <a:rPr sz="1764" b="0" i="0">
-                <a:solidFill>
-                  <a:srgbClr val="12162E"/>
-                </a:solidFill>
-                <a:latin typeface="Arial"/>
-              </a:rPr>
-              <a:t>A training example for “which way of seeing” exists only when the agent solves a task. Here the best single way solves just </a:t>
-            </a:r>
-            <a:r>
-              <a:rPr sz="1764" b="1" i="0">
-                <a:solidFill>
-                  <a:srgbClr val="12162E"/>
-                </a:solidFill>
-                <a:latin typeface="Arial"/>
-              </a:rPr>
-              <a:t>2–36%</a:t>
-            </a:r>
-            <a:r>
-              <a:rPr sz="1764" b="0" i="0">
-                <a:solidFill>
-                  <a:srgbClr val="12162E"/>
-                </a:solidFill>
-                <a:latin typeface="Arial"/>
-              </a:rPr>
-              <a:t> of tasks, leaving typically </a:t>
-            </a:r>
-            <a:r>
-              <a:rPr sz="1764" b="1" i="0">
-                <a:solidFill>
-                  <a:srgbClr val="12162E"/>
-                </a:solidFill>
-                <a:latin typeface="Arial"/>
-              </a:rPr>
-              <a:t>15–97</a:t>
-            </a:r>
-            <a:r>
-              <a:rPr sz="1764" b="0" i="0">
-                <a:solidFill>
-                  <a:srgbClr val="12162E"/>
-                </a:solidFill>
-                <a:latin typeface="Arial"/>
-              </a:rPr>
-              <a:t> usable examples per setting — </a:t>
-            </a:r>
-            <a:r>
-              <a:rPr sz="1764" b="1" i="0">
-                <a:solidFill>
-                  <a:srgbClr val="12162E"/>
-                </a:solidFill>
-                <a:latin typeface="Arial"/>
-              </a:rPr>
-              <a:t>the agents that would gain most from choosing produce the fewest examples to learn from.</a:t>
-            </a:r>
-          </a:p>
-          <a:p>
-            <a:pPr algn="l">
-              <a:lnSpc>
-                <a:spcPct val="120000"/>
-              </a:lnSpc>
-              <a:spcAft>
-                <a:spcPts val="992"/>
-              </a:spcAft>
-            </a:pPr>
-            <a:r>
-              <a:rPr sz="1764" b="0" i="0">
-                <a:solidFill>
-                  <a:srgbClr val="12162E"/>
-                </a:solidFill>
-                <a:latin typeface="Arial"/>
-              </a:rPr>
-              <a:t>Shrinking the training data on purpose confirms scarcity is the mechanism, and prices it: the failing settings would need at least </a:t>
-            </a:r>
-            <a:r>
-              <a:rPr sz="1764" b="1" i="0">
-                <a:solidFill>
-                  <a:srgbClr val="12162E"/>
-                </a:solidFill>
-                <a:latin typeface="Arial"/>
-              </a:rPr>
-              <a:t>2.1–4.2×</a:t>
-            </a:r>
-            <a:r>
-              <a:rPr sz="1764" b="0" i="0">
-                <a:solidFill>
-                  <a:srgbClr val="12162E"/>
-                </a:solidFill>
-                <a:latin typeface="Arial"/>
-              </a:rPr>
-              <a:t> more tasks than the benchmarks contain.</a:t>
-            </a:r>
-          </a:p>
-          <a:p>
-            <a:pPr algn="l">
-              <a:lnSpc>
-                <a:spcPct val="120000"/>
-              </a:lnSpc>
-              <a:spcAft>
-                <a:spcPts val="992"/>
-              </a:spcAft>
-            </a:pPr>
-            <a:r>
-              <a:rPr sz="1764" b="0" i="0">
-                <a:solidFill>
-                  <a:srgbClr val="12162E"/>
-                </a:solidFill>
-                <a:latin typeface="Arial"/>
-              </a:rPr>
-              <a:t>Rerunning </a:t>
-            </a:r>
-            <a:r>
-              <a:rPr sz="1764" b="1" i="0">
-                <a:solidFill>
-                  <a:srgbClr val="12162E"/>
-                </a:solidFill>
-                <a:latin typeface="Arial"/>
-              </a:rPr>
-              <a:t>one unchanged way of seeing</a:t>
-            </a:r>
-            <a:r>
-              <a:rPr sz="1764" b="0" i="0">
-                <a:solidFill>
-                  <a:srgbClr val="12162E"/>
-                </a:solidFill>
-                <a:latin typeface="Arial"/>
-              </a:rPr>
-              <a:t> flips </a:t>
-            </a:r>
-            <a:r>
-              <a:rPr sz="1764" b="1" i="0">
-                <a:solidFill>
-                  <a:srgbClr val="12162E"/>
-                </a:solidFill>
-                <a:latin typeface="Arial"/>
-              </a:rPr>
-              <a:t>10–14%</a:t>
-            </a:r>
-            <a:r>
-              <a:rPr sz="1764" b="0" i="0">
-                <a:solidFill>
-                  <a:srgbClr val="12162E"/>
-                </a:solidFill>
-                <a:latin typeface="Arial"/>
-              </a:rPr>
-              <a:t> of outcomes and by itself buys </a:t>
-            </a:r>
-            <a:r>
-              <a:rPr sz="1764" b="1" i="0">
-                <a:solidFill>
-                  <a:srgbClr val="12162E"/>
-                </a:solidFill>
-                <a:latin typeface="Arial"/>
-              </a:rPr>
-              <a:t>2.0–7.6</a:t>
-            </a:r>
-            <a:r>
-              <a:rPr sz="1764" b="0" i="0">
-                <a:solidFill>
-                  <a:srgbClr val="12162E"/>
-                </a:solidFill>
-                <a:latin typeface="Arial"/>
-              </a:rPr>
-              <a:t> more solved tasks in 100 (B0 · classifieds, six repeated ways, n=224); every gain on this sheet is read against that band, not against zero.</a:t>
-            </a:r>
-          </a:p>
-        </p:txBody>
-      </p:sp>
-      <p:sp>
-        <p:nvSpPr>
-          <p:cNvPr id="14" name="Rectangle 13"/>
-          <p:cNvSpPr/>
-          <p:nvPr/>
-        </p:nvSpPr>
-        <p:spPr>
-          <a:xfrm>
-            <a:off x="727200" y="23274541"/>
-            <a:ext cx="177988" cy="177988"/>
-          </a:xfrm>
-          <a:prstGeom prst="rect">
-            <a:avLst/>
-          </a:prstGeom>
-          <a:solidFill>
-            <a:srgbClr val="AB5FCE"/>
-          </a:solidFill>
-          <a:ln>
-            <a:noFill/>
-          </a:ln>
-          <a:effectLst/>
-        </p:spPr>
-        <p:style>
-          <a:lnRef idx="1">
-            <a:schemeClr val="accent1"/>
-          </a:lnRef>
-          <a:fillRef idx="3">
-            <a:schemeClr val="accent1"/>
-          </a:fillRef>
-          <a:effectRef idx="2">
-            <a:schemeClr val="accent1"/>
-          </a:effectRef>
-          <a:fontRef idx="minor">
-            <a:schemeClr val="lt1"/>
-          </a:fontRef>
-        </p:style>
-        <p:txBody>
-          <a:bodyPr rtlCol="0" anchor="ctr"/>
-          <a:lstStyle/>
-          <a:p>
-            <a:pPr algn="ctr"/>
-            <a:endParaRPr/>
-          </a:p>
-        </p:txBody>
-      </p:sp>
-      <p:sp>
-        <p:nvSpPr>
-          <p:cNvPr id="15" name="TextBox 14"/>
-          <p:cNvSpPr txBox="1"/>
-          <p:nvPr/>
-        </p:nvSpPr>
-        <p:spPr>
-          <a:xfrm>
-            <a:off x="1032323" y="23231341"/>
-            <a:ext cx="6144827" cy="238912"/>
-          </a:xfrm>
-          <a:prstGeom prst="rect">
-            <a:avLst/>
-          </a:prstGeom>
-          <a:noFill/>
-        </p:spPr>
-        <p:txBody>
-          <a:bodyPr wrap="square" lIns="0" tIns="0" rIns="0" bIns="0" anchor="t">
-            <a:spAutoFit/>
-          </a:bodyPr>
-          <a:lstStyle/>
-          <a:p>
-            <a:pPr algn="l">
-              <a:lnSpc>
-                <a:spcPct val="118000"/>
-              </a:lnSpc>
-            </a:pPr>
-            <a:r>
-              <a:rPr sz="1412" b="1" i="0">
-                <a:solidFill>
-                  <a:srgbClr val="141E41"/>
-                </a:solidFill>
-                <a:latin typeface="Consolas"/>
-              </a:rPr>
-              <a:t>TAKEAWAY</a:t>
-            </a:r>
-            <a:endParaRPr sz="1412" b="1" spc="180" dirty="0">
-              <a:solidFill>
-                <a:srgbClr val="141E41"/>
-              </a:solidFill>
-              <a:latin typeface="Consolas"/>
-            </a:endParaRPr>
-          </a:p>
-        </p:txBody>
-      </p:sp>
-      <p:sp>
-        <p:nvSpPr>
-          <p:cNvPr id="16" name="Rectangle 15"/>
-          <p:cNvSpPr/>
-          <p:nvPr/>
-        </p:nvSpPr>
-        <p:spPr>
-          <a:xfrm>
-            <a:off x="727200" y="23592377"/>
-            <a:ext cx="1169636" cy="35597"/>
-          </a:xfrm>
-          <a:prstGeom prst="rect">
-            <a:avLst/>
-          </a:prstGeom>
-          <a:solidFill>
-            <a:srgbClr val="141E41"/>
-          </a:solidFill>
-          <a:ln>
-            <a:noFill/>
-          </a:ln>
-          <a:effectLst/>
-        </p:spPr>
-        <p:style>
-          <a:lnRef idx="1">
-            <a:schemeClr val="accent1"/>
-          </a:lnRef>
-          <a:fillRef idx="3">
-            <a:schemeClr val="accent1"/>
-          </a:fillRef>
-          <a:effectRef idx="2">
-            <a:schemeClr val="accent1"/>
-          </a:effectRef>
-          <a:fontRef idx="minor">
-            <a:schemeClr val="lt1"/>
-          </a:fontRef>
-        </p:style>
-        <p:txBody>
-          <a:bodyPr rtlCol="0" anchor="ctr"/>
-          <a:lstStyle/>
-          <a:p>
-            <a:pPr algn="ctr"/>
-            <a:endParaRPr/>
-          </a:p>
-        </p:txBody>
-      </p:sp>
-      <p:sp>
-        <p:nvSpPr>
-          <p:cNvPr id="17" name="Rectangle 16"/>
-          <p:cNvSpPr/>
-          <p:nvPr/>
-        </p:nvSpPr>
-        <p:spPr>
-          <a:xfrm>
-            <a:off x="1896836" y="23602548"/>
-            <a:ext cx="5281564" cy="15256"/>
-          </a:xfrm>
-          <a:prstGeom prst="rect">
-            <a:avLst/>
-          </a:prstGeom>
-          <a:solidFill>
-            <a:srgbClr val="DDE3F2"/>
-          </a:solidFill>
-          <a:ln>
-            <a:noFill/>
-          </a:ln>
-          <a:effectLst/>
-        </p:spPr>
-        <p:style>
-          <a:lnRef idx="1">
-            <a:schemeClr val="accent1"/>
-          </a:lnRef>
-          <a:fillRef idx="3">
-            <a:schemeClr val="accent1"/>
-          </a:fillRef>
-          <a:effectRef idx="2">
-            <a:schemeClr val="accent1"/>
-          </a:effectRef>
-          <a:fontRef idx="minor">
-            <a:schemeClr val="lt1"/>
-          </a:fontRef>
-        </p:style>
-        <p:txBody>
-          <a:bodyPr rtlCol="0" anchor="ctr"/>
-          <a:lstStyle/>
-          <a:p>
-            <a:pPr algn="ctr"/>
-            <a:endParaRPr/>
-          </a:p>
-        </p:txBody>
-      </p:sp>
-      <p:sp>
-        <p:nvSpPr>
-          <p:cNvPr id="165" name="TextBox 164"/>
-          <p:cNvSpPr txBox="1"/>
-          <p:nvPr/>
-        </p:nvSpPr>
-        <p:spPr>
-          <a:xfrm>
-            <a:off x="727200" y="23814541"/>
-            <a:ext cx="6451200" cy="1613908"/>
-          </a:xfrm>
-          <a:prstGeom prst="rect">
-            <a:avLst/>
-          </a:prstGeom>
-          <a:noFill/>
-        </p:spPr>
-        <p:txBody>
-          <a:bodyPr wrap="square" lIns="0" rIns="0" tIns="0" bIns="0">
-            <a:spAutoFit/>
-          </a:bodyPr>
-          <a:lstStyle/>
-          <a:p>
-            <a:pPr algn="l">
-              <a:lnSpc>
-                <a:spcPct val="120000"/>
-              </a:lnSpc>
-              <a:spcAft>
-                <a:spcPts val="992"/>
-              </a:spcAft>
-            </a:pPr>
-            <a:r>
-              <a:rPr sz="1764" b="1" i="0">
-                <a:solidFill>
-                  <a:srgbClr val="12162E"/>
-                </a:solidFill>
-                <a:latin typeface="Arial"/>
-              </a:rPr>
-              <a:t>Learning how to see is not only a modelling problem: whether it can be learned depends on how good the agent producing the examples already is.</a:t>
-            </a:r>
-            <a:r>
-              <a:rPr sz="1764" b="0" i="0">
-                <a:solidFill>
-                  <a:srgbClr val="12162E"/>
-                </a:solidFill>
-                <a:latin typeface="Arial"/>
-              </a:rPr>
-              <a:t> So, in this order: improve the agent, then collect reliable examples, then learn when to look.</a:t>
-            </a:r>
-          </a:p>
-        </p:txBody>
-      </p:sp>
-      <p:sp>
-        <p:nvSpPr>
-          <p:cNvPr id="166" name="TextBox 165"/>
-          <p:cNvSpPr txBox="1"/>
-          <p:nvPr/>
-        </p:nvSpPr>
-        <p:spPr>
-          <a:xfrm>
-            <a:off x="727200" y="25482449"/>
-            <a:ext cx="6451200" cy="511369"/>
-          </a:xfrm>
-          <a:prstGeom prst="rect">
-            <a:avLst/>
-          </a:prstGeom>
-          <a:noFill/>
-        </p:spPr>
-        <p:txBody>
-          <a:bodyPr wrap="square" lIns="0" rIns="0" tIns="0" bIns="0">
-            <a:spAutoFit/>
-          </a:bodyPr>
-          <a:lstStyle/>
-          <a:p>
-            <a:pPr algn="l">
-              <a:lnSpc>
-                <a:spcPct val="132000"/>
-              </a:lnSpc>
-              <a:spcAft>
-                <a:spcPts val="425"/>
-              </a:spcAft>
-            </a:pPr>
-            <a:r>
-              <a:rPr sz="1271" b="0" i="0">
-                <a:solidFill>
-                  <a:srgbClr val="5D6787"/>
-                </a:solidFill>
-                <a:latin typeface="Arial"/>
-              </a:rPr>
-              <a:t>Measured in the 2–36% success regime we observed. This need not hold for stronger agents.</a:t>
-            </a:r>
-          </a:p>
-        </p:txBody>
-      </p:sp>
-      <p:sp>
-        <p:nvSpPr>
-          <p:cNvPr id="14" name="Rectangle 13"/>
-          <p:cNvSpPr/>
-          <p:nvPr/>
-        </p:nvSpPr>
-        <p:spPr>
-          <a:xfrm>
-            <a:off x="7534800" y="12672000"/>
-            <a:ext cx="177988" cy="177988"/>
-          </a:xfrm>
-          <a:prstGeom prst="rect">
-            <a:avLst/>
-          </a:prstGeom>
-          <a:solidFill>
-            <a:srgbClr val="AB5FCE"/>
-          </a:solidFill>
-          <a:ln>
-            <a:noFill/>
-          </a:ln>
-          <a:effectLst/>
-        </p:spPr>
-        <p:style>
-          <a:lnRef idx="1">
-            <a:schemeClr val="accent1"/>
-          </a:lnRef>
-          <a:fillRef idx="3">
-            <a:schemeClr val="accent1"/>
-          </a:fillRef>
-          <a:effectRef idx="2">
-            <a:schemeClr val="accent1"/>
-          </a:effectRef>
-          <a:fontRef idx="minor">
-            <a:schemeClr val="lt1"/>
-          </a:fontRef>
-        </p:style>
-        <p:txBody>
-          <a:bodyPr rtlCol="0" anchor="ctr"/>
-          <a:lstStyle/>
-          <a:p>
-            <a:pPr algn="ctr"/>
-            <a:endParaRPr/>
-          </a:p>
-        </p:txBody>
-      </p:sp>
-      <p:sp>
-        <p:nvSpPr>
-          <p:cNvPr id="15" name="TextBox 14"/>
-          <p:cNvSpPr txBox="1"/>
-          <p:nvPr/>
-        </p:nvSpPr>
-        <p:spPr>
-          <a:xfrm>
-            <a:off x="7839923" y="12628800"/>
-            <a:ext cx="6144827" cy="238912"/>
-          </a:xfrm>
-          <a:prstGeom prst="rect">
-            <a:avLst/>
-          </a:prstGeom>
-          <a:noFill/>
-        </p:spPr>
-        <p:txBody>
-          <a:bodyPr wrap="square" lIns="0" tIns="0" rIns="0" bIns="0" anchor="t">
-            <a:spAutoFit/>
-          </a:bodyPr>
-          <a:lstStyle/>
-          <a:p>
-            <a:pPr algn="l">
-              <a:lnSpc>
-                <a:spcPct val="118000"/>
-              </a:lnSpc>
-            </a:pPr>
-            <a:r>
-              <a:rPr sz="1412" b="1" i="0">
-                <a:solidFill>
-                  <a:srgbClr val="141E41"/>
-                </a:solidFill>
-                <a:latin typeface="Consolas"/>
-              </a:rPr>
-              <a:t>RESULTS ACROSS 8,934 TASK ATTEMPTS</a:t>
-            </a:r>
-            <a:endParaRPr sz="1412" b="1" spc="180" dirty="0">
-              <a:solidFill>
-                <a:srgbClr val="141E41"/>
-              </a:solidFill>
-              <a:latin typeface="Consolas"/>
-            </a:endParaRPr>
-          </a:p>
-        </p:txBody>
-      </p:sp>
-      <p:sp>
-        <p:nvSpPr>
-          <p:cNvPr id="16" name="Rectangle 15"/>
-          <p:cNvSpPr/>
-          <p:nvPr/>
-        </p:nvSpPr>
-        <p:spPr>
-          <a:xfrm>
-            <a:off x="7534800" y="12989836"/>
-            <a:ext cx="1169636" cy="35597"/>
-          </a:xfrm>
-          <a:prstGeom prst="rect">
-            <a:avLst/>
-          </a:prstGeom>
-          <a:solidFill>
-            <a:srgbClr val="141E41"/>
-          </a:solidFill>
-          <a:ln>
-            <a:noFill/>
-          </a:ln>
-          <a:effectLst/>
-        </p:spPr>
-        <p:style>
-          <a:lnRef idx="1">
-            <a:schemeClr val="accent1"/>
-          </a:lnRef>
-          <a:fillRef idx="3">
-            <a:schemeClr val="accent1"/>
-          </a:fillRef>
-          <a:effectRef idx="2">
-            <a:schemeClr val="accent1"/>
-          </a:effectRef>
-          <a:fontRef idx="minor">
-            <a:schemeClr val="lt1"/>
-          </a:fontRef>
-        </p:style>
-        <p:txBody>
-          <a:bodyPr rtlCol="0" anchor="ctr"/>
-          <a:lstStyle/>
-          <a:p>
-            <a:pPr algn="ctr"/>
-            <a:endParaRPr/>
-          </a:p>
-        </p:txBody>
-      </p:sp>
-      <p:sp>
-        <p:nvSpPr>
-          <p:cNvPr id="17" name="Rectangle 16"/>
-          <p:cNvSpPr/>
-          <p:nvPr/>
-        </p:nvSpPr>
-        <p:spPr>
-          <a:xfrm>
-            <a:off x="8704436" y="13000007"/>
-            <a:ext cx="12085564" cy="15256"/>
-          </a:xfrm>
-          <a:prstGeom prst="rect">
-            <a:avLst/>
-          </a:prstGeom>
-          <a:solidFill>
-            <a:srgbClr val="DDE3F2"/>
-          </a:solidFill>
-          <a:ln>
-            <a:noFill/>
-          </a:ln>
-          <a:effectLst/>
-        </p:spPr>
-        <p:style>
-          <a:lnRef idx="1">
-            <a:schemeClr val="accent1"/>
-          </a:lnRef>
-          <a:fillRef idx="3">
-            <a:schemeClr val="accent1"/>
-          </a:fillRef>
-          <a:effectRef idx="2">
-            <a:schemeClr val="accent1"/>
-          </a:effectRef>
-          <a:fontRef idx="minor">
-            <a:schemeClr val="lt1"/>
-          </a:fontRef>
-        </p:style>
-        <p:txBody>
-          <a:bodyPr rtlCol="0" anchor="ctr"/>
-          <a:lstStyle/>
-          <a:p>
-            <a:pPr algn="ctr"/>
-            <a:endParaRPr/>
-          </a:p>
-        </p:txBody>
-      </p:sp>
-      <p:sp>
-        <p:nvSpPr>
-          <p:cNvPr id="167" name="Rectangle 166"/>
-          <p:cNvSpPr/>
-          <p:nvPr/>
-        </p:nvSpPr>
-        <p:spPr>
-          <a:xfrm>
-            <a:off x="7534800" y="13212000"/>
-            <a:ext cx="13255200" cy="1170000"/>
-          </a:xfrm>
-          <a:prstGeom prst="rect">
-            <a:avLst/>
-          </a:prstGeom>
-          <a:solidFill>
-            <a:srgbClr val="ECEFFA"/>
-          </a:solidFill>
-          <a:ln>
-            <a:noFill/>
-          </a:ln>
-          <a:effectLst/>
-        </p:spPr>
-        <p:style>
-          <a:lnRef idx="1">
-            <a:schemeClr val="accent1"/>
-          </a:lnRef>
-          <a:fillRef idx="3">
-            <a:schemeClr val="accent1"/>
-          </a:fillRef>
-          <a:effectRef idx="2">
-            <a:schemeClr val="accent1"/>
-          </a:effectRef>
-          <a:fontRef idx="minor">
-            <a:schemeClr val="lt1"/>
-          </a:fontRef>
-        </p:style>
-        <p:txBody>
-          <a:bodyPr rtlCol="0" anchor="ctr" wrap="square"/>
-          <a:lstStyle/>
-          <a:p>
-            <a:pPr algn="ctr"/>
-          </a:p>
-        </p:txBody>
-      </p:sp>
-      <p:sp>
-        <p:nvSpPr>
-          <p:cNvPr id="168" name="TextBox 167"/>
-          <p:cNvSpPr txBox="1"/>
-          <p:nvPr/>
-        </p:nvSpPr>
-        <p:spPr>
-          <a:xfrm>
-            <a:off x="7786800" y="13392000"/>
-            <a:ext cx="4250400" cy="612000"/>
-          </a:xfrm>
-          <a:prstGeom prst="rect">
-            <a:avLst/>
-          </a:prstGeom>
-          <a:noFill/>
-        </p:spPr>
-        <p:txBody>
-          <a:bodyPr wrap="square" lIns="0" rIns="0" tIns="0" bIns="0">
-            <a:spAutoFit/>
-          </a:bodyPr>
-          <a:lstStyle/>
-          <a:p>
-            <a:pPr algn="l">
-              <a:lnSpc>
-                <a:spcPct val="118000"/>
-              </a:lnSpc>
-              <a:spcAft>
-                <a:spcPts val="0"/>
-              </a:spcAft>
-            </a:pPr>
-            <a:r>
-              <a:rPr sz="3247" b="1" i="0">
-                <a:solidFill>
-                  <a:srgbClr val="141E41"/>
-                </a:solidFill>
-                <a:latin typeface="Consolas"/>
-              </a:rPr>
-              <a:t>+16.35 in 100</a:t>
-            </a:r>
-          </a:p>
-        </p:txBody>
-      </p:sp>
-      <p:sp>
-        <p:nvSpPr>
-          <p:cNvPr id="169" name="TextBox 168"/>
-          <p:cNvSpPr txBox="1"/>
-          <p:nvPr/>
-        </p:nvSpPr>
-        <p:spPr>
-          <a:xfrm>
-            <a:off x="7786800" y="13950000"/>
-            <a:ext cx="4250400" cy="324000"/>
-          </a:xfrm>
-          <a:prstGeom prst="rect">
-            <a:avLst/>
-          </a:prstGeom>
-          <a:noFill/>
-        </p:spPr>
-        <p:txBody>
-          <a:bodyPr wrap="square" lIns="0" rIns="0" tIns="0" bIns="0">
-            <a:spAutoFit/>
-          </a:bodyPr>
-          <a:lstStyle/>
-          <a:p>
-            <a:pPr algn="l">
-              <a:lnSpc>
-                <a:spcPct val="118000"/>
-              </a:lnSpc>
-              <a:spcAft>
-                <a:spcPts val="0"/>
-              </a:spcAft>
-            </a:pPr>
-            <a:r>
-              <a:rPr sz="1059" b="0" i="0">
-                <a:solidFill>
-                  <a:srgbClr val="5D6787"/>
-                </a:solidFill>
-                <a:latin typeface="Consolas"/>
-              </a:rPr>
-              <a:t>IN HINDSIGHT, BEST OF 8 · VS ONE FIXED CHOICE</a:t>
-            </a:r>
-          </a:p>
-        </p:txBody>
-      </p:sp>
-      <p:sp>
-        <p:nvSpPr>
-          <p:cNvPr id="170" name="TextBox 169"/>
-          <p:cNvSpPr txBox="1"/>
-          <p:nvPr/>
-        </p:nvSpPr>
-        <p:spPr>
-          <a:xfrm>
-            <a:off x="12037200" y="13392000"/>
-            <a:ext cx="4250400" cy="612000"/>
-          </a:xfrm>
-          <a:prstGeom prst="rect">
-            <a:avLst/>
-          </a:prstGeom>
-          <a:noFill/>
-        </p:spPr>
-        <p:txBody>
-          <a:bodyPr wrap="square" lIns="0" rIns="0" tIns="0" bIns="0">
-            <a:spAutoFit/>
-          </a:bodyPr>
-          <a:lstStyle/>
-          <a:p>
-            <a:pPr algn="l">
-              <a:lnSpc>
-                <a:spcPct val="118000"/>
-              </a:lnSpc>
-              <a:spcAft>
-                <a:spcPts val="0"/>
-              </a:spcAft>
-            </a:pPr>
-            <a:r>
-              <a:rPr sz="3247" b="1" i="0">
-                <a:solidFill>
-                  <a:srgbClr val="141E41"/>
-                </a:solidFill>
-                <a:latin typeface="Consolas"/>
-              </a:rPr>
-              <a:t>0 of 8</a:t>
-            </a:r>
-          </a:p>
-        </p:txBody>
-      </p:sp>
-      <p:sp>
-        <p:nvSpPr>
-          <p:cNvPr id="171" name="TextBox 170"/>
-          <p:cNvSpPr txBox="1"/>
-          <p:nvPr/>
-        </p:nvSpPr>
-        <p:spPr>
-          <a:xfrm>
-            <a:off x="12037200" y="13950000"/>
-            <a:ext cx="4250400" cy="324000"/>
-          </a:xfrm>
-          <a:prstGeom prst="rect">
-            <a:avLst/>
-          </a:prstGeom>
-          <a:noFill/>
-        </p:spPr>
-        <p:txBody>
-          <a:bodyPr wrap="square" lIns="0" rIns="0" tIns="0" bIns="0">
-            <a:spAutoFit/>
-          </a:bodyPr>
-          <a:lstStyle/>
-          <a:p>
-            <a:pPr algn="l">
-              <a:lnSpc>
-                <a:spcPct val="118000"/>
-              </a:lnSpc>
-              <a:spcAft>
-                <a:spcPts val="0"/>
-              </a:spcAft>
-            </a:pPr>
-            <a:r>
-              <a:rPr sz="1059" b="0" i="0">
-                <a:solidFill>
-                  <a:srgbClr val="5D6787"/>
-                </a:solidFill>
-                <a:latin typeface="Consolas"/>
-              </a:rPr>
-              <a:t>LEARNED CHOICES THAT BEAT ALWAYS-CHEAPEST</a:t>
-            </a:r>
-          </a:p>
-        </p:txBody>
-      </p:sp>
-      <p:sp>
-        <p:nvSpPr>
-          <p:cNvPr id="172" name="TextBox 171"/>
-          <p:cNvSpPr txBox="1"/>
-          <p:nvPr/>
-        </p:nvSpPr>
-        <p:spPr>
-          <a:xfrm>
-            <a:off x="16287600" y="13392000"/>
-            <a:ext cx="4250400" cy="612000"/>
-          </a:xfrm>
-          <a:prstGeom prst="rect">
-            <a:avLst/>
-          </a:prstGeom>
-          <a:noFill/>
-        </p:spPr>
-        <p:txBody>
-          <a:bodyPr wrap="square" lIns="0" rIns="0" tIns="0" bIns="0">
-            <a:spAutoFit/>
-          </a:bodyPr>
-          <a:lstStyle/>
-          <a:p>
-            <a:pPr algn="l">
-              <a:lnSpc>
-                <a:spcPct val="118000"/>
-              </a:lnSpc>
-              <a:spcAft>
-                <a:spcPts val="0"/>
-              </a:spcAft>
-            </a:pPr>
-            <a:r>
-              <a:rPr sz="3247" b="1" i="0">
-                <a:solidFill>
-                  <a:srgbClr val="141E41"/>
-                </a:solidFill>
-                <a:latin typeface="Consolas"/>
-              </a:rPr>
-              <a:t>1 of 8</a:t>
-            </a:r>
-          </a:p>
-        </p:txBody>
-      </p:sp>
-      <p:sp>
-        <p:nvSpPr>
-          <p:cNvPr id="173" name="TextBox 172"/>
-          <p:cNvSpPr txBox="1"/>
-          <p:nvPr/>
-        </p:nvSpPr>
-        <p:spPr>
-          <a:xfrm>
-            <a:off x="16287600" y="13950000"/>
-            <a:ext cx="4250400" cy="324000"/>
-          </a:xfrm>
-          <a:prstGeom prst="rect">
-            <a:avLst/>
-          </a:prstGeom>
-          <a:noFill/>
-        </p:spPr>
-        <p:txBody>
-          <a:bodyPr wrap="square" lIns="0" rIns="0" tIns="0" bIns="0">
-            <a:spAutoFit/>
-          </a:bodyPr>
-          <a:lstStyle/>
-          <a:p>
-            <a:pPr algn="l">
-              <a:lnSpc>
-                <a:spcPct val="118000"/>
-              </a:lnSpc>
-              <a:spcAft>
-                <a:spcPts val="0"/>
-              </a:spcAft>
-            </a:pPr>
-            <a:r>
-              <a:rPr sz="1059" b="0" i="0">
-                <a:solidFill>
-                  <a:srgbClr val="5D6787"/>
-                </a:solidFill>
-                <a:latin typeface="Consolas"/>
-              </a:rPr>
-              <a:t>HINDSIGHT CHOICES THAT BEAT ALWAYS-CHEAPEST</a:t>
-            </a:r>
-          </a:p>
-        </p:txBody>
-      </p:sp>
-      <p:sp>
-        <p:nvSpPr>
-          <p:cNvPr id="174" name="Rectangle 173"/>
-          <p:cNvSpPr/>
-          <p:nvPr/>
-        </p:nvSpPr>
-        <p:spPr>
-          <a:xfrm>
-            <a:off x="7534800" y="14526000"/>
-            <a:ext cx="13255200" cy="8769057"/>
-          </a:xfrm>
-          <a:prstGeom prst="rect">
-            <a:avLst/>
-          </a:prstGeom>
-          <a:solidFill>
-            <a:srgbClr val="F7F9FD"/>
-          </a:solidFill>
-          <a:ln w="8890">
-            <a:solidFill>
-              <a:srgbClr val="DDE3F2"/>
-            </a:solidFill>
-          </a:ln>
-          <a:effectLst/>
-        </p:spPr>
-        <p:style>
-          <a:lnRef idx="1">
-            <a:schemeClr val="accent1"/>
-          </a:lnRef>
-          <a:fillRef idx="3">
-            <a:schemeClr val="accent1"/>
-          </a:fillRef>
-          <a:effectRef idx="2">
-            <a:schemeClr val="accent1"/>
-          </a:effectRef>
-          <a:fontRef idx="minor">
-            <a:schemeClr val="lt1"/>
-          </a:fontRef>
-        </p:style>
-        <p:txBody>
-          <a:bodyPr rtlCol="0" anchor="ctr" wrap="square"/>
-          <a:lstStyle/>
-          <a:p>
-            <a:pPr algn="ctr"/>
-          </a:p>
-        </p:txBody>
-      </p:sp>
-      <p:sp>
-        <p:nvSpPr>
-          <p:cNvPr id="175" name="Rectangle 174"/>
-          <p:cNvSpPr/>
-          <p:nvPr/>
-        </p:nvSpPr>
-        <p:spPr>
-          <a:xfrm>
-            <a:off x="7534800" y="14526000"/>
-            <a:ext cx="13255200" cy="50400"/>
-          </a:xfrm>
-          <a:prstGeom prst="rect">
-            <a:avLst/>
-          </a:prstGeom>
-          <a:solidFill>
-            <a:srgbClr val="5049F9"/>
-          </a:solidFill>
-          <a:ln>
-            <a:noFill/>
-          </a:ln>
-          <a:effectLst/>
-        </p:spPr>
-        <p:style>
-          <a:lnRef idx="1">
-            <a:schemeClr val="accent1"/>
-          </a:lnRef>
-          <a:fillRef idx="3">
-            <a:schemeClr val="accent1"/>
-          </a:fillRef>
-          <a:effectRef idx="2">
-            <a:schemeClr val="accent1"/>
-          </a:effectRef>
-          <a:fontRef idx="minor">
-            <a:schemeClr val="lt1"/>
-          </a:fontRef>
-        </p:style>
-        <p:txBody>
-          <a:bodyPr rtlCol="0" anchor="ctr" wrap="square"/>
-          <a:lstStyle/>
-          <a:p>
-            <a:pPr algn="ctr"/>
-          </a:p>
-        </p:txBody>
-      </p:sp>
-      <p:pic>
-        <p:nvPicPr>
-          <p:cNvPr id="176" name="Picture 175" descr="poster_dominance_plane.png"/>
-          <p:cNvPicPr>
-            <a:picLocks noChangeAspect="1"/>
-          </p:cNvPicPr>
-          <p:nvPr/>
-        </p:nvPicPr>
-        <p:blipFill>
-          <a:blip r:embed="rId10"/>
-          <a:stretch>
-            <a:fillRect/>
-          </a:stretch>
-        </p:blipFill>
-        <p:spPr>
-          <a:xfrm>
-            <a:off x="7642800" y="14684400"/>
-            <a:ext cx="13039200" cy="8502657"/>
-          </a:xfrm>
-          <a:prstGeom prst="rect">
-            <a:avLst/>
-          </a:prstGeom>
-        </p:spPr>
-      </p:pic>
-      <p:sp>
-        <p:nvSpPr>
-          <p:cNvPr id="177" name="TextBox 176"/>
-          <p:cNvSpPr txBox="1"/>
-          <p:nvPr/>
-        </p:nvSpPr>
-        <p:spPr>
-          <a:xfrm>
-            <a:off x="7534800" y="23385057"/>
-            <a:ext cx="13255200" cy="511369"/>
-          </a:xfrm>
-          <a:prstGeom prst="rect">
-            <a:avLst/>
-          </a:prstGeom>
-          <a:noFill/>
-        </p:spPr>
-        <p:txBody>
-          <a:bodyPr wrap="square" lIns="0" rIns="0" tIns="0" bIns="0">
-            <a:spAutoFit/>
-          </a:bodyPr>
-          <a:lstStyle/>
-          <a:p>
-            <a:pPr algn="l">
-              <a:lnSpc>
-                <a:spcPct val="132000"/>
-              </a:lnSpc>
-              <a:spcAft>
-                <a:spcPts val="425"/>
-              </a:spcAft>
-            </a:pPr>
-            <a:r>
-              <a:rPr sz="1271" b="1" i="0">
-                <a:solidFill>
-                  <a:srgbClr val="5D6787"/>
-                </a:solidFill>
-                <a:latin typeface="Arial"/>
-              </a:rPr>
-              <a:t>Fig 2.</a:t>
-            </a:r>
-            <a:r>
-              <a:rPr sz="1271" b="0" i="0">
-                <a:solidFill>
-                  <a:srgbClr val="5D6787"/>
-                </a:solidFill>
-                <a:latin typeface="Arial"/>
-              </a:rPr>
-              <a:t> Every way of choosing, in every setting, compared with one fixed rule: </a:t>
-            </a:r>
-            <a:r>
-              <a:rPr sz="1271" b="1" i="0">
-                <a:solidFill>
-                  <a:srgbClr val="5D6787"/>
-                </a:solidFill>
-                <a:latin typeface="Arial"/>
-              </a:rPr>
-              <a:t>always use the cheapest way of seeing</a:t>
-            </a:r>
-            <a:r>
-              <a:rPr sz="1271" b="0" i="0">
-                <a:solidFill>
-                  <a:srgbClr val="5D6787"/>
-                </a:solidFill>
-                <a:latin typeface="Arial"/>
-              </a:rPr>
-              <a:t> (★). A win lands in the shaded region — cheaper </a:t>
-            </a:r>
-            <a:r>
-              <a:rPr sz="1271" b="0" i="1">
-                <a:solidFill>
-                  <a:srgbClr val="5D6787"/>
-                </a:solidFill>
-                <a:latin typeface="Arial"/>
-              </a:rPr>
-              <a:t>and</a:t>
-            </a:r>
-            <a:r>
-              <a:rPr sz="1271" b="0" i="0">
-                <a:solidFill>
-                  <a:srgbClr val="5D6787"/>
-                </a:solidFill>
-                <a:latin typeface="Arial"/>
-              </a:rPr>
-              <a:t> no worse. Always-cheapest is cheapest on average, not on every task, which is why a few points sit left of it. Learned choices are scored only on tasks they never saw.</a:t>
-            </a:r>
-          </a:p>
-        </p:txBody>
-      </p:sp>
-      <p:sp>
-        <p:nvSpPr>
-          <p:cNvPr id="178" name="TextBox 177"/>
-          <p:cNvSpPr txBox="1"/>
-          <p:nvPr/>
-        </p:nvSpPr>
-        <p:spPr>
-          <a:xfrm>
-            <a:off x="7534800" y="24004426"/>
-            <a:ext cx="13255200" cy="2188690"/>
-          </a:xfrm>
-          <a:prstGeom prst="rect">
-            <a:avLst/>
-          </a:prstGeom>
-          <a:noFill/>
-        </p:spPr>
-        <p:txBody>
-          <a:bodyPr wrap="square" lIns="0" rIns="0" tIns="0" bIns="0">
-            <a:spAutoFit/>
-          </a:bodyPr>
-          <a:lstStyle/>
-          <a:p>
-            <a:pPr algn="l">
-              <a:lnSpc>
-                <a:spcPct val="120000"/>
-              </a:lnSpc>
-              <a:spcAft>
-                <a:spcPts val="992"/>
-              </a:spcAft>
-            </a:pPr>
-            <a:r>
-              <a:rPr sz="1764" b="1" i="0">
-                <a:solidFill>
-                  <a:srgbClr val="12162E"/>
-                </a:solidFill>
-                <a:latin typeface="Arial"/>
-              </a:rPr>
-              <a:t>Choosing well would pay.</a:t>
-            </a:r>
-            <a:r>
-              <a:rPr sz="1764" b="0" i="0">
-                <a:solidFill>
-                  <a:srgbClr val="12162E"/>
-                </a:solidFill>
-                <a:latin typeface="Arial"/>
-              </a:rPr>
-              <a:t> Picking the right way of seeing for each task after the fact would solve </a:t>
-            </a:r>
-            <a:r>
-              <a:rPr sz="1764" b="1" i="0">
-                <a:solidFill>
-                  <a:srgbClr val="12162E"/>
-                </a:solidFill>
-                <a:latin typeface="Arial"/>
-              </a:rPr>
-              <a:t>3.45 to 16.35 more tasks in every 100</a:t>
-            </a:r>
-            <a:r>
-              <a:rPr sz="1764" b="0" i="0">
-                <a:solidFill>
-                  <a:srgbClr val="12162E"/>
-                </a:solidFill>
-                <a:latin typeface="Arial"/>
-              </a:rPr>
-              <a:t> than the best single fixed choice, and spend 1.6–35.3% less — in all 8 settings.</a:t>
-            </a:r>
-          </a:p>
-          <a:p>
-            <a:pPr algn="l">
-              <a:lnSpc>
-                <a:spcPct val="120000"/>
-              </a:lnSpc>
-              <a:spcAft>
-                <a:spcPts val="992"/>
-              </a:spcAft>
-            </a:pPr>
-            <a:r>
-              <a:rPr sz="1764" b="1" i="0">
-                <a:solidFill>
-                  <a:srgbClr val="12162E"/>
-                </a:solidFill>
-                <a:latin typeface="Arial"/>
-              </a:rPr>
-              <a:t>Nothing we trained could do it.</a:t>
-            </a:r>
-            <a:r>
-              <a:rPr sz="1764" b="0" i="0">
-                <a:solidFill>
-                  <a:srgbClr val="12162E"/>
-                </a:solidFill>
-                <a:latin typeface="Arial"/>
-              </a:rPr>
-              <a:t> In </a:t>
-            </a:r>
-            <a:r>
-              <a:rPr sz="1764" b="1" i="0">
-                <a:solidFill>
-                  <a:srgbClr val="12162E"/>
-                </a:solidFill>
-                <a:latin typeface="Arial"/>
-              </a:rPr>
-              <a:t>0 of 8</a:t>
-            </a:r>
-            <a:r>
-              <a:rPr sz="1764" b="0" i="0">
-                <a:solidFill>
-                  <a:srgbClr val="12162E"/>
-                </a:solidFill>
-                <a:latin typeface="Arial"/>
-              </a:rPr>
-              <a:t> settings did a learned choice beat simply always using the cheapest way on both success and cost — and even choosing with hindsight manages that in only </a:t>
-            </a:r>
-            <a:r>
-              <a:rPr sz="1764" b="1" i="0">
-                <a:solidFill>
-                  <a:srgbClr val="12162E"/>
-                </a:solidFill>
-                <a:latin typeface="Arial"/>
-              </a:rPr>
-              <a:t>1 of 8</a:t>
-            </a:r>
-            <a:r>
-              <a:rPr sz="1764" b="0" i="0">
-                <a:solidFill>
-                  <a:srgbClr val="12162E"/>
-                </a:solidFill>
-                <a:latin typeface="Arial"/>
-              </a:rPr>
-              <a:t>.</a:t>
-            </a:r>
-          </a:p>
-          <a:p>
-            <a:pPr algn="l">
-              <a:lnSpc>
-                <a:spcPct val="120000"/>
-              </a:lnSpc>
-              <a:spcAft>
-                <a:spcPts val="992"/>
-              </a:spcAft>
-            </a:pPr>
-            <a:r>
-              <a:rPr sz="1764" b="1" i="0">
-                <a:solidFill>
-                  <a:srgbClr val="12162E"/>
-                </a:solidFill>
-                <a:latin typeface="Arial"/>
-              </a:rPr>
-              <a:t>What survives is a bound, not a method.</a:t>
-            </a:r>
-            <a:r>
-              <a:rPr sz="1764" b="0" i="0">
-                <a:solidFill>
-                  <a:srgbClr val="12162E"/>
-                </a:solidFill>
-                <a:latin typeface="Arial"/>
-              </a:rPr>
-              <a:t> Sending the tasks nobody solves to the cheapest way saves 9.5–30.6% at the same success in 8 of 8 — but that too needs hindsight, and plain always-cheapest usually saves more.</a:t>
-            </a:r>
-          </a:p>
-        </p:txBody>
-      </p:sp>
-      <p:pic>
-        <p:nvPicPr>
-          <p:cNvPr id="179" name="Picture 178" descr="qr_repo.png"/>
-          <p:cNvPicPr>
-            <a:picLocks noChangeAspect="1"/>
-          </p:cNvPicPr>
-          <p:nvPr/>
-        </p:nvPicPr>
-        <p:blipFill>
-          <a:blip r:embed="rId11"/>
           <a:stretch>
             <a:fillRect/>
           </a:stretch>

--- a/deliverables/showcase/poster_jiaming_wei.pptx
+++ b/deliverables/showcase/poster_jiaming_wei.pptx
@@ -3857,7 +3857,7 @@
                 </a:solidFill>
                 <a:latin typeface="Consolas"/>
               </a:rPr>
-              <a:t>RESULTS ACROSS 8,934 TASK ATTEMPTS</a:t>
+              <a:t>THE AGENT LOOP, AND WHERE THE DECISION SITS</a:t>
             </a:r>
             <a:endParaRPr sz="1412" b="1" spc="180" dirty="0">
               <a:solidFill>
@@ -3960,20 +3960,20 @@
       </p:sp>
       <p:sp>
         <p:nvSpPr>
-          <p:cNvPr id="77" name="Rectangle 76"/>
+          <p:cNvPr id="77" name="Right Arrow 76"/>
           <p:cNvSpPr/>
           <p:nvPr/>
         </p:nvSpPr>
         <p:spPr>
           <a:xfrm>
-            <a:off x="727200" y="5580000"/>
-            <a:ext cx="20062800" cy="1170000"/>
-          </a:xfrm>
-          <a:prstGeom prst="rect">
+            <a:off x="3823200" y="7848000"/>
+            <a:ext cx="360000" cy="504000"/>
+          </a:xfrm>
+          <a:prstGeom prst="rightArrow">
             <a:avLst/>
           </a:prstGeom>
           <a:solidFill>
-            <a:srgbClr val="ECEFFA"/>
+            <a:srgbClr val="C9CFE0"/>
           </a:solidFill>
           <a:ln>
             <a:noFill/>
@@ -3995,7 +3995,7 @@
           </a:fontRef>
         </p:style>
         <p:txBody>
-          <a:bodyPr rtlCol="0" anchor="ctr" wrap="square"/>
+          <a:bodyPr rtlCol="0" anchor="ctr"/>
           <a:lstStyle/>
           <a:p>
             <a:pPr algn="ctr"/>
@@ -4004,425 +4004,20 @@
       </p:sp>
       <p:sp>
         <p:nvSpPr>
-          <p:cNvPr id="78" name="TextBox 77"/>
-          <p:cNvSpPr txBox="1"/>
-          <p:nvPr/>
-        </p:nvSpPr>
-        <p:spPr>
-          <a:xfrm>
-            <a:off x="979200" y="5760000"/>
-            <a:ext cx="6519600" cy="612000"/>
-          </a:xfrm>
-          <a:prstGeom prst="rect">
-            <a:avLst/>
-          </a:prstGeom>
-          <a:noFill/>
-        </p:spPr>
-        <p:txBody>
-          <a:bodyPr wrap="square" lIns="0" rIns="0" tIns="0" bIns="0">
-            <a:spAutoFit/>
-          </a:bodyPr>
-          <a:lstStyle/>
-          <a:p>
-            <a:pPr algn="l">
-              <a:lnSpc>
-                <a:spcPct val="118000"/>
-              </a:lnSpc>
-              <a:spcAft>
-                <a:spcPts val="0"/>
-              </a:spcAft>
-            </a:pPr>
-            <a:r>
-              <a:rPr sz="3247" b="1" i="0">
-                <a:solidFill>
-                  <a:srgbClr val="141E41"/>
-                </a:solidFill>
-                <a:latin typeface="Consolas"/>
-              </a:rPr>
-              <a:t>+16.35 in 100</a:t>
-            </a:r>
-          </a:p>
-        </p:txBody>
-      </p:sp>
-      <p:sp>
-        <p:nvSpPr>
-          <p:cNvPr id="79" name="TextBox 78"/>
-          <p:cNvSpPr txBox="1"/>
-          <p:nvPr/>
-        </p:nvSpPr>
-        <p:spPr>
-          <a:xfrm>
-            <a:off x="979200" y="6318000"/>
-            <a:ext cx="6519600" cy="324000"/>
-          </a:xfrm>
-          <a:prstGeom prst="rect">
-            <a:avLst/>
-          </a:prstGeom>
-          <a:noFill/>
-        </p:spPr>
-        <p:txBody>
-          <a:bodyPr wrap="square" lIns="0" rIns="0" tIns="0" bIns="0">
-            <a:spAutoFit/>
-          </a:bodyPr>
-          <a:lstStyle/>
-          <a:p>
-            <a:pPr algn="l">
-              <a:lnSpc>
-                <a:spcPct val="118000"/>
-              </a:lnSpc>
-              <a:spcAft>
-                <a:spcPts val="0"/>
-              </a:spcAft>
-            </a:pPr>
-            <a:r>
-              <a:rPr sz="1059" b="0" i="0">
-                <a:solidFill>
-                  <a:srgbClr val="5D6787"/>
-                </a:solidFill>
-                <a:latin typeface="Consolas"/>
-              </a:rPr>
-              <a:t>PERFECT HINDSIGHT, BEST OF 8 · VS ONE FIXED VIEW</a:t>
-            </a:r>
-          </a:p>
-        </p:txBody>
-      </p:sp>
-      <p:sp>
-        <p:nvSpPr>
-          <p:cNvPr id="80" name="TextBox 79"/>
-          <p:cNvSpPr txBox="1"/>
-          <p:nvPr/>
-        </p:nvSpPr>
-        <p:spPr>
-          <a:xfrm>
-            <a:off x="7498800" y="5760000"/>
-            <a:ext cx="6519600" cy="612000"/>
-          </a:xfrm>
-          <a:prstGeom prst="rect">
-            <a:avLst/>
-          </a:prstGeom>
-          <a:noFill/>
-        </p:spPr>
-        <p:txBody>
-          <a:bodyPr wrap="square" lIns="0" rIns="0" tIns="0" bIns="0">
-            <a:spAutoFit/>
-          </a:bodyPr>
-          <a:lstStyle/>
-          <a:p>
-            <a:pPr algn="l">
-              <a:lnSpc>
-                <a:spcPct val="118000"/>
-              </a:lnSpc>
-              <a:spcAft>
-                <a:spcPts val="0"/>
-              </a:spcAft>
-            </a:pPr>
-            <a:r>
-              <a:rPr sz="3247" b="1" i="0">
-                <a:solidFill>
-                  <a:srgbClr val="141E41"/>
-                </a:solidFill>
-                <a:latin typeface="Consolas"/>
-              </a:rPr>
-              <a:t>0 of 8</a:t>
-            </a:r>
-          </a:p>
-        </p:txBody>
-      </p:sp>
-      <p:sp>
-        <p:nvSpPr>
-          <p:cNvPr id="81" name="TextBox 80"/>
-          <p:cNvSpPr txBox="1"/>
-          <p:nvPr/>
-        </p:nvSpPr>
-        <p:spPr>
-          <a:xfrm>
-            <a:off x="7498800" y="6318000"/>
-            <a:ext cx="6519600" cy="324000"/>
-          </a:xfrm>
-          <a:prstGeom prst="rect">
-            <a:avLst/>
-          </a:prstGeom>
-          <a:noFill/>
-        </p:spPr>
-        <p:txBody>
-          <a:bodyPr wrap="square" lIns="0" rIns="0" tIns="0" bIns="0">
-            <a:spAutoFit/>
-          </a:bodyPr>
-          <a:lstStyle/>
-          <a:p>
-            <a:pPr algn="l">
-              <a:lnSpc>
-                <a:spcPct val="118000"/>
-              </a:lnSpc>
-              <a:spcAft>
-                <a:spcPts val="0"/>
-              </a:spcAft>
-            </a:pPr>
-            <a:r>
-              <a:rPr sz="1059" b="0" i="0">
-                <a:solidFill>
-                  <a:srgbClr val="5D6787"/>
-                </a:solidFill>
-                <a:latin typeface="Consolas"/>
-              </a:rPr>
-              <a:t>LEARNED CHOICES THAT BEAT ALWAYS-CHEAPEST</a:t>
-            </a:r>
-          </a:p>
-        </p:txBody>
-      </p:sp>
-      <p:sp>
-        <p:nvSpPr>
-          <p:cNvPr id="82" name="TextBox 81"/>
-          <p:cNvSpPr txBox="1"/>
-          <p:nvPr/>
-        </p:nvSpPr>
-        <p:spPr>
-          <a:xfrm>
-            <a:off x="14018400" y="5760000"/>
-            <a:ext cx="6519600" cy="612000"/>
-          </a:xfrm>
-          <a:prstGeom prst="rect">
-            <a:avLst/>
-          </a:prstGeom>
-          <a:noFill/>
-        </p:spPr>
-        <p:txBody>
-          <a:bodyPr wrap="square" lIns="0" rIns="0" tIns="0" bIns="0">
-            <a:spAutoFit/>
-          </a:bodyPr>
-          <a:lstStyle/>
-          <a:p>
-            <a:pPr algn="l">
-              <a:lnSpc>
-                <a:spcPct val="118000"/>
-              </a:lnSpc>
-              <a:spcAft>
-                <a:spcPts val="0"/>
-              </a:spcAft>
-            </a:pPr>
-            <a:r>
-              <a:rPr sz="3247" b="1" i="0">
-                <a:solidFill>
-                  <a:srgbClr val="141E41"/>
-                </a:solidFill>
-                <a:latin typeface="Consolas"/>
-              </a:rPr>
-              <a:t>1 of 8</a:t>
-            </a:r>
-          </a:p>
-        </p:txBody>
-      </p:sp>
-      <p:sp>
-        <p:nvSpPr>
-          <p:cNvPr id="83" name="TextBox 82"/>
-          <p:cNvSpPr txBox="1"/>
-          <p:nvPr/>
-        </p:nvSpPr>
-        <p:spPr>
-          <a:xfrm>
-            <a:off x="14018400" y="6318000"/>
-            <a:ext cx="6519600" cy="324000"/>
-          </a:xfrm>
-          <a:prstGeom prst="rect">
-            <a:avLst/>
-          </a:prstGeom>
-          <a:noFill/>
-        </p:spPr>
-        <p:txBody>
-          <a:bodyPr wrap="square" lIns="0" rIns="0" tIns="0" bIns="0">
-            <a:spAutoFit/>
-          </a:bodyPr>
-          <a:lstStyle/>
-          <a:p>
-            <a:pPr algn="l">
-              <a:lnSpc>
-                <a:spcPct val="118000"/>
-              </a:lnSpc>
-              <a:spcAft>
-                <a:spcPts val="0"/>
-              </a:spcAft>
-            </a:pPr>
-            <a:r>
-              <a:rPr sz="1059" b="0" i="0">
-                <a:solidFill>
-                  <a:srgbClr val="5D6787"/>
-                </a:solidFill>
-                <a:latin typeface="Consolas"/>
-              </a:rPr>
-              <a:t>HINDSIGHT CHOICES THAT BEAT ALWAYS-CHEAPEST</a:t>
-            </a:r>
-          </a:p>
-        </p:txBody>
-      </p:sp>
-      <p:sp>
-        <p:nvSpPr>
-          <p:cNvPr id="84" name="TextBox 83"/>
-          <p:cNvSpPr txBox="1"/>
-          <p:nvPr/>
-        </p:nvSpPr>
-        <p:spPr>
-          <a:xfrm>
-            <a:off x="727200" y="6894000"/>
-            <a:ext cx="6543600" cy="511369"/>
-          </a:xfrm>
-          <a:prstGeom prst="rect">
-            <a:avLst/>
-          </a:prstGeom>
-          <a:noFill/>
-        </p:spPr>
-        <p:txBody>
-          <a:bodyPr wrap="square" lIns="0" rIns="0" tIns="0" bIns="0">
-            <a:spAutoFit/>
-          </a:bodyPr>
-          <a:lstStyle/>
-          <a:p>
-            <a:pPr algn="l">
-              <a:lnSpc>
-                <a:spcPct val="132000"/>
-              </a:lnSpc>
-              <a:spcAft>
-                <a:spcPts val="425"/>
-              </a:spcAft>
-            </a:pPr>
-            <a:r>
-              <a:rPr sz="1271" b="1" i="0">
-                <a:solidFill>
-                  <a:srgbClr val="12162E"/>
-                </a:solidFill>
-                <a:latin typeface="Arial"/>
-              </a:rPr>
-              <a:t>ONE FIXED VIEW</a:t>
-            </a:r>
-            <a:r>
-              <a:rPr sz="1271" b="0" i="0">
-                <a:solidFill>
-                  <a:srgbClr val="12162E"/>
-                </a:solidFill>
-                <a:latin typeface="Arial"/>
-              </a:rPr>
-              <a:t> — the single view that solves most tasks in a setting, used for every task.</a:t>
-            </a:r>
-          </a:p>
-        </p:txBody>
-      </p:sp>
-      <p:sp>
-        <p:nvSpPr>
-          <p:cNvPr id="85" name="TextBox 84"/>
-          <p:cNvSpPr txBox="1"/>
-          <p:nvPr/>
-        </p:nvSpPr>
-        <p:spPr>
-          <a:xfrm>
-            <a:off x="7486800" y="6894000"/>
-            <a:ext cx="6543600" cy="511369"/>
-          </a:xfrm>
-          <a:prstGeom prst="rect">
-            <a:avLst/>
-          </a:prstGeom>
-          <a:noFill/>
-        </p:spPr>
-        <p:txBody>
-          <a:bodyPr wrap="square" lIns="0" rIns="0" tIns="0" bIns="0">
-            <a:spAutoFit/>
-          </a:bodyPr>
-          <a:lstStyle/>
-          <a:p>
-            <a:pPr algn="l">
-              <a:lnSpc>
-                <a:spcPct val="132000"/>
-              </a:lnSpc>
-              <a:spcAft>
-                <a:spcPts val="425"/>
-              </a:spcAft>
-            </a:pPr>
-            <a:r>
-              <a:rPr sz="1271" b="1" i="0">
-                <a:solidFill>
-                  <a:srgbClr val="12162E"/>
-                </a:solidFill>
-                <a:latin typeface="Arial"/>
-              </a:rPr>
-              <a:t>ALWAYS-CHEAPEST</a:t>
-            </a:r>
-            <a:r>
-              <a:rPr sz="1271" b="0" i="0">
-                <a:solidFill>
-                  <a:srgbClr val="12162E"/>
-                </a:solidFill>
-                <a:latin typeface="Arial"/>
-              </a:rPr>
-              <a:t> — the single view that costs least on average in a setting, used for every task.</a:t>
-            </a:r>
-          </a:p>
-        </p:txBody>
-      </p:sp>
-      <p:sp>
-        <p:nvSpPr>
-          <p:cNvPr id="86" name="TextBox 85"/>
-          <p:cNvSpPr txBox="1"/>
-          <p:nvPr/>
-        </p:nvSpPr>
-        <p:spPr>
-          <a:xfrm>
-            <a:off x="14246400" y="6894000"/>
-            <a:ext cx="6543600" cy="767053"/>
-          </a:xfrm>
-          <a:prstGeom prst="rect">
-            <a:avLst/>
-          </a:prstGeom>
-          <a:noFill/>
-        </p:spPr>
-        <p:txBody>
-          <a:bodyPr wrap="square" lIns="0" rIns="0" tIns="0" bIns="0">
-            <a:spAutoFit/>
-          </a:bodyPr>
-          <a:lstStyle/>
-          <a:p>
-            <a:pPr algn="l">
-              <a:lnSpc>
-                <a:spcPct val="132000"/>
-              </a:lnSpc>
-              <a:spcAft>
-                <a:spcPts val="425"/>
-              </a:spcAft>
-            </a:pPr>
-            <a:r>
-              <a:rPr sz="1271" b="1" i="0">
-                <a:solidFill>
-                  <a:srgbClr val="12162E"/>
-                </a:solidFill>
-                <a:latin typeface="Arial"/>
-              </a:rPr>
-              <a:t>PERFECT HINDSIGHT</a:t>
-            </a:r>
-            <a:r>
-              <a:rPr sz="1271" b="0" i="0">
-                <a:solidFill>
-                  <a:srgbClr val="12162E"/>
-                </a:solidFill>
-                <a:latin typeface="Arial"/>
-              </a:rPr>
-              <a:t> — for each task, the view that solved it, picked after the fact. An optimistic bound: rerunning one unchanged view flips 10–14% of outcomes and by itself gains 2.0–7.6 tasks in 100.</a:t>
-            </a:r>
-          </a:p>
-        </p:txBody>
-      </p:sp>
-      <p:sp>
-        <p:nvSpPr>
-          <p:cNvPr id="87" name="Rectangle 86"/>
+          <p:cNvPr id="78" name="Right Arrow 77"/>
           <p:cNvSpPr/>
           <p:nvPr/>
         </p:nvSpPr>
         <p:spPr>
           <a:xfrm>
-            <a:off x="727200" y="7985053"/>
-            <a:ext cx="6451200" cy="1634345"/>
-          </a:xfrm>
-          <a:prstGeom prst="rect">
+            <a:off x="8215200" y="7848000"/>
+            <a:ext cx="360000" cy="504000"/>
+          </a:xfrm>
+          <a:prstGeom prst="rightArrow">
             <a:avLst/>
           </a:prstGeom>
           <a:solidFill>
-            <a:srgbClr val="ECEFFA"/>
+            <a:srgbClr val="C9CFE0"/>
           </a:solidFill>
           <a:ln>
             <a:noFill/>
@@ -4444,7 +4039,7 @@
           </a:fontRef>
         </p:style>
         <p:txBody>
-          <a:bodyPr rtlCol="0" anchor="ctr" wrap="square"/>
+          <a:bodyPr rtlCol="0" anchor="ctr"/>
           <a:lstStyle/>
           <a:p>
             <a:pPr algn="ctr"/>
@@ -4453,20 +4048,20 @@
       </p:sp>
       <p:sp>
         <p:nvSpPr>
-          <p:cNvPr id="88" name="Rectangle 87"/>
+          <p:cNvPr id="79" name="Right Arrow 78"/>
           <p:cNvSpPr/>
           <p:nvPr/>
         </p:nvSpPr>
         <p:spPr>
           <a:xfrm>
-            <a:off x="727200" y="7985053"/>
-            <a:ext cx="86400" cy="1634345"/>
-          </a:xfrm>
-          <a:prstGeom prst="rect">
+            <a:off x="14119200" y="7848000"/>
+            <a:ext cx="360000" cy="504000"/>
+          </a:xfrm>
+          <a:prstGeom prst="rightArrow">
             <a:avLst/>
           </a:prstGeom>
           <a:solidFill>
-            <a:srgbClr val="5049F9"/>
+            <a:srgbClr val="C9CFE0"/>
           </a:solidFill>
           <a:ln>
             <a:noFill/>
@@ -4488,7 +4083,7 @@
           </a:fontRef>
         </p:style>
         <p:txBody>
-          <a:bodyPr rtlCol="0" anchor="ctr" wrap="square"/>
+          <a:bodyPr rtlCol="0" anchor="ctr"/>
           <a:lstStyle/>
           <a:p>
             <a:pPr algn="ctr"/>
@@ -4497,104 +4092,20 @@
       </p:sp>
       <p:sp>
         <p:nvSpPr>
-          <p:cNvPr id="89" name="TextBox 88"/>
-          <p:cNvSpPr txBox="1"/>
-          <p:nvPr/>
-        </p:nvSpPr>
-        <p:spPr>
-          <a:xfrm>
-            <a:off x="943200" y="8165053"/>
-            <a:ext cx="6019200" cy="216000"/>
-          </a:xfrm>
-          <a:prstGeom prst="rect">
-            <a:avLst/>
-          </a:prstGeom>
-          <a:noFill/>
-        </p:spPr>
-        <p:txBody>
-          <a:bodyPr wrap="square" lIns="0" rIns="0" tIns="0" bIns="0">
-            <a:spAutoFit/>
-          </a:bodyPr>
-          <a:lstStyle/>
-          <a:p>
-            <a:pPr algn="l">
-              <a:lnSpc>
-                <a:spcPct val="120000"/>
-              </a:lnSpc>
-              <a:spcAft>
-                <a:spcPts val="0"/>
-              </a:spcAft>
-            </a:pPr>
-            <a:r>
-              <a:rPr sz="1059" b="0" i="0">
-                <a:solidFill>
-                  <a:srgbClr val="5049F9"/>
-                </a:solidFill>
-                <a:latin typeface="Consolas"/>
-              </a:rPr>
-              <a:t>THE CATCH</a:t>
-            </a:r>
-          </a:p>
-        </p:txBody>
-      </p:sp>
-      <p:sp>
-        <p:nvSpPr>
-          <p:cNvPr id="90" name="TextBox 89"/>
-          <p:cNvSpPr txBox="1"/>
-          <p:nvPr/>
-        </p:nvSpPr>
-        <p:spPr>
-          <a:xfrm>
-            <a:off x="943200" y="8399053"/>
-            <a:ext cx="6019200" cy="968345"/>
-          </a:xfrm>
-          <a:prstGeom prst="rect">
-            <a:avLst/>
-          </a:prstGeom>
-          <a:noFill/>
-        </p:spPr>
-        <p:txBody>
-          <a:bodyPr wrap="square" lIns="0" rIns="0" tIns="0" bIns="0">
-            <a:spAutoFit/>
-          </a:bodyPr>
-          <a:lstStyle/>
-          <a:p>
-            <a:pPr algn="l">
-              <a:lnSpc>
-                <a:spcPct val="120000"/>
-              </a:lnSpc>
-              <a:spcAft>
-                <a:spcPts val="992"/>
-              </a:spcAft>
-            </a:pPr>
-            <a:r>
-              <a:rPr sz="1764" b="1" i="0">
-                <a:solidFill>
-                  <a:srgbClr val="12162E"/>
-                </a:solidFill>
-                <a:latin typeface="Arial"/>
-              </a:rPr>
-              <a:t>The agents that would gain most from choosing a view solve the fewest tasks — so they produce the fewest examples to learn the choice from.</a:t>
-            </a:r>
-          </a:p>
-        </p:txBody>
-      </p:sp>
-      <p:sp>
-        <p:nvSpPr>
-          <p:cNvPr id="14" name="Rectangle 13"/>
+          <p:cNvPr id="80" name="Right Arrow 79"/>
           <p:cNvSpPr/>
           <p:nvPr/>
         </p:nvSpPr>
         <p:spPr>
           <a:xfrm>
-            <a:off x="727200" y="9907398"/>
-            <a:ext cx="177988" cy="177988"/>
-          </a:xfrm>
-          <a:prstGeom prst="rect">
+            <a:off x="17791200" y="7848000"/>
+            <a:ext cx="360000" cy="504000"/>
+          </a:xfrm>
+          <a:prstGeom prst="rightArrow">
             <a:avLst/>
           </a:prstGeom>
           <a:solidFill>
-            <a:srgbClr val="AB5FCE"/>
+            <a:srgbClr val="C9CFE0"/>
           </a:solidFill>
           <a:ln>
             <a:noFill/>
@@ -4620,233 +4131,19 @@
           <a:lstStyle/>
           <a:p>
             <a:pPr algn="ctr"/>
-            <a:endParaRPr/>
-          </a:p>
-        </p:txBody>
-      </p:sp>
-      <p:sp>
-        <p:nvSpPr>
-          <p:cNvPr id="15" name="TextBox 14"/>
-          <p:cNvSpPr txBox="1"/>
-          <p:nvPr/>
-        </p:nvSpPr>
-        <p:spPr>
-          <a:xfrm>
-            <a:off x="1032323" y="9864198"/>
-            <a:ext cx="6144827" cy="238912"/>
-          </a:xfrm>
-          <a:prstGeom prst="rect">
-            <a:avLst/>
-          </a:prstGeom>
-          <a:noFill/>
-        </p:spPr>
-        <p:txBody>
-          <a:bodyPr wrap="square" lIns="0" tIns="0" rIns="0" bIns="0" anchor="t">
-            <a:spAutoFit/>
-          </a:bodyPr>
-          <a:lstStyle/>
-          <a:p>
-            <a:pPr algn="l">
-              <a:lnSpc>
-                <a:spcPct val="118000"/>
-              </a:lnSpc>
-            </a:pPr>
-            <a:r>
-              <a:rPr sz="1412" b="1" i="0">
-                <a:solidFill>
-                  <a:srgbClr val="141E41"/>
-                </a:solidFill>
-                <a:latin typeface="Consolas"/>
-              </a:rPr>
-              <a:t>WHY LEARNING THE CHOICE FAILS HERE</a:t>
-            </a:r>
-            <a:endParaRPr sz="1412" b="1" spc="180" dirty="0">
-              <a:solidFill>
-                <a:srgbClr val="141E41"/>
-              </a:solidFill>
-              <a:latin typeface="Consolas"/>
-            </a:endParaRPr>
-          </a:p>
-        </p:txBody>
-      </p:sp>
-      <p:sp>
-        <p:nvSpPr>
-          <p:cNvPr id="16" name="Rectangle 15"/>
+          </a:p>
+        </p:txBody>
+      </p:sp>
+      <p:sp>
+        <p:nvSpPr>
+          <p:cNvPr id="81" name="Rectangle 80"/>
           <p:cNvSpPr/>
           <p:nvPr/>
         </p:nvSpPr>
         <p:spPr>
           <a:xfrm>
-            <a:off x="727200" y="10225234"/>
-            <a:ext cx="1169636" cy="35597"/>
-          </a:xfrm>
-          <a:prstGeom prst="rect">
-            <a:avLst/>
-          </a:prstGeom>
-          <a:solidFill>
-            <a:srgbClr val="141E41"/>
-          </a:solidFill>
-          <a:ln>
-            <a:noFill/>
-          </a:ln>
-          <a:effectLst/>
-        </p:spPr>
-        <p:style>
-          <a:lnRef idx="1">
-            <a:schemeClr val="accent1"/>
-          </a:lnRef>
-          <a:fillRef idx="3">
-            <a:schemeClr val="accent1"/>
-          </a:fillRef>
-          <a:effectRef idx="2">
-            <a:schemeClr val="accent1"/>
-          </a:effectRef>
-          <a:fontRef idx="minor">
-            <a:schemeClr val="lt1"/>
-          </a:fontRef>
-        </p:style>
-        <p:txBody>
-          <a:bodyPr rtlCol="0" anchor="ctr"/>
-          <a:lstStyle/>
-          <a:p>
-            <a:pPr algn="ctr"/>
-            <a:endParaRPr/>
-          </a:p>
-        </p:txBody>
-      </p:sp>
-      <p:sp>
-        <p:nvSpPr>
-          <p:cNvPr id="17" name="Rectangle 16"/>
-          <p:cNvSpPr/>
-          <p:nvPr/>
-        </p:nvSpPr>
-        <p:spPr>
-          <a:xfrm>
-            <a:off x="1896836" y="10235405"/>
-            <a:ext cx="5281564" cy="15256"/>
-          </a:xfrm>
-          <a:prstGeom prst="rect">
-            <a:avLst/>
-          </a:prstGeom>
-          <a:solidFill>
-            <a:srgbClr val="DDE3F2"/>
-          </a:solidFill>
-          <a:ln>
-            <a:noFill/>
-          </a:ln>
-          <a:effectLst/>
-        </p:spPr>
-        <p:style>
-          <a:lnRef idx="1">
-            <a:schemeClr val="accent1"/>
-          </a:lnRef>
-          <a:fillRef idx="3">
-            <a:schemeClr val="accent1"/>
-          </a:fillRef>
-          <a:effectRef idx="2">
-            <a:schemeClr val="accent1"/>
-          </a:effectRef>
-          <a:fontRef idx="minor">
-            <a:schemeClr val="lt1"/>
-          </a:fontRef>
-        </p:style>
-        <p:txBody>
-          <a:bodyPr rtlCol="0" anchor="ctr"/>
-          <a:lstStyle/>
-          <a:p>
-            <a:pPr algn="ctr"/>
-            <a:endParaRPr/>
-          </a:p>
-        </p:txBody>
-      </p:sp>
-      <p:sp>
-        <p:nvSpPr>
-          <p:cNvPr id="91" name="TextBox 90"/>
-          <p:cNvSpPr txBox="1"/>
-          <p:nvPr/>
-        </p:nvSpPr>
-        <p:spPr>
-          <a:xfrm>
-            <a:off x="727200" y="10447398"/>
-            <a:ext cx="6451200" cy="1613908"/>
-          </a:xfrm>
-          <a:prstGeom prst="rect">
-            <a:avLst/>
-          </a:prstGeom>
-          <a:noFill/>
-        </p:spPr>
-        <p:txBody>
-          <a:bodyPr wrap="square" lIns="0" rIns="0" tIns="0" bIns="0">
-            <a:spAutoFit/>
-          </a:bodyPr>
-          <a:lstStyle/>
-          <a:p>
-            <a:pPr algn="l">
-              <a:lnSpc>
-                <a:spcPct val="120000"/>
-              </a:lnSpc>
-              <a:spcAft>
-                <a:spcPts val="992"/>
-              </a:spcAft>
-            </a:pPr>
-            <a:r>
-              <a:rPr sz="1764" b="0" i="0">
-                <a:solidFill>
-                  <a:srgbClr val="12162E"/>
-                </a:solidFill>
-                <a:latin typeface="Arial"/>
-              </a:rPr>
-              <a:t>A training example for “which view” exists only when the agent solves a task. Here the best single view solves just </a:t>
-            </a:r>
-            <a:r>
-              <a:rPr sz="1764" b="1" i="0">
-                <a:solidFill>
-                  <a:srgbClr val="12162E"/>
-                </a:solidFill>
-                <a:latin typeface="Arial"/>
-              </a:rPr>
-              <a:t>2–36%</a:t>
-            </a:r>
-            <a:r>
-              <a:rPr sz="1764" b="0" i="0">
-                <a:solidFill>
-                  <a:srgbClr val="12162E"/>
-                </a:solidFill>
-                <a:latin typeface="Arial"/>
-              </a:rPr>
-              <a:t> of tasks, leaving typically </a:t>
-            </a:r>
-            <a:r>
-              <a:rPr sz="1764" b="1" i="0">
-                <a:solidFill>
-                  <a:srgbClr val="12162E"/>
-                </a:solidFill>
-                <a:latin typeface="Arial"/>
-              </a:rPr>
-              <a:t>15–97</a:t>
-            </a:r>
-            <a:r>
-              <a:rPr sz="1764" b="0" i="0">
-                <a:solidFill>
-                  <a:srgbClr val="12162E"/>
-                </a:solidFill>
-                <a:latin typeface="Arial"/>
-              </a:rPr>
-              <a:t> usable examples per setting — enough to train a classifier in only 2 of the 6 VisualWebArena settings.</a:t>
-            </a:r>
-          </a:p>
-        </p:txBody>
-      </p:sp>
-      <p:sp>
-        <p:nvSpPr>
-          <p:cNvPr id="92" name="Rectangle 91"/>
-          <p:cNvSpPr/>
-          <p:nvPr/>
-        </p:nvSpPr>
-        <p:spPr>
-          <a:xfrm>
-            <a:off x="727200" y="12205306"/>
-            <a:ext cx="6451200" cy="4262546"/>
+            <a:off x="727200" y="5580000"/>
+            <a:ext cx="3024000" cy="5040000"/>
           </a:xfrm>
           <a:prstGeom prst="rect">
             <a:avLst/>
@@ -4885,14 +4182,14 @@
       </p:sp>
       <p:sp>
         <p:nvSpPr>
-          <p:cNvPr id="93" name="Rectangle 92"/>
+          <p:cNvPr id="82" name="Rectangle 81"/>
           <p:cNvSpPr/>
           <p:nvPr/>
         </p:nvSpPr>
         <p:spPr>
           <a:xfrm>
-            <a:off x="727200" y="12205306"/>
-            <a:ext cx="6451200" cy="50400"/>
+            <a:off x="727200" y="5580000"/>
+            <a:ext cx="3024000" cy="50400"/>
           </a:xfrm>
           <a:prstGeom prst="rect">
             <a:avLst/>
@@ -4927,40 +4224,100 @@
           </a:p>
         </p:txBody>
       </p:sp>
-      <p:pic>
-        <p:nvPicPr>
-          <p:cNvPr id="94" name="Picture 93" descr="poster_label_supply.png"/>
-          <p:cNvPicPr>
-            <a:picLocks noChangeAspect="1"/>
-          </p:cNvPicPr>
-          <p:nvPr/>
-        </p:nvPicPr>
-        <p:blipFill>
-          <a:blip r:embed="rId5"/>
-          <a:stretch>
-            <a:fillRect/>
-          </a:stretch>
-        </p:blipFill>
-        <p:spPr>
-          <a:xfrm>
-            <a:off x="835200" y="12363706"/>
-            <a:ext cx="6235200" cy="3996147"/>
-          </a:xfrm>
-          <a:prstGeom prst="rect">
-            <a:avLst/>
-          </a:prstGeom>
-        </p:spPr>
-      </p:pic>
-      <p:sp>
-        <p:nvSpPr>
-          <p:cNvPr id="95" name="TextBox 94"/>
+      <p:sp>
+        <p:nvSpPr>
+          <p:cNvPr id="83" name="TextBox 82"/>
           <p:cNvSpPr txBox="1"/>
           <p:nvPr/>
         </p:nvSpPr>
         <p:spPr>
           <a:xfrm>
-            <a:off x="727200" y="16557852"/>
-            <a:ext cx="6451200" cy="511369"/>
+            <a:off x="907200" y="5724000"/>
+            <a:ext cx="2664000" cy="216000"/>
+          </a:xfrm>
+          <a:prstGeom prst="rect">
+            <a:avLst/>
+          </a:prstGeom>
+          <a:noFill/>
+        </p:spPr>
+        <p:txBody>
+          <a:bodyPr wrap="square" lIns="0" rIns="0" tIns="0" bIns="0">
+            <a:spAutoFit/>
+          </a:bodyPr>
+          <a:lstStyle/>
+          <a:p>
+            <a:pPr algn="l">
+              <a:lnSpc>
+                <a:spcPct val="120000"/>
+              </a:lnSpc>
+              <a:spcAft>
+                <a:spcPts val="0"/>
+              </a:spcAft>
+            </a:pPr>
+            <a:r>
+              <a:rPr sz="1059" b="0" i="0">
+                <a:solidFill>
+                  <a:srgbClr val="5D6787"/>
+                </a:solidFill>
+                <a:latin typeface="Consolas"/>
+              </a:rPr>
+              <a:t>THE TASK + THE LIVE PAGE</a:t>
+            </a:r>
+          </a:p>
+        </p:txBody>
+      </p:sp>
+      <p:sp>
+        <p:nvSpPr>
+          <p:cNvPr id="84" name="TextBox 83"/>
+          <p:cNvSpPr txBox="1"/>
+          <p:nvPr/>
+        </p:nvSpPr>
+        <p:spPr>
+          <a:xfrm>
+            <a:off x="907200" y="5958000"/>
+            <a:ext cx="2664000" cy="968345"/>
+          </a:xfrm>
+          <a:prstGeom prst="rect">
+            <a:avLst/>
+          </a:prstGeom>
+          <a:noFill/>
+        </p:spPr>
+        <p:txBody>
+          <a:bodyPr wrap="square" lIns="0" rIns="0" tIns="0" bIns="0">
+            <a:spAutoFit/>
+          </a:bodyPr>
+          <a:lstStyle/>
+          <a:p>
+            <a:pPr algn="l">
+              <a:lnSpc>
+                <a:spcPct val="120000"/>
+              </a:lnSpc>
+              <a:spcAft>
+                <a:spcPts val="992"/>
+              </a:spcAft>
+            </a:pPr>
+            <a:r>
+              <a:rPr sz="1764" b="0" i="0">
+                <a:solidFill>
+                  <a:srgbClr val="12162E"/>
+                </a:solidFill>
+                <a:latin typeface="Arial"/>
+              </a:rPr>
+              <a:t>“Show me the cheapest bike with red handlebars between $900–950.”</a:t>
+            </a:r>
+          </a:p>
+        </p:txBody>
+      </p:sp>
+      <p:sp>
+        <p:nvSpPr>
+          <p:cNvPr id="85" name="TextBox 84"/>
+          <p:cNvSpPr txBox="1"/>
+          <p:nvPr/>
+        </p:nvSpPr>
+        <p:spPr>
+          <a:xfrm>
+            <a:off x="907200" y="7016345"/>
+            <a:ext cx="2664000" cy="511369"/>
           </a:xfrm>
           <a:prstGeom prst="rect">
             <a:avLst/>
@@ -4982,105 +4339,36 @@
               </a:spcAft>
             </a:pPr>
             <a:r>
-              <a:rPr sz="1271" b="1" i="0">
+              <a:rPr sz="1271" b="0" i="0">
                 <a:solidFill>
                   <a:srgbClr val="5D6787"/>
                 </a:solidFill>
                 <a:latin typeface="Arial"/>
               </a:rPr>
-              <a:t>Fig 3.</a:t>
-            </a:r>
-            <a:r>
-              <a:rPr sz="1271" b="0" i="0">
-                <a:solidFill>
-                  <a:srgbClr val="5D6787"/>
-                </a:solidFill>
-                <a:latin typeface="Arial"/>
-              </a:rPr>
-              <a:t> Usable “which view” examples against the best single view's success rate, one point per VisualWebArena setting. Examples exist only where tasks get solved.</a:t>
-            </a:r>
-          </a:p>
-        </p:txBody>
-      </p:sp>
-      <p:sp>
-        <p:nvSpPr>
-          <p:cNvPr id="96" name="TextBox 95"/>
-          <p:cNvSpPr txBox="1"/>
-          <p:nvPr/>
-        </p:nvSpPr>
-        <p:spPr>
-          <a:xfrm>
-            <a:off x="727200" y="17177221"/>
-            <a:ext cx="6451200" cy="968345"/>
+              <a:t>Part of the intent is in the pictures, part in the text.</a:t>
+            </a:r>
+          </a:p>
+        </p:txBody>
+      </p:sp>
+      <p:sp>
+        <p:nvSpPr>
+          <p:cNvPr id="86" name="Rectangle 85"/>
+          <p:cNvSpPr/>
+          <p:nvPr/>
+        </p:nvSpPr>
+        <p:spPr>
+          <a:xfrm>
+            <a:off x="892800" y="7621314"/>
+            <a:ext cx="2692800" cy="1518975"/>
           </a:xfrm>
           <a:prstGeom prst="rect">
             <a:avLst/>
           </a:prstGeom>
           <a:noFill/>
-        </p:spPr>
-        <p:txBody>
-          <a:bodyPr wrap="square" lIns="0" rIns="0" tIns="0" bIns="0">
-            <a:spAutoFit/>
-          </a:bodyPr>
-          <a:lstStyle/>
-          <a:p>
-            <a:pPr algn="l">
-              <a:lnSpc>
-                <a:spcPct val="120000"/>
-              </a:lnSpc>
-              <a:spcAft>
-                <a:spcPts val="992"/>
-              </a:spcAft>
-            </a:pPr>
-            <a:r>
-              <a:rPr sz="1764" b="0" i="0">
-                <a:solidFill>
-                  <a:srgbClr val="12162E"/>
-                </a:solidFill>
-                <a:latin typeface="Arial"/>
-              </a:rPr>
-              <a:t>Shrinking the training data on purpose points to scarcity as the main bottleneck, and prices it: the failing settings would need at least </a:t>
-            </a:r>
-            <a:r>
-              <a:rPr sz="1764" b="1" i="0">
-                <a:solidFill>
-                  <a:srgbClr val="12162E"/>
-                </a:solidFill>
-                <a:latin typeface="Arial"/>
-              </a:rPr>
-              <a:t>2.1–4.2×</a:t>
-            </a:r>
-            <a:r>
-              <a:rPr sz="1764" b="0" i="0">
-                <a:solidFill>
-                  <a:srgbClr val="12162E"/>
-                </a:solidFill>
-                <a:latin typeface="Arial"/>
-              </a:rPr>
-              <a:t> more tasks than the benchmarks contain.</a:t>
-            </a:r>
-          </a:p>
-        </p:txBody>
-      </p:sp>
-      <p:sp>
-        <p:nvSpPr>
-          <p:cNvPr id="14" name="Rectangle 13"/>
-          <p:cNvSpPr/>
-          <p:nvPr/>
-        </p:nvSpPr>
-        <p:spPr>
-          <a:xfrm>
-            <a:off x="727200" y="18397566"/>
-            <a:ext cx="177988" cy="177988"/>
-          </a:xfrm>
-          <a:prstGeom prst="rect">
-            <a:avLst/>
-          </a:prstGeom>
-          <a:solidFill>
-            <a:srgbClr val="AB5FCE"/>
-          </a:solidFill>
-          <a:ln>
-            <a:noFill/>
+          <a:ln w="8890">
+            <a:solidFill>
+              <a:srgbClr val="C9CFE0"/>
+            </a:solidFill>
           </a:ln>
           <a:effectLst/>
         </p:spPr>
@@ -5099,325 +4387,6 @@
           </a:fontRef>
         </p:style>
         <p:txBody>
-          <a:bodyPr rtlCol="0" anchor="ctr"/>
-          <a:lstStyle/>
-          <a:p>
-            <a:pPr algn="ctr"/>
-            <a:endParaRPr/>
-          </a:p>
-        </p:txBody>
-      </p:sp>
-      <p:sp>
-        <p:nvSpPr>
-          <p:cNvPr id="15" name="TextBox 14"/>
-          <p:cNvSpPr txBox="1"/>
-          <p:nvPr/>
-        </p:nvSpPr>
-        <p:spPr>
-          <a:xfrm>
-            <a:off x="1032323" y="18354366"/>
-            <a:ext cx="6144827" cy="238912"/>
-          </a:xfrm>
-          <a:prstGeom prst="rect">
-            <a:avLst/>
-          </a:prstGeom>
-          <a:noFill/>
-        </p:spPr>
-        <p:txBody>
-          <a:bodyPr wrap="square" lIns="0" tIns="0" rIns="0" bIns="0" anchor="t">
-            <a:spAutoFit/>
-          </a:bodyPr>
-          <a:lstStyle/>
-          <a:p>
-            <a:pPr algn="l">
-              <a:lnSpc>
-                <a:spcPct val="118000"/>
-              </a:lnSpc>
-            </a:pPr>
-            <a:r>
-              <a:rPr sz="1412" b="1" i="0">
-                <a:solidFill>
-                  <a:srgbClr val="141E41"/>
-                </a:solidFill>
-                <a:latin typeface="Consolas"/>
-              </a:rPr>
-              <a:t>TAKEAWAY</a:t>
-            </a:r>
-            <a:endParaRPr sz="1412" b="1" spc="180" dirty="0">
-              <a:solidFill>
-                <a:srgbClr val="141E41"/>
-              </a:solidFill>
-              <a:latin typeface="Consolas"/>
-            </a:endParaRPr>
-          </a:p>
-        </p:txBody>
-      </p:sp>
-      <p:sp>
-        <p:nvSpPr>
-          <p:cNvPr id="16" name="Rectangle 15"/>
-          <p:cNvSpPr/>
-          <p:nvPr/>
-        </p:nvSpPr>
-        <p:spPr>
-          <a:xfrm>
-            <a:off x="727200" y="18715402"/>
-            <a:ext cx="1169636" cy="35597"/>
-          </a:xfrm>
-          <a:prstGeom prst="rect">
-            <a:avLst/>
-          </a:prstGeom>
-          <a:solidFill>
-            <a:srgbClr val="141E41"/>
-          </a:solidFill>
-          <a:ln>
-            <a:noFill/>
-          </a:ln>
-          <a:effectLst/>
-        </p:spPr>
-        <p:style>
-          <a:lnRef idx="1">
-            <a:schemeClr val="accent1"/>
-          </a:lnRef>
-          <a:fillRef idx="3">
-            <a:schemeClr val="accent1"/>
-          </a:fillRef>
-          <a:effectRef idx="2">
-            <a:schemeClr val="accent1"/>
-          </a:effectRef>
-          <a:fontRef idx="minor">
-            <a:schemeClr val="lt1"/>
-          </a:fontRef>
-        </p:style>
-        <p:txBody>
-          <a:bodyPr rtlCol="0" anchor="ctr"/>
-          <a:lstStyle/>
-          <a:p>
-            <a:pPr algn="ctr"/>
-            <a:endParaRPr/>
-          </a:p>
-        </p:txBody>
-      </p:sp>
-      <p:sp>
-        <p:nvSpPr>
-          <p:cNvPr id="17" name="Rectangle 16"/>
-          <p:cNvSpPr/>
-          <p:nvPr/>
-        </p:nvSpPr>
-        <p:spPr>
-          <a:xfrm>
-            <a:off x="1896836" y="18725573"/>
-            <a:ext cx="5281564" cy="15256"/>
-          </a:xfrm>
-          <a:prstGeom prst="rect">
-            <a:avLst/>
-          </a:prstGeom>
-          <a:solidFill>
-            <a:srgbClr val="DDE3F2"/>
-          </a:solidFill>
-          <a:ln>
-            <a:noFill/>
-          </a:ln>
-          <a:effectLst/>
-        </p:spPr>
-        <p:style>
-          <a:lnRef idx="1">
-            <a:schemeClr val="accent1"/>
-          </a:lnRef>
-          <a:fillRef idx="3">
-            <a:schemeClr val="accent1"/>
-          </a:fillRef>
-          <a:effectRef idx="2">
-            <a:schemeClr val="accent1"/>
-          </a:effectRef>
-          <a:fontRef idx="minor">
-            <a:schemeClr val="lt1"/>
-          </a:fontRef>
-        </p:style>
-        <p:txBody>
-          <a:bodyPr rtlCol="0" anchor="ctr"/>
-          <a:lstStyle/>
-          <a:p>
-            <a:pPr algn="ctr"/>
-            <a:endParaRPr/>
-          </a:p>
-        </p:txBody>
-      </p:sp>
-      <p:sp>
-        <p:nvSpPr>
-          <p:cNvPr id="97" name="TextBox 96"/>
-          <p:cNvSpPr txBox="1"/>
-          <p:nvPr/>
-        </p:nvSpPr>
-        <p:spPr>
-          <a:xfrm>
-            <a:off x="727200" y="18937566"/>
-            <a:ext cx="6451200" cy="1613908"/>
-          </a:xfrm>
-          <a:prstGeom prst="rect">
-            <a:avLst/>
-          </a:prstGeom>
-          <a:noFill/>
-        </p:spPr>
-        <p:txBody>
-          <a:bodyPr wrap="square" lIns="0" rIns="0" tIns="0" bIns="0">
-            <a:spAutoFit/>
-          </a:bodyPr>
-          <a:lstStyle/>
-          <a:p>
-            <a:pPr algn="l">
-              <a:lnSpc>
-                <a:spcPct val="120000"/>
-              </a:lnSpc>
-              <a:spcAft>
-                <a:spcPts val="992"/>
-              </a:spcAft>
-            </a:pPr>
-            <a:r>
-              <a:rPr sz="1764" b="1" i="0">
-                <a:solidFill>
-                  <a:srgbClr val="12162E"/>
-                </a:solidFill>
-                <a:latin typeface="Arial"/>
-              </a:rPr>
-              <a:t>Learning how to see is not only a modelling problem: whether it can be learned depends on how good the agent producing the examples already is.</a:t>
-            </a:r>
-            <a:r>
-              <a:rPr sz="1764" b="0" i="0">
-                <a:solidFill>
-                  <a:srgbClr val="12162E"/>
-                </a:solidFill>
-                <a:latin typeface="Arial"/>
-              </a:rPr>
-              <a:t> So, in this order: improve the agent, then collect reliable examples, then learn when to look.</a:t>
-            </a:r>
-          </a:p>
-        </p:txBody>
-      </p:sp>
-      <p:sp>
-        <p:nvSpPr>
-          <p:cNvPr id="98" name="TextBox 97"/>
-          <p:cNvSpPr txBox="1"/>
-          <p:nvPr/>
-        </p:nvSpPr>
-        <p:spPr>
-          <a:xfrm>
-            <a:off x="727200" y="20605474"/>
-            <a:ext cx="6451200" cy="511369"/>
-          </a:xfrm>
-          <a:prstGeom prst="rect">
-            <a:avLst/>
-          </a:prstGeom>
-          <a:noFill/>
-        </p:spPr>
-        <p:txBody>
-          <a:bodyPr wrap="square" lIns="0" rIns="0" tIns="0" bIns="0">
-            <a:spAutoFit/>
-          </a:bodyPr>
-          <a:lstStyle/>
-          <a:p>
-            <a:pPr algn="l">
-              <a:lnSpc>
-                <a:spcPct val="132000"/>
-              </a:lnSpc>
-              <a:spcAft>
-                <a:spcPts val="425"/>
-              </a:spcAft>
-            </a:pPr>
-            <a:r>
-              <a:rPr sz="1271" b="0" i="0">
-                <a:solidFill>
-                  <a:srgbClr val="5D6787"/>
-                </a:solidFill>
-                <a:latin typeface="Arial"/>
-              </a:rPr>
-              <a:t>Measured in the 2–36% success regime we observed. This need not hold for stronger agents.</a:t>
-            </a:r>
-          </a:p>
-        </p:txBody>
-      </p:sp>
-      <p:sp>
-        <p:nvSpPr>
-          <p:cNvPr id="99" name="Rectangle 98"/>
-          <p:cNvSpPr/>
-          <p:nvPr/>
-        </p:nvSpPr>
-        <p:spPr>
-          <a:xfrm>
-            <a:off x="7534800" y="7985053"/>
-            <a:ext cx="13255200" cy="7643134"/>
-          </a:xfrm>
-          <a:prstGeom prst="rect">
-            <a:avLst/>
-          </a:prstGeom>
-          <a:solidFill>
-            <a:srgbClr val="F7F9FD"/>
-          </a:solidFill>
-          <a:ln w="8890">
-            <a:solidFill>
-              <a:srgbClr val="DDE3F2"/>
-            </a:solidFill>
-          </a:ln>
-          <a:effectLst/>
-        </p:spPr>
-        <p:style>
-          <a:lnRef idx="1">
-            <a:schemeClr val="accent1"/>
-          </a:lnRef>
-          <a:fillRef idx="3">
-            <a:schemeClr val="accent1"/>
-          </a:fillRef>
-          <a:effectRef idx="2">
-            <a:schemeClr val="accent1"/>
-          </a:effectRef>
-          <a:fontRef idx="minor">
-            <a:schemeClr val="lt1"/>
-          </a:fontRef>
-        </p:style>
-        <p:txBody>
-          <a:bodyPr rtlCol="0" anchor="ctr" wrap="square"/>
-          <a:lstStyle/>
-          <a:p>
-            <a:pPr algn="ctr"/>
-          </a:p>
-        </p:txBody>
-      </p:sp>
-      <p:sp>
-        <p:nvSpPr>
-          <p:cNvPr id="100" name="Rectangle 99"/>
-          <p:cNvSpPr/>
-          <p:nvPr/>
-        </p:nvSpPr>
-        <p:spPr>
-          <a:xfrm>
-            <a:off x="7534800" y="7985053"/>
-            <a:ext cx="13255200" cy="50400"/>
-          </a:xfrm>
-          <a:prstGeom prst="rect">
-            <a:avLst/>
-          </a:prstGeom>
-          <a:solidFill>
-            <a:srgbClr val="5049F9"/>
-          </a:solidFill>
-          <a:ln>
-            <a:noFill/>
-          </a:ln>
-          <a:effectLst/>
-        </p:spPr>
-        <p:style>
-          <a:lnRef idx="1">
-            <a:schemeClr val="accent1"/>
-          </a:lnRef>
-          <a:fillRef idx="3">
-            <a:schemeClr val="accent1"/>
-          </a:fillRef>
-          <a:effectRef idx="2">
-            <a:schemeClr val="accent1"/>
-          </a:effectRef>
-          <a:fontRef idx="minor">
-            <a:schemeClr val="lt1"/>
-          </a:fontRef>
-        </p:style>
-        <p:txBody>
           <a:bodyPr rtlCol="0" anchor="ctr" wrap="square"/>
           <a:lstStyle/>
           <a:p>
@@ -5427,22 +4396,22 @@
       </p:sp>
       <p:pic>
         <p:nvPicPr>
-          <p:cNvPr id="101" name="Picture 100" descr="poster_dominance_plane.png"/>
+          <p:cNvPr id="87" name="Picture 86" descr="eye_look.png"/>
           <p:cNvPicPr>
             <a:picLocks noChangeAspect="1"/>
           </p:cNvPicPr>
           <p:nvPr/>
         </p:nvPicPr>
         <p:blipFill>
-          <a:blip r:embed="rId6"/>
+          <a:blip r:embed="rId5"/>
           <a:stretch>
             <a:fillRect/>
           </a:stretch>
         </p:blipFill>
         <p:spPr>
           <a:xfrm>
-            <a:off x="7642800" y="8143453"/>
-            <a:ext cx="13039200" cy="7376735"/>
+            <a:off x="907200" y="7635714"/>
+            <a:ext cx="2664000" cy="1490175"/>
           </a:xfrm>
           <a:prstGeom prst="rect">
             <a:avLst/>
@@ -5451,2012 +4420,14 @@
       </p:pic>
       <p:sp>
         <p:nvSpPr>
-          <p:cNvPr id="102" name="TextBox 101"/>
-          <p:cNvSpPr txBox="1"/>
-          <p:nvPr/>
-        </p:nvSpPr>
-        <p:spPr>
-          <a:xfrm>
-            <a:off x="7534800" y="15718187"/>
-            <a:ext cx="13255200" cy="511369"/>
-          </a:xfrm>
-          <a:prstGeom prst="rect">
-            <a:avLst/>
-          </a:prstGeom>
-          <a:noFill/>
-        </p:spPr>
-        <p:txBody>
-          <a:bodyPr wrap="square" lIns="0" rIns="0" tIns="0" bIns="0">
-            <a:spAutoFit/>
-          </a:bodyPr>
-          <a:lstStyle/>
-          <a:p>
-            <a:pPr algn="l">
-              <a:lnSpc>
-                <a:spcPct val="132000"/>
-              </a:lnSpc>
-              <a:spcAft>
-                <a:spcPts val="425"/>
-              </a:spcAft>
-            </a:pPr>
-            <a:r>
-              <a:rPr sz="1271" b="1" i="0">
-                <a:solidFill>
-                  <a:srgbClr val="5D6787"/>
-                </a:solidFill>
-                <a:latin typeface="Arial"/>
-              </a:rPr>
-              <a:t>Fig 2.</a:t>
-            </a:r>
-            <a:r>
-              <a:rPr sz="1271" b="0" i="0">
-                <a:solidFill>
-                  <a:srgbClr val="5D6787"/>
-                </a:solidFill>
-                <a:latin typeface="Arial"/>
-              </a:rPr>
-              <a:t> Every way of choosing a view, in every setting, compared with one fixed rule: </a:t>
-            </a:r>
-            <a:r>
-              <a:rPr sz="1271" b="1" i="0">
-                <a:solidFill>
-                  <a:srgbClr val="5D6787"/>
-                </a:solidFill>
-                <a:latin typeface="Arial"/>
-              </a:rPr>
-              <a:t>always use the cheapest view</a:t>
-            </a:r>
-            <a:r>
-              <a:rPr sz="1271" b="0" i="0">
-                <a:solidFill>
-                  <a:srgbClr val="5D6787"/>
-                </a:solidFill>
-                <a:latin typeface="Arial"/>
-              </a:rPr>
-              <a:t> (★). A win lands in the shaded region — cheaper </a:t>
-            </a:r>
-            <a:r>
-              <a:rPr sz="1271" b="0" i="1">
-                <a:solidFill>
-                  <a:srgbClr val="5D6787"/>
-                </a:solidFill>
-                <a:latin typeface="Arial"/>
-              </a:rPr>
-              <a:t>and</a:t>
-            </a:r>
-            <a:r>
-              <a:rPr sz="1271" b="0" i="0">
-                <a:solidFill>
-                  <a:srgbClr val="5D6787"/>
-                </a:solidFill>
-                <a:latin typeface="Arial"/>
-              </a:rPr>
-              <a:t> no worse. Always-cheapest is cheapest on average, not on every task, which is why a few points sit left of it. Learned choices are scored only on tasks they never saw.</a:t>
-            </a:r>
-          </a:p>
-        </p:txBody>
-      </p:sp>
-      <p:sp>
-        <p:nvSpPr>
-          <p:cNvPr id="103" name="TextBox 102"/>
-          <p:cNvSpPr txBox="1"/>
-          <p:nvPr/>
-        </p:nvSpPr>
-        <p:spPr>
-          <a:xfrm>
-            <a:off x="7534800" y="16337556"/>
-            <a:ext cx="13255200" cy="2188690"/>
-          </a:xfrm>
-          <a:prstGeom prst="rect">
-            <a:avLst/>
-          </a:prstGeom>
-          <a:noFill/>
-        </p:spPr>
-        <p:txBody>
-          <a:bodyPr wrap="square" lIns="0" rIns="0" tIns="0" bIns="0">
-            <a:spAutoFit/>
-          </a:bodyPr>
-          <a:lstStyle/>
-          <a:p>
-            <a:pPr algn="l">
-              <a:lnSpc>
-                <a:spcPct val="120000"/>
-              </a:lnSpc>
-              <a:spcAft>
-                <a:spcPts val="992"/>
-              </a:spcAft>
-            </a:pPr>
-            <a:r>
-              <a:rPr sz="1764" b="1" i="0">
-                <a:solidFill>
-                  <a:srgbClr val="12162E"/>
-                </a:solidFill>
-                <a:latin typeface="Arial"/>
-              </a:rPr>
-              <a:t>Perfect hindsight would pay.</a:t>
-            </a:r>
-            <a:r>
-              <a:rPr sz="1764" b="0" i="0">
-                <a:solidFill>
-                  <a:srgbClr val="12162E"/>
-                </a:solidFill>
-                <a:latin typeface="Arial"/>
-              </a:rPr>
-              <a:t> Picking the winning view for each task after the fact would solve </a:t>
-            </a:r>
-            <a:r>
-              <a:rPr sz="1764" b="1" i="0">
-                <a:solidFill>
-                  <a:srgbClr val="12162E"/>
-                </a:solidFill>
-                <a:latin typeface="Arial"/>
-              </a:rPr>
-              <a:t>3.45 to 16.35 more tasks in every 100</a:t>
-            </a:r>
-            <a:r>
-              <a:rPr sz="1764" b="0" i="0">
-                <a:solidFill>
-                  <a:srgbClr val="12162E"/>
-                </a:solidFill>
-                <a:latin typeface="Arial"/>
-              </a:rPr>
-              <a:t> than the best single view, and spend 1.6–35.3% less — in all 8 settings.</a:t>
-            </a:r>
-          </a:p>
-          <a:p>
-            <a:pPr algn="l">
-              <a:lnSpc>
-                <a:spcPct val="120000"/>
-              </a:lnSpc>
-              <a:spcAft>
-                <a:spcPts val="992"/>
-              </a:spcAft>
-            </a:pPr>
-            <a:r>
-              <a:rPr sz="1764" b="1" i="0">
-                <a:solidFill>
-                  <a:srgbClr val="12162E"/>
-                </a:solidFill>
-                <a:latin typeface="Arial"/>
-              </a:rPr>
-              <a:t>Nothing we trained could do it.</a:t>
-            </a:r>
-            <a:r>
-              <a:rPr sz="1764" b="0" i="0">
-                <a:solidFill>
-                  <a:srgbClr val="12162E"/>
-                </a:solidFill>
-                <a:latin typeface="Arial"/>
-              </a:rPr>
-              <a:t> In </a:t>
-            </a:r>
-            <a:r>
-              <a:rPr sz="1764" b="1" i="0">
-                <a:solidFill>
-                  <a:srgbClr val="12162E"/>
-                </a:solidFill>
-                <a:latin typeface="Arial"/>
-              </a:rPr>
-              <a:t>0 of 8</a:t>
-            </a:r>
-            <a:r>
-              <a:rPr sz="1764" b="0" i="0">
-                <a:solidFill>
-                  <a:srgbClr val="12162E"/>
-                </a:solidFill>
-                <a:latin typeface="Arial"/>
-              </a:rPr>
-              <a:t> settings did a learned choice beat always using the cheapest view on both success and cost — and even perfect hindsight manages that in only </a:t>
-            </a:r>
-            <a:r>
-              <a:rPr sz="1764" b="1" i="0">
-                <a:solidFill>
-                  <a:srgbClr val="12162E"/>
-                </a:solidFill>
-                <a:latin typeface="Arial"/>
-              </a:rPr>
-              <a:t>1 of 8</a:t>
-            </a:r>
-            <a:r>
-              <a:rPr sz="1764" b="0" i="0">
-                <a:solidFill>
-                  <a:srgbClr val="12162E"/>
-                </a:solidFill>
-                <a:latin typeface="Arial"/>
-              </a:rPr>
-              <a:t>.</a:t>
-            </a:r>
-          </a:p>
-          <a:p>
-            <a:pPr algn="l">
-              <a:lnSpc>
-                <a:spcPct val="120000"/>
-              </a:lnSpc>
-              <a:spcAft>
-                <a:spcPts val="992"/>
-              </a:spcAft>
-            </a:pPr>
-            <a:r>
-              <a:rPr sz="1764" b="1" i="0">
-                <a:solidFill>
-                  <a:srgbClr val="12162E"/>
-                </a:solidFill>
-                <a:latin typeface="Arial"/>
-              </a:rPr>
-              <a:t>What survives is a bound, not a method.</a:t>
-            </a:r>
-            <a:r>
-              <a:rPr sz="1764" b="0" i="0">
-                <a:solidFill>
-                  <a:srgbClr val="12162E"/>
-                </a:solidFill>
-                <a:latin typeface="Arial"/>
-              </a:rPr>
-              <a:t> Sending the tasks nobody solves to the cheapest view saves 9.5–30.6% at the same success in 8 of 8 — but that too needs hindsight, and plain always-cheapest usually saves more.</a:t>
-            </a:r>
-          </a:p>
-        </p:txBody>
-      </p:sp>
-      <p:sp>
-        <p:nvSpPr>
-          <p:cNvPr id="14" name="Rectangle 13"/>
+          <p:cNvPr id="88" name="Rectangle 87"/>
           <p:cNvSpPr/>
           <p:nvPr/>
         </p:nvSpPr>
         <p:spPr>
           <a:xfrm>
-            <a:off x="7534800" y="18778246"/>
-            <a:ext cx="177988" cy="177988"/>
-          </a:xfrm>
-          <a:prstGeom prst="rect">
-            <a:avLst/>
-          </a:prstGeom>
-          <a:solidFill>
-            <a:srgbClr val="AB5FCE"/>
-          </a:solidFill>
-          <a:ln>
-            <a:noFill/>
-          </a:ln>
-          <a:effectLst/>
-        </p:spPr>
-        <p:style>
-          <a:lnRef idx="1">
-            <a:schemeClr val="accent1"/>
-          </a:lnRef>
-          <a:fillRef idx="3">
-            <a:schemeClr val="accent1"/>
-          </a:fillRef>
-          <a:effectRef idx="2">
-            <a:schemeClr val="accent1"/>
-          </a:effectRef>
-          <a:fontRef idx="minor">
-            <a:schemeClr val="lt1"/>
-          </a:fontRef>
-        </p:style>
-        <p:txBody>
-          <a:bodyPr rtlCol="0" anchor="ctr"/>
-          <a:lstStyle/>
-          <a:p>
-            <a:pPr algn="ctr"/>
-            <a:endParaRPr/>
-          </a:p>
-        </p:txBody>
-      </p:sp>
-      <p:sp>
-        <p:nvSpPr>
-          <p:cNvPr id="15" name="TextBox 14"/>
-          <p:cNvSpPr txBox="1"/>
-          <p:nvPr/>
-        </p:nvSpPr>
-        <p:spPr>
-          <a:xfrm>
-            <a:off x="7839923" y="18735046"/>
-            <a:ext cx="6144827" cy="238912"/>
-          </a:xfrm>
-          <a:prstGeom prst="rect">
-            <a:avLst/>
-          </a:prstGeom>
-          <a:noFill/>
-        </p:spPr>
-        <p:txBody>
-          <a:bodyPr wrap="square" lIns="0" tIns="0" rIns="0" bIns="0" anchor="t">
-            <a:spAutoFit/>
-          </a:bodyPr>
-          <a:lstStyle/>
-          <a:p>
-            <a:pPr algn="l">
-              <a:lnSpc>
-                <a:spcPct val="118000"/>
-              </a:lnSpc>
-            </a:pPr>
-            <a:r>
-              <a:rPr sz="1412" b="1" i="0">
-                <a:solidFill>
-                  <a:srgbClr val="141E41"/>
-                </a:solidFill>
-                <a:latin typeface="Consolas"/>
-              </a:rPr>
-              <a:t>WATCH THE LAPTOP BESIDE THIS POSTER</a:t>
-            </a:r>
-            <a:endParaRPr sz="1412" b="1" spc="180" dirty="0">
-              <a:solidFill>
-                <a:srgbClr val="141E41"/>
-              </a:solidFill>
-              <a:latin typeface="Consolas"/>
-            </a:endParaRPr>
-          </a:p>
-        </p:txBody>
-      </p:sp>
-      <p:sp>
-        <p:nvSpPr>
-          <p:cNvPr id="16" name="Rectangle 15"/>
-          <p:cNvSpPr/>
-          <p:nvPr/>
-        </p:nvSpPr>
-        <p:spPr>
-          <a:xfrm>
-            <a:off x="7534800" y="19096082"/>
-            <a:ext cx="1169636" cy="35597"/>
-          </a:xfrm>
-          <a:prstGeom prst="rect">
-            <a:avLst/>
-          </a:prstGeom>
-          <a:solidFill>
-            <a:srgbClr val="141E41"/>
-          </a:solidFill>
-          <a:ln>
-            <a:noFill/>
-          </a:ln>
-          <a:effectLst/>
-        </p:spPr>
-        <p:style>
-          <a:lnRef idx="1">
-            <a:schemeClr val="accent1"/>
-          </a:lnRef>
-          <a:fillRef idx="3">
-            <a:schemeClr val="accent1"/>
-          </a:fillRef>
-          <a:effectRef idx="2">
-            <a:schemeClr val="accent1"/>
-          </a:effectRef>
-          <a:fontRef idx="minor">
-            <a:schemeClr val="lt1"/>
-          </a:fontRef>
-        </p:style>
-        <p:txBody>
-          <a:bodyPr rtlCol="0" anchor="ctr"/>
-          <a:lstStyle/>
-          <a:p>
-            <a:pPr algn="ctr"/>
-            <a:endParaRPr/>
-          </a:p>
-        </p:txBody>
-      </p:sp>
-      <p:sp>
-        <p:nvSpPr>
-          <p:cNvPr id="17" name="Rectangle 16"/>
-          <p:cNvSpPr/>
-          <p:nvPr/>
-        </p:nvSpPr>
-        <p:spPr>
-          <a:xfrm>
-            <a:off x="8704436" y="19106253"/>
-            <a:ext cx="12085564" cy="15256"/>
-          </a:xfrm>
-          <a:prstGeom prst="rect">
-            <a:avLst/>
-          </a:prstGeom>
-          <a:solidFill>
-            <a:srgbClr val="DDE3F2"/>
-          </a:solidFill>
-          <a:ln>
-            <a:noFill/>
-          </a:ln>
-          <a:effectLst/>
-        </p:spPr>
-        <p:style>
-          <a:lnRef idx="1">
-            <a:schemeClr val="accent1"/>
-          </a:lnRef>
-          <a:fillRef idx="3">
-            <a:schemeClr val="accent1"/>
-          </a:fillRef>
-          <a:effectRef idx="2">
-            <a:schemeClr val="accent1"/>
-          </a:effectRef>
-          <a:fontRef idx="minor">
-            <a:schemeClr val="lt1"/>
-          </a:fontRef>
-        </p:style>
-        <p:txBody>
-          <a:bodyPr rtlCol="0" anchor="ctr"/>
-          <a:lstStyle/>
-          <a:p>
-            <a:pPr algn="ctr"/>
-            <a:endParaRPr/>
-          </a:p>
-        </p:txBody>
-      </p:sp>
-      <p:sp>
-        <p:nvSpPr>
-          <p:cNvPr id="104" name="TextBox 103"/>
-          <p:cNvSpPr txBox="1"/>
-          <p:nvPr/>
-        </p:nvSpPr>
-        <p:spPr>
-          <a:xfrm>
-            <a:off x="7534800" y="19318246"/>
-            <a:ext cx="13255200" cy="645563"/>
-          </a:xfrm>
-          <a:prstGeom prst="rect">
-            <a:avLst/>
-          </a:prstGeom>
-          <a:noFill/>
-        </p:spPr>
-        <p:txBody>
-          <a:bodyPr wrap="square" lIns="0" rIns="0" tIns="0" bIns="0">
-            <a:spAutoFit/>
-          </a:bodyPr>
-          <a:lstStyle/>
-          <a:p>
-            <a:pPr algn="l">
-              <a:lnSpc>
-                <a:spcPct val="120000"/>
-              </a:lnSpc>
-              <a:spcAft>
-                <a:spcPts val="992"/>
-              </a:spcAft>
-            </a:pPr>
-            <a:r>
-              <a:rPr sz="1764" b="0" i="0">
-                <a:solidFill>
-                  <a:srgbClr val="12162E"/>
-                </a:solidFill>
-                <a:latin typeface="Arial"/>
-              </a:rPr>
-              <a:t>Same task, three views, different behaviour and different bills — step by step. Three illustrative tasks, chosen so each view wins once; </a:t>
-            </a:r>
-            <a:r>
-              <a:rPr sz="1764" b="1" i="0">
-                <a:solidFill>
-                  <a:srgbClr val="12162E"/>
-                </a:solidFill>
-                <a:latin typeface="Arial"/>
-              </a:rPr>
-              <a:t>not</a:t>
-            </a:r>
-            <a:r>
-              <a:rPr sz="1764" b="0" i="0">
-                <a:solidFill>
-                  <a:srgbClr val="12162E"/>
-                </a:solidFill>
-                <a:latin typeface="Arial"/>
-              </a:rPr>
-              <a:t> how often each wins.</a:t>
-            </a:r>
-          </a:p>
-        </p:txBody>
-      </p:sp>
-      <p:sp>
-        <p:nvSpPr>
-          <p:cNvPr id="105" name="TextBox 104"/>
-          <p:cNvSpPr txBox="1"/>
-          <p:nvPr/>
-        </p:nvSpPr>
-        <p:spPr>
-          <a:xfrm>
-            <a:off x="14734800" y="20071809"/>
-            <a:ext cx="2018400" cy="216000"/>
-          </a:xfrm>
-          <a:prstGeom prst="rect">
-            <a:avLst/>
-          </a:prstGeom>
-          <a:noFill/>
-        </p:spPr>
-        <p:txBody>
-          <a:bodyPr wrap="square" lIns="0" rIns="0" tIns="0" bIns="0">
-            <a:spAutoFit/>
-          </a:bodyPr>
-          <a:lstStyle/>
-          <a:p>
-            <a:pPr algn="l">
-              <a:lnSpc>
-                <a:spcPct val="120000"/>
-              </a:lnSpc>
-              <a:spcAft>
-                <a:spcPts val="0"/>
-              </a:spcAft>
-            </a:pPr>
-            <a:r>
-              <a:rPr sz="1059" b="1" i="0">
-                <a:solidFill>
-                  <a:srgbClr val="1F5FD6"/>
-                </a:solidFill>
-                <a:latin typeface="Consolas"/>
-              </a:rPr>
-              <a:t>LOOK</a:t>
-            </a:r>
-          </a:p>
-        </p:txBody>
-      </p:sp>
-      <p:sp>
-        <p:nvSpPr>
-          <p:cNvPr id="106" name="TextBox 105"/>
-          <p:cNvSpPr txBox="1"/>
-          <p:nvPr/>
-        </p:nvSpPr>
-        <p:spPr>
-          <a:xfrm>
-            <a:off x="16753200" y="20071809"/>
-            <a:ext cx="2018400" cy="216000"/>
-          </a:xfrm>
-          <a:prstGeom prst="rect">
-            <a:avLst/>
-          </a:prstGeom>
-          <a:noFill/>
-        </p:spPr>
-        <p:txBody>
-          <a:bodyPr wrap="square" lIns="0" rIns="0" tIns="0" bIns="0">
-            <a:spAutoFit/>
-          </a:bodyPr>
-          <a:lstStyle/>
-          <a:p>
-            <a:pPr algn="l">
-              <a:lnSpc>
-                <a:spcPct val="120000"/>
-              </a:lnSpc>
-              <a:spcAft>
-                <a:spcPts val="0"/>
-              </a:spcAft>
-            </a:pPr>
-            <a:r>
-              <a:rPr sz="1059" b="1" i="0">
-                <a:solidFill>
-                  <a:srgbClr val="E8720C"/>
-                </a:solidFill>
-                <a:latin typeface="Consolas"/>
-              </a:rPr>
-              <a:t>READ</a:t>
-            </a:r>
-          </a:p>
-        </p:txBody>
-      </p:sp>
-      <p:sp>
-        <p:nvSpPr>
-          <p:cNvPr id="107" name="TextBox 106"/>
-          <p:cNvSpPr txBox="1"/>
-          <p:nvPr/>
-        </p:nvSpPr>
-        <p:spPr>
-          <a:xfrm>
-            <a:off x="18771600" y="20071809"/>
-            <a:ext cx="2018400" cy="216000"/>
-          </a:xfrm>
-          <a:prstGeom prst="rect">
-            <a:avLst/>
-          </a:prstGeom>
-          <a:noFill/>
-        </p:spPr>
-        <p:txBody>
-          <a:bodyPr wrap="square" lIns="0" rIns="0" tIns="0" bIns="0">
-            <a:spAutoFit/>
-          </a:bodyPr>
-          <a:lstStyle/>
-          <a:p>
-            <a:pPr algn="l">
-              <a:lnSpc>
-                <a:spcPct val="120000"/>
-              </a:lnSpc>
-              <a:spcAft>
-                <a:spcPts val="0"/>
-              </a:spcAft>
-            </a:pPr>
-            <a:r>
-              <a:rPr sz="1059" b="1" i="0">
-                <a:solidFill>
-                  <a:srgbClr val="14855F"/>
-                </a:solidFill>
-                <a:latin typeface="Consolas"/>
-              </a:rPr>
-              <a:t>BOTH</a:t>
-            </a:r>
-          </a:p>
-        </p:txBody>
-      </p:sp>
-      <p:sp>
-        <p:nvSpPr>
-          <p:cNvPr id="108" name="Rectangle 107"/>
-          <p:cNvSpPr/>
-          <p:nvPr/>
-        </p:nvSpPr>
-        <p:spPr>
-          <a:xfrm>
-            <a:off x="7534800" y="20323809"/>
-            <a:ext cx="13255200" cy="10800"/>
-          </a:xfrm>
-          <a:prstGeom prst="rect">
-            <a:avLst/>
-          </a:prstGeom>
-          <a:solidFill>
-            <a:srgbClr val="DDE3F2"/>
-          </a:solidFill>
-          <a:ln>
-            <a:noFill/>
-          </a:ln>
-          <a:effectLst/>
-        </p:spPr>
-        <p:style>
-          <a:lnRef idx="1">
-            <a:schemeClr val="accent1"/>
-          </a:lnRef>
-          <a:fillRef idx="3">
-            <a:schemeClr val="accent1"/>
-          </a:fillRef>
-          <a:effectRef idx="2">
-            <a:schemeClr val="accent1"/>
-          </a:effectRef>
-          <a:fontRef idx="minor">
-            <a:schemeClr val="lt1"/>
-          </a:fontRef>
-        </p:style>
-        <p:txBody>
-          <a:bodyPr rtlCol="0" anchor="ctr" wrap="square"/>
-          <a:lstStyle/>
-          <a:p>
-            <a:pPr algn="ctr"/>
-          </a:p>
-        </p:txBody>
-      </p:sp>
-      <p:sp>
-        <p:nvSpPr>
-          <p:cNvPr id="109" name="TextBox 108"/>
-          <p:cNvSpPr txBox="1"/>
-          <p:nvPr/>
-        </p:nvSpPr>
-        <p:spPr>
-          <a:xfrm>
-            <a:off x="7534800" y="20413809"/>
-            <a:ext cx="6984000" cy="255684"/>
-          </a:xfrm>
-          <a:prstGeom prst="rect">
-            <a:avLst/>
-          </a:prstGeom>
-          <a:noFill/>
-        </p:spPr>
-        <p:txBody>
-          <a:bodyPr wrap="square" lIns="0" rIns="0" tIns="0" bIns="0">
-            <a:spAutoFit/>
-          </a:bodyPr>
-          <a:lstStyle/>
-          <a:p>
-            <a:pPr algn="l">
-              <a:lnSpc>
-                <a:spcPct val="132000"/>
-              </a:lnSpc>
-              <a:spcAft>
-                <a:spcPts val="0"/>
-              </a:spcAft>
-            </a:pPr>
-            <a:r>
-              <a:rPr sz="1271" b="0" i="0">
-                <a:solidFill>
-                  <a:srgbClr val="12162E"/>
-                </a:solidFill>
-                <a:latin typeface="Arial"/>
-              </a:rPr>
-              <a:t>“Navigate to the item on this page whose image is taken during a sunset.”</a:t>
-            </a:r>
-          </a:p>
-        </p:txBody>
-      </p:sp>
-      <p:sp>
-        <p:nvSpPr>
-          <p:cNvPr id="110" name="TextBox 109"/>
-          <p:cNvSpPr txBox="1"/>
-          <p:nvPr/>
-        </p:nvSpPr>
-        <p:spPr>
-          <a:xfrm>
-            <a:off x="14734800" y="20413809"/>
-            <a:ext cx="2018400" cy="288000"/>
-          </a:xfrm>
-          <a:prstGeom prst="rect">
-            <a:avLst/>
-          </a:prstGeom>
-          <a:noFill/>
-        </p:spPr>
-        <p:txBody>
-          <a:bodyPr wrap="square" lIns="0" rIns="0" tIns="0" bIns="0">
-            <a:spAutoFit/>
-          </a:bodyPr>
-          <a:lstStyle/>
-          <a:p>
-            <a:r>
-              <a:rPr sz="1500" b="1" i="0">
-                <a:solidFill>
-                  <a:srgbClr val="14855F"/>
-                </a:solidFill>
-                <a:latin typeface="Consolas"/>
-              </a:rPr>
-              <a:t>✓ </a:t>
-            </a:r>
-            <a:r>
-              <a:rPr sz="1271" b="0" i="0">
-                <a:solidFill>
-                  <a:srgbClr val="12162E"/>
-                </a:solidFill>
-                <a:latin typeface="Arial"/>
-              </a:rPr>
-              <a:t>2 steps · </a:t>
-            </a:r>
-            <a:r>
-              <a:rPr sz="1271" b="1" i="0">
-                <a:solidFill>
-                  <a:srgbClr val="12162E"/>
-                </a:solidFill>
-                <a:latin typeface="Arial"/>
-              </a:rPr>
-              <a:t>$0.007</a:t>
-            </a:r>
-          </a:p>
-        </p:txBody>
-      </p:sp>
-      <p:sp>
-        <p:nvSpPr>
-          <p:cNvPr id="111" name="TextBox 110"/>
-          <p:cNvSpPr txBox="1"/>
-          <p:nvPr/>
-        </p:nvSpPr>
-        <p:spPr>
-          <a:xfrm>
-            <a:off x="16753200" y="20413809"/>
-            <a:ext cx="2018400" cy="288000"/>
-          </a:xfrm>
-          <a:prstGeom prst="rect">
-            <a:avLst/>
-          </a:prstGeom>
-          <a:noFill/>
-        </p:spPr>
-        <p:txBody>
-          <a:bodyPr wrap="square" lIns="0" rIns="0" tIns="0" bIns="0">
-            <a:spAutoFit/>
-          </a:bodyPr>
-          <a:lstStyle/>
-          <a:p>
-            <a:r>
-              <a:rPr sz="1500" b="1" i="0">
-                <a:solidFill>
-                  <a:srgbClr val="C2352B"/>
-                </a:solidFill>
-                <a:latin typeface="Consolas"/>
-              </a:rPr>
-              <a:t>✗ </a:t>
-            </a:r>
-            <a:r>
-              <a:rPr sz="1271" b="0" i="0">
-                <a:solidFill>
-                  <a:srgbClr val="12162E"/>
-                </a:solidFill>
-                <a:latin typeface="Arial"/>
-              </a:rPr>
-              <a:t>21 steps · </a:t>
-            </a:r>
-            <a:r>
-              <a:rPr sz="1271" b="1" i="0">
-                <a:solidFill>
-                  <a:srgbClr val="12162E"/>
-                </a:solidFill>
-                <a:latin typeface="Arial"/>
-              </a:rPr>
-              <a:t>$0.096</a:t>
-            </a:r>
-          </a:p>
-        </p:txBody>
-      </p:sp>
-      <p:sp>
-        <p:nvSpPr>
-          <p:cNvPr id="112" name="TextBox 111"/>
-          <p:cNvSpPr txBox="1"/>
-          <p:nvPr/>
-        </p:nvSpPr>
-        <p:spPr>
-          <a:xfrm>
-            <a:off x="18771600" y="20413809"/>
-            <a:ext cx="2018400" cy="288000"/>
-          </a:xfrm>
-          <a:prstGeom prst="rect">
-            <a:avLst/>
-          </a:prstGeom>
-          <a:noFill/>
-        </p:spPr>
-        <p:txBody>
-          <a:bodyPr wrap="square" lIns="0" rIns="0" tIns="0" bIns="0">
-            <a:spAutoFit/>
-          </a:bodyPr>
-          <a:lstStyle/>
-          <a:p>
-            <a:r>
-              <a:rPr sz="1500" b="1" i="0">
-                <a:solidFill>
-                  <a:srgbClr val="14855F"/>
-                </a:solidFill>
-                <a:latin typeface="Consolas"/>
-              </a:rPr>
-              <a:t>✓ </a:t>
-            </a:r>
-            <a:r>
-              <a:rPr sz="1271" b="0" i="0">
-                <a:solidFill>
-                  <a:srgbClr val="12162E"/>
-                </a:solidFill>
-                <a:latin typeface="Arial"/>
-              </a:rPr>
-              <a:t>3 steps · </a:t>
-            </a:r>
-            <a:r>
-              <a:rPr sz="1271" b="1" i="0">
-                <a:solidFill>
-                  <a:srgbClr val="12162E"/>
-                </a:solidFill>
-                <a:latin typeface="Arial"/>
-              </a:rPr>
-              <a:t>$0.014</a:t>
-            </a:r>
-          </a:p>
-        </p:txBody>
-      </p:sp>
-      <p:sp>
-        <p:nvSpPr>
-          <p:cNvPr id="113" name="Rectangle 112"/>
-          <p:cNvSpPr/>
-          <p:nvPr/>
-        </p:nvSpPr>
-        <p:spPr>
-          <a:xfrm>
-            <a:off x="7534800" y="20773809"/>
-            <a:ext cx="13255200" cy="10800"/>
-          </a:xfrm>
-          <a:prstGeom prst="rect">
-            <a:avLst/>
-          </a:prstGeom>
-          <a:solidFill>
-            <a:srgbClr val="DDE3F2"/>
-          </a:solidFill>
-          <a:ln>
-            <a:noFill/>
-          </a:ln>
-          <a:effectLst/>
-        </p:spPr>
-        <p:style>
-          <a:lnRef idx="1">
-            <a:schemeClr val="accent1"/>
-          </a:lnRef>
-          <a:fillRef idx="3">
-            <a:schemeClr val="accent1"/>
-          </a:fillRef>
-          <a:effectRef idx="2">
-            <a:schemeClr val="accent1"/>
-          </a:effectRef>
-          <a:fontRef idx="minor">
-            <a:schemeClr val="lt1"/>
-          </a:fontRef>
-        </p:style>
-        <p:txBody>
-          <a:bodyPr rtlCol="0" anchor="ctr" wrap="square"/>
-          <a:lstStyle/>
-          <a:p>
-            <a:pPr algn="ctr"/>
-          </a:p>
-        </p:txBody>
-      </p:sp>
-      <p:sp>
-        <p:nvSpPr>
-          <p:cNvPr id="114" name="TextBox 113"/>
-          <p:cNvSpPr txBox="1"/>
-          <p:nvPr/>
-        </p:nvSpPr>
-        <p:spPr>
-          <a:xfrm>
-            <a:off x="7534800" y="20809809"/>
-            <a:ext cx="6984000" cy="511369"/>
-          </a:xfrm>
-          <a:prstGeom prst="rect">
-            <a:avLst/>
-          </a:prstGeom>
-          <a:noFill/>
-        </p:spPr>
-        <p:txBody>
-          <a:bodyPr wrap="square" lIns="0" rIns="0" tIns="0" bIns="0">
-            <a:spAutoFit/>
-          </a:bodyPr>
-          <a:lstStyle/>
-          <a:p>
-            <a:pPr algn="l">
-              <a:lnSpc>
-                <a:spcPct val="132000"/>
-              </a:lnSpc>
-              <a:spcAft>
-                <a:spcPts val="0"/>
-              </a:spcAft>
-            </a:pPr>
-            <a:r>
-              <a:rPr sz="1271" b="0" i="0">
-                <a:solidFill>
-                  <a:srgbClr val="12162E"/>
-                </a:solidFill>
-                <a:latin typeface="Arial"/>
-              </a:rPr>
-              <a:t>“Navigate to my listing of the blue bike and change the price to $85.50 (including in the description).”</a:t>
-            </a:r>
-          </a:p>
-        </p:txBody>
-      </p:sp>
-      <p:sp>
-        <p:nvSpPr>
-          <p:cNvPr id="115" name="TextBox 114"/>
-          <p:cNvSpPr txBox="1"/>
-          <p:nvPr/>
-        </p:nvSpPr>
-        <p:spPr>
-          <a:xfrm>
-            <a:off x="14734800" y="20809809"/>
-            <a:ext cx="2018400" cy="288000"/>
-          </a:xfrm>
-          <a:prstGeom prst="rect">
-            <a:avLst/>
-          </a:prstGeom>
-          <a:noFill/>
-        </p:spPr>
-        <p:txBody>
-          <a:bodyPr wrap="square" lIns="0" rIns="0" tIns="0" bIns="0">
-            <a:spAutoFit/>
-          </a:bodyPr>
-          <a:lstStyle/>
-          <a:p>
-            <a:r>
-              <a:rPr sz="1500" b="1" i="0">
-                <a:solidFill>
-                  <a:srgbClr val="C2352B"/>
-                </a:solidFill>
-                <a:latin typeface="Consolas"/>
-              </a:rPr>
-              <a:t>✗ </a:t>
-            </a:r>
-            <a:r>
-              <a:rPr sz="1271" b="0" i="0">
-                <a:solidFill>
-                  <a:srgbClr val="12162E"/>
-                </a:solidFill>
-                <a:latin typeface="Arial"/>
-              </a:rPr>
-              <a:t>30 steps · </a:t>
-            </a:r>
-            <a:r>
-              <a:rPr sz="1271" b="1" i="0">
-                <a:solidFill>
-                  <a:srgbClr val="12162E"/>
-                </a:solidFill>
-                <a:latin typeface="Arial"/>
-              </a:rPr>
-              <a:t>$0.116</a:t>
-            </a:r>
-          </a:p>
-        </p:txBody>
-      </p:sp>
-      <p:sp>
-        <p:nvSpPr>
-          <p:cNvPr id="116" name="TextBox 115"/>
-          <p:cNvSpPr txBox="1"/>
-          <p:nvPr/>
-        </p:nvSpPr>
-        <p:spPr>
-          <a:xfrm>
-            <a:off x="16753200" y="20809809"/>
-            <a:ext cx="2018400" cy="288000"/>
-          </a:xfrm>
-          <a:prstGeom prst="rect">
-            <a:avLst/>
-          </a:prstGeom>
-          <a:noFill/>
-        </p:spPr>
-        <p:txBody>
-          <a:bodyPr wrap="square" lIns="0" rIns="0" tIns="0" bIns="0">
-            <a:spAutoFit/>
-          </a:bodyPr>
-          <a:lstStyle/>
-          <a:p>
-            <a:r>
-              <a:rPr sz="1500" b="1" i="0">
-                <a:solidFill>
-                  <a:srgbClr val="14855F"/>
-                </a:solidFill>
-                <a:latin typeface="Consolas"/>
-              </a:rPr>
-              <a:t>✓ </a:t>
-            </a:r>
-            <a:r>
-              <a:rPr sz="1271" b="0" i="0">
-                <a:solidFill>
-                  <a:srgbClr val="12162E"/>
-                </a:solidFill>
-                <a:latin typeface="Arial"/>
-              </a:rPr>
-              <a:t>9 steps · </a:t>
-            </a:r>
-            <a:r>
-              <a:rPr sz="1271" b="1" i="0">
-                <a:solidFill>
-                  <a:srgbClr val="12162E"/>
-                </a:solidFill>
-                <a:latin typeface="Arial"/>
-              </a:rPr>
-              <a:t>$0.079</a:t>
-            </a:r>
-          </a:p>
-        </p:txBody>
-      </p:sp>
-      <p:sp>
-        <p:nvSpPr>
-          <p:cNvPr id="117" name="TextBox 116"/>
-          <p:cNvSpPr txBox="1"/>
-          <p:nvPr/>
-        </p:nvSpPr>
-        <p:spPr>
-          <a:xfrm>
-            <a:off x="18771600" y="20809809"/>
-            <a:ext cx="2018400" cy="288000"/>
-          </a:xfrm>
-          <a:prstGeom prst="rect">
-            <a:avLst/>
-          </a:prstGeom>
-          <a:noFill/>
-        </p:spPr>
-        <p:txBody>
-          <a:bodyPr wrap="square" lIns="0" rIns="0" tIns="0" bIns="0">
-            <a:spAutoFit/>
-          </a:bodyPr>
-          <a:lstStyle/>
-          <a:p>
-            <a:r>
-              <a:rPr sz="1500" b="1" i="0">
-                <a:solidFill>
-                  <a:srgbClr val="C2352B"/>
-                </a:solidFill>
-                <a:latin typeface="Consolas"/>
-              </a:rPr>
-              <a:t>✗ </a:t>
-            </a:r>
-            <a:r>
-              <a:rPr sz="1271" b="0" i="0">
-                <a:solidFill>
-                  <a:srgbClr val="12162E"/>
-                </a:solidFill>
-                <a:latin typeface="Arial"/>
-              </a:rPr>
-              <a:t>6 steps · </a:t>
-            </a:r>
-            <a:r>
-              <a:rPr sz="1271" b="1" i="0">
-                <a:solidFill>
-                  <a:srgbClr val="12162E"/>
-                </a:solidFill>
-                <a:latin typeface="Arial"/>
-              </a:rPr>
-              <a:t>$0.029</a:t>
-            </a:r>
-          </a:p>
-        </p:txBody>
-      </p:sp>
-      <p:sp>
-        <p:nvSpPr>
-          <p:cNvPr id="118" name="Rectangle 117"/>
-          <p:cNvSpPr/>
-          <p:nvPr/>
-        </p:nvSpPr>
-        <p:spPr>
-          <a:xfrm>
-            <a:off x="7534800" y="21393178"/>
-            <a:ext cx="13255200" cy="10800"/>
-          </a:xfrm>
-          <a:prstGeom prst="rect">
-            <a:avLst/>
-          </a:prstGeom>
-          <a:solidFill>
-            <a:srgbClr val="DDE3F2"/>
-          </a:solidFill>
-          <a:ln>
-            <a:noFill/>
-          </a:ln>
-          <a:effectLst/>
-        </p:spPr>
-        <p:style>
-          <a:lnRef idx="1">
-            <a:schemeClr val="accent1"/>
-          </a:lnRef>
-          <a:fillRef idx="3">
-            <a:schemeClr val="accent1"/>
-          </a:fillRef>
-          <a:effectRef idx="2">
-            <a:schemeClr val="accent1"/>
-          </a:effectRef>
-          <a:fontRef idx="minor">
-            <a:schemeClr val="lt1"/>
-          </a:fontRef>
-        </p:style>
-        <p:txBody>
-          <a:bodyPr rtlCol="0" anchor="ctr" wrap="square"/>
-          <a:lstStyle/>
-          <a:p>
-            <a:pPr algn="ctr"/>
-          </a:p>
-        </p:txBody>
-      </p:sp>
-      <p:sp>
-        <p:nvSpPr>
-          <p:cNvPr id="119" name="TextBox 118"/>
-          <p:cNvSpPr txBox="1"/>
-          <p:nvPr/>
-        </p:nvSpPr>
-        <p:spPr>
-          <a:xfrm>
-            <a:off x="7534800" y="21429178"/>
-            <a:ext cx="6984000" cy="255684"/>
-          </a:xfrm>
-          <a:prstGeom prst="rect">
-            <a:avLst/>
-          </a:prstGeom>
-          <a:noFill/>
-        </p:spPr>
-        <p:txBody>
-          <a:bodyPr wrap="square" lIns="0" rIns="0" tIns="0" bIns="0">
-            <a:spAutoFit/>
-          </a:bodyPr>
-          <a:lstStyle/>
-          <a:p>
-            <a:pPr algn="l">
-              <a:lnSpc>
-                <a:spcPct val="132000"/>
-              </a:lnSpc>
-              <a:spcAft>
-                <a:spcPts val="0"/>
-              </a:spcAft>
-            </a:pPr>
-            <a:r>
-              <a:rPr sz="1271" b="0" i="0">
-                <a:solidFill>
-                  <a:srgbClr val="12162E"/>
-                </a:solidFill>
-                <a:latin typeface="Arial"/>
-              </a:rPr>
-              <a:t>“Show me the cheapest bike with red handlebars between $900-950.”</a:t>
-            </a:r>
-          </a:p>
-        </p:txBody>
-      </p:sp>
-      <p:sp>
-        <p:nvSpPr>
-          <p:cNvPr id="120" name="TextBox 119"/>
-          <p:cNvSpPr txBox="1"/>
-          <p:nvPr/>
-        </p:nvSpPr>
-        <p:spPr>
-          <a:xfrm>
-            <a:off x="14734800" y="21429178"/>
-            <a:ext cx="2018400" cy="288000"/>
-          </a:xfrm>
-          <a:prstGeom prst="rect">
-            <a:avLst/>
-          </a:prstGeom>
-          <a:noFill/>
-        </p:spPr>
-        <p:txBody>
-          <a:bodyPr wrap="square" lIns="0" rIns="0" tIns="0" bIns="0">
-            <a:spAutoFit/>
-          </a:bodyPr>
-          <a:lstStyle/>
-          <a:p>
-            <a:r>
-              <a:rPr sz="1500" b="1" i="0">
-                <a:solidFill>
-                  <a:srgbClr val="C2352B"/>
-                </a:solidFill>
-                <a:latin typeface="Consolas"/>
-              </a:rPr>
-              <a:t>✗ </a:t>
-            </a:r>
-            <a:r>
-              <a:rPr sz="1271" b="0" i="0">
-                <a:solidFill>
-                  <a:srgbClr val="12162E"/>
-                </a:solidFill>
-                <a:latin typeface="Arial"/>
-              </a:rPr>
-              <a:t>19 steps · </a:t>
-            </a:r>
-            <a:r>
-              <a:rPr sz="1271" b="1" i="0">
-                <a:solidFill>
-                  <a:srgbClr val="12162E"/>
-                </a:solidFill>
-                <a:latin typeface="Arial"/>
-              </a:rPr>
-              <a:t>$0.075</a:t>
-            </a:r>
-          </a:p>
-        </p:txBody>
-      </p:sp>
-      <p:sp>
-        <p:nvSpPr>
-          <p:cNvPr id="121" name="TextBox 120"/>
-          <p:cNvSpPr txBox="1"/>
-          <p:nvPr/>
-        </p:nvSpPr>
-        <p:spPr>
-          <a:xfrm>
-            <a:off x="16753200" y="21429178"/>
-            <a:ext cx="2018400" cy="288000"/>
-          </a:xfrm>
-          <a:prstGeom prst="rect">
-            <a:avLst/>
-          </a:prstGeom>
-          <a:noFill/>
-        </p:spPr>
-        <p:txBody>
-          <a:bodyPr wrap="square" lIns="0" rIns="0" tIns="0" bIns="0">
-            <a:spAutoFit/>
-          </a:bodyPr>
-          <a:lstStyle/>
-          <a:p>
-            <a:r>
-              <a:rPr sz="1500" b="1" i="0">
-                <a:solidFill>
-                  <a:srgbClr val="C2352B"/>
-                </a:solidFill>
-                <a:latin typeface="Consolas"/>
-              </a:rPr>
-              <a:t>✗ </a:t>
-            </a:r>
-            <a:r>
-              <a:rPr sz="1271" b="0" i="0">
-                <a:solidFill>
-                  <a:srgbClr val="12162E"/>
-                </a:solidFill>
-                <a:latin typeface="Arial"/>
-              </a:rPr>
-              <a:t>6 steps · </a:t>
-            </a:r>
-            <a:r>
-              <a:rPr sz="1271" b="1" i="0">
-                <a:solidFill>
-                  <a:srgbClr val="12162E"/>
-                </a:solidFill>
-                <a:latin typeface="Arial"/>
-              </a:rPr>
-              <a:t>$0.025</a:t>
-            </a:r>
-          </a:p>
-        </p:txBody>
-      </p:sp>
-      <p:sp>
-        <p:nvSpPr>
-          <p:cNvPr id="122" name="TextBox 121"/>
-          <p:cNvSpPr txBox="1"/>
-          <p:nvPr/>
-        </p:nvSpPr>
-        <p:spPr>
-          <a:xfrm>
-            <a:off x="18771600" y="21429178"/>
-            <a:ext cx="2018400" cy="288000"/>
-          </a:xfrm>
-          <a:prstGeom prst="rect">
-            <a:avLst/>
-          </a:prstGeom>
-          <a:noFill/>
-        </p:spPr>
-        <p:txBody>
-          <a:bodyPr wrap="square" lIns="0" rIns="0" tIns="0" bIns="0">
-            <a:spAutoFit/>
-          </a:bodyPr>
-          <a:lstStyle/>
-          <a:p>
-            <a:r>
-              <a:rPr sz="1500" b="1" i="0">
-                <a:solidFill>
-                  <a:srgbClr val="14855F"/>
-                </a:solidFill>
-                <a:latin typeface="Consolas"/>
-              </a:rPr>
-              <a:t>✓ </a:t>
-            </a:r>
-            <a:r>
-              <a:rPr sz="1271" b="0" i="0">
-                <a:solidFill>
-                  <a:srgbClr val="12162E"/>
-                </a:solidFill>
-                <a:latin typeface="Arial"/>
-              </a:rPr>
-              <a:t>7 steps · </a:t>
-            </a:r>
-            <a:r>
-              <a:rPr sz="1271" b="1" i="0">
-                <a:solidFill>
-                  <a:srgbClr val="12162E"/>
-                </a:solidFill>
-                <a:latin typeface="Arial"/>
-              </a:rPr>
-              <a:t>$0.037</a:t>
-            </a:r>
-          </a:p>
-        </p:txBody>
-      </p:sp>
-      <p:sp>
-        <p:nvSpPr>
-          <p:cNvPr id="123" name="Rectangle 122"/>
-          <p:cNvSpPr/>
-          <p:nvPr/>
-        </p:nvSpPr>
-        <p:spPr>
-          <a:xfrm>
-            <a:off x="7534800" y="21789178"/>
-            <a:ext cx="13255200" cy="10800"/>
-          </a:xfrm>
-          <a:prstGeom prst="rect">
-            <a:avLst/>
-          </a:prstGeom>
-          <a:solidFill>
-            <a:srgbClr val="DDE3F2"/>
-          </a:solidFill>
-          <a:ln>
-            <a:noFill/>
-          </a:ln>
-          <a:effectLst/>
-        </p:spPr>
-        <p:style>
-          <a:lnRef idx="1">
-            <a:schemeClr val="accent1"/>
-          </a:lnRef>
-          <a:fillRef idx="3">
-            <a:schemeClr val="accent1"/>
-          </a:fillRef>
-          <a:effectRef idx="2">
-            <a:schemeClr val="accent1"/>
-          </a:effectRef>
-          <a:fontRef idx="minor">
-            <a:schemeClr val="lt1"/>
-          </a:fontRef>
-        </p:style>
-        <p:txBody>
-          <a:bodyPr rtlCol="0" anchor="ctr" wrap="square"/>
-          <a:lstStyle/>
-          <a:p>
-            <a:pPr algn="ctr"/>
-          </a:p>
-        </p:txBody>
-      </p:sp>
-      <p:sp>
-        <p:nvSpPr>
-          <p:cNvPr id="124" name="TextBox 123"/>
-          <p:cNvSpPr txBox="1"/>
-          <p:nvPr/>
-        </p:nvSpPr>
-        <p:spPr>
-          <a:xfrm>
-            <a:off x="7534800" y="21861178"/>
-            <a:ext cx="13255200" cy="255684"/>
-          </a:xfrm>
-          <a:prstGeom prst="rect">
-            <a:avLst/>
-          </a:prstGeom>
-          <a:noFill/>
-        </p:spPr>
-        <p:txBody>
-          <a:bodyPr wrap="square" lIns="0" rIns="0" tIns="0" bIns="0">
-            <a:spAutoFit/>
-          </a:bodyPr>
-          <a:lstStyle/>
-          <a:p>
-            <a:pPr algn="l">
-              <a:lnSpc>
-                <a:spcPct val="132000"/>
-              </a:lnSpc>
-              <a:spcAft>
-                <a:spcPts val="425"/>
-              </a:spcAft>
-            </a:pPr>
-            <a:r>
-              <a:rPr sz="1271" b="0" i="0">
-                <a:solidFill>
-                  <a:srgbClr val="5D6787"/>
-                </a:solidFill>
-                <a:latin typeface="Arial"/>
-              </a:rPr>
-              <a:t>One recorded attempt per view, B0 · classifieds. Every ✓ / ✗ came out the same on an independent rerun; steps and bill differ run to run.</a:t>
-            </a:r>
-          </a:p>
-        </p:txBody>
-      </p:sp>
-      <p:sp>
-        <p:nvSpPr>
-          <p:cNvPr id="14" name="Rectangle 13"/>
-          <p:cNvSpPr/>
-          <p:nvPr/>
-        </p:nvSpPr>
-        <p:spPr>
-          <a:xfrm>
-            <a:off x="727200" y="23040000"/>
-            <a:ext cx="177988" cy="177988"/>
-          </a:xfrm>
-          <a:prstGeom prst="rect">
-            <a:avLst/>
-          </a:prstGeom>
-          <a:solidFill>
-            <a:srgbClr val="AB5FCE"/>
-          </a:solidFill>
-          <a:ln>
-            <a:noFill/>
-          </a:ln>
-          <a:effectLst/>
-        </p:spPr>
-        <p:style>
-          <a:lnRef idx="1">
-            <a:schemeClr val="accent1"/>
-          </a:lnRef>
-          <a:fillRef idx="3">
-            <a:schemeClr val="accent1"/>
-          </a:fillRef>
-          <a:effectRef idx="2">
-            <a:schemeClr val="accent1"/>
-          </a:effectRef>
-          <a:fontRef idx="minor">
-            <a:schemeClr val="lt1"/>
-          </a:fontRef>
-        </p:style>
-        <p:txBody>
-          <a:bodyPr rtlCol="0" anchor="ctr"/>
-          <a:lstStyle/>
-          <a:p>
-            <a:pPr algn="ctr"/>
-            <a:endParaRPr/>
-          </a:p>
-        </p:txBody>
-      </p:sp>
-      <p:sp>
-        <p:nvSpPr>
-          <p:cNvPr id="15" name="TextBox 14"/>
-          <p:cNvSpPr txBox="1"/>
-          <p:nvPr/>
-        </p:nvSpPr>
-        <p:spPr>
-          <a:xfrm>
-            <a:off x="1032323" y="22996800"/>
-            <a:ext cx="6144827" cy="238912"/>
-          </a:xfrm>
-          <a:prstGeom prst="rect">
-            <a:avLst/>
-          </a:prstGeom>
-          <a:noFill/>
-        </p:spPr>
-        <p:txBody>
-          <a:bodyPr wrap="square" lIns="0" tIns="0" rIns="0" bIns="0" anchor="t">
-            <a:spAutoFit/>
-          </a:bodyPr>
-          <a:lstStyle/>
-          <a:p>
-            <a:pPr algn="l">
-              <a:lnSpc>
-                <a:spcPct val="118000"/>
-              </a:lnSpc>
-            </a:pPr>
-            <a:r>
-              <a:rPr sz="1412" b="1" i="0">
-                <a:solidFill>
-                  <a:srgbClr val="141E41"/>
-                </a:solidFill>
-                <a:latin typeface="Consolas"/>
-              </a:rPr>
-              <a:t>HOW WE MEASURED IT — THE AGENT LOOP</a:t>
-            </a:r>
-            <a:endParaRPr sz="1412" b="1" spc="180" dirty="0">
-              <a:solidFill>
-                <a:srgbClr val="141E41"/>
-              </a:solidFill>
-              <a:latin typeface="Consolas"/>
-            </a:endParaRPr>
-          </a:p>
-        </p:txBody>
-      </p:sp>
-      <p:sp>
-        <p:nvSpPr>
-          <p:cNvPr id="16" name="Rectangle 15"/>
-          <p:cNvSpPr/>
-          <p:nvPr/>
-        </p:nvSpPr>
-        <p:spPr>
-          <a:xfrm>
-            <a:off x="727200" y="23357836"/>
-            <a:ext cx="1169636" cy="35597"/>
-          </a:xfrm>
-          <a:prstGeom prst="rect">
-            <a:avLst/>
-          </a:prstGeom>
-          <a:solidFill>
-            <a:srgbClr val="141E41"/>
-          </a:solidFill>
-          <a:ln>
-            <a:noFill/>
-          </a:ln>
-          <a:effectLst/>
-        </p:spPr>
-        <p:style>
-          <a:lnRef idx="1">
-            <a:schemeClr val="accent1"/>
-          </a:lnRef>
-          <a:fillRef idx="3">
-            <a:schemeClr val="accent1"/>
-          </a:fillRef>
-          <a:effectRef idx="2">
-            <a:schemeClr val="accent1"/>
-          </a:effectRef>
-          <a:fontRef idx="minor">
-            <a:schemeClr val="lt1"/>
-          </a:fontRef>
-        </p:style>
-        <p:txBody>
-          <a:bodyPr rtlCol="0" anchor="ctr"/>
-          <a:lstStyle/>
-          <a:p>
-            <a:pPr algn="ctr"/>
-            <a:endParaRPr/>
-          </a:p>
-        </p:txBody>
-      </p:sp>
-      <p:sp>
-        <p:nvSpPr>
-          <p:cNvPr id="17" name="Rectangle 16"/>
-          <p:cNvSpPr/>
-          <p:nvPr/>
-        </p:nvSpPr>
-        <p:spPr>
-          <a:xfrm>
-            <a:off x="1896836" y="23368007"/>
-            <a:ext cx="18893164" cy="15256"/>
-          </a:xfrm>
-          <a:prstGeom prst="rect">
-            <a:avLst/>
-          </a:prstGeom>
-          <a:solidFill>
-            <a:srgbClr val="DDE3F2"/>
-          </a:solidFill>
-          <a:ln>
-            <a:noFill/>
-          </a:ln>
-          <a:effectLst/>
-        </p:spPr>
-        <p:style>
-          <a:lnRef idx="1">
-            <a:schemeClr val="accent1"/>
-          </a:lnRef>
-          <a:fillRef idx="3">
-            <a:schemeClr val="accent1"/>
-          </a:fillRef>
-          <a:effectRef idx="2">
-            <a:schemeClr val="accent1"/>
-          </a:effectRef>
-          <a:fontRef idx="minor">
-            <a:schemeClr val="lt1"/>
-          </a:fontRef>
-        </p:style>
-        <p:txBody>
-          <a:bodyPr rtlCol="0" anchor="ctr"/>
-          <a:lstStyle/>
-          <a:p>
-            <a:pPr algn="ctr"/>
-            <a:endParaRPr/>
-          </a:p>
-        </p:txBody>
-      </p:sp>
-      <p:sp>
-        <p:nvSpPr>
-          <p:cNvPr id="125" name="Right Arrow 124"/>
-          <p:cNvSpPr/>
-          <p:nvPr/>
-        </p:nvSpPr>
-        <p:spPr>
-          <a:xfrm>
-            <a:off x="3823200" y="25056000"/>
-            <a:ext cx="360000" cy="504000"/>
-          </a:xfrm>
-          <a:prstGeom prst="rightArrow">
-            <a:avLst/>
-          </a:prstGeom>
-          <a:solidFill>
-            <a:srgbClr val="C9CFE0"/>
-          </a:solidFill>
-          <a:ln>
-            <a:noFill/>
-          </a:ln>
-          <a:effectLst/>
-        </p:spPr>
-        <p:style>
-          <a:lnRef idx="1">
-            <a:schemeClr val="accent1"/>
-          </a:lnRef>
-          <a:fillRef idx="3">
-            <a:schemeClr val="accent1"/>
-          </a:fillRef>
-          <a:effectRef idx="2">
-            <a:schemeClr val="accent1"/>
-          </a:effectRef>
-          <a:fontRef idx="minor">
-            <a:schemeClr val="lt1"/>
-          </a:fontRef>
-        </p:style>
-        <p:txBody>
-          <a:bodyPr rtlCol="0" anchor="ctr"/>
-          <a:lstStyle/>
-          <a:p>
-            <a:pPr algn="ctr"/>
-          </a:p>
-        </p:txBody>
-      </p:sp>
-      <p:sp>
-        <p:nvSpPr>
-          <p:cNvPr id="126" name="Right Arrow 125"/>
-          <p:cNvSpPr/>
-          <p:nvPr/>
-        </p:nvSpPr>
-        <p:spPr>
-          <a:xfrm>
-            <a:off x="8215200" y="25056000"/>
-            <a:ext cx="360000" cy="504000"/>
-          </a:xfrm>
-          <a:prstGeom prst="rightArrow">
-            <a:avLst/>
-          </a:prstGeom>
-          <a:solidFill>
-            <a:srgbClr val="C9CFE0"/>
-          </a:solidFill>
-          <a:ln>
-            <a:noFill/>
-          </a:ln>
-          <a:effectLst/>
-        </p:spPr>
-        <p:style>
-          <a:lnRef idx="1">
-            <a:schemeClr val="accent1"/>
-          </a:lnRef>
-          <a:fillRef idx="3">
-            <a:schemeClr val="accent1"/>
-          </a:fillRef>
-          <a:effectRef idx="2">
-            <a:schemeClr val="accent1"/>
-          </a:effectRef>
-          <a:fontRef idx="minor">
-            <a:schemeClr val="lt1"/>
-          </a:fontRef>
-        </p:style>
-        <p:txBody>
-          <a:bodyPr rtlCol="0" anchor="ctr"/>
-          <a:lstStyle/>
-          <a:p>
-            <a:pPr algn="ctr"/>
-          </a:p>
-        </p:txBody>
-      </p:sp>
-      <p:sp>
-        <p:nvSpPr>
-          <p:cNvPr id="127" name="Right Arrow 126"/>
-          <p:cNvSpPr/>
-          <p:nvPr/>
-        </p:nvSpPr>
-        <p:spPr>
-          <a:xfrm>
-            <a:off x="14119200" y="25056000"/>
-            <a:ext cx="360000" cy="504000"/>
-          </a:xfrm>
-          <a:prstGeom prst="rightArrow">
-            <a:avLst/>
-          </a:prstGeom>
-          <a:solidFill>
-            <a:srgbClr val="C9CFE0"/>
-          </a:solidFill>
-          <a:ln>
-            <a:noFill/>
-          </a:ln>
-          <a:effectLst/>
-        </p:spPr>
-        <p:style>
-          <a:lnRef idx="1">
-            <a:schemeClr val="accent1"/>
-          </a:lnRef>
-          <a:fillRef idx="3">
-            <a:schemeClr val="accent1"/>
-          </a:fillRef>
-          <a:effectRef idx="2">
-            <a:schemeClr val="accent1"/>
-          </a:effectRef>
-          <a:fontRef idx="minor">
-            <a:schemeClr val="lt1"/>
-          </a:fontRef>
-        </p:style>
-        <p:txBody>
-          <a:bodyPr rtlCol="0" anchor="ctr"/>
-          <a:lstStyle/>
-          <a:p>
-            <a:pPr algn="ctr"/>
-          </a:p>
-        </p:txBody>
-      </p:sp>
-      <p:sp>
-        <p:nvSpPr>
-          <p:cNvPr id="128" name="Right Arrow 127"/>
-          <p:cNvSpPr/>
-          <p:nvPr/>
-        </p:nvSpPr>
-        <p:spPr>
-          <a:xfrm>
-            <a:off x="17791200" y="25056000"/>
-            <a:ext cx="360000" cy="504000"/>
-          </a:xfrm>
-          <a:prstGeom prst="rightArrow">
-            <a:avLst/>
-          </a:prstGeom>
-          <a:solidFill>
-            <a:srgbClr val="C9CFE0"/>
-          </a:solidFill>
-          <a:ln>
-            <a:noFill/>
-          </a:ln>
-          <a:effectLst/>
-        </p:spPr>
-        <p:style>
-          <a:lnRef idx="1">
-            <a:schemeClr val="accent1"/>
-          </a:lnRef>
-          <a:fillRef idx="3">
-            <a:schemeClr val="accent1"/>
-          </a:fillRef>
-          <a:effectRef idx="2">
-            <a:schemeClr val="accent1"/>
-          </a:effectRef>
-          <a:fontRef idx="minor">
-            <a:schemeClr val="lt1"/>
-          </a:fontRef>
-        </p:style>
-        <p:txBody>
-          <a:bodyPr rtlCol="0" anchor="ctr"/>
-          <a:lstStyle/>
-          <a:p>
-            <a:pPr algn="ctr"/>
-          </a:p>
-        </p:txBody>
-      </p:sp>
-      <p:sp>
-        <p:nvSpPr>
-          <p:cNvPr id="129" name="Rectangle 128"/>
-          <p:cNvSpPr/>
-          <p:nvPr/>
-        </p:nvSpPr>
-        <p:spPr>
-          <a:xfrm>
-            <a:off x="727200" y="23580000"/>
-            <a:ext cx="3024000" cy="3456000"/>
-          </a:xfrm>
-          <a:prstGeom prst="rect">
-            <a:avLst/>
-          </a:prstGeom>
-          <a:solidFill>
-            <a:srgbClr val="F7F9FD"/>
-          </a:solidFill>
-          <a:ln w="8890">
-            <a:solidFill>
-              <a:srgbClr val="DDE3F2"/>
-            </a:solidFill>
-          </a:ln>
-          <a:effectLst/>
-        </p:spPr>
-        <p:style>
-          <a:lnRef idx="1">
-            <a:schemeClr val="accent1"/>
-          </a:lnRef>
-          <a:fillRef idx="3">
-            <a:schemeClr val="accent1"/>
-          </a:fillRef>
-          <a:effectRef idx="2">
-            <a:schemeClr val="accent1"/>
-          </a:effectRef>
-          <a:fontRef idx="minor">
-            <a:schemeClr val="lt1"/>
-          </a:fontRef>
-        </p:style>
-        <p:txBody>
-          <a:bodyPr rtlCol="0" anchor="ctr" wrap="square"/>
-          <a:lstStyle/>
-          <a:p>
-            <a:pPr algn="ctr"/>
-          </a:p>
-        </p:txBody>
-      </p:sp>
-      <p:sp>
-        <p:nvSpPr>
-          <p:cNvPr id="130" name="Rectangle 129"/>
-          <p:cNvSpPr/>
-          <p:nvPr/>
-        </p:nvSpPr>
-        <p:spPr>
-          <a:xfrm>
-            <a:off x="727200" y="23580000"/>
-            <a:ext cx="3024000" cy="50400"/>
-          </a:xfrm>
-          <a:prstGeom prst="rect">
-            <a:avLst/>
-          </a:prstGeom>
-          <a:solidFill>
-            <a:srgbClr val="5049F9"/>
-          </a:solidFill>
-          <a:ln>
-            <a:noFill/>
-          </a:ln>
-          <a:effectLst/>
-        </p:spPr>
-        <p:style>
-          <a:lnRef idx="1">
-            <a:schemeClr val="accent1"/>
-          </a:lnRef>
-          <a:fillRef idx="3">
-            <a:schemeClr val="accent1"/>
-          </a:fillRef>
-          <a:effectRef idx="2">
-            <a:schemeClr val="accent1"/>
-          </a:effectRef>
-          <a:fontRef idx="minor">
-            <a:schemeClr val="lt1"/>
-          </a:fontRef>
-        </p:style>
-        <p:txBody>
-          <a:bodyPr rtlCol="0" anchor="ctr" wrap="square"/>
-          <a:lstStyle/>
-          <a:p>
-            <a:pPr algn="ctr"/>
-          </a:p>
-        </p:txBody>
-      </p:sp>
-      <p:sp>
-        <p:nvSpPr>
-          <p:cNvPr id="131" name="TextBox 130"/>
-          <p:cNvSpPr txBox="1"/>
-          <p:nvPr/>
-        </p:nvSpPr>
-        <p:spPr>
-          <a:xfrm>
-            <a:off x="889200" y="23706000"/>
-            <a:ext cx="2700000" cy="216000"/>
-          </a:xfrm>
-          <a:prstGeom prst="rect">
-            <a:avLst/>
-          </a:prstGeom>
-          <a:noFill/>
-        </p:spPr>
-        <p:txBody>
-          <a:bodyPr wrap="square" lIns="0" rIns="0" tIns="0" bIns="0">
-            <a:spAutoFit/>
-          </a:bodyPr>
-          <a:lstStyle/>
-          <a:p>
-            <a:pPr algn="l">
-              <a:lnSpc>
-                <a:spcPct val="120000"/>
-              </a:lnSpc>
-              <a:spcAft>
-                <a:spcPts val="0"/>
-              </a:spcAft>
-            </a:pPr>
-            <a:r>
-              <a:rPr sz="1059" b="0" i="0">
-                <a:solidFill>
-                  <a:srgbClr val="5D6787"/>
-                </a:solidFill>
-                <a:latin typeface="Consolas"/>
-              </a:rPr>
-              <a:t>THE TASK + THE LIVE PAGE</a:t>
-            </a:r>
-          </a:p>
-        </p:txBody>
-      </p:sp>
-      <p:sp>
-        <p:nvSpPr>
-          <p:cNvPr id="132" name="TextBox 131"/>
-          <p:cNvSpPr txBox="1"/>
-          <p:nvPr/>
-        </p:nvSpPr>
-        <p:spPr>
-          <a:xfrm>
-            <a:off x="889200" y="23940000"/>
-            <a:ext cx="2700000" cy="968345"/>
-          </a:xfrm>
-          <a:prstGeom prst="rect">
-            <a:avLst/>
-          </a:prstGeom>
-          <a:noFill/>
-        </p:spPr>
-        <p:txBody>
-          <a:bodyPr wrap="square" lIns="0" rIns="0" tIns="0" bIns="0">
-            <a:spAutoFit/>
-          </a:bodyPr>
-          <a:lstStyle/>
-          <a:p>
-            <a:pPr algn="l">
-              <a:lnSpc>
-                <a:spcPct val="120000"/>
-              </a:lnSpc>
-              <a:spcAft>
-                <a:spcPts val="992"/>
-              </a:spcAft>
-            </a:pPr>
-            <a:r>
-              <a:rPr sz="1764" b="0" i="0">
-                <a:solidFill>
-                  <a:srgbClr val="12162E"/>
-                </a:solidFill>
-                <a:latin typeface="Arial"/>
-              </a:rPr>
-              <a:t>“Show me the cheapest bike with red handlebars between $900–950.”</a:t>
-            </a:r>
-          </a:p>
-        </p:txBody>
-      </p:sp>
-      <p:sp>
-        <p:nvSpPr>
-          <p:cNvPr id="133" name="TextBox 132"/>
-          <p:cNvSpPr txBox="1"/>
-          <p:nvPr/>
-        </p:nvSpPr>
-        <p:spPr>
-          <a:xfrm>
-            <a:off x="889200" y="24980345"/>
-            <a:ext cx="2700000" cy="511369"/>
-          </a:xfrm>
-          <a:prstGeom prst="rect">
-            <a:avLst/>
-          </a:prstGeom>
-          <a:noFill/>
-        </p:spPr>
-        <p:txBody>
-          <a:bodyPr wrap="square" lIns="0" rIns="0" tIns="0" bIns="0">
-            <a:spAutoFit/>
-          </a:bodyPr>
-          <a:lstStyle/>
-          <a:p>
-            <a:pPr algn="l">
-              <a:lnSpc>
-                <a:spcPct val="132000"/>
-              </a:lnSpc>
-              <a:spcAft>
-                <a:spcPts val="425"/>
-              </a:spcAft>
-            </a:pPr>
-            <a:r>
-              <a:rPr sz="1271" b="0" i="0">
-                <a:solidFill>
-                  <a:srgbClr val="5D6787"/>
-                </a:solidFill>
-                <a:latin typeface="Arial"/>
-              </a:rPr>
-              <a:t>Part of the intent is in the pictures, part in the text.</a:t>
-            </a:r>
-          </a:p>
-        </p:txBody>
-      </p:sp>
-      <p:sp>
-        <p:nvSpPr>
-          <p:cNvPr id="134" name="Rectangle 133"/>
-          <p:cNvSpPr/>
-          <p:nvPr/>
-        </p:nvSpPr>
-        <p:spPr>
-          <a:xfrm>
-            <a:off x="4255200" y="23580000"/>
-            <a:ext cx="3888000" cy="3456000"/>
+            <a:off x="4255200" y="5580000"/>
+            <a:ext cx="3888000" cy="5040000"/>
           </a:xfrm>
           <a:prstGeom prst="rect">
             <a:avLst/>
@@ -7496,14 +4467,14 @@
       </p:sp>
       <p:sp>
         <p:nvSpPr>
-          <p:cNvPr id="135" name="TextBox 134"/>
+          <p:cNvPr id="89" name="TextBox 88"/>
           <p:cNvSpPr txBox="1"/>
           <p:nvPr/>
         </p:nvSpPr>
         <p:spPr>
           <a:xfrm>
-            <a:off x="4417200" y="23706000"/>
-            <a:ext cx="3564000" cy="216000"/>
+            <a:off x="4435200" y="5724000"/>
+            <a:ext cx="3528000" cy="216000"/>
           </a:xfrm>
           <a:prstGeom prst="rect">
             <a:avLst/>
@@ -7538,14 +4509,14 @@
       </p:sp>
       <p:sp>
         <p:nvSpPr>
-          <p:cNvPr id="136" name="Rounded Rectangle 135"/>
+          <p:cNvPr id="90" name="Rounded Rectangle 89"/>
           <p:cNvSpPr/>
           <p:nvPr/>
         </p:nvSpPr>
         <p:spPr>
           <a:xfrm>
-            <a:off x="4417200" y="23940000"/>
-            <a:ext cx="3564000" cy="828000"/>
+            <a:off x="4435200" y="5958000"/>
+            <a:ext cx="3528000" cy="1224000"/>
           </a:xfrm>
           <a:prstGeom prst="roundRect">
             <a:avLst>
@@ -7586,14 +4557,14 @@
       </p:sp>
       <p:sp>
         <p:nvSpPr>
-          <p:cNvPr id="137" name="TextBox 136"/>
+          <p:cNvPr id="91" name="TextBox 90"/>
           <p:cNvSpPr txBox="1"/>
           <p:nvPr/>
         </p:nvSpPr>
         <p:spPr>
           <a:xfrm>
-            <a:off x="4543200" y="24030000"/>
-            <a:ext cx="3312000" cy="288000"/>
+            <a:off x="4579200" y="6084000"/>
+            <a:ext cx="3240000" cy="288000"/>
           </a:xfrm>
           <a:prstGeom prst="rect">
             <a:avLst/>
@@ -7628,14 +4599,14 @@
       </p:sp>
       <p:sp>
         <p:nvSpPr>
-          <p:cNvPr id="138" name="TextBox 137"/>
+          <p:cNvPr id="92" name="TextBox 91"/>
           <p:cNvSpPr txBox="1"/>
           <p:nvPr/>
         </p:nvSpPr>
         <p:spPr>
           <a:xfrm>
-            <a:off x="4543200" y="24372000"/>
-            <a:ext cx="3312000" cy="288000"/>
+            <a:off x="4579200" y="6426000"/>
+            <a:ext cx="3240000" cy="576000"/>
           </a:xfrm>
           <a:prstGeom prst="rect">
             <a:avLst/>
@@ -7670,14 +4641,14 @@
       </p:sp>
       <p:sp>
         <p:nvSpPr>
-          <p:cNvPr id="139" name="Rounded Rectangle 138"/>
+          <p:cNvPr id="93" name="Rounded Rectangle 92"/>
           <p:cNvSpPr/>
           <p:nvPr/>
         </p:nvSpPr>
         <p:spPr>
           <a:xfrm>
-            <a:off x="4417200" y="24858000"/>
-            <a:ext cx="3564000" cy="828000"/>
+            <a:off x="4435200" y="7290000"/>
+            <a:ext cx="3528000" cy="1224000"/>
           </a:xfrm>
           <a:prstGeom prst="roundRect">
             <a:avLst>
@@ -7718,14 +4689,14 @@
       </p:sp>
       <p:sp>
         <p:nvSpPr>
-          <p:cNvPr id="140" name="TextBox 139"/>
+          <p:cNvPr id="94" name="TextBox 93"/>
           <p:cNvSpPr txBox="1"/>
           <p:nvPr/>
         </p:nvSpPr>
         <p:spPr>
           <a:xfrm>
-            <a:off x="4543200" y="24948000"/>
-            <a:ext cx="3312000" cy="288000"/>
+            <a:off x="4579200" y="7416000"/>
+            <a:ext cx="3240000" cy="288000"/>
           </a:xfrm>
           <a:prstGeom prst="rect">
             <a:avLst/>
@@ -7760,14 +4731,14 @@
       </p:sp>
       <p:sp>
         <p:nvSpPr>
-          <p:cNvPr id="141" name="TextBox 140"/>
+          <p:cNvPr id="95" name="TextBox 94"/>
           <p:cNvSpPr txBox="1"/>
           <p:nvPr/>
         </p:nvSpPr>
         <p:spPr>
           <a:xfrm>
-            <a:off x="4543200" y="25290000"/>
-            <a:ext cx="3312000" cy="288000"/>
+            <a:off x="4579200" y="7758000"/>
+            <a:ext cx="3240000" cy="576000"/>
           </a:xfrm>
           <a:prstGeom prst="rect">
             <a:avLst/>
@@ -7802,14 +4773,14 @@
       </p:sp>
       <p:sp>
         <p:nvSpPr>
-          <p:cNvPr id="142" name="Rounded Rectangle 141"/>
+          <p:cNvPr id="96" name="Rounded Rectangle 95"/>
           <p:cNvSpPr/>
           <p:nvPr/>
         </p:nvSpPr>
         <p:spPr>
           <a:xfrm>
-            <a:off x="4417200" y="25776000"/>
-            <a:ext cx="3564000" cy="828000"/>
+            <a:off x="4435200" y="8622000"/>
+            <a:ext cx="3528000" cy="1224000"/>
           </a:xfrm>
           <a:prstGeom prst="roundRect">
             <a:avLst>
@@ -7850,14 +4821,14 @@
       </p:sp>
       <p:sp>
         <p:nvSpPr>
-          <p:cNvPr id="143" name="TextBox 142"/>
+          <p:cNvPr id="97" name="TextBox 96"/>
           <p:cNvSpPr txBox="1"/>
           <p:nvPr/>
         </p:nvSpPr>
         <p:spPr>
           <a:xfrm>
-            <a:off x="4543200" y="25866000"/>
-            <a:ext cx="3312000" cy="288000"/>
+            <a:off x="4579200" y="8748000"/>
+            <a:ext cx="3240000" cy="288000"/>
           </a:xfrm>
           <a:prstGeom prst="rect">
             <a:avLst/>
@@ -7892,14 +4863,14 @@
       </p:sp>
       <p:sp>
         <p:nvSpPr>
-          <p:cNvPr id="144" name="TextBox 143"/>
+          <p:cNvPr id="98" name="TextBox 97"/>
           <p:cNvSpPr txBox="1"/>
           <p:nvPr/>
         </p:nvSpPr>
         <p:spPr>
           <a:xfrm>
-            <a:off x="4543200" y="26208000"/>
-            <a:ext cx="3312000" cy="288000"/>
+            <a:off x="4579200" y="9090000"/>
+            <a:ext cx="3240000" cy="576000"/>
           </a:xfrm>
           <a:prstGeom prst="rect">
             <a:avLst/>
@@ -7927,21 +4898,21 @@
                 </a:solidFill>
                 <a:latin typeface="Arial"/>
               </a:rPr>
-              <a:t>made before the task runs, from the page</a:t>
-            </a:r>
-          </a:p>
-        </p:txBody>
-      </p:sp>
-      <p:sp>
-        <p:nvSpPr>
-          <p:cNvPr id="145" name="TextBox 144"/>
+              <a:t>made before the task runs, from what the page looks like</a:t>
+            </a:r>
+          </a:p>
+        </p:txBody>
+      </p:sp>
+      <p:sp>
+        <p:nvSpPr>
+          <p:cNvPr id="99" name="TextBox 98"/>
           <p:cNvSpPr txBox="1"/>
           <p:nvPr/>
         </p:nvSpPr>
         <p:spPr>
           <a:xfrm>
-            <a:off x="4417200" y="26730000"/>
-            <a:ext cx="3564000" cy="216000"/>
+            <a:off x="4435200" y="10260000"/>
+            <a:ext cx="3528000" cy="216000"/>
           </a:xfrm>
           <a:prstGeom prst="rect">
             <a:avLst/>
@@ -7976,14 +4947,14 @@
       </p:sp>
       <p:sp>
         <p:nvSpPr>
-          <p:cNvPr id="146" name="Rectangle 145"/>
+          <p:cNvPr id="100" name="Rectangle 99"/>
           <p:cNvSpPr/>
           <p:nvPr/>
         </p:nvSpPr>
         <p:spPr>
           <a:xfrm>
-            <a:off x="8647200" y="23580000"/>
-            <a:ext cx="5400000" cy="1044000"/>
+            <a:off x="8647200" y="5580000"/>
+            <a:ext cx="5400000" cy="1584000"/>
           </a:xfrm>
           <a:prstGeom prst="rect">
             <a:avLst/>
@@ -8022,13 +4993,13 @@
       </p:sp>
       <p:sp>
         <p:nvSpPr>
-          <p:cNvPr id="147" name="Rectangle 146"/>
+          <p:cNvPr id="101" name="Rectangle 100"/>
           <p:cNvSpPr/>
           <p:nvPr/>
         </p:nvSpPr>
         <p:spPr>
           <a:xfrm>
-            <a:off x="8647200" y="23580000"/>
+            <a:off x="8647200" y="5580000"/>
             <a:ext cx="5400000" cy="50400"/>
           </a:xfrm>
           <a:prstGeom prst="rect">
@@ -8066,14 +5037,14 @@
       </p:sp>
       <p:sp>
         <p:nvSpPr>
-          <p:cNvPr id="148" name="TextBox 147"/>
+          <p:cNvPr id="102" name="TextBox 101"/>
           <p:cNvSpPr txBox="1"/>
           <p:nvPr/>
         </p:nvSpPr>
         <p:spPr>
           <a:xfrm>
-            <a:off x="8809200" y="23673600"/>
-            <a:ext cx="1080000" cy="252000"/>
+            <a:off x="8827200" y="5742000"/>
+            <a:ext cx="1440000" cy="288000"/>
           </a:xfrm>
           <a:prstGeom prst="rect">
             <a:avLst/>
@@ -8108,14 +5079,14 @@
       </p:sp>
       <p:sp>
         <p:nvSpPr>
-          <p:cNvPr id="149" name="TextBox 148"/>
+          <p:cNvPr id="103" name="TextBox 102"/>
           <p:cNvSpPr txBox="1"/>
           <p:nvPr/>
         </p:nvSpPr>
         <p:spPr>
           <a:xfrm>
-            <a:off x="9673200" y="23695200"/>
-            <a:ext cx="2448000" cy="432000"/>
+            <a:off x="8827200" y="6084000"/>
+            <a:ext cx="2520000" cy="504000"/>
           </a:xfrm>
           <a:prstGeom prst="rect">
             <a:avLst/>
@@ -8150,14 +5121,14 @@
       </p:sp>
       <p:sp>
         <p:nvSpPr>
-          <p:cNvPr id="150" name="TextBox 149"/>
+          <p:cNvPr id="104" name="TextBox 103"/>
           <p:cNvSpPr txBox="1"/>
           <p:nvPr/>
         </p:nvSpPr>
         <p:spPr>
           <a:xfrm>
-            <a:off x="8809200" y="24282000"/>
-            <a:ext cx="3312000" cy="288000"/>
+            <a:off x="8827200" y="6624000"/>
+            <a:ext cx="2520000" cy="432000"/>
           </a:xfrm>
           <a:prstGeom prst="rect">
             <a:avLst/>
@@ -8192,14 +5163,14 @@
       </p:sp>
       <p:sp>
         <p:nvSpPr>
-          <p:cNvPr id="151" name="Rectangle 150"/>
+          <p:cNvPr id="105" name="Rectangle 104"/>
           <p:cNvSpPr/>
           <p:nvPr/>
         </p:nvSpPr>
         <p:spPr>
           <a:xfrm>
-            <a:off x="12214800" y="23634000"/>
-            <a:ext cx="1684800" cy="955125"/>
+            <a:off x="11476800" y="5709600"/>
+            <a:ext cx="2404800" cy="1357875"/>
           </a:xfrm>
           <a:prstGeom prst="rect">
             <a:avLst/>
@@ -8236,22 +5207,22 @@
       </p:sp>
       <p:pic>
         <p:nvPicPr>
-          <p:cNvPr id="152" name="Picture 151" descr="eye_look.png"/>
+          <p:cNvPr id="106" name="Picture 105" descr="eye_look.png"/>
           <p:cNvPicPr>
             <a:picLocks noChangeAspect="1"/>
           </p:cNvPicPr>
           <p:nvPr/>
         </p:nvPicPr>
         <p:blipFill>
-          <a:blip r:embed="rId7"/>
+          <a:blip r:embed="rId5"/>
           <a:stretch>
             <a:fillRect/>
           </a:stretch>
         </p:blipFill>
         <p:spPr>
           <a:xfrm>
-            <a:off x="12229200" y="23648400"/>
-            <a:ext cx="1656000" cy="926325"/>
+            <a:off x="11491200" y="5724000"/>
+            <a:ext cx="2376000" cy="1329075"/>
           </a:xfrm>
           <a:prstGeom prst="rect">
             <a:avLst/>
@@ -8260,14 +5231,14 @@
       </p:pic>
       <p:sp>
         <p:nvSpPr>
-          <p:cNvPr id="153" name="Rectangle 152"/>
+          <p:cNvPr id="107" name="Rectangle 106"/>
           <p:cNvSpPr/>
           <p:nvPr/>
         </p:nvSpPr>
         <p:spPr>
           <a:xfrm>
-            <a:off x="8647200" y="24786000"/>
-            <a:ext cx="5400000" cy="1044000"/>
+            <a:off x="8647200" y="7308000"/>
+            <a:ext cx="5400000" cy="1584000"/>
           </a:xfrm>
           <a:prstGeom prst="rect">
             <a:avLst/>
@@ -8306,13 +5277,13 @@
       </p:sp>
       <p:sp>
         <p:nvSpPr>
-          <p:cNvPr id="154" name="Rectangle 153"/>
+          <p:cNvPr id="108" name="Rectangle 107"/>
           <p:cNvSpPr/>
           <p:nvPr/>
         </p:nvSpPr>
         <p:spPr>
           <a:xfrm>
-            <a:off x="8647200" y="24786000"/>
+            <a:off x="8647200" y="7308000"/>
             <a:ext cx="5400000" cy="50400"/>
           </a:xfrm>
           <a:prstGeom prst="rect">
@@ -8350,14 +5321,14 @@
       </p:sp>
       <p:sp>
         <p:nvSpPr>
-          <p:cNvPr id="155" name="TextBox 154"/>
+          <p:cNvPr id="109" name="TextBox 108"/>
           <p:cNvSpPr txBox="1"/>
           <p:nvPr/>
         </p:nvSpPr>
         <p:spPr>
           <a:xfrm>
-            <a:off x="8809200" y="24879600"/>
-            <a:ext cx="1080000" cy="252000"/>
+            <a:off x="8827200" y="7470000"/>
+            <a:ext cx="1440000" cy="288000"/>
           </a:xfrm>
           <a:prstGeom prst="rect">
             <a:avLst/>
@@ -8392,14 +5363,14 @@
       </p:sp>
       <p:sp>
         <p:nvSpPr>
-          <p:cNvPr id="156" name="TextBox 155"/>
+          <p:cNvPr id="110" name="TextBox 109"/>
           <p:cNvSpPr txBox="1"/>
           <p:nvPr/>
         </p:nvSpPr>
         <p:spPr>
           <a:xfrm>
-            <a:off x="9673200" y="24901200"/>
-            <a:ext cx="2448000" cy="432000"/>
+            <a:off x="8827200" y="7812000"/>
+            <a:ext cx="2520000" cy="504000"/>
           </a:xfrm>
           <a:prstGeom prst="rect">
             <a:avLst/>
@@ -8434,14 +5405,14 @@
       </p:sp>
       <p:sp>
         <p:nvSpPr>
-          <p:cNvPr id="157" name="TextBox 156"/>
+          <p:cNvPr id="111" name="TextBox 110"/>
           <p:cNvSpPr txBox="1"/>
           <p:nvPr/>
         </p:nvSpPr>
         <p:spPr>
           <a:xfrm>
-            <a:off x="8809200" y="25488000"/>
-            <a:ext cx="3312000" cy="288000"/>
+            <a:off x="8827200" y="8352000"/>
+            <a:ext cx="2520000" cy="432000"/>
           </a:xfrm>
           <a:prstGeom prst="rect">
             <a:avLst/>
@@ -8476,14 +5447,14 @@
       </p:sp>
       <p:sp>
         <p:nvSpPr>
-          <p:cNvPr id="158" name="Rectangle 157"/>
+          <p:cNvPr id="112" name="Rectangle 111"/>
           <p:cNvSpPr/>
           <p:nvPr/>
         </p:nvSpPr>
         <p:spPr>
           <a:xfrm>
-            <a:off x="12229200" y="24854400"/>
-            <a:ext cx="1656000" cy="925200"/>
+            <a:off x="11491200" y="7452000"/>
+            <a:ext cx="2376000" cy="1328400"/>
           </a:xfrm>
           <a:prstGeom prst="rect">
             <a:avLst/>
@@ -8522,14 +5493,14 @@
       </p:sp>
       <p:sp>
         <p:nvSpPr>
-          <p:cNvPr id="159" name="TextBox 158"/>
+          <p:cNvPr id="113" name="TextBox 112"/>
           <p:cNvSpPr txBox="1"/>
           <p:nvPr/>
         </p:nvSpPr>
         <p:spPr>
           <a:xfrm>
-            <a:off x="12283200" y="24908400"/>
-            <a:ext cx="1548000" cy="828000"/>
+            <a:off x="11563200" y="7524000"/>
+            <a:ext cx="2232000" cy="1188000"/>
           </a:xfrm>
           <a:prstGeom prst="rect">
             <a:avLst/>
@@ -8544,14 +5515,14 @@
           <a:p>
             <a:pPr algn="l">
               <a:lnSpc>
-                <a:spcPct val="112000"/>
+                <a:spcPct val="115000"/>
               </a:lnSpc>
               <a:spcAft>
                 <a:spcPts val="0"/>
               </a:spcAft>
             </a:pPr>
             <a:r>
-              <a:rPr sz="650" b="0" i="0">
+              <a:rPr sz="750" b="0" i="0">
                 <a:solidFill>
                   <a:srgbClr val="12162E"/>
                 </a:solidFill>
@@ -8563,14 +5534,14 @@
           <a:p>
             <a:pPr algn="l">
               <a:lnSpc>
-                <a:spcPct val="112000"/>
+                <a:spcPct val="115000"/>
               </a:lnSpc>
               <a:spcAft>
                 <a:spcPts val="0"/>
               </a:spcAft>
             </a:pPr>
             <a:r>
-              <a:rPr sz="650" b="0" i="0">
+              <a:rPr sz="750" b="0" i="0">
                 <a:solidFill>
                   <a:srgbClr val="12162E"/>
                 </a:solidFill>
@@ -8582,14 +5553,14 @@
           <a:p>
             <a:pPr algn="l">
               <a:lnSpc>
-                <a:spcPct val="112000"/>
+                <a:spcPct val="115000"/>
               </a:lnSpc>
               <a:spcAft>
                 <a:spcPts val="0"/>
               </a:spcAft>
             </a:pPr>
             <a:r>
-              <a:rPr sz="650" b="0" i="0">
+              <a:rPr sz="750" b="0" i="0">
                 <a:solidFill>
                   <a:srgbClr val="12162E"/>
                 </a:solidFill>
@@ -8601,14 +5572,14 @@
           <a:p>
             <a:pPr algn="l">
               <a:lnSpc>
-                <a:spcPct val="112000"/>
+                <a:spcPct val="115000"/>
               </a:lnSpc>
               <a:spcAft>
                 <a:spcPts val="0"/>
               </a:spcAft>
             </a:pPr>
             <a:r>
-              <a:rPr sz="650" b="0" i="0">
+              <a:rPr sz="750" b="0" i="0">
                 <a:solidFill>
                   <a:srgbClr val="12162E"/>
                 </a:solidFill>
@@ -8620,14 +5591,14 @@
           <a:p>
             <a:pPr algn="l">
               <a:lnSpc>
-                <a:spcPct val="112000"/>
+                <a:spcPct val="115000"/>
               </a:lnSpc>
               <a:spcAft>
                 <a:spcPts val="0"/>
               </a:spcAft>
             </a:pPr>
             <a:r>
-              <a:rPr sz="650" b="0" i="0">
+              <a:rPr sz="750" b="0" i="0">
                 <a:solidFill>
                   <a:srgbClr val="12162E"/>
                 </a:solidFill>
@@ -8639,14 +5610,14 @@
           <a:p>
             <a:pPr algn="l">
               <a:lnSpc>
-                <a:spcPct val="112000"/>
+                <a:spcPct val="115000"/>
               </a:lnSpc>
               <a:spcAft>
                 <a:spcPts val="0"/>
               </a:spcAft>
             </a:pPr>
             <a:r>
-              <a:rPr sz="650" b="0" i="0">
+              <a:rPr sz="750" b="0" i="0">
                 <a:solidFill>
                   <a:srgbClr val="12162E"/>
                 </a:solidFill>
@@ -8659,14 +5630,14 @@
       </p:sp>
       <p:sp>
         <p:nvSpPr>
-          <p:cNvPr id="160" name="Rectangle 159"/>
+          <p:cNvPr id="114" name="Rectangle 113"/>
           <p:cNvSpPr/>
           <p:nvPr/>
         </p:nvSpPr>
         <p:spPr>
           <a:xfrm>
-            <a:off x="8647200" y="25992000"/>
-            <a:ext cx="5400000" cy="1044000"/>
+            <a:off x="8647200" y="9036000"/>
+            <a:ext cx="5400000" cy="1584000"/>
           </a:xfrm>
           <a:prstGeom prst="rect">
             <a:avLst/>
@@ -8705,13 +5676,13 @@
       </p:sp>
       <p:sp>
         <p:nvSpPr>
-          <p:cNvPr id="161" name="Rectangle 160"/>
+          <p:cNvPr id="115" name="Rectangle 114"/>
           <p:cNvSpPr/>
           <p:nvPr/>
         </p:nvSpPr>
         <p:spPr>
           <a:xfrm>
-            <a:off x="8647200" y="25992000"/>
+            <a:off x="8647200" y="9036000"/>
             <a:ext cx="5400000" cy="50400"/>
           </a:xfrm>
           <a:prstGeom prst="rect">
@@ -8749,14 +5720,14 @@
       </p:sp>
       <p:sp>
         <p:nvSpPr>
-          <p:cNvPr id="162" name="TextBox 161"/>
+          <p:cNvPr id="116" name="TextBox 115"/>
           <p:cNvSpPr txBox="1"/>
           <p:nvPr/>
         </p:nvSpPr>
         <p:spPr>
           <a:xfrm>
-            <a:off x="8809200" y="26085600"/>
-            <a:ext cx="1080000" cy="252000"/>
+            <a:off x="8827200" y="9198000"/>
+            <a:ext cx="1440000" cy="288000"/>
           </a:xfrm>
           <a:prstGeom prst="rect">
             <a:avLst/>
@@ -8791,14 +5762,14 @@
       </p:sp>
       <p:sp>
         <p:nvSpPr>
-          <p:cNvPr id="163" name="TextBox 162"/>
+          <p:cNvPr id="117" name="TextBox 116"/>
           <p:cNvSpPr txBox="1"/>
           <p:nvPr/>
         </p:nvSpPr>
         <p:spPr>
           <a:xfrm>
-            <a:off x="9673200" y="26107200"/>
-            <a:ext cx="2448000" cy="432000"/>
+            <a:off x="8827200" y="9540000"/>
+            <a:ext cx="2520000" cy="504000"/>
           </a:xfrm>
           <a:prstGeom prst="rect">
             <a:avLst/>
@@ -8833,14 +5804,14 @@
       </p:sp>
       <p:sp>
         <p:nvSpPr>
-          <p:cNvPr id="164" name="TextBox 163"/>
+          <p:cNvPr id="118" name="TextBox 117"/>
           <p:cNvSpPr txBox="1"/>
           <p:nvPr/>
         </p:nvSpPr>
         <p:spPr>
           <a:xfrm>
-            <a:off x="8809200" y="26694000"/>
-            <a:ext cx="3312000" cy="288000"/>
+            <a:off x="8827200" y="10080000"/>
+            <a:ext cx="2520000" cy="432000"/>
           </a:xfrm>
           <a:prstGeom prst="rect">
             <a:avLst/>
@@ -8875,14 +5846,14 @@
       </p:sp>
       <p:sp>
         <p:nvSpPr>
-          <p:cNvPr id="165" name="Rectangle 164"/>
+          <p:cNvPr id="119" name="Rectangle 118"/>
           <p:cNvSpPr/>
           <p:nvPr/>
         </p:nvSpPr>
         <p:spPr>
           <a:xfrm>
-            <a:off x="12214800" y="26046000"/>
-            <a:ext cx="1684800" cy="955125"/>
+            <a:off x="11476800" y="9165600"/>
+            <a:ext cx="2404800" cy="1357875"/>
           </a:xfrm>
           <a:prstGeom prst="rect">
             <a:avLst/>
@@ -8919,22 +5890,22 @@
       </p:sp>
       <p:pic>
         <p:nvPicPr>
-          <p:cNvPr id="166" name="Picture 165" descr="eye_both.png"/>
+          <p:cNvPr id="120" name="Picture 119" descr="eye_both.png"/>
           <p:cNvPicPr>
             <a:picLocks noChangeAspect="1"/>
           </p:cNvPicPr>
           <p:nvPr/>
         </p:nvPicPr>
         <p:blipFill>
-          <a:blip r:embed="rId8"/>
+          <a:blip r:embed="rId6"/>
           <a:stretch>
             <a:fillRect/>
           </a:stretch>
         </p:blipFill>
         <p:spPr>
           <a:xfrm>
-            <a:off x="12229200" y="26060400"/>
-            <a:ext cx="1656000" cy="926325"/>
+            <a:off x="11491200" y="9180000"/>
+            <a:ext cx="2376000" cy="1329075"/>
           </a:xfrm>
           <a:prstGeom prst="rect">
             <a:avLst/>
@@ -8943,14 +5914,14 @@
       </p:pic>
       <p:sp>
         <p:nvSpPr>
-          <p:cNvPr id="167" name="Rectangle 166"/>
+          <p:cNvPr id="121" name="Rectangle 120"/>
           <p:cNvSpPr/>
           <p:nvPr/>
         </p:nvSpPr>
         <p:spPr>
           <a:xfrm>
-            <a:off x="14551200" y="23580000"/>
-            <a:ext cx="3168000" cy="3456000"/>
+            <a:off x="14551200" y="5580000"/>
+            <a:ext cx="3168000" cy="5040000"/>
           </a:xfrm>
           <a:prstGeom prst="rect">
             <a:avLst/>
@@ -8989,13 +5960,13 @@
       </p:sp>
       <p:sp>
         <p:nvSpPr>
-          <p:cNvPr id="168" name="Rectangle 167"/>
+          <p:cNvPr id="122" name="Rectangle 121"/>
           <p:cNvSpPr/>
           <p:nvPr/>
         </p:nvSpPr>
         <p:spPr>
           <a:xfrm>
-            <a:off x="14551200" y="23580000"/>
+            <a:off x="14551200" y="5580000"/>
             <a:ext cx="3168000" cy="50400"/>
           </a:xfrm>
           <a:prstGeom prst="rect">
@@ -9033,14 +6004,14 @@
       </p:sp>
       <p:sp>
         <p:nvSpPr>
-          <p:cNvPr id="169" name="TextBox 168"/>
+          <p:cNvPr id="123" name="TextBox 122"/>
           <p:cNvSpPr txBox="1"/>
           <p:nvPr/>
         </p:nvSpPr>
         <p:spPr>
           <a:xfrm>
-            <a:off x="14713200" y="23706000"/>
-            <a:ext cx="2844000" cy="216000"/>
+            <a:off x="14731200" y="5724000"/>
+            <a:ext cx="2808000" cy="216000"/>
           </a:xfrm>
           <a:prstGeom prst="rect">
             <a:avLst/>
@@ -9075,14 +6046,14 @@
       </p:sp>
       <p:sp>
         <p:nvSpPr>
-          <p:cNvPr id="170" name="TextBox 169"/>
+          <p:cNvPr id="124" name="TextBox 123"/>
           <p:cNvSpPr txBox="1"/>
           <p:nvPr/>
         </p:nvSpPr>
         <p:spPr>
           <a:xfrm>
-            <a:off x="14713200" y="23940000"/>
-            <a:ext cx="2844000" cy="322781"/>
+            <a:off x="14731200" y="5958000"/>
+            <a:ext cx="2808000" cy="322781"/>
           </a:xfrm>
           <a:prstGeom prst="rect">
             <a:avLst/>
@@ -9117,14 +6088,14 @@
       </p:sp>
       <p:sp>
         <p:nvSpPr>
-          <p:cNvPr id="171" name="TextBox 170"/>
+          <p:cNvPr id="125" name="TextBox 124"/>
           <p:cNvSpPr txBox="1"/>
           <p:nvPr/>
         </p:nvSpPr>
         <p:spPr>
           <a:xfrm>
-            <a:off x="14713200" y="24316781"/>
-            <a:ext cx="2844000" cy="255684"/>
+            <a:off x="14731200" y="6352781"/>
+            <a:ext cx="2808000" cy="255684"/>
           </a:xfrm>
           <a:prstGeom prst="rect">
             <a:avLst/>
@@ -9159,14 +6130,14 @@
       </p:sp>
       <p:sp>
         <p:nvSpPr>
-          <p:cNvPr id="172" name="TextBox 171"/>
+          <p:cNvPr id="126" name="TextBox 125"/>
           <p:cNvSpPr txBox="1"/>
           <p:nvPr/>
         </p:nvSpPr>
         <p:spPr>
           <a:xfrm>
-            <a:off x="14713200" y="24680465"/>
-            <a:ext cx="2844000" cy="767053"/>
+            <a:off x="14731200" y="6752465"/>
+            <a:ext cx="2808000" cy="767053"/>
           </a:xfrm>
           <a:prstGeom prst="rect">
             <a:avLst/>
@@ -9201,14 +6172,14 @@
       </p:sp>
       <p:sp>
         <p:nvSpPr>
-          <p:cNvPr id="173" name="Rectangle 172"/>
+          <p:cNvPr id="127" name="Rectangle 126"/>
           <p:cNvSpPr/>
           <p:nvPr/>
         </p:nvSpPr>
         <p:spPr>
           <a:xfrm>
-            <a:off x="18223200" y="23580000"/>
-            <a:ext cx="2566800" cy="3456000"/>
+            <a:off x="18223200" y="5580000"/>
+            <a:ext cx="2566800" cy="5040000"/>
           </a:xfrm>
           <a:prstGeom prst="rect">
             <a:avLst/>
@@ -9247,13 +6218,13 @@
       </p:sp>
       <p:sp>
         <p:nvSpPr>
-          <p:cNvPr id="174" name="Rectangle 173"/>
+          <p:cNvPr id="128" name="Rectangle 127"/>
           <p:cNvSpPr/>
           <p:nvPr/>
         </p:nvSpPr>
         <p:spPr>
           <a:xfrm>
-            <a:off x="18223200" y="23580000"/>
+            <a:off x="18223200" y="5580000"/>
             <a:ext cx="2566800" cy="50400"/>
           </a:xfrm>
           <a:prstGeom prst="rect">
@@ -9291,14 +6262,14 @@
       </p:sp>
       <p:sp>
         <p:nvSpPr>
-          <p:cNvPr id="175" name="TextBox 174"/>
+          <p:cNvPr id="129" name="TextBox 128"/>
           <p:cNvSpPr txBox="1"/>
           <p:nvPr/>
         </p:nvSpPr>
         <p:spPr>
           <a:xfrm>
-            <a:off x="18385200" y="23706000"/>
-            <a:ext cx="2242800" cy="216000"/>
+            <a:off x="18403200" y="5724000"/>
+            <a:ext cx="2206800" cy="216000"/>
           </a:xfrm>
           <a:prstGeom prst="rect">
             <a:avLst/>
@@ -9333,14 +6304,14 @@
       </p:sp>
       <p:sp>
         <p:nvSpPr>
-          <p:cNvPr id="176" name="TextBox 175"/>
+          <p:cNvPr id="130" name="TextBox 129"/>
           <p:cNvSpPr txBox="1"/>
           <p:nvPr/>
         </p:nvSpPr>
         <p:spPr>
           <a:xfrm>
-            <a:off x="18385200" y="23940000"/>
-            <a:ext cx="2242800" cy="771563"/>
+            <a:off x="18403200" y="5958000"/>
+            <a:ext cx="2206800" cy="771563"/>
           </a:xfrm>
           <a:prstGeom prst="rect">
             <a:avLst/>
@@ -9394,14 +6365,14 @@
       </p:sp>
       <p:sp>
         <p:nvSpPr>
-          <p:cNvPr id="177" name="TextBox 176"/>
+          <p:cNvPr id="131" name="TextBox 130"/>
           <p:cNvSpPr txBox="1"/>
           <p:nvPr/>
         </p:nvSpPr>
         <p:spPr>
           <a:xfrm>
-            <a:off x="18385200" y="24783563"/>
-            <a:ext cx="2242800" cy="1022738"/>
+            <a:off x="18403200" y="6801563"/>
+            <a:ext cx="2206800" cy="1022738"/>
           </a:xfrm>
           <a:prstGeom prst="rect">
             <a:avLst/>
@@ -9436,14 +6407,14 @@
       </p:sp>
       <p:sp>
         <p:nvSpPr>
-          <p:cNvPr id="178" name="Rectangle 177"/>
+          <p:cNvPr id="132" name="Rectangle 131"/>
           <p:cNvSpPr/>
           <p:nvPr/>
         </p:nvSpPr>
         <p:spPr>
           <a:xfrm>
-            <a:off x="16113600" y="27036000"/>
-            <a:ext cx="43200" cy="324000"/>
+            <a:off x="16113600" y="10620000"/>
+            <a:ext cx="43200" cy="432000"/>
           </a:xfrm>
           <a:prstGeom prst="rect">
             <a:avLst/>
@@ -9480,13 +6451,13 @@
       </p:sp>
       <p:sp>
         <p:nvSpPr>
-          <p:cNvPr id="179" name="Rectangle 178"/>
+          <p:cNvPr id="133" name="Rectangle 132"/>
           <p:cNvSpPr/>
           <p:nvPr/>
         </p:nvSpPr>
         <p:spPr>
           <a:xfrm>
-            <a:off x="2239200" y="27338400"/>
+            <a:off x="2239200" y="11030400"/>
             <a:ext cx="13896000" cy="43200"/>
           </a:xfrm>
           <a:prstGeom prst="rect">
@@ -9524,14 +6495,14 @@
       </p:sp>
       <p:sp>
         <p:nvSpPr>
-          <p:cNvPr id="180" name="Rectangle 179"/>
+          <p:cNvPr id="134" name="Rectangle 133"/>
           <p:cNvSpPr/>
           <p:nvPr/>
         </p:nvSpPr>
         <p:spPr>
           <a:xfrm>
-            <a:off x="2217600" y="27180000"/>
-            <a:ext cx="43200" cy="180000"/>
+            <a:off x="2217600" y="10764000"/>
+            <a:ext cx="43200" cy="288000"/>
           </a:xfrm>
           <a:prstGeom prst="rect">
             <a:avLst/>
@@ -9568,13 +6539,13 @@
       </p:sp>
       <p:sp>
         <p:nvSpPr>
-          <p:cNvPr id="181" name="Isosceles Triangle 180"/>
+          <p:cNvPr id="135" name="Isosceles Triangle 134"/>
           <p:cNvSpPr/>
           <p:nvPr/>
         </p:nvSpPr>
         <p:spPr>
           <a:xfrm>
-            <a:off x="2131200" y="27036000"/>
+            <a:off x="2131200" y="10620000"/>
             <a:ext cx="216000" cy="162000"/>
           </a:xfrm>
           <a:prstGeom prst="triangle">
@@ -9612,13 +6583,13 @@
       </p:sp>
       <p:sp>
         <p:nvSpPr>
-          <p:cNvPr id="182" name="TextBox 181"/>
+          <p:cNvPr id="136" name="TextBox 135"/>
           <p:cNvSpPr txBox="1"/>
           <p:nvPr/>
         </p:nvSpPr>
         <p:spPr>
           <a:xfrm>
-            <a:off x="2599200" y="27414000"/>
+            <a:off x="2599200" y="11124000"/>
             <a:ext cx="13176000" cy="252000"/>
           </a:xfrm>
           <a:prstGeom prst="rect">
@@ -9654,13 +6625,13 @@
       </p:sp>
       <p:sp>
         <p:nvSpPr>
-          <p:cNvPr id="183" name="TextBox 182"/>
+          <p:cNvPr id="137" name="TextBox 136"/>
           <p:cNvSpPr txBox="1"/>
           <p:nvPr/>
         </p:nvSpPr>
         <p:spPr>
           <a:xfrm>
-            <a:off x="727200" y="27684000"/>
+            <a:off x="727200" y="11412000"/>
             <a:ext cx="20062800" cy="255684"/>
           </a:xfrm>
           <a:prstGeom prst="rect">
@@ -9716,14 +6687,3111 @@
                 </a:solidFill>
                 <a:latin typeface="Arial"/>
               </a:rPr>
-              <a:t> success and cost.</a:t>
-            </a:r>
+              <a:t> success and cost. The laptop beside this poster replays the loop on three tasks.</a:t>
+            </a:r>
+          </a:p>
+        </p:txBody>
+      </p:sp>
+      <p:sp>
+        <p:nvSpPr>
+          <p:cNvPr id="14" name="Rectangle 13"/>
+          <p:cNvSpPr/>
+          <p:nvPr/>
+        </p:nvSpPr>
+        <p:spPr>
+          <a:xfrm>
+            <a:off x="727200" y="11991684"/>
+            <a:ext cx="177988" cy="177988"/>
+          </a:xfrm>
+          <a:prstGeom prst="rect">
+            <a:avLst/>
+          </a:prstGeom>
+          <a:solidFill>
+            <a:srgbClr val="AB5FCE"/>
+          </a:solidFill>
+          <a:ln>
+            <a:noFill/>
+          </a:ln>
+          <a:effectLst/>
+        </p:spPr>
+        <p:style>
+          <a:lnRef idx="1">
+            <a:schemeClr val="accent1"/>
+          </a:lnRef>
+          <a:fillRef idx="3">
+            <a:schemeClr val="accent1"/>
+          </a:fillRef>
+          <a:effectRef idx="2">
+            <a:schemeClr val="accent1"/>
+          </a:effectRef>
+          <a:fontRef idx="minor">
+            <a:schemeClr val="lt1"/>
+          </a:fontRef>
+        </p:style>
+        <p:txBody>
+          <a:bodyPr rtlCol="0" anchor="ctr"/>
+          <a:lstStyle/>
+          <a:p>
+            <a:pPr algn="ctr"/>
+            <a:endParaRPr/>
+          </a:p>
+        </p:txBody>
+      </p:sp>
+      <p:sp>
+        <p:nvSpPr>
+          <p:cNvPr id="15" name="TextBox 14"/>
+          <p:cNvSpPr txBox="1"/>
+          <p:nvPr/>
+        </p:nvSpPr>
+        <p:spPr>
+          <a:xfrm>
+            <a:off x="1032323" y="11948484"/>
+            <a:ext cx="6144827" cy="238912"/>
+          </a:xfrm>
+          <a:prstGeom prst="rect">
+            <a:avLst/>
+          </a:prstGeom>
+          <a:noFill/>
+        </p:spPr>
+        <p:txBody>
+          <a:bodyPr wrap="square" lIns="0" tIns="0" rIns="0" bIns="0" anchor="t">
+            <a:spAutoFit/>
+          </a:bodyPr>
+          <a:lstStyle/>
+          <a:p>
+            <a:pPr algn="l">
+              <a:lnSpc>
+                <a:spcPct val="118000"/>
+              </a:lnSpc>
+            </a:pPr>
+            <a:r>
+              <a:rPr sz="1412" b="1" i="0">
+                <a:solidFill>
+                  <a:srgbClr val="141E41"/>
+                </a:solidFill>
+                <a:latin typeface="Consolas"/>
+              </a:rPr>
+              <a:t>RESULTS ACROSS 8,934 TASK ATTEMPTS</a:t>
+            </a:r>
+            <a:endParaRPr sz="1412" b="1" spc="180" dirty="0">
+              <a:solidFill>
+                <a:srgbClr val="141E41"/>
+              </a:solidFill>
+              <a:latin typeface="Consolas"/>
+            </a:endParaRPr>
+          </a:p>
+        </p:txBody>
+      </p:sp>
+      <p:sp>
+        <p:nvSpPr>
+          <p:cNvPr id="16" name="Rectangle 15"/>
+          <p:cNvSpPr/>
+          <p:nvPr/>
+        </p:nvSpPr>
+        <p:spPr>
+          <a:xfrm>
+            <a:off x="727200" y="12309520"/>
+            <a:ext cx="1169636" cy="35597"/>
+          </a:xfrm>
+          <a:prstGeom prst="rect">
+            <a:avLst/>
+          </a:prstGeom>
+          <a:solidFill>
+            <a:srgbClr val="141E41"/>
+          </a:solidFill>
+          <a:ln>
+            <a:noFill/>
+          </a:ln>
+          <a:effectLst/>
+        </p:spPr>
+        <p:style>
+          <a:lnRef idx="1">
+            <a:schemeClr val="accent1"/>
+          </a:lnRef>
+          <a:fillRef idx="3">
+            <a:schemeClr val="accent1"/>
+          </a:fillRef>
+          <a:effectRef idx="2">
+            <a:schemeClr val="accent1"/>
+          </a:effectRef>
+          <a:fontRef idx="minor">
+            <a:schemeClr val="lt1"/>
+          </a:fontRef>
+        </p:style>
+        <p:txBody>
+          <a:bodyPr rtlCol="0" anchor="ctr"/>
+          <a:lstStyle/>
+          <a:p>
+            <a:pPr algn="ctr"/>
+            <a:endParaRPr/>
+          </a:p>
+        </p:txBody>
+      </p:sp>
+      <p:sp>
+        <p:nvSpPr>
+          <p:cNvPr id="17" name="Rectangle 16"/>
+          <p:cNvSpPr/>
+          <p:nvPr/>
+        </p:nvSpPr>
+        <p:spPr>
+          <a:xfrm>
+            <a:off x="1896836" y="12319691"/>
+            <a:ext cx="18893164" cy="15256"/>
+          </a:xfrm>
+          <a:prstGeom prst="rect">
+            <a:avLst/>
+          </a:prstGeom>
+          <a:solidFill>
+            <a:srgbClr val="DDE3F2"/>
+          </a:solidFill>
+          <a:ln>
+            <a:noFill/>
+          </a:ln>
+          <a:effectLst/>
+        </p:spPr>
+        <p:style>
+          <a:lnRef idx="1">
+            <a:schemeClr val="accent1"/>
+          </a:lnRef>
+          <a:fillRef idx="3">
+            <a:schemeClr val="accent1"/>
+          </a:fillRef>
+          <a:effectRef idx="2">
+            <a:schemeClr val="accent1"/>
+          </a:effectRef>
+          <a:fontRef idx="minor">
+            <a:schemeClr val="lt1"/>
+          </a:fontRef>
+        </p:style>
+        <p:txBody>
+          <a:bodyPr rtlCol="0" anchor="ctr"/>
+          <a:lstStyle/>
+          <a:p>
+            <a:pPr algn="ctr"/>
+            <a:endParaRPr/>
+          </a:p>
+        </p:txBody>
+      </p:sp>
+      <p:sp>
+        <p:nvSpPr>
+          <p:cNvPr id="138" name="Rectangle 137"/>
+          <p:cNvSpPr/>
+          <p:nvPr/>
+        </p:nvSpPr>
+        <p:spPr>
+          <a:xfrm>
+            <a:off x="727200" y="12531684"/>
+            <a:ext cx="20062800" cy="1170000"/>
+          </a:xfrm>
+          <a:prstGeom prst="rect">
+            <a:avLst/>
+          </a:prstGeom>
+          <a:solidFill>
+            <a:srgbClr val="ECEFFA"/>
+          </a:solidFill>
+          <a:ln>
+            <a:noFill/>
+          </a:ln>
+          <a:effectLst/>
+        </p:spPr>
+        <p:style>
+          <a:lnRef idx="1">
+            <a:schemeClr val="accent1"/>
+          </a:lnRef>
+          <a:fillRef idx="3">
+            <a:schemeClr val="accent1"/>
+          </a:fillRef>
+          <a:effectRef idx="2">
+            <a:schemeClr val="accent1"/>
+          </a:effectRef>
+          <a:fontRef idx="minor">
+            <a:schemeClr val="lt1"/>
+          </a:fontRef>
+        </p:style>
+        <p:txBody>
+          <a:bodyPr rtlCol="0" anchor="ctr" wrap="square"/>
+          <a:lstStyle/>
+          <a:p>
+            <a:pPr algn="ctr"/>
+          </a:p>
+        </p:txBody>
+      </p:sp>
+      <p:sp>
+        <p:nvSpPr>
+          <p:cNvPr id="139" name="TextBox 138"/>
+          <p:cNvSpPr txBox="1"/>
+          <p:nvPr/>
+        </p:nvSpPr>
+        <p:spPr>
+          <a:xfrm>
+            <a:off x="979200" y="12711684"/>
+            <a:ext cx="6519600" cy="612000"/>
+          </a:xfrm>
+          <a:prstGeom prst="rect">
+            <a:avLst/>
+          </a:prstGeom>
+          <a:noFill/>
+        </p:spPr>
+        <p:txBody>
+          <a:bodyPr wrap="square" lIns="0" rIns="0" tIns="0" bIns="0">
+            <a:spAutoFit/>
+          </a:bodyPr>
+          <a:lstStyle/>
+          <a:p>
+            <a:pPr algn="l">
+              <a:lnSpc>
+                <a:spcPct val="118000"/>
+              </a:lnSpc>
+              <a:spcAft>
+                <a:spcPts val="0"/>
+              </a:spcAft>
+            </a:pPr>
+            <a:r>
+              <a:rPr sz="3247" b="1" i="0">
+                <a:solidFill>
+                  <a:srgbClr val="141E41"/>
+                </a:solidFill>
+                <a:latin typeface="Consolas"/>
+              </a:rPr>
+              <a:t>+16.35 in 100</a:t>
+            </a:r>
+          </a:p>
+        </p:txBody>
+      </p:sp>
+      <p:sp>
+        <p:nvSpPr>
+          <p:cNvPr id="140" name="TextBox 139"/>
+          <p:cNvSpPr txBox="1"/>
+          <p:nvPr/>
+        </p:nvSpPr>
+        <p:spPr>
+          <a:xfrm>
+            <a:off x="979200" y="13269684"/>
+            <a:ext cx="6519600" cy="324000"/>
+          </a:xfrm>
+          <a:prstGeom prst="rect">
+            <a:avLst/>
+          </a:prstGeom>
+          <a:noFill/>
+        </p:spPr>
+        <p:txBody>
+          <a:bodyPr wrap="square" lIns="0" rIns="0" tIns="0" bIns="0">
+            <a:spAutoFit/>
+          </a:bodyPr>
+          <a:lstStyle/>
+          <a:p>
+            <a:pPr algn="l">
+              <a:lnSpc>
+                <a:spcPct val="118000"/>
+              </a:lnSpc>
+              <a:spcAft>
+                <a:spcPts val="0"/>
+              </a:spcAft>
+            </a:pPr>
+            <a:r>
+              <a:rPr sz="1059" b="0" i="0">
+                <a:solidFill>
+                  <a:srgbClr val="5D6787"/>
+                </a:solidFill>
+                <a:latin typeface="Consolas"/>
+              </a:rPr>
+              <a:t>PERFECT HINDSIGHT, BEST OF 8 · VS ONE FIXED VIEW</a:t>
+            </a:r>
+          </a:p>
+        </p:txBody>
+      </p:sp>
+      <p:sp>
+        <p:nvSpPr>
+          <p:cNvPr id="141" name="TextBox 140"/>
+          <p:cNvSpPr txBox="1"/>
+          <p:nvPr/>
+        </p:nvSpPr>
+        <p:spPr>
+          <a:xfrm>
+            <a:off x="7498800" y="12711684"/>
+            <a:ext cx="6519600" cy="612000"/>
+          </a:xfrm>
+          <a:prstGeom prst="rect">
+            <a:avLst/>
+          </a:prstGeom>
+          <a:noFill/>
+        </p:spPr>
+        <p:txBody>
+          <a:bodyPr wrap="square" lIns="0" rIns="0" tIns="0" bIns="0">
+            <a:spAutoFit/>
+          </a:bodyPr>
+          <a:lstStyle/>
+          <a:p>
+            <a:pPr algn="l">
+              <a:lnSpc>
+                <a:spcPct val="118000"/>
+              </a:lnSpc>
+              <a:spcAft>
+                <a:spcPts val="0"/>
+              </a:spcAft>
+            </a:pPr>
+            <a:r>
+              <a:rPr sz="3247" b="1" i="0">
+                <a:solidFill>
+                  <a:srgbClr val="141E41"/>
+                </a:solidFill>
+                <a:latin typeface="Consolas"/>
+              </a:rPr>
+              <a:t>0 of 8</a:t>
+            </a:r>
+          </a:p>
+        </p:txBody>
+      </p:sp>
+      <p:sp>
+        <p:nvSpPr>
+          <p:cNvPr id="142" name="TextBox 141"/>
+          <p:cNvSpPr txBox="1"/>
+          <p:nvPr/>
+        </p:nvSpPr>
+        <p:spPr>
+          <a:xfrm>
+            <a:off x="7498800" y="13269684"/>
+            <a:ext cx="6519600" cy="324000"/>
+          </a:xfrm>
+          <a:prstGeom prst="rect">
+            <a:avLst/>
+          </a:prstGeom>
+          <a:noFill/>
+        </p:spPr>
+        <p:txBody>
+          <a:bodyPr wrap="square" lIns="0" rIns="0" tIns="0" bIns="0">
+            <a:spAutoFit/>
+          </a:bodyPr>
+          <a:lstStyle/>
+          <a:p>
+            <a:pPr algn="l">
+              <a:lnSpc>
+                <a:spcPct val="118000"/>
+              </a:lnSpc>
+              <a:spcAft>
+                <a:spcPts val="0"/>
+              </a:spcAft>
+            </a:pPr>
+            <a:r>
+              <a:rPr sz="1059" b="0" i="0">
+                <a:solidFill>
+                  <a:srgbClr val="5D6787"/>
+                </a:solidFill>
+                <a:latin typeface="Consolas"/>
+              </a:rPr>
+              <a:t>LEARNED CHOICES THAT BEAT ALWAYS-CHEAPEST</a:t>
+            </a:r>
+          </a:p>
+        </p:txBody>
+      </p:sp>
+      <p:sp>
+        <p:nvSpPr>
+          <p:cNvPr id="143" name="TextBox 142"/>
+          <p:cNvSpPr txBox="1"/>
+          <p:nvPr/>
+        </p:nvSpPr>
+        <p:spPr>
+          <a:xfrm>
+            <a:off x="14018400" y="12711684"/>
+            <a:ext cx="6519600" cy="612000"/>
+          </a:xfrm>
+          <a:prstGeom prst="rect">
+            <a:avLst/>
+          </a:prstGeom>
+          <a:noFill/>
+        </p:spPr>
+        <p:txBody>
+          <a:bodyPr wrap="square" lIns="0" rIns="0" tIns="0" bIns="0">
+            <a:spAutoFit/>
+          </a:bodyPr>
+          <a:lstStyle/>
+          <a:p>
+            <a:pPr algn="l">
+              <a:lnSpc>
+                <a:spcPct val="118000"/>
+              </a:lnSpc>
+              <a:spcAft>
+                <a:spcPts val="0"/>
+              </a:spcAft>
+            </a:pPr>
+            <a:r>
+              <a:rPr sz="3247" b="1" i="0">
+                <a:solidFill>
+                  <a:srgbClr val="141E41"/>
+                </a:solidFill>
+                <a:latin typeface="Consolas"/>
+              </a:rPr>
+              <a:t>1 of 8</a:t>
+            </a:r>
+          </a:p>
+        </p:txBody>
+      </p:sp>
+      <p:sp>
+        <p:nvSpPr>
+          <p:cNvPr id="144" name="TextBox 143"/>
+          <p:cNvSpPr txBox="1"/>
+          <p:nvPr/>
+        </p:nvSpPr>
+        <p:spPr>
+          <a:xfrm>
+            <a:off x="14018400" y="13269684"/>
+            <a:ext cx="6519600" cy="324000"/>
+          </a:xfrm>
+          <a:prstGeom prst="rect">
+            <a:avLst/>
+          </a:prstGeom>
+          <a:noFill/>
+        </p:spPr>
+        <p:txBody>
+          <a:bodyPr wrap="square" lIns="0" rIns="0" tIns="0" bIns="0">
+            <a:spAutoFit/>
+          </a:bodyPr>
+          <a:lstStyle/>
+          <a:p>
+            <a:pPr algn="l">
+              <a:lnSpc>
+                <a:spcPct val="118000"/>
+              </a:lnSpc>
+              <a:spcAft>
+                <a:spcPts val="0"/>
+              </a:spcAft>
+            </a:pPr>
+            <a:r>
+              <a:rPr sz="1059" b="0" i="0">
+                <a:solidFill>
+                  <a:srgbClr val="5D6787"/>
+                </a:solidFill>
+                <a:latin typeface="Consolas"/>
+              </a:rPr>
+              <a:t>HINDSIGHT CHOICES THAT BEAT ALWAYS-CHEAPEST</a:t>
+            </a:r>
+          </a:p>
+        </p:txBody>
+      </p:sp>
+      <p:sp>
+        <p:nvSpPr>
+          <p:cNvPr id="145" name="TextBox 144"/>
+          <p:cNvSpPr txBox="1"/>
+          <p:nvPr/>
+        </p:nvSpPr>
+        <p:spPr>
+          <a:xfrm>
+            <a:off x="727200" y="13845684"/>
+            <a:ext cx="6543600" cy="511369"/>
+          </a:xfrm>
+          <a:prstGeom prst="rect">
+            <a:avLst/>
+          </a:prstGeom>
+          <a:noFill/>
+        </p:spPr>
+        <p:txBody>
+          <a:bodyPr wrap="square" lIns="0" rIns="0" tIns="0" bIns="0">
+            <a:spAutoFit/>
+          </a:bodyPr>
+          <a:lstStyle/>
+          <a:p>
+            <a:pPr algn="l">
+              <a:lnSpc>
+                <a:spcPct val="132000"/>
+              </a:lnSpc>
+              <a:spcAft>
+                <a:spcPts val="425"/>
+              </a:spcAft>
+            </a:pPr>
+            <a:r>
+              <a:rPr sz="1271" b="1" i="0">
+                <a:solidFill>
+                  <a:srgbClr val="12162E"/>
+                </a:solidFill>
+                <a:latin typeface="Arial"/>
+              </a:rPr>
+              <a:t>ONE FIXED VIEW</a:t>
+            </a:r>
+            <a:r>
+              <a:rPr sz="1271" b="0" i="0">
+                <a:solidFill>
+                  <a:srgbClr val="12162E"/>
+                </a:solidFill>
+                <a:latin typeface="Arial"/>
+              </a:rPr>
+              <a:t> — the single view that solves most tasks in a setting, used for every task.</a:t>
+            </a:r>
+          </a:p>
+        </p:txBody>
+      </p:sp>
+      <p:sp>
+        <p:nvSpPr>
+          <p:cNvPr id="146" name="TextBox 145"/>
+          <p:cNvSpPr txBox="1"/>
+          <p:nvPr/>
+        </p:nvSpPr>
+        <p:spPr>
+          <a:xfrm>
+            <a:off x="7486800" y="13845684"/>
+            <a:ext cx="6543600" cy="511369"/>
+          </a:xfrm>
+          <a:prstGeom prst="rect">
+            <a:avLst/>
+          </a:prstGeom>
+          <a:noFill/>
+        </p:spPr>
+        <p:txBody>
+          <a:bodyPr wrap="square" lIns="0" rIns="0" tIns="0" bIns="0">
+            <a:spAutoFit/>
+          </a:bodyPr>
+          <a:lstStyle/>
+          <a:p>
+            <a:pPr algn="l">
+              <a:lnSpc>
+                <a:spcPct val="132000"/>
+              </a:lnSpc>
+              <a:spcAft>
+                <a:spcPts val="425"/>
+              </a:spcAft>
+            </a:pPr>
+            <a:r>
+              <a:rPr sz="1271" b="1" i="0">
+                <a:solidFill>
+                  <a:srgbClr val="12162E"/>
+                </a:solidFill>
+                <a:latin typeface="Arial"/>
+              </a:rPr>
+              <a:t>ALWAYS-CHEAPEST</a:t>
+            </a:r>
+            <a:r>
+              <a:rPr sz="1271" b="0" i="0">
+                <a:solidFill>
+                  <a:srgbClr val="12162E"/>
+                </a:solidFill>
+                <a:latin typeface="Arial"/>
+              </a:rPr>
+              <a:t> — the single view that costs least on average in a setting, used for every task.</a:t>
+            </a:r>
+          </a:p>
+        </p:txBody>
+      </p:sp>
+      <p:sp>
+        <p:nvSpPr>
+          <p:cNvPr id="147" name="TextBox 146"/>
+          <p:cNvSpPr txBox="1"/>
+          <p:nvPr/>
+        </p:nvSpPr>
+        <p:spPr>
+          <a:xfrm>
+            <a:off x="14246400" y="13845684"/>
+            <a:ext cx="6543600" cy="767053"/>
+          </a:xfrm>
+          <a:prstGeom prst="rect">
+            <a:avLst/>
+          </a:prstGeom>
+          <a:noFill/>
+        </p:spPr>
+        <p:txBody>
+          <a:bodyPr wrap="square" lIns="0" rIns="0" tIns="0" bIns="0">
+            <a:spAutoFit/>
+          </a:bodyPr>
+          <a:lstStyle/>
+          <a:p>
+            <a:pPr algn="l">
+              <a:lnSpc>
+                <a:spcPct val="132000"/>
+              </a:lnSpc>
+              <a:spcAft>
+                <a:spcPts val="425"/>
+              </a:spcAft>
+            </a:pPr>
+            <a:r>
+              <a:rPr sz="1271" b="1" i="0">
+                <a:solidFill>
+                  <a:srgbClr val="12162E"/>
+                </a:solidFill>
+                <a:latin typeface="Arial"/>
+              </a:rPr>
+              <a:t>PERFECT HINDSIGHT</a:t>
+            </a:r>
+            <a:r>
+              <a:rPr sz="1271" b="0" i="0">
+                <a:solidFill>
+                  <a:srgbClr val="12162E"/>
+                </a:solidFill>
+                <a:latin typeface="Arial"/>
+              </a:rPr>
+              <a:t> — for each task, the view that solved it, picked after the fact. An optimistic bound: rerunning one unchanged view flips 10–14% of outcomes and by itself gains 2.0–7.6 tasks in 100.</a:t>
+            </a:r>
+          </a:p>
+        </p:txBody>
+      </p:sp>
+      <p:sp>
+        <p:nvSpPr>
+          <p:cNvPr id="148" name="Rectangle 147"/>
+          <p:cNvSpPr/>
+          <p:nvPr/>
+        </p:nvSpPr>
+        <p:spPr>
+          <a:xfrm>
+            <a:off x="727200" y="14936737"/>
+            <a:ext cx="6451200" cy="1634345"/>
+          </a:xfrm>
+          <a:prstGeom prst="rect">
+            <a:avLst/>
+          </a:prstGeom>
+          <a:solidFill>
+            <a:srgbClr val="ECEFFA"/>
+          </a:solidFill>
+          <a:ln>
+            <a:noFill/>
+          </a:ln>
+          <a:effectLst/>
+        </p:spPr>
+        <p:style>
+          <a:lnRef idx="1">
+            <a:schemeClr val="accent1"/>
+          </a:lnRef>
+          <a:fillRef idx="3">
+            <a:schemeClr val="accent1"/>
+          </a:fillRef>
+          <a:effectRef idx="2">
+            <a:schemeClr val="accent1"/>
+          </a:effectRef>
+          <a:fontRef idx="minor">
+            <a:schemeClr val="lt1"/>
+          </a:fontRef>
+        </p:style>
+        <p:txBody>
+          <a:bodyPr rtlCol="0" anchor="ctr" wrap="square"/>
+          <a:lstStyle/>
+          <a:p>
+            <a:pPr algn="ctr"/>
+          </a:p>
+        </p:txBody>
+      </p:sp>
+      <p:sp>
+        <p:nvSpPr>
+          <p:cNvPr id="149" name="Rectangle 148"/>
+          <p:cNvSpPr/>
+          <p:nvPr/>
+        </p:nvSpPr>
+        <p:spPr>
+          <a:xfrm>
+            <a:off x="727200" y="14936737"/>
+            <a:ext cx="86400" cy="1634345"/>
+          </a:xfrm>
+          <a:prstGeom prst="rect">
+            <a:avLst/>
+          </a:prstGeom>
+          <a:solidFill>
+            <a:srgbClr val="5049F9"/>
+          </a:solidFill>
+          <a:ln>
+            <a:noFill/>
+          </a:ln>
+          <a:effectLst/>
+        </p:spPr>
+        <p:style>
+          <a:lnRef idx="1">
+            <a:schemeClr val="accent1"/>
+          </a:lnRef>
+          <a:fillRef idx="3">
+            <a:schemeClr val="accent1"/>
+          </a:fillRef>
+          <a:effectRef idx="2">
+            <a:schemeClr val="accent1"/>
+          </a:effectRef>
+          <a:fontRef idx="minor">
+            <a:schemeClr val="lt1"/>
+          </a:fontRef>
+        </p:style>
+        <p:txBody>
+          <a:bodyPr rtlCol="0" anchor="ctr" wrap="square"/>
+          <a:lstStyle/>
+          <a:p>
+            <a:pPr algn="ctr"/>
+          </a:p>
+        </p:txBody>
+      </p:sp>
+      <p:sp>
+        <p:nvSpPr>
+          <p:cNvPr id="150" name="TextBox 149"/>
+          <p:cNvSpPr txBox="1"/>
+          <p:nvPr/>
+        </p:nvSpPr>
+        <p:spPr>
+          <a:xfrm>
+            <a:off x="943200" y="15116737"/>
+            <a:ext cx="6019200" cy="216000"/>
+          </a:xfrm>
+          <a:prstGeom prst="rect">
+            <a:avLst/>
+          </a:prstGeom>
+          <a:noFill/>
+        </p:spPr>
+        <p:txBody>
+          <a:bodyPr wrap="square" lIns="0" rIns="0" tIns="0" bIns="0">
+            <a:spAutoFit/>
+          </a:bodyPr>
+          <a:lstStyle/>
+          <a:p>
+            <a:pPr algn="l">
+              <a:lnSpc>
+                <a:spcPct val="120000"/>
+              </a:lnSpc>
+              <a:spcAft>
+                <a:spcPts val="0"/>
+              </a:spcAft>
+            </a:pPr>
+            <a:r>
+              <a:rPr sz="1059" b="0" i="0">
+                <a:solidFill>
+                  <a:srgbClr val="5049F9"/>
+                </a:solidFill>
+                <a:latin typeface="Consolas"/>
+              </a:rPr>
+              <a:t>THE CATCH</a:t>
+            </a:r>
+          </a:p>
+        </p:txBody>
+      </p:sp>
+      <p:sp>
+        <p:nvSpPr>
+          <p:cNvPr id="151" name="TextBox 150"/>
+          <p:cNvSpPr txBox="1"/>
+          <p:nvPr/>
+        </p:nvSpPr>
+        <p:spPr>
+          <a:xfrm>
+            <a:off x="943200" y="15350737"/>
+            <a:ext cx="6019200" cy="968345"/>
+          </a:xfrm>
+          <a:prstGeom prst="rect">
+            <a:avLst/>
+          </a:prstGeom>
+          <a:noFill/>
+        </p:spPr>
+        <p:txBody>
+          <a:bodyPr wrap="square" lIns="0" rIns="0" tIns="0" bIns="0">
+            <a:spAutoFit/>
+          </a:bodyPr>
+          <a:lstStyle/>
+          <a:p>
+            <a:pPr algn="l">
+              <a:lnSpc>
+                <a:spcPct val="120000"/>
+              </a:lnSpc>
+              <a:spcAft>
+                <a:spcPts val="992"/>
+              </a:spcAft>
+            </a:pPr>
+            <a:r>
+              <a:rPr sz="1764" b="1" i="0">
+                <a:solidFill>
+                  <a:srgbClr val="12162E"/>
+                </a:solidFill>
+                <a:latin typeface="Arial"/>
+              </a:rPr>
+              <a:t>The agents that would gain most from choosing a view solve the fewest tasks — so they produce the fewest examples to learn the choice from.</a:t>
+            </a:r>
+          </a:p>
+        </p:txBody>
+      </p:sp>
+      <p:sp>
+        <p:nvSpPr>
+          <p:cNvPr id="14" name="Rectangle 13"/>
+          <p:cNvSpPr/>
+          <p:nvPr/>
+        </p:nvSpPr>
+        <p:spPr>
+          <a:xfrm>
+            <a:off x="727200" y="16859082"/>
+            <a:ext cx="177988" cy="177988"/>
+          </a:xfrm>
+          <a:prstGeom prst="rect">
+            <a:avLst/>
+          </a:prstGeom>
+          <a:solidFill>
+            <a:srgbClr val="AB5FCE"/>
+          </a:solidFill>
+          <a:ln>
+            <a:noFill/>
+          </a:ln>
+          <a:effectLst/>
+        </p:spPr>
+        <p:style>
+          <a:lnRef idx="1">
+            <a:schemeClr val="accent1"/>
+          </a:lnRef>
+          <a:fillRef idx="3">
+            <a:schemeClr val="accent1"/>
+          </a:fillRef>
+          <a:effectRef idx="2">
+            <a:schemeClr val="accent1"/>
+          </a:effectRef>
+          <a:fontRef idx="minor">
+            <a:schemeClr val="lt1"/>
+          </a:fontRef>
+        </p:style>
+        <p:txBody>
+          <a:bodyPr rtlCol="0" anchor="ctr"/>
+          <a:lstStyle/>
+          <a:p>
+            <a:pPr algn="ctr"/>
+            <a:endParaRPr/>
+          </a:p>
+        </p:txBody>
+      </p:sp>
+      <p:sp>
+        <p:nvSpPr>
+          <p:cNvPr id="15" name="TextBox 14"/>
+          <p:cNvSpPr txBox="1"/>
+          <p:nvPr/>
+        </p:nvSpPr>
+        <p:spPr>
+          <a:xfrm>
+            <a:off x="1032323" y="16815882"/>
+            <a:ext cx="6144827" cy="238912"/>
+          </a:xfrm>
+          <a:prstGeom prst="rect">
+            <a:avLst/>
+          </a:prstGeom>
+          <a:noFill/>
+        </p:spPr>
+        <p:txBody>
+          <a:bodyPr wrap="square" lIns="0" tIns="0" rIns="0" bIns="0" anchor="t">
+            <a:spAutoFit/>
+          </a:bodyPr>
+          <a:lstStyle/>
+          <a:p>
+            <a:pPr algn="l">
+              <a:lnSpc>
+                <a:spcPct val="118000"/>
+              </a:lnSpc>
+            </a:pPr>
+            <a:r>
+              <a:rPr sz="1412" b="1" i="0">
+                <a:solidFill>
+                  <a:srgbClr val="141E41"/>
+                </a:solidFill>
+                <a:latin typeface="Consolas"/>
+              </a:rPr>
+              <a:t>WHY LEARNING THE CHOICE FAILS HERE</a:t>
+            </a:r>
+            <a:endParaRPr sz="1412" b="1" spc="180" dirty="0">
+              <a:solidFill>
+                <a:srgbClr val="141E41"/>
+              </a:solidFill>
+              <a:latin typeface="Consolas"/>
+            </a:endParaRPr>
+          </a:p>
+        </p:txBody>
+      </p:sp>
+      <p:sp>
+        <p:nvSpPr>
+          <p:cNvPr id="16" name="Rectangle 15"/>
+          <p:cNvSpPr/>
+          <p:nvPr/>
+        </p:nvSpPr>
+        <p:spPr>
+          <a:xfrm>
+            <a:off x="727200" y="17176918"/>
+            <a:ext cx="1169636" cy="35597"/>
+          </a:xfrm>
+          <a:prstGeom prst="rect">
+            <a:avLst/>
+          </a:prstGeom>
+          <a:solidFill>
+            <a:srgbClr val="141E41"/>
+          </a:solidFill>
+          <a:ln>
+            <a:noFill/>
+          </a:ln>
+          <a:effectLst/>
+        </p:spPr>
+        <p:style>
+          <a:lnRef idx="1">
+            <a:schemeClr val="accent1"/>
+          </a:lnRef>
+          <a:fillRef idx="3">
+            <a:schemeClr val="accent1"/>
+          </a:fillRef>
+          <a:effectRef idx="2">
+            <a:schemeClr val="accent1"/>
+          </a:effectRef>
+          <a:fontRef idx="minor">
+            <a:schemeClr val="lt1"/>
+          </a:fontRef>
+        </p:style>
+        <p:txBody>
+          <a:bodyPr rtlCol="0" anchor="ctr"/>
+          <a:lstStyle/>
+          <a:p>
+            <a:pPr algn="ctr"/>
+            <a:endParaRPr/>
+          </a:p>
+        </p:txBody>
+      </p:sp>
+      <p:sp>
+        <p:nvSpPr>
+          <p:cNvPr id="17" name="Rectangle 16"/>
+          <p:cNvSpPr/>
+          <p:nvPr/>
+        </p:nvSpPr>
+        <p:spPr>
+          <a:xfrm>
+            <a:off x="1896836" y="17187089"/>
+            <a:ext cx="5281564" cy="15256"/>
+          </a:xfrm>
+          <a:prstGeom prst="rect">
+            <a:avLst/>
+          </a:prstGeom>
+          <a:solidFill>
+            <a:srgbClr val="DDE3F2"/>
+          </a:solidFill>
+          <a:ln>
+            <a:noFill/>
+          </a:ln>
+          <a:effectLst/>
+        </p:spPr>
+        <p:style>
+          <a:lnRef idx="1">
+            <a:schemeClr val="accent1"/>
+          </a:lnRef>
+          <a:fillRef idx="3">
+            <a:schemeClr val="accent1"/>
+          </a:fillRef>
+          <a:effectRef idx="2">
+            <a:schemeClr val="accent1"/>
+          </a:effectRef>
+          <a:fontRef idx="minor">
+            <a:schemeClr val="lt1"/>
+          </a:fontRef>
+        </p:style>
+        <p:txBody>
+          <a:bodyPr rtlCol="0" anchor="ctr"/>
+          <a:lstStyle/>
+          <a:p>
+            <a:pPr algn="ctr"/>
+            <a:endParaRPr/>
+          </a:p>
+        </p:txBody>
+      </p:sp>
+      <p:sp>
+        <p:nvSpPr>
+          <p:cNvPr id="152" name="TextBox 151"/>
+          <p:cNvSpPr txBox="1"/>
+          <p:nvPr/>
+        </p:nvSpPr>
+        <p:spPr>
+          <a:xfrm>
+            <a:off x="727200" y="17399082"/>
+            <a:ext cx="6451200" cy="1613908"/>
+          </a:xfrm>
+          <a:prstGeom prst="rect">
+            <a:avLst/>
+          </a:prstGeom>
+          <a:noFill/>
+        </p:spPr>
+        <p:txBody>
+          <a:bodyPr wrap="square" lIns="0" rIns="0" tIns="0" bIns="0">
+            <a:spAutoFit/>
+          </a:bodyPr>
+          <a:lstStyle/>
+          <a:p>
+            <a:pPr algn="l">
+              <a:lnSpc>
+                <a:spcPct val="120000"/>
+              </a:lnSpc>
+              <a:spcAft>
+                <a:spcPts val="992"/>
+              </a:spcAft>
+            </a:pPr>
+            <a:r>
+              <a:rPr sz="1764" b="0" i="0">
+                <a:solidFill>
+                  <a:srgbClr val="12162E"/>
+                </a:solidFill>
+                <a:latin typeface="Arial"/>
+              </a:rPr>
+              <a:t>A training example for “which view” exists only when the agent solves a task. Here the best single view solves just </a:t>
+            </a:r>
+            <a:r>
+              <a:rPr sz="1764" b="1" i="0">
+                <a:solidFill>
+                  <a:srgbClr val="12162E"/>
+                </a:solidFill>
+                <a:latin typeface="Arial"/>
+              </a:rPr>
+              <a:t>2–36%</a:t>
+            </a:r>
+            <a:r>
+              <a:rPr sz="1764" b="0" i="0">
+                <a:solidFill>
+                  <a:srgbClr val="12162E"/>
+                </a:solidFill>
+                <a:latin typeface="Arial"/>
+              </a:rPr>
+              <a:t> of tasks, leaving typically </a:t>
+            </a:r>
+            <a:r>
+              <a:rPr sz="1764" b="1" i="0">
+                <a:solidFill>
+                  <a:srgbClr val="12162E"/>
+                </a:solidFill>
+                <a:latin typeface="Arial"/>
+              </a:rPr>
+              <a:t>15–97</a:t>
+            </a:r>
+            <a:r>
+              <a:rPr sz="1764" b="0" i="0">
+                <a:solidFill>
+                  <a:srgbClr val="12162E"/>
+                </a:solidFill>
+                <a:latin typeface="Arial"/>
+              </a:rPr>
+              <a:t> usable examples per setting — enough to train a classifier in only 2 of the 6 VisualWebArena settings.</a:t>
+            </a:r>
+          </a:p>
+        </p:txBody>
+      </p:sp>
+      <p:sp>
+        <p:nvSpPr>
+          <p:cNvPr id="153" name="Rectangle 152"/>
+          <p:cNvSpPr/>
+          <p:nvPr/>
+        </p:nvSpPr>
+        <p:spPr>
+          <a:xfrm>
+            <a:off x="727200" y="19156990"/>
+            <a:ext cx="6451200" cy="3742028"/>
+          </a:xfrm>
+          <a:prstGeom prst="rect">
+            <a:avLst/>
+          </a:prstGeom>
+          <a:solidFill>
+            <a:srgbClr val="F7F9FD"/>
+          </a:solidFill>
+          <a:ln w="8890">
+            <a:solidFill>
+              <a:srgbClr val="DDE3F2"/>
+            </a:solidFill>
+          </a:ln>
+          <a:effectLst/>
+        </p:spPr>
+        <p:style>
+          <a:lnRef idx="1">
+            <a:schemeClr val="accent1"/>
+          </a:lnRef>
+          <a:fillRef idx="3">
+            <a:schemeClr val="accent1"/>
+          </a:fillRef>
+          <a:effectRef idx="2">
+            <a:schemeClr val="accent1"/>
+          </a:effectRef>
+          <a:fontRef idx="minor">
+            <a:schemeClr val="lt1"/>
+          </a:fontRef>
+        </p:style>
+        <p:txBody>
+          <a:bodyPr rtlCol="0" anchor="ctr" wrap="square"/>
+          <a:lstStyle/>
+          <a:p>
+            <a:pPr algn="ctr"/>
+          </a:p>
+        </p:txBody>
+      </p:sp>
+      <p:sp>
+        <p:nvSpPr>
+          <p:cNvPr id="154" name="Rectangle 153"/>
+          <p:cNvSpPr/>
+          <p:nvPr/>
+        </p:nvSpPr>
+        <p:spPr>
+          <a:xfrm>
+            <a:off x="727200" y="19156990"/>
+            <a:ext cx="6451200" cy="50400"/>
+          </a:xfrm>
+          <a:prstGeom prst="rect">
+            <a:avLst/>
+          </a:prstGeom>
+          <a:solidFill>
+            <a:srgbClr val="5049F9"/>
+          </a:solidFill>
+          <a:ln>
+            <a:noFill/>
+          </a:ln>
+          <a:effectLst/>
+        </p:spPr>
+        <p:style>
+          <a:lnRef idx="1">
+            <a:schemeClr val="accent1"/>
+          </a:lnRef>
+          <a:fillRef idx="3">
+            <a:schemeClr val="accent1"/>
+          </a:fillRef>
+          <a:effectRef idx="2">
+            <a:schemeClr val="accent1"/>
+          </a:effectRef>
+          <a:fontRef idx="minor">
+            <a:schemeClr val="lt1"/>
+          </a:fontRef>
+        </p:style>
+        <p:txBody>
+          <a:bodyPr rtlCol="0" anchor="ctr" wrap="square"/>
+          <a:lstStyle/>
+          <a:p>
+            <a:pPr algn="ctr"/>
           </a:p>
         </p:txBody>
       </p:sp>
       <p:pic>
         <p:nvPicPr>
-          <p:cNvPr id="184" name="Picture 183" descr="qr_repo.png"/>
+          <p:cNvPr id="155" name="Picture 154" descr="poster_label_supply.png"/>
+          <p:cNvPicPr>
+            <a:picLocks noChangeAspect="1"/>
+          </p:cNvPicPr>
+          <p:nvPr/>
+        </p:nvPicPr>
+        <p:blipFill>
+          <a:blip r:embed="rId7"/>
+          <a:stretch>
+            <a:fillRect/>
+          </a:stretch>
+        </p:blipFill>
+        <p:spPr>
+          <a:xfrm>
+            <a:off x="835200" y="19315390"/>
+            <a:ext cx="6235200" cy="3475629"/>
+          </a:xfrm>
+          <a:prstGeom prst="rect">
+            <a:avLst/>
+          </a:prstGeom>
+        </p:spPr>
+      </p:pic>
+      <p:sp>
+        <p:nvSpPr>
+          <p:cNvPr id="156" name="TextBox 155"/>
+          <p:cNvSpPr txBox="1"/>
+          <p:nvPr/>
+        </p:nvSpPr>
+        <p:spPr>
+          <a:xfrm>
+            <a:off x="727200" y="22989018"/>
+            <a:ext cx="6451200" cy="511369"/>
+          </a:xfrm>
+          <a:prstGeom prst="rect">
+            <a:avLst/>
+          </a:prstGeom>
+          <a:noFill/>
+        </p:spPr>
+        <p:txBody>
+          <a:bodyPr wrap="square" lIns="0" rIns="0" tIns="0" bIns="0">
+            <a:spAutoFit/>
+          </a:bodyPr>
+          <a:lstStyle/>
+          <a:p>
+            <a:pPr algn="l">
+              <a:lnSpc>
+                <a:spcPct val="132000"/>
+              </a:lnSpc>
+              <a:spcAft>
+                <a:spcPts val="425"/>
+              </a:spcAft>
+            </a:pPr>
+            <a:r>
+              <a:rPr sz="1271" b="1" i="0">
+                <a:solidFill>
+                  <a:srgbClr val="5D6787"/>
+                </a:solidFill>
+                <a:latin typeface="Arial"/>
+              </a:rPr>
+              <a:t>Fig 3.</a:t>
+            </a:r>
+            <a:r>
+              <a:rPr sz="1271" b="0" i="0">
+                <a:solidFill>
+                  <a:srgbClr val="5D6787"/>
+                </a:solidFill>
+                <a:latin typeface="Arial"/>
+              </a:rPr>
+              <a:t> Usable “which view” examples against the best single view's success rate, one point per VisualWebArena setting. Examples exist only where tasks get solved.</a:t>
+            </a:r>
+          </a:p>
+        </p:txBody>
+      </p:sp>
+      <p:sp>
+        <p:nvSpPr>
+          <p:cNvPr id="157" name="TextBox 156"/>
+          <p:cNvSpPr txBox="1"/>
+          <p:nvPr/>
+        </p:nvSpPr>
+        <p:spPr>
+          <a:xfrm>
+            <a:off x="727200" y="23608387"/>
+            <a:ext cx="6451200" cy="968345"/>
+          </a:xfrm>
+          <a:prstGeom prst="rect">
+            <a:avLst/>
+          </a:prstGeom>
+          <a:noFill/>
+        </p:spPr>
+        <p:txBody>
+          <a:bodyPr wrap="square" lIns="0" rIns="0" tIns="0" bIns="0">
+            <a:spAutoFit/>
+          </a:bodyPr>
+          <a:lstStyle/>
+          <a:p>
+            <a:pPr algn="l">
+              <a:lnSpc>
+                <a:spcPct val="120000"/>
+              </a:lnSpc>
+              <a:spcAft>
+                <a:spcPts val="992"/>
+              </a:spcAft>
+            </a:pPr>
+            <a:r>
+              <a:rPr sz="1764" b="0" i="0">
+                <a:solidFill>
+                  <a:srgbClr val="12162E"/>
+                </a:solidFill>
+                <a:latin typeface="Arial"/>
+              </a:rPr>
+              <a:t>Shrinking the training data on purpose points to scarcity as the main bottleneck, and prices it: the failing settings would need at least </a:t>
+            </a:r>
+            <a:r>
+              <a:rPr sz="1764" b="1" i="0">
+                <a:solidFill>
+                  <a:srgbClr val="12162E"/>
+                </a:solidFill>
+                <a:latin typeface="Arial"/>
+              </a:rPr>
+              <a:t>2.1–4.2×</a:t>
+            </a:r>
+            <a:r>
+              <a:rPr sz="1764" b="0" i="0">
+                <a:solidFill>
+                  <a:srgbClr val="12162E"/>
+                </a:solidFill>
+                <a:latin typeface="Arial"/>
+              </a:rPr>
+              <a:t> more tasks than the benchmarks contain.</a:t>
+            </a:r>
+          </a:p>
+        </p:txBody>
+      </p:sp>
+      <p:sp>
+        <p:nvSpPr>
+          <p:cNvPr id="14" name="Rectangle 13"/>
+          <p:cNvSpPr/>
+          <p:nvPr/>
+        </p:nvSpPr>
+        <p:spPr>
+          <a:xfrm>
+            <a:off x="727200" y="24828732"/>
+            <a:ext cx="177988" cy="177988"/>
+          </a:xfrm>
+          <a:prstGeom prst="rect">
+            <a:avLst/>
+          </a:prstGeom>
+          <a:solidFill>
+            <a:srgbClr val="AB5FCE"/>
+          </a:solidFill>
+          <a:ln>
+            <a:noFill/>
+          </a:ln>
+          <a:effectLst/>
+        </p:spPr>
+        <p:style>
+          <a:lnRef idx="1">
+            <a:schemeClr val="accent1"/>
+          </a:lnRef>
+          <a:fillRef idx="3">
+            <a:schemeClr val="accent1"/>
+          </a:fillRef>
+          <a:effectRef idx="2">
+            <a:schemeClr val="accent1"/>
+          </a:effectRef>
+          <a:fontRef idx="minor">
+            <a:schemeClr val="lt1"/>
+          </a:fontRef>
+        </p:style>
+        <p:txBody>
+          <a:bodyPr rtlCol="0" anchor="ctr"/>
+          <a:lstStyle/>
+          <a:p>
+            <a:pPr algn="ctr"/>
+            <a:endParaRPr/>
+          </a:p>
+        </p:txBody>
+      </p:sp>
+      <p:sp>
+        <p:nvSpPr>
+          <p:cNvPr id="15" name="TextBox 14"/>
+          <p:cNvSpPr txBox="1"/>
+          <p:nvPr/>
+        </p:nvSpPr>
+        <p:spPr>
+          <a:xfrm>
+            <a:off x="1032323" y="24785532"/>
+            <a:ext cx="6144827" cy="238912"/>
+          </a:xfrm>
+          <a:prstGeom prst="rect">
+            <a:avLst/>
+          </a:prstGeom>
+          <a:noFill/>
+        </p:spPr>
+        <p:txBody>
+          <a:bodyPr wrap="square" lIns="0" tIns="0" rIns="0" bIns="0" anchor="t">
+            <a:spAutoFit/>
+          </a:bodyPr>
+          <a:lstStyle/>
+          <a:p>
+            <a:pPr algn="l">
+              <a:lnSpc>
+                <a:spcPct val="118000"/>
+              </a:lnSpc>
+            </a:pPr>
+            <a:r>
+              <a:rPr sz="1412" b="1" i="0">
+                <a:solidFill>
+                  <a:srgbClr val="141E41"/>
+                </a:solidFill>
+                <a:latin typeface="Consolas"/>
+              </a:rPr>
+              <a:t>TAKEAWAY</a:t>
+            </a:r>
+            <a:endParaRPr sz="1412" b="1" spc="180" dirty="0">
+              <a:solidFill>
+                <a:srgbClr val="141E41"/>
+              </a:solidFill>
+              <a:latin typeface="Consolas"/>
+            </a:endParaRPr>
+          </a:p>
+        </p:txBody>
+      </p:sp>
+      <p:sp>
+        <p:nvSpPr>
+          <p:cNvPr id="16" name="Rectangle 15"/>
+          <p:cNvSpPr/>
+          <p:nvPr/>
+        </p:nvSpPr>
+        <p:spPr>
+          <a:xfrm>
+            <a:off x="727200" y="25146568"/>
+            <a:ext cx="1169636" cy="35597"/>
+          </a:xfrm>
+          <a:prstGeom prst="rect">
+            <a:avLst/>
+          </a:prstGeom>
+          <a:solidFill>
+            <a:srgbClr val="141E41"/>
+          </a:solidFill>
+          <a:ln>
+            <a:noFill/>
+          </a:ln>
+          <a:effectLst/>
+        </p:spPr>
+        <p:style>
+          <a:lnRef idx="1">
+            <a:schemeClr val="accent1"/>
+          </a:lnRef>
+          <a:fillRef idx="3">
+            <a:schemeClr val="accent1"/>
+          </a:fillRef>
+          <a:effectRef idx="2">
+            <a:schemeClr val="accent1"/>
+          </a:effectRef>
+          <a:fontRef idx="minor">
+            <a:schemeClr val="lt1"/>
+          </a:fontRef>
+        </p:style>
+        <p:txBody>
+          <a:bodyPr rtlCol="0" anchor="ctr"/>
+          <a:lstStyle/>
+          <a:p>
+            <a:pPr algn="ctr"/>
+            <a:endParaRPr/>
+          </a:p>
+        </p:txBody>
+      </p:sp>
+      <p:sp>
+        <p:nvSpPr>
+          <p:cNvPr id="17" name="Rectangle 16"/>
+          <p:cNvSpPr/>
+          <p:nvPr/>
+        </p:nvSpPr>
+        <p:spPr>
+          <a:xfrm>
+            <a:off x="1896836" y="25156739"/>
+            <a:ext cx="5281564" cy="15256"/>
+          </a:xfrm>
+          <a:prstGeom prst="rect">
+            <a:avLst/>
+          </a:prstGeom>
+          <a:solidFill>
+            <a:srgbClr val="DDE3F2"/>
+          </a:solidFill>
+          <a:ln>
+            <a:noFill/>
+          </a:ln>
+          <a:effectLst/>
+        </p:spPr>
+        <p:style>
+          <a:lnRef idx="1">
+            <a:schemeClr val="accent1"/>
+          </a:lnRef>
+          <a:fillRef idx="3">
+            <a:schemeClr val="accent1"/>
+          </a:fillRef>
+          <a:effectRef idx="2">
+            <a:schemeClr val="accent1"/>
+          </a:effectRef>
+          <a:fontRef idx="minor">
+            <a:schemeClr val="lt1"/>
+          </a:fontRef>
+        </p:style>
+        <p:txBody>
+          <a:bodyPr rtlCol="0" anchor="ctr"/>
+          <a:lstStyle/>
+          <a:p>
+            <a:pPr algn="ctr"/>
+            <a:endParaRPr/>
+          </a:p>
+        </p:txBody>
+      </p:sp>
+      <p:sp>
+        <p:nvSpPr>
+          <p:cNvPr id="158" name="TextBox 157"/>
+          <p:cNvSpPr txBox="1"/>
+          <p:nvPr/>
+        </p:nvSpPr>
+        <p:spPr>
+          <a:xfrm>
+            <a:off x="727200" y="25368732"/>
+            <a:ext cx="6451200" cy="1613908"/>
+          </a:xfrm>
+          <a:prstGeom prst="rect">
+            <a:avLst/>
+          </a:prstGeom>
+          <a:noFill/>
+        </p:spPr>
+        <p:txBody>
+          <a:bodyPr wrap="square" lIns="0" rIns="0" tIns="0" bIns="0">
+            <a:spAutoFit/>
+          </a:bodyPr>
+          <a:lstStyle/>
+          <a:p>
+            <a:pPr algn="l">
+              <a:lnSpc>
+                <a:spcPct val="120000"/>
+              </a:lnSpc>
+              <a:spcAft>
+                <a:spcPts val="992"/>
+              </a:spcAft>
+            </a:pPr>
+            <a:r>
+              <a:rPr sz="1764" b="1" i="0">
+                <a:solidFill>
+                  <a:srgbClr val="12162E"/>
+                </a:solidFill>
+                <a:latin typeface="Arial"/>
+              </a:rPr>
+              <a:t>Learning how to see is not only a modelling problem: whether it can be learned depends on how good the agent producing the examples already is.</a:t>
+            </a:r>
+            <a:r>
+              <a:rPr sz="1764" b="0" i="0">
+                <a:solidFill>
+                  <a:srgbClr val="12162E"/>
+                </a:solidFill>
+                <a:latin typeface="Arial"/>
+              </a:rPr>
+              <a:t> So, in this order: improve the agent, then collect reliable examples, then learn when to look.</a:t>
+            </a:r>
+          </a:p>
+        </p:txBody>
+      </p:sp>
+      <p:sp>
+        <p:nvSpPr>
+          <p:cNvPr id="159" name="TextBox 158"/>
+          <p:cNvSpPr txBox="1"/>
+          <p:nvPr/>
+        </p:nvSpPr>
+        <p:spPr>
+          <a:xfrm>
+            <a:off x="727200" y="27036640"/>
+            <a:ext cx="6451200" cy="511369"/>
+          </a:xfrm>
+          <a:prstGeom prst="rect">
+            <a:avLst/>
+          </a:prstGeom>
+          <a:noFill/>
+        </p:spPr>
+        <p:txBody>
+          <a:bodyPr wrap="square" lIns="0" rIns="0" tIns="0" bIns="0">
+            <a:spAutoFit/>
+          </a:bodyPr>
+          <a:lstStyle/>
+          <a:p>
+            <a:pPr algn="l">
+              <a:lnSpc>
+                <a:spcPct val="132000"/>
+              </a:lnSpc>
+              <a:spcAft>
+                <a:spcPts val="425"/>
+              </a:spcAft>
+            </a:pPr>
+            <a:r>
+              <a:rPr sz="1271" b="0" i="0">
+                <a:solidFill>
+                  <a:srgbClr val="5D6787"/>
+                </a:solidFill>
+                <a:latin typeface="Arial"/>
+              </a:rPr>
+              <a:t>Measured in the 2–36% success regime we observed. This need not hold for stronger agents.</a:t>
+            </a:r>
+          </a:p>
+        </p:txBody>
+      </p:sp>
+      <p:sp>
+        <p:nvSpPr>
+          <p:cNvPr id="160" name="Rectangle 159"/>
+          <p:cNvSpPr/>
+          <p:nvPr/>
+        </p:nvSpPr>
+        <p:spPr>
+          <a:xfrm>
+            <a:off x="7534800" y="14936737"/>
+            <a:ext cx="13255200" cy="6678484"/>
+          </a:xfrm>
+          <a:prstGeom prst="rect">
+            <a:avLst/>
+          </a:prstGeom>
+          <a:solidFill>
+            <a:srgbClr val="F7F9FD"/>
+          </a:solidFill>
+          <a:ln w="8890">
+            <a:solidFill>
+              <a:srgbClr val="DDE3F2"/>
+            </a:solidFill>
+          </a:ln>
+          <a:effectLst/>
+        </p:spPr>
+        <p:style>
+          <a:lnRef idx="1">
+            <a:schemeClr val="accent1"/>
+          </a:lnRef>
+          <a:fillRef idx="3">
+            <a:schemeClr val="accent1"/>
+          </a:fillRef>
+          <a:effectRef idx="2">
+            <a:schemeClr val="accent1"/>
+          </a:effectRef>
+          <a:fontRef idx="minor">
+            <a:schemeClr val="lt1"/>
+          </a:fontRef>
+        </p:style>
+        <p:txBody>
+          <a:bodyPr rtlCol="0" anchor="ctr" wrap="square"/>
+          <a:lstStyle/>
+          <a:p>
+            <a:pPr algn="ctr"/>
+          </a:p>
+        </p:txBody>
+      </p:sp>
+      <p:sp>
+        <p:nvSpPr>
+          <p:cNvPr id="161" name="Rectangle 160"/>
+          <p:cNvSpPr/>
+          <p:nvPr/>
+        </p:nvSpPr>
+        <p:spPr>
+          <a:xfrm>
+            <a:off x="7534800" y="14936737"/>
+            <a:ext cx="13255200" cy="50400"/>
+          </a:xfrm>
+          <a:prstGeom prst="rect">
+            <a:avLst/>
+          </a:prstGeom>
+          <a:solidFill>
+            <a:srgbClr val="5049F9"/>
+          </a:solidFill>
+          <a:ln>
+            <a:noFill/>
+          </a:ln>
+          <a:effectLst/>
+        </p:spPr>
+        <p:style>
+          <a:lnRef idx="1">
+            <a:schemeClr val="accent1"/>
+          </a:lnRef>
+          <a:fillRef idx="3">
+            <a:schemeClr val="accent1"/>
+          </a:fillRef>
+          <a:effectRef idx="2">
+            <a:schemeClr val="accent1"/>
+          </a:effectRef>
+          <a:fontRef idx="minor">
+            <a:schemeClr val="lt1"/>
+          </a:fontRef>
+        </p:style>
+        <p:txBody>
+          <a:bodyPr rtlCol="0" anchor="ctr" wrap="square"/>
+          <a:lstStyle/>
+          <a:p>
+            <a:pPr algn="ctr"/>
+          </a:p>
+        </p:txBody>
+      </p:sp>
+      <p:pic>
+        <p:nvPicPr>
+          <p:cNvPr id="162" name="Picture 161" descr="poster_dominance_plane.png"/>
+          <p:cNvPicPr>
+            <a:picLocks noChangeAspect="1"/>
+          </p:cNvPicPr>
+          <p:nvPr/>
+        </p:nvPicPr>
+        <p:blipFill>
+          <a:blip r:embed="rId8"/>
+          <a:stretch>
+            <a:fillRect/>
+          </a:stretch>
+        </p:blipFill>
+        <p:spPr>
+          <a:xfrm>
+            <a:off x="7642800" y="15095137"/>
+            <a:ext cx="13039200" cy="6412084"/>
+          </a:xfrm>
+          <a:prstGeom prst="rect">
+            <a:avLst/>
+          </a:prstGeom>
+        </p:spPr>
+      </p:pic>
+      <p:sp>
+        <p:nvSpPr>
+          <p:cNvPr id="163" name="TextBox 162"/>
+          <p:cNvSpPr txBox="1"/>
+          <p:nvPr/>
+        </p:nvSpPr>
+        <p:spPr>
+          <a:xfrm>
+            <a:off x="7534800" y="21705221"/>
+            <a:ext cx="13255200" cy="511369"/>
+          </a:xfrm>
+          <a:prstGeom prst="rect">
+            <a:avLst/>
+          </a:prstGeom>
+          <a:noFill/>
+        </p:spPr>
+        <p:txBody>
+          <a:bodyPr wrap="square" lIns="0" rIns="0" tIns="0" bIns="0">
+            <a:spAutoFit/>
+          </a:bodyPr>
+          <a:lstStyle/>
+          <a:p>
+            <a:pPr algn="l">
+              <a:lnSpc>
+                <a:spcPct val="132000"/>
+              </a:lnSpc>
+              <a:spcAft>
+                <a:spcPts val="425"/>
+              </a:spcAft>
+            </a:pPr>
+            <a:r>
+              <a:rPr sz="1271" b="1" i="0">
+                <a:solidFill>
+                  <a:srgbClr val="5D6787"/>
+                </a:solidFill>
+                <a:latin typeface="Arial"/>
+              </a:rPr>
+              <a:t>Fig 2.</a:t>
+            </a:r>
+            <a:r>
+              <a:rPr sz="1271" b="0" i="0">
+                <a:solidFill>
+                  <a:srgbClr val="5D6787"/>
+                </a:solidFill>
+                <a:latin typeface="Arial"/>
+              </a:rPr>
+              <a:t> Every way of choosing a view, in every setting, compared with one fixed rule: </a:t>
+            </a:r>
+            <a:r>
+              <a:rPr sz="1271" b="1" i="0">
+                <a:solidFill>
+                  <a:srgbClr val="5D6787"/>
+                </a:solidFill>
+                <a:latin typeface="Arial"/>
+              </a:rPr>
+              <a:t>always use the cheapest view</a:t>
+            </a:r>
+            <a:r>
+              <a:rPr sz="1271" b="0" i="0">
+                <a:solidFill>
+                  <a:srgbClr val="5D6787"/>
+                </a:solidFill>
+                <a:latin typeface="Arial"/>
+              </a:rPr>
+              <a:t> (★). A win lands in the shaded region — cheaper </a:t>
+            </a:r>
+            <a:r>
+              <a:rPr sz="1271" b="0" i="1">
+                <a:solidFill>
+                  <a:srgbClr val="5D6787"/>
+                </a:solidFill>
+                <a:latin typeface="Arial"/>
+              </a:rPr>
+              <a:t>and</a:t>
+            </a:r>
+            <a:r>
+              <a:rPr sz="1271" b="0" i="0">
+                <a:solidFill>
+                  <a:srgbClr val="5D6787"/>
+                </a:solidFill>
+                <a:latin typeface="Arial"/>
+              </a:rPr>
+              <a:t> no worse. Always-cheapest is cheapest on average, not on every task, which is why a few points sit left of it. Learned choices are scored only on tasks they never saw.</a:t>
+            </a:r>
+          </a:p>
+        </p:txBody>
+      </p:sp>
+      <p:sp>
+        <p:nvSpPr>
+          <p:cNvPr id="164" name="TextBox 163"/>
+          <p:cNvSpPr txBox="1"/>
+          <p:nvPr/>
+        </p:nvSpPr>
+        <p:spPr>
+          <a:xfrm>
+            <a:off x="7534800" y="22324590"/>
+            <a:ext cx="13255200" cy="2188690"/>
+          </a:xfrm>
+          <a:prstGeom prst="rect">
+            <a:avLst/>
+          </a:prstGeom>
+          <a:noFill/>
+        </p:spPr>
+        <p:txBody>
+          <a:bodyPr wrap="square" lIns="0" rIns="0" tIns="0" bIns="0">
+            <a:spAutoFit/>
+          </a:bodyPr>
+          <a:lstStyle/>
+          <a:p>
+            <a:pPr algn="l">
+              <a:lnSpc>
+                <a:spcPct val="120000"/>
+              </a:lnSpc>
+              <a:spcAft>
+                <a:spcPts val="992"/>
+              </a:spcAft>
+            </a:pPr>
+            <a:r>
+              <a:rPr sz="1764" b="1" i="0">
+                <a:solidFill>
+                  <a:srgbClr val="12162E"/>
+                </a:solidFill>
+                <a:latin typeface="Arial"/>
+              </a:rPr>
+              <a:t>Perfect hindsight would pay.</a:t>
+            </a:r>
+            <a:r>
+              <a:rPr sz="1764" b="0" i="0">
+                <a:solidFill>
+                  <a:srgbClr val="12162E"/>
+                </a:solidFill>
+                <a:latin typeface="Arial"/>
+              </a:rPr>
+              <a:t> Picking the winning view for each task after the fact would solve </a:t>
+            </a:r>
+            <a:r>
+              <a:rPr sz="1764" b="1" i="0">
+                <a:solidFill>
+                  <a:srgbClr val="12162E"/>
+                </a:solidFill>
+                <a:latin typeface="Arial"/>
+              </a:rPr>
+              <a:t>3.45 to 16.35 more tasks in every 100</a:t>
+            </a:r>
+            <a:r>
+              <a:rPr sz="1764" b="0" i="0">
+                <a:solidFill>
+                  <a:srgbClr val="12162E"/>
+                </a:solidFill>
+                <a:latin typeface="Arial"/>
+              </a:rPr>
+              <a:t> than the best single view, and spend 1.6–35.3% less — in all 8 settings.</a:t>
+            </a:r>
+          </a:p>
+          <a:p>
+            <a:pPr algn="l">
+              <a:lnSpc>
+                <a:spcPct val="120000"/>
+              </a:lnSpc>
+              <a:spcAft>
+                <a:spcPts val="992"/>
+              </a:spcAft>
+            </a:pPr>
+            <a:r>
+              <a:rPr sz="1764" b="1" i="0">
+                <a:solidFill>
+                  <a:srgbClr val="12162E"/>
+                </a:solidFill>
+                <a:latin typeface="Arial"/>
+              </a:rPr>
+              <a:t>Nothing we trained could do it.</a:t>
+            </a:r>
+            <a:r>
+              <a:rPr sz="1764" b="0" i="0">
+                <a:solidFill>
+                  <a:srgbClr val="12162E"/>
+                </a:solidFill>
+                <a:latin typeface="Arial"/>
+              </a:rPr>
+              <a:t> In </a:t>
+            </a:r>
+            <a:r>
+              <a:rPr sz="1764" b="1" i="0">
+                <a:solidFill>
+                  <a:srgbClr val="12162E"/>
+                </a:solidFill>
+                <a:latin typeface="Arial"/>
+              </a:rPr>
+              <a:t>0 of 8</a:t>
+            </a:r>
+            <a:r>
+              <a:rPr sz="1764" b="0" i="0">
+                <a:solidFill>
+                  <a:srgbClr val="12162E"/>
+                </a:solidFill>
+                <a:latin typeface="Arial"/>
+              </a:rPr>
+              <a:t> settings did a learned choice beat always using the cheapest view on both success and cost — and even perfect hindsight manages that in only </a:t>
+            </a:r>
+            <a:r>
+              <a:rPr sz="1764" b="1" i="0">
+                <a:solidFill>
+                  <a:srgbClr val="12162E"/>
+                </a:solidFill>
+                <a:latin typeface="Arial"/>
+              </a:rPr>
+              <a:t>1 of 8</a:t>
+            </a:r>
+            <a:r>
+              <a:rPr sz="1764" b="0" i="0">
+                <a:solidFill>
+                  <a:srgbClr val="12162E"/>
+                </a:solidFill>
+                <a:latin typeface="Arial"/>
+              </a:rPr>
+              <a:t>.</a:t>
+            </a:r>
+          </a:p>
+          <a:p>
+            <a:pPr algn="l">
+              <a:lnSpc>
+                <a:spcPct val="120000"/>
+              </a:lnSpc>
+              <a:spcAft>
+                <a:spcPts val="992"/>
+              </a:spcAft>
+            </a:pPr>
+            <a:r>
+              <a:rPr sz="1764" b="1" i="0">
+                <a:solidFill>
+                  <a:srgbClr val="12162E"/>
+                </a:solidFill>
+                <a:latin typeface="Arial"/>
+              </a:rPr>
+              <a:t>What survives is a bound, not a method.</a:t>
+            </a:r>
+            <a:r>
+              <a:rPr sz="1764" b="0" i="0">
+                <a:solidFill>
+                  <a:srgbClr val="12162E"/>
+                </a:solidFill>
+                <a:latin typeface="Arial"/>
+              </a:rPr>
+              <a:t> Sending the tasks nobody solves to the cheapest view saves 9.5–30.6% at the same success in 8 of 8 — but that too needs hindsight, and plain always-cheapest usually saves more.</a:t>
+            </a:r>
+          </a:p>
+        </p:txBody>
+      </p:sp>
+      <p:sp>
+        <p:nvSpPr>
+          <p:cNvPr id="14" name="Rectangle 13"/>
+          <p:cNvSpPr/>
+          <p:nvPr/>
+        </p:nvSpPr>
+        <p:spPr>
+          <a:xfrm>
+            <a:off x="7534800" y="24693280"/>
+            <a:ext cx="177988" cy="177988"/>
+          </a:xfrm>
+          <a:prstGeom prst="rect">
+            <a:avLst/>
+          </a:prstGeom>
+          <a:solidFill>
+            <a:srgbClr val="AB5FCE"/>
+          </a:solidFill>
+          <a:ln>
+            <a:noFill/>
+          </a:ln>
+          <a:effectLst/>
+        </p:spPr>
+        <p:style>
+          <a:lnRef idx="1">
+            <a:schemeClr val="accent1"/>
+          </a:lnRef>
+          <a:fillRef idx="3">
+            <a:schemeClr val="accent1"/>
+          </a:fillRef>
+          <a:effectRef idx="2">
+            <a:schemeClr val="accent1"/>
+          </a:effectRef>
+          <a:fontRef idx="minor">
+            <a:schemeClr val="lt1"/>
+          </a:fontRef>
+        </p:style>
+        <p:txBody>
+          <a:bodyPr rtlCol="0" anchor="ctr"/>
+          <a:lstStyle/>
+          <a:p>
+            <a:pPr algn="ctr"/>
+            <a:endParaRPr/>
+          </a:p>
+        </p:txBody>
+      </p:sp>
+      <p:sp>
+        <p:nvSpPr>
+          <p:cNvPr id="15" name="TextBox 14"/>
+          <p:cNvSpPr txBox="1"/>
+          <p:nvPr/>
+        </p:nvSpPr>
+        <p:spPr>
+          <a:xfrm>
+            <a:off x="7839923" y="24650080"/>
+            <a:ext cx="6144827" cy="238912"/>
+          </a:xfrm>
+          <a:prstGeom prst="rect">
+            <a:avLst/>
+          </a:prstGeom>
+          <a:noFill/>
+        </p:spPr>
+        <p:txBody>
+          <a:bodyPr wrap="square" lIns="0" tIns="0" rIns="0" bIns="0" anchor="t">
+            <a:spAutoFit/>
+          </a:bodyPr>
+          <a:lstStyle/>
+          <a:p>
+            <a:pPr algn="l">
+              <a:lnSpc>
+                <a:spcPct val="118000"/>
+              </a:lnSpc>
+            </a:pPr>
+            <a:r>
+              <a:rPr sz="1412" b="1" i="0">
+                <a:solidFill>
+                  <a:srgbClr val="141E41"/>
+                </a:solidFill>
+                <a:latin typeface="Consolas"/>
+              </a:rPr>
+              <a:t>WATCH THE LAPTOP BESIDE THIS POSTER</a:t>
+            </a:r>
+            <a:endParaRPr sz="1412" b="1" spc="180" dirty="0">
+              <a:solidFill>
+                <a:srgbClr val="141E41"/>
+              </a:solidFill>
+              <a:latin typeface="Consolas"/>
+            </a:endParaRPr>
+          </a:p>
+        </p:txBody>
+      </p:sp>
+      <p:sp>
+        <p:nvSpPr>
+          <p:cNvPr id="16" name="Rectangle 15"/>
+          <p:cNvSpPr/>
+          <p:nvPr/>
+        </p:nvSpPr>
+        <p:spPr>
+          <a:xfrm>
+            <a:off x="7534800" y="25011116"/>
+            <a:ext cx="1169636" cy="35597"/>
+          </a:xfrm>
+          <a:prstGeom prst="rect">
+            <a:avLst/>
+          </a:prstGeom>
+          <a:solidFill>
+            <a:srgbClr val="141E41"/>
+          </a:solidFill>
+          <a:ln>
+            <a:noFill/>
+          </a:ln>
+          <a:effectLst/>
+        </p:spPr>
+        <p:style>
+          <a:lnRef idx="1">
+            <a:schemeClr val="accent1"/>
+          </a:lnRef>
+          <a:fillRef idx="3">
+            <a:schemeClr val="accent1"/>
+          </a:fillRef>
+          <a:effectRef idx="2">
+            <a:schemeClr val="accent1"/>
+          </a:effectRef>
+          <a:fontRef idx="minor">
+            <a:schemeClr val="lt1"/>
+          </a:fontRef>
+        </p:style>
+        <p:txBody>
+          <a:bodyPr rtlCol="0" anchor="ctr"/>
+          <a:lstStyle/>
+          <a:p>
+            <a:pPr algn="ctr"/>
+            <a:endParaRPr/>
+          </a:p>
+        </p:txBody>
+      </p:sp>
+      <p:sp>
+        <p:nvSpPr>
+          <p:cNvPr id="17" name="Rectangle 16"/>
+          <p:cNvSpPr/>
+          <p:nvPr/>
+        </p:nvSpPr>
+        <p:spPr>
+          <a:xfrm>
+            <a:off x="8704436" y="25021287"/>
+            <a:ext cx="12085564" cy="15256"/>
+          </a:xfrm>
+          <a:prstGeom prst="rect">
+            <a:avLst/>
+          </a:prstGeom>
+          <a:solidFill>
+            <a:srgbClr val="DDE3F2"/>
+          </a:solidFill>
+          <a:ln>
+            <a:noFill/>
+          </a:ln>
+          <a:effectLst/>
+        </p:spPr>
+        <p:style>
+          <a:lnRef idx="1">
+            <a:schemeClr val="accent1"/>
+          </a:lnRef>
+          <a:fillRef idx="3">
+            <a:schemeClr val="accent1"/>
+          </a:fillRef>
+          <a:effectRef idx="2">
+            <a:schemeClr val="accent1"/>
+          </a:effectRef>
+          <a:fontRef idx="minor">
+            <a:schemeClr val="lt1"/>
+          </a:fontRef>
+        </p:style>
+        <p:txBody>
+          <a:bodyPr rtlCol="0" anchor="ctr"/>
+          <a:lstStyle/>
+          <a:p>
+            <a:pPr algn="ctr"/>
+            <a:endParaRPr/>
+          </a:p>
+        </p:txBody>
+      </p:sp>
+      <p:sp>
+        <p:nvSpPr>
+          <p:cNvPr id="165" name="TextBox 164"/>
+          <p:cNvSpPr txBox="1"/>
+          <p:nvPr/>
+        </p:nvSpPr>
+        <p:spPr>
+          <a:xfrm>
+            <a:off x="7534800" y="25233280"/>
+            <a:ext cx="13255200" cy="645563"/>
+          </a:xfrm>
+          <a:prstGeom prst="rect">
+            <a:avLst/>
+          </a:prstGeom>
+          <a:noFill/>
+        </p:spPr>
+        <p:txBody>
+          <a:bodyPr wrap="square" lIns="0" rIns="0" tIns="0" bIns="0">
+            <a:spAutoFit/>
+          </a:bodyPr>
+          <a:lstStyle/>
+          <a:p>
+            <a:pPr algn="l">
+              <a:lnSpc>
+                <a:spcPct val="120000"/>
+              </a:lnSpc>
+              <a:spcAft>
+                <a:spcPts val="992"/>
+              </a:spcAft>
+            </a:pPr>
+            <a:r>
+              <a:rPr sz="1764" b="0" i="0">
+                <a:solidFill>
+                  <a:srgbClr val="12162E"/>
+                </a:solidFill>
+                <a:latin typeface="Arial"/>
+              </a:rPr>
+              <a:t>Same task, three views, different behaviour and different bills — step by step. Three illustrative tasks, chosen so each view wins once; </a:t>
+            </a:r>
+            <a:r>
+              <a:rPr sz="1764" b="1" i="0">
+                <a:solidFill>
+                  <a:srgbClr val="12162E"/>
+                </a:solidFill>
+                <a:latin typeface="Arial"/>
+              </a:rPr>
+              <a:t>not</a:t>
+            </a:r>
+            <a:r>
+              <a:rPr sz="1764" b="0" i="0">
+                <a:solidFill>
+                  <a:srgbClr val="12162E"/>
+                </a:solidFill>
+                <a:latin typeface="Arial"/>
+              </a:rPr>
+              <a:t> how often each wins.</a:t>
+            </a:r>
+          </a:p>
+        </p:txBody>
+      </p:sp>
+      <p:sp>
+        <p:nvSpPr>
+          <p:cNvPr id="166" name="TextBox 165"/>
+          <p:cNvSpPr txBox="1"/>
+          <p:nvPr/>
+        </p:nvSpPr>
+        <p:spPr>
+          <a:xfrm>
+            <a:off x="14734800" y="25986843"/>
+            <a:ext cx="2018400" cy="216000"/>
+          </a:xfrm>
+          <a:prstGeom prst="rect">
+            <a:avLst/>
+          </a:prstGeom>
+          <a:noFill/>
+        </p:spPr>
+        <p:txBody>
+          <a:bodyPr wrap="square" lIns="0" rIns="0" tIns="0" bIns="0">
+            <a:spAutoFit/>
+          </a:bodyPr>
+          <a:lstStyle/>
+          <a:p>
+            <a:pPr algn="l">
+              <a:lnSpc>
+                <a:spcPct val="120000"/>
+              </a:lnSpc>
+              <a:spcAft>
+                <a:spcPts val="0"/>
+              </a:spcAft>
+            </a:pPr>
+            <a:r>
+              <a:rPr sz="1059" b="1" i="0">
+                <a:solidFill>
+                  <a:srgbClr val="1F5FD6"/>
+                </a:solidFill>
+                <a:latin typeface="Consolas"/>
+              </a:rPr>
+              <a:t>LOOK</a:t>
+            </a:r>
+          </a:p>
+        </p:txBody>
+      </p:sp>
+      <p:sp>
+        <p:nvSpPr>
+          <p:cNvPr id="167" name="TextBox 166"/>
+          <p:cNvSpPr txBox="1"/>
+          <p:nvPr/>
+        </p:nvSpPr>
+        <p:spPr>
+          <a:xfrm>
+            <a:off x="16753200" y="25986843"/>
+            <a:ext cx="2018400" cy="216000"/>
+          </a:xfrm>
+          <a:prstGeom prst="rect">
+            <a:avLst/>
+          </a:prstGeom>
+          <a:noFill/>
+        </p:spPr>
+        <p:txBody>
+          <a:bodyPr wrap="square" lIns="0" rIns="0" tIns="0" bIns="0">
+            <a:spAutoFit/>
+          </a:bodyPr>
+          <a:lstStyle/>
+          <a:p>
+            <a:pPr algn="l">
+              <a:lnSpc>
+                <a:spcPct val="120000"/>
+              </a:lnSpc>
+              <a:spcAft>
+                <a:spcPts val="0"/>
+              </a:spcAft>
+            </a:pPr>
+            <a:r>
+              <a:rPr sz="1059" b="1" i="0">
+                <a:solidFill>
+                  <a:srgbClr val="E8720C"/>
+                </a:solidFill>
+                <a:latin typeface="Consolas"/>
+              </a:rPr>
+              <a:t>READ</a:t>
+            </a:r>
+          </a:p>
+        </p:txBody>
+      </p:sp>
+      <p:sp>
+        <p:nvSpPr>
+          <p:cNvPr id="168" name="TextBox 167"/>
+          <p:cNvSpPr txBox="1"/>
+          <p:nvPr/>
+        </p:nvSpPr>
+        <p:spPr>
+          <a:xfrm>
+            <a:off x="18771600" y="25986843"/>
+            <a:ext cx="2018400" cy="216000"/>
+          </a:xfrm>
+          <a:prstGeom prst="rect">
+            <a:avLst/>
+          </a:prstGeom>
+          <a:noFill/>
+        </p:spPr>
+        <p:txBody>
+          <a:bodyPr wrap="square" lIns="0" rIns="0" tIns="0" bIns="0">
+            <a:spAutoFit/>
+          </a:bodyPr>
+          <a:lstStyle/>
+          <a:p>
+            <a:pPr algn="l">
+              <a:lnSpc>
+                <a:spcPct val="120000"/>
+              </a:lnSpc>
+              <a:spcAft>
+                <a:spcPts val="0"/>
+              </a:spcAft>
+            </a:pPr>
+            <a:r>
+              <a:rPr sz="1059" b="1" i="0">
+                <a:solidFill>
+                  <a:srgbClr val="14855F"/>
+                </a:solidFill>
+                <a:latin typeface="Consolas"/>
+              </a:rPr>
+              <a:t>BOTH</a:t>
+            </a:r>
+          </a:p>
+        </p:txBody>
+      </p:sp>
+      <p:sp>
+        <p:nvSpPr>
+          <p:cNvPr id="169" name="Rectangle 168"/>
+          <p:cNvSpPr/>
+          <p:nvPr/>
+        </p:nvSpPr>
+        <p:spPr>
+          <a:xfrm>
+            <a:off x="7534800" y="26238843"/>
+            <a:ext cx="13255200" cy="10800"/>
+          </a:xfrm>
+          <a:prstGeom prst="rect">
+            <a:avLst/>
+          </a:prstGeom>
+          <a:solidFill>
+            <a:srgbClr val="DDE3F2"/>
+          </a:solidFill>
+          <a:ln>
+            <a:noFill/>
+          </a:ln>
+          <a:effectLst/>
+        </p:spPr>
+        <p:style>
+          <a:lnRef idx="1">
+            <a:schemeClr val="accent1"/>
+          </a:lnRef>
+          <a:fillRef idx="3">
+            <a:schemeClr val="accent1"/>
+          </a:fillRef>
+          <a:effectRef idx="2">
+            <a:schemeClr val="accent1"/>
+          </a:effectRef>
+          <a:fontRef idx="minor">
+            <a:schemeClr val="lt1"/>
+          </a:fontRef>
+        </p:style>
+        <p:txBody>
+          <a:bodyPr rtlCol="0" anchor="ctr" wrap="square"/>
+          <a:lstStyle/>
+          <a:p>
+            <a:pPr algn="ctr"/>
+          </a:p>
+        </p:txBody>
+      </p:sp>
+      <p:sp>
+        <p:nvSpPr>
+          <p:cNvPr id="170" name="TextBox 169"/>
+          <p:cNvSpPr txBox="1"/>
+          <p:nvPr/>
+        </p:nvSpPr>
+        <p:spPr>
+          <a:xfrm>
+            <a:off x="7534800" y="26328843"/>
+            <a:ext cx="6984000" cy="255684"/>
+          </a:xfrm>
+          <a:prstGeom prst="rect">
+            <a:avLst/>
+          </a:prstGeom>
+          <a:noFill/>
+        </p:spPr>
+        <p:txBody>
+          <a:bodyPr wrap="square" lIns="0" rIns="0" tIns="0" bIns="0">
+            <a:spAutoFit/>
+          </a:bodyPr>
+          <a:lstStyle/>
+          <a:p>
+            <a:pPr algn="l">
+              <a:lnSpc>
+                <a:spcPct val="132000"/>
+              </a:lnSpc>
+              <a:spcAft>
+                <a:spcPts val="0"/>
+              </a:spcAft>
+            </a:pPr>
+            <a:r>
+              <a:rPr sz="1271" b="0" i="0">
+                <a:solidFill>
+                  <a:srgbClr val="12162E"/>
+                </a:solidFill>
+                <a:latin typeface="Arial"/>
+              </a:rPr>
+              <a:t>“Navigate to the item on this page whose image is taken during a sunset.”</a:t>
+            </a:r>
+          </a:p>
+        </p:txBody>
+      </p:sp>
+      <p:sp>
+        <p:nvSpPr>
+          <p:cNvPr id="171" name="TextBox 170"/>
+          <p:cNvSpPr txBox="1"/>
+          <p:nvPr/>
+        </p:nvSpPr>
+        <p:spPr>
+          <a:xfrm>
+            <a:off x="14734800" y="26328843"/>
+            <a:ext cx="2018400" cy="288000"/>
+          </a:xfrm>
+          <a:prstGeom prst="rect">
+            <a:avLst/>
+          </a:prstGeom>
+          <a:noFill/>
+        </p:spPr>
+        <p:txBody>
+          <a:bodyPr wrap="square" lIns="0" rIns="0" tIns="0" bIns="0">
+            <a:spAutoFit/>
+          </a:bodyPr>
+          <a:lstStyle/>
+          <a:p>
+            <a:r>
+              <a:rPr sz="1500" b="1" i="0">
+                <a:solidFill>
+                  <a:srgbClr val="14855F"/>
+                </a:solidFill>
+                <a:latin typeface="Consolas"/>
+              </a:rPr>
+              <a:t>✓ </a:t>
+            </a:r>
+            <a:r>
+              <a:rPr sz="1271" b="0" i="0">
+                <a:solidFill>
+                  <a:srgbClr val="12162E"/>
+                </a:solidFill>
+                <a:latin typeface="Arial"/>
+              </a:rPr>
+              <a:t>2 steps · </a:t>
+            </a:r>
+            <a:r>
+              <a:rPr sz="1271" b="1" i="0">
+                <a:solidFill>
+                  <a:srgbClr val="12162E"/>
+                </a:solidFill>
+                <a:latin typeface="Arial"/>
+              </a:rPr>
+              <a:t>$0.007</a:t>
+            </a:r>
+          </a:p>
+        </p:txBody>
+      </p:sp>
+      <p:sp>
+        <p:nvSpPr>
+          <p:cNvPr id="172" name="TextBox 171"/>
+          <p:cNvSpPr txBox="1"/>
+          <p:nvPr/>
+        </p:nvSpPr>
+        <p:spPr>
+          <a:xfrm>
+            <a:off x="16753200" y="26328843"/>
+            <a:ext cx="2018400" cy="288000"/>
+          </a:xfrm>
+          <a:prstGeom prst="rect">
+            <a:avLst/>
+          </a:prstGeom>
+          <a:noFill/>
+        </p:spPr>
+        <p:txBody>
+          <a:bodyPr wrap="square" lIns="0" rIns="0" tIns="0" bIns="0">
+            <a:spAutoFit/>
+          </a:bodyPr>
+          <a:lstStyle/>
+          <a:p>
+            <a:r>
+              <a:rPr sz="1500" b="1" i="0">
+                <a:solidFill>
+                  <a:srgbClr val="C2352B"/>
+                </a:solidFill>
+                <a:latin typeface="Consolas"/>
+              </a:rPr>
+              <a:t>✗ </a:t>
+            </a:r>
+            <a:r>
+              <a:rPr sz="1271" b="0" i="0">
+                <a:solidFill>
+                  <a:srgbClr val="12162E"/>
+                </a:solidFill>
+                <a:latin typeface="Arial"/>
+              </a:rPr>
+              <a:t>21 steps · </a:t>
+            </a:r>
+            <a:r>
+              <a:rPr sz="1271" b="1" i="0">
+                <a:solidFill>
+                  <a:srgbClr val="12162E"/>
+                </a:solidFill>
+                <a:latin typeface="Arial"/>
+              </a:rPr>
+              <a:t>$0.096</a:t>
+            </a:r>
+          </a:p>
+        </p:txBody>
+      </p:sp>
+      <p:sp>
+        <p:nvSpPr>
+          <p:cNvPr id="173" name="TextBox 172"/>
+          <p:cNvSpPr txBox="1"/>
+          <p:nvPr/>
+        </p:nvSpPr>
+        <p:spPr>
+          <a:xfrm>
+            <a:off x="18771600" y="26328843"/>
+            <a:ext cx="2018400" cy="288000"/>
+          </a:xfrm>
+          <a:prstGeom prst="rect">
+            <a:avLst/>
+          </a:prstGeom>
+          <a:noFill/>
+        </p:spPr>
+        <p:txBody>
+          <a:bodyPr wrap="square" lIns="0" rIns="0" tIns="0" bIns="0">
+            <a:spAutoFit/>
+          </a:bodyPr>
+          <a:lstStyle/>
+          <a:p>
+            <a:r>
+              <a:rPr sz="1500" b="1" i="0">
+                <a:solidFill>
+                  <a:srgbClr val="14855F"/>
+                </a:solidFill>
+                <a:latin typeface="Consolas"/>
+              </a:rPr>
+              <a:t>✓ </a:t>
+            </a:r>
+            <a:r>
+              <a:rPr sz="1271" b="0" i="0">
+                <a:solidFill>
+                  <a:srgbClr val="12162E"/>
+                </a:solidFill>
+                <a:latin typeface="Arial"/>
+              </a:rPr>
+              <a:t>3 steps · </a:t>
+            </a:r>
+            <a:r>
+              <a:rPr sz="1271" b="1" i="0">
+                <a:solidFill>
+                  <a:srgbClr val="12162E"/>
+                </a:solidFill>
+                <a:latin typeface="Arial"/>
+              </a:rPr>
+              <a:t>$0.014</a:t>
+            </a:r>
+          </a:p>
+        </p:txBody>
+      </p:sp>
+      <p:sp>
+        <p:nvSpPr>
+          <p:cNvPr id="174" name="Rectangle 173"/>
+          <p:cNvSpPr/>
+          <p:nvPr/>
+        </p:nvSpPr>
+        <p:spPr>
+          <a:xfrm>
+            <a:off x="7534800" y="26688843"/>
+            <a:ext cx="13255200" cy="10800"/>
+          </a:xfrm>
+          <a:prstGeom prst="rect">
+            <a:avLst/>
+          </a:prstGeom>
+          <a:solidFill>
+            <a:srgbClr val="DDE3F2"/>
+          </a:solidFill>
+          <a:ln>
+            <a:noFill/>
+          </a:ln>
+          <a:effectLst/>
+        </p:spPr>
+        <p:style>
+          <a:lnRef idx="1">
+            <a:schemeClr val="accent1"/>
+          </a:lnRef>
+          <a:fillRef idx="3">
+            <a:schemeClr val="accent1"/>
+          </a:fillRef>
+          <a:effectRef idx="2">
+            <a:schemeClr val="accent1"/>
+          </a:effectRef>
+          <a:fontRef idx="minor">
+            <a:schemeClr val="lt1"/>
+          </a:fontRef>
+        </p:style>
+        <p:txBody>
+          <a:bodyPr rtlCol="0" anchor="ctr" wrap="square"/>
+          <a:lstStyle/>
+          <a:p>
+            <a:pPr algn="ctr"/>
+          </a:p>
+        </p:txBody>
+      </p:sp>
+      <p:sp>
+        <p:nvSpPr>
+          <p:cNvPr id="175" name="TextBox 174"/>
+          <p:cNvSpPr txBox="1"/>
+          <p:nvPr/>
+        </p:nvSpPr>
+        <p:spPr>
+          <a:xfrm>
+            <a:off x="7534800" y="26724843"/>
+            <a:ext cx="6984000" cy="511369"/>
+          </a:xfrm>
+          <a:prstGeom prst="rect">
+            <a:avLst/>
+          </a:prstGeom>
+          <a:noFill/>
+        </p:spPr>
+        <p:txBody>
+          <a:bodyPr wrap="square" lIns="0" rIns="0" tIns="0" bIns="0">
+            <a:spAutoFit/>
+          </a:bodyPr>
+          <a:lstStyle/>
+          <a:p>
+            <a:pPr algn="l">
+              <a:lnSpc>
+                <a:spcPct val="132000"/>
+              </a:lnSpc>
+              <a:spcAft>
+                <a:spcPts val="0"/>
+              </a:spcAft>
+            </a:pPr>
+            <a:r>
+              <a:rPr sz="1271" b="0" i="0">
+                <a:solidFill>
+                  <a:srgbClr val="12162E"/>
+                </a:solidFill>
+                <a:latin typeface="Arial"/>
+              </a:rPr>
+              <a:t>“Navigate to my listing of the blue bike and change the price to $85.50 (including in the description).”</a:t>
+            </a:r>
+          </a:p>
+        </p:txBody>
+      </p:sp>
+      <p:sp>
+        <p:nvSpPr>
+          <p:cNvPr id="176" name="TextBox 175"/>
+          <p:cNvSpPr txBox="1"/>
+          <p:nvPr/>
+        </p:nvSpPr>
+        <p:spPr>
+          <a:xfrm>
+            <a:off x="14734800" y="26724843"/>
+            <a:ext cx="2018400" cy="288000"/>
+          </a:xfrm>
+          <a:prstGeom prst="rect">
+            <a:avLst/>
+          </a:prstGeom>
+          <a:noFill/>
+        </p:spPr>
+        <p:txBody>
+          <a:bodyPr wrap="square" lIns="0" rIns="0" tIns="0" bIns="0">
+            <a:spAutoFit/>
+          </a:bodyPr>
+          <a:lstStyle/>
+          <a:p>
+            <a:r>
+              <a:rPr sz="1500" b="1" i="0">
+                <a:solidFill>
+                  <a:srgbClr val="C2352B"/>
+                </a:solidFill>
+                <a:latin typeface="Consolas"/>
+              </a:rPr>
+              <a:t>✗ </a:t>
+            </a:r>
+            <a:r>
+              <a:rPr sz="1271" b="0" i="0">
+                <a:solidFill>
+                  <a:srgbClr val="12162E"/>
+                </a:solidFill>
+                <a:latin typeface="Arial"/>
+              </a:rPr>
+              <a:t>30 steps · </a:t>
+            </a:r>
+            <a:r>
+              <a:rPr sz="1271" b="1" i="0">
+                <a:solidFill>
+                  <a:srgbClr val="12162E"/>
+                </a:solidFill>
+                <a:latin typeface="Arial"/>
+              </a:rPr>
+              <a:t>$0.116</a:t>
+            </a:r>
+          </a:p>
+        </p:txBody>
+      </p:sp>
+      <p:sp>
+        <p:nvSpPr>
+          <p:cNvPr id="177" name="TextBox 176"/>
+          <p:cNvSpPr txBox="1"/>
+          <p:nvPr/>
+        </p:nvSpPr>
+        <p:spPr>
+          <a:xfrm>
+            <a:off x="16753200" y="26724843"/>
+            <a:ext cx="2018400" cy="288000"/>
+          </a:xfrm>
+          <a:prstGeom prst="rect">
+            <a:avLst/>
+          </a:prstGeom>
+          <a:noFill/>
+        </p:spPr>
+        <p:txBody>
+          <a:bodyPr wrap="square" lIns="0" rIns="0" tIns="0" bIns="0">
+            <a:spAutoFit/>
+          </a:bodyPr>
+          <a:lstStyle/>
+          <a:p>
+            <a:r>
+              <a:rPr sz="1500" b="1" i="0">
+                <a:solidFill>
+                  <a:srgbClr val="14855F"/>
+                </a:solidFill>
+                <a:latin typeface="Consolas"/>
+              </a:rPr>
+              <a:t>✓ </a:t>
+            </a:r>
+            <a:r>
+              <a:rPr sz="1271" b="0" i="0">
+                <a:solidFill>
+                  <a:srgbClr val="12162E"/>
+                </a:solidFill>
+                <a:latin typeface="Arial"/>
+              </a:rPr>
+              <a:t>9 steps · </a:t>
+            </a:r>
+            <a:r>
+              <a:rPr sz="1271" b="1" i="0">
+                <a:solidFill>
+                  <a:srgbClr val="12162E"/>
+                </a:solidFill>
+                <a:latin typeface="Arial"/>
+              </a:rPr>
+              <a:t>$0.079</a:t>
+            </a:r>
+          </a:p>
+        </p:txBody>
+      </p:sp>
+      <p:sp>
+        <p:nvSpPr>
+          <p:cNvPr id="178" name="TextBox 177"/>
+          <p:cNvSpPr txBox="1"/>
+          <p:nvPr/>
+        </p:nvSpPr>
+        <p:spPr>
+          <a:xfrm>
+            <a:off x="18771600" y="26724843"/>
+            <a:ext cx="2018400" cy="288000"/>
+          </a:xfrm>
+          <a:prstGeom prst="rect">
+            <a:avLst/>
+          </a:prstGeom>
+          <a:noFill/>
+        </p:spPr>
+        <p:txBody>
+          <a:bodyPr wrap="square" lIns="0" rIns="0" tIns="0" bIns="0">
+            <a:spAutoFit/>
+          </a:bodyPr>
+          <a:lstStyle/>
+          <a:p>
+            <a:r>
+              <a:rPr sz="1500" b="1" i="0">
+                <a:solidFill>
+                  <a:srgbClr val="C2352B"/>
+                </a:solidFill>
+                <a:latin typeface="Consolas"/>
+              </a:rPr>
+              <a:t>✗ </a:t>
+            </a:r>
+            <a:r>
+              <a:rPr sz="1271" b="0" i="0">
+                <a:solidFill>
+                  <a:srgbClr val="12162E"/>
+                </a:solidFill>
+                <a:latin typeface="Arial"/>
+              </a:rPr>
+              <a:t>6 steps · </a:t>
+            </a:r>
+            <a:r>
+              <a:rPr sz="1271" b="1" i="0">
+                <a:solidFill>
+                  <a:srgbClr val="12162E"/>
+                </a:solidFill>
+                <a:latin typeface="Arial"/>
+              </a:rPr>
+              <a:t>$0.029</a:t>
+            </a:r>
+          </a:p>
+        </p:txBody>
+      </p:sp>
+      <p:sp>
+        <p:nvSpPr>
+          <p:cNvPr id="179" name="Rectangle 178"/>
+          <p:cNvSpPr/>
+          <p:nvPr/>
+        </p:nvSpPr>
+        <p:spPr>
+          <a:xfrm>
+            <a:off x="7534800" y="27308212"/>
+            <a:ext cx="13255200" cy="10800"/>
+          </a:xfrm>
+          <a:prstGeom prst="rect">
+            <a:avLst/>
+          </a:prstGeom>
+          <a:solidFill>
+            <a:srgbClr val="DDE3F2"/>
+          </a:solidFill>
+          <a:ln>
+            <a:noFill/>
+          </a:ln>
+          <a:effectLst/>
+        </p:spPr>
+        <p:style>
+          <a:lnRef idx="1">
+            <a:schemeClr val="accent1"/>
+          </a:lnRef>
+          <a:fillRef idx="3">
+            <a:schemeClr val="accent1"/>
+          </a:fillRef>
+          <a:effectRef idx="2">
+            <a:schemeClr val="accent1"/>
+          </a:effectRef>
+          <a:fontRef idx="minor">
+            <a:schemeClr val="lt1"/>
+          </a:fontRef>
+        </p:style>
+        <p:txBody>
+          <a:bodyPr rtlCol="0" anchor="ctr" wrap="square"/>
+          <a:lstStyle/>
+          <a:p>
+            <a:pPr algn="ctr"/>
+          </a:p>
+        </p:txBody>
+      </p:sp>
+      <p:sp>
+        <p:nvSpPr>
+          <p:cNvPr id="180" name="TextBox 179"/>
+          <p:cNvSpPr txBox="1"/>
+          <p:nvPr/>
+        </p:nvSpPr>
+        <p:spPr>
+          <a:xfrm>
+            <a:off x="7534800" y="27344212"/>
+            <a:ext cx="6984000" cy="255684"/>
+          </a:xfrm>
+          <a:prstGeom prst="rect">
+            <a:avLst/>
+          </a:prstGeom>
+          <a:noFill/>
+        </p:spPr>
+        <p:txBody>
+          <a:bodyPr wrap="square" lIns="0" rIns="0" tIns="0" bIns="0">
+            <a:spAutoFit/>
+          </a:bodyPr>
+          <a:lstStyle/>
+          <a:p>
+            <a:pPr algn="l">
+              <a:lnSpc>
+                <a:spcPct val="132000"/>
+              </a:lnSpc>
+              <a:spcAft>
+                <a:spcPts val="0"/>
+              </a:spcAft>
+            </a:pPr>
+            <a:r>
+              <a:rPr sz="1271" b="0" i="0">
+                <a:solidFill>
+                  <a:srgbClr val="12162E"/>
+                </a:solidFill>
+                <a:latin typeface="Arial"/>
+              </a:rPr>
+              <a:t>“Show me the cheapest bike with red handlebars between $900-950.”</a:t>
+            </a:r>
+          </a:p>
+        </p:txBody>
+      </p:sp>
+      <p:sp>
+        <p:nvSpPr>
+          <p:cNvPr id="181" name="TextBox 180"/>
+          <p:cNvSpPr txBox="1"/>
+          <p:nvPr/>
+        </p:nvSpPr>
+        <p:spPr>
+          <a:xfrm>
+            <a:off x="14734800" y="27344212"/>
+            <a:ext cx="2018400" cy="288000"/>
+          </a:xfrm>
+          <a:prstGeom prst="rect">
+            <a:avLst/>
+          </a:prstGeom>
+          <a:noFill/>
+        </p:spPr>
+        <p:txBody>
+          <a:bodyPr wrap="square" lIns="0" rIns="0" tIns="0" bIns="0">
+            <a:spAutoFit/>
+          </a:bodyPr>
+          <a:lstStyle/>
+          <a:p>
+            <a:r>
+              <a:rPr sz="1500" b="1" i="0">
+                <a:solidFill>
+                  <a:srgbClr val="C2352B"/>
+                </a:solidFill>
+                <a:latin typeface="Consolas"/>
+              </a:rPr>
+              <a:t>✗ </a:t>
+            </a:r>
+            <a:r>
+              <a:rPr sz="1271" b="0" i="0">
+                <a:solidFill>
+                  <a:srgbClr val="12162E"/>
+                </a:solidFill>
+                <a:latin typeface="Arial"/>
+              </a:rPr>
+              <a:t>19 steps · </a:t>
+            </a:r>
+            <a:r>
+              <a:rPr sz="1271" b="1" i="0">
+                <a:solidFill>
+                  <a:srgbClr val="12162E"/>
+                </a:solidFill>
+                <a:latin typeface="Arial"/>
+              </a:rPr>
+              <a:t>$0.075</a:t>
+            </a:r>
+          </a:p>
+        </p:txBody>
+      </p:sp>
+      <p:sp>
+        <p:nvSpPr>
+          <p:cNvPr id="182" name="TextBox 181"/>
+          <p:cNvSpPr txBox="1"/>
+          <p:nvPr/>
+        </p:nvSpPr>
+        <p:spPr>
+          <a:xfrm>
+            <a:off x="16753200" y="27344212"/>
+            <a:ext cx="2018400" cy="288000"/>
+          </a:xfrm>
+          <a:prstGeom prst="rect">
+            <a:avLst/>
+          </a:prstGeom>
+          <a:noFill/>
+        </p:spPr>
+        <p:txBody>
+          <a:bodyPr wrap="square" lIns="0" rIns="0" tIns="0" bIns="0">
+            <a:spAutoFit/>
+          </a:bodyPr>
+          <a:lstStyle/>
+          <a:p>
+            <a:r>
+              <a:rPr sz="1500" b="1" i="0">
+                <a:solidFill>
+                  <a:srgbClr val="C2352B"/>
+                </a:solidFill>
+                <a:latin typeface="Consolas"/>
+              </a:rPr>
+              <a:t>✗ </a:t>
+            </a:r>
+            <a:r>
+              <a:rPr sz="1271" b="0" i="0">
+                <a:solidFill>
+                  <a:srgbClr val="12162E"/>
+                </a:solidFill>
+                <a:latin typeface="Arial"/>
+              </a:rPr>
+              <a:t>6 steps · </a:t>
+            </a:r>
+            <a:r>
+              <a:rPr sz="1271" b="1" i="0">
+                <a:solidFill>
+                  <a:srgbClr val="12162E"/>
+                </a:solidFill>
+                <a:latin typeface="Arial"/>
+              </a:rPr>
+              <a:t>$0.025</a:t>
+            </a:r>
+          </a:p>
+        </p:txBody>
+      </p:sp>
+      <p:sp>
+        <p:nvSpPr>
+          <p:cNvPr id="183" name="TextBox 182"/>
+          <p:cNvSpPr txBox="1"/>
+          <p:nvPr/>
+        </p:nvSpPr>
+        <p:spPr>
+          <a:xfrm>
+            <a:off x="18771600" y="27344212"/>
+            <a:ext cx="2018400" cy="288000"/>
+          </a:xfrm>
+          <a:prstGeom prst="rect">
+            <a:avLst/>
+          </a:prstGeom>
+          <a:noFill/>
+        </p:spPr>
+        <p:txBody>
+          <a:bodyPr wrap="square" lIns="0" rIns="0" tIns="0" bIns="0">
+            <a:spAutoFit/>
+          </a:bodyPr>
+          <a:lstStyle/>
+          <a:p>
+            <a:r>
+              <a:rPr sz="1500" b="1" i="0">
+                <a:solidFill>
+                  <a:srgbClr val="14855F"/>
+                </a:solidFill>
+                <a:latin typeface="Consolas"/>
+              </a:rPr>
+              <a:t>✓ </a:t>
+            </a:r>
+            <a:r>
+              <a:rPr sz="1271" b="0" i="0">
+                <a:solidFill>
+                  <a:srgbClr val="12162E"/>
+                </a:solidFill>
+                <a:latin typeface="Arial"/>
+              </a:rPr>
+              <a:t>7 steps · </a:t>
+            </a:r>
+            <a:r>
+              <a:rPr sz="1271" b="1" i="0">
+                <a:solidFill>
+                  <a:srgbClr val="12162E"/>
+                </a:solidFill>
+                <a:latin typeface="Arial"/>
+              </a:rPr>
+              <a:t>$0.037</a:t>
+            </a:r>
+          </a:p>
+        </p:txBody>
+      </p:sp>
+      <p:sp>
+        <p:nvSpPr>
+          <p:cNvPr id="184" name="Rectangle 183"/>
+          <p:cNvSpPr/>
+          <p:nvPr/>
+        </p:nvSpPr>
+        <p:spPr>
+          <a:xfrm>
+            <a:off x="7534800" y="27704212"/>
+            <a:ext cx="13255200" cy="10800"/>
+          </a:xfrm>
+          <a:prstGeom prst="rect">
+            <a:avLst/>
+          </a:prstGeom>
+          <a:solidFill>
+            <a:srgbClr val="DDE3F2"/>
+          </a:solidFill>
+          <a:ln>
+            <a:noFill/>
+          </a:ln>
+          <a:effectLst/>
+        </p:spPr>
+        <p:style>
+          <a:lnRef idx="1">
+            <a:schemeClr val="accent1"/>
+          </a:lnRef>
+          <a:fillRef idx="3">
+            <a:schemeClr val="accent1"/>
+          </a:fillRef>
+          <a:effectRef idx="2">
+            <a:schemeClr val="accent1"/>
+          </a:effectRef>
+          <a:fontRef idx="minor">
+            <a:schemeClr val="lt1"/>
+          </a:fontRef>
+        </p:style>
+        <p:txBody>
+          <a:bodyPr rtlCol="0" anchor="ctr" wrap="square"/>
+          <a:lstStyle/>
+          <a:p>
+            <a:pPr algn="ctr"/>
+          </a:p>
+        </p:txBody>
+      </p:sp>
+      <p:sp>
+        <p:nvSpPr>
+          <p:cNvPr id="185" name="TextBox 184"/>
+          <p:cNvSpPr txBox="1"/>
+          <p:nvPr/>
+        </p:nvSpPr>
+        <p:spPr>
+          <a:xfrm>
+            <a:off x="7534800" y="27776212"/>
+            <a:ext cx="13255200" cy="255684"/>
+          </a:xfrm>
+          <a:prstGeom prst="rect">
+            <a:avLst/>
+          </a:prstGeom>
+          <a:noFill/>
+        </p:spPr>
+        <p:txBody>
+          <a:bodyPr wrap="square" lIns="0" rIns="0" tIns="0" bIns="0">
+            <a:spAutoFit/>
+          </a:bodyPr>
+          <a:lstStyle/>
+          <a:p>
+            <a:pPr algn="l">
+              <a:lnSpc>
+                <a:spcPct val="132000"/>
+              </a:lnSpc>
+              <a:spcAft>
+                <a:spcPts val="425"/>
+              </a:spcAft>
+            </a:pPr>
+            <a:r>
+              <a:rPr sz="1271" b="0" i="0">
+                <a:solidFill>
+                  <a:srgbClr val="5D6787"/>
+                </a:solidFill>
+                <a:latin typeface="Arial"/>
+              </a:rPr>
+              <a:t>One recorded attempt per view, B0 · classifieds. Every ✓ / ✗ came out the same on an independent rerun; steps and bill differ run to run.</a:t>
+            </a:r>
+          </a:p>
+        </p:txBody>
+      </p:sp>
+      <p:pic>
+        <p:nvPicPr>
+          <p:cNvPr id="186" name="Picture 185" descr="qr_repo.png"/>
           <p:cNvPicPr>
             <a:picLocks noChangeAspect="1"/>
           </p:cNvPicPr>

--- a/deliverables/showcase/poster_jiaming_wei.pptx
+++ b/deliverables/showcase/poster_jiaming_wei.pptx
@@ -6995,7 +6995,7 @@
                 </a:solidFill>
                 <a:latin typeface="Consolas"/>
               </a:rPr>
-              <a:t>PERFECT HINDSIGHT, BEST OF 8 · VS ONE FIXED VIEW</a:t>
+              <a:t>PERFECT HINDSIGHT, SUCCESS ONLY, BEST OF 8 · VS ONE FIXED VIEW</a:t>
             </a:r>
           </a:p>
         </p:txBody>
@@ -7079,7 +7079,7 @@
                 </a:solidFill>
                 <a:latin typeface="Consolas"/>
               </a:rPr>
-              <a:t>LEARNED CHOICES THAT BEAT ALWAYS-CHEAPEST</a:t>
+              <a:t>SETTINGS WHERE A LEARNED CHOICE WON ON BOTH SUCCESS AND COST</a:t>
             </a:r>
           </a:p>
         </p:txBody>
@@ -7163,7 +7163,7 @@
                 </a:solidFill>
                 <a:latin typeface="Consolas"/>
               </a:rPr>
-              <a:t>HINDSIGHT CHOICES THAT BEAT ALWAYS-CHEAPEST</a:t>
+              <a:t>SETTINGS WHERE PERFECT HINDSIGHT WON ON BOTH SUCCESS AND COST</a:t>
             </a:r>
           </a:p>
         </p:txBody>
@@ -7265,7 +7265,16 @@
                 </a:solidFill>
                 <a:latin typeface="Arial"/>
               </a:rPr>
-              <a:t> — the single view that costs least on average in a setting, used for every task.</a:t>
+              <a:t> — the single view that costs least on average in a setting, used for every task. </a:t>
+            </a:r>
+            <a:r>
+              <a:rPr sz="1271" b="1" i="0">
+                <a:solidFill>
+                  <a:srgbClr val="12162E"/>
+                </a:solidFill>
+                <a:latin typeface="Arial"/>
+              </a:rPr>
+              <a:t>“Won” above = beat this rule on both success and cost.</a:t>
             </a:r>
           </a:p>
         </p:txBody>

--- a/deliverables/showcase/poster_jiaming_wei.pptx
+++ b/deliverables/showcase/poster_jiaming_wei.pptx
@@ -3679,7 +3679,7 @@
                 </a:solidFill>
                 <a:latin typeface="Arial"/>
               </a:rPr>
-              <a:t>jiaming.wei.22@ucl.ac.uk</a:t>
+              <a:t>jiaming.wei.25@ucl.ac.uk</a:t>
             </a:r>
           </a:p>
           <a:p>

--- a/deliverables/showcase/poster_jiaming_wei.pptx
+++ b/deliverables/showcase/poster_jiaming_wei.pptx
@@ -3346,7 +3346,7 @@
               </a:lnSpc>
             </a:pPr>
             <a:r>
-              <a:rPr sz="1836" b="0" i="0">
+              <a:rPr sz="2400" b="0" i="0">
                 <a:solidFill>
                   <a:srgbClr val="FFFFFF"/>
                 </a:solidFill>
@@ -3385,7 +3385,7 @@
               </a:lnSpc>
             </a:pPr>
             <a:r>
-              <a:rPr sz="1149" b="0" i="0">
+              <a:rPr sz="1800" b="0" i="0">
                 <a:solidFill>
                   <a:srgbClr val="C9C6FF"/>
                 </a:solidFill>
@@ -3786,7 +3786,7 @@
         </p:nvSpPr>
         <p:spPr>
           <a:xfrm>
-            <a:off x="727200" y="5040000"/>
+            <a:off x="727200" y="4752000"/>
             <a:ext cx="177988" cy="177988"/>
           </a:xfrm>
           <a:prstGeom prst="rect">
@@ -3831,7 +3831,7 @@
         </p:nvSpPr>
         <p:spPr>
           <a:xfrm>
-            <a:off x="1032323" y="4996800"/>
+            <a:off x="1032323" y="4708800"/>
             <a:ext cx="6144827" cy="238912"/>
           </a:xfrm>
           <a:prstGeom prst="rect">
@@ -3851,7 +3851,7 @@
               </a:lnSpc>
             </a:pPr>
             <a:r>
-              <a:rPr sz="1412" b="1" i="0">
+              <a:rPr sz="1750" b="1" i="0">
                 <a:solidFill>
                   <a:srgbClr val="141E41"/>
                 </a:solidFill>
@@ -3876,7 +3876,7 @@
         </p:nvSpPr>
         <p:spPr>
           <a:xfrm>
-            <a:off x="727200" y="5357836"/>
+            <a:off x="727200" y="5069836"/>
             <a:ext cx="1169636" cy="35597"/>
           </a:xfrm>
           <a:prstGeom prst="rect">
@@ -3921,7 +3921,7 @@
         </p:nvSpPr>
         <p:spPr>
           <a:xfrm>
-            <a:off x="1896836" y="5368007"/>
+            <a:off x="1896836" y="5080007"/>
             <a:ext cx="18893164" cy="15256"/>
           </a:xfrm>
           <a:prstGeom prst="rect">
@@ -3966,7 +3966,7 @@
         </p:nvSpPr>
         <p:spPr>
           <a:xfrm>
-            <a:off x="3823200" y="7848000"/>
+            <a:off x="3823200" y="7560000"/>
             <a:ext cx="360000" cy="504000"/>
           </a:xfrm>
           <a:prstGeom prst="rightArrow">
@@ -4010,7 +4010,7 @@
         </p:nvSpPr>
         <p:spPr>
           <a:xfrm>
-            <a:off x="8215200" y="7848000"/>
+            <a:off x="8215200" y="7560000"/>
             <a:ext cx="360000" cy="504000"/>
           </a:xfrm>
           <a:prstGeom prst="rightArrow">
@@ -4054,7 +4054,7 @@
         </p:nvSpPr>
         <p:spPr>
           <a:xfrm>
-            <a:off x="14119200" y="7848000"/>
+            <a:off x="14119200" y="7560000"/>
             <a:ext cx="360000" cy="504000"/>
           </a:xfrm>
           <a:prstGeom prst="rightArrow">
@@ -4098,7 +4098,7 @@
         </p:nvSpPr>
         <p:spPr>
           <a:xfrm>
-            <a:off x="17791200" y="7848000"/>
+            <a:off x="17503200" y="7560000"/>
             <a:ext cx="360000" cy="504000"/>
           </a:xfrm>
           <a:prstGeom prst="rightArrow">
@@ -4142,7 +4142,7 @@
         </p:nvSpPr>
         <p:spPr>
           <a:xfrm>
-            <a:off x="727200" y="5580000"/>
+            <a:off x="727200" y="5292000"/>
             <a:ext cx="3024000" cy="5040000"/>
           </a:xfrm>
           <a:prstGeom prst="rect">
@@ -4188,7 +4188,7 @@
         </p:nvSpPr>
         <p:spPr>
           <a:xfrm>
-            <a:off x="727200" y="5580000"/>
+            <a:off x="727200" y="5292000"/>
             <a:ext cx="3024000" cy="50400"/>
           </a:xfrm>
           <a:prstGeom prst="rect">
@@ -4232,8 +4232,8 @@
         </p:nvSpPr>
         <p:spPr>
           <a:xfrm>
-            <a:off x="907200" y="5724000"/>
-            <a:ext cx="2664000" cy="216000"/>
+            <a:off x="907200" y="5436000"/>
+            <a:ext cx="2664000" cy="270000"/>
           </a:xfrm>
           <a:prstGeom prst="rect">
             <a:avLst/>
@@ -4248,20 +4248,20 @@
           <a:p>
             <a:pPr algn="l">
               <a:lnSpc>
-                <a:spcPct val="120000"/>
+                <a:spcPct val="102000"/>
               </a:lnSpc>
               <a:spcAft>
                 <a:spcPts val="0"/>
               </a:spcAft>
             </a:pPr>
             <a:r>
-              <a:rPr sz="1059" b="0" i="0">
+              <a:rPr sz="1550" b="0" i="0">
                 <a:solidFill>
                   <a:srgbClr val="5D6787"/>
                 </a:solidFill>
                 <a:latin typeface="Consolas"/>
               </a:rPr>
-              <a:t>THE TASK + THE LIVE PAGE</a:t>
+              <a:t>THE TASK + THE PAGE</a:t>
             </a:r>
           </a:p>
         </p:txBody>
@@ -4274,8 +4274,8 @@
         </p:nvSpPr>
         <p:spPr>
           <a:xfrm>
-            <a:off x="907200" y="5958000"/>
-            <a:ext cx="2664000" cy="968345"/>
+            <a:off x="907200" y="5724000"/>
+            <a:ext cx="2664000" cy="1787652"/>
           </a:xfrm>
           <a:prstGeom prst="rect">
             <a:avLst/>
@@ -4290,14 +4290,14 @@
           <a:p>
             <a:pPr algn="l">
               <a:lnSpc>
-                <a:spcPct val="120000"/>
+                <a:spcPct val="102000"/>
               </a:lnSpc>
               <a:spcAft>
-                <a:spcPts val="992"/>
+                <a:spcPts val="623"/>
               </a:spcAft>
             </a:pPr>
             <a:r>
-              <a:rPr sz="1764" b="0" i="0">
+              <a:rPr sz="2300" b="0" i="0">
                 <a:solidFill>
                   <a:srgbClr val="12162E"/>
                 </a:solidFill>
@@ -4316,8 +4316,8 @@
         </p:nvSpPr>
         <p:spPr>
           <a:xfrm>
-            <a:off x="907200" y="7016345"/>
-            <a:ext cx="2664000" cy="511369"/>
+            <a:off x="907200" y="7619652"/>
+            <a:ext cx="2664000" cy="938174"/>
           </a:xfrm>
           <a:prstGeom prst="rect">
             <a:avLst/>
@@ -4332,14 +4332,14 @@
           <a:p>
             <a:pPr algn="l">
               <a:lnSpc>
-                <a:spcPct val="132000"/>
+                <a:spcPct val="108000"/>
               </a:lnSpc>
               <a:spcAft>
                 <a:spcPts val="425"/>
               </a:spcAft>
             </a:pPr>
             <a:r>
-              <a:rPr sz="1271" b="0" i="0">
+              <a:rPr sz="1900" b="0" i="0">
                 <a:solidFill>
                   <a:srgbClr val="5D6787"/>
                 </a:solidFill>
@@ -4358,7 +4358,7 @@
         </p:nvSpPr>
         <p:spPr>
           <a:xfrm>
-            <a:off x="892800" y="7621314"/>
+            <a:off x="892800" y="8687426"/>
             <a:ext cx="2692800" cy="1518975"/>
           </a:xfrm>
           <a:prstGeom prst="rect">
@@ -4410,7 +4410,7 @@
         </p:blipFill>
         <p:spPr>
           <a:xfrm>
-            <a:off x="907200" y="7635714"/>
+            <a:off x="907200" y="8701826"/>
             <a:ext cx="2664000" cy="1490175"/>
           </a:xfrm>
           <a:prstGeom prst="rect">
@@ -4426,7 +4426,7 @@
         </p:nvSpPr>
         <p:spPr>
           <a:xfrm>
-            <a:off x="4255200" y="5580000"/>
+            <a:off x="4255200" y="5292000"/>
             <a:ext cx="3888000" cy="5040000"/>
           </a:xfrm>
           <a:prstGeom prst="rect">
@@ -4473,8 +4473,8 @@
         </p:nvSpPr>
         <p:spPr>
           <a:xfrm>
-            <a:off x="4435200" y="5724000"/>
-            <a:ext cx="3528000" cy="216000"/>
+            <a:off x="4435200" y="5436000"/>
+            <a:ext cx="3528000" cy="270000"/>
           </a:xfrm>
           <a:prstGeom prst="rect">
             <a:avLst/>
@@ -4489,14 +4489,14 @@
           <a:p>
             <a:pPr algn="l">
               <a:lnSpc>
-                <a:spcPct val="120000"/>
+                <a:spcPct val="102000"/>
               </a:lnSpc>
               <a:spcAft>
                 <a:spcPts val="0"/>
               </a:spcAft>
             </a:pPr>
             <a:r>
-              <a:rPr sz="1059" b="0" i="0">
+              <a:rPr sz="1550" b="0" i="0">
                 <a:solidFill>
                   <a:srgbClr val="5049F9"/>
                 </a:solidFill>
@@ -4515,8 +4515,8 @@
         </p:nvSpPr>
         <p:spPr>
           <a:xfrm>
-            <a:off x="4435200" y="5958000"/>
-            <a:ext cx="3528000" cy="1224000"/>
+            <a:off x="4435200" y="5724000"/>
+            <a:ext cx="3528000" cy="1296000"/>
           </a:xfrm>
           <a:prstGeom prst="roundRect">
             <a:avLst>
@@ -4563,8 +4563,8 @@
         </p:nvSpPr>
         <p:spPr>
           <a:xfrm>
-            <a:off x="4579200" y="6084000"/>
-            <a:ext cx="3240000" cy="288000"/>
+            <a:off x="4579200" y="5850000"/>
+            <a:ext cx="3240000" cy="324000"/>
           </a:xfrm>
           <a:prstGeom prst="rect">
             <a:avLst/>
@@ -4579,14 +4579,14 @@
           <a:p>
             <a:pPr algn="l">
               <a:lnSpc>
-                <a:spcPct val="120000"/>
+                <a:spcPct val="102000"/>
               </a:lnSpc>
               <a:spcAft>
                 <a:spcPts val="0"/>
               </a:spcAft>
             </a:pPr>
             <a:r>
-              <a:rPr sz="1764" b="1" i="0">
+              <a:rPr sz="2300" b="1" i="0">
                 <a:solidFill>
                   <a:srgbClr val="141E41"/>
                 </a:solidFill>
@@ -4605,8 +4605,8 @@
         </p:nvSpPr>
         <p:spPr>
           <a:xfrm>
-            <a:off x="4579200" y="6426000"/>
-            <a:ext cx="3240000" cy="576000"/>
+            <a:off x="4579200" y="6246000"/>
+            <a:ext cx="3240000" cy="648000"/>
           </a:xfrm>
           <a:prstGeom prst="rect">
             <a:avLst/>
@@ -4621,20 +4621,20 @@
           <a:p>
             <a:pPr algn="l">
               <a:lnSpc>
-                <a:spcPct val="132000"/>
+                <a:spcPct val="108000"/>
               </a:lnSpc>
               <a:spcAft>
                 <a:spcPts val="0"/>
               </a:spcAft>
             </a:pPr>
             <a:r>
-              <a:rPr sz="1271" b="0" i="0">
+              <a:rPr sz="2300" b="0" i="0">
                 <a:solidFill>
                   <a:srgbClr val="5D6787"/>
                 </a:solidFill>
                 <a:latin typeface="Arial"/>
               </a:rPr>
-              <a:t>the same view for every task</a:t>
+              <a:t>the same view on every task</a:t>
             </a:r>
           </a:p>
         </p:txBody>
@@ -4647,8 +4647,8 @@
         </p:nvSpPr>
         <p:spPr>
           <a:xfrm>
-            <a:off x="4435200" y="7290000"/>
-            <a:ext cx="3528000" cy="1224000"/>
+            <a:off x="4435200" y="7128000"/>
+            <a:ext cx="3528000" cy="1296000"/>
           </a:xfrm>
           <a:prstGeom prst="roundRect">
             <a:avLst>
@@ -4695,8 +4695,8 @@
         </p:nvSpPr>
         <p:spPr>
           <a:xfrm>
-            <a:off x="4579200" y="7416000"/>
-            <a:ext cx="3240000" cy="288000"/>
+            <a:off x="4579200" y="7254000"/>
+            <a:ext cx="3240000" cy="324000"/>
           </a:xfrm>
           <a:prstGeom prst="rect">
             <a:avLst/>
@@ -4711,14 +4711,14 @@
           <a:p>
             <a:pPr algn="l">
               <a:lnSpc>
-                <a:spcPct val="120000"/>
+                <a:spcPct val="102000"/>
               </a:lnSpc>
               <a:spcAft>
                 <a:spcPts val="0"/>
               </a:spcAft>
             </a:pPr>
             <a:r>
-              <a:rPr sz="1764" b="1" i="0">
+              <a:rPr sz="2300" b="1" i="0">
                 <a:solidFill>
                   <a:srgbClr val="141E41"/>
                 </a:solidFill>
@@ -4737,8 +4737,8 @@
         </p:nvSpPr>
         <p:spPr>
           <a:xfrm>
-            <a:off x="4579200" y="7758000"/>
-            <a:ext cx="3240000" cy="576000"/>
+            <a:off x="4579200" y="7650000"/>
+            <a:ext cx="3240000" cy="648000"/>
           </a:xfrm>
           <a:prstGeom prst="rect">
             <a:avLst/>
@@ -4753,20 +4753,20 @@
           <a:p>
             <a:pPr algn="l">
               <a:lnSpc>
-                <a:spcPct val="132000"/>
+                <a:spcPct val="108000"/>
               </a:lnSpc>
               <a:spcAft>
                 <a:spcPts val="0"/>
               </a:spcAft>
             </a:pPr>
             <a:r>
-              <a:rPr sz="1271" b="0" i="0">
+              <a:rPr sz="2300" b="0" i="0">
                 <a:solidFill>
                   <a:srgbClr val="5D6787"/>
                 </a:solidFill>
                 <a:latin typeface="Arial"/>
               </a:rPr>
-              <a:t>knowing afterwards which view solved it</a:t>
+              <a:t>afterwards: which view solved it</a:t>
             </a:r>
           </a:p>
         </p:txBody>
@@ -4779,8 +4779,8 @@
         </p:nvSpPr>
         <p:spPr>
           <a:xfrm>
-            <a:off x="4435200" y="8622000"/>
-            <a:ext cx="3528000" cy="1224000"/>
+            <a:off x="4435200" y="8532000"/>
+            <a:ext cx="3528000" cy="1296000"/>
           </a:xfrm>
           <a:prstGeom prst="roundRect">
             <a:avLst>
@@ -4827,8 +4827,8 @@
         </p:nvSpPr>
         <p:spPr>
           <a:xfrm>
-            <a:off x="4579200" y="8748000"/>
-            <a:ext cx="3240000" cy="288000"/>
+            <a:off x="4579200" y="8658000"/>
+            <a:ext cx="3240000" cy="324000"/>
           </a:xfrm>
           <a:prstGeom prst="rect">
             <a:avLst/>
@@ -4843,14 +4843,14 @@
           <a:p>
             <a:pPr algn="l">
               <a:lnSpc>
-                <a:spcPct val="120000"/>
+                <a:spcPct val="102000"/>
               </a:lnSpc>
               <a:spcAft>
                 <a:spcPts val="0"/>
               </a:spcAft>
             </a:pPr>
             <a:r>
-              <a:rPr sz="1764" b="1" i="0">
+              <a:rPr sz="2300" b="1" i="0">
                 <a:solidFill>
                   <a:srgbClr val="141E41"/>
                 </a:solidFill>
@@ -4869,8 +4869,8 @@
         </p:nvSpPr>
         <p:spPr>
           <a:xfrm>
-            <a:off x="4579200" y="9090000"/>
-            <a:ext cx="3240000" cy="576000"/>
+            <a:off x="4579200" y="9054000"/>
+            <a:ext cx="3240000" cy="648000"/>
           </a:xfrm>
           <a:prstGeom prst="rect">
             <a:avLst/>
@@ -4885,20 +4885,20 @@
           <a:p>
             <a:pPr algn="l">
               <a:lnSpc>
-                <a:spcPct val="132000"/>
+                <a:spcPct val="108000"/>
               </a:lnSpc>
               <a:spcAft>
                 <a:spcPts val="0"/>
               </a:spcAft>
             </a:pPr>
             <a:r>
-              <a:rPr sz="1271" b="0" i="0">
+              <a:rPr sz="2300" b="0" i="0">
                 <a:solidFill>
                   <a:srgbClr val="5D6787"/>
                 </a:solidFill>
                 <a:latin typeface="Arial"/>
               </a:rPr>
-              <a:t>made before the task runs, from what the page looks like</a:t>
+              <a:t>beforehand: predicted from the page</a:t>
             </a:r>
           </a:p>
         </p:txBody>
@@ -4911,7 +4911,7 @@
         </p:nvSpPr>
         <p:spPr>
           <a:xfrm>
-            <a:off x="4435200" y="10260000"/>
+            <a:off x="4435200" y="9972000"/>
             <a:ext cx="3528000" cy="216000"/>
           </a:xfrm>
           <a:prstGeom prst="rect">
@@ -4927,14 +4927,14 @@
           <a:p>
             <a:pPr algn="l">
               <a:lnSpc>
-                <a:spcPct val="120000"/>
+                <a:spcPct val="102000"/>
               </a:lnSpc>
               <a:spcAft>
                 <a:spcPts val="0"/>
               </a:spcAft>
             </a:pPr>
             <a:r>
-              <a:rPr sz="1059" b="0" i="0">
+              <a:rPr sz="1550" b="0" i="0">
                 <a:solidFill>
                   <a:srgbClr val="5049F9"/>
                 </a:solidFill>
@@ -4953,7 +4953,7 @@
         </p:nvSpPr>
         <p:spPr>
           <a:xfrm>
-            <a:off x="8647200" y="5580000"/>
+            <a:off x="8647200" y="5292000"/>
             <a:ext cx="5400000" cy="1584000"/>
           </a:xfrm>
           <a:prstGeom prst="rect">
@@ -4999,7 +4999,7 @@
         </p:nvSpPr>
         <p:spPr>
           <a:xfrm>
-            <a:off x="8647200" y="5580000"/>
+            <a:off x="8647200" y="5292000"/>
             <a:ext cx="5400000" cy="50400"/>
           </a:xfrm>
           <a:prstGeom prst="rect">
@@ -5043,8 +5043,8 @@
         </p:nvSpPr>
         <p:spPr>
           <a:xfrm>
-            <a:off x="8827200" y="5742000"/>
-            <a:ext cx="1440000" cy="288000"/>
+            <a:off x="8827200" y="5436000"/>
+            <a:ext cx="936000" cy="360000"/>
           </a:xfrm>
           <a:prstGeom prst="rect">
             <a:avLst/>
@@ -5059,14 +5059,14 @@
           <a:p>
             <a:pPr algn="l">
               <a:lnSpc>
-                <a:spcPct val="120000"/>
+                <a:spcPct val="102000"/>
               </a:lnSpc>
               <a:spcAft>
                 <a:spcPts val="0"/>
               </a:spcAft>
             </a:pPr>
             <a:r>
-              <a:rPr sz="1764" b="1" i="0">
+              <a:rPr sz="2600" b="1" i="0">
                 <a:solidFill>
                   <a:srgbClr val="1F5FD6"/>
                 </a:solidFill>
@@ -5085,8 +5085,8 @@
         </p:nvSpPr>
         <p:spPr>
           <a:xfrm>
-            <a:off x="8827200" y="6084000"/>
-            <a:ext cx="2520000" cy="504000"/>
+            <a:off x="9799200" y="5526000"/>
+            <a:ext cx="1548000" cy="324000"/>
           </a:xfrm>
           <a:prstGeom prst="rect">
             <a:avLst/>
@@ -5101,20 +5101,20 @@
           <a:p>
             <a:pPr algn="l">
               <a:lnSpc>
-                <a:spcPct val="132000"/>
+                <a:spcPct val="102000"/>
               </a:lnSpc>
               <a:spcAft>
                 <a:spcPts val="0"/>
               </a:spcAft>
             </a:pPr>
             <a:r>
-              <a:rPr sz="1271" b="1" i="0">
-                <a:solidFill>
-                  <a:srgbClr val="141E41"/>
+              <a:rPr sz="1800" b="0" i="0">
+                <a:solidFill>
+                  <a:srgbClr val="5D6787"/>
                 </a:solidFill>
                 <a:latin typeface="Arial"/>
               </a:rPr>
-              <a:t>the screenshot only</a:t>
+              <a:t>3,123 tokens</a:t>
             </a:r>
           </a:p>
         </p:txBody>
@@ -5127,8 +5127,8 @@
         </p:nvSpPr>
         <p:spPr>
           <a:xfrm>
-            <a:off x="8827200" y="6624000"/>
-            <a:ext cx="2520000" cy="432000"/>
+            <a:off x="8827200" y="5868000"/>
+            <a:ext cx="2520000" cy="936000"/>
           </a:xfrm>
           <a:prstGeom prst="rect">
             <a:avLst/>
@@ -5143,20 +5143,20 @@
           <a:p>
             <a:pPr algn="l">
               <a:lnSpc>
-                <a:spcPct val="132000"/>
+                <a:spcPct val="108000"/>
               </a:lnSpc>
               <a:spcAft>
                 <a:spcPts val="0"/>
               </a:spcAft>
             </a:pPr>
             <a:r>
-              <a:rPr sz="1271" b="0" i="0">
-                <a:solidFill>
-                  <a:srgbClr val="5D6787"/>
+              <a:rPr sz="1900" b="1" i="0">
+                <a:solidFill>
+                  <a:srgbClr val="141E41"/>
                 </a:solidFill>
                 <a:latin typeface="Arial"/>
               </a:rPr>
-              <a:t>3,123 tokens on this page</a:t>
+              <a:t>screenshot only</a:t>
             </a:r>
           </a:p>
         </p:txBody>
@@ -5169,7 +5169,7 @@
         </p:nvSpPr>
         <p:spPr>
           <a:xfrm>
-            <a:off x="11476800" y="5709600"/>
+            <a:off x="11476800" y="5421600"/>
             <a:ext cx="2404800" cy="1357875"/>
           </a:xfrm>
           <a:prstGeom prst="rect">
@@ -5221,7 +5221,7 @@
         </p:blipFill>
         <p:spPr>
           <a:xfrm>
-            <a:off x="11491200" y="5724000"/>
+            <a:off x="11491200" y="5436000"/>
             <a:ext cx="2376000" cy="1329075"/>
           </a:xfrm>
           <a:prstGeom prst="rect">
@@ -5237,7 +5237,7 @@
         </p:nvSpPr>
         <p:spPr>
           <a:xfrm>
-            <a:off x="8647200" y="7308000"/>
+            <a:off x="8647200" y="7020000"/>
             <a:ext cx="5400000" cy="1584000"/>
           </a:xfrm>
           <a:prstGeom prst="rect">
@@ -5283,7 +5283,7 @@
         </p:nvSpPr>
         <p:spPr>
           <a:xfrm>
-            <a:off x="8647200" y="7308000"/>
+            <a:off x="8647200" y="7020000"/>
             <a:ext cx="5400000" cy="50400"/>
           </a:xfrm>
           <a:prstGeom prst="rect">
@@ -5327,8 +5327,8 @@
         </p:nvSpPr>
         <p:spPr>
           <a:xfrm>
-            <a:off x="8827200" y="7470000"/>
-            <a:ext cx="1440000" cy="288000"/>
+            <a:off x="8827200" y="7164000"/>
+            <a:ext cx="936000" cy="360000"/>
           </a:xfrm>
           <a:prstGeom prst="rect">
             <a:avLst/>
@@ -5343,14 +5343,14 @@
           <a:p>
             <a:pPr algn="l">
               <a:lnSpc>
-                <a:spcPct val="120000"/>
+                <a:spcPct val="102000"/>
               </a:lnSpc>
               <a:spcAft>
                 <a:spcPts val="0"/>
               </a:spcAft>
             </a:pPr>
             <a:r>
-              <a:rPr sz="1764" b="1" i="0">
+              <a:rPr sz="2600" b="1" i="0">
                 <a:solidFill>
                   <a:srgbClr val="E8720C"/>
                 </a:solidFill>
@@ -5369,8 +5369,8 @@
         </p:nvSpPr>
         <p:spPr>
           <a:xfrm>
-            <a:off x="8827200" y="7812000"/>
-            <a:ext cx="2520000" cy="504000"/>
+            <a:off x="9799200" y="7254000"/>
+            <a:ext cx="1548000" cy="324000"/>
           </a:xfrm>
           <a:prstGeom prst="rect">
             <a:avLst/>
@@ -5385,20 +5385,20 @@
           <a:p>
             <a:pPr algn="l">
               <a:lnSpc>
-                <a:spcPct val="132000"/>
+                <a:spcPct val="102000"/>
               </a:lnSpc>
               <a:spcAft>
                 <a:spcPts val="0"/>
               </a:spcAft>
             </a:pPr>
             <a:r>
-              <a:rPr sz="1271" b="1" i="0">
-                <a:solidFill>
-                  <a:srgbClr val="141E41"/>
+              <a:rPr sz="1800" b="0" i="0">
+                <a:solidFill>
+                  <a:srgbClr val="5D6787"/>
                 </a:solidFill>
                 <a:latin typeface="Arial"/>
               </a:rPr>
-              <a:t>the page as text: its elements and labels</a:t>
+              <a:t>3,314 tokens</a:t>
             </a:r>
           </a:p>
         </p:txBody>
@@ -5411,8 +5411,8 @@
         </p:nvSpPr>
         <p:spPr>
           <a:xfrm>
-            <a:off x="8827200" y="8352000"/>
-            <a:ext cx="2520000" cy="432000"/>
+            <a:off x="8827200" y="7596000"/>
+            <a:ext cx="2520000" cy="936000"/>
           </a:xfrm>
           <a:prstGeom prst="rect">
             <a:avLst/>
@@ -5427,20 +5427,20 @@
           <a:p>
             <a:pPr algn="l">
               <a:lnSpc>
-                <a:spcPct val="132000"/>
+                <a:spcPct val="108000"/>
               </a:lnSpc>
               <a:spcAft>
                 <a:spcPts val="0"/>
               </a:spcAft>
             </a:pPr>
             <a:r>
-              <a:rPr sz="1271" b="0" i="0">
-                <a:solidFill>
-                  <a:srgbClr val="5D6787"/>
+              <a:rPr sz="1900" b="1" i="0">
+                <a:solidFill>
+                  <a:srgbClr val="141E41"/>
                 </a:solidFill>
                 <a:latin typeface="Arial"/>
               </a:rPr>
-              <a:t>3,314 tokens · +3 text-only variants</a:t>
+              <a:t>page elements and labels as text, plus 3 more text-only views</a:t>
             </a:r>
           </a:p>
         </p:txBody>
@@ -5453,7 +5453,7 @@
         </p:nvSpPr>
         <p:spPr>
           <a:xfrm>
-            <a:off x="11491200" y="7452000"/>
+            <a:off x="11491200" y="7164000"/>
             <a:ext cx="2376000" cy="1328400"/>
           </a:xfrm>
           <a:prstGeom prst="rect">
@@ -5499,7 +5499,7 @@
         </p:nvSpPr>
         <p:spPr>
           <a:xfrm>
-            <a:off x="11563200" y="7524000"/>
+            <a:off x="11563200" y="7236000"/>
             <a:ext cx="2232000" cy="1188000"/>
           </a:xfrm>
           <a:prstGeom prst="rect">
@@ -5522,7 +5522,7 @@
               </a:spcAft>
             </a:pPr>
             <a:r>
-              <a:rPr sz="750" b="0" i="0">
+              <a:rPr sz="900" b="0" i="0">
                 <a:solidFill>
                   <a:srgbClr val="12162E"/>
                 </a:solidFill>
@@ -5541,7 +5541,7 @@
               </a:spcAft>
             </a:pPr>
             <a:r>
-              <a:rPr sz="750" b="0" i="0">
+              <a:rPr sz="900" b="0" i="0">
                 <a:solidFill>
                   <a:srgbClr val="12162E"/>
                 </a:solidFill>
@@ -5560,7 +5560,7 @@
               </a:spcAft>
             </a:pPr>
             <a:r>
-              <a:rPr sz="750" b="0" i="0">
+              <a:rPr sz="900" b="0" i="0">
                 <a:solidFill>
                   <a:srgbClr val="12162E"/>
                 </a:solidFill>
@@ -5579,7 +5579,7 @@
               </a:spcAft>
             </a:pPr>
             <a:r>
-              <a:rPr sz="750" b="0" i="0">
+              <a:rPr sz="900" b="0" i="0">
                 <a:solidFill>
                   <a:srgbClr val="12162E"/>
                 </a:solidFill>
@@ -5598,7 +5598,7 @@
               </a:spcAft>
             </a:pPr>
             <a:r>
-              <a:rPr sz="750" b="0" i="0">
+              <a:rPr sz="900" b="0" i="0">
                 <a:solidFill>
                   <a:srgbClr val="12162E"/>
                 </a:solidFill>
@@ -5617,7 +5617,7 @@
               </a:spcAft>
             </a:pPr>
             <a:r>
-              <a:rPr sz="750" b="0" i="0">
+              <a:rPr sz="900" b="0" i="0">
                 <a:solidFill>
                   <a:srgbClr val="12162E"/>
                 </a:solidFill>
@@ -5636,7 +5636,7 @@
         </p:nvSpPr>
         <p:spPr>
           <a:xfrm>
-            <a:off x="8647200" y="9036000"/>
+            <a:off x="8647200" y="8748000"/>
             <a:ext cx="5400000" cy="1584000"/>
           </a:xfrm>
           <a:prstGeom prst="rect">
@@ -5682,7 +5682,7 @@
         </p:nvSpPr>
         <p:spPr>
           <a:xfrm>
-            <a:off x="8647200" y="9036000"/>
+            <a:off x="8647200" y="8748000"/>
             <a:ext cx="5400000" cy="50400"/>
           </a:xfrm>
           <a:prstGeom prst="rect">
@@ -5726,8 +5726,8 @@
         </p:nvSpPr>
         <p:spPr>
           <a:xfrm>
-            <a:off x="8827200" y="9198000"/>
-            <a:ext cx="1440000" cy="288000"/>
+            <a:off x="8827200" y="8892000"/>
+            <a:ext cx="936000" cy="360000"/>
           </a:xfrm>
           <a:prstGeom prst="rect">
             <a:avLst/>
@@ -5742,14 +5742,14 @@
           <a:p>
             <a:pPr algn="l">
               <a:lnSpc>
-                <a:spcPct val="120000"/>
+                <a:spcPct val="102000"/>
               </a:lnSpc>
               <a:spcAft>
                 <a:spcPts val="0"/>
               </a:spcAft>
             </a:pPr>
             <a:r>
-              <a:rPr sz="1764" b="1" i="0">
+              <a:rPr sz="2600" b="1" i="0">
                 <a:solidFill>
                   <a:srgbClr val="14855F"/>
                 </a:solidFill>
@@ -5768,8 +5768,8 @@
         </p:nvSpPr>
         <p:spPr>
           <a:xfrm>
-            <a:off x="8827200" y="9540000"/>
-            <a:ext cx="2520000" cy="504000"/>
+            <a:off x="9799200" y="8982000"/>
+            <a:ext cx="1548000" cy="324000"/>
           </a:xfrm>
           <a:prstGeom prst="rect">
             <a:avLst/>
@@ -5784,20 +5784,20 @@
           <a:p>
             <a:pPr algn="l">
               <a:lnSpc>
-                <a:spcPct val="132000"/>
+                <a:spcPct val="102000"/>
               </a:lnSpc>
               <a:spcAft>
                 <a:spcPts val="0"/>
               </a:spcAft>
             </a:pPr>
             <a:r>
-              <a:rPr sz="1271" b="1" i="0">
-                <a:solidFill>
-                  <a:srgbClr val="141E41"/>
+              <a:rPr sz="1800" b="0" i="0">
+                <a:solidFill>
+                  <a:srgbClr val="5D6787"/>
                 </a:solidFill>
                 <a:latin typeface="Arial"/>
               </a:rPr>
-              <a:t>the screenshot with numbered boxes, plus the text</a:t>
+              <a:t>4,335 tokens</a:t>
             </a:r>
           </a:p>
         </p:txBody>
@@ -5810,8 +5810,8 @@
         </p:nvSpPr>
         <p:spPr>
           <a:xfrm>
-            <a:off x="8827200" y="10080000"/>
-            <a:ext cx="2520000" cy="432000"/>
+            <a:off x="8827200" y="9324000"/>
+            <a:ext cx="2520000" cy="936000"/>
           </a:xfrm>
           <a:prstGeom prst="rect">
             <a:avLst/>
@@ -5826,20 +5826,20 @@
           <a:p>
             <a:pPr algn="l">
               <a:lnSpc>
-                <a:spcPct val="132000"/>
+                <a:spcPct val="108000"/>
               </a:lnSpc>
               <a:spcAft>
                 <a:spcPts val="0"/>
               </a:spcAft>
             </a:pPr>
             <a:r>
-              <a:rPr sz="1271" b="0" i="0">
-                <a:solidFill>
-                  <a:srgbClr val="5D6787"/>
+              <a:rPr sz="1900" b="1" i="0">
+                <a:solidFill>
+                  <a:srgbClr val="141E41"/>
                 </a:solidFill>
                 <a:latin typeface="Arial"/>
               </a:rPr>
-              <a:t>4,335 tokens</a:t>
+              <a:t>numbered screenshot + page text</a:t>
             </a:r>
           </a:p>
         </p:txBody>
@@ -5852,7 +5852,7 @@
         </p:nvSpPr>
         <p:spPr>
           <a:xfrm>
-            <a:off x="11476800" y="9165600"/>
+            <a:off x="11476800" y="8877600"/>
             <a:ext cx="2404800" cy="1357875"/>
           </a:xfrm>
           <a:prstGeom prst="rect">
@@ -5904,7 +5904,7 @@
         </p:blipFill>
         <p:spPr>
           <a:xfrm>
-            <a:off x="11491200" y="9180000"/>
+            <a:off x="11491200" y="8892000"/>
             <a:ext cx="2376000" cy="1329075"/>
           </a:xfrm>
           <a:prstGeom prst="rect">
@@ -5920,8 +5920,8 @@
         </p:nvSpPr>
         <p:spPr>
           <a:xfrm>
-            <a:off x="14551200" y="5580000"/>
-            <a:ext cx="3168000" cy="5040000"/>
+            <a:off x="14551200" y="5292000"/>
+            <a:ext cx="2880000" cy="5040000"/>
           </a:xfrm>
           <a:prstGeom prst="rect">
             <a:avLst/>
@@ -5966,8 +5966,8 @@
         </p:nvSpPr>
         <p:spPr>
           <a:xfrm>
-            <a:off x="14551200" y="5580000"/>
-            <a:ext cx="3168000" cy="50400"/>
+            <a:off x="14551200" y="5292000"/>
+            <a:ext cx="2880000" cy="50400"/>
           </a:xfrm>
           <a:prstGeom prst="rect">
             <a:avLst/>
@@ -6010,8 +6010,8 @@
         </p:nvSpPr>
         <p:spPr>
           <a:xfrm>
-            <a:off x="14731200" y="5724000"/>
-            <a:ext cx="2808000" cy="216000"/>
+            <a:off x="14731200" y="5436000"/>
+            <a:ext cx="2520000" cy="270000"/>
           </a:xfrm>
           <a:prstGeom prst="rect">
             <a:avLst/>
@@ -6026,20 +6026,20 @@
           <a:p>
             <a:pPr algn="l">
               <a:lnSpc>
-                <a:spcPct val="120000"/>
+                <a:spcPct val="102000"/>
               </a:lnSpc>
               <a:spcAft>
                 <a:spcPts val="0"/>
               </a:spcAft>
             </a:pPr>
             <a:r>
-              <a:rPr sz="1059" b="0" i="0">
+              <a:rPr sz="1550" b="0" i="0">
                 <a:solidFill>
                   <a:srgbClr val="5D6787"/>
                 </a:solidFill>
                 <a:latin typeface="Consolas"/>
               </a:rPr>
-              <a:t>THE AGENT, ONE STEP AT A TIME</a:t>
+              <a:t>THE AGENT · EACH STEP</a:t>
             </a:r>
           </a:p>
         </p:txBody>
@@ -6052,8 +6052,8 @@
         </p:nvSpPr>
         <p:spPr>
           <a:xfrm>
-            <a:off x="14731200" y="5958000"/>
-            <a:ext cx="2808000" cy="322781"/>
+            <a:off x="14731200" y="5724000"/>
+            <a:ext cx="2520000" cy="450799"/>
           </a:xfrm>
           <a:prstGeom prst="rect">
             <a:avLst/>
@@ -6068,14 +6068,14 @@
           <a:p>
             <a:pPr algn="l">
               <a:lnSpc>
-                <a:spcPct val="120000"/>
+                <a:spcPct val="102000"/>
               </a:lnSpc>
               <a:spcAft>
-                <a:spcPts val="992"/>
+                <a:spcPts val="623"/>
               </a:spcAft>
             </a:pPr>
             <a:r>
-              <a:rPr sz="1764" b="1" i="0">
+              <a:rPr sz="2900" b="1" i="0">
                 <a:solidFill>
                   <a:srgbClr val="12162E"/>
                 </a:solidFill>
@@ -6094,8 +6094,8 @@
         </p:nvSpPr>
         <p:spPr>
           <a:xfrm>
-            <a:off x="14731200" y="6352781"/>
-            <a:ext cx="2808000" cy="255684"/>
+            <a:off x="14731200" y="6282799"/>
+            <a:ext cx="2520000" cy="790041"/>
           </a:xfrm>
           <a:prstGeom prst="rect">
             <a:avLst/>
@@ -6110,14 +6110,14 @@
           <a:p>
             <a:pPr algn="l">
               <a:lnSpc>
-                <a:spcPct val="132000"/>
+                <a:spcPct val="108000"/>
               </a:lnSpc>
               <a:spcAft>
                 <a:spcPts val="425"/>
               </a:spcAft>
             </a:pPr>
             <a:r>
-              <a:rPr sz="1271" b="0" i="0">
+              <a:rPr sz="2400" b="0" i="0">
                 <a:solidFill>
                   <a:srgbClr val="5D6787"/>
                 </a:solidFill>
@@ -6136,8 +6136,8 @@
         </p:nvSpPr>
         <p:spPr>
           <a:xfrm>
-            <a:off x="14731200" y="6752465"/>
-            <a:ext cx="2808000" cy="767053"/>
+            <a:off x="14731200" y="7288840"/>
+            <a:ext cx="2520000" cy="2370124"/>
           </a:xfrm>
           <a:prstGeom prst="rect">
             <a:avLst/>
@@ -6152,14 +6152,14 @@
           <a:p>
             <a:pPr algn="l">
               <a:lnSpc>
-                <a:spcPct val="132000"/>
+                <a:spcPct val="108000"/>
               </a:lnSpc>
               <a:spcAft>
                 <a:spcPts val="425"/>
               </a:spcAft>
             </a:pPr>
             <a:r>
-              <a:rPr sz="1271" b="0" i="0">
+              <a:rPr sz="2400" b="0" i="0">
                 <a:solidFill>
                   <a:srgbClr val="12162E"/>
                 </a:solidFill>
@@ -6178,8 +6178,8 @@
         </p:nvSpPr>
         <p:spPr>
           <a:xfrm>
-            <a:off x="18223200" y="5580000"/>
-            <a:ext cx="2566800" cy="5040000"/>
+            <a:off x="17935200" y="5292000"/>
+            <a:ext cx="2854800" cy="5040000"/>
           </a:xfrm>
           <a:prstGeom prst="rect">
             <a:avLst/>
@@ -6224,8 +6224,8 @@
         </p:nvSpPr>
         <p:spPr>
           <a:xfrm>
-            <a:off x="18223200" y="5580000"/>
-            <a:ext cx="2566800" cy="50400"/>
+            <a:off x="17935200" y="5292000"/>
+            <a:ext cx="2854800" cy="50400"/>
           </a:xfrm>
           <a:prstGeom prst="rect">
             <a:avLst/>
@@ -6268,8 +6268,8 @@
         </p:nvSpPr>
         <p:spPr>
           <a:xfrm>
-            <a:off x="18403200" y="5724000"/>
-            <a:ext cx="2206800" cy="216000"/>
+            <a:off x="18115200" y="5436000"/>
+            <a:ext cx="2494800" cy="270000"/>
           </a:xfrm>
           <a:prstGeom prst="rect">
             <a:avLst/>
@@ -6284,14 +6284,14 @@
           <a:p>
             <a:pPr algn="l">
               <a:lnSpc>
-                <a:spcPct val="120000"/>
+                <a:spcPct val="102000"/>
               </a:lnSpc>
               <a:spcAft>
                 <a:spcPts val="0"/>
               </a:spcAft>
             </a:pPr>
             <a:r>
-              <a:rPr sz="1059" b="0" i="0">
+              <a:rPr sz="1550" b="0" i="0">
                 <a:solidFill>
                   <a:srgbClr val="5D6787"/>
                 </a:solidFill>
@@ -6310,8 +6310,8 @@
         </p:nvSpPr>
         <p:spPr>
           <a:xfrm>
-            <a:off x="18403200" y="5958000"/>
-            <a:ext cx="2206800" cy="771563"/>
+            <a:off x="18115200" y="5724000"/>
+            <a:ext cx="2494800" cy="794260"/>
           </a:xfrm>
           <a:prstGeom prst="rect">
             <a:avLst/>
@@ -6326,14 +6326,14 @@
           <a:p>
             <a:pPr algn="l">
               <a:lnSpc>
-                <a:spcPct val="120000"/>
+                <a:spcPct val="102000"/>
               </a:lnSpc>
               <a:spcAft>
-                <a:spcPts val="992"/>
+                <a:spcPts val="623"/>
               </a:spcAft>
             </a:pPr>
             <a:r>
-              <a:rPr sz="1764" b="1" i="0">
+              <a:rPr sz="2300" b="1" i="0">
                 <a:solidFill>
                   <a:srgbClr val="12162E"/>
                 </a:solidFill>
@@ -6345,14 +6345,14 @@
           <a:p>
             <a:pPr algn="l">
               <a:lnSpc>
-                <a:spcPct val="120000"/>
+                <a:spcPct val="102000"/>
               </a:lnSpc>
               <a:spcAft>
-                <a:spcPts val="992"/>
+                <a:spcPts val="623"/>
               </a:spcAft>
             </a:pPr>
             <a:r>
-              <a:rPr sz="1764" b="1" i="0">
+              <a:rPr sz="2300" b="1" i="0">
                 <a:solidFill>
                   <a:srgbClr val="12162E"/>
                 </a:solidFill>
@@ -6371,8 +6371,8 @@
         </p:nvSpPr>
         <p:spPr>
           <a:xfrm>
-            <a:off x="18403200" y="6801563"/>
-            <a:ext cx="2206800" cy="1022738"/>
+            <a:off x="18115200" y="6698260"/>
+            <a:ext cx="2494800" cy="2765145"/>
           </a:xfrm>
           <a:prstGeom prst="rect">
             <a:avLst/>
@@ -6387,14 +6387,14 @@
           <a:p>
             <a:pPr algn="l">
               <a:lnSpc>
-                <a:spcPct val="132000"/>
+                <a:spcPct val="108000"/>
               </a:lnSpc>
               <a:spcAft>
                 <a:spcPts val="425"/>
               </a:spcAft>
             </a:pPr>
             <a:r>
-              <a:rPr sz="1271" b="0" i="0">
+              <a:rPr sz="2400" b="0" i="0">
                 <a:solidFill>
                   <a:srgbClr val="5D6787"/>
                 </a:solidFill>
@@ -6413,7 +6413,7 @@
         </p:nvSpPr>
         <p:spPr>
           <a:xfrm>
-            <a:off x="16113600" y="10620000"/>
+            <a:off x="15969600" y="10332000"/>
             <a:ext cx="43200" cy="432000"/>
           </a:xfrm>
           <a:prstGeom prst="rect">
@@ -6457,8 +6457,8 @@
         </p:nvSpPr>
         <p:spPr>
           <a:xfrm>
-            <a:off x="2239200" y="11030400"/>
-            <a:ext cx="13896000" cy="43200"/>
+            <a:off x="2239200" y="10742400"/>
+            <a:ext cx="13752000" cy="43200"/>
           </a:xfrm>
           <a:prstGeom prst="rect">
             <a:avLst/>
@@ -6501,7 +6501,7 @@
         </p:nvSpPr>
         <p:spPr>
           <a:xfrm>
-            <a:off x="2217600" y="10764000"/>
+            <a:off x="2217600" y="10476000"/>
             <a:ext cx="43200" cy="288000"/>
           </a:xfrm>
           <a:prstGeom prst="rect">
@@ -6545,7 +6545,7 @@
         </p:nvSpPr>
         <p:spPr>
           <a:xfrm>
-            <a:off x="2131200" y="10620000"/>
+            <a:off x="2131200" y="10332000"/>
             <a:ext cx="216000" cy="162000"/>
           </a:xfrm>
           <a:prstGeom prst="triangle">
@@ -6589,8 +6589,8 @@
         </p:nvSpPr>
         <p:spPr>
           <a:xfrm>
-            <a:off x="2599200" y="11124000"/>
-            <a:ext cx="13176000" cy="252000"/>
+            <a:off x="2599200" y="10818000"/>
+            <a:ext cx="13032000" cy="324000"/>
           </a:xfrm>
           <a:prstGeom prst="rect">
             <a:avLst/>
@@ -6605,14 +6605,14 @@
           <a:p>
             <a:pPr algn="ctr">
               <a:lnSpc>
-                <a:spcPct val="120000"/>
+                <a:spcPct val="102000"/>
               </a:lnSpc>
               <a:spcAft>
                 <a:spcPts val="0"/>
               </a:spcAft>
             </a:pPr>
             <a:r>
-              <a:rPr sz="1271" b="0" i="0">
+              <a:rPr sz="2000" b="0" i="0">
                 <a:solidFill>
                   <a:srgbClr val="5D6787"/>
                 </a:solidFill>
@@ -6631,8 +6631,8 @@
         </p:nvSpPr>
         <p:spPr>
           <a:xfrm>
-            <a:off x="727200" y="11412000"/>
-            <a:ext cx="20062800" cy="255684"/>
+            <a:off x="727200" y="11160000"/>
+            <a:ext cx="20062800" cy="279806"/>
           </a:xfrm>
           <a:prstGeom prst="rect">
             <a:avLst/>
@@ -6647,14 +6647,14 @@
           <a:p>
             <a:pPr algn="l">
               <a:lnSpc>
-                <a:spcPct val="132000"/>
+                <a:spcPct val="108000"/>
               </a:lnSpc>
               <a:spcAft>
                 <a:spcPts val="425"/>
               </a:spcAft>
             </a:pPr>
             <a:r>
-              <a:rPr sz="1271" b="1" i="0">
+              <a:rPr sz="1700" b="1" i="0">
                 <a:solidFill>
                   <a:srgbClr val="5D6787"/>
                 </a:solidFill>
@@ -6663,16 +6663,16 @@
               <a:t>Fig 1.</a:t>
             </a:r>
             <a:r>
-              <a:rPr sz="1271" b="0" i="0">
+              <a:rPr sz="1700" b="0" i="0">
                 <a:solidFill>
                   <a:srgbClr val="5D6787"/>
                 </a:solidFill>
                 <a:latin typeface="Arial"/>
               </a:rPr>
-              <a:t> Everything is held fixed except how the page is shown. The dashed box is what this work measures — one fixed view, perfect hindsight, or a choice a model had to learn — each judged on </a:t>
-            </a:r>
-            <a:r>
-              <a:rPr sz="1271" b="1" i="0">
+              <a:t> Only the page view changes. The dashed box is what we measure: one fixed view, perfect hindsight, or a learned choice, each judged on </a:t>
+            </a:r>
+            <a:r>
+              <a:rPr sz="1700" b="1" i="0">
                 <a:solidFill>
                   <a:srgbClr val="5D6787"/>
                 </a:solidFill>
@@ -6681,13 +6681,13 @@
               <a:t>both</a:t>
             </a:r>
             <a:r>
-              <a:rPr sz="1271" b="0" i="0">
+              <a:rPr sz="1700" b="0" i="0">
                 <a:solidFill>
                   <a:srgbClr val="5D6787"/>
                 </a:solidFill>
                 <a:latin typeface="Arial"/>
               </a:rPr>
-              <a:t> success and cost. The laptop beside this poster replays the loop on three tasks.</a:t>
+              <a:t> success and cost.</a:t>
             </a:r>
           </a:p>
         </p:txBody>
@@ -6700,7 +6700,7 @@
         </p:nvSpPr>
         <p:spPr>
           <a:xfrm>
-            <a:off x="727200" y="11991684"/>
+            <a:off x="727200" y="11655806"/>
             <a:ext cx="177988" cy="177988"/>
           </a:xfrm>
           <a:prstGeom prst="rect">
@@ -6745,7 +6745,7 @@
         </p:nvSpPr>
         <p:spPr>
           <a:xfrm>
-            <a:off x="1032323" y="11948484"/>
+            <a:off x="1032323" y="11612606"/>
             <a:ext cx="6144827" cy="238912"/>
           </a:xfrm>
           <a:prstGeom prst="rect">
@@ -6765,7 +6765,7 @@
               </a:lnSpc>
             </a:pPr>
             <a:r>
-              <a:rPr sz="1412" b="1" i="0">
+              <a:rPr sz="1750" b="1" i="0">
                 <a:solidFill>
                   <a:srgbClr val="141E41"/>
                 </a:solidFill>
@@ -6790,7 +6790,7 @@
         </p:nvSpPr>
         <p:spPr>
           <a:xfrm>
-            <a:off x="727200" y="12309520"/>
+            <a:off x="727200" y="11973642"/>
             <a:ext cx="1169636" cy="35597"/>
           </a:xfrm>
           <a:prstGeom prst="rect">
@@ -6835,7 +6835,7 @@
         </p:nvSpPr>
         <p:spPr>
           <a:xfrm>
-            <a:off x="1896836" y="12319691"/>
+            <a:off x="1896836" y="11983813"/>
             <a:ext cx="18893164" cy="15256"/>
           </a:xfrm>
           <a:prstGeom prst="rect">
@@ -6880,8 +6880,8 @@
         </p:nvSpPr>
         <p:spPr>
           <a:xfrm>
-            <a:off x="727200" y="12531684"/>
-            <a:ext cx="20062800" cy="1170000"/>
+            <a:off x="727200" y="12195806"/>
+            <a:ext cx="20062800" cy="1386000"/>
           </a:xfrm>
           <a:prstGeom prst="rect">
             <a:avLst/>
@@ -6924,8 +6924,8 @@
         </p:nvSpPr>
         <p:spPr>
           <a:xfrm>
-            <a:off x="979200" y="12711684"/>
-            <a:ext cx="6519600" cy="612000"/>
+            <a:off x="979200" y="12339806"/>
+            <a:ext cx="6519600" cy="756000"/>
           </a:xfrm>
           <a:prstGeom prst="rect">
             <a:avLst/>
@@ -6947,7 +6947,7 @@
               </a:spcAft>
             </a:pPr>
             <a:r>
-              <a:rPr sz="3247" b="1" i="0">
+              <a:rPr sz="4200" b="1" i="0">
                 <a:solidFill>
                   <a:srgbClr val="141E41"/>
                 </a:solidFill>
@@ -6966,8 +6966,50 @@
         </p:nvSpPr>
         <p:spPr>
           <a:xfrm>
-            <a:off x="979200" y="13269684"/>
-            <a:ext cx="6519600" cy="324000"/>
+            <a:off x="979200" y="13095806"/>
+            <a:ext cx="6519600" cy="396000"/>
+          </a:xfrm>
+          <a:prstGeom prst="rect">
+            <a:avLst/>
+          </a:prstGeom>
+          <a:noFill/>
+        </p:spPr>
+        <p:txBody>
+          <a:bodyPr wrap="square" lIns="0" rIns="0" tIns="0" bIns="0">
+            <a:spAutoFit/>
+          </a:bodyPr>
+          <a:lstStyle/>
+          <a:p>
+            <a:pPr algn="l">
+              <a:lnSpc>
+                <a:spcPct val="108000"/>
+              </a:lnSpc>
+              <a:spcAft>
+                <a:spcPts val="0"/>
+              </a:spcAft>
+            </a:pPr>
+            <a:r>
+              <a:rPr sz="1500" b="0" i="0">
+                <a:solidFill>
+                  <a:srgbClr val="5D6787"/>
+                </a:solidFill>
+                <a:latin typeface="Consolas"/>
+              </a:rPr>
+              <a:t>PERFECT HINDSIGHT · SUCCESS ONLY · VS ONE FIXED VIEW</a:t>
+            </a:r>
+          </a:p>
+        </p:txBody>
+      </p:sp>
+      <p:sp>
+        <p:nvSpPr>
+          <p:cNvPr id="141" name="TextBox 140"/>
+          <p:cNvSpPr txBox="1"/>
+          <p:nvPr/>
+        </p:nvSpPr>
+        <p:spPr>
+          <a:xfrm>
+            <a:off x="7498800" y="12339806"/>
+            <a:ext cx="6519600" cy="756000"/>
           </a:xfrm>
           <a:prstGeom prst="rect">
             <a:avLst/>
@@ -6989,27 +7031,69 @@
               </a:spcAft>
             </a:pPr>
             <a:r>
-              <a:rPr sz="1059" b="0" i="0">
+              <a:rPr sz="4200" b="1" i="0">
+                <a:solidFill>
+                  <a:srgbClr val="141E41"/>
+                </a:solidFill>
+                <a:latin typeface="Consolas"/>
+              </a:rPr>
+              <a:t>0 of 8</a:t>
+            </a:r>
+          </a:p>
+        </p:txBody>
+      </p:sp>
+      <p:sp>
+        <p:nvSpPr>
+          <p:cNvPr id="142" name="TextBox 141"/>
+          <p:cNvSpPr txBox="1"/>
+          <p:nvPr/>
+        </p:nvSpPr>
+        <p:spPr>
+          <a:xfrm>
+            <a:off x="7498800" y="13095806"/>
+            <a:ext cx="6519600" cy="396000"/>
+          </a:xfrm>
+          <a:prstGeom prst="rect">
+            <a:avLst/>
+          </a:prstGeom>
+          <a:noFill/>
+        </p:spPr>
+        <p:txBody>
+          <a:bodyPr wrap="square" lIns="0" rIns="0" tIns="0" bIns="0">
+            <a:spAutoFit/>
+          </a:bodyPr>
+          <a:lstStyle/>
+          <a:p>
+            <a:pPr algn="l">
+              <a:lnSpc>
+                <a:spcPct val="108000"/>
+              </a:lnSpc>
+              <a:spcAft>
+                <a:spcPts val="0"/>
+              </a:spcAft>
+            </a:pPr>
+            <a:r>
+              <a:rPr sz="1500" b="0" i="0">
                 <a:solidFill>
                   <a:srgbClr val="5D6787"/>
                 </a:solidFill>
                 <a:latin typeface="Consolas"/>
               </a:rPr>
-              <a:t>PERFECT HINDSIGHT, SUCCESS ONLY, BEST OF 8 · VS ONE FIXED VIEW</a:t>
-            </a:r>
-          </a:p>
-        </p:txBody>
-      </p:sp>
-      <p:sp>
-        <p:nvSpPr>
-          <p:cNvPr id="141" name="TextBox 140"/>
+              <a:t>LEARNED CHOICES THAT WON ON SUCCESS AND COST</a:t>
+            </a:r>
+          </a:p>
+        </p:txBody>
+      </p:sp>
+      <p:sp>
+        <p:nvSpPr>
+          <p:cNvPr id="143" name="TextBox 142"/>
           <p:cNvSpPr txBox="1"/>
           <p:nvPr/>
         </p:nvSpPr>
         <p:spPr>
           <a:xfrm>
-            <a:off x="7498800" y="12711684"/>
-            <a:ext cx="6519600" cy="612000"/>
+            <a:off x="14018400" y="12339806"/>
+            <a:ext cx="6519600" cy="756000"/>
           </a:xfrm>
           <a:prstGeom prst="rect">
             <a:avLst/>
@@ -7031,27 +7115,27 @@
               </a:spcAft>
             </a:pPr>
             <a:r>
-              <a:rPr sz="3247" b="1" i="0">
+              <a:rPr sz="4200" b="1" i="0">
                 <a:solidFill>
                   <a:srgbClr val="141E41"/>
                 </a:solidFill>
                 <a:latin typeface="Consolas"/>
               </a:rPr>
-              <a:t>0 of 8</a:t>
-            </a:r>
-          </a:p>
-        </p:txBody>
-      </p:sp>
-      <p:sp>
-        <p:nvSpPr>
-          <p:cNvPr id="142" name="TextBox 141"/>
+              <a:t>1 of 8</a:t>
+            </a:r>
+          </a:p>
+        </p:txBody>
+      </p:sp>
+      <p:sp>
+        <p:nvSpPr>
+          <p:cNvPr id="144" name="TextBox 143"/>
           <p:cNvSpPr txBox="1"/>
           <p:nvPr/>
         </p:nvSpPr>
         <p:spPr>
           <a:xfrm>
-            <a:off x="7498800" y="13269684"/>
-            <a:ext cx="6519600" cy="324000"/>
+            <a:off x="14018400" y="13095806"/>
+            <a:ext cx="6519600" cy="396000"/>
           </a:xfrm>
           <a:prstGeom prst="rect">
             <a:avLst/>
@@ -7066,34 +7150,34 @@
           <a:p>
             <a:pPr algn="l">
               <a:lnSpc>
-                <a:spcPct val="118000"/>
+                <a:spcPct val="108000"/>
               </a:lnSpc>
               <a:spcAft>
                 <a:spcPts val="0"/>
               </a:spcAft>
             </a:pPr>
             <a:r>
-              <a:rPr sz="1059" b="0" i="0">
+              <a:rPr sz="1500" b="0" i="0">
                 <a:solidFill>
                   <a:srgbClr val="5D6787"/>
                 </a:solidFill>
                 <a:latin typeface="Consolas"/>
               </a:rPr>
-              <a:t>SETTINGS WHERE A LEARNED CHOICE WON ON BOTH SUCCESS AND COST</a:t>
-            </a:r>
-          </a:p>
-        </p:txBody>
-      </p:sp>
-      <p:sp>
-        <p:nvSpPr>
-          <p:cNvPr id="143" name="TextBox 142"/>
+              <a:t>HINDSIGHT CHOICES THAT WON ON SUCCESS AND COST</a:t>
+            </a:r>
+          </a:p>
+        </p:txBody>
+      </p:sp>
+      <p:sp>
+        <p:nvSpPr>
+          <p:cNvPr id="145" name="TextBox 144"/>
           <p:cNvSpPr txBox="1"/>
           <p:nvPr/>
         </p:nvSpPr>
         <p:spPr>
           <a:xfrm>
-            <a:off x="14018400" y="12711684"/>
-            <a:ext cx="6519600" cy="612000"/>
+            <a:off x="727200" y="13725806"/>
+            <a:ext cx="6543600" cy="559612"/>
           </a:xfrm>
           <a:prstGeom prst="rect">
             <a:avLst/>
@@ -7108,98 +7192,14 @@
           <a:p>
             <a:pPr algn="l">
               <a:lnSpc>
-                <a:spcPct val="118000"/>
-              </a:lnSpc>
-              <a:spcAft>
-                <a:spcPts val="0"/>
-              </a:spcAft>
-            </a:pPr>
-            <a:r>
-              <a:rPr sz="3247" b="1" i="0">
-                <a:solidFill>
-                  <a:srgbClr val="141E41"/>
-                </a:solidFill>
-                <a:latin typeface="Consolas"/>
-              </a:rPr>
-              <a:t>1 of 8</a:t>
-            </a:r>
-          </a:p>
-        </p:txBody>
-      </p:sp>
-      <p:sp>
-        <p:nvSpPr>
-          <p:cNvPr id="144" name="TextBox 143"/>
-          <p:cNvSpPr txBox="1"/>
-          <p:nvPr/>
-        </p:nvSpPr>
-        <p:spPr>
-          <a:xfrm>
-            <a:off x="14018400" y="13269684"/>
-            <a:ext cx="6519600" cy="324000"/>
-          </a:xfrm>
-          <a:prstGeom prst="rect">
-            <a:avLst/>
-          </a:prstGeom>
-          <a:noFill/>
-        </p:spPr>
-        <p:txBody>
-          <a:bodyPr wrap="square" lIns="0" rIns="0" tIns="0" bIns="0">
-            <a:spAutoFit/>
-          </a:bodyPr>
-          <a:lstStyle/>
-          <a:p>
-            <a:pPr algn="l">
-              <a:lnSpc>
-                <a:spcPct val="118000"/>
-              </a:lnSpc>
-              <a:spcAft>
-                <a:spcPts val="0"/>
-              </a:spcAft>
-            </a:pPr>
-            <a:r>
-              <a:rPr sz="1059" b="0" i="0">
-                <a:solidFill>
-                  <a:srgbClr val="5D6787"/>
-                </a:solidFill>
-                <a:latin typeface="Consolas"/>
-              </a:rPr>
-              <a:t>SETTINGS WHERE PERFECT HINDSIGHT WON ON BOTH SUCCESS AND COST</a:t>
-            </a:r>
-          </a:p>
-        </p:txBody>
-      </p:sp>
-      <p:sp>
-        <p:nvSpPr>
-          <p:cNvPr id="145" name="TextBox 144"/>
-          <p:cNvSpPr txBox="1"/>
-          <p:nvPr/>
-        </p:nvSpPr>
-        <p:spPr>
-          <a:xfrm>
-            <a:off x="727200" y="13845684"/>
-            <a:ext cx="6543600" cy="511369"/>
-          </a:xfrm>
-          <a:prstGeom prst="rect">
-            <a:avLst/>
-          </a:prstGeom>
-          <a:noFill/>
-        </p:spPr>
-        <p:txBody>
-          <a:bodyPr wrap="square" lIns="0" rIns="0" tIns="0" bIns="0">
-            <a:spAutoFit/>
-          </a:bodyPr>
-          <a:lstStyle/>
-          <a:p>
-            <a:pPr algn="l">
-              <a:lnSpc>
-                <a:spcPct val="132000"/>
+                <a:spcPct val="108000"/>
               </a:lnSpc>
               <a:spcAft>
                 <a:spcPts val="425"/>
               </a:spcAft>
             </a:pPr>
             <a:r>
-              <a:rPr sz="1271" b="1" i="0">
+              <a:rPr sz="1700" b="1" i="0">
                 <a:solidFill>
                   <a:srgbClr val="12162E"/>
                 </a:solidFill>
@@ -7208,13 +7208,13 @@
               <a:t>ONE FIXED VIEW</a:t>
             </a:r>
             <a:r>
-              <a:rPr sz="1271" b="0" i="0">
+              <a:rPr sz="1700" b="0" i="0">
                 <a:solidFill>
                   <a:srgbClr val="12162E"/>
                 </a:solidFill>
                 <a:latin typeface="Arial"/>
               </a:rPr>
-              <a:t> — the single view that solves most tasks in a setting, used for every task.</a:t>
+              <a:t> — the highest-success view in a setting, used for every task.</a:t>
             </a:r>
           </a:p>
         </p:txBody>
@@ -7227,8 +7227,8 @@
         </p:nvSpPr>
         <p:spPr>
           <a:xfrm>
-            <a:off x="7486800" y="13845684"/>
-            <a:ext cx="6543600" cy="511369"/>
+            <a:off x="7486800" y="13725806"/>
+            <a:ext cx="6543600" cy="839419"/>
           </a:xfrm>
           <a:prstGeom prst="rect">
             <a:avLst/>
@@ -7243,14 +7243,14 @@
           <a:p>
             <a:pPr algn="l">
               <a:lnSpc>
-                <a:spcPct val="132000"/>
+                <a:spcPct val="108000"/>
               </a:lnSpc>
               <a:spcAft>
                 <a:spcPts val="425"/>
               </a:spcAft>
             </a:pPr>
             <a:r>
-              <a:rPr sz="1271" b="1" i="0">
+              <a:rPr sz="1700" b="1" i="0">
                 <a:solidFill>
                   <a:srgbClr val="12162E"/>
                 </a:solidFill>
@@ -7259,22 +7259,22 @@
               <a:t>ALWAYS-CHEAPEST</a:t>
             </a:r>
             <a:r>
-              <a:rPr sz="1271" b="0" i="0">
+              <a:rPr sz="1700" b="0" i="0">
                 <a:solidFill>
                   <a:srgbClr val="12162E"/>
                 </a:solidFill>
                 <a:latin typeface="Arial"/>
               </a:rPr>
-              <a:t> — the single view that costs least on average in a setting, used for every task. </a:t>
-            </a:r>
-            <a:r>
-              <a:rPr sz="1271" b="1" i="0">
+              <a:t> — the lowest-average-cost view in a setting, used for every task. </a:t>
+            </a:r>
+            <a:r>
+              <a:rPr sz="1700" b="1" i="0">
                 <a:solidFill>
                   <a:srgbClr val="12162E"/>
                 </a:solidFill>
                 <a:latin typeface="Arial"/>
               </a:rPr>
-              <a:t>“Won” above = beat this rule on both success and cost.</a:t>
+              <a:t>“Won” = beat it on both success and cost.</a:t>
             </a:r>
           </a:p>
         </p:txBody>
@@ -7287,8 +7287,8 @@
         </p:nvSpPr>
         <p:spPr>
           <a:xfrm>
-            <a:off x="14246400" y="13845684"/>
-            <a:ext cx="6543600" cy="767053"/>
+            <a:off x="14246400" y="13725806"/>
+            <a:ext cx="6543600" cy="839419"/>
           </a:xfrm>
           <a:prstGeom prst="rect">
             <a:avLst/>
@@ -7303,14 +7303,14 @@
           <a:p>
             <a:pPr algn="l">
               <a:lnSpc>
-                <a:spcPct val="132000"/>
+                <a:spcPct val="108000"/>
               </a:lnSpc>
               <a:spcAft>
                 <a:spcPts val="425"/>
               </a:spcAft>
             </a:pPr>
             <a:r>
-              <a:rPr sz="1271" b="1" i="0">
+              <a:rPr sz="1700" b="1" i="0">
                 <a:solidFill>
                   <a:srgbClr val="12162E"/>
                 </a:solidFill>
@@ -7319,13 +7319,13 @@
               <a:t>PERFECT HINDSIGHT</a:t>
             </a:r>
             <a:r>
-              <a:rPr sz="1271" b="0" i="0">
+              <a:rPr sz="1700" b="0" i="0">
                 <a:solidFill>
                   <a:srgbClr val="12162E"/>
                 </a:solidFill>
                 <a:latin typeface="Arial"/>
               </a:rPr>
-              <a:t> — for each task, the view that solved it, picked after the fact. An optimistic bound: rerunning one unchanged view flips 10–14% of outcomes and by itself gains 2.0–7.6 tasks in 100.</a:t>
+              <a:t> — after each task, select a view that solved it. Optimistic: rerunning one unchanged view flips 10–14% of outcomes and gains 2.0–7.6 tasks in 100 by itself.</a:t>
             </a:r>
           </a:p>
         </p:txBody>
@@ -7338,8 +7338,8 @@
         </p:nvSpPr>
         <p:spPr>
           <a:xfrm>
-            <a:off x="727200" y="14936737"/>
-            <a:ext cx="6451200" cy="1634345"/>
+            <a:off x="727200" y="14781225"/>
+            <a:ext cx="6451200" cy="2114121"/>
           </a:xfrm>
           <a:prstGeom prst="rect">
             <a:avLst/>
@@ -7382,8 +7382,8 @@
         </p:nvSpPr>
         <p:spPr>
           <a:xfrm>
-            <a:off x="727200" y="14936737"/>
-            <a:ext cx="86400" cy="1634345"/>
+            <a:off x="727200" y="14781225"/>
+            <a:ext cx="86400" cy="2114121"/>
           </a:xfrm>
           <a:prstGeom prst="rect">
             <a:avLst/>
@@ -7426,8 +7426,8 @@
         </p:nvSpPr>
         <p:spPr>
           <a:xfrm>
-            <a:off x="943200" y="15116737"/>
-            <a:ext cx="6019200" cy="216000"/>
+            <a:off x="943200" y="14961225"/>
+            <a:ext cx="6019200" cy="270000"/>
           </a:xfrm>
           <a:prstGeom prst="rect">
             <a:avLst/>
@@ -7442,14 +7442,14 @@
           <a:p>
             <a:pPr algn="l">
               <a:lnSpc>
-                <a:spcPct val="120000"/>
+                <a:spcPct val="102000"/>
               </a:lnSpc>
               <a:spcAft>
                 <a:spcPts val="0"/>
               </a:spcAft>
             </a:pPr>
             <a:r>
-              <a:rPr sz="1059" b="0" i="0">
+              <a:rPr sz="1550" b="0" i="0">
                 <a:solidFill>
                   <a:srgbClr val="5049F9"/>
                 </a:solidFill>
@@ -7468,8 +7468,8 @@
         </p:nvSpPr>
         <p:spPr>
           <a:xfrm>
-            <a:off x="943200" y="15350737"/>
-            <a:ext cx="6019200" cy="968345"/>
+            <a:off x="943200" y="15249225"/>
+            <a:ext cx="6019200" cy="1430121"/>
           </a:xfrm>
           <a:prstGeom prst="rect">
             <a:avLst/>
@@ -7484,20 +7484,20 @@
           <a:p>
             <a:pPr algn="l">
               <a:lnSpc>
-                <a:spcPct val="120000"/>
+                <a:spcPct val="102000"/>
               </a:lnSpc>
               <a:spcAft>
-                <a:spcPts val="992"/>
+                <a:spcPts val="623"/>
               </a:spcAft>
             </a:pPr>
             <a:r>
-              <a:rPr sz="1764" b="1" i="0">
+              <a:rPr sz="2300" b="1" i="0">
                 <a:solidFill>
                   <a:srgbClr val="12162E"/>
                 </a:solidFill>
                 <a:latin typeface="Arial"/>
               </a:rPr>
-              <a:t>The agents that would gain most from choosing a view solve the fewest tasks — so they produce the fewest examples to learn the choice from.</a:t>
+              <a:t>The agents that gain most from choosing a view solve the fewest tasks — so they produce the fewest examples to learn from.</a:t>
             </a:r>
           </a:p>
         </p:txBody>
@@ -7510,7 +7510,7 @@
         </p:nvSpPr>
         <p:spPr>
           <a:xfrm>
-            <a:off x="727200" y="16859082"/>
+            <a:off x="727200" y="17075346"/>
             <a:ext cx="177988" cy="177988"/>
           </a:xfrm>
           <a:prstGeom prst="rect">
@@ -7555,7 +7555,7 @@
         </p:nvSpPr>
         <p:spPr>
           <a:xfrm>
-            <a:off x="1032323" y="16815882"/>
+            <a:off x="1032323" y="17032146"/>
             <a:ext cx="6144827" cy="238912"/>
           </a:xfrm>
           <a:prstGeom prst="rect">
@@ -7575,7 +7575,7 @@
               </a:lnSpc>
             </a:pPr>
             <a:r>
-              <a:rPr sz="1412" b="1" i="0">
+              <a:rPr sz="1750" b="1" i="0">
                 <a:solidFill>
                   <a:srgbClr val="141E41"/>
                 </a:solidFill>
@@ -7600,7 +7600,7 @@
         </p:nvSpPr>
         <p:spPr>
           <a:xfrm>
-            <a:off x="727200" y="17176918"/>
+            <a:off x="727200" y="17393182"/>
             <a:ext cx="1169636" cy="35597"/>
           </a:xfrm>
           <a:prstGeom prst="rect">
@@ -7645,7 +7645,7 @@
         </p:nvSpPr>
         <p:spPr>
           <a:xfrm>
-            <a:off x="1896836" y="17187089"/>
+            <a:off x="1896836" y="17403353"/>
             <a:ext cx="5281564" cy="15256"/>
           </a:xfrm>
           <a:prstGeom prst="rect">
@@ -7690,8 +7690,8 @@
         </p:nvSpPr>
         <p:spPr>
           <a:xfrm>
-            <a:off x="727200" y="17399082"/>
-            <a:ext cx="6451200" cy="1613908"/>
+            <a:off x="727200" y="17615346"/>
+            <a:ext cx="6451200" cy="1787652"/>
           </a:xfrm>
           <a:prstGeom prst="rect">
             <a:avLst/>
@@ -7706,23 +7706,23 @@
           <a:p>
             <a:pPr algn="l">
               <a:lnSpc>
-                <a:spcPct val="120000"/>
+                <a:spcPct val="102000"/>
               </a:lnSpc>
               <a:spcAft>
-                <a:spcPts val="992"/>
+                <a:spcPts val="623"/>
               </a:spcAft>
             </a:pPr>
             <a:r>
-              <a:rPr sz="1764" b="0" i="0">
+              <a:rPr sz="2300" b="0" i="0">
                 <a:solidFill>
                   <a:srgbClr val="12162E"/>
                 </a:solidFill>
                 <a:latin typeface="Arial"/>
               </a:rPr>
-              <a:t>A training example for “which view” exists only when the agent solves a task. Here the best single view solves just </a:t>
-            </a:r>
-            <a:r>
-              <a:rPr sz="1764" b="1" i="0">
+              <a:t>A “which view?” label exists only after a solved task. The best fixed view solves just </a:t>
+            </a:r>
+            <a:r>
+              <a:rPr sz="2300" b="1" i="0">
                 <a:solidFill>
                   <a:srgbClr val="12162E"/>
                 </a:solidFill>
@@ -7731,16 +7731,16 @@
               <a:t>2–36%</a:t>
             </a:r>
             <a:r>
-              <a:rPr sz="1764" b="0" i="0">
+              <a:rPr sz="2300" b="0" i="0">
                 <a:solidFill>
                   <a:srgbClr val="12162E"/>
                 </a:solidFill>
                 <a:latin typeface="Arial"/>
               </a:rPr>
-              <a:t> of tasks, leaving typically </a:t>
-            </a:r>
-            <a:r>
-              <a:rPr sz="1764" b="1" i="0">
+              <a:t>, leaving </a:t>
+            </a:r>
+            <a:r>
+              <a:rPr sz="2300" b="1" i="0">
                 <a:solidFill>
                   <a:srgbClr val="12162E"/>
                 </a:solidFill>
@@ -7749,13 +7749,13 @@
               <a:t>15–97</a:t>
             </a:r>
             <a:r>
-              <a:rPr sz="1764" b="0" i="0">
+              <a:rPr sz="2300" b="0" i="0">
                 <a:solidFill>
                   <a:srgbClr val="12162E"/>
                 </a:solidFill>
                 <a:latin typeface="Arial"/>
               </a:rPr>
-              <a:t> usable examples per setting — enough to train a classifier in only 2 of the 6 VisualWebArena settings.</a:t>
+              <a:t> usable labels per setting. Only 2 of 6 VisualWebArena settings have enough to train a classifier.</a:t>
             </a:r>
           </a:p>
         </p:txBody>
@@ -7768,8 +7768,8 @@
         </p:nvSpPr>
         <p:spPr>
           <a:xfrm>
-            <a:off x="727200" y="19156990"/>
-            <a:ext cx="6451200" cy="3742028"/>
+            <a:off x="727200" y="19474998"/>
+            <a:ext cx="6451200" cy="3717049"/>
           </a:xfrm>
           <a:prstGeom prst="rect">
             <a:avLst/>
@@ -7814,7 +7814,7 @@
         </p:nvSpPr>
         <p:spPr>
           <a:xfrm>
-            <a:off x="727200" y="19156990"/>
+            <a:off x="727200" y="19474998"/>
             <a:ext cx="6451200" cy="50400"/>
           </a:xfrm>
           <a:prstGeom prst="rect">
@@ -7866,8 +7866,8 @@
         </p:blipFill>
         <p:spPr>
           <a:xfrm>
-            <a:off x="835200" y="19315390"/>
-            <a:ext cx="6235200" cy="3475629"/>
+            <a:off x="835200" y="19633398"/>
+            <a:ext cx="6235200" cy="3450648"/>
           </a:xfrm>
           <a:prstGeom prst="rect">
             <a:avLst/>
@@ -7882,8 +7882,8 @@
         </p:nvSpPr>
         <p:spPr>
           <a:xfrm>
-            <a:off x="727200" y="22989018"/>
-            <a:ext cx="6451200" cy="511369"/>
+            <a:off x="727200" y="23282047"/>
+            <a:ext cx="6451200" cy="559612"/>
           </a:xfrm>
           <a:prstGeom prst="rect">
             <a:avLst/>
@@ -7898,14 +7898,14 @@
           <a:p>
             <a:pPr algn="l">
               <a:lnSpc>
-                <a:spcPct val="132000"/>
+                <a:spcPct val="108000"/>
               </a:lnSpc>
               <a:spcAft>
                 <a:spcPts val="425"/>
               </a:spcAft>
             </a:pPr>
             <a:r>
-              <a:rPr sz="1271" b="1" i="0">
+              <a:rPr sz="1700" b="1" i="0">
                 <a:solidFill>
                   <a:srgbClr val="5D6787"/>
                 </a:solidFill>
@@ -7914,13 +7914,13 @@
               <a:t>Fig 3.</a:t>
             </a:r>
             <a:r>
-              <a:rPr sz="1271" b="0" i="0">
+              <a:rPr sz="1700" b="0" i="0">
                 <a:solidFill>
                   <a:srgbClr val="5D6787"/>
                 </a:solidFill>
                 <a:latin typeface="Arial"/>
               </a:rPr>
-              <a:t> Usable “which view” examples against the best single view's success rate, one point per VisualWebArena setting. Examples exist only where tasks get solved.</a:t>
+              <a:t> Usable “which view?” labels against best-fixed-view success, one point per VisualWebArena setting.</a:t>
             </a:r>
           </a:p>
         </p:txBody>
@@ -7933,8 +7933,8 @@
         </p:nvSpPr>
         <p:spPr>
           <a:xfrm>
-            <a:off x="727200" y="23608387"/>
-            <a:ext cx="6451200" cy="968345"/>
+            <a:off x="727200" y="23949659"/>
+            <a:ext cx="6451200" cy="1072591"/>
           </a:xfrm>
           <a:prstGeom prst="rect">
             <a:avLst/>
@@ -7949,23 +7949,23 @@
           <a:p>
             <a:pPr algn="l">
               <a:lnSpc>
-                <a:spcPct val="120000"/>
+                <a:spcPct val="102000"/>
               </a:lnSpc>
               <a:spcAft>
-                <a:spcPts val="992"/>
+                <a:spcPts val="623"/>
               </a:spcAft>
             </a:pPr>
             <a:r>
-              <a:rPr sz="1764" b="0" i="0">
+              <a:rPr sz="2300" b="0" i="0">
                 <a:solidFill>
                   <a:srgbClr val="12162E"/>
                 </a:solidFill>
                 <a:latin typeface="Arial"/>
               </a:rPr>
-              <a:t>Shrinking the training data on purpose points to scarcity as the main bottleneck, and prices it: the failing settings would need at least </a:t>
-            </a:r>
-            <a:r>
-              <a:rPr sz="1764" b="1" i="0">
+              <a:t>Deliberately shrinking the training data points to scarcity: failing settings need at least </a:t>
+            </a:r>
+            <a:r>
+              <a:rPr sz="2300" b="1" i="0">
                 <a:solidFill>
                   <a:srgbClr val="12162E"/>
                 </a:solidFill>
@@ -7974,7 +7974,7 @@
               <a:t>2.1–4.2×</a:t>
             </a:r>
             <a:r>
-              <a:rPr sz="1764" b="0" i="0">
+              <a:rPr sz="2300" b="0" i="0">
                 <a:solidFill>
                   <a:srgbClr val="12162E"/>
                 </a:solidFill>
@@ -7993,7 +7993,7 @@
         </p:nvSpPr>
         <p:spPr>
           <a:xfrm>
-            <a:off x="727200" y="24828732"/>
+            <a:off x="727200" y="25166250"/>
             <a:ext cx="177988" cy="177988"/>
           </a:xfrm>
           <a:prstGeom prst="rect">
@@ -8038,7 +8038,7 @@
         </p:nvSpPr>
         <p:spPr>
           <a:xfrm>
-            <a:off x="1032323" y="24785532"/>
+            <a:off x="1032323" y="25123050"/>
             <a:ext cx="6144827" cy="238912"/>
           </a:xfrm>
           <a:prstGeom prst="rect">
@@ -8058,7 +8058,7 @@
               </a:lnSpc>
             </a:pPr>
             <a:r>
-              <a:rPr sz="1412" b="1" i="0">
+              <a:rPr sz="1750" b="1" i="0">
                 <a:solidFill>
                   <a:srgbClr val="141E41"/>
                 </a:solidFill>
@@ -8083,7 +8083,7 @@
         </p:nvSpPr>
         <p:spPr>
           <a:xfrm>
-            <a:off x="727200" y="25146568"/>
+            <a:off x="727200" y="25484086"/>
             <a:ext cx="1169636" cy="35597"/>
           </a:xfrm>
           <a:prstGeom prst="rect">
@@ -8128,7 +8128,7 @@
         </p:nvSpPr>
         <p:spPr>
           <a:xfrm>
-            <a:off x="1896836" y="25156739"/>
+            <a:off x="1896836" y="25494257"/>
             <a:ext cx="5281564" cy="15256"/>
           </a:xfrm>
           <a:prstGeom prst="rect">
@@ -8173,8 +8173,8 @@
         </p:nvSpPr>
         <p:spPr>
           <a:xfrm>
-            <a:off x="727200" y="25368732"/>
-            <a:ext cx="6451200" cy="1613908"/>
+            <a:off x="727200" y="25706250"/>
+            <a:ext cx="6451200" cy="1787652"/>
           </a:xfrm>
           <a:prstGeom prst="rect">
             <a:avLst/>
@@ -8189,29 +8189,29 @@
           <a:p>
             <a:pPr algn="l">
               <a:lnSpc>
-                <a:spcPct val="120000"/>
+                <a:spcPct val="102000"/>
               </a:lnSpc>
               <a:spcAft>
-                <a:spcPts val="992"/>
+                <a:spcPts val="623"/>
               </a:spcAft>
             </a:pPr>
             <a:r>
-              <a:rPr sz="1764" b="1" i="0">
+              <a:rPr sz="2300" b="1" i="0">
                 <a:solidFill>
                   <a:srgbClr val="12162E"/>
                 </a:solidFill>
                 <a:latin typeface="Arial"/>
               </a:rPr>
-              <a:t>Learning how to see is not only a modelling problem: whether it can be learned depends on how good the agent producing the examples already is.</a:t>
-            </a:r>
-            <a:r>
-              <a:rPr sz="1764" b="0" i="0">
+              <a:t>Learning how to see is not only a modelling problem. It depends on how good the agent producing the examples already is.</a:t>
+            </a:r>
+            <a:r>
+              <a:rPr sz="2300" b="0" i="0">
                 <a:solidFill>
                   <a:srgbClr val="12162E"/>
                 </a:solidFill>
                 <a:latin typeface="Arial"/>
               </a:rPr>
-              <a:t> So, in this order: improve the agent, then collect reliable examples, then learn when to look.</a:t>
+              <a:t> Improve the agent, collect reliable examples, then learn when to look.</a:t>
             </a:r>
           </a:p>
         </p:txBody>
@@ -8224,8 +8224,8 @@
         </p:nvSpPr>
         <p:spPr>
           <a:xfrm>
-            <a:off x="727200" y="27036640"/>
-            <a:ext cx="6451200" cy="511369"/>
+            <a:off x="727200" y="27529902"/>
+            <a:ext cx="6451200" cy="559612"/>
           </a:xfrm>
           <a:prstGeom prst="rect">
             <a:avLst/>
@@ -8240,14 +8240,14 @@
           <a:p>
             <a:pPr algn="l">
               <a:lnSpc>
-                <a:spcPct val="132000"/>
+                <a:spcPct val="108000"/>
               </a:lnSpc>
               <a:spcAft>
                 <a:spcPts val="425"/>
               </a:spcAft>
             </a:pPr>
             <a:r>
-              <a:rPr sz="1271" b="0" i="0">
+              <a:rPr sz="1700" b="0" i="0">
                 <a:solidFill>
                   <a:srgbClr val="5D6787"/>
                 </a:solidFill>
@@ -8266,8 +8266,8 @@
         </p:nvSpPr>
         <p:spPr>
           <a:xfrm>
-            <a:off x="7534800" y="14936737"/>
-            <a:ext cx="13255200" cy="6678484"/>
+            <a:off x="7534800" y="14781225"/>
+            <a:ext cx="13255200" cy="6125976"/>
           </a:xfrm>
           <a:prstGeom prst="rect">
             <a:avLst/>
@@ -8312,7 +8312,7 @@
         </p:nvSpPr>
         <p:spPr>
           <a:xfrm>
-            <a:off x="7534800" y="14936737"/>
+            <a:off x="7534800" y="14781225"/>
             <a:ext cx="13255200" cy="50400"/>
           </a:xfrm>
           <a:prstGeom prst="rect">
@@ -8364,8 +8364,8 @@
         </p:blipFill>
         <p:spPr>
           <a:xfrm>
-            <a:off x="7642800" y="15095137"/>
-            <a:ext cx="13039200" cy="6412084"/>
+            <a:off x="7642800" y="14939625"/>
+            <a:ext cx="13039200" cy="5859577"/>
           </a:xfrm>
           <a:prstGeom prst="rect">
             <a:avLst/>
@@ -8380,8 +8380,8 @@
         </p:nvSpPr>
         <p:spPr>
           <a:xfrm>
-            <a:off x="7534800" y="21705221"/>
-            <a:ext cx="13255200" cy="511369"/>
+            <a:off x="7534800" y="20997201"/>
+            <a:ext cx="13255200" cy="559612"/>
           </a:xfrm>
           <a:prstGeom prst="rect">
             <a:avLst/>
@@ -8396,14 +8396,14 @@
           <a:p>
             <a:pPr algn="l">
               <a:lnSpc>
-                <a:spcPct val="132000"/>
+                <a:spcPct val="108000"/>
               </a:lnSpc>
               <a:spcAft>
                 <a:spcPts val="425"/>
               </a:spcAft>
             </a:pPr>
             <a:r>
-              <a:rPr sz="1271" b="1" i="0">
+              <a:rPr sz="1700" b="1" i="0">
                 <a:solidFill>
                   <a:srgbClr val="5D6787"/>
                 </a:solidFill>
@@ -8412,16 +8412,16 @@
               <a:t>Fig 2.</a:t>
             </a:r>
             <a:r>
-              <a:rPr sz="1271" b="0" i="0">
+              <a:rPr sz="1700" b="0" i="0">
                 <a:solidFill>
                   <a:srgbClr val="5D6787"/>
                 </a:solidFill>
                 <a:latin typeface="Arial"/>
               </a:rPr>
-              <a:t> Every way of choosing a view, in every setting, compared with one fixed rule: </a:t>
-            </a:r>
-            <a:r>
-              <a:rPr sz="1271" b="1" i="0">
+              <a:t> Every choice is compared with </a:t>
+            </a:r>
+            <a:r>
+              <a:rPr sz="1700" b="1" i="0">
                 <a:solidFill>
                   <a:srgbClr val="5D6787"/>
                 </a:solidFill>
@@ -8430,31 +8430,13 @@
               <a:t>always use the cheapest view</a:t>
             </a:r>
             <a:r>
-              <a:rPr sz="1271" b="0" i="0">
+              <a:rPr sz="1700" b="0" i="0">
                 <a:solidFill>
                   <a:srgbClr val="5D6787"/>
                 </a:solidFill>
                 <a:latin typeface="Arial"/>
               </a:rPr>
-              <a:t> (★). A win lands in the shaded region — cheaper </a:t>
-            </a:r>
-            <a:r>
-              <a:rPr sz="1271" b="0" i="1">
-                <a:solidFill>
-                  <a:srgbClr val="5D6787"/>
-                </a:solidFill>
-                <a:latin typeface="Arial"/>
-              </a:rPr>
-              <a:t>and</a:t>
-            </a:r>
-            <a:r>
-              <a:rPr sz="1271" b="0" i="0">
-                <a:solidFill>
-                  <a:srgbClr val="5D6787"/>
-                </a:solidFill>
-                <a:latin typeface="Arial"/>
-              </a:rPr>
-              <a:t> no worse. Always-cheapest is cheapest on average, not on every task, which is why a few points sit left of it. Learned choices are scored only on tasks they never saw.</a:t>
+              <a:t> (★). A win lands in the shaded region: cheaper and no worse. Cheapest means lowest average cost, so some points sit left of ★. Learned choices use held-out tasks.</a:t>
             </a:r>
           </a:p>
         </p:txBody>
@@ -8467,8 +8449,8 @@
         </p:nvSpPr>
         <p:spPr>
           <a:xfrm>
-            <a:off x="7534800" y="22324590"/>
-            <a:ext cx="13255200" cy="2188690"/>
+            <a:off x="7534800" y="21664813"/>
+            <a:ext cx="13255200" cy="2661112"/>
           </a:xfrm>
           <a:prstGeom prst="rect">
             <a:avLst/>
@@ -8483,14 +8465,14 @@
           <a:p>
             <a:pPr algn="l">
               <a:lnSpc>
-                <a:spcPct val="120000"/>
+                <a:spcPct val="102000"/>
               </a:lnSpc>
               <a:spcAft>
-                <a:spcPts val="992"/>
+                <a:spcPts val="623"/>
               </a:spcAft>
             </a:pPr>
             <a:r>
-              <a:rPr sz="1764" b="1" i="0">
+              <a:rPr sz="2300" b="1" i="0">
                 <a:solidFill>
                   <a:srgbClr val="12162E"/>
                 </a:solidFill>
@@ -8499,44 +8481,44 @@
               <a:t>Perfect hindsight would pay.</a:t>
             </a:r>
             <a:r>
-              <a:rPr sz="1764" b="0" i="0">
+              <a:rPr sz="2300" b="0" i="0">
                 <a:solidFill>
                   <a:srgbClr val="12162E"/>
                 </a:solidFill>
                 <a:latin typeface="Arial"/>
               </a:rPr>
-              <a:t> Picking the winning view for each task after the fact would solve </a:t>
-            </a:r>
-            <a:r>
-              <a:rPr sz="1764" b="1" i="0">
+              <a:t> After-the-fact selection solves </a:t>
+            </a:r>
+            <a:r>
+              <a:rPr sz="2300" b="1" i="0">
                 <a:solidFill>
                   <a:srgbClr val="12162E"/>
                 </a:solidFill>
                 <a:latin typeface="Arial"/>
               </a:rPr>
-              <a:t>3.45 to 16.35 more tasks in every 100</a:t>
-            </a:r>
-            <a:r>
-              <a:rPr sz="1764" b="0" i="0">
+              <a:t>3.45–16.35 more tasks in 100</a:t>
+            </a:r>
+            <a:r>
+              <a:rPr sz="2300" b="0" i="0">
                 <a:solidFill>
                   <a:srgbClr val="12162E"/>
                 </a:solidFill>
                 <a:latin typeface="Arial"/>
               </a:rPr>
-              <a:t> than the best single view, and spend 1.6–35.3% less — in all 8 settings.</a:t>
+              <a:t> than the best fixed view and spends 1.6–35.3% less, in all 8 settings.</a:t>
             </a:r>
           </a:p>
           <a:p>
             <a:pPr algn="l">
               <a:lnSpc>
-                <a:spcPct val="120000"/>
+                <a:spcPct val="102000"/>
               </a:lnSpc>
               <a:spcAft>
-                <a:spcPts val="992"/>
+                <a:spcPts val="623"/>
               </a:spcAft>
             </a:pPr>
             <a:r>
-              <a:rPr sz="1764" b="1" i="0">
+              <a:rPr sz="2300" b="1" i="0">
                 <a:solidFill>
                   <a:srgbClr val="12162E"/>
                 </a:solidFill>
@@ -8545,7 +8527,7 @@
               <a:t>Nothing we trained could do it.</a:t>
             </a:r>
             <a:r>
-              <a:rPr sz="1764" b="0" i="0">
+              <a:rPr sz="2300" b="0" i="0">
                 <a:solidFill>
                   <a:srgbClr val="12162E"/>
                 </a:solidFill>
@@ -8554,7 +8536,7 @@
               <a:t> In </a:t>
             </a:r>
             <a:r>
-              <a:rPr sz="1764" b="1" i="0">
+              <a:rPr sz="2300" b="1" i="0">
                 <a:solidFill>
                   <a:srgbClr val="12162E"/>
                 </a:solidFill>
@@ -8563,16 +8545,16 @@
               <a:t>0 of 8</a:t>
             </a:r>
             <a:r>
-              <a:rPr sz="1764" b="0" i="0">
+              <a:rPr sz="2300" b="0" i="0">
                 <a:solidFill>
                   <a:srgbClr val="12162E"/>
                 </a:solidFill>
                 <a:latin typeface="Arial"/>
               </a:rPr>
-              <a:t> settings did a learned choice beat always using the cheapest view on both success and cost — and even perfect hindsight manages that in only </a:t>
-            </a:r>
-            <a:r>
-              <a:rPr sz="1764" b="1" i="0">
+              <a:t> settings did a learned choice beat always-cheapest on both success and cost. Hindsight does so in only </a:t>
+            </a:r>
+            <a:r>
+              <a:rPr sz="2300" b="1" i="0">
                 <a:solidFill>
                   <a:srgbClr val="12162E"/>
                 </a:solidFill>
@@ -8581,7 +8563,7 @@
               <a:t>1 of 8</a:t>
             </a:r>
             <a:r>
-              <a:rPr sz="1764" b="0" i="0">
+              <a:rPr sz="2300" b="0" i="0">
                 <a:solidFill>
                   <a:srgbClr val="12162E"/>
                 </a:solidFill>
@@ -8593,14 +8575,14 @@
           <a:p>
             <a:pPr algn="l">
               <a:lnSpc>
-                <a:spcPct val="120000"/>
+                <a:spcPct val="102000"/>
               </a:lnSpc>
               <a:spcAft>
-                <a:spcPts val="992"/>
+                <a:spcPts val="623"/>
               </a:spcAft>
             </a:pPr>
             <a:r>
-              <a:rPr sz="1764" b="1" i="0">
+              <a:rPr sz="2300" b="1" i="0">
                 <a:solidFill>
                   <a:srgbClr val="12162E"/>
                 </a:solidFill>
@@ -8609,13 +8591,13 @@
               <a:t>What survives is a bound, not a method.</a:t>
             </a:r>
             <a:r>
-              <a:rPr sz="1764" b="0" i="0">
+              <a:rPr sz="2300" b="0" i="0">
                 <a:solidFill>
                   <a:srgbClr val="12162E"/>
                 </a:solidFill>
                 <a:latin typeface="Arial"/>
               </a:rPr>
-              <a:t> Sending the tasks nobody solves to the cheapest view saves 9.5–30.6% at the same success in 8 of 8 — but that too needs hindsight, and plain always-cheapest usually saves more.</a:t>
+              <a:t> Sending never-solved tasks to the cheapest view saves 9.5–30.6% at equal success in 8 of 8, but needs hindsight; plain always-cheapest usually saves more.</a:t>
             </a:r>
           </a:p>
         </p:txBody>
@@ -8628,7 +8610,7 @@
         </p:nvSpPr>
         <p:spPr>
           <a:xfrm>
-            <a:off x="7534800" y="24693280"/>
+            <a:off x="7534800" y="24541925"/>
             <a:ext cx="177988" cy="177988"/>
           </a:xfrm>
           <a:prstGeom prst="rect">
@@ -8673,7 +8655,7 @@
         </p:nvSpPr>
         <p:spPr>
           <a:xfrm>
-            <a:off x="7839923" y="24650080"/>
+            <a:off x="7839923" y="24498725"/>
             <a:ext cx="6144827" cy="238912"/>
           </a:xfrm>
           <a:prstGeom prst="rect">
@@ -8693,7 +8675,7 @@
               </a:lnSpc>
             </a:pPr>
             <a:r>
-              <a:rPr sz="1412" b="1" i="0">
+              <a:rPr sz="1750" b="1" i="0">
                 <a:solidFill>
                   <a:srgbClr val="141E41"/>
                 </a:solidFill>
@@ -8718,7 +8700,7 @@
         </p:nvSpPr>
         <p:spPr>
           <a:xfrm>
-            <a:off x="7534800" y="25011116"/>
+            <a:off x="7534800" y="24859761"/>
             <a:ext cx="1169636" cy="35597"/>
           </a:xfrm>
           <a:prstGeom prst="rect">
@@ -8763,7 +8745,7 @@
         </p:nvSpPr>
         <p:spPr>
           <a:xfrm>
-            <a:off x="8704436" y="25021287"/>
+            <a:off x="8704436" y="24869932"/>
             <a:ext cx="12085564" cy="15256"/>
           </a:xfrm>
           <a:prstGeom prst="rect">
@@ -8808,8 +8790,8 @@
         </p:nvSpPr>
         <p:spPr>
           <a:xfrm>
-            <a:off x="7534800" y="25233280"/>
-            <a:ext cx="13255200" cy="645563"/>
+            <a:off x="7534800" y="25081925"/>
+            <a:ext cx="13255200" cy="715060"/>
           </a:xfrm>
           <a:prstGeom prst="rect">
             <a:avLst/>
@@ -8824,23 +8806,23 @@
           <a:p>
             <a:pPr algn="l">
               <a:lnSpc>
-                <a:spcPct val="120000"/>
+                <a:spcPct val="102000"/>
               </a:lnSpc>
               <a:spcAft>
-                <a:spcPts val="992"/>
+                <a:spcPts val="623"/>
               </a:spcAft>
             </a:pPr>
             <a:r>
-              <a:rPr sz="1764" b="0" i="0">
+              <a:rPr sz="2300" b="0" i="0">
                 <a:solidFill>
                   <a:srgbClr val="12162E"/>
                 </a:solidFill>
                 <a:latin typeface="Arial"/>
               </a:rPr>
-              <a:t>Same task, three views, different behaviour and different bills — step by step. Three illustrative tasks, chosen so each view wins once; </a:t>
-            </a:r>
-            <a:r>
-              <a:rPr sz="1764" b="1" i="0">
+              <a:t>Same task, three views, different behaviour and bills — step by step. Each view wins one illustrative task; this is </a:t>
+            </a:r>
+            <a:r>
+              <a:rPr sz="2300" b="1" i="0">
                 <a:solidFill>
                   <a:srgbClr val="12162E"/>
                 </a:solidFill>
@@ -8849,7 +8831,7 @@
               <a:t>not</a:t>
             </a:r>
             <a:r>
-              <a:rPr sz="1764" b="0" i="0">
+              <a:rPr sz="2300" b="0" i="0">
                 <a:solidFill>
                   <a:srgbClr val="12162E"/>
                 </a:solidFill>
@@ -8868,7 +8850,7 @@
         </p:nvSpPr>
         <p:spPr>
           <a:xfrm>
-            <a:off x="14734800" y="25986843"/>
+            <a:off x="14734800" y="25868985"/>
             <a:ext cx="2018400" cy="216000"/>
           </a:xfrm>
           <a:prstGeom prst="rect">
@@ -8884,14 +8866,14 @@
           <a:p>
             <a:pPr algn="l">
               <a:lnSpc>
-                <a:spcPct val="120000"/>
+                <a:spcPct val="102000"/>
               </a:lnSpc>
               <a:spcAft>
                 <a:spcPts val="0"/>
               </a:spcAft>
             </a:pPr>
             <a:r>
-              <a:rPr sz="1059" b="1" i="0">
+              <a:rPr sz="1550" b="1" i="0">
                 <a:solidFill>
                   <a:srgbClr val="1F5FD6"/>
                 </a:solidFill>
@@ -8910,7 +8892,7 @@
         </p:nvSpPr>
         <p:spPr>
           <a:xfrm>
-            <a:off x="16753200" y="25986843"/>
+            <a:off x="16753200" y="25868985"/>
             <a:ext cx="2018400" cy="216000"/>
           </a:xfrm>
           <a:prstGeom prst="rect">
@@ -8926,14 +8908,14 @@
           <a:p>
             <a:pPr algn="l">
               <a:lnSpc>
-                <a:spcPct val="120000"/>
+                <a:spcPct val="102000"/>
               </a:lnSpc>
               <a:spcAft>
                 <a:spcPts val="0"/>
               </a:spcAft>
             </a:pPr>
             <a:r>
-              <a:rPr sz="1059" b="1" i="0">
+              <a:rPr sz="1550" b="1" i="0">
                 <a:solidFill>
                   <a:srgbClr val="E8720C"/>
                 </a:solidFill>
@@ -8952,7 +8934,7 @@
         </p:nvSpPr>
         <p:spPr>
           <a:xfrm>
-            <a:off x="18771600" y="25986843"/>
+            <a:off x="18771600" y="25868985"/>
             <a:ext cx="2018400" cy="216000"/>
           </a:xfrm>
           <a:prstGeom prst="rect">
@@ -8968,14 +8950,14 @@
           <a:p>
             <a:pPr algn="l">
               <a:lnSpc>
-                <a:spcPct val="120000"/>
+                <a:spcPct val="102000"/>
               </a:lnSpc>
               <a:spcAft>
                 <a:spcPts val="0"/>
               </a:spcAft>
             </a:pPr>
             <a:r>
-              <a:rPr sz="1059" b="1" i="0">
+              <a:rPr sz="1550" b="1" i="0">
                 <a:solidFill>
                   <a:srgbClr val="14855F"/>
                 </a:solidFill>
@@ -8994,7 +8976,7 @@
         </p:nvSpPr>
         <p:spPr>
           <a:xfrm>
-            <a:off x="7534800" y="26238843"/>
+            <a:off x="7534800" y="26120985"/>
             <a:ext cx="13255200" cy="10800"/>
           </a:xfrm>
           <a:prstGeom prst="rect">
@@ -9038,8 +9020,8 @@
         </p:nvSpPr>
         <p:spPr>
           <a:xfrm>
-            <a:off x="7534800" y="26328843"/>
-            <a:ext cx="6984000" cy="255684"/>
+            <a:off x="7534800" y="26210985"/>
+            <a:ext cx="6984000" cy="559612"/>
           </a:xfrm>
           <a:prstGeom prst="rect">
             <a:avLst/>
@@ -9054,14 +9036,14 @@
           <a:p>
             <a:pPr algn="l">
               <a:lnSpc>
-                <a:spcPct val="132000"/>
+                <a:spcPct val="108000"/>
               </a:lnSpc>
               <a:spcAft>
                 <a:spcPts val="0"/>
               </a:spcAft>
             </a:pPr>
             <a:r>
-              <a:rPr sz="1271" b="0" i="0">
+              <a:rPr sz="1700" b="0" i="0">
                 <a:solidFill>
                   <a:srgbClr val="12162E"/>
                 </a:solidFill>
@@ -9080,7 +9062,7 @@
         </p:nvSpPr>
         <p:spPr>
           <a:xfrm>
-            <a:off x="14734800" y="26328843"/>
+            <a:off x="14734800" y="26210985"/>
             <a:ext cx="2018400" cy="288000"/>
           </a:xfrm>
           <a:prstGeom prst="rect">
@@ -9104,7 +9086,7 @@
               <a:t>✓ </a:t>
             </a:r>
             <a:r>
-              <a:rPr sz="1271" b="0" i="0">
+              <a:rPr sz="1700" b="0" i="0">
                 <a:solidFill>
                   <a:srgbClr val="12162E"/>
                 </a:solidFill>
@@ -9113,7 +9095,7 @@
               <a:t>2 steps · </a:t>
             </a:r>
             <a:r>
-              <a:rPr sz="1271" b="1" i="0">
+              <a:rPr sz="1700" b="1" i="0">
                 <a:solidFill>
                   <a:srgbClr val="12162E"/>
                 </a:solidFill>
@@ -9132,7 +9114,7 @@
         </p:nvSpPr>
         <p:spPr>
           <a:xfrm>
-            <a:off x="16753200" y="26328843"/>
+            <a:off x="16753200" y="26210985"/>
             <a:ext cx="2018400" cy="288000"/>
           </a:xfrm>
           <a:prstGeom prst="rect">
@@ -9156,7 +9138,7 @@
               <a:t>✗ </a:t>
             </a:r>
             <a:r>
-              <a:rPr sz="1271" b="0" i="0">
+              <a:rPr sz="1700" b="0" i="0">
                 <a:solidFill>
                   <a:srgbClr val="12162E"/>
                 </a:solidFill>
@@ -9165,7 +9147,7 @@
               <a:t>21 steps · </a:t>
             </a:r>
             <a:r>
-              <a:rPr sz="1271" b="1" i="0">
+              <a:rPr sz="1700" b="1" i="0">
                 <a:solidFill>
                   <a:srgbClr val="12162E"/>
                 </a:solidFill>
@@ -9184,7 +9166,7 @@
         </p:nvSpPr>
         <p:spPr>
           <a:xfrm>
-            <a:off x="18771600" y="26328843"/>
+            <a:off x="18771600" y="26210985"/>
             <a:ext cx="2018400" cy="288000"/>
           </a:xfrm>
           <a:prstGeom prst="rect">
@@ -9208,7 +9190,7 @@
               <a:t>✓ </a:t>
             </a:r>
             <a:r>
-              <a:rPr sz="1271" b="0" i="0">
+              <a:rPr sz="1700" b="0" i="0">
                 <a:solidFill>
                   <a:srgbClr val="12162E"/>
                 </a:solidFill>
@@ -9217,7 +9199,7 @@
               <a:t>3 steps · </a:t>
             </a:r>
             <a:r>
-              <a:rPr sz="1271" b="1" i="0">
+              <a:rPr sz="1700" b="1" i="0">
                 <a:solidFill>
                   <a:srgbClr val="12162E"/>
                 </a:solidFill>
@@ -9236,7 +9218,7 @@
         </p:nvSpPr>
         <p:spPr>
           <a:xfrm>
-            <a:off x="7534800" y="26688843"/>
+            <a:off x="7534800" y="26806597"/>
             <a:ext cx="13255200" cy="10800"/>
           </a:xfrm>
           <a:prstGeom prst="rect">
@@ -9280,8 +9262,8 @@
         </p:nvSpPr>
         <p:spPr>
           <a:xfrm>
-            <a:off x="7534800" y="26724843"/>
-            <a:ext cx="6984000" cy="511369"/>
+            <a:off x="7534800" y="26842597"/>
+            <a:ext cx="6984000" cy="559612"/>
           </a:xfrm>
           <a:prstGeom prst="rect">
             <a:avLst/>
@@ -9296,14 +9278,14 @@
           <a:p>
             <a:pPr algn="l">
               <a:lnSpc>
-                <a:spcPct val="132000"/>
+                <a:spcPct val="108000"/>
               </a:lnSpc>
               <a:spcAft>
                 <a:spcPts val="0"/>
               </a:spcAft>
             </a:pPr>
             <a:r>
-              <a:rPr sz="1271" b="0" i="0">
+              <a:rPr sz="1700" b="0" i="0">
                 <a:solidFill>
                   <a:srgbClr val="12162E"/>
                 </a:solidFill>
@@ -9322,7 +9304,7 @@
         </p:nvSpPr>
         <p:spPr>
           <a:xfrm>
-            <a:off x="14734800" y="26724843"/>
+            <a:off x="14734800" y="26842597"/>
             <a:ext cx="2018400" cy="288000"/>
           </a:xfrm>
           <a:prstGeom prst="rect">
@@ -9346,7 +9328,7 @@
               <a:t>✗ </a:t>
             </a:r>
             <a:r>
-              <a:rPr sz="1271" b="0" i="0">
+              <a:rPr sz="1700" b="0" i="0">
                 <a:solidFill>
                   <a:srgbClr val="12162E"/>
                 </a:solidFill>
@@ -9355,7 +9337,7 @@
               <a:t>30 steps · </a:t>
             </a:r>
             <a:r>
-              <a:rPr sz="1271" b="1" i="0">
+              <a:rPr sz="1700" b="1" i="0">
                 <a:solidFill>
                   <a:srgbClr val="12162E"/>
                 </a:solidFill>
@@ -9374,7 +9356,7 @@
         </p:nvSpPr>
         <p:spPr>
           <a:xfrm>
-            <a:off x="16753200" y="26724843"/>
+            <a:off x="16753200" y="26842597"/>
             <a:ext cx="2018400" cy="288000"/>
           </a:xfrm>
           <a:prstGeom prst="rect">
@@ -9398,7 +9380,7 @@
               <a:t>✓ </a:t>
             </a:r>
             <a:r>
-              <a:rPr sz="1271" b="0" i="0">
+              <a:rPr sz="1700" b="0" i="0">
                 <a:solidFill>
                   <a:srgbClr val="12162E"/>
                 </a:solidFill>
@@ -9407,7 +9389,7 @@
               <a:t>9 steps · </a:t>
             </a:r>
             <a:r>
-              <a:rPr sz="1271" b="1" i="0">
+              <a:rPr sz="1700" b="1" i="0">
                 <a:solidFill>
                   <a:srgbClr val="12162E"/>
                 </a:solidFill>
@@ -9426,7 +9408,7 @@
         </p:nvSpPr>
         <p:spPr>
           <a:xfrm>
-            <a:off x="18771600" y="26724843"/>
+            <a:off x="18771600" y="26842597"/>
             <a:ext cx="2018400" cy="288000"/>
           </a:xfrm>
           <a:prstGeom prst="rect">
@@ -9450,7 +9432,7 @@
               <a:t>✗ </a:t>
             </a:r>
             <a:r>
-              <a:rPr sz="1271" b="0" i="0">
+              <a:rPr sz="1700" b="0" i="0">
                 <a:solidFill>
                   <a:srgbClr val="12162E"/>
                 </a:solidFill>
@@ -9459,7 +9441,7 @@
               <a:t>6 steps · </a:t>
             </a:r>
             <a:r>
-              <a:rPr sz="1271" b="1" i="0">
+              <a:rPr sz="1700" b="1" i="0">
                 <a:solidFill>
                   <a:srgbClr val="12162E"/>
                 </a:solidFill>
@@ -9478,7 +9460,7 @@
         </p:nvSpPr>
         <p:spPr>
           <a:xfrm>
-            <a:off x="7534800" y="27308212"/>
+            <a:off x="7534800" y="27438209"/>
             <a:ext cx="13255200" cy="10800"/>
           </a:xfrm>
           <a:prstGeom prst="rect">
@@ -9522,8 +9504,8 @@
         </p:nvSpPr>
         <p:spPr>
           <a:xfrm>
-            <a:off x="7534800" y="27344212"/>
-            <a:ext cx="6984000" cy="255684"/>
+            <a:off x="7534800" y="27474209"/>
+            <a:ext cx="6984000" cy="279806"/>
           </a:xfrm>
           <a:prstGeom prst="rect">
             <a:avLst/>
@@ -9538,14 +9520,14 @@
           <a:p>
             <a:pPr algn="l">
               <a:lnSpc>
-                <a:spcPct val="132000"/>
+                <a:spcPct val="108000"/>
               </a:lnSpc>
               <a:spcAft>
                 <a:spcPts val="0"/>
               </a:spcAft>
             </a:pPr>
             <a:r>
-              <a:rPr sz="1271" b="0" i="0">
+              <a:rPr sz="1700" b="0" i="0">
                 <a:solidFill>
                   <a:srgbClr val="12162E"/>
                 </a:solidFill>
@@ -9564,7 +9546,7 @@
         </p:nvSpPr>
         <p:spPr>
           <a:xfrm>
-            <a:off x="14734800" y="27344212"/>
+            <a:off x="14734800" y="27474209"/>
             <a:ext cx="2018400" cy="288000"/>
           </a:xfrm>
           <a:prstGeom prst="rect">
@@ -9588,7 +9570,7 @@
               <a:t>✗ </a:t>
             </a:r>
             <a:r>
-              <a:rPr sz="1271" b="0" i="0">
+              <a:rPr sz="1700" b="0" i="0">
                 <a:solidFill>
                   <a:srgbClr val="12162E"/>
                 </a:solidFill>
@@ -9597,7 +9579,7 @@
               <a:t>19 steps · </a:t>
             </a:r>
             <a:r>
-              <a:rPr sz="1271" b="1" i="0">
+              <a:rPr sz="1700" b="1" i="0">
                 <a:solidFill>
                   <a:srgbClr val="12162E"/>
                 </a:solidFill>
@@ -9616,7 +9598,7 @@
         </p:nvSpPr>
         <p:spPr>
           <a:xfrm>
-            <a:off x="16753200" y="27344212"/>
+            <a:off x="16753200" y="27474209"/>
             <a:ext cx="2018400" cy="288000"/>
           </a:xfrm>
           <a:prstGeom prst="rect">
@@ -9640,7 +9622,7 @@
               <a:t>✗ </a:t>
             </a:r>
             <a:r>
-              <a:rPr sz="1271" b="0" i="0">
+              <a:rPr sz="1700" b="0" i="0">
                 <a:solidFill>
                   <a:srgbClr val="12162E"/>
                 </a:solidFill>
@@ -9649,7 +9631,7 @@
               <a:t>6 steps · </a:t>
             </a:r>
             <a:r>
-              <a:rPr sz="1271" b="1" i="0">
+              <a:rPr sz="1700" b="1" i="0">
                 <a:solidFill>
                   <a:srgbClr val="12162E"/>
                 </a:solidFill>
@@ -9668,7 +9650,7 @@
         </p:nvSpPr>
         <p:spPr>
           <a:xfrm>
-            <a:off x="18771600" y="27344212"/>
+            <a:off x="18771600" y="27474209"/>
             <a:ext cx="2018400" cy="288000"/>
           </a:xfrm>
           <a:prstGeom prst="rect">
@@ -9692,7 +9674,7 @@
               <a:t>✓ </a:t>
             </a:r>
             <a:r>
-              <a:rPr sz="1271" b="0" i="0">
+              <a:rPr sz="1700" b="0" i="0">
                 <a:solidFill>
                   <a:srgbClr val="12162E"/>
                 </a:solidFill>
@@ -9701,7 +9683,7 @@
               <a:t>7 steps · </a:t>
             </a:r>
             <a:r>
-              <a:rPr sz="1271" b="1" i="0">
+              <a:rPr sz="1700" b="1" i="0">
                 <a:solidFill>
                   <a:srgbClr val="12162E"/>
                 </a:solidFill>
@@ -9720,7 +9702,7 @@
         </p:nvSpPr>
         <p:spPr>
           <a:xfrm>
-            <a:off x="7534800" y="27704212"/>
+            <a:off x="7534800" y="27798209"/>
             <a:ext cx="13255200" cy="10800"/>
           </a:xfrm>
           <a:prstGeom prst="rect">
@@ -9764,8 +9746,8 @@
         </p:nvSpPr>
         <p:spPr>
           <a:xfrm>
-            <a:off x="7534800" y="27776212"/>
-            <a:ext cx="13255200" cy="255684"/>
+            <a:off x="7534800" y="27870209"/>
+            <a:ext cx="13255200" cy="279806"/>
           </a:xfrm>
           <a:prstGeom prst="rect">
             <a:avLst/>
@@ -9780,20 +9762,20 @@
           <a:p>
             <a:pPr algn="l">
               <a:lnSpc>
-                <a:spcPct val="132000"/>
+                <a:spcPct val="108000"/>
               </a:lnSpc>
               <a:spcAft>
                 <a:spcPts val="425"/>
               </a:spcAft>
             </a:pPr>
             <a:r>
-              <a:rPr sz="1271" b="0" i="0">
+              <a:rPr sz="1700" b="0" i="0">
                 <a:solidFill>
                   <a:srgbClr val="5D6787"/>
                 </a:solidFill>
                 <a:latin typeface="Arial"/>
               </a:rPr>
-              <a:t>One recorded attempt per view, B0 · classifieds. Every ✓ / ✗ came out the same on an independent rerun; steps and bill differ run to run.</a:t>
+              <a:t>One recorded attempt per view, B0 · classifieds. ✓ / ✗ repeated independently; steps and bill vary between runs.</a:t>
             </a:r>
           </a:p>
         </p:txBody>
